--- a/Microservices/07.1. Scalability.pptx
+++ b/Microservices/07.1. Scalability.pptx
@@ -5,7 +5,7 @@
     <p:sldMasterId id="2147483708" r:id="rId1"/>
   </p:sldMasterIdLst>
   <p:notesMasterIdLst>
-    <p:notesMasterId r:id="rId43"/>
+    <p:notesMasterId r:id="rId45"/>
   </p:notesMasterIdLst>
   <p:sldIdLst>
     <p:sldId id="670" r:id="rId2"/>
@@ -20,35 +20,37 @@
     <p:sldId id="655" r:id="rId11"/>
     <p:sldId id="751" r:id="rId12"/>
     <p:sldId id="616" r:id="rId13"/>
-    <p:sldId id="717" r:id="rId14"/>
-    <p:sldId id="724" r:id="rId15"/>
-    <p:sldId id="740" r:id="rId16"/>
-    <p:sldId id="741" r:id="rId17"/>
-    <p:sldId id="742" r:id="rId18"/>
-    <p:sldId id="743" r:id="rId19"/>
-    <p:sldId id="744" r:id="rId20"/>
-    <p:sldId id="745" r:id="rId21"/>
-    <p:sldId id="746" r:id="rId22"/>
-    <p:sldId id="747" r:id="rId23"/>
-    <p:sldId id="748" r:id="rId24"/>
-    <p:sldId id="749" r:id="rId25"/>
-    <p:sldId id="736" r:id="rId26"/>
-    <p:sldId id="668" r:id="rId27"/>
-    <p:sldId id="739" r:id="rId28"/>
-    <p:sldId id="669" r:id="rId29"/>
-    <p:sldId id="636" r:id="rId30"/>
-    <p:sldId id="750" r:id="rId31"/>
-    <p:sldId id="730" r:id="rId32"/>
-    <p:sldId id="726" r:id="rId33"/>
-    <p:sldId id="729" r:id="rId34"/>
-    <p:sldId id="731" r:id="rId35"/>
-    <p:sldId id="621" r:id="rId36"/>
-    <p:sldId id="732" r:id="rId37"/>
-    <p:sldId id="734" r:id="rId38"/>
-    <p:sldId id="735" r:id="rId39"/>
-    <p:sldId id="733" r:id="rId40"/>
-    <p:sldId id="624" r:id="rId41"/>
-    <p:sldId id="516" r:id="rId42"/>
+    <p:sldId id="753" r:id="rId14"/>
+    <p:sldId id="752" r:id="rId15"/>
+    <p:sldId id="717" r:id="rId16"/>
+    <p:sldId id="724" r:id="rId17"/>
+    <p:sldId id="740" r:id="rId18"/>
+    <p:sldId id="741" r:id="rId19"/>
+    <p:sldId id="742" r:id="rId20"/>
+    <p:sldId id="743" r:id="rId21"/>
+    <p:sldId id="744" r:id="rId22"/>
+    <p:sldId id="745" r:id="rId23"/>
+    <p:sldId id="746" r:id="rId24"/>
+    <p:sldId id="747" r:id="rId25"/>
+    <p:sldId id="748" r:id="rId26"/>
+    <p:sldId id="749" r:id="rId27"/>
+    <p:sldId id="736" r:id="rId28"/>
+    <p:sldId id="668" r:id="rId29"/>
+    <p:sldId id="739" r:id="rId30"/>
+    <p:sldId id="669" r:id="rId31"/>
+    <p:sldId id="636" r:id="rId32"/>
+    <p:sldId id="750" r:id="rId33"/>
+    <p:sldId id="730" r:id="rId34"/>
+    <p:sldId id="726" r:id="rId35"/>
+    <p:sldId id="729" r:id="rId36"/>
+    <p:sldId id="731" r:id="rId37"/>
+    <p:sldId id="621" r:id="rId38"/>
+    <p:sldId id="732" r:id="rId39"/>
+    <p:sldId id="734" r:id="rId40"/>
+    <p:sldId id="735" r:id="rId41"/>
+    <p:sldId id="733" r:id="rId42"/>
+    <p:sldId id="624" r:id="rId43"/>
+    <p:sldId id="516" r:id="rId44"/>
   </p:sldIdLst>
   <p:sldSz cx="9144000" cy="6858000" type="screen4x3"/>
   <p:notesSz cx="6858000" cy="9144000"/>
@@ -263,7 +265,7 @@
             <a:fld id="{2F0940CE-BE1D-4C40-AF8B-3898A4D1F5EC}" type="datetimeFigureOut">
               <a:rPr lang="en-US" smtClean="0"/>
               <a:pPr/>
-              <a:t>2/27/2026</a:t>
+              <a:t>6/9/2026</a:t>
             </a:fld>
             <a:endParaRPr lang="en-US"/>
           </a:p>
@@ -802,7 +804,7 @@
               <a:pPr>
                 <a:defRPr/>
               </a:pPr>
-              <a:t>2/27/2026</a:t>
+              <a:t>6/9/2026</a:t>
             </a:fld>
             <a:endParaRPr lang="en-US"/>
           </a:p>
@@ -994,7 +996,7 @@
               <a:pPr>
                 <a:defRPr/>
               </a:pPr>
-              <a:t>2/27/2026</a:t>
+              <a:t>6/9/2026</a:t>
             </a:fld>
             <a:endParaRPr lang="en-US"/>
           </a:p>
@@ -1196,7 +1198,7 @@
               <a:pPr>
                 <a:defRPr/>
               </a:pPr>
-              <a:t>2/27/2026</a:t>
+              <a:t>6/9/2026</a:t>
             </a:fld>
             <a:endParaRPr lang="en-US"/>
           </a:p>
@@ -1388,7 +1390,7 @@
               <a:pPr>
                 <a:defRPr/>
               </a:pPr>
-              <a:t>2/27/2026</a:t>
+              <a:t>6/9/2026</a:t>
             </a:fld>
             <a:endParaRPr lang="en-US"/>
           </a:p>
@@ -1656,7 +1658,7 @@
               <a:pPr>
                 <a:defRPr/>
               </a:pPr>
-              <a:t>2/27/2026</a:t>
+              <a:t>6/9/2026</a:t>
             </a:fld>
             <a:endParaRPr lang="en-US"/>
           </a:p>
@@ -1966,7 +1968,7 @@
               <a:pPr>
                 <a:defRPr/>
               </a:pPr>
-              <a:t>2/27/2026</a:t>
+              <a:t>6/9/2026</a:t>
             </a:fld>
             <a:endParaRPr lang="en-US"/>
           </a:p>
@@ -2410,7 +2412,7 @@
               <a:pPr>
                 <a:defRPr/>
               </a:pPr>
-              <a:t>2/27/2026</a:t>
+              <a:t>6/9/2026</a:t>
             </a:fld>
             <a:endParaRPr lang="en-US"/>
           </a:p>
@@ -2550,7 +2552,7 @@
               <a:pPr>
                 <a:defRPr/>
               </a:pPr>
-              <a:t>2/27/2026</a:t>
+              <a:t>6/9/2026</a:t>
             </a:fld>
             <a:endParaRPr lang="en-US"/>
           </a:p>
@@ -2667,7 +2669,7 @@
               <a:pPr>
                 <a:defRPr/>
               </a:pPr>
-              <a:t>2/27/2026</a:t>
+              <a:t>6/9/2026</a:t>
             </a:fld>
             <a:endParaRPr lang="en-US"/>
           </a:p>
@@ -2966,7 +2968,7 @@
               <a:pPr>
                 <a:defRPr/>
               </a:pPr>
-              <a:t>2/27/2026</a:t>
+              <a:t>6/9/2026</a:t>
             </a:fld>
             <a:endParaRPr lang="en-US"/>
           </a:p>
@@ -3244,7 +3246,7 @@
               <a:pPr>
                 <a:defRPr/>
               </a:pPr>
-              <a:t>2/27/2026</a:t>
+              <a:t>6/9/2026</a:t>
             </a:fld>
             <a:endParaRPr lang="en-US"/>
           </a:p>
@@ -3492,7 +3494,7 @@
               <a:pPr>
                 <a:defRPr/>
               </a:pPr>
-              <a:t>2/27/2026</a:t>
+              <a:t>6/9/2026</a:t>
             </a:fld>
             <a:endParaRPr lang="en-US"/>
           </a:p>
@@ -4611,9 +4613,14 @@
           <a:bodyPr/>
           <a:lstStyle/>
           <a:p>
+            <a:pPr algn="l"/>
             <a:r>
               <a:rPr lang="en-US" dirty="0" smtClean="0"/>
-              <a:t>Scaling Out Guidelines (I) [2]</a:t>
+              <a:t>1. Install k6 on </a:t>
+            </a:r>
+            <a:r>
+              <a:rPr lang="en-US" smtClean="0"/>
+              <a:t>macOS</a:t>
             </a:r>
             <a:endParaRPr lang="en-US" dirty="0"/>
           </a:p>
@@ -4635,109 +4642,78 @@
           <a:lstStyle/>
           <a:p>
             <a:r>
-              <a:rPr lang="en-US" sz="2000" i="1" dirty="0" smtClean="0">
-                <a:solidFill>
-                  <a:srgbClr val="C00000"/>
-                </a:solidFill>
-              </a:rPr>
-              <a:t>Statelessness</a:t>
-            </a:r>
-            <a:r>
-              <a:rPr lang="en-US" sz="2000" dirty="0" smtClean="0"/>
-              <a:t> means that each </a:t>
-            </a:r>
-            <a:r>
-              <a:rPr lang="en-US" sz="2000" u="sng" dirty="0" smtClean="0"/>
-              <a:t>transaction can be handled by one instance as well as any other</a:t>
-            </a:r>
-            <a:r>
-              <a:rPr lang="en-US" sz="2000" dirty="0" smtClean="0"/>
-              <a:t>; a user may transact with dozens of different instances during a single session, without ever knowing it.</a:t>
-            </a:r>
-          </a:p>
-          <a:p>
-            <a:r>
-              <a:rPr lang="en-US" sz="2000" dirty="0" smtClean="0"/>
-              <a:t>Design the application to </a:t>
-            </a:r>
-            <a:r>
-              <a:rPr lang="en-US" sz="2000" i="1" dirty="0" smtClean="0">
-                <a:solidFill>
-                  <a:srgbClr val="C00000"/>
-                </a:solidFill>
-              </a:rPr>
-              <a:t>run in a stateless fashion</a:t>
-            </a:r>
-            <a:r>
-              <a:rPr lang="en-US" sz="2000" dirty="0" smtClean="0"/>
-              <a:t>, with any necessary user and </a:t>
-            </a:r>
-            <a:r>
-              <a:rPr lang="en-US" sz="2000" i="1" dirty="0" smtClean="0">
-                <a:solidFill>
-                  <a:srgbClr val="C00000"/>
-                </a:solidFill>
-              </a:rPr>
-              <a:t>session data</a:t>
-            </a:r>
-            <a:r>
-              <a:rPr lang="en-US" sz="2000" dirty="0" smtClean="0"/>
-              <a:t> stored either </a:t>
-            </a:r>
-            <a:r>
-              <a:rPr lang="en-US" sz="2000" u="sng" dirty="0" smtClean="0"/>
-              <a:t>on the client side</a:t>
-            </a:r>
-            <a:r>
-              <a:rPr lang="en-US" sz="2000" dirty="0" smtClean="0"/>
-              <a:t>, or in a </a:t>
-            </a:r>
-            <a:r>
-              <a:rPr lang="en-US" sz="2000" u="sng" dirty="0" smtClean="0"/>
-              <a:t>distributed store</a:t>
-            </a:r>
-            <a:r>
-              <a:rPr lang="en-US" sz="2000" dirty="0" smtClean="0"/>
-              <a:t> that's accessible to any application instance.</a:t>
-            </a:r>
-          </a:p>
-          <a:p>
-            <a:endParaRPr lang="en-US" sz="2000" dirty="0"/>
-          </a:p>
-        </p:txBody>
-      </p:sp>
-      <p:pic>
-        <p:nvPicPr>
-          <p:cNvPr id="4" name="Picture 3"/>
-          <p:cNvPicPr>
-            <a:picLocks noChangeAspect="1" noChangeArrowheads="1"/>
-          </p:cNvPicPr>
-          <p:nvPr/>
-        </p:nvPicPr>
-        <p:blipFill>
-          <a:blip r:embed="rId2" cstate="print"/>
-          <a:srcRect/>
-          <a:stretch>
-            <a:fillRect/>
-          </a:stretch>
-        </p:blipFill>
-        <p:spPr bwMode="auto">
-          <a:xfrm>
-            <a:off x="2667000" y="4114800"/>
-            <a:ext cx="3990975" cy="1619250"/>
-          </a:xfrm>
-          <a:prstGeom prst="rect">
-            <a:avLst/>
-          </a:prstGeom>
-          <a:noFill/>
-          <a:ln w="9525">
-            <a:noFill/>
-            <a:miter lim="800000"/>
-            <a:headEnd/>
-            <a:tailEnd/>
-          </a:ln>
-        </p:spPr>
-      </p:pic>
+              <a:rPr lang="en-US" dirty="0" smtClean="0">
+                <a:hlinkClick r:id="rId2"/>
+              </a:rPr>
+              <a:t>https://grafana.com/pricing/?</a:t>
+            </a:r>
+            <a:r>
+              <a:rPr lang="en-US" dirty="0" smtClean="0">
+                <a:hlinkClick r:id="rId2"/>
+              </a:rPr>
+              <a:t>src=k6io#k6-performance-testing</a:t>
+            </a:r>
+            <a:endParaRPr lang="en-US" dirty="0" smtClean="0"/>
+          </a:p>
+          <a:p>
+            <a:r>
+              <a:rPr lang="en-US" dirty="0" smtClean="0"/>
+              <a:t>brew </a:t>
+            </a:r>
+            <a:r>
+              <a:rPr lang="en-US" dirty="0" smtClean="0"/>
+              <a:t>install </a:t>
+            </a:r>
+            <a:r>
+              <a:rPr lang="en-US" dirty="0" smtClean="0"/>
+              <a:t>k6</a:t>
+            </a:r>
+          </a:p>
+          <a:p>
+            <a:r>
+              <a:rPr lang="en-US" dirty="0" smtClean="0"/>
+              <a:t># Go to </a:t>
+            </a:r>
+            <a:r>
+              <a:rPr lang="en-US" dirty="0" smtClean="0">
+                <a:hlinkClick r:id="rId3"/>
+              </a:rPr>
+              <a:t>https://</a:t>
+            </a:r>
+            <a:r>
+              <a:rPr lang="en-US" dirty="0" smtClean="0">
+                <a:hlinkClick r:id="rId3"/>
+              </a:rPr>
+              <a:t>grafana.com</a:t>
+            </a:r>
+            <a:r>
+              <a:rPr lang="en-US" dirty="0" smtClean="0"/>
+              <a:t> &gt; My Account to find a stack.</a:t>
+            </a:r>
+          </a:p>
+          <a:p>
+            <a:r>
+              <a:rPr lang="en-US" dirty="0" smtClean="0"/>
+              <a:t>k6 cloud login --token </a:t>
+            </a:r>
+            <a:r>
+              <a:rPr lang="en-US" dirty="0" smtClean="0"/>
+              <a:t>7e8f7f6 </a:t>
+            </a:r>
+            <a:r>
+              <a:rPr lang="en-US" dirty="0" smtClean="0"/>
+              <a:t>--stack </a:t>
+            </a:r>
+            <a:r>
+              <a:rPr lang="en-US" dirty="0" smtClean="0"/>
+              <a:t>valiantgranola1655</a:t>
+            </a:r>
+          </a:p>
+          <a:p>
+            <a:endParaRPr lang="en-US" dirty="0"/>
+          </a:p>
+        </p:txBody>
+      </p:sp>
     </p:spTree>
   </p:cSld>
   <p:clrMapOvr>
@@ -4747,191 +4723,6 @@
 </file>
 
 <file path=ppt/slides/slide14.xml><?xml version="1.0" encoding="utf-8"?>
-<p:sld xmlns:a="http://schemas.openxmlformats.org/drawingml/2006/main" xmlns:r="http://schemas.openxmlformats.org/officeDocument/2006/relationships" xmlns:p="http://schemas.openxmlformats.org/presentationml/2006/main">
-  <p:cSld>
-    <p:spTree>
-      <p:nvGrpSpPr>
-        <p:cNvPr id="1" name=""/>
-        <p:cNvGrpSpPr/>
-        <p:nvPr/>
-      </p:nvGrpSpPr>
-      <p:grpSpPr>
-        <a:xfrm>
-          <a:off x="0" y="0"/>
-          <a:ext cx="0" cy="0"/>
-          <a:chOff x="0" y="0"/>
-          <a:chExt cx="0" cy="0"/>
-        </a:xfrm>
-      </p:grpSpPr>
-      <p:sp>
-        <p:nvSpPr>
-          <p:cNvPr id="2" name="Title 1"/>
-          <p:cNvSpPr>
-            <a:spLocks noGrp="1"/>
-          </p:cNvSpPr>
-          <p:nvPr>
-            <p:ph type="title"/>
-          </p:nvPr>
-        </p:nvSpPr>
-        <p:spPr/>
-        <p:txBody>
-          <a:bodyPr/>
-          <a:lstStyle/>
-          <a:p>
-            <a:r>
-              <a:rPr lang="en-US" dirty="0" smtClean="0"/>
-              <a:t>Scaling Out Guidelines (II)</a:t>
-            </a:r>
-            <a:endParaRPr lang="en-US" dirty="0"/>
-          </a:p>
-        </p:txBody>
-      </p:sp>
-      <p:sp>
-        <p:nvSpPr>
-          <p:cNvPr id="3" name="Content Placeholder 2"/>
-          <p:cNvSpPr>
-            <a:spLocks noGrp="1"/>
-          </p:cNvSpPr>
-          <p:nvPr>
-            <p:ph idx="1"/>
-          </p:nvPr>
-        </p:nvSpPr>
-        <p:spPr/>
-        <p:txBody>
-          <a:bodyPr/>
-          <a:lstStyle/>
-          <a:p>
-            <a:r>
-              <a:rPr lang="en-US" sz="2000" dirty="0" smtClean="0"/>
-              <a:t>Design the application to </a:t>
-            </a:r>
-            <a:r>
-              <a:rPr lang="en-US" sz="2000" i="1" dirty="0" smtClean="0">
-                <a:solidFill>
-                  <a:srgbClr val="C00000"/>
-                </a:solidFill>
-              </a:rPr>
-              <a:t>conduct I/O operations asynchronously</a:t>
-            </a:r>
-            <a:r>
-              <a:rPr lang="en-US" sz="2000" dirty="0" smtClean="0"/>
-              <a:t>, so that the application can perform useful work while waiting for input and output to complete.</a:t>
-            </a:r>
-          </a:p>
-          <a:p>
-            <a:r>
-              <a:rPr lang="en-US" sz="2000" i="1" dirty="0" smtClean="0">
-                <a:solidFill>
-                  <a:srgbClr val="C00000"/>
-                </a:solidFill>
-              </a:rPr>
-              <a:t>Pool resources</a:t>
-            </a:r>
-            <a:r>
-              <a:rPr lang="en-US" sz="2000" dirty="0" smtClean="0"/>
-              <a:t> such as </a:t>
-            </a:r>
-            <a:r>
-              <a:rPr lang="en-US" sz="2000" u="sng" dirty="0" smtClean="0"/>
-              <a:t>threads</a:t>
-            </a:r>
-            <a:r>
-              <a:rPr lang="en-US" sz="2000" dirty="0" smtClean="0"/>
-              <a:t>, </a:t>
-            </a:r>
-            <a:r>
-              <a:rPr lang="en-US" sz="2000" u="sng" dirty="0" smtClean="0"/>
-              <a:t>network connections</a:t>
-            </a:r>
-            <a:r>
-              <a:rPr lang="en-US" sz="2000" dirty="0" smtClean="0"/>
-              <a:t>, and </a:t>
-            </a:r>
-            <a:r>
-              <a:rPr lang="en-US" sz="2000" u="sng" dirty="0" smtClean="0"/>
-              <a:t>database connections</a:t>
-            </a:r>
-            <a:r>
-              <a:rPr lang="en-US" sz="2000" dirty="0" smtClean="0"/>
-              <a:t>; this helps maximize your computing resources, and it improves your ability to predict resource usage.</a:t>
-            </a:r>
-          </a:p>
-          <a:p>
-            <a:r>
-              <a:rPr lang="en-US" sz="2000" dirty="0" smtClean="0"/>
-              <a:t>Write your database operations in such a way as to </a:t>
-            </a:r>
-            <a:r>
-              <a:rPr lang="en-US" sz="2000" i="1" dirty="0" smtClean="0">
-                <a:solidFill>
-                  <a:srgbClr val="C00000"/>
-                </a:solidFill>
-              </a:rPr>
-              <a:t>maximize concurrency</a:t>
-            </a:r>
-            <a:r>
-              <a:rPr lang="en-US" sz="2000" dirty="0" smtClean="0"/>
-              <a:t> and </a:t>
-            </a:r>
-            <a:r>
-              <a:rPr lang="en-US" sz="2000" i="1" dirty="0" smtClean="0">
-                <a:solidFill>
-                  <a:srgbClr val="C00000"/>
-                </a:solidFill>
-              </a:rPr>
-              <a:t>minimize exclusive locking</a:t>
-            </a:r>
-            <a:r>
-              <a:rPr lang="en-US" sz="2000" dirty="0" smtClean="0"/>
-              <a:t>. For example, don't lock records when performing read-only operations.</a:t>
-            </a:r>
-          </a:p>
-          <a:p>
-            <a:endParaRPr lang="en-US" sz="2000" dirty="0"/>
-          </a:p>
-        </p:txBody>
-      </p:sp>
-      <p:pic>
-        <p:nvPicPr>
-          <p:cNvPr id="4" name="Picture 3"/>
-          <p:cNvPicPr>
-            <a:picLocks noChangeAspect="1" noChangeArrowheads="1"/>
-          </p:cNvPicPr>
-          <p:nvPr/>
-        </p:nvPicPr>
-        <p:blipFill>
-          <a:blip r:embed="rId2" cstate="print"/>
-          <a:srcRect/>
-          <a:stretch>
-            <a:fillRect/>
-          </a:stretch>
-        </p:blipFill>
-        <p:spPr bwMode="auto">
-          <a:xfrm>
-            <a:off x="2667000" y="4800600"/>
-            <a:ext cx="3990975" cy="1619250"/>
-          </a:xfrm>
-          <a:prstGeom prst="rect">
-            <a:avLst/>
-          </a:prstGeom>
-          <a:noFill/>
-          <a:ln w="9525">
-            <a:noFill/>
-            <a:miter lim="800000"/>
-            <a:headEnd/>
-            <a:tailEnd/>
-          </a:ln>
-        </p:spPr>
-      </p:pic>
-    </p:spTree>
-  </p:cSld>
-  <p:clrMapOvr>
-    <a:masterClrMapping/>
-  </p:clrMapOvr>
-</p:sld>
-</file>
-
-<file path=ppt/slides/slide15.xml><?xml version="1.0" encoding="utf-8"?>
 <p:sld xmlns:a="http://schemas.openxmlformats.org/drawingml/2006/main" xmlns:r="http://schemas.openxmlformats.org/officeDocument/2006/relationships" xmlns:p="http://schemas.openxmlformats.org/presentationml/2006/main">
   <p:cSld>
     <p:spTree>
@@ -4982,6 +4773,173 @@
 </p:sld>
 </file>
 
+<file path=ppt/slides/slide15.xml><?xml version="1.0" encoding="utf-8"?>
+<p:sld xmlns:a="http://schemas.openxmlformats.org/drawingml/2006/main" xmlns:r="http://schemas.openxmlformats.org/officeDocument/2006/relationships" xmlns:p="http://schemas.openxmlformats.org/presentationml/2006/main">
+  <p:cSld>
+    <p:spTree>
+      <p:nvGrpSpPr>
+        <p:cNvPr id="1" name=""/>
+        <p:cNvGrpSpPr/>
+        <p:nvPr/>
+      </p:nvGrpSpPr>
+      <p:grpSpPr>
+        <a:xfrm>
+          <a:off x="0" y="0"/>
+          <a:ext cx="0" cy="0"/>
+          <a:chOff x="0" y="0"/>
+          <a:chExt cx="0" cy="0"/>
+        </a:xfrm>
+      </p:grpSpPr>
+      <p:sp>
+        <p:nvSpPr>
+          <p:cNvPr id="2" name="Title 1"/>
+          <p:cNvSpPr>
+            <a:spLocks noGrp="1"/>
+          </p:cNvSpPr>
+          <p:nvPr>
+            <p:ph type="title"/>
+          </p:nvPr>
+        </p:nvSpPr>
+        <p:spPr/>
+        <p:txBody>
+          <a:bodyPr/>
+          <a:lstStyle/>
+          <a:p>
+            <a:r>
+              <a:rPr lang="en-US" dirty="0" smtClean="0"/>
+              <a:t>Scaling Out Guidelines (I) [2]</a:t>
+            </a:r>
+            <a:endParaRPr lang="en-US" dirty="0"/>
+          </a:p>
+        </p:txBody>
+      </p:sp>
+      <p:sp>
+        <p:nvSpPr>
+          <p:cNvPr id="3" name="Content Placeholder 2"/>
+          <p:cNvSpPr>
+            <a:spLocks noGrp="1"/>
+          </p:cNvSpPr>
+          <p:nvPr>
+            <p:ph idx="1"/>
+          </p:nvPr>
+        </p:nvSpPr>
+        <p:spPr/>
+        <p:txBody>
+          <a:bodyPr/>
+          <a:lstStyle/>
+          <a:p>
+            <a:r>
+              <a:rPr lang="en-US" sz="2000" i="1" dirty="0" smtClean="0">
+                <a:solidFill>
+                  <a:srgbClr val="C00000"/>
+                </a:solidFill>
+              </a:rPr>
+              <a:t>Statelessness</a:t>
+            </a:r>
+            <a:r>
+              <a:rPr lang="en-US" sz="2000" dirty="0" smtClean="0"/>
+              <a:t> means that each </a:t>
+            </a:r>
+            <a:r>
+              <a:rPr lang="en-US" sz="2000" u="sng" dirty="0" smtClean="0"/>
+              <a:t>transaction can be handled by one instance as well as any other</a:t>
+            </a:r>
+            <a:r>
+              <a:rPr lang="en-US" sz="2000" dirty="0" smtClean="0"/>
+              <a:t>; a user may transact with dozens of different instances during a single session, without ever knowing it.</a:t>
+            </a:r>
+          </a:p>
+          <a:p>
+            <a:r>
+              <a:rPr lang="en-US" sz="2000" dirty="0" smtClean="0"/>
+              <a:t>Design the application to </a:t>
+            </a:r>
+            <a:r>
+              <a:rPr lang="en-US" sz="2000" i="1" dirty="0" smtClean="0">
+                <a:solidFill>
+                  <a:srgbClr val="C00000"/>
+                </a:solidFill>
+              </a:rPr>
+              <a:t>run in a stateless fashion</a:t>
+            </a:r>
+            <a:r>
+              <a:rPr lang="en-US" sz="2000" dirty="0" smtClean="0"/>
+              <a:t>, with any necessary user and </a:t>
+            </a:r>
+            <a:r>
+              <a:rPr lang="en-US" sz="2000" i="1" dirty="0" smtClean="0">
+                <a:solidFill>
+                  <a:srgbClr val="C00000"/>
+                </a:solidFill>
+              </a:rPr>
+              <a:t>session data</a:t>
+            </a:r>
+            <a:r>
+              <a:rPr lang="en-US" sz="2000" dirty="0" smtClean="0"/>
+              <a:t> stored either </a:t>
+            </a:r>
+            <a:r>
+              <a:rPr lang="en-US" sz="2000" u="sng" dirty="0" smtClean="0"/>
+              <a:t>on the client side</a:t>
+            </a:r>
+            <a:r>
+              <a:rPr lang="en-US" sz="2000" dirty="0" smtClean="0"/>
+              <a:t>, or in a </a:t>
+            </a:r>
+            <a:r>
+              <a:rPr lang="en-US" sz="2000" u="sng" dirty="0" smtClean="0"/>
+              <a:t>distributed store</a:t>
+            </a:r>
+            <a:r>
+              <a:rPr lang="en-US" sz="2000" dirty="0" smtClean="0"/>
+              <a:t> that's accessible to any application instance.</a:t>
+            </a:r>
+          </a:p>
+          <a:p>
+            <a:endParaRPr lang="en-US" sz="2000" dirty="0"/>
+          </a:p>
+        </p:txBody>
+      </p:sp>
+      <p:pic>
+        <p:nvPicPr>
+          <p:cNvPr id="4" name="Picture 3"/>
+          <p:cNvPicPr>
+            <a:picLocks noChangeAspect="1" noChangeArrowheads="1"/>
+          </p:cNvPicPr>
+          <p:nvPr/>
+        </p:nvPicPr>
+        <p:blipFill>
+          <a:blip r:embed="rId2" cstate="print"/>
+          <a:srcRect/>
+          <a:stretch>
+            <a:fillRect/>
+          </a:stretch>
+        </p:blipFill>
+        <p:spPr bwMode="auto">
+          <a:xfrm>
+            <a:off x="2667000" y="4114800"/>
+            <a:ext cx="3990975" cy="1619250"/>
+          </a:xfrm>
+          <a:prstGeom prst="rect">
+            <a:avLst/>
+          </a:prstGeom>
+          <a:noFill/>
+          <a:ln w="9525">
+            <a:noFill/>
+            <a:miter lim="800000"/>
+            <a:headEnd/>
+            <a:tailEnd/>
+          </a:ln>
+        </p:spPr>
+      </p:pic>
+    </p:spTree>
+  </p:cSld>
+  <p:clrMapOvr>
+    <a:masterClrMapping/>
+  </p:clrMapOvr>
+</p:sld>
+</file>
+
 <file path=ppt/slides/slide16.xml><?xml version="1.0" encoding="utf-8"?>
 <p:sld xmlns:a="http://schemas.openxmlformats.org/drawingml/2006/main" xmlns:r="http://schemas.openxmlformats.org/officeDocument/2006/relationships" xmlns:p="http://schemas.openxmlformats.org/presentationml/2006/main">
   <p:cSld>
@@ -5016,7 +4974,7 @@
           <a:p>
             <a:r>
               <a:rPr lang="en-US" dirty="0" smtClean="0"/>
-              <a:t>(ASP.NET) Session Storage</a:t>
+              <a:t>Scaling Out Guidelines (II)</a:t>
             </a:r>
             <a:endParaRPr lang="en-US" dirty="0"/>
           </a:p>
@@ -5038,264 +4996,127 @@
           <a:lstStyle/>
           <a:p>
             <a:r>
-              <a:rPr lang="en-US" sz="2600" i="1" dirty="0" smtClean="0">
+              <a:rPr lang="en-US" sz="2000" dirty="0" smtClean="0"/>
+              <a:t>Design the application to </a:t>
+            </a:r>
+            <a:r>
+              <a:rPr lang="en-US" sz="2000" i="1" dirty="0" smtClean="0">
                 <a:solidFill>
                   <a:srgbClr val="C00000"/>
                 </a:solidFill>
               </a:rPr>
-              <a:t>Machine key</a:t>
-            </a:r>
-            <a:r>
-              <a:rPr lang="en-US" sz="2600" dirty="0" smtClean="0"/>
-              <a:t> should be same for both servers: </a:t>
-            </a:r>
-            <a:r>
-              <a:rPr lang="en-US" sz="2600" u="sng" dirty="0" smtClean="0"/>
-              <a:t>View state</a:t>
-            </a:r>
-            <a:r>
-              <a:rPr lang="en-US" sz="2600" dirty="0" smtClean="0"/>
+              <a:t>conduct I/O operations asynchronously</a:t>
+            </a:r>
+            <a:r>
+              <a:rPr lang="en-US" sz="2000" dirty="0" smtClean="0"/>
+              <a:t>, so that the application can perform useful work while waiting for input and output to complete.</a:t>
+            </a:r>
+          </a:p>
+          <a:p>
+            <a:r>
+              <a:rPr lang="en-US" sz="2000" i="1" dirty="0" smtClean="0">
+                <a:solidFill>
+                  <a:srgbClr val="C00000"/>
+                </a:solidFill>
+              </a:rPr>
+              <a:t>Pool resources</a:t>
+            </a:r>
+            <a:r>
+              <a:rPr lang="en-US" sz="2000" dirty="0" smtClean="0"/>
+              <a:t> such as </a:t>
+            </a:r>
+            <a:r>
+              <a:rPr lang="en-US" sz="2000" u="sng" dirty="0" smtClean="0"/>
+              <a:t>threads</a:t>
+            </a:r>
+            <a:r>
+              <a:rPr lang="en-US" sz="2000" dirty="0" smtClean="0"/>
+              <a:t>, </a:t>
+            </a:r>
+            <a:r>
+              <a:rPr lang="en-US" sz="2000" u="sng" dirty="0" smtClean="0"/>
+              <a:t>network connections</a:t>
+            </a:r>
+            <a:r>
+              <a:rPr lang="en-US" sz="2000" dirty="0" smtClean="0"/>
+              <a:t>, and </a:t>
+            </a:r>
+            <a:r>
+              <a:rPr lang="en-US" sz="2000" u="sng" dirty="0" smtClean="0"/>
+              <a:t>database connections</a:t>
+            </a:r>
+            <a:r>
+              <a:rPr lang="en-US" sz="2000" dirty="0" smtClean="0"/>
+              <a:t>; this helps maximize your computing resources, and it improves your ability to predict resource usage.</a:t>
+            </a:r>
+          </a:p>
+          <a:p>
+            <a:r>
+              <a:rPr lang="en-US" sz="2000" dirty="0" smtClean="0"/>
+              <a:t>Write your database operations in such a way as to </a:t>
+            </a:r>
+            <a:r>
+              <a:rPr lang="en-US" sz="2000" i="1" dirty="0" smtClean="0">
+                <a:solidFill>
+                  <a:srgbClr val="C00000"/>
+                </a:solidFill>
+              </a:rPr>
+              <a:t>maximize concurrency</a:t>
+            </a:r>
+            <a:r>
+              <a:rPr lang="en-US" sz="2000" dirty="0" smtClean="0"/>
               <a:t> and </a:t>
             </a:r>
             <a:r>
-              <a:rPr lang="en-US" sz="2600" u="sng" dirty="0" smtClean="0"/>
-              <a:t>session</a:t>
-            </a:r>
-            <a:r>
-              <a:rPr lang="en-US" sz="2600" dirty="0" smtClean="0"/>
-              <a:t> both </a:t>
-            </a:r>
-            <a:r>
-              <a:rPr lang="en-US" sz="2600" u="sng" dirty="0" smtClean="0"/>
-              <a:t>depend on</a:t>
-            </a:r>
-            <a:r>
-              <a:rPr lang="en-US" sz="2600" dirty="0" smtClean="0"/>
-              <a:t> the machine key.</a:t>
-            </a:r>
-          </a:p>
-          <a:p>
-            <a:r>
-              <a:rPr lang="en-US" sz="2600" dirty="0" smtClean="0"/>
-              <a:t>Session storage options:</a:t>
-            </a:r>
-          </a:p>
-          <a:p>
-            <a:pPr lvl="1"/>
-            <a:r>
-              <a:rPr lang="en-US" sz="2200" dirty="0" err="1" smtClean="0">
-                <a:latin typeface="Consolas" pitchFamily="49" charset="0"/>
-              </a:rPr>
-              <a:t>InProc</a:t>
-            </a:r>
-            <a:endParaRPr lang="en-US" sz="2200" dirty="0" smtClean="0">
-              <a:latin typeface="Consolas" pitchFamily="49" charset="0"/>
-            </a:endParaRPr>
-          </a:p>
-          <a:p>
-            <a:pPr lvl="1"/>
-            <a:r>
-              <a:rPr lang="en-US" sz="2200" dirty="0" err="1" smtClean="0">
-                <a:latin typeface="Consolas" pitchFamily="49" charset="0"/>
-              </a:rPr>
-              <a:t>StateServer</a:t>
-            </a:r>
-            <a:endParaRPr lang="en-US" sz="2200" dirty="0" smtClean="0">
-              <a:latin typeface="Consolas" pitchFamily="49" charset="0"/>
-            </a:endParaRPr>
-          </a:p>
-          <a:p>
-            <a:pPr lvl="1"/>
-            <a:r>
-              <a:rPr lang="en-US" sz="2200" b="1" dirty="0" err="1" smtClean="0">
-                <a:latin typeface="Consolas" pitchFamily="49" charset="0"/>
-              </a:rPr>
-              <a:t>SQLServer</a:t>
-            </a:r>
-            <a:endParaRPr lang="en-US" sz="2200" b="1" dirty="0" smtClean="0">
-              <a:latin typeface="Consolas" pitchFamily="49" charset="0"/>
-            </a:endParaRPr>
-          </a:p>
-        </p:txBody>
-      </p:sp>
-      <p:sp>
-        <p:nvSpPr>
-          <p:cNvPr id="4" name="Rectangle 3"/>
-          <p:cNvSpPr/>
+              <a:rPr lang="en-US" sz="2000" i="1" dirty="0" smtClean="0">
+                <a:solidFill>
+                  <a:srgbClr val="C00000"/>
+                </a:solidFill>
+              </a:rPr>
+              <a:t>minimize exclusive locking</a:t>
+            </a:r>
+            <a:r>
+              <a:rPr lang="en-US" sz="2000" dirty="0" smtClean="0"/>
+              <a:t>. For example, don't lock records when performing read-only operations.</a:t>
+            </a:r>
+          </a:p>
+          <a:p>
+            <a:endParaRPr lang="en-US" sz="2000" dirty="0"/>
+          </a:p>
+        </p:txBody>
+      </p:sp>
+      <p:pic>
+        <p:nvPicPr>
+          <p:cNvPr id="4" name="Picture 3"/>
+          <p:cNvPicPr>
+            <a:picLocks noChangeAspect="1" noChangeArrowheads="1"/>
+          </p:cNvPicPr>
           <p:nvPr/>
-        </p:nvSpPr>
-        <p:spPr>
+        </p:nvPicPr>
+        <p:blipFill>
+          <a:blip r:embed="rId2" cstate="print"/>
+          <a:srcRect/>
+          <a:stretch>
+            <a:fillRect/>
+          </a:stretch>
+        </p:blipFill>
+        <p:spPr bwMode="auto">
           <a:xfrm>
-            <a:off x="533400" y="4495800"/>
-            <a:ext cx="7924800" cy="1754326"/>
+            <a:off x="2667000" y="4800600"/>
+            <a:ext cx="3990975" cy="1619250"/>
           </a:xfrm>
           <a:prstGeom prst="rect">
             <a:avLst/>
           </a:prstGeom>
+          <a:noFill/>
+          <a:ln w="9525">
+            <a:noFill/>
+            <a:miter lim="800000"/>
+            <a:headEnd/>
+            <a:tailEnd/>
+          </a:ln>
         </p:spPr>
-        <p:style>
-          <a:lnRef idx="1">
-            <a:schemeClr val="dk1"/>
-          </a:lnRef>
-          <a:fillRef idx="2">
-            <a:schemeClr val="dk1"/>
-          </a:fillRef>
-          <a:effectRef idx="1">
-            <a:schemeClr val="dk1"/>
-          </a:effectRef>
-          <a:fontRef idx="minor">
-            <a:schemeClr val="dk1"/>
-          </a:fontRef>
-        </p:style>
-        <p:txBody>
-          <a:bodyPr wrap="square">
-            <a:spAutoFit/>
-          </a:bodyPr>
-          <a:lstStyle/>
-          <a:p>
-            <a:pPr>
-              <a:buNone/>
-            </a:pPr>
-            <a:r>
-              <a:rPr lang="en-US" dirty="0" smtClean="0">
-                <a:latin typeface="Consolas" pitchFamily="49" charset="0"/>
-              </a:rPr>
-              <a:t>&lt;system.web&gt;</a:t>
-            </a:r>
-          </a:p>
-          <a:p>
-            <a:pPr>
-              <a:buNone/>
-            </a:pPr>
-            <a:r>
-              <a:rPr lang="en-US" dirty="0" smtClean="0">
-                <a:latin typeface="Consolas" pitchFamily="49" charset="0"/>
-              </a:rPr>
-              <a:t>    &lt;</a:t>
-            </a:r>
-            <a:r>
-              <a:rPr lang="en-US" dirty="0" err="1" smtClean="0">
-                <a:latin typeface="Consolas" pitchFamily="49" charset="0"/>
-              </a:rPr>
-              <a:t>httpCookies</a:t>
-            </a:r>
-            <a:r>
-              <a:rPr lang="en-US" dirty="0" smtClean="0">
-                <a:latin typeface="Consolas" pitchFamily="49" charset="0"/>
-              </a:rPr>
-              <a:t> </a:t>
-            </a:r>
-            <a:r>
-              <a:rPr lang="en-US" dirty="0" err="1" smtClean="0">
-                <a:latin typeface="Consolas" pitchFamily="49" charset="0"/>
-              </a:rPr>
-              <a:t>requireSSL</a:t>
-            </a:r>
-            <a:r>
-              <a:rPr lang="en-US" dirty="0" smtClean="0">
-                <a:latin typeface="Consolas" pitchFamily="49" charset="0"/>
-              </a:rPr>
-              <a:t>="true" /&gt;</a:t>
-            </a:r>
-          </a:p>
-          <a:p>
-            <a:pPr>
-              <a:buNone/>
-            </a:pPr>
-            <a:r>
-              <a:rPr lang="en-US" dirty="0" smtClean="0">
-                <a:latin typeface="Consolas" pitchFamily="49" charset="0"/>
-              </a:rPr>
-              <a:t>    &lt;</a:t>
-            </a:r>
-            <a:r>
-              <a:rPr lang="en-US" dirty="0" err="1" smtClean="0">
-                <a:latin typeface="Consolas" pitchFamily="49" charset="0"/>
-              </a:rPr>
-              <a:t>machineKey</a:t>
-            </a:r>
-            <a:r>
-              <a:rPr lang="en-US" dirty="0" smtClean="0">
-                <a:latin typeface="Consolas" pitchFamily="49" charset="0"/>
-              </a:rPr>
-              <a:t> validation="SHA1" /&gt;</a:t>
-            </a:r>
-          </a:p>
-          <a:p>
-            <a:pPr>
-              <a:buNone/>
-            </a:pPr>
-            <a:r>
-              <a:rPr lang="en-US" dirty="0" smtClean="0">
-                <a:latin typeface="Consolas" pitchFamily="49" charset="0"/>
-              </a:rPr>
-              <a:t>    &lt;</a:t>
-            </a:r>
-            <a:r>
-              <a:rPr lang="en-US" dirty="0" err="1" smtClean="0">
-                <a:latin typeface="Consolas" pitchFamily="49" charset="0"/>
-              </a:rPr>
-              <a:t>sessionState</a:t>
-            </a:r>
-            <a:r>
-              <a:rPr lang="en-US" dirty="0" smtClean="0">
-                <a:latin typeface="Consolas" pitchFamily="49" charset="0"/>
-              </a:rPr>
-              <a:t> timeout="25" </a:t>
-            </a:r>
-            <a:r>
-              <a:rPr lang="en-US" dirty="0" err="1" smtClean="0">
-                <a:latin typeface="Consolas" pitchFamily="49" charset="0"/>
-              </a:rPr>
-              <a:t>cookieless</a:t>
-            </a:r>
-            <a:r>
-              <a:rPr lang="en-US" dirty="0" smtClean="0">
-                <a:latin typeface="Consolas" pitchFamily="49" charset="0"/>
-              </a:rPr>
-              <a:t>="false" </a:t>
-            </a:r>
-            <a:r>
-              <a:rPr lang="en-US" dirty="0" err="1" smtClean="0">
-                <a:latin typeface="Consolas" pitchFamily="49" charset="0"/>
-              </a:rPr>
-              <a:t>regenerateExpiredSessionId</a:t>
-            </a:r>
-            <a:r>
-              <a:rPr lang="en-US" dirty="0" smtClean="0">
-                <a:latin typeface="Consolas" pitchFamily="49" charset="0"/>
-              </a:rPr>
-              <a:t>="true" mode="</a:t>
-            </a:r>
-            <a:r>
-              <a:rPr lang="en-US" b="1" i="1" dirty="0" err="1" smtClean="0">
-                <a:solidFill>
-                  <a:srgbClr val="C00000"/>
-                </a:solidFill>
-                <a:latin typeface="Consolas" pitchFamily="49" charset="0"/>
-              </a:rPr>
-              <a:t>InProc</a:t>
-            </a:r>
-            <a:r>
-              <a:rPr lang="en-US" dirty="0" smtClean="0">
-                <a:latin typeface="Consolas" pitchFamily="49" charset="0"/>
-              </a:rPr>
-              <a:t>" /&gt;</a:t>
-            </a:r>
-          </a:p>
-          <a:p>
-            <a:pPr>
-              <a:buNone/>
-            </a:pPr>
-            <a:r>
-              <a:rPr lang="en-US" dirty="0" smtClean="0">
-                <a:latin typeface="Consolas" pitchFamily="49" charset="0"/>
-              </a:rPr>
-              <a:t>...</a:t>
-            </a:r>
-          </a:p>
-        </p:txBody>
-      </p:sp>
+      </p:pic>
     </p:spTree>
   </p:cSld>
   <p:clrMapOvr>
@@ -5321,106 +5142,32 @@
           <a:chExt cx="0" cy="0"/>
         </a:xfrm>
       </p:grpSpPr>
-      <p:sp>
-        <p:nvSpPr>
-          <p:cNvPr id="2" name="Title 1"/>
-          <p:cNvSpPr>
-            <a:spLocks noGrp="1"/>
-          </p:cNvSpPr>
-          <p:nvPr>
-            <p:ph type="title"/>
-          </p:nvPr>
-        </p:nvSpPr>
-        <p:spPr/>
-        <p:txBody>
-          <a:bodyPr/>
-          <a:lstStyle/>
-          <a:p>
-            <a:pPr algn="l"/>
-            <a:r>
-              <a:rPr lang="en-US" dirty="0" smtClean="0"/>
-              <a:t>1. Create an SQL Server Database for </a:t>
-            </a:r>
-            <a:r>
-              <a:rPr lang="en-US" dirty="0" err="1" smtClean="0"/>
-              <a:t>SQLServer</a:t>
-            </a:r>
-            <a:r>
-              <a:rPr lang="en-US" dirty="0" smtClean="0"/>
-              <a:t> Session Mode</a:t>
-            </a:r>
-            <a:endParaRPr lang="en-US" dirty="0"/>
-          </a:p>
-        </p:txBody>
-      </p:sp>
-      <p:sp>
-        <p:nvSpPr>
-          <p:cNvPr id="3" name="Content Placeholder 2"/>
-          <p:cNvSpPr>
-            <a:spLocks noGrp="1"/>
-          </p:cNvSpPr>
-          <p:nvPr>
-            <p:ph idx="1"/>
-          </p:nvPr>
-        </p:nvSpPr>
-        <p:spPr/>
-        <p:txBody>
-          <a:bodyPr/>
-          <a:lstStyle/>
-          <a:p>
-            <a:pPr marL="342900" lvl="2" indent="-342900"/>
-            <a:r>
-              <a:rPr lang="en-US" sz="2200" b="1" dirty="0" smtClean="0"/>
-              <a:t>Run cmd.exe as Administrator</a:t>
-            </a:r>
-          </a:p>
-          <a:p>
-            <a:pPr marL="342900" lvl="2" indent="-342900"/>
-            <a:r>
-              <a:rPr lang="en-US" sz="2200" i="1" dirty="0" smtClean="0">
-                <a:latin typeface="Consolas" pitchFamily="49" charset="0"/>
-              </a:rPr>
-              <a:t>C:\Windows\Microsoft.NET\Framework\v4.0.30319\aspnet_regsql.exe -</a:t>
-            </a:r>
-            <a:r>
-              <a:rPr lang="en-US" sz="2200" i="1" dirty="0" err="1" smtClean="0">
-                <a:latin typeface="Consolas" pitchFamily="49" charset="0"/>
-              </a:rPr>
-              <a:t>ssadd</a:t>
-            </a:r>
-            <a:r>
-              <a:rPr lang="en-US" sz="2200" i="1" dirty="0" smtClean="0">
-                <a:latin typeface="Consolas" pitchFamily="49" charset="0"/>
-              </a:rPr>
-              <a:t> -</a:t>
-            </a:r>
-            <a:r>
-              <a:rPr lang="en-US" sz="2200" i="1" dirty="0" err="1" smtClean="0">
-                <a:latin typeface="Consolas" pitchFamily="49" charset="0"/>
-              </a:rPr>
-              <a:t>sstype</a:t>
-            </a:r>
-            <a:r>
-              <a:rPr lang="en-US" sz="2200" i="1" dirty="0" smtClean="0">
-                <a:latin typeface="Consolas" pitchFamily="49" charset="0"/>
-              </a:rPr>
-              <a:t> c -d apistate.example.com -S </a:t>
-            </a:r>
-            <a:r>
-              <a:rPr lang="en-US" sz="2200" i="1" dirty="0" err="1" smtClean="0">
-                <a:latin typeface="Consolas" pitchFamily="49" charset="0"/>
-              </a:rPr>
-              <a:t>localhost</a:t>
-            </a:r>
-            <a:r>
-              <a:rPr lang="en-US" sz="2200" i="1" dirty="0" smtClean="0">
-                <a:latin typeface="Consolas" pitchFamily="49" charset="0"/>
-              </a:rPr>
-              <a:t> –E</a:t>
-            </a:r>
-          </a:p>
-        </p:txBody>
-      </p:sp>
+      <p:pic>
+        <p:nvPicPr>
+          <p:cNvPr id="4" name="Picture 2" descr="https://lh3.ggpht.com/1IfZLL2QDSjZ0wS7sUhaMlsAOS8BBzdR3wZ1WawgRn7KZAM8nEVZYMOUM-lqQb0ikIzp=w300"/>
+          <p:cNvPicPr>
+            <a:picLocks noChangeAspect="1" noChangeArrowheads="1"/>
+          </p:cNvPicPr>
+          <p:nvPr/>
+        </p:nvPicPr>
+        <p:blipFill>
+          <a:blip r:embed="rId2" cstate="print"/>
+          <a:srcRect/>
+          <a:stretch>
+            <a:fillRect/>
+          </a:stretch>
+        </p:blipFill>
+        <p:spPr bwMode="auto">
+          <a:xfrm>
+            <a:off x="3276600" y="1905000"/>
+            <a:ext cx="2857500" cy="2857500"/>
+          </a:xfrm>
+          <a:prstGeom prst="rect">
+            <a:avLst/>
+          </a:prstGeom>
+          <a:noFill/>
+        </p:spPr>
+      </p:pic>
     </p:spTree>
   </p:cSld>
   <p:clrMapOvr>
@@ -5461,18 +5208,9 @@
           <a:bodyPr/>
           <a:lstStyle/>
           <a:p>
-            <a:pPr algn="l"/>
             <a:r>
               <a:rPr lang="en-US" dirty="0" smtClean="0"/>
-              <a:t>2. Create a Connection String for </a:t>
-            </a:r>
-            <a:r>
-              <a:rPr lang="en-US" dirty="0" err="1" smtClean="0"/>
-              <a:t>SQLServer</a:t>
-            </a:r>
-            <a:r>
-              <a:rPr lang="en-US" dirty="0" smtClean="0"/>
-              <a:t> Session Mode</a:t>
+              <a:t>(ASP.NET) Session Storage</a:t>
             </a:r>
             <a:endParaRPr lang="en-US" dirty="0"/>
           </a:p>
@@ -5494,23 +5232,83 @@
           <a:lstStyle/>
           <a:p>
             <a:r>
-              <a:rPr lang="en-US" sz="2400" dirty="0" smtClean="0">
-                <a:latin typeface="+mj-lt"/>
-              </a:rPr>
-              <a:t>Create </a:t>
-            </a:r>
-            <a:r>
-              <a:rPr lang="en-US" sz="2400" dirty="0" err="1" smtClean="0">
-                <a:latin typeface="+mj-lt"/>
-              </a:rPr>
-              <a:t>web.connectionStrings.config</a:t>
-            </a:r>
-            <a:r>
-              <a:rPr lang="en-US" sz="2400" dirty="0" smtClean="0">
-                <a:latin typeface="+mj-lt"/>
-              </a:rPr>
-              <a:t> file.</a:t>
-            </a:r>
+              <a:rPr lang="en-US" sz="2600" i="1" dirty="0" smtClean="0">
+                <a:solidFill>
+                  <a:srgbClr val="C00000"/>
+                </a:solidFill>
+              </a:rPr>
+              <a:t>Machine key</a:t>
+            </a:r>
+            <a:r>
+              <a:rPr lang="en-US" sz="2600" dirty="0" smtClean="0"/>
+              <a:t> should be same for both servers: </a:t>
+            </a:r>
+            <a:r>
+              <a:rPr lang="en-US" sz="2600" u="sng" dirty="0" smtClean="0"/>
+              <a:t>View state</a:t>
+            </a:r>
+            <a:r>
+              <a:rPr lang="en-US" sz="2600" dirty="0" smtClean="0"/>
+              <a:t> and </a:t>
+            </a:r>
+            <a:r>
+              <a:rPr lang="en-US" sz="2600" u="sng" dirty="0" smtClean="0"/>
+              <a:t>session</a:t>
+            </a:r>
+            <a:r>
+              <a:rPr lang="en-US" sz="2600" dirty="0" smtClean="0"/>
+              <a:t> both </a:t>
+            </a:r>
+            <a:r>
+              <a:rPr lang="en-US" sz="2600" u="sng" dirty="0" smtClean="0"/>
+              <a:t>depend on</a:t>
+            </a:r>
+            <a:r>
+              <a:rPr lang="en-US" sz="2600" dirty="0" smtClean="0"/>
+              <a:t> the machine key.</a:t>
+            </a:r>
+          </a:p>
+          <a:p>
+            <a:r>
+              <a:rPr lang="en-US" sz="2600" dirty="0" smtClean="0"/>
+              <a:t>Session storage options:</a:t>
+            </a:r>
+          </a:p>
+          <a:p>
+            <a:pPr lvl="1"/>
+            <a:r>
+              <a:rPr lang="en-US" sz="2200" dirty="0" err="1" smtClean="0">
+                <a:latin typeface="Consolas" pitchFamily="49" charset="0"/>
+              </a:rPr>
+              <a:t>InProc</a:t>
+            </a:r>
+            <a:endParaRPr lang="en-US" sz="2200" dirty="0" smtClean="0">
+              <a:latin typeface="Consolas" pitchFamily="49" charset="0"/>
+            </a:endParaRPr>
+          </a:p>
+          <a:p>
+            <a:pPr lvl="1"/>
+            <a:r>
+              <a:rPr lang="en-US" sz="2200" dirty="0" err="1" smtClean="0">
+                <a:latin typeface="Consolas" pitchFamily="49" charset="0"/>
+              </a:rPr>
+              <a:t>StateServer</a:t>
+            </a:r>
+            <a:endParaRPr lang="en-US" sz="2200" dirty="0" smtClean="0">
+              <a:latin typeface="Consolas" pitchFamily="49" charset="0"/>
+            </a:endParaRPr>
+          </a:p>
+          <a:p>
+            <a:pPr lvl="1"/>
+            <a:r>
+              <a:rPr lang="en-US" sz="2200" b="1" dirty="0" err="1" smtClean="0">
+                <a:latin typeface="Consolas" pitchFamily="49" charset="0"/>
+              </a:rPr>
+              <a:t>SQLServer</a:t>
+            </a:r>
+            <a:endParaRPr lang="en-US" sz="2200" b="1" dirty="0" smtClean="0">
+              <a:latin typeface="Consolas" pitchFamily="49" charset="0"/>
+            </a:endParaRPr>
           </a:p>
         </p:txBody>
       </p:sp>
@@ -5522,8 +5320,8 @@
         </p:nvSpPr>
         <p:spPr>
           <a:xfrm>
-            <a:off x="533400" y="2438400"/>
-            <a:ext cx="7924800" cy="3139321"/>
+            <a:off x="533400" y="4495800"/>
+            <a:ext cx="7924800" cy="1754326"/>
           </a:xfrm>
           <a:prstGeom prst="rect">
             <a:avLst/>
@@ -5556,7 +5354,7 @@
               <a:rPr lang="en-US" dirty="0" smtClean="0">
                 <a:latin typeface="Consolas" pitchFamily="49" charset="0"/>
               </a:rPr>
-              <a:t>&lt;?xml version="1.0" ?&gt;</a:t>
+              <a:t>&lt;system.web&gt;</a:t>
             </a:r>
           </a:p>
           <a:p>
@@ -5567,19 +5365,31 @@
               <a:rPr lang="en-US" dirty="0" smtClean="0">
                 <a:latin typeface="Consolas" pitchFamily="49" charset="0"/>
               </a:rPr>
-              <a:t>  &lt;</a:t>
+              <a:t>    &lt;</a:t>
             </a:r>
             <a:r>
               <a:rPr lang="en-US" dirty="0" err="1" smtClean="0">
                 <a:latin typeface="Consolas" pitchFamily="49" charset="0"/>
               </a:rPr>
-              <a:t>connectionStrings</a:t>
+              <a:t>httpCookies</a:t>
             </a:r>
             <a:r>
               <a:rPr lang="en-US" dirty="0" smtClean="0">
                 <a:latin typeface="Consolas" pitchFamily="49" charset="0"/>
               </a:rPr>
-              <a:t>&gt;</a:t>
+              <a:t> </a:t>
+            </a:r>
+            <a:r>
+              <a:rPr lang="en-US" dirty="0" err="1" smtClean="0">
+                <a:latin typeface="Consolas" pitchFamily="49" charset="0"/>
+              </a:rPr>
+              <a:t>requireSSL</a:t>
+            </a:r>
+            <a:r>
+              <a:rPr lang="en-US" dirty="0" smtClean="0">
+                <a:latin typeface="Consolas" pitchFamily="49" charset="0"/>
+              </a:rPr>
+              <a:t>="true" /&gt;</a:t>
             </a:r>
           </a:p>
           <a:p>
@@ -5590,7 +5400,19 @@
               <a:rPr lang="en-US" dirty="0" smtClean="0">
                 <a:latin typeface="Consolas" pitchFamily="49" charset="0"/>
               </a:rPr>
-              <a:t>    &lt;clear /&gt;</a:t>
+              <a:t>    &lt;</a:t>
+            </a:r>
+            <a:r>
+              <a:rPr lang="en-US" dirty="0" err="1" smtClean="0">
+                <a:latin typeface="Consolas" pitchFamily="49" charset="0"/>
+              </a:rPr>
+              <a:t>machineKey</a:t>
+            </a:r>
+            <a:r>
+              <a:rPr lang="en-US" dirty="0" smtClean="0">
+                <a:latin typeface="Consolas" pitchFamily="49" charset="0"/>
+              </a:rPr>
+              <a:t> validation="SHA1" /&gt;</a:t>
             </a:r>
           </a:p>
           <a:p>
@@ -5601,18 +5423,43 @@
               <a:rPr lang="en-US" dirty="0" smtClean="0">
                 <a:latin typeface="Consolas" pitchFamily="49" charset="0"/>
               </a:rPr>
-              <a:t>...</a:t>
-            </a:r>
-          </a:p>
-          <a:p>
-            <a:pPr>
-              <a:buNone/>
-            </a:pPr>
+              <a:t>    &lt;</a:t>
+            </a:r>
+            <a:r>
+              <a:rPr lang="en-US" dirty="0" err="1" smtClean="0">
+                <a:latin typeface="Consolas" pitchFamily="49" charset="0"/>
+              </a:rPr>
+              <a:t>sessionState</a:t>
+            </a:r>
             <a:r>
               <a:rPr lang="en-US" dirty="0" smtClean="0">
                 <a:latin typeface="Consolas" pitchFamily="49" charset="0"/>
               </a:rPr>
-              <a:t>    &lt;add name="</a:t>
+              <a:t> timeout="25" </a:t>
+            </a:r>
+            <a:r>
+              <a:rPr lang="en-US" dirty="0" err="1" smtClean="0">
+                <a:latin typeface="Consolas" pitchFamily="49" charset="0"/>
+              </a:rPr>
+              <a:t>cookieless</a:t>
+            </a:r>
+            <a:r>
+              <a:rPr lang="en-US" dirty="0" smtClean="0">
+                <a:latin typeface="Consolas" pitchFamily="49" charset="0"/>
+              </a:rPr>
+              <a:t>="false" </a:t>
+            </a:r>
+            <a:r>
+              <a:rPr lang="en-US" dirty="0" err="1" smtClean="0">
+                <a:latin typeface="Consolas" pitchFamily="49" charset="0"/>
+              </a:rPr>
+              <a:t>regenerateExpiredSessionId</a:t>
+            </a:r>
+            <a:r>
+              <a:rPr lang="en-US" dirty="0" smtClean="0">
+                <a:latin typeface="Consolas" pitchFamily="49" charset="0"/>
+              </a:rPr>
+              <a:t>="true" mode="</a:t>
             </a:r>
             <a:r>
               <a:rPr lang="en-US" b="1" i="1" dirty="0" err="1" smtClean="0">
@@ -5621,91 +5468,7 @@
                 </a:solidFill>
                 <a:latin typeface="Consolas" pitchFamily="49" charset="0"/>
               </a:rPr>
-              <a:t>snsState</a:t>
-            </a:r>
-            <a:r>
-              <a:rPr lang="en-US" dirty="0" smtClean="0">
-                <a:latin typeface="Consolas" pitchFamily="49" charset="0"/>
-              </a:rPr>
-              <a:t>" </a:t>
-            </a:r>
-            <a:r>
-              <a:rPr lang="en-US" dirty="0" err="1" smtClean="0">
-                <a:latin typeface="Consolas" pitchFamily="49" charset="0"/>
-              </a:rPr>
-              <a:t>connectionString</a:t>
-            </a:r>
-            <a:r>
-              <a:rPr lang="en-US" dirty="0" smtClean="0">
-                <a:latin typeface="Consolas" pitchFamily="49" charset="0"/>
-              </a:rPr>
-              <a:t>="Data Source=192.168.101.62;Initial Catalog=</a:t>
-            </a:r>
-            <a:r>
-              <a:rPr lang="en-US" dirty="0" err="1" smtClean="0">
-                <a:latin typeface="Consolas" pitchFamily="49" charset="0"/>
-              </a:rPr>
-              <a:t>apistate.example.com;Persist</a:t>
-            </a:r>
-            <a:r>
-              <a:rPr lang="en-US" dirty="0" smtClean="0">
-                <a:latin typeface="Consolas" pitchFamily="49" charset="0"/>
-              </a:rPr>
-              <a:t> Security Info=</a:t>
-            </a:r>
-            <a:r>
-              <a:rPr lang="en-US" dirty="0" err="1" smtClean="0">
-                <a:latin typeface="Consolas" pitchFamily="49" charset="0"/>
-              </a:rPr>
-              <a:t>True;User</a:t>
-            </a:r>
-            <a:r>
-              <a:rPr lang="en-US" dirty="0" smtClean="0">
-                <a:latin typeface="Consolas" pitchFamily="49" charset="0"/>
-              </a:rPr>
-              <a:t> ID=</a:t>
-            </a:r>
-            <a:r>
-              <a:rPr lang="en-US" dirty="0" err="1" smtClean="0">
-                <a:latin typeface="Consolas" pitchFamily="49" charset="0"/>
-              </a:rPr>
-              <a:t>api.example.com;Password</a:t>
-            </a:r>
-            <a:r>
-              <a:rPr lang="en-US" dirty="0" smtClean="0">
-                <a:latin typeface="Consolas" pitchFamily="49" charset="0"/>
-              </a:rPr>
-              <a:t>=$%</a:t>
-            </a:r>
-            <a:r>
-              <a:rPr lang="en-US" dirty="0" err="1" smtClean="0">
-                <a:latin typeface="Consolas" pitchFamily="49" charset="0"/>
-              </a:rPr>
-              <a:t>Ym</a:t>
-            </a:r>
-            <a:r>
-              <a:rPr lang="en-US" dirty="0" smtClean="0">
-                <a:latin typeface="Consolas" pitchFamily="49" charset="0"/>
-              </a:rPr>
-              <a:t>*k3xtt4#bNNu;Connect Timeout=60;Min Pool Size=0;Max Pool Size=100;" </a:t>
-            </a:r>
-            <a:r>
-              <a:rPr lang="en-US" dirty="0" err="1" smtClean="0">
-                <a:latin typeface="Consolas" pitchFamily="49" charset="0"/>
-              </a:rPr>
-              <a:t>providerName</a:t>
-            </a:r>
-            <a:r>
-              <a:rPr lang="en-US" dirty="0" smtClean="0">
-                <a:latin typeface="Consolas" pitchFamily="49" charset="0"/>
-              </a:rPr>
-              <a:t>="</a:t>
-            </a:r>
-            <a:r>
-              <a:rPr lang="en-US" dirty="0" err="1" smtClean="0">
-                <a:latin typeface="Consolas" pitchFamily="49" charset="0"/>
-              </a:rPr>
-              <a:t>System.Data.SqlClient</a:t>
+              <a:t>InProc</a:t>
             </a:r>
             <a:r>
               <a:rPr lang="en-US" dirty="0" smtClean="0">
@@ -5722,19 +5485,7 @@
               <a:rPr lang="en-US" dirty="0" smtClean="0">
                 <a:latin typeface="Consolas" pitchFamily="49" charset="0"/>
               </a:rPr>
-              <a:t>  &lt;/</a:t>
-            </a:r>
-            <a:r>
-              <a:rPr lang="en-US" dirty="0" err="1" smtClean="0">
-                <a:latin typeface="Consolas" pitchFamily="49" charset="0"/>
-              </a:rPr>
-              <a:t>connectionStrings</a:t>
-            </a:r>
-            <a:r>
-              <a:rPr lang="en-US" dirty="0" smtClean="0">
-                <a:latin typeface="Consolas" pitchFamily="49" charset="0"/>
-              </a:rPr>
-              <a:t>&gt;</a:t>
+              <a:t>...</a:t>
             </a:r>
           </a:p>
         </p:txBody>
@@ -5782,7 +5533,7 @@
             <a:pPr algn="l"/>
             <a:r>
               <a:rPr lang="en-US" dirty="0" smtClean="0"/>
-              <a:t>3. Enable </a:t>
+              <a:t>1. Create an SQL Server Database for </a:t>
             </a:r>
             <a:r>
               <a:rPr lang="en-US" dirty="0" err="1" smtClean="0"/>
@@ -5811,184 +5562,59 @@
           <a:bodyPr/>
           <a:lstStyle/>
           <a:p>
-            <a:r>
-              <a:rPr lang="en-US" sz="2200" dirty="0" smtClean="0">
+            <a:pPr marL="342900" lvl="2" indent="-342900"/>
+            <a:r>
+              <a:rPr lang="en-US" sz="2200" b="1" dirty="0" smtClean="0"/>
+              <a:t>Run cmd.exe as Administrator</a:t>
+            </a:r>
+          </a:p>
+          <a:p>
+            <a:pPr marL="342900" lvl="2" indent="-342900"/>
+            <a:r>
+              <a:rPr lang="en-US" sz="2200" i="1" dirty="0" smtClean="0">
                 <a:latin typeface="Consolas" pitchFamily="49" charset="0"/>
               </a:rPr>
-              <a:t>&lt;</a:t>
-            </a:r>
-            <a:r>
-              <a:rPr lang="en-US" sz="2200" dirty="0" err="1" smtClean="0">
+              <a:t>C:\Windows\Microsoft.NET\Framework\v4.0.30319\aspnet_regsql.exe -</a:t>
+            </a:r>
+            <a:r>
+              <a:rPr lang="en-US" sz="2200" i="1" dirty="0" err="1" smtClean="0">
                 <a:latin typeface="Consolas" pitchFamily="49" charset="0"/>
               </a:rPr>
-              <a:t>connectionStrings</a:t>
-            </a:r>
-            <a:r>
-              <a:rPr lang="en-US" sz="2200" dirty="0" smtClean="0">
+              <a:t>ssadd</a:t>
+            </a:r>
+            <a:r>
+              <a:rPr lang="en-US" sz="2200" i="1" dirty="0" smtClean="0">
                 <a:latin typeface="Consolas" pitchFamily="49" charset="0"/>
               </a:rPr>
-              <a:t> </a:t>
-            </a:r>
-            <a:r>
-              <a:rPr lang="en-US" sz="2200" dirty="0" err="1" smtClean="0">
+              <a:t> -</a:t>
+            </a:r>
+            <a:r>
+              <a:rPr lang="en-US" sz="2200" i="1" dirty="0" err="1" smtClean="0">
                 <a:latin typeface="Consolas" pitchFamily="49" charset="0"/>
               </a:rPr>
-              <a:t>configSource</a:t>
-            </a:r>
-            <a:r>
-              <a:rPr lang="en-US" sz="2200" dirty="0" smtClean="0">
+              <a:t>sstype</a:t>
+            </a:r>
+            <a:r>
+              <a:rPr lang="en-US" sz="2200" i="1" dirty="0" smtClean="0">
                 <a:latin typeface="Consolas" pitchFamily="49" charset="0"/>
               </a:rPr>
-              <a:t>="</a:t>
+              <a:t> c -d apistate.example.com -S </a:t>
             </a:r>
             <a:r>
               <a:rPr lang="en-US" sz="2200" i="1" dirty="0" err="1" smtClean="0">
-                <a:solidFill>
-                  <a:srgbClr val="C00000"/>
-                </a:solidFill>
                 <a:latin typeface="Consolas" pitchFamily="49" charset="0"/>
               </a:rPr>
-              <a:t>web.connectionStrings.config</a:t>
-            </a:r>
-            <a:r>
-              <a:rPr lang="en-US" sz="2200" dirty="0" smtClean="0">
+              <a:t>localhost</a:t>
+            </a:r>
+            <a:r>
+              <a:rPr lang="en-US" sz="2200" i="1" dirty="0" smtClean="0">
                 <a:latin typeface="Consolas" pitchFamily="49" charset="0"/>
               </a:rPr>
-              <a:t>" /&gt;</a:t>
-            </a:r>
-          </a:p>
-          <a:p>
-            <a:r>
-              <a:rPr lang="en-US" sz="2200" dirty="0" smtClean="0">
-                <a:latin typeface="Consolas" pitchFamily="49" charset="0"/>
-              </a:rPr>
-              <a:t>&lt;</a:t>
-            </a:r>
-            <a:r>
-              <a:rPr lang="en-US" sz="2200" dirty="0" err="1" smtClean="0">
-                <a:latin typeface="Consolas" pitchFamily="49" charset="0"/>
-              </a:rPr>
-              <a:t>sessionState</a:t>
-            </a:r>
-            <a:r>
-              <a:rPr lang="en-US" sz="2200" dirty="0" smtClean="0">
-                <a:latin typeface="Consolas" pitchFamily="49" charset="0"/>
-              </a:rPr>
-              <a:t> timeout="25" </a:t>
-            </a:r>
-            <a:r>
-              <a:rPr lang="en-US" sz="2200" dirty="0" err="1" smtClean="0">
-                <a:latin typeface="Consolas" pitchFamily="49" charset="0"/>
-              </a:rPr>
-              <a:t>cookieless</a:t>
-            </a:r>
-            <a:r>
-              <a:rPr lang="en-US" sz="2200" dirty="0" smtClean="0">
-                <a:latin typeface="Consolas" pitchFamily="49" charset="0"/>
-              </a:rPr>
-              <a:t>="false" </a:t>
-            </a:r>
-            <a:r>
-              <a:rPr lang="en-US" sz="2200" dirty="0" err="1" smtClean="0">
-                <a:latin typeface="Consolas" pitchFamily="49" charset="0"/>
-              </a:rPr>
-              <a:t>regenerateExpiredSessionId</a:t>
-            </a:r>
-            <a:r>
-              <a:rPr lang="en-US" sz="2200" dirty="0" smtClean="0">
-                <a:latin typeface="Consolas" pitchFamily="49" charset="0"/>
-              </a:rPr>
-              <a:t>="true" mode="</a:t>
-            </a:r>
-            <a:r>
-              <a:rPr lang="en-US" sz="2200" b="1" i="1" dirty="0" err="1" smtClean="0">
-                <a:solidFill>
-                  <a:srgbClr val="C00000"/>
-                </a:solidFill>
-                <a:latin typeface="Consolas" pitchFamily="49" charset="0"/>
-              </a:rPr>
-              <a:t>SQLServer</a:t>
-            </a:r>
-            <a:r>
-              <a:rPr lang="en-US" sz="2200" dirty="0" smtClean="0">
-                <a:latin typeface="Consolas" pitchFamily="49" charset="0"/>
-              </a:rPr>
-              <a:t>" </a:t>
-            </a:r>
-            <a:r>
-              <a:rPr lang="en-US" sz="2200" dirty="0" err="1" smtClean="0">
-                <a:latin typeface="Consolas" pitchFamily="49" charset="0"/>
-              </a:rPr>
-              <a:t>allowCustomSqlDatabase</a:t>
-            </a:r>
-            <a:r>
-              <a:rPr lang="en-US" sz="2200" dirty="0" smtClean="0">
-                <a:latin typeface="Consolas" pitchFamily="49" charset="0"/>
-              </a:rPr>
-              <a:t>="true" </a:t>
-            </a:r>
-            <a:r>
-              <a:rPr lang="en-US" sz="2200" dirty="0" err="1" smtClean="0">
-                <a:latin typeface="Consolas" pitchFamily="49" charset="0"/>
-              </a:rPr>
-              <a:t>sqlConnectionString</a:t>
-            </a:r>
-            <a:r>
-              <a:rPr lang="en-US" sz="2200" dirty="0" smtClean="0">
-                <a:latin typeface="Consolas" pitchFamily="49" charset="0"/>
-              </a:rPr>
-              <a:t>="</a:t>
-            </a:r>
-            <a:r>
-              <a:rPr lang="en-US" sz="2200" i="1" dirty="0" err="1" smtClean="0">
-                <a:solidFill>
-                  <a:srgbClr val="C00000"/>
-                </a:solidFill>
-                <a:latin typeface="Consolas" pitchFamily="49" charset="0"/>
-              </a:rPr>
-              <a:t>snsState</a:t>
-            </a:r>
-            <a:r>
-              <a:rPr lang="en-US" sz="2200" dirty="0" smtClean="0">
-                <a:latin typeface="Consolas" pitchFamily="49" charset="0"/>
-              </a:rPr>
-              <a:t>" /&gt;</a:t>
-            </a:r>
-          </a:p>
-        </p:txBody>
-      </p:sp>
-      <p:pic>
-        <p:nvPicPr>
-          <p:cNvPr id="2050" name="Picture 2"/>
-          <p:cNvPicPr>
-            <a:picLocks noChangeAspect="1" noChangeArrowheads="1"/>
-          </p:cNvPicPr>
-          <p:nvPr/>
-        </p:nvPicPr>
-        <p:blipFill>
-          <a:blip r:embed="rId2" cstate="print"/>
-          <a:srcRect/>
-          <a:stretch>
-            <a:fillRect/>
-          </a:stretch>
-        </p:blipFill>
-        <p:spPr bwMode="auto">
-          <a:xfrm>
-            <a:off x="1019175" y="4038600"/>
-            <a:ext cx="7105650" cy="2057400"/>
-          </a:xfrm>
-          <a:prstGeom prst="rect">
-            <a:avLst/>
-          </a:prstGeom>
-          <a:noFill/>
-          <a:ln w="9525">
-            <a:noFill/>
-            <a:miter lim="800000"/>
-            <a:headEnd/>
-            <a:tailEnd/>
-          </a:ln>
-        </p:spPr>
-      </p:pic>
+              <a:t> –E</a:t>
+            </a:r>
+          </a:p>
+        </p:txBody>
+      </p:sp>
     </p:spTree>
   </p:cSld>
   <p:clrMapOvr>
@@ -6130,32 +5756,299 @@
           <a:chExt cx="0" cy="0"/>
         </a:xfrm>
       </p:grpSpPr>
-      <p:pic>
-        <p:nvPicPr>
-          <p:cNvPr id="4" name="Picture 2" descr="https://lh3.ggpht.com/1IfZLL2QDSjZ0wS7sUhaMlsAOS8BBzdR3wZ1WawgRn7KZAM8nEVZYMOUM-lqQb0ikIzp=w300"/>
-          <p:cNvPicPr>
-            <a:picLocks noChangeAspect="1" noChangeArrowheads="1"/>
-          </p:cNvPicPr>
+      <p:sp>
+        <p:nvSpPr>
+          <p:cNvPr id="2" name="Title 1"/>
+          <p:cNvSpPr>
+            <a:spLocks noGrp="1"/>
+          </p:cNvSpPr>
+          <p:nvPr>
+            <p:ph type="title"/>
+          </p:nvPr>
+        </p:nvSpPr>
+        <p:spPr/>
+        <p:txBody>
+          <a:bodyPr/>
+          <a:lstStyle/>
+          <a:p>
+            <a:pPr algn="l"/>
+            <a:r>
+              <a:rPr lang="en-US" dirty="0" smtClean="0"/>
+              <a:t>2. Create a Connection String for </a:t>
+            </a:r>
+            <a:r>
+              <a:rPr lang="en-US" dirty="0" err="1" smtClean="0"/>
+              <a:t>SQLServer</a:t>
+            </a:r>
+            <a:r>
+              <a:rPr lang="en-US" dirty="0" smtClean="0"/>
+              <a:t> Session Mode</a:t>
+            </a:r>
+            <a:endParaRPr lang="en-US" dirty="0"/>
+          </a:p>
+        </p:txBody>
+      </p:sp>
+      <p:sp>
+        <p:nvSpPr>
+          <p:cNvPr id="3" name="Content Placeholder 2"/>
+          <p:cNvSpPr>
+            <a:spLocks noGrp="1"/>
+          </p:cNvSpPr>
+          <p:nvPr>
+            <p:ph idx="1"/>
+          </p:nvPr>
+        </p:nvSpPr>
+        <p:spPr/>
+        <p:txBody>
+          <a:bodyPr/>
+          <a:lstStyle/>
+          <a:p>
+            <a:r>
+              <a:rPr lang="en-US" sz="2400" dirty="0" smtClean="0">
+                <a:latin typeface="+mj-lt"/>
+              </a:rPr>
+              <a:t>Create </a:t>
+            </a:r>
+            <a:r>
+              <a:rPr lang="en-US" sz="2400" dirty="0" err="1" smtClean="0">
+                <a:latin typeface="+mj-lt"/>
+              </a:rPr>
+              <a:t>web.connectionStrings.config</a:t>
+            </a:r>
+            <a:r>
+              <a:rPr lang="en-US" sz="2400" dirty="0" smtClean="0">
+                <a:latin typeface="+mj-lt"/>
+              </a:rPr>
+              <a:t> file.</a:t>
+            </a:r>
+          </a:p>
+        </p:txBody>
+      </p:sp>
+      <p:sp>
+        <p:nvSpPr>
+          <p:cNvPr id="4" name="Rectangle 3"/>
+          <p:cNvSpPr/>
           <p:nvPr/>
-        </p:nvPicPr>
-        <p:blipFill>
-          <a:blip r:embed="rId2" cstate="print"/>
-          <a:srcRect/>
-          <a:stretch>
-            <a:fillRect/>
-          </a:stretch>
-        </p:blipFill>
-        <p:spPr bwMode="auto">
+        </p:nvSpPr>
+        <p:spPr>
           <a:xfrm>
-            <a:off x="3276600" y="1905000"/>
-            <a:ext cx="2857500" cy="2857500"/>
+            <a:off x="533400" y="2438400"/>
+            <a:ext cx="7924800" cy="3139321"/>
           </a:xfrm>
           <a:prstGeom prst="rect">
             <a:avLst/>
           </a:prstGeom>
-          <a:noFill/>
         </p:spPr>
-      </p:pic>
+        <p:style>
+          <a:lnRef idx="1">
+            <a:schemeClr val="dk1"/>
+          </a:lnRef>
+          <a:fillRef idx="2">
+            <a:schemeClr val="dk1"/>
+          </a:fillRef>
+          <a:effectRef idx="1">
+            <a:schemeClr val="dk1"/>
+          </a:effectRef>
+          <a:fontRef idx="minor">
+            <a:schemeClr val="dk1"/>
+          </a:fontRef>
+        </p:style>
+        <p:txBody>
+          <a:bodyPr wrap="square">
+            <a:spAutoFit/>
+          </a:bodyPr>
+          <a:lstStyle/>
+          <a:p>
+            <a:pPr>
+              <a:buNone/>
+            </a:pPr>
+            <a:r>
+              <a:rPr lang="en-US" dirty="0" smtClean="0">
+                <a:latin typeface="Consolas" pitchFamily="49" charset="0"/>
+              </a:rPr>
+              <a:t>&lt;?xml version="1.0" ?&gt;</a:t>
+            </a:r>
+          </a:p>
+          <a:p>
+            <a:pPr>
+              <a:buNone/>
+            </a:pPr>
+            <a:r>
+              <a:rPr lang="en-US" dirty="0" smtClean="0">
+                <a:latin typeface="Consolas" pitchFamily="49" charset="0"/>
+              </a:rPr>
+              <a:t>  &lt;</a:t>
+            </a:r>
+            <a:r>
+              <a:rPr lang="en-US" dirty="0" err="1" smtClean="0">
+                <a:latin typeface="Consolas" pitchFamily="49" charset="0"/>
+              </a:rPr>
+              <a:t>connectionStrings</a:t>
+            </a:r>
+            <a:r>
+              <a:rPr lang="en-US" dirty="0" smtClean="0">
+                <a:latin typeface="Consolas" pitchFamily="49" charset="0"/>
+              </a:rPr>
+              <a:t>&gt;</a:t>
+            </a:r>
+          </a:p>
+          <a:p>
+            <a:pPr>
+              <a:buNone/>
+            </a:pPr>
+            <a:r>
+              <a:rPr lang="en-US" dirty="0" smtClean="0">
+                <a:latin typeface="Consolas" pitchFamily="49" charset="0"/>
+              </a:rPr>
+              <a:t>    &lt;clear /&gt;</a:t>
+            </a:r>
+          </a:p>
+          <a:p>
+            <a:pPr>
+              <a:buNone/>
+            </a:pPr>
+            <a:r>
+              <a:rPr lang="en-US" dirty="0" smtClean="0">
+                <a:latin typeface="Consolas" pitchFamily="49" charset="0"/>
+              </a:rPr>
+              <a:t>...</a:t>
+            </a:r>
+          </a:p>
+          <a:p>
+            <a:pPr>
+              <a:buNone/>
+            </a:pPr>
+            <a:r>
+              <a:rPr lang="en-US" dirty="0" smtClean="0">
+                <a:latin typeface="Consolas" pitchFamily="49" charset="0"/>
+              </a:rPr>
+              <a:t>    &lt;add name="</a:t>
+            </a:r>
+            <a:r>
+              <a:rPr lang="en-US" b="1" i="1" dirty="0" err="1" smtClean="0">
+                <a:solidFill>
+                  <a:srgbClr val="C00000"/>
+                </a:solidFill>
+                <a:latin typeface="Consolas" pitchFamily="49" charset="0"/>
+              </a:rPr>
+              <a:t>snsState</a:t>
+            </a:r>
+            <a:r>
+              <a:rPr lang="en-US" dirty="0" smtClean="0">
+                <a:latin typeface="Consolas" pitchFamily="49" charset="0"/>
+              </a:rPr>
+              <a:t>" </a:t>
+            </a:r>
+            <a:r>
+              <a:rPr lang="en-US" dirty="0" err="1" smtClean="0">
+                <a:latin typeface="Consolas" pitchFamily="49" charset="0"/>
+              </a:rPr>
+              <a:t>connectionString</a:t>
+            </a:r>
+            <a:r>
+              <a:rPr lang="en-US" dirty="0" smtClean="0">
+                <a:latin typeface="Consolas" pitchFamily="49" charset="0"/>
+              </a:rPr>
+              <a:t>="Data Source=192.168.101.62;Initial Catalog=</a:t>
+            </a:r>
+            <a:r>
+              <a:rPr lang="en-US" dirty="0" err="1" smtClean="0">
+                <a:latin typeface="Consolas" pitchFamily="49" charset="0"/>
+              </a:rPr>
+              <a:t>apistate.example.com;Persist</a:t>
+            </a:r>
+            <a:r>
+              <a:rPr lang="en-US" dirty="0" smtClean="0">
+                <a:latin typeface="Consolas" pitchFamily="49" charset="0"/>
+              </a:rPr>
+              <a:t> Security Info=</a:t>
+            </a:r>
+            <a:r>
+              <a:rPr lang="en-US" dirty="0" err="1" smtClean="0">
+                <a:latin typeface="Consolas" pitchFamily="49" charset="0"/>
+              </a:rPr>
+              <a:t>True;User</a:t>
+            </a:r>
+            <a:r>
+              <a:rPr lang="en-US" dirty="0" smtClean="0">
+                <a:latin typeface="Consolas" pitchFamily="49" charset="0"/>
+              </a:rPr>
+              <a:t> ID=</a:t>
+            </a:r>
+            <a:r>
+              <a:rPr lang="en-US" dirty="0" err="1" smtClean="0">
+                <a:latin typeface="Consolas" pitchFamily="49" charset="0"/>
+              </a:rPr>
+              <a:t>api.example.com;Password</a:t>
+            </a:r>
+            <a:r>
+              <a:rPr lang="en-US" dirty="0" smtClean="0">
+                <a:latin typeface="Consolas" pitchFamily="49" charset="0"/>
+              </a:rPr>
+              <a:t>=$%</a:t>
+            </a:r>
+            <a:r>
+              <a:rPr lang="en-US" dirty="0" err="1" smtClean="0">
+                <a:latin typeface="Consolas" pitchFamily="49" charset="0"/>
+              </a:rPr>
+              <a:t>Ym</a:t>
+            </a:r>
+            <a:r>
+              <a:rPr lang="en-US" dirty="0" smtClean="0">
+                <a:latin typeface="Consolas" pitchFamily="49" charset="0"/>
+              </a:rPr>
+              <a:t>*k3xtt4#bNNu;Connect Timeout=60;Min Pool Size=0;Max Pool Size=100;" </a:t>
+            </a:r>
+            <a:r>
+              <a:rPr lang="en-US" dirty="0" err="1" smtClean="0">
+                <a:latin typeface="Consolas" pitchFamily="49" charset="0"/>
+              </a:rPr>
+              <a:t>providerName</a:t>
+            </a:r>
+            <a:r>
+              <a:rPr lang="en-US" dirty="0" smtClean="0">
+                <a:latin typeface="Consolas" pitchFamily="49" charset="0"/>
+              </a:rPr>
+              <a:t>="</a:t>
+            </a:r>
+            <a:r>
+              <a:rPr lang="en-US" dirty="0" err="1" smtClean="0">
+                <a:latin typeface="Consolas" pitchFamily="49" charset="0"/>
+              </a:rPr>
+              <a:t>System.Data.SqlClient</a:t>
+            </a:r>
+            <a:r>
+              <a:rPr lang="en-US" dirty="0" smtClean="0">
+                <a:latin typeface="Consolas" pitchFamily="49" charset="0"/>
+              </a:rPr>
+              <a:t>" /&gt;</a:t>
+            </a:r>
+          </a:p>
+          <a:p>
+            <a:pPr>
+              <a:buNone/>
+            </a:pPr>
+            <a:r>
+              <a:rPr lang="en-US" dirty="0" smtClean="0">
+                <a:latin typeface="Consolas" pitchFamily="49" charset="0"/>
+              </a:rPr>
+              <a:t>  &lt;/</a:t>
+            </a:r>
+            <a:r>
+              <a:rPr lang="en-US" dirty="0" err="1" smtClean="0">
+                <a:latin typeface="Consolas" pitchFamily="49" charset="0"/>
+              </a:rPr>
+              <a:t>connectionStrings</a:t>
+            </a:r>
+            <a:r>
+              <a:rPr lang="en-US" dirty="0" smtClean="0">
+                <a:latin typeface="Consolas" pitchFamily="49" charset="0"/>
+              </a:rPr>
+              <a:t>&gt;</a:t>
+            </a:r>
+          </a:p>
+        </p:txBody>
+      </p:sp>
     </p:spTree>
   </p:cSld>
   <p:clrMapOvr>
@@ -6198,10 +6091,18 @@
           <a:p>
             <a:pPr algn="l"/>
             <a:r>
-              <a:rPr lang="en-US" sz="3800" dirty="0" smtClean="0"/>
-              <a:t>1. Enable State Service Remote Connection</a:t>
-            </a:r>
-            <a:endParaRPr lang="en-US" sz="3800" dirty="0"/>
+              <a:rPr lang="en-US" dirty="0" smtClean="0"/>
+              <a:t>3. Enable </a:t>
+            </a:r>
+            <a:r>
+              <a:rPr lang="en-US" dirty="0" err="1" smtClean="0"/>
+              <a:t>SQLServer</a:t>
+            </a:r>
+            <a:r>
+              <a:rPr lang="en-US" dirty="0" smtClean="0"/>
+              <a:t> Session Mode</a:t>
+            </a:r>
+            <a:endParaRPr lang="en-US" dirty="0"/>
           </a:p>
         </p:txBody>
       </p:sp>
@@ -6224,41 +6125,145 @@
               <a:rPr lang="en-US" sz="2200" dirty="0" smtClean="0">
                 <a:latin typeface="Consolas" pitchFamily="49" charset="0"/>
               </a:rPr>
-              <a:t>HKEY_LOCAL_MACHINE\SYSTEM\</a:t>
+              <a:t>&lt;</a:t>
             </a:r>
             <a:r>
               <a:rPr lang="en-US" sz="2200" dirty="0" err="1" smtClean="0">
                 <a:latin typeface="Consolas" pitchFamily="49" charset="0"/>
               </a:rPr>
-              <a:t>CurrentControlSet</a:t>
+              <a:t>connectionStrings</a:t>
             </a:r>
             <a:r>
               <a:rPr lang="en-US" sz="2200" dirty="0" smtClean="0">
                 <a:latin typeface="Consolas" pitchFamily="49" charset="0"/>
               </a:rPr>
-              <a:t>\Services\</a:t>
+              <a:t> </a:t>
             </a:r>
             <a:r>
               <a:rPr lang="en-US" sz="2200" dirty="0" err="1" smtClean="0">
                 <a:latin typeface="Consolas" pitchFamily="49" charset="0"/>
               </a:rPr>
-              <a:t>aspnet_state</a:t>
+              <a:t>configSource</a:t>
             </a:r>
             <a:r>
               <a:rPr lang="en-US" sz="2200" dirty="0" smtClean="0">
                 <a:latin typeface="Consolas" pitchFamily="49" charset="0"/>
               </a:rPr>
-              <a:t>\Parameters\</a:t>
+              <a:t>="</a:t>
+            </a:r>
+            <a:r>
+              <a:rPr lang="en-US" sz="2200" i="1" dirty="0" err="1" smtClean="0">
+                <a:solidFill>
+                  <a:srgbClr val="C00000"/>
+                </a:solidFill>
+                <a:latin typeface="Consolas" pitchFamily="49" charset="0"/>
+              </a:rPr>
+              <a:t>web.connectionStrings.config</a:t>
+            </a:r>
+            <a:r>
+              <a:rPr lang="en-US" sz="2200" dirty="0" smtClean="0">
+                <a:latin typeface="Consolas" pitchFamily="49" charset="0"/>
+              </a:rPr>
+              <a:t>" /&gt;</a:t>
+            </a:r>
+          </a:p>
+          <a:p>
+            <a:r>
+              <a:rPr lang="en-US" sz="2200" dirty="0" smtClean="0">
+                <a:latin typeface="Consolas" pitchFamily="49" charset="0"/>
+              </a:rPr>
+              <a:t>&lt;</a:t>
             </a:r>
             <a:r>
               <a:rPr lang="en-US" sz="2200" dirty="0" err="1" smtClean="0">
                 <a:latin typeface="Consolas" pitchFamily="49" charset="0"/>
               </a:rPr>
-              <a:t>AllowRemoteConnection</a:t>
-            </a:r>
-            <a:endParaRPr lang="en-US" sz="2200" dirty="0">
-              <a:latin typeface="Consolas" pitchFamily="49" charset="0"/>
-            </a:endParaRPr>
+              <a:t>sessionState</a:t>
+            </a:r>
+            <a:r>
+              <a:rPr lang="en-US" sz="2200" dirty="0" smtClean="0">
+                <a:latin typeface="Consolas" pitchFamily="49" charset="0"/>
+              </a:rPr>
+              <a:t> timeout="25" </a:t>
+            </a:r>
+            <a:r>
+              <a:rPr lang="en-US" sz="2200" dirty="0" err="1" smtClean="0">
+                <a:latin typeface="Consolas" pitchFamily="49" charset="0"/>
+              </a:rPr>
+              <a:t>cookieless</a:t>
+            </a:r>
+            <a:r>
+              <a:rPr lang="en-US" sz="2200" dirty="0" smtClean="0">
+                <a:latin typeface="Consolas" pitchFamily="49" charset="0"/>
+              </a:rPr>
+              <a:t>="false" </a:t>
+            </a:r>
+            <a:r>
+              <a:rPr lang="en-US" sz="2200" dirty="0" err="1" smtClean="0">
+                <a:latin typeface="Consolas" pitchFamily="49" charset="0"/>
+              </a:rPr>
+              <a:t>regenerateExpiredSessionId</a:t>
+            </a:r>
+            <a:r>
+              <a:rPr lang="en-US" sz="2200" dirty="0" smtClean="0">
+                <a:latin typeface="Consolas" pitchFamily="49" charset="0"/>
+              </a:rPr>
+              <a:t>="true" mode="</a:t>
+            </a:r>
+            <a:r>
+              <a:rPr lang="en-US" sz="2200" b="1" i="1" dirty="0" err="1" smtClean="0">
+                <a:solidFill>
+                  <a:srgbClr val="C00000"/>
+                </a:solidFill>
+                <a:latin typeface="Consolas" pitchFamily="49" charset="0"/>
+              </a:rPr>
+              <a:t>SQLServer</a:t>
+            </a:r>
+            <a:r>
+              <a:rPr lang="en-US" sz="2200" dirty="0" smtClean="0">
+                <a:latin typeface="Consolas" pitchFamily="49" charset="0"/>
+              </a:rPr>
+              <a:t>" </a:t>
+            </a:r>
+            <a:r>
+              <a:rPr lang="en-US" sz="2200" dirty="0" err="1" smtClean="0">
+                <a:latin typeface="Consolas" pitchFamily="49" charset="0"/>
+              </a:rPr>
+              <a:t>allowCustomSqlDatabase</a:t>
+            </a:r>
+            <a:r>
+              <a:rPr lang="en-US" sz="2200" dirty="0" smtClean="0">
+                <a:latin typeface="Consolas" pitchFamily="49" charset="0"/>
+              </a:rPr>
+              <a:t>="true" </a:t>
+            </a:r>
+            <a:r>
+              <a:rPr lang="en-US" sz="2200" dirty="0" err="1" smtClean="0">
+                <a:latin typeface="Consolas" pitchFamily="49" charset="0"/>
+              </a:rPr>
+              <a:t>sqlConnectionString</a:t>
+            </a:r>
+            <a:r>
+              <a:rPr lang="en-US" sz="2200" dirty="0" smtClean="0">
+                <a:latin typeface="Consolas" pitchFamily="49" charset="0"/>
+              </a:rPr>
+              <a:t>="</a:t>
+            </a:r>
+            <a:r>
+              <a:rPr lang="en-US" sz="2200" i="1" dirty="0" err="1" smtClean="0">
+                <a:solidFill>
+                  <a:srgbClr val="C00000"/>
+                </a:solidFill>
+                <a:latin typeface="Consolas" pitchFamily="49" charset="0"/>
+              </a:rPr>
+              <a:t>snsState</a:t>
+            </a:r>
+            <a:r>
+              <a:rPr lang="en-US" sz="2200" dirty="0" smtClean="0">
+                <a:latin typeface="Consolas" pitchFamily="49" charset="0"/>
+              </a:rPr>
+              <a:t>" /&gt;</a:t>
+            </a:r>
           </a:p>
         </p:txBody>
       </p:sp>
@@ -6279,8 +6284,8 @@
         </p:blipFill>
         <p:spPr bwMode="auto">
           <a:xfrm>
-            <a:off x="1371600" y="2667000"/>
-            <a:ext cx="6390640" cy="3220720"/>
+            <a:off x="1019175" y="4038600"/>
+            <a:ext cx="7105650" cy="2057400"/>
           </a:xfrm>
           <a:prstGeom prst="rect">
             <a:avLst/>
@@ -6303,517 +6308,6 @@
 </file>
 
 <file path=ppt/slides/slide22.xml><?xml version="1.0" encoding="utf-8"?>
-<p:sld xmlns:a="http://schemas.openxmlformats.org/drawingml/2006/main" xmlns:r="http://schemas.openxmlformats.org/officeDocument/2006/relationships" xmlns:p="http://schemas.openxmlformats.org/presentationml/2006/main">
-  <p:cSld>
-    <p:spTree>
-      <p:nvGrpSpPr>
-        <p:cNvPr id="1" name=""/>
-        <p:cNvGrpSpPr/>
-        <p:nvPr/>
-      </p:nvGrpSpPr>
-      <p:grpSpPr>
-        <a:xfrm>
-          <a:off x="0" y="0"/>
-          <a:ext cx="0" cy="0"/>
-          <a:chOff x="0" y="0"/>
-          <a:chExt cx="0" cy="0"/>
-        </a:xfrm>
-      </p:grpSpPr>
-      <p:sp>
-        <p:nvSpPr>
-          <p:cNvPr id="2" name="Title 1"/>
-          <p:cNvSpPr>
-            <a:spLocks noGrp="1"/>
-          </p:cNvSpPr>
-          <p:nvPr>
-            <p:ph type="title"/>
-          </p:nvPr>
-        </p:nvSpPr>
-        <p:spPr/>
-        <p:txBody>
-          <a:bodyPr/>
-          <a:lstStyle/>
-          <a:p>
-            <a:pPr algn="l"/>
-            <a:r>
-              <a:rPr lang="en-US" dirty="0" smtClean="0"/>
-              <a:t>2. Open State Service Firewall Port</a:t>
-            </a:r>
-            <a:endParaRPr lang="en-US" dirty="0"/>
-          </a:p>
-        </p:txBody>
-      </p:sp>
-      <p:sp>
-        <p:nvSpPr>
-          <p:cNvPr id="3" name="Content Placeholder 2"/>
-          <p:cNvSpPr>
-            <a:spLocks noGrp="1"/>
-          </p:cNvSpPr>
-          <p:nvPr>
-            <p:ph idx="1"/>
-          </p:nvPr>
-        </p:nvSpPr>
-        <p:spPr/>
-        <p:txBody>
-          <a:bodyPr/>
-          <a:lstStyle/>
-          <a:p>
-            <a:r>
-              <a:rPr lang="en-US" sz="2200" dirty="0" smtClean="0">
-                <a:latin typeface="+mj-lt"/>
-              </a:rPr>
-              <a:t>Port: </a:t>
-            </a:r>
-            <a:r>
-              <a:rPr lang="en-US" sz="2200" b="1" dirty="0" smtClean="0">
-                <a:latin typeface="+mj-lt"/>
-              </a:rPr>
-              <a:t>42424</a:t>
-            </a:r>
-            <a:endParaRPr lang="en-US" sz="2200" b="1" dirty="0">
-              <a:latin typeface="+mj-lt"/>
-            </a:endParaRPr>
-          </a:p>
-        </p:txBody>
-      </p:sp>
-      <p:pic>
-        <p:nvPicPr>
-          <p:cNvPr id="3074" name="Picture 2"/>
-          <p:cNvPicPr>
-            <a:picLocks noChangeAspect="1" noChangeArrowheads="1"/>
-          </p:cNvPicPr>
-          <p:nvPr/>
-        </p:nvPicPr>
-        <p:blipFill>
-          <a:blip r:embed="rId2" cstate="print"/>
-          <a:srcRect/>
-          <a:stretch>
-            <a:fillRect/>
-          </a:stretch>
-        </p:blipFill>
-        <p:spPr bwMode="auto">
-          <a:xfrm>
-            <a:off x="914400" y="2743200"/>
-            <a:ext cx="7287260" cy="3200400"/>
-          </a:xfrm>
-          <a:prstGeom prst="rect">
-            <a:avLst/>
-          </a:prstGeom>
-          <a:noFill/>
-          <a:ln w="9525">
-            <a:noFill/>
-            <a:miter lim="800000"/>
-            <a:headEnd/>
-            <a:tailEnd/>
-          </a:ln>
-        </p:spPr>
-      </p:pic>
-    </p:spTree>
-  </p:cSld>
-  <p:clrMapOvr>
-    <a:masterClrMapping/>
-  </p:clrMapOvr>
-</p:sld>
-</file>
-
-<file path=ppt/slides/slide23.xml><?xml version="1.0" encoding="utf-8"?>
-<p:sld xmlns:a="http://schemas.openxmlformats.org/drawingml/2006/main" xmlns:r="http://schemas.openxmlformats.org/officeDocument/2006/relationships" xmlns:p="http://schemas.openxmlformats.org/presentationml/2006/main">
-  <p:cSld>
-    <p:spTree>
-      <p:nvGrpSpPr>
-        <p:cNvPr id="1" name=""/>
-        <p:cNvGrpSpPr/>
-        <p:nvPr/>
-      </p:nvGrpSpPr>
-      <p:grpSpPr>
-        <a:xfrm>
-          <a:off x="0" y="0"/>
-          <a:ext cx="0" cy="0"/>
-          <a:chOff x="0" y="0"/>
-          <a:chExt cx="0" cy="0"/>
-        </a:xfrm>
-      </p:grpSpPr>
-      <p:sp>
-        <p:nvSpPr>
-          <p:cNvPr id="2" name="Title 1"/>
-          <p:cNvSpPr>
-            <a:spLocks noGrp="1"/>
-          </p:cNvSpPr>
-          <p:nvPr>
-            <p:ph type="title"/>
-          </p:nvPr>
-        </p:nvSpPr>
-        <p:spPr/>
-        <p:txBody>
-          <a:bodyPr/>
-          <a:lstStyle/>
-          <a:p>
-            <a:pPr algn="l"/>
-            <a:r>
-              <a:rPr lang="en-US" dirty="0" smtClean="0"/>
-              <a:t>3. Start Session State Service</a:t>
-            </a:r>
-            <a:endParaRPr lang="en-US" dirty="0"/>
-          </a:p>
-        </p:txBody>
-      </p:sp>
-      <p:sp>
-        <p:nvSpPr>
-          <p:cNvPr id="3" name="Content Placeholder 2"/>
-          <p:cNvSpPr>
-            <a:spLocks noGrp="1"/>
-          </p:cNvSpPr>
-          <p:nvPr>
-            <p:ph idx="1"/>
-          </p:nvPr>
-        </p:nvSpPr>
-        <p:spPr/>
-        <p:txBody>
-          <a:bodyPr/>
-          <a:lstStyle/>
-          <a:p>
-            <a:r>
-              <a:rPr lang="en-US" sz="2400" dirty="0" smtClean="0">
-                <a:latin typeface="Consolas" pitchFamily="49" charset="0"/>
-              </a:rPr>
-              <a:t>net start </a:t>
-            </a:r>
-            <a:r>
-              <a:rPr lang="en-US" sz="2400" dirty="0" err="1" smtClean="0">
-                <a:latin typeface="Consolas" pitchFamily="49" charset="0"/>
-              </a:rPr>
-              <a:t>aspnet_state</a:t>
-            </a:r>
-            <a:endParaRPr lang="en-US" sz="2400" dirty="0">
-              <a:latin typeface="Consolas" pitchFamily="49" charset="0"/>
-            </a:endParaRPr>
-          </a:p>
-        </p:txBody>
-      </p:sp>
-      <p:pic>
-        <p:nvPicPr>
-          <p:cNvPr id="1027" name="Picture 3"/>
-          <p:cNvPicPr>
-            <a:picLocks noChangeAspect="1" noChangeArrowheads="1"/>
-          </p:cNvPicPr>
-          <p:nvPr/>
-        </p:nvPicPr>
-        <p:blipFill>
-          <a:blip r:embed="rId2" cstate="print"/>
-          <a:srcRect/>
-          <a:stretch>
-            <a:fillRect/>
-          </a:stretch>
-        </p:blipFill>
-        <p:spPr bwMode="auto">
-          <a:xfrm>
-            <a:off x="439738" y="2593975"/>
-            <a:ext cx="8264525" cy="2968625"/>
-          </a:xfrm>
-          <a:prstGeom prst="rect">
-            <a:avLst/>
-          </a:prstGeom>
-          <a:noFill/>
-          <a:ln w="9525">
-            <a:noFill/>
-            <a:miter lim="800000"/>
-            <a:headEnd/>
-            <a:tailEnd/>
-          </a:ln>
-        </p:spPr>
-      </p:pic>
-    </p:spTree>
-  </p:cSld>
-  <p:clrMapOvr>
-    <a:masterClrMapping/>
-  </p:clrMapOvr>
-</p:sld>
-</file>
-
-<file path=ppt/slides/slide24.xml><?xml version="1.0" encoding="utf-8"?>
-<p:sld xmlns:a="http://schemas.openxmlformats.org/drawingml/2006/main" xmlns:r="http://schemas.openxmlformats.org/officeDocument/2006/relationships" xmlns:p="http://schemas.openxmlformats.org/presentationml/2006/main">
-  <p:cSld>
-    <p:spTree>
-      <p:nvGrpSpPr>
-        <p:cNvPr id="1" name=""/>
-        <p:cNvGrpSpPr/>
-        <p:nvPr/>
-      </p:nvGrpSpPr>
-      <p:grpSpPr>
-        <a:xfrm>
-          <a:off x="0" y="0"/>
-          <a:ext cx="0" cy="0"/>
-          <a:chOff x="0" y="0"/>
-          <a:chExt cx="0" cy="0"/>
-        </a:xfrm>
-      </p:grpSpPr>
-      <p:sp>
-        <p:nvSpPr>
-          <p:cNvPr id="2" name="Title 1"/>
-          <p:cNvSpPr>
-            <a:spLocks noGrp="1"/>
-          </p:cNvSpPr>
-          <p:nvPr>
-            <p:ph type="title"/>
-          </p:nvPr>
-        </p:nvSpPr>
-        <p:spPr/>
-        <p:txBody>
-          <a:bodyPr/>
-          <a:lstStyle/>
-          <a:p>
-            <a:pPr algn="l"/>
-            <a:r>
-              <a:rPr lang="en-US" sz="4200" dirty="0" smtClean="0"/>
-              <a:t>4. Enable </a:t>
-            </a:r>
-            <a:r>
-              <a:rPr lang="en-US" sz="4200" dirty="0" err="1" smtClean="0"/>
-              <a:t>StateServer</a:t>
-            </a:r>
-            <a:r>
-              <a:rPr lang="en-US" sz="4200" dirty="0" smtClean="0"/>
-              <a:t> Session Mode</a:t>
-            </a:r>
-            <a:endParaRPr lang="en-US" sz="4200" dirty="0"/>
-          </a:p>
-        </p:txBody>
-      </p:sp>
-      <p:sp>
-        <p:nvSpPr>
-          <p:cNvPr id="4" name="Rectangle 3"/>
-          <p:cNvSpPr/>
-          <p:nvPr/>
-        </p:nvSpPr>
-        <p:spPr>
-          <a:xfrm>
-            <a:off x="533400" y="2438400"/>
-            <a:ext cx="7924800" cy="2554545"/>
-          </a:xfrm>
-          <a:prstGeom prst="rect">
-            <a:avLst/>
-          </a:prstGeom>
-        </p:spPr>
-        <p:style>
-          <a:lnRef idx="1">
-            <a:schemeClr val="dk1"/>
-          </a:lnRef>
-          <a:fillRef idx="2">
-            <a:schemeClr val="dk1"/>
-          </a:fillRef>
-          <a:effectRef idx="1">
-            <a:schemeClr val="dk1"/>
-          </a:effectRef>
-          <a:fontRef idx="minor">
-            <a:schemeClr val="dk1"/>
-          </a:fontRef>
-        </p:style>
-        <p:txBody>
-          <a:bodyPr wrap="square">
-            <a:spAutoFit/>
-          </a:bodyPr>
-          <a:lstStyle/>
-          <a:p>
-            <a:pPr>
-              <a:buNone/>
-            </a:pPr>
-            <a:r>
-              <a:rPr lang="en-US" sz="2000" dirty="0" smtClean="0">
-                <a:latin typeface="Consolas" pitchFamily="49" charset="0"/>
-              </a:rPr>
-              <a:t> &lt;system.web&gt;</a:t>
-            </a:r>
-          </a:p>
-          <a:p>
-            <a:pPr>
-              <a:buNone/>
-            </a:pPr>
-            <a:r>
-              <a:rPr lang="en-US" sz="2000" dirty="0" smtClean="0">
-                <a:latin typeface="Consolas" pitchFamily="49" charset="0"/>
-              </a:rPr>
-              <a:t>    &lt;</a:t>
-            </a:r>
-            <a:r>
-              <a:rPr lang="en-US" sz="2000" dirty="0" err="1" smtClean="0">
-                <a:latin typeface="Consolas" pitchFamily="49" charset="0"/>
-              </a:rPr>
-              <a:t>httpCookies</a:t>
-            </a:r>
-            <a:r>
-              <a:rPr lang="en-US" sz="2000" dirty="0" smtClean="0">
-                <a:latin typeface="Consolas" pitchFamily="49" charset="0"/>
-              </a:rPr>
-              <a:t> </a:t>
-            </a:r>
-            <a:r>
-              <a:rPr lang="en-US" sz="2000" dirty="0" err="1" smtClean="0">
-                <a:latin typeface="Consolas" pitchFamily="49" charset="0"/>
-              </a:rPr>
-              <a:t>requireSSL</a:t>
-            </a:r>
-            <a:r>
-              <a:rPr lang="en-US" sz="2000" dirty="0" smtClean="0">
-                <a:latin typeface="Consolas" pitchFamily="49" charset="0"/>
-              </a:rPr>
-              <a:t>="true" /&gt;</a:t>
-            </a:r>
-          </a:p>
-          <a:p>
-            <a:pPr>
-              <a:buNone/>
-            </a:pPr>
-            <a:r>
-              <a:rPr lang="en-US" sz="2000" dirty="0" smtClean="0">
-                <a:latin typeface="Consolas" pitchFamily="49" charset="0"/>
-              </a:rPr>
-              <a:t>    &lt;</a:t>
-            </a:r>
-            <a:r>
-              <a:rPr lang="en-US" sz="2000" dirty="0" err="1" smtClean="0">
-                <a:latin typeface="Consolas" pitchFamily="49" charset="0"/>
-              </a:rPr>
-              <a:t>machineKey</a:t>
-            </a:r>
-            <a:r>
-              <a:rPr lang="en-US" sz="2000" dirty="0" smtClean="0">
-                <a:latin typeface="Consolas" pitchFamily="49" charset="0"/>
-              </a:rPr>
-              <a:t> validation="SHA1" /&gt;</a:t>
-            </a:r>
-          </a:p>
-          <a:p>
-            <a:pPr>
-              <a:buNone/>
-            </a:pPr>
-            <a:r>
-              <a:rPr lang="en-US" sz="2000" dirty="0" smtClean="0">
-                <a:latin typeface="Consolas" pitchFamily="49" charset="0"/>
-              </a:rPr>
-              <a:t>    &lt;</a:t>
-            </a:r>
-            <a:r>
-              <a:rPr lang="en-US" sz="2000" dirty="0" err="1" smtClean="0">
-                <a:latin typeface="Consolas" pitchFamily="49" charset="0"/>
-              </a:rPr>
-              <a:t>sessionState</a:t>
-            </a:r>
-            <a:r>
-              <a:rPr lang="en-US" sz="2000" dirty="0" smtClean="0">
-                <a:latin typeface="Consolas" pitchFamily="49" charset="0"/>
-              </a:rPr>
-              <a:t> timeout="25" </a:t>
-            </a:r>
-            <a:r>
-              <a:rPr lang="en-US" sz="2000" dirty="0" err="1" smtClean="0">
-                <a:latin typeface="Consolas" pitchFamily="49" charset="0"/>
-              </a:rPr>
-              <a:t>cookieless</a:t>
-            </a:r>
-            <a:r>
-              <a:rPr lang="en-US" sz="2000" dirty="0" smtClean="0">
-                <a:latin typeface="Consolas" pitchFamily="49" charset="0"/>
-              </a:rPr>
-              <a:t>="false" </a:t>
-            </a:r>
-            <a:r>
-              <a:rPr lang="en-US" sz="2000" dirty="0" err="1" smtClean="0">
-                <a:latin typeface="Consolas" pitchFamily="49" charset="0"/>
-              </a:rPr>
-              <a:t>regenerateExpiredSessionId</a:t>
-            </a:r>
-            <a:r>
-              <a:rPr lang="en-US" sz="2000" dirty="0" smtClean="0">
-                <a:latin typeface="Consolas" pitchFamily="49" charset="0"/>
-              </a:rPr>
-              <a:t>="true" mode="</a:t>
-            </a:r>
-            <a:r>
-              <a:rPr lang="en-US" sz="2000" b="1" dirty="0" err="1" smtClean="0">
-                <a:solidFill>
-                  <a:srgbClr val="C00000"/>
-                </a:solidFill>
-                <a:latin typeface="Consolas" pitchFamily="49" charset="0"/>
-              </a:rPr>
-              <a:t>StateServer</a:t>
-            </a:r>
-            <a:r>
-              <a:rPr lang="en-US" sz="2000" dirty="0" smtClean="0">
-                <a:latin typeface="Consolas" pitchFamily="49" charset="0"/>
-              </a:rPr>
-              <a:t>" </a:t>
-            </a:r>
-            <a:r>
-              <a:rPr lang="en-US" sz="2000" dirty="0" err="1" smtClean="0">
-                <a:latin typeface="Consolas" pitchFamily="49" charset="0"/>
-              </a:rPr>
-              <a:t>stateConnectionString</a:t>
-            </a:r>
-            <a:r>
-              <a:rPr lang="en-US" sz="2000" dirty="0" smtClean="0">
-                <a:latin typeface="Consolas" pitchFamily="49" charset="0"/>
-              </a:rPr>
-              <a:t>="</a:t>
-            </a:r>
-            <a:r>
-              <a:rPr lang="en-US" sz="2000" dirty="0" err="1" smtClean="0">
-                <a:latin typeface="Consolas" pitchFamily="49" charset="0"/>
-              </a:rPr>
-              <a:t>tcpip</a:t>
-            </a:r>
-            <a:r>
-              <a:rPr lang="en-US" sz="2000" dirty="0" smtClean="0">
-                <a:latin typeface="Consolas" pitchFamily="49" charset="0"/>
-              </a:rPr>
-              <a:t>=192.168.101.120:42424" </a:t>
-            </a:r>
-            <a:r>
-              <a:rPr lang="en-US" sz="2000" dirty="0" err="1" smtClean="0">
-                <a:latin typeface="Consolas" pitchFamily="49" charset="0"/>
-              </a:rPr>
-              <a:t>stateNetworkTimeout</a:t>
-            </a:r>
-            <a:r>
-              <a:rPr lang="en-US" sz="2000" dirty="0" smtClean="0">
-                <a:latin typeface="Consolas" pitchFamily="49" charset="0"/>
-              </a:rPr>
-              <a:t>="60" </a:t>
-            </a:r>
-            <a:r>
-              <a:rPr lang="en-US" sz="2000" dirty="0" err="1" smtClean="0">
-                <a:latin typeface="Consolas" pitchFamily="49" charset="0"/>
-              </a:rPr>
-              <a:t>useHostingIdentity</a:t>
-            </a:r>
-            <a:r>
-              <a:rPr lang="en-US" sz="2000" dirty="0" smtClean="0">
-                <a:latin typeface="Consolas" pitchFamily="49" charset="0"/>
-              </a:rPr>
-              <a:t>="false" /&gt;</a:t>
-            </a:r>
-          </a:p>
-          <a:p>
-            <a:pPr>
-              <a:buNone/>
-            </a:pPr>
-            <a:r>
-              <a:rPr lang="en-US" sz="2000" dirty="0" smtClean="0">
-                <a:latin typeface="Consolas" pitchFamily="49" charset="0"/>
-              </a:rPr>
-              <a:t>...</a:t>
-            </a:r>
-          </a:p>
-        </p:txBody>
-      </p:sp>
-    </p:spTree>
-  </p:cSld>
-  <p:clrMapOvr>
-    <a:masterClrMapping/>
-  </p:clrMapOvr>
-</p:sld>
-</file>
-
-<file path=ppt/slides/slide25.xml><?xml version="1.0" encoding="utf-8"?>
 <p:sld xmlns:a="http://schemas.openxmlformats.org/drawingml/2006/main" xmlns:r="http://schemas.openxmlformats.org/officeDocument/2006/relationships" xmlns:p="http://schemas.openxmlformats.org/presentationml/2006/main">
   <p:cSld>
     <p:spTree>
@@ -6864,6 +6358,372 @@
 </p:sld>
 </file>
 
+<file path=ppt/slides/slide23.xml><?xml version="1.0" encoding="utf-8"?>
+<p:sld xmlns:a="http://schemas.openxmlformats.org/drawingml/2006/main" xmlns:r="http://schemas.openxmlformats.org/officeDocument/2006/relationships" xmlns:p="http://schemas.openxmlformats.org/presentationml/2006/main">
+  <p:cSld>
+    <p:spTree>
+      <p:nvGrpSpPr>
+        <p:cNvPr id="1" name=""/>
+        <p:cNvGrpSpPr/>
+        <p:nvPr/>
+      </p:nvGrpSpPr>
+      <p:grpSpPr>
+        <a:xfrm>
+          <a:off x="0" y="0"/>
+          <a:ext cx="0" cy="0"/>
+          <a:chOff x="0" y="0"/>
+          <a:chExt cx="0" cy="0"/>
+        </a:xfrm>
+      </p:grpSpPr>
+      <p:sp>
+        <p:nvSpPr>
+          <p:cNvPr id="2" name="Title 1"/>
+          <p:cNvSpPr>
+            <a:spLocks noGrp="1"/>
+          </p:cNvSpPr>
+          <p:nvPr>
+            <p:ph type="title"/>
+          </p:nvPr>
+        </p:nvSpPr>
+        <p:spPr/>
+        <p:txBody>
+          <a:bodyPr/>
+          <a:lstStyle/>
+          <a:p>
+            <a:pPr algn="l"/>
+            <a:r>
+              <a:rPr lang="en-US" sz="3800" dirty="0" smtClean="0"/>
+              <a:t>1. Enable State Service Remote Connection</a:t>
+            </a:r>
+            <a:endParaRPr lang="en-US" sz="3800" dirty="0"/>
+          </a:p>
+        </p:txBody>
+      </p:sp>
+      <p:sp>
+        <p:nvSpPr>
+          <p:cNvPr id="3" name="Content Placeholder 2"/>
+          <p:cNvSpPr>
+            <a:spLocks noGrp="1"/>
+          </p:cNvSpPr>
+          <p:nvPr>
+            <p:ph idx="1"/>
+          </p:nvPr>
+        </p:nvSpPr>
+        <p:spPr/>
+        <p:txBody>
+          <a:bodyPr/>
+          <a:lstStyle/>
+          <a:p>
+            <a:r>
+              <a:rPr lang="en-US" sz="2200" dirty="0" smtClean="0">
+                <a:latin typeface="Consolas" pitchFamily="49" charset="0"/>
+              </a:rPr>
+              <a:t>HKEY_LOCAL_MACHINE\SYSTEM\</a:t>
+            </a:r>
+            <a:r>
+              <a:rPr lang="en-US" sz="2200" dirty="0" err="1" smtClean="0">
+                <a:latin typeface="Consolas" pitchFamily="49" charset="0"/>
+              </a:rPr>
+              <a:t>CurrentControlSet</a:t>
+            </a:r>
+            <a:r>
+              <a:rPr lang="en-US" sz="2200" dirty="0" smtClean="0">
+                <a:latin typeface="Consolas" pitchFamily="49" charset="0"/>
+              </a:rPr>
+              <a:t>\Services\</a:t>
+            </a:r>
+            <a:r>
+              <a:rPr lang="en-US" sz="2200" dirty="0" err="1" smtClean="0">
+                <a:latin typeface="Consolas" pitchFamily="49" charset="0"/>
+              </a:rPr>
+              <a:t>aspnet_state</a:t>
+            </a:r>
+            <a:r>
+              <a:rPr lang="en-US" sz="2200" dirty="0" smtClean="0">
+                <a:latin typeface="Consolas" pitchFamily="49" charset="0"/>
+              </a:rPr>
+              <a:t>\Parameters\</a:t>
+            </a:r>
+            <a:r>
+              <a:rPr lang="en-US" sz="2200" dirty="0" err="1" smtClean="0">
+                <a:latin typeface="Consolas" pitchFamily="49" charset="0"/>
+              </a:rPr>
+              <a:t>AllowRemoteConnection</a:t>
+            </a:r>
+            <a:endParaRPr lang="en-US" sz="2200" dirty="0">
+              <a:latin typeface="Consolas" pitchFamily="49" charset="0"/>
+            </a:endParaRPr>
+          </a:p>
+        </p:txBody>
+      </p:sp>
+      <p:pic>
+        <p:nvPicPr>
+          <p:cNvPr id="2050" name="Picture 2"/>
+          <p:cNvPicPr>
+            <a:picLocks noChangeAspect="1" noChangeArrowheads="1"/>
+          </p:cNvPicPr>
+          <p:nvPr/>
+        </p:nvPicPr>
+        <p:blipFill>
+          <a:blip r:embed="rId2" cstate="print"/>
+          <a:srcRect/>
+          <a:stretch>
+            <a:fillRect/>
+          </a:stretch>
+        </p:blipFill>
+        <p:spPr bwMode="auto">
+          <a:xfrm>
+            <a:off x="1371600" y="2667000"/>
+            <a:ext cx="6390640" cy="3220720"/>
+          </a:xfrm>
+          <a:prstGeom prst="rect">
+            <a:avLst/>
+          </a:prstGeom>
+          <a:noFill/>
+          <a:ln w="9525">
+            <a:noFill/>
+            <a:miter lim="800000"/>
+            <a:headEnd/>
+            <a:tailEnd/>
+          </a:ln>
+        </p:spPr>
+      </p:pic>
+    </p:spTree>
+  </p:cSld>
+  <p:clrMapOvr>
+    <a:masterClrMapping/>
+  </p:clrMapOvr>
+</p:sld>
+</file>
+
+<file path=ppt/slides/slide24.xml><?xml version="1.0" encoding="utf-8"?>
+<p:sld xmlns:a="http://schemas.openxmlformats.org/drawingml/2006/main" xmlns:r="http://schemas.openxmlformats.org/officeDocument/2006/relationships" xmlns:p="http://schemas.openxmlformats.org/presentationml/2006/main">
+  <p:cSld>
+    <p:spTree>
+      <p:nvGrpSpPr>
+        <p:cNvPr id="1" name=""/>
+        <p:cNvGrpSpPr/>
+        <p:nvPr/>
+      </p:nvGrpSpPr>
+      <p:grpSpPr>
+        <a:xfrm>
+          <a:off x="0" y="0"/>
+          <a:ext cx="0" cy="0"/>
+          <a:chOff x="0" y="0"/>
+          <a:chExt cx="0" cy="0"/>
+        </a:xfrm>
+      </p:grpSpPr>
+      <p:sp>
+        <p:nvSpPr>
+          <p:cNvPr id="2" name="Title 1"/>
+          <p:cNvSpPr>
+            <a:spLocks noGrp="1"/>
+          </p:cNvSpPr>
+          <p:nvPr>
+            <p:ph type="title"/>
+          </p:nvPr>
+        </p:nvSpPr>
+        <p:spPr/>
+        <p:txBody>
+          <a:bodyPr/>
+          <a:lstStyle/>
+          <a:p>
+            <a:pPr algn="l"/>
+            <a:r>
+              <a:rPr lang="en-US" dirty="0" smtClean="0"/>
+              <a:t>2. Open State Service Firewall Port</a:t>
+            </a:r>
+            <a:endParaRPr lang="en-US" dirty="0"/>
+          </a:p>
+        </p:txBody>
+      </p:sp>
+      <p:sp>
+        <p:nvSpPr>
+          <p:cNvPr id="3" name="Content Placeholder 2"/>
+          <p:cNvSpPr>
+            <a:spLocks noGrp="1"/>
+          </p:cNvSpPr>
+          <p:nvPr>
+            <p:ph idx="1"/>
+          </p:nvPr>
+        </p:nvSpPr>
+        <p:spPr/>
+        <p:txBody>
+          <a:bodyPr/>
+          <a:lstStyle/>
+          <a:p>
+            <a:r>
+              <a:rPr lang="en-US" sz="2200" dirty="0" smtClean="0">
+                <a:latin typeface="+mj-lt"/>
+              </a:rPr>
+              <a:t>Port: </a:t>
+            </a:r>
+            <a:r>
+              <a:rPr lang="en-US" sz="2200" b="1" dirty="0" smtClean="0">
+                <a:latin typeface="+mj-lt"/>
+              </a:rPr>
+              <a:t>42424</a:t>
+            </a:r>
+            <a:endParaRPr lang="en-US" sz="2200" b="1" dirty="0">
+              <a:latin typeface="+mj-lt"/>
+            </a:endParaRPr>
+          </a:p>
+        </p:txBody>
+      </p:sp>
+      <p:pic>
+        <p:nvPicPr>
+          <p:cNvPr id="3074" name="Picture 2"/>
+          <p:cNvPicPr>
+            <a:picLocks noChangeAspect="1" noChangeArrowheads="1"/>
+          </p:cNvPicPr>
+          <p:nvPr/>
+        </p:nvPicPr>
+        <p:blipFill>
+          <a:blip r:embed="rId2" cstate="print"/>
+          <a:srcRect/>
+          <a:stretch>
+            <a:fillRect/>
+          </a:stretch>
+        </p:blipFill>
+        <p:spPr bwMode="auto">
+          <a:xfrm>
+            <a:off x="914400" y="2743200"/>
+            <a:ext cx="7287260" cy="3200400"/>
+          </a:xfrm>
+          <a:prstGeom prst="rect">
+            <a:avLst/>
+          </a:prstGeom>
+          <a:noFill/>
+          <a:ln w="9525">
+            <a:noFill/>
+            <a:miter lim="800000"/>
+            <a:headEnd/>
+            <a:tailEnd/>
+          </a:ln>
+        </p:spPr>
+      </p:pic>
+    </p:spTree>
+  </p:cSld>
+  <p:clrMapOvr>
+    <a:masterClrMapping/>
+  </p:clrMapOvr>
+</p:sld>
+</file>
+
+<file path=ppt/slides/slide25.xml><?xml version="1.0" encoding="utf-8"?>
+<p:sld xmlns:a="http://schemas.openxmlformats.org/drawingml/2006/main" xmlns:r="http://schemas.openxmlformats.org/officeDocument/2006/relationships" xmlns:p="http://schemas.openxmlformats.org/presentationml/2006/main">
+  <p:cSld>
+    <p:spTree>
+      <p:nvGrpSpPr>
+        <p:cNvPr id="1" name=""/>
+        <p:cNvGrpSpPr/>
+        <p:nvPr/>
+      </p:nvGrpSpPr>
+      <p:grpSpPr>
+        <a:xfrm>
+          <a:off x="0" y="0"/>
+          <a:ext cx="0" cy="0"/>
+          <a:chOff x="0" y="0"/>
+          <a:chExt cx="0" cy="0"/>
+        </a:xfrm>
+      </p:grpSpPr>
+      <p:sp>
+        <p:nvSpPr>
+          <p:cNvPr id="2" name="Title 1"/>
+          <p:cNvSpPr>
+            <a:spLocks noGrp="1"/>
+          </p:cNvSpPr>
+          <p:nvPr>
+            <p:ph type="title"/>
+          </p:nvPr>
+        </p:nvSpPr>
+        <p:spPr/>
+        <p:txBody>
+          <a:bodyPr/>
+          <a:lstStyle/>
+          <a:p>
+            <a:pPr algn="l"/>
+            <a:r>
+              <a:rPr lang="en-US" dirty="0" smtClean="0"/>
+              <a:t>3. Start Session State Service</a:t>
+            </a:r>
+            <a:endParaRPr lang="en-US" dirty="0"/>
+          </a:p>
+        </p:txBody>
+      </p:sp>
+      <p:sp>
+        <p:nvSpPr>
+          <p:cNvPr id="3" name="Content Placeholder 2"/>
+          <p:cNvSpPr>
+            <a:spLocks noGrp="1"/>
+          </p:cNvSpPr>
+          <p:nvPr>
+            <p:ph idx="1"/>
+          </p:nvPr>
+        </p:nvSpPr>
+        <p:spPr/>
+        <p:txBody>
+          <a:bodyPr/>
+          <a:lstStyle/>
+          <a:p>
+            <a:r>
+              <a:rPr lang="en-US" sz="2400" dirty="0" smtClean="0">
+                <a:latin typeface="Consolas" pitchFamily="49" charset="0"/>
+              </a:rPr>
+              <a:t>net start </a:t>
+            </a:r>
+            <a:r>
+              <a:rPr lang="en-US" sz="2400" dirty="0" err="1" smtClean="0">
+                <a:latin typeface="Consolas" pitchFamily="49" charset="0"/>
+              </a:rPr>
+              <a:t>aspnet_state</a:t>
+            </a:r>
+            <a:endParaRPr lang="en-US" sz="2400" dirty="0">
+              <a:latin typeface="Consolas" pitchFamily="49" charset="0"/>
+            </a:endParaRPr>
+          </a:p>
+        </p:txBody>
+      </p:sp>
+      <p:pic>
+        <p:nvPicPr>
+          <p:cNvPr id="1027" name="Picture 3"/>
+          <p:cNvPicPr>
+            <a:picLocks noChangeAspect="1" noChangeArrowheads="1"/>
+          </p:cNvPicPr>
+          <p:nvPr/>
+        </p:nvPicPr>
+        <p:blipFill>
+          <a:blip r:embed="rId2" cstate="print"/>
+          <a:srcRect/>
+          <a:stretch>
+            <a:fillRect/>
+          </a:stretch>
+        </p:blipFill>
+        <p:spPr bwMode="auto">
+          <a:xfrm>
+            <a:off x="439738" y="2593975"/>
+            <a:ext cx="8264525" cy="2968625"/>
+          </a:xfrm>
+          <a:prstGeom prst="rect">
+            <a:avLst/>
+          </a:prstGeom>
+          <a:noFill/>
+          <a:ln w="9525">
+            <a:noFill/>
+            <a:miter lim="800000"/>
+            <a:headEnd/>
+            <a:tailEnd/>
+          </a:ln>
+        </p:spPr>
+      </p:pic>
+    </p:spTree>
+  </p:cSld>
+  <p:clrMapOvr>
+    <a:masterClrMapping/>
+  </p:clrMapOvr>
+</p:sld>
+</file>
+
 <file path=ppt/slides/slide26.xml><?xml version="1.0" encoding="utf-8"?>
 <p:sld xmlns:a="http://schemas.openxmlformats.org/drawingml/2006/main" xmlns:r="http://schemas.openxmlformats.org/officeDocument/2006/relationships" xmlns:p="http://schemas.openxmlformats.org/presentationml/2006/main">
   <p:cSld>
@@ -6896,92 +6756,249 @@
           <a:bodyPr/>
           <a:lstStyle/>
           <a:p>
-            <a:r>
-              <a:rPr lang="en-US" dirty="0" smtClean="0"/>
-              <a:t>Distributed Cache [3]</a:t>
-            </a:r>
-            <a:endParaRPr lang="en-US" dirty="0"/>
-          </a:p>
-        </p:txBody>
-      </p:sp>
-      <p:sp>
-        <p:nvSpPr>
-          <p:cNvPr id="3" name="Content Placeholder 2"/>
-          <p:cNvSpPr>
-            <a:spLocks noGrp="1"/>
-          </p:cNvSpPr>
-          <p:nvPr>
-            <p:ph idx="1"/>
-          </p:nvPr>
-        </p:nvSpPr>
-        <p:spPr/>
-        <p:txBody>
-          <a:bodyPr/>
-          <a:lstStyle/>
-          <a:p>
-            <a:r>
-              <a:rPr lang="en-US" sz="2400" dirty="0" smtClean="0">
-                <a:hlinkClick r:id="rId2"/>
-              </a:rPr>
-              <a:t>https://github.com/memcached/memcached/wiki</a:t>
-            </a:r>
-            <a:endParaRPr lang="en-US" sz="2400" dirty="0" smtClean="0"/>
-          </a:p>
-          <a:p>
-            <a:r>
-              <a:rPr lang="en-US" sz="2400" dirty="0" smtClean="0">
-                <a:hlinkClick r:id="rId3"/>
-              </a:rPr>
-              <a:t>https://redis.io/docs/getting-started/</a:t>
-            </a:r>
-            <a:endParaRPr lang="en-US" sz="2400" dirty="0" smtClean="0"/>
-          </a:p>
-          <a:p>
-            <a:r>
-              <a:rPr lang="en-US" sz="2400" dirty="0" smtClean="0">
-                <a:hlinkClick r:id="rId4"/>
-              </a:rPr>
-              <a:t>https://codeburst.io/redis-what-and-why-d52b6829813</a:t>
-            </a:r>
-            <a:endParaRPr lang="en-US" sz="2400" dirty="0" smtClean="0"/>
-          </a:p>
-          <a:p>
-            <a:endParaRPr lang="en-US" sz="2400" dirty="0"/>
-          </a:p>
-        </p:txBody>
-      </p:sp>
-      <p:pic>
-        <p:nvPicPr>
-          <p:cNvPr id="8" name="Picture 6"/>
-          <p:cNvPicPr>
-            <a:picLocks noChangeAspect="1" noChangeArrowheads="1"/>
-          </p:cNvPicPr>
+            <a:pPr algn="l"/>
+            <a:r>
+              <a:rPr lang="en-US" sz="4200" dirty="0" smtClean="0"/>
+              <a:t>4. Enable </a:t>
+            </a:r>
+            <a:r>
+              <a:rPr lang="en-US" sz="4200" dirty="0" err="1" smtClean="0"/>
+              <a:t>StateServer</a:t>
+            </a:r>
+            <a:r>
+              <a:rPr lang="en-US" sz="4200" dirty="0" smtClean="0"/>
+              <a:t> Session Mode</a:t>
+            </a:r>
+            <a:endParaRPr lang="en-US" sz="4200" dirty="0"/>
+          </a:p>
+        </p:txBody>
+      </p:sp>
+      <p:sp>
+        <p:nvSpPr>
+          <p:cNvPr id="4" name="Rectangle 3"/>
+          <p:cNvSpPr/>
           <p:nvPr/>
-        </p:nvPicPr>
-        <p:blipFill>
-          <a:blip r:embed="rId5" cstate="print"/>
-          <a:srcRect/>
-          <a:stretch>
-            <a:fillRect/>
-          </a:stretch>
-        </p:blipFill>
-        <p:spPr bwMode="auto">
+        </p:nvSpPr>
+        <p:spPr>
           <a:xfrm>
-            <a:off x="2667000" y="3162300"/>
-            <a:ext cx="3954780" cy="3314700"/>
+            <a:off x="533400" y="2438400"/>
+            <a:ext cx="7924800" cy="2554545"/>
           </a:xfrm>
           <a:prstGeom prst="rect">
             <a:avLst/>
           </a:prstGeom>
-          <a:noFill/>
-          <a:ln w="9525">
-            <a:noFill/>
-            <a:miter lim="800000"/>
-            <a:headEnd/>
-            <a:tailEnd/>
-          </a:ln>
         </p:spPr>
-      </p:pic>
+        <p:style>
+          <a:lnRef idx="1">
+            <a:schemeClr val="dk1"/>
+          </a:lnRef>
+          <a:fillRef idx="2">
+            <a:schemeClr val="dk1"/>
+          </a:fillRef>
+          <a:effectRef idx="1">
+            <a:schemeClr val="dk1"/>
+          </a:effectRef>
+          <a:fontRef idx="minor">
+            <a:schemeClr val="dk1"/>
+          </a:fontRef>
+        </p:style>
+        <p:txBody>
+          <a:bodyPr wrap="square">
+            <a:spAutoFit/>
+          </a:bodyPr>
+          <a:lstStyle/>
+          <a:p>
+            <a:pPr>
+              <a:buNone/>
+            </a:pPr>
+            <a:r>
+              <a:rPr lang="en-US" sz="2000" dirty="0" smtClean="0">
+                <a:latin typeface="Consolas" pitchFamily="49" charset="0"/>
+              </a:rPr>
+              <a:t> &lt;system.web&gt;</a:t>
+            </a:r>
+          </a:p>
+          <a:p>
+            <a:pPr>
+              <a:buNone/>
+            </a:pPr>
+            <a:r>
+              <a:rPr lang="en-US" sz="2000" dirty="0" smtClean="0">
+                <a:latin typeface="Consolas" pitchFamily="49" charset="0"/>
+              </a:rPr>
+              <a:t>    &lt;</a:t>
+            </a:r>
+            <a:r>
+              <a:rPr lang="en-US" sz="2000" dirty="0" err="1" smtClean="0">
+                <a:latin typeface="Consolas" pitchFamily="49" charset="0"/>
+              </a:rPr>
+              <a:t>httpCookies</a:t>
+            </a:r>
+            <a:r>
+              <a:rPr lang="en-US" sz="2000" dirty="0" smtClean="0">
+                <a:latin typeface="Consolas" pitchFamily="49" charset="0"/>
+              </a:rPr>
+              <a:t> </a:t>
+            </a:r>
+            <a:r>
+              <a:rPr lang="en-US" sz="2000" dirty="0" err="1" smtClean="0">
+                <a:latin typeface="Consolas" pitchFamily="49" charset="0"/>
+              </a:rPr>
+              <a:t>requireSSL</a:t>
+            </a:r>
+            <a:r>
+              <a:rPr lang="en-US" sz="2000" dirty="0" smtClean="0">
+                <a:latin typeface="Consolas" pitchFamily="49" charset="0"/>
+              </a:rPr>
+              <a:t>="true" /&gt;</a:t>
+            </a:r>
+          </a:p>
+          <a:p>
+            <a:pPr>
+              <a:buNone/>
+            </a:pPr>
+            <a:r>
+              <a:rPr lang="en-US" sz="2000" dirty="0" smtClean="0">
+                <a:latin typeface="Consolas" pitchFamily="49" charset="0"/>
+              </a:rPr>
+              <a:t>    &lt;</a:t>
+            </a:r>
+            <a:r>
+              <a:rPr lang="en-US" sz="2000" dirty="0" err="1" smtClean="0">
+                <a:latin typeface="Consolas" pitchFamily="49" charset="0"/>
+              </a:rPr>
+              <a:t>machineKey</a:t>
+            </a:r>
+            <a:r>
+              <a:rPr lang="en-US" sz="2000" dirty="0" smtClean="0">
+                <a:latin typeface="Consolas" pitchFamily="49" charset="0"/>
+              </a:rPr>
+              <a:t> validation="SHA1" /&gt;</a:t>
+            </a:r>
+          </a:p>
+          <a:p>
+            <a:pPr>
+              <a:buNone/>
+            </a:pPr>
+            <a:r>
+              <a:rPr lang="en-US" sz="2000" dirty="0" smtClean="0">
+                <a:latin typeface="Consolas" pitchFamily="49" charset="0"/>
+              </a:rPr>
+              <a:t>    &lt;</a:t>
+            </a:r>
+            <a:r>
+              <a:rPr lang="en-US" sz="2000" dirty="0" err="1" smtClean="0">
+                <a:latin typeface="Consolas" pitchFamily="49" charset="0"/>
+              </a:rPr>
+              <a:t>sessionState</a:t>
+            </a:r>
+            <a:r>
+              <a:rPr lang="en-US" sz="2000" dirty="0" smtClean="0">
+                <a:latin typeface="Consolas" pitchFamily="49" charset="0"/>
+              </a:rPr>
+              <a:t> timeout="25" </a:t>
+            </a:r>
+            <a:r>
+              <a:rPr lang="en-US" sz="2000" dirty="0" err="1" smtClean="0">
+                <a:latin typeface="Consolas" pitchFamily="49" charset="0"/>
+              </a:rPr>
+              <a:t>cookieless</a:t>
+            </a:r>
+            <a:r>
+              <a:rPr lang="en-US" sz="2000" dirty="0" smtClean="0">
+                <a:latin typeface="Consolas" pitchFamily="49" charset="0"/>
+              </a:rPr>
+              <a:t>="false" </a:t>
+            </a:r>
+            <a:r>
+              <a:rPr lang="en-US" sz="2000" dirty="0" err="1" smtClean="0">
+                <a:latin typeface="Consolas" pitchFamily="49" charset="0"/>
+              </a:rPr>
+              <a:t>regenerateExpiredSessionId</a:t>
+            </a:r>
+            <a:r>
+              <a:rPr lang="en-US" sz="2000" dirty="0" smtClean="0">
+                <a:latin typeface="Consolas" pitchFamily="49" charset="0"/>
+              </a:rPr>
+              <a:t>="true" mode="</a:t>
+            </a:r>
+            <a:r>
+              <a:rPr lang="en-US" sz="2000" b="1" dirty="0" err="1" smtClean="0">
+                <a:solidFill>
+                  <a:srgbClr val="C00000"/>
+                </a:solidFill>
+                <a:latin typeface="Consolas" pitchFamily="49" charset="0"/>
+              </a:rPr>
+              <a:t>StateServer</a:t>
+            </a:r>
+            <a:r>
+              <a:rPr lang="en-US" sz="2000" dirty="0" smtClean="0">
+                <a:latin typeface="Consolas" pitchFamily="49" charset="0"/>
+              </a:rPr>
+              <a:t>" </a:t>
+            </a:r>
+            <a:r>
+              <a:rPr lang="en-US" sz="2000" dirty="0" err="1" smtClean="0">
+                <a:latin typeface="Consolas" pitchFamily="49" charset="0"/>
+              </a:rPr>
+              <a:t>stateConnectionString</a:t>
+            </a:r>
+            <a:r>
+              <a:rPr lang="en-US" sz="2000" dirty="0" smtClean="0">
+                <a:latin typeface="Consolas" pitchFamily="49" charset="0"/>
+              </a:rPr>
+              <a:t>="</a:t>
+            </a:r>
+            <a:r>
+              <a:rPr lang="en-US" sz="2000" dirty="0" err="1" smtClean="0">
+                <a:latin typeface="Consolas" pitchFamily="49" charset="0"/>
+              </a:rPr>
+              <a:t>tcpip</a:t>
+            </a:r>
+            <a:r>
+              <a:rPr lang="en-US" sz="2000" dirty="0" smtClean="0">
+                <a:latin typeface="Consolas" pitchFamily="49" charset="0"/>
+              </a:rPr>
+              <a:t>=192.168.101.120:42424" </a:t>
+            </a:r>
+            <a:r>
+              <a:rPr lang="en-US" sz="2000" dirty="0" err="1" smtClean="0">
+                <a:latin typeface="Consolas" pitchFamily="49" charset="0"/>
+              </a:rPr>
+              <a:t>stateNetworkTimeout</a:t>
+            </a:r>
+            <a:r>
+              <a:rPr lang="en-US" sz="2000" dirty="0" smtClean="0">
+                <a:latin typeface="Consolas" pitchFamily="49" charset="0"/>
+              </a:rPr>
+              <a:t>="60" </a:t>
+            </a:r>
+            <a:r>
+              <a:rPr lang="en-US" sz="2000" dirty="0" err="1" smtClean="0">
+                <a:latin typeface="Consolas" pitchFamily="49" charset="0"/>
+              </a:rPr>
+              <a:t>useHostingIdentity</a:t>
+            </a:r>
+            <a:r>
+              <a:rPr lang="en-US" sz="2000" dirty="0" smtClean="0">
+                <a:latin typeface="Consolas" pitchFamily="49" charset="0"/>
+              </a:rPr>
+              <a:t>="false" /&gt;</a:t>
+            </a:r>
+          </a:p>
+          <a:p>
+            <a:pPr>
+              <a:buNone/>
+            </a:pPr>
+            <a:r>
+              <a:rPr lang="en-US" sz="2000" dirty="0" smtClean="0">
+                <a:latin typeface="Consolas" pitchFamily="49" charset="0"/>
+              </a:rPr>
+              <a:t>...</a:t>
+            </a:r>
+          </a:p>
+        </p:txBody>
+      </p:sp>
     </p:spTree>
   </p:cSld>
   <p:clrMapOvr>
@@ -7075,7 +7092,7 @@
           <a:p>
             <a:r>
               <a:rPr lang="en-US" dirty="0" smtClean="0"/>
-              <a:t>Scaling Out File Server</a:t>
+              <a:t>Distributed Cache [3]</a:t>
             </a:r>
             <a:endParaRPr lang="en-US" dirty="0"/>
           </a:p>
@@ -7097,25 +7114,46 @@
           <a:lstStyle/>
           <a:p>
             <a:r>
-              <a:rPr lang="en-US" sz="2200" dirty="0" smtClean="0">
+              <a:rPr lang="en-US" sz="2400" dirty="0" smtClean="0">
                 <a:hlinkClick r:id="rId2"/>
               </a:rPr>
-              <a:t>https://www.altaro.com/hyper-v/scale-out-file-server-hyper-v/</a:t>
-            </a:r>
-            <a:endParaRPr lang="en-US" sz="2200" dirty="0" smtClean="0"/>
+              <a:t>https://github.com/memcached/memcached/wiki</a:t>
+            </a:r>
+            <a:endParaRPr lang="en-US" sz="2400" dirty="0" smtClean="0"/>
+          </a:p>
+          <a:p>
+            <a:r>
+              <a:rPr lang="en-US" sz="2400" dirty="0" smtClean="0">
+                <a:hlinkClick r:id="rId3"/>
+              </a:rPr>
+              <a:t>https://redis.io/docs/getting-started/</a:t>
+            </a:r>
+            <a:endParaRPr lang="en-US" sz="2400" dirty="0" smtClean="0"/>
+          </a:p>
+          <a:p>
+            <a:r>
+              <a:rPr lang="en-US" sz="2400" dirty="0" smtClean="0">
+                <a:hlinkClick r:id="rId4"/>
+              </a:rPr>
+              <a:t>https://codeburst.io/redis-what-and-why-d52b6829813</a:t>
+            </a:r>
+            <a:endParaRPr lang="en-US" sz="2400" dirty="0" smtClean="0"/>
+          </a:p>
+          <a:p>
+            <a:endParaRPr lang="en-US" sz="2400" dirty="0"/>
           </a:p>
         </p:txBody>
       </p:sp>
       <p:pic>
         <p:nvPicPr>
-          <p:cNvPr id="4" name="Picture 5"/>
+          <p:cNvPr id="8" name="Picture 6"/>
           <p:cNvPicPr>
             <a:picLocks noChangeAspect="1" noChangeArrowheads="1"/>
           </p:cNvPicPr>
           <p:nvPr/>
         </p:nvPicPr>
         <p:blipFill>
-          <a:blip r:embed="rId3" cstate="print"/>
+          <a:blip r:embed="rId5" cstate="print"/>
           <a:srcRect/>
           <a:stretch>
             <a:fillRect/>
@@ -7123,8 +7161,8 @@
         </p:blipFill>
         <p:spPr bwMode="auto">
           <a:xfrm>
-            <a:off x="2743200" y="2362200"/>
-            <a:ext cx="3825240" cy="3634740"/>
+            <a:off x="2667000" y="3162300"/>
+            <a:ext cx="3954780" cy="3314700"/>
           </a:xfrm>
           <a:prstGeom prst="rect">
             <a:avLst/>
@@ -7332,6 +7370,162 @@
           <a:chExt cx="0" cy="0"/>
         </a:xfrm>
       </p:grpSpPr>
+      <p:sp>
+        <p:nvSpPr>
+          <p:cNvPr id="2" name="Title 1"/>
+          <p:cNvSpPr>
+            <a:spLocks noGrp="1"/>
+          </p:cNvSpPr>
+          <p:nvPr>
+            <p:ph type="title"/>
+          </p:nvPr>
+        </p:nvSpPr>
+        <p:spPr/>
+        <p:txBody>
+          <a:bodyPr/>
+          <a:lstStyle/>
+          <a:p>
+            <a:r>
+              <a:rPr lang="en-US" dirty="0" smtClean="0"/>
+              <a:t>Scaling Out File Server</a:t>
+            </a:r>
+            <a:endParaRPr lang="en-US" dirty="0"/>
+          </a:p>
+        </p:txBody>
+      </p:sp>
+      <p:sp>
+        <p:nvSpPr>
+          <p:cNvPr id="3" name="Content Placeholder 2"/>
+          <p:cNvSpPr>
+            <a:spLocks noGrp="1"/>
+          </p:cNvSpPr>
+          <p:nvPr>
+            <p:ph idx="1"/>
+          </p:nvPr>
+        </p:nvSpPr>
+        <p:spPr/>
+        <p:txBody>
+          <a:bodyPr/>
+          <a:lstStyle/>
+          <a:p>
+            <a:r>
+              <a:rPr lang="en-US" sz="2200" dirty="0" smtClean="0">
+                <a:hlinkClick r:id="rId2"/>
+              </a:rPr>
+              <a:t>https://www.altaro.com/hyper-v/scale-out-file-server-hyper-v/</a:t>
+            </a:r>
+            <a:endParaRPr lang="en-US" sz="2200" dirty="0" smtClean="0"/>
+          </a:p>
+        </p:txBody>
+      </p:sp>
+      <p:pic>
+        <p:nvPicPr>
+          <p:cNvPr id="4" name="Picture 5"/>
+          <p:cNvPicPr>
+            <a:picLocks noChangeAspect="1" noChangeArrowheads="1"/>
+          </p:cNvPicPr>
+          <p:nvPr/>
+        </p:nvPicPr>
+        <p:blipFill>
+          <a:blip r:embed="rId3" cstate="print"/>
+          <a:srcRect/>
+          <a:stretch>
+            <a:fillRect/>
+          </a:stretch>
+        </p:blipFill>
+        <p:spPr bwMode="auto">
+          <a:xfrm>
+            <a:off x="2743200" y="2362200"/>
+            <a:ext cx="3825240" cy="3634740"/>
+          </a:xfrm>
+          <a:prstGeom prst="rect">
+            <a:avLst/>
+          </a:prstGeom>
+          <a:noFill/>
+          <a:ln w="9525">
+            <a:noFill/>
+            <a:miter lim="800000"/>
+            <a:headEnd/>
+            <a:tailEnd/>
+          </a:ln>
+        </p:spPr>
+      </p:pic>
+    </p:spTree>
+  </p:cSld>
+  <p:clrMapOvr>
+    <a:masterClrMapping/>
+  </p:clrMapOvr>
+</p:sld>
+</file>
+
+<file path=ppt/slides/slide31.xml><?xml version="1.0" encoding="utf-8"?>
+<p:sld xmlns:a="http://schemas.openxmlformats.org/drawingml/2006/main" xmlns:r="http://schemas.openxmlformats.org/officeDocument/2006/relationships" xmlns:p="http://schemas.openxmlformats.org/presentationml/2006/main">
+  <p:cSld>
+    <p:spTree>
+      <p:nvGrpSpPr>
+        <p:cNvPr id="1" name=""/>
+        <p:cNvGrpSpPr/>
+        <p:nvPr/>
+      </p:nvGrpSpPr>
+      <p:grpSpPr>
+        <a:xfrm>
+          <a:off x="0" y="0"/>
+          <a:ext cx="0" cy="0"/>
+          <a:chOff x="0" y="0"/>
+          <a:chExt cx="0" cy="0"/>
+        </a:xfrm>
+      </p:grpSpPr>
+      <p:pic>
+        <p:nvPicPr>
+          <p:cNvPr id="4" name="Picture 2" descr="https://lh3.ggpht.com/1IfZLL2QDSjZ0wS7sUhaMlsAOS8BBzdR3wZ1WawgRn7KZAM8nEVZYMOUM-lqQb0ikIzp=w300"/>
+          <p:cNvPicPr>
+            <a:picLocks noChangeAspect="1" noChangeArrowheads="1"/>
+          </p:cNvPicPr>
+          <p:nvPr/>
+        </p:nvPicPr>
+        <p:blipFill>
+          <a:blip r:embed="rId2" cstate="print"/>
+          <a:srcRect/>
+          <a:stretch>
+            <a:fillRect/>
+          </a:stretch>
+        </p:blipFill>
+        <p:spPr bwMode="auto">
+          <a:xfrm>
+            <a:off x="3276600" y="1905000"/>
+            <a:ext cx="2857500" cy="2857500"/>
+          </a:xfrm>
+          <a:prstGeom prst="rect">
+            <a:avLst/>
+          </a:prstGeom>
+          <a:noFill/>
+        </p:spPr>
+      </p:pic>
+    </p:spTree>
+  </p:cSld>
+  <p:clrMapOvr>
+    <a:masterClrMapping/>
+  </p:clrMapOvr>
+</p:sld>
+</file>
+
+<file path=ppt/slides/slide32.xml><?xml version="1.0" encoding="utf-8"?>
+<p:sld xmlns:a="http://schemas.openxmlformats.org/drawingml/2006/main" xmlns:r="http://schemas.openxmlformats.org/officeDocument/2006/relationships" xmlns:p="http://schemas.openxmlformats.org/presentationml/2006/main">
+  <p:cSld>
+    <p:spTree>
+      <p:nvGrpSpPr>
+        <p:cNvPr id="1" name=""/>
+        <p:cNvGrpSpPr/>
+        <p:nvPr/>
+      </p:nvGrpSpPr>
+      <p:grpSpPr>
+        <a:xfrm>
+          <a:off x="0" y="0"/>
+          <a:ext cx="0" cy="0"/>
+          <a:chOff x="0" y="0"/>
+          <a:chExt cx="0" cy="0"/>
+        </a:xfrm>
+      </p:grpSpPr>
       <p:pic>
         <p:nvPicPr>
           <p:cNvPr id="4" name="Picture 2" descr="https://img.haikudeck.com/mg/C42A8FE8-C585-4360-984E-C8FC75522987.jpg"/>
@@ -7481,7 +7675,7 @@
 </p:sld>
 </file>
 
-<file path=ppt/slides/slide31.xml><?xml version="1.0" encoding="utf-8"?>
+<file path=ppt/slides/slide33.xml><?xml version="1.0" encoding="utf-8"?>
 <p:sld xmlns:a="http://schemas.openxmlformats.org/drawingml/2006/main" xmlns:r="http://schemas.openxmlformats.org/officeDocument/2006/relationships" xmlns:p="http://schemas.openxmlformats.org/presentationml/2006/main">
   <p:cSld>
     <p:spTree>
@@ -7589,7 +7783,7 @@
 </p:sld>
 </file>
 
-<file path=ppt/slides/slide32.xml><?xml version="1.0" encoding="utf-8"?>
+<file path=ppt/slides/slide34.xml><?xml version="1.0" encoding="utf-8"?>
 <p:sld xmlns:a="http://schemas.openxmlformats.org/drawingml/2006/main" xmlns:r="http://schemas.openxmlformats.org/officeDocument/2006/relationships" xmlns:p="http://schemas.openxmlformats.org/presentationml/2006/main">
   <p:cSld>
     <p:spTree>
@@ -7775,7 +7969,7 @@
 </p:sld>
 </file>
 
-<file path=ppt/slides/slide33.xml><?xml version="1.0" encoding="utf-8"?>
+<file path=ppt/slides/slide35.xml><?xml version="1.0" encoding="utf-8"?>
 <p:sld xmlns:a="http://schemas.openxmlformats.org/drawingml/2006/main" xmlns:r="http://schemas.openxmlformats.org/officeDocument/2006/relationships" xmlns:p="http://schemas.openxmlformats.org/presentationml/2006/main">
   <p:cSld>
     <p:spTree>
@@ -7941,7 +8135,7 @@
 </p:sld>
 </file>
 
-<file path=ppt/slides/slide34.xml><?xml version="1.0" encoding="utf-8"?>
+<file path=ppt/slides/slide36.xml><?xml version="1.0" encoding="utf-8"?>
 <p:sld xmlns:a="http://schemas.openxmlformats.org/drawingml/2006/main" xmlns:r="http://schemas.openxmlformats.org/officeDocument/2006/relationships" xmlns:p="http://schemas.openxmlformats.org/presentationml/2006/main">
   <p:cSld>
     <p:spTree>
@@ -8116,7 +8310,7 @@
 </p:sld>
 </file>
 
-<file path=ppt/slides/slide35.xml><?xml version="1.0" encoding="utf-8"?>
+<file path=ppt/slides/slide37.xml><?xml version="1.0" encoding="utf-8"?>
 <p:sld xmlns:a="http://schemas.openxmlformats.org/drawingml/2006/main" xmlns:r="http://schemas.openxmlformats.org/officeDocument/2006/relationships" xmlns:p="http://schemas.openxmlformats.org/presentationml/2006/main">
   <p:cSld>
     <p:spTree>
@@ -8428,7 +8622,7 @@
 </p:sld>
 </file>
 
-<file path=ppt/slides/slide36.xml><?xml version="1.0" encoding="utf-8"?>
+<file path=ppt/slides/slide38.xml><?xml version="1.0" encoding="utf-8"?>
 <p:sld xmlns:a="http://schemas.openxmlformats.org/drawingml/2006/main" xmlns:r="http://schemas.openxmlformats.org/officeDocument/2006/relationships" xmlns:p="http://schemas.openxmlformats.org/presentationml/2006/main">
   <p:cSld>
     <p:spTree>
@@ -8634,7 +8828,7 @@
 </p:sld>
 </file>
 
-<file path=ppt/slides/slide37.xml><?xml version="1.0" encoding="utf-8"?>
+<file path=ppt/slides/slide39.xml><?xml version="1.0" encoding="utf-8"?>
 <p:sld xmlns:a="http://schemas.openxmlformats.org/drawingml/2006/main" xmlns:r="http://schemas.openxmlformats.org/officeDocument/2006/relationships" xmlns:p="http://schemas.openxmlformats.org/presentationml/2006/main">
   <p:cSld>
     <p:spTree>
@@ -8749,239 +8943,6 @@
           <a:xfrm>
             <a:off x="1447800" y="3495674"/>
             <a:ext cx="6391275" cy="2524126"/>
-          </a:xfrm>
-          <a:prstGeom prst="rect">
-            <a:avLst/>
-          </a:prstGeom>
-          <a:noFill/>
-        </p:spPr>
-      </p:pic>
-    </p:spTree>
-  </p:cSld>
-  <p:clrMapOvr>
-    <a:masterClrMapping/>
-  </p:clrMapOvr>
-</p:sld>
-</file>
-
-<file path=ppt/slides/slide38.xml><?xml version="1.0" encoding="utf-8"?>
-<p:sld xmlns:a="http://schemas.openxmlformats.org/drawingml/2006/main" xmlns:r="http://schemas.openxmlformats.org/officeDocument/2006/relationships" xmlns:p="http://schemas.openxmlformats.org/presentationml/2006/main">
-  <p:cSld>
-    <p:spTree>
-      <p:nvGrpSpPr>
-        <p:cNvPr id="1" name=""/>
-        <p:cNvGrpSpPr/>
-        <p:nvPr/>
-      </p:nvGrpSpPr>
-      <p:grpSpPr>
-        <a:xfrm>
-          <a:off x="0" y="0"/>
-          <a:ext cx="0" cy="0"/>
-          <a:chOff x="0" y="0"/>
-          <a:chExt cx="0" cy="0"/>
-        </a:xfrm>
-      </p:grpSpPr>
-      <p:sp>
-        <p:nvSpPr>
-          <p:cNvPr id="2" name="Title 1"/>
-          <p:cNvSpPr>
-            <a:spLocks noGrp="1"/>
-          </p:cNvSpPr>
-          <p:nvPr>
-            <p:ph type="title"/>
-          </p:nvPr>
-        </p:nvSpPr>
-        <p:spPr/>
-        <p:txBody>
-          <a:bodyPr/>
-          <a:lstStyle/>
-          <a:p>
-            <a:r>
-              <a:rPr lang="en-US" dirty="0" smtClean="0"/>
-              <a:t>Vertical Partitioning</a:t>
-            </a:r>
-            <a:endParaRPr lang="en-US" dirty="0"/>
-          </a:p>
-        </p:txBody>
-      </p:sp>
-      <p:sp>
-        <p:nvSpPr>
-          <p:cNvPr id="3" name="Content Placeholder 2"/>
-          <p:cNvSpPr>
-            <a:spLocks noGrp="1"/>
-          </p:cNvSpPr>
-          <p:nvPr>
-            <p:ph idx="1"/>
-          </p:nvPr>
-        </p:nvSpPr>
-        <p:spPr/>
-        <p:txBody>
-          <a:bodyPr/>
-          <a:lstStyle/>
-          <a:p>
-            <a:r>
-              <a:rPr lang="en-US" sz="2400" dirty="0" smtClean="0"/>
-              <a:t>To </a:t>
-            </a:r>
-            <a:r>
-              <a:rPr lang="en-US" sz="2400" u="sng" dirty="0" smtClean="0"/>
-              <a:t>reduce the I/O</a:t>
-            </a:r>
-            <a:r>
-              <a:rPr lang="en-US" sz="2400" dirty="0" smtClean="0"/>
-              <a:t> and performance costs associated with fetching items that are </a:t>
-            </a:r>
-            <a:r>
-              <a:rPr lang="en-US" sz="2400" i="1" dirty="0" smtClean="0">
-                <a:solidFill>
-                  <a:srgbClr val="C00000"/>
-                </a:solidFill>
-              </a:rPr>
-              <a:t>frequently accessed</a:t>
-            </a:r>
-            <a:r>
-              <a:rPr lang="en-US" sz="2400" dirty="0" smtClean="0"/>
-              <a:t>.</a:t>
-            </a:r>
-            <a:endParaRPr lang="en-US" sz="2400" dirty="0"/>
-          </a:p>
-        </p:txBody>
-      </p:sp>
-      <p:pic>
-        <p:nvPicPr>
-          <p:cNvPr id="100354" name="Picture 2" descr="Vertically partitioning data by its pattern of use"/>
-          <p:cNvPicPr>
-            <a:picLocks noChangeAspect="1" noChangeArrowheads="1"/>
-          </p:cNvPicPr>
-          <p:nvPr/>
-        </p:nvPicPr>
-        <p:blipFill>
-          <a:blip r:embed="rId2" cstate="print"/>
-          <a:srcRect/>
-          <a:stretch>
-            <a:fillRect/>
-          </a:stretch>
-        </p:blipFill>
-        <p:spPr bwMode="auto">
-          <a:xfrm>
-            <a:off x="2514600" y="2895600"/>
-            <a:ext cx="3952875" cy="2838450"/>
-          </a:xfrm>
-          <a:prstGeom prst="rect">
-            <a:avLst/>
-          </a:prstGeom>
-          <a:noFill/>
-        </p:spPr>
-      </p:pic>
-    </p:spTree>
-  </p:cSld>
-  <p:clrMapOvr>
-    <a:masterClrMapping/>
-  </p:clrMapOvr>
-</p:sld>
-</file>
-
-<file path=ppt/slides/slide39.xml><?xml version="1.0" encoding="utf-8"?>
-<p:sld xmlns:a="http://schemas.openxmlformats.org/drawingml/2006/main" xmlns:r="http://schemas.openxmlformats.org/officeDocument/2006/relationships" xmlns:p="http://schemas.openxmlformats.org/presentationml/2006/main">
-  <p:cSld>
-    <p:spTree>
-      <p:nvGrpSpPr>
-        <p:cNvPr id="1" name=""/>
-        <p:cNvGrpSpPr/>
-        <p:nvPr/>
-      </p:nvGrpSpPr>
-      <p:grpSpPr>
-        <a:xfrm>
-          <a:off x="0" y="0"/>
-          <a:ext cx="0" cy="0"/>
-          <a:chOff x="0" y="0"/>
-          <a:chExt cx="0" cy="0"/>
-        </a:xfrm>
-      </p:grpSpPr>
-      <p:sp>
-        <p:nvSpPr>
-          <p:cNvPr id="2" name="Title 1"/>
-          <p:cNvSpPr>
-            <a:spLocks noGrp="1"/>
-          </p:cNvSpPr>
-          <p:nvPr>
-            <p:ph type="title"/>
-          </p:nvPr>
-        </p:nvSpPr>
-        <p:spPr/>
-        <p:txBody>
-          <a:bodyPr/>
-          <a:lstStyle/>
-          <a:p>
-            <a:r>
-              <a:rPr lang="en-US" dirty="0" smtClean="0"/>
-              <a:t>How to Repartition Data?</a:t>
-            </a:r>
-            <a:endParaRPr lang="en-US" dirty="0"/>
-          </a:p>
-        </p:txBody>
-      </p:sp>
-      <p:sp>
-        <p:nvSpPr>
-          <p:cNvPr id="3" name="Content Placeholder 2"/>
-          <p:cNvSpPr>
-            <a:spLocks noGrp="1"/>
-          </p:cNvSpPr>
-          <p:nvPr>
-            <p:ph idx="1"/>
-          </p:nvPr>
-        </p:nvSpPr>
-        <p:spPr/>
-        <p:txBody>
-          <a:bodyPr/>
-          <a:lstStyle/>
-          <a:p>
-            <a:r>
-              <a:rPr lang="en-US" sz="2400" dirty="0" smtClean="0"/>
-              <a:t>Have </a:t>
-            </a:r>
-            <a:r>
-              <a:rPr lang="en-US" sz="2400" i="1" dirty="0" smtClean="0">
-                <a:solidFill>
-                  <a:srgbClr val="C00000"/>
-                </a:solidFill>
-              </a:rPr>
-              <a:t>dynamic repartitioning strategies</a:t>
-            </a:r>
-            <a:r>
-              <a:rPr lang="en-US" sz="2400" dirty="0" smtClean="0"/>
-              <a:t> in place, to ensure that already-partitioned data can be </a:t>
-            </a:r>
-            <a:r>
-              <a:rPr lang="en-US" sz="2400" u="sng" dirty="0" smtClean="0"/>
-              <a:t>repartitioned</a:t>
-            </a:r>
-            <a:r>
-              <a:rPr lang="en-US" sz="2400" dirty="0" smtClean="0"/>
-              <a:t> in order to keep up with performance and scale metrics.</a:t>
-            </a:r>
-          </a:p>
-        </p:txBody>
-      </p:sp>
-      <p:pic>
-        <p:nvPicPr>
-          <p:cNvPr id="97282" name="Picture 2" descr="https://blog.techcello.com/wp-content/uploads/2012/07/Database-Sharding.png"/>
-          <p:cNvPicPr>
-            <a:picLocks noChangeAspect="1" noChangeArrowheads="1"/>
-          </p:cNvPicPr>
-          <p:nvPr/>
-        </p:nvPicPr>
-        <p:blipFill>
-          <a:blip r:embed="rId2" cstate="print"/>
-          <a:srcRect/>
-          <a:stretch>
-            <a:fillRect/>
-          </a:stretch>
-        </p:blipFill>
-        <p:spPr bwMode="auto">
-          <a:xfrm>
-            <a:off x="2667000" y="3352800"/>
-            <a:ext cx="3333750" cy="1905000"/>
           </a:xfrm>
           <a:prstGeom prst="rect">
             <a:avLst/>
@@ -9198,16 +9159,14 @@
         </p:nvSpPr>
         <p:spPr/>
         <p:txBody>
-          <a:bodyPr>
-            <a:normAutofit/>
-          </a:bodyPr>
+          <a:bodyPr/>
           <a:lstStyle/>
           <a:p>
             <a:r>
-              <a:rPr lang="en-US" sz="4000" dirty="0" smtClean="0"/>
-              <a:t>Service-Oriented Data Architecture [2]</a:t>
-            </a:r>
-            <a:endParaRPr lang="en-US" sz="4000" dirty="0"/>
+              <a:rPr lang="en-US" dirty="0" smtClean="0"/>
+              <a:t>Vertical Partitioning</a:t>
+            </a:r>
+            <a:endParaRPr lang="en-US" dirty="0"/>
           </a:p>
         </p:txBody>
       </p:sp>
@@ -9223,118 +9182,63 @@
         </p:nvSpPr>
         <p:spPr/>
         <p:txBody>
-          <a:bodyPr>
-            <a:normAutofit/>
-          </a:bodyPr>
+          <a:bodyPr/>
           <a:lstStyle/>
           <a:p>
             <a:r>
-              <a:rPr lang="en-US" sz="2200" dirty="0" smtClean="0"/>
-              <a:t>Using the database itself to </a:t>
-            </a:r>
-            <a:r>
-              <a:rPr lang="en-US" sz="2200" u="sng" dirty="0" smtClean="0"/>
-              <a:t>implement services</a:t>
-            </a:r>
-            <a:r>
-              <a:rPr lang="en-US" sz="2200" dirty="0" smtClean="0"/>
-              <a:t> for an SOA environment is called </a:t>
-            </a:r>
-            <a:r>
-              <a:rPr lang="en-US" sz="2200" i="1" dirty="0" smtClean="0">
+              <a:rPr lang="en-US" sz="2400" dirty="0" smtClean="0"/>
+              <a:t>To </a:t>
+            </a:r>
+            <a:r>
+              <a:rPr lang="en-US" sz="2400" u="sng" dirty="0" smtClean="0"/>
+              <a:t>reduce the I/O</a:t>
+            </a:r>
+            <a:r>
+              <a:rPr lang="en-US" sz="2400" dirty="0" smtClean="0"/>
+              <a:t> and performance costs associated with fetching items that are </a:t>
+            </a:r>
+            <a:r>
+              <a:rPr lang="en-US" sz="2400" i="1" dirty="0" smtClean="0">
                 <a:solidFill>
                   <a:srgbClr val="C00000"/>
                 </a:solidFill>
               </a:rPr>
-              <a:t>Service-Oriented Data Architecture</a:t>
-            </a:r>
-            <a:r>
-              <a:rPr lang="en-US" sz="2200" dirty="0" smtClean="0"/>
+              <a:t>frequently accessed</a:t>
+            </a:r>
+            <a:r>
+              <a:rPr lang="en-US" sz="2400" dirty="0" smtClean="0"/>
               <a:t>.</a:t>
             </a:r>
-          </a:p>
-          <a:p>
-            <a:r>
-              <a:rPr lang="en-US" sz="2200" dirty="0" smtClean="0"/>
-              <a:t>SODA uses </a:t>
-            </a:r>
-            <a:r>
-              <a:rPr lang="en-US" sz="2200" i="1" dirty="0" smtClean="0">
-                <a:solidFill>
-                  <a:srgbClr val="C00000"/>
-                </a:solidFill>
-              </a:rPr>
-              <a:t>Service Broker</a:t>
-            </a:r>
-            <a:r>
-              <a:rPr lang="en-US" sz="2200" dirty="0" smtClean="0"/>
-              <a:t> to </a:t>
-            </a:r>
-            <a:r>
-              <a:rPr lang="en-US" sz="2200" u="sng" dirty="0" smtClean="0"/>
-              <a:t>deliver</a:t>
-            </a:r>
-            <a:r>
-              <a:rPr lang="en-US" sz="2200" dirty="0" smtClean="0"/>
-              <a:t> and </a:t>
-            </a:r>
-            <a:r>
-              <a:rPr lang="en-US" sz="2200" u="sng" dirty="0" smtClean="0"/>
-              <a:t>queue service messages</a:t>
-            </a:r>
-            <a:r>
-              <a:rPr lang="en-US" sz="2200" dirty="0" smtClean="0"/>
-              <a:t>, and to manage the service processes that are implemented as CLR stored procedures.</a:t>
-            </a:r>
-          </a:p>
-          <a:p>
-            <a:r>
-              <a:rPr lang="en-US" sz="2200" dirty="0" smtClean="0"/>
-              <a:t>Services can </a:t>
-            </a:r>
-            <a:r>
-              <a:rPr lang="en-US" sz="2200" i="1" dirty="0" smtClean="0">
-                <a:solidFill>
-                  <a:srgbClr val="C00000"/>
-                </a:solidFill>
-              </a:rPr>
-              <a:t>be invoked</a:t>
-            </a:r>
-            <a:r>
-              <a:rPr lang="en-US" sz="2200" dirty="0" smtClean="0"/>
-              <a:t> by putting a message in a Service Broker queue, either directly through a normal database connection, or through the SQL Server 2005 Web Services interface.</a:t>
-            </a:r>
-          </a:p>
-          <a:p>
-            <a:r>
-              <a:rPr lang="en-US" sz="2200" i="1" dirty="0" smtClean="0">
-                <a:solidFill>
-                  <a:srgbClr val="C00000"/>
-                </a:solidFill>
-              </a:rPr>
-              <a:t>Split the data</a:t>
-            </a:r>
-            <a:r>
-              <a:rPr lang="en-US" sz="2200" dirty="0" smtClean="0"/>
-              <a:t> so that each database contains the data for the services it contains.</a:t>
-            </a:r>
-          </a:p>
-          <a:p>
-            <a:r>
-              <a:rPr lang="en-US" sz="2200" i="1" dirty="0" smtClean="0">
-                <a:solidFill>
-                  <a:srgbClr val="C00000"/>
-                </a:solidFill>
-              </a:rPr>
-              <a:t>Multiple copies</a:t>
-            </a:r>
-            <a:r>
-              <a:rPr lang="en-US" sz="2200" dirty="0" smtClean="0"/>
-              <a:t> of each service database can be created, with each copy handling a data partition.</a:t>
-            </a:r>
-          </a:p>
-        </p:txBody>
-      </p:sp>
+            <a:endParaRPr lang="en-US" sz="2400" dirty="0"/>
+          </a:p>
+        </p:txBody>
+      </p:sp>
+      <p:pic>
+        <p:nvPicPr>
+          <p:cNvPr id="100354" name="Picture 2" descr="Vertically partitioning data by its pattern of use"/>
+          <p:cNvPicPr>
+            <a:picLocks noChangeAspect="1" noChangeArrowheads="1"/>
+          </p:cNvPicPr>
+          <p:nvPr/>
+        </p:nvPicPr>
+        <p:blipFill>
+          <a:blip r:embed="rId2" cstate="print"/>
+          <a:srcRect/>
+          <a:stretch>
+            <a:fillRect/>
+          </a:stretch>
+        </p:blipFill>
+        <p:spPr bwMode="auto">
+          <a:xfrm>
+            <a:off x="2514600" y="2895600"/>
+            <a:ext cx="3952875" cy="2838450"/>
+          </a:xfrm>
+          <a:prstGeom prst="rect">
+            <a:avLst/>
+          </a:prstGeom>
+          <a:noFill/>
+        </p:spPr>
+      </p:pic>
     </p:spTree>
   </p:cSld>
   <p:clrMapOvr>
@@ -9344,6 +9248,296 @@
 </file>
 
 <file path=ppt/slides/slide41.xml><?xml version="1.0" encoding="utf-8"?>
+<p:sld xmlns:a="http://schemas.openxmlformats.org/drawingml/2006/main" xmlns:r="http://schemas.openxmlformats.org/officeDocument/2006/relationships" xmlns:p="http://schemas.openxmlformats.org/presentationml/2006/main">
+  <p:cSld>
+    <p:spTree>
+      <p:nvGrpSpPr>
+        <p:cNvPr id="1" name=""/>
+        <p:cNvGrpSpPr/>
+        <p:nvPr/>
+      </p:nvGrpSpPr>
+      <p:grpSpPr>
+        <a:xfrm>
+          <a:off x="0" y="0"/>
+          <a:ext cx="0" cy="0"/>
+          <a:chOff x="0" y="0"/>
+          <a:chExt cx="0" cy="0"/>
+        </a:xfrm>
+      </p:grpSpPr>
+      <p:sp>
+        <p:nvSpPr>
+          <p:cNvPr id="2" name="Title 1"/>
+          <p:cNvSpPr>
+            <a:spLocks noGrp="1"/>
+          </p:cNvSpPr>
+          <p:nvPr>
+            <p:ph type="title"/>
+          </p:nvPr>
+        </p:nvSpPr>
+        <p:spPr/>
+        <p:txBody>
+          <a:bodyPr/>
+          <a:lstStyle/>
+          <a:p>
+            <a:r>
+              <a:rPr lang="en-US" dirty="0" smtClean="0"/>
+              <a:t>How to Repartition Data?</a:t>
+            </a:r>
+            <a:endParaRPr lang="en-US" dirty="0"/>
+          </a:p>
+        </p:txBody>
+      </p:sp>
+      <p:sp>
+        <p:nvSpPr>
+          <p:cNvPr id="3" name="Content Placeholder 2"/>
+          <p:cNvSpPr>
+            <a:spLocks noGrp="1"/>
+          </p:cNvSpPr>
+          <p:nvPr>
+            <p:ph idx="1"/>
+          </p:nvPr>
+        </p:nvSpPr>
+        <p:spPr/>
+        <p:txBody>
+          <a:bodyPr/>
+          <a:lstStyle/>
+          <a:p>
+            <a:r>
+              <a:rPr lang="en-US" sz="2400" dirty="0" smtClean="0"/>
+              <a:t>Have </a:t>
+            </a:r>
+            <a:r>
+              <a:rPr lang="en-US" sz="2400" i="1" dirty="0" smtClean="0">
+                <a:solidFill>
+                  <a:srgbClr val="C00000"/>
+                </a:solidFill>
+              </a:rPr>
+              <a:t>dynamic repartitioning strategies</a:t>
+            </a:r>
+            <a:r>
+              <a:rPr lang="en-US" sz="2400" dirty="0" smtClean="0"/>
+              <a:t> in place, to ensure that already-partitioned data can be </a:t>
+            </a:r>
+            <a:r>
+              <a:rPr lang="en-US" sz="2400" u="sng" dirty="0" smtClean="0"/>
+              <a:t>repartitioned</a:t>
+            </a:r>
+            <a:r>
+              <a:rPr lang="en-US" sz="2400" dirty="0" smtClean="0"/>
+              <a:t> in order to keep up with performance and scale metrics.</a:t>
+            </a:r>
+          </a:p>
+        </p:txBody>
+      </p:sp>
+      <p:pic>
+        <p:nvPicPr>
+          <p:cNvPr id="97282" name="Picture 2" descr="https://blog.techcello.com/wp-content/uploads/2012/07/Database-Sharding.png"/>
+          <p:cNvPicPr>
+            <a:picLocks noChangeAspect="1" noChangeArrowheads="1"/>
+          </p:cNvPicPr>
+          <p:nvPr/>
+        </p:nvPicPr>
+        <p:blipFill>
+          <a:blip r:embed="rId2" cstate="print"/>
+          <a:srcRect/>
+          <a:stretch>
+            <a:fillRect/>
+          </a:stretch>
+        </p:blipFill>
+        <p:spPr bwMode="auto">
+          <a:xfrm>
+            <a:off x="2667000" y="3352800"/>
+            <a:ext cx="3333750" cy="1905000"/>
+          </a:xfrm>
+          <a:prstGeom prst="rect">
+            <a:avLst/>
+          </a:prstGeom>
+          <a:noFill/>
+        </p:spPr>
+      </p:pic>
+    </p:spTree>
+  </p:cSld>
+  <p:clrMapOvr>
+    <a:masterClrMapping/>
+  </p:clrMapOvr>
+</p:sld>
+</file>
+
+<file path=ppt/slides/slide42.xml><?xml version="1.0" encoding="utf-8"?>
+<p:sld xmlns:a="http://schemas.openxmlformats.org/drawingml/2006/main" xmlns:r="http://schemas.openxmlformats.org/officeDocument/2006/relationships" xmlns:p="http://schemas.openxmlformats.org/presentationml/2006/main">
+  <p:cSld>
+    <p:spTree>
+      <p:nvGrpSpPr>
+        <p:cNvPr id="1" name=""/>
+        <p:cNvGrpSpPr/>
+        <p:nvPr/>
+      </p:nvGrpSpPr>
+      <p:grpSpPr>
+        <a:xfrm>
+          <a:off x="0" y="0"/>
+          <a:ext cx="0" cy="0"/>
+          <a:chOff x="0" y="0"/>
+          <a:chExt cx="0" cy="0"/>
+        </a:xfrm>
+      </p:grpSpPr>
+      <p:sp>
+        <p:nvSpPr>
+          <p:cNvPr id="2" name="Title 1"/>
+          <p:cNvSpPr>
+            <a:spLocks noGrp="1"/>
+          </p:cNvSpPr>
+          <p:nvPr>
+            <p:ph type="title"/>
+          </p:nvPr>
+        </p:nvSpPr>
+        <p:spPr/>
+        <p:txBody>
+          <a:bodyPr>
+            <a:normAutofit/>
+          </a:bodyPr>
+          <a:lstStyle/>
+          <a:p>
+            <a:r>
+              <a:rPr lang="en-US" sz="4000" dirty="0" smtClean="0"/>
+              <a:t>Service-Oriented Data Architecture [2]</a:t>
+            </a:r>
+            <a:endParaRPr lang="en-US" sz="4000" dirty="0"/>
+          </a:p>
+        </p:txBody>
+      </p:sp>
+      <p:sp>
+        <p:nvSpPr>
+          <p:cNvPr id="3" name="Content Placeholder 2"/>
+          <p:cNvSpPr>
+            <a:spLocks noGrp="1"/>
+          </p:cNvSpPr>
+          <p:nvPr>
+            <p:ph idx="1"/>
+          </p:nvPr>
+        </p:nvSpPr>
+        <p:spPr/>
+        <p:txBody>
+          <a:bodyPr>
+            <a:normAutofit/>
+          </a:bodyPr>
+          <a:lstStyle/>
+          <a:p>
+            <a:r>
+              <a:rPr lang="en-US" sz="2200" dirty="0" smtClean="0"/>
+              <a:t>Using the database itself to </a:t>
+            </a:r>
+            <a:r>
+              <a:rPr lang="en-US" sz="2200" u="sng" dirty="0" smtClean="0"/>
+              <a:t>implement services</a:t>
+            </a:r>
+            <a:r>
+              <a:rPr lang="en-US" sz="2200" dirty="0" smtClean="0"/>
+              <a:t> for an SOA environment is called </a:t>
+            </a:r>
+            <a:r>
+              <a:rPr lang="en-US" sz="2200" i="1" dirty="0" smtClean="0">
+                <a:solidFill>
+                  <a:srgbClr val="C00000"/>
+                </a:solidFill>
+              </a:rPr>
+              <a:t>Service-Oriented Data Architecture</a:t>
+            </a:r>
+            <a:r>
+              <a:rPr lang="en-US" sz="2200" dirty="0" smtClean="0"/>
+              <a:t>.</a:t>
+            </a:r>
+          </a:p>
+          <a:p>
+            <a:r>
+              <a:rPr lang="en-US" sz="2200" dirty="0" smtClean="0"/>
+              <a:t>SODA uses </a:t>
+            </a:r>
+            <a:r>
+              <a:rPr lang="en-US" sz="2200" i="1" dirty="0" smtClean="0">
+                <a:solidFill>
+                  <a:srgbClr val="C00000"/>
+                </a:solidFill>
+              </a:rPr>
+              <a:t>Service Broker</a:t>
+            </a:r>
+            <a:r>
+              <a:rPr lang="en-US" sz="2200" dirty="0" smtClean="0"/>
+              <a:t> to </a:t>
+            </a:r>
+            <a:r>
+              <a:rPr lang="en-US" sz="2200" u="sng" dirty="0" smtClean="0"/>
+              <a:t>deliver</a:t>
+            </a:r>
+            <a:r>
+              <a:rPr lang="en-US" sz="2200" dirty="0" smtClean="0"/>
+              <a:t> and </a:t>
+            </a:r>
+            <a:r>
+              <a:rPr lang="en-US" sz="2200" u="sng" dirty="0" smtClean="0"/>
+              <a:t>queue service messages</a:t>
+            </a:r>
+            <a:r>
+              <a:rPr lang="en-US" sz="2200" dirty="0" smtClean="0"/>
+              <a:t>, and to manage the service processes that are implemented as CLR stored procedures.</a:t>
+            </a:r>
+          </a:p>
+          <a:p>
+            <a:r>
+              <a:rPr lang="en-US" sz="2200" dirty="0" smtClean="0"/>
+              <a:t>Services can </a:t>
+            </a:r>
+            <a:r>
+              <a:rPr lang="en-US" sz="2200" i="1" dirty="0" smtClean="0">
+                <a:solidFill>
+                  <a:srgbClr val="C00000"/>
+                </a:solidFill>
+              </a:rPr>
+              <a:t>be invoked</a:t>
+            </a:r>
+            <a:r>
+              <a:rPr lang="en-US" sz="2200" dirty="0" smtClean="0"/>
+              <a:t> by putting a message in a Service Broker queue, either directly through a normal database connection, or through the SQL Server 2005 Web Services interface.</a:t>
+            </a:r>
+          </a:p>
+          <a:p>
+            <a:r>
+              <a:rPr lang="en-US" sz="2200" i="1" dirty="0" smtClean="0">
+                <a:solidFill>
+                  <a:srgbClr val="C00000"/>
+                </a:solidFill>
+              </a:rPr>
+              <a:t>Split the data</a:t>
+            </a:r>
+            <a:r>
+              <a:rPr lang="en-US" sz="2200" dirty="0" smtClean="0"/>
+              <a:t> so that each database contains the data for the services it contains.</a:t>
+            </a:r>
+          </a:p>
+          <a:p>
+            <a:r>
+              <a:rPr lang="en-US" sz="2200" i="1" dirty="0" smtClean="0">
+                <a:solidFill>
+                  <a:srgbClr val="C00000"/>
+                </a:solidFill>
+              </a:rPr>
+              <a:t>Multiple copies</a:t>
+            </a:r>
+            <a:r>
+              <a:rPr lang="en-US" sz="2200" dirty="0" smtClean="0"/>
+              <a:t> of each service database can be created, with each copy handling a data partition.</a:t>
+            </a:r>
+          </a:p>
+        </p:txBody>
+      </p:sp>
+    </p:spTree>
+  </p:cSld>
+  <p:clrMapOvr>
+    <a:masterClrMapping/>
+  </p:clrMapOvr>
+</p:sld>
+</file>
+
+<file path=ppt/slides/slide43.xml><?xml version="1.0" encoding="utf-8"?>
 <p:sld xmlns:a="http://schemas.openxmlformats.org/drawingml/2006/main" xmlns:r="http://schemas.openxmlformats.org/officeDocument/2006/relationships" xmlns:p="http://schemas.openxmlformats.org/presentationml/2006/main">
   <p:cSld>
     <p:spTree>

--- a/Microservices/07.1. Scalability.pptx
+++ b/Microservices/07.1. Scalability.pptx
@@ -5,7 +5,7 @@
     <p:sldMasterId id="2147483708" r:id="rId1"/>
   </p:sldMasterIdLst>
   <p:notesMasterIdLst>
-    <p:notesMasterId r:id="rId45"/>
+    <p:notesMasterId r:id="rId50"/>
   </p:notesMasterIdLst>
   <p:sldIdLst>
     <p:sldId id="670" r:id="rId2"/>
@@ -21,36 +21,41 @@
     <p:sldId id="751" r:id="rId12"/>
     <p:sldId id="616" r:id="rId13"/>
     <p:sldId id="753" r:id="rId14"/>
-    <p:sldId id="752" r:id="rId15"/>
-    <p:sldId id="717" r:id="rId16"/>
-    <p:sldId id="724" r:id="rId17"/>
-    <p:sldId id="740" r:id="rId18"/>
-    <p:sldId id="741" r:id="rId19"/>
-    <p:sldId id="742" r:id="rId20"/>
-    <p:sldId id="743" r:id="rId21"/>
-    <p:sldId id="744" r:id="rId22"/>
-    <p:sldId id="745" r:id="rId23"/>
-    <p:sldId id="746" r:id="rId24"/>
-    <p:sldId id="747" r:id="rId25"/>
-    <p:sldId id="748" r:id="rId26"/>
-    <p:sldId id="749" r:id="rId27"/>
-    <p:sldId id="736" r:id="rId28"/>
-    <p:sldId id="668" r:id="rId29"/>
-    <p:sldId id="739" r:id="rId30"/>
-    <p:sldId id="669" r:id="rId31"/>
-    <p:sldId id="636" r:id="rId32"/>
-    <p:sldId id="750" r:id="rId33"/>
-    <p:sldId id="730" r:id="rId34"/>
-    <p:sldId id="726" r:id="rId35"/>
-    <p:sldId id="729" r:id="rId36"/>
-    <p:sldId id="731" r:id="rId37"/>
-    <p:sldId id="621" r:id="rId38"/>
-    <p:sldId id="732" r:id="rId39"/>
-    <p:sldId id="734" r:id="rId40"/>
-    <p:sldId id="735" r:id="rId41"/>
-    <p:sldId id="733" r:id="rId42"/>
-    <p:sldId id="624" r:id="rId43"/>
-    <p:sldId id="516" r:id="rId44"/>
+    <p:sldId id="754" r:id="rId15"/>
+    <p:sldId id="755" r:id="rId16"/>
+    <p:sldId id="756" r:id="rId17"/>
+    <p:sldId id="757" r:id="rId18"/>
+    <p:sldId id="758" r:id="rId19"/>
+    <p:sldId id="752" r:id="rId20"/>
+    <p:sldId id="717" r:id="rId21"/>
+    <p:sldId id="724" r:id="rId22"/>
+    <p:sldId id="740" r:id="rId23"/>
+    <p:sldId id="741" r:id="rId24"/>
+    <p:sldId id="742" r:id="rId25"/>
+    <p:sldId id="743" r:id="rId26"/>
+    <p:sldId id="744" r:id="rId27"/>
+    <p:sldId id="745" r:id="rId28"/>
+    <p:sldId id="746" r:id="rId29"/>
+    <p:sldId id="747" r:id="rId30"/>
+    <p:sldId id="748" r:id="rId31"/>
+    <p:sldId id="749" r:id="rId32"/>
+    <p:sldId id="736" r:id="rId33"/>
+    <p:sldId id="668" r:id="rId34"/>
+    <p:sldId id="739" r:id="rId35"/>
+    <p:sldId id="669" r:id="rId36"/>
+    <p:sldId id="636" r:id="rId37"/>
+    <p:sldId id="750" r:id="rId38"/>
+    <p:sldId id="730" r:id="rId39"/>
+    <p:sldId id="726" r:id="rId40"/>
+    <p:sldId id="729" r:id="rId41"/>
+    <p:sldId id="731" r:id="rId42"/>
+    <p:sldId id="621" r:id="rId43"/>
+    <p:sldId id="732" r:id="rId44"/>
+    <p:sldId id="734" r:id="rId45"/>
+    <p:sldId id="735" r:id="rId46"/>
+    <p:sldId id="733" r:id="rId47"/>
+    <p:sldId id="624" r:id="rId48"/>
+    <p:sldId id="516" r:id="rId49"/>
   </p:sldIdLst>
   <p:sldSz cx="9144000" cy="6858000" type="screen4x3"/>
   <p:notesSz cx="6858000" cy="9144000"/>
@@ -4619,7 +4624,7 @@
               <a:t>1. Install k6 on </a:t>
             </a:r>
             <a:r>
-              <a:rPr lang="en-US" smtClean="0"/>
+              <a:rPr lang="en-US" dirty="0" err="1" smtClean="0"/>
               <a:t>macOS</a:t>
             </a:r>
             <a:endParaRPr lang="en-US" dirty="0"/>
@@ -4723,6 +4728,485 @@
 </file>
 
 <file path=ppt/slides/slide14.xml><?xml version="1.0" encoding="utf-8"?>
+<p:sld xmlns:a="http://schemas.openxmlformats.org/drawingml/2006/main" xmlns:r="http://schemas.openxmlformats.org/officeDocument/2006/relationships" xmlns:p="http://schemas.openxmlformats.org/presentationml/2006/main">
+  <p:cSld>
+    <p:spTree>
+      <p:nvGrpSpPr>
+        <p:cNvPr id="1" name=""/>
+        <p:cNvGrpSpPr/>
+        <p:nvPr/>
+      </p:nvGrpSpPr>
+      <p:grpSpPr>
+        <a:xfrm>
+          <a:off x="0" y="0"/>
+          <a:ext cx="0" cy="0"/>
+          <a:chOff x="0" y="0"/>
+          <a:chExt cx="0" cy="0"/>
+        </a:xfrm>
+      </p:grpSpPr>
+      <p:sp>
+        <p:nvSpPr>
+          <p:cNvPr id="2" name="Title 1"/>
+          <p:cNvSpPr>
+            <a:spLocks noGrp="1"/>
+          </p:cNvSpPr>
+          <p:nvPr>
+            <p:ph type="title"/>
+          </p:nvPr>
+        </p:nvSpPr>
+        <p:spPr/>
+        <p:txBody>
+          <a:bodyPr/>
+          <a:lstStyle/>
+          <a:p>
+            <a:pPr algn="l"/>
+            <a:r>
+              <a:rPr lang="en-US" dirty="0" smtClean="0"/>
+              <a:t>2. Create Script</a:t>
+            </a:r>
+            <a:endParaRPr lang="en-US" dirty="0"/>
+          </a:p>
+        </p:txBody>
+      </p:sp>
+      <p:sp>
+        <p:nvSpPr>
+          <p:cNvPr id="3" name="Content Placeholder 2"/>
+          <p:cNvSpPr>
+            <a:spLocks noGrp="1"/>
+          </p:cNvSpPr>
+          <p:nvPr>
+            <p:ph idx="1"/>
+          </p:nvPr>
+        </p:nvSpPr>
+        <p:spPr/>
+        <p:txBody>
+          <a:bodyPr/>
+          <a:lstStyle/>
+          <a:p>
+            <a:r>
+              <a:rPr lang="en-US" dirty="0" smtClean="0"/>
+              <a:t>Ask Claude Code to create one: 100 users, 10 minutes.</a:t>
+            </a:r>
+          </a:p>
+          <a:p>
+            <a:r>
+              <a:rPr lang="en-US" dirty="0" smtClean="0"/>
+              <a:t>Min # of users =?, min duration = ?</a:t>
+            </a:r>
+            <a:endParaRPr lang="en-US" dirty="0"/>
+          </a:p>
+        </p:txBody>
+      </p:sp>
+    </p:spTree>
+  </p:cSld>
+  <p:clrMapOvr>
+    <a:masterClrMapping/>
+  </p:clrMapOvr>
+</p:sld>
+</file>
+
+<file path=ppt/slides/slide15.xml><?xml version="1.0" encoding="utf-8"?>
+<p:sld xmlns:a="http://schemas.openxmlformats.org/drawingml/2006/main" xmlns:r="http://schemas.openxmlformats.org/officeDocument/2006/relationships" xmlns:p="http://schemas.openxmlformats.org/presentationml/2006/main">
+  <p:cSld>
+    <p:spTree>
+      <p:nvGrpSpPr>
+        <p:cNvPr id="1" name=""/>
+        <p:cNvGrpSpPr/>
+        <p:nvPr/>
+      </p:nvGrpSpPr>
+      <p:grpSpPr>
+        <a:xfrm>
+          <a:off x="0" y="0"/>
+          <a:ext cx="0" cy="0"/>
+          <a:chOff x="0" y="0"/>
+          <a:chExt cx="0" cy="0"/>
+        </a:xfrm>
+      </p:grpSpPr>
+      <p:sp>
+        <p:nvSpPr>
+          <p:cNvPr id="2" name="Title 1"/>
+          <p:cNvSpPr>
+            <a:spLocks noGrp="1"/>
+          </p:cNvSpPr>
+          <p:nvPr>
+            <p:ph type="title"/>
+          </p:nvPr>
+        </p:nvSpPr>
+        <p:spPr/>
+        <p:txBody>
+          <a:bodyPr/>
+          <a:lstStyle/>
+          <a:p>
+            <a:pPr algn="l"/>
+            <a:r>
+              <a:rPr lang="en-US" dirty="0" smtClean="0"/>
+              <a:t>3</a:t>
+            </a:r>
+            <a:r>
+              <a:rPr lang="en-US" dirty="0" smtClean="0"/>
+              <a:t>. Run the Script on Cloud</a:t>
+            </a:r>
+            <a:endParaRPr lang="en-US" dirty="0"/>
+          </a:p>
+        </p:txBody>
+      </p:sp>
+      <p:sp>
+        <p:nvSpPr>
+          <p:cNvPr id="3" name="Content Placeholder 2"/>
+          <p:cNvSpPr>
+            <a:spLocks noGrp="1"/>
+          </p:cNvSpPr>
+          <p:nvPr>
+            <p:ph idx="1"/>
+          </p:nvPr>
+        </p:nvSpPr>
+        <p:spPr/>
+        <p:txBody>
+          <a:bodyPr/>
+          <a:lstStyle/>
+          <a:p>
+            <a:r>
+              <a:rPr lang="en-US" dirty="0" smtClean="0"/>
+              <a:t>k6 </a:t>
+            </a:r>
+            <a:r>
+              <a:rPr lang="en-US" b="1" dirty="0" smtClean="0"/>
+              <a:t>cloud</a:t>
+            </a:r>
+            <a:r>
+              <a:rPr lang="en-US" dirty="0" smtClean="0"/>
+              <a:t> run </a:t>
+            </a:r>
+            <a:r>
+              <a:rPr lang="en-US" dirty="0" smtClean="0"/>
+              <a:t>script.js</a:t>
+            </a:r>
+          </a:p>
+          <a:p>
+            <a:endParaRPr lang="en-US" dirty="0"/>
+          </a:p>
+        </p:txBody>
+      </p:sp>
+    </p:spTree>
+  </p:cSld>
+  <p:clrMapOvr>
+    <a:masterClrMapping/>
+  </p:clrMapOvr>
+</p:sld>
+</file>
+
+<file path=ppt/slides/slide16.xml><?xml version="1.0" encoding="utf-8"?>
+<p:sld xmlns:a="http://schemas.openxmlformats.org/drawingml/2006/main" xmlns:r="http://schemas.openxmlformats.org/officeDocument/2006/relationships" xmlns:p="http://schemas.openxmlformats.org/presentationml/2006/main">
+  <p:cSld>
+    <p:spTree>
+      <p:nvGrpSpPr>
+        <p:cNvPr id="1" name=""/>
+        <p:cNvGrpSpPr/>
+        <p:nvPr/>
+      </p:nvGrpSpPr>
+      <p:grpSpPr>
+        <a:xfrm>
+          <a:off x="0" y="0"/>
+          <a:ext cx="0" cy="0"/>
+          <a:chOff x="0" y="0"/>
+          <a:chExt cx="0" cy="0"/>
+        </a:xfrm>
+      </p:grpSpPr>
+      <p:sp>
+        <p:nvSpPr>
+          <p:cNvPr id="2" name="Title 1"/>
+          <p:cNvSpPr>
+            <a:spLocks noGrp="1"/>
+          </p:cNvSpPr>
+          <p:nvPr>
+            <p:ph type="title"/>
+          </p:nvPr>
+        </p:nvSpPr>
+        <p:spPr/>
+        <p:txBody>
+          <a:bodyPr/>
+          <a:lstStyle/>
+          <a:p>
+            <a:pPr algn="l"/>
+            <a:r>
+              <a:rPr lang="en-US" dirty="0" smtClean="0"/>
+              <a:t>4. Review the Output</a:t>
+            </a:r>
+            <a:endParaRPr lang="en-US" dirty="0"/>
+          </a:p>
+        </p:txBody>
+      </p:sp>
+      <p:sp>
+        <p:nvSpPr>
+          <p:cNvPr id="3" name="Content Placeholder 2"/>
+          <p:cNvSpPr>
+            <a:spLocks noGrp="1"/>
+          </p:cNvSpPr>
+          <p:nvPr>
+            <p:ph idx="1"/>
+          </p:nvPr>
+        </p:nvSpPr>
+        <p:spPr/>
+        <p:txBody>
+          <a:bodyPr/>
+          <a:lstStyle/>
+          <a:p>
+            <a:r>
+              <a:rPr lang="en-US" sz="2400" dirty="0" smtClean="0">
+                <a:hlinkClick r:id="rId2"/>
+              </a:rPr>
+              <a:t>https://</a:t>
+            </a:r>
+            <a:r>
+              <a:rPr lang="en-US" sz="2400" dirty="0" smtClean="0">
+                <a:hlinkClick r:id="rId2"/>
+              </a:rPr>
+              <a:t>valiantgranola1655.grafana.net/a/k6-app/runs/7719358</a:t>
+            </a:r>
+            <a:endParaRPr lang="en-US" sz="2400" dirty="0" smtClean="0"/>
+          </a:p>
+          <a:p>
+            <a:endParaRPr lang="en-US" sz="2400" dirty="0"/>
+          </a:p>
+        </p:txBody>
+      </p:sp>
+      <p:pic>
+        <p:nvPicPr>
+          <p:cNvPr id="1027" name="Picture 3"/>
+          <p:cNvPicPr>
+            <a:picLocks noChangeAspect="1" noChangeArrowheads="1"/>
+          </p:cNvPicPr>
+          <p:nvPr/>
+        </p:nvPicPr>
+        <p:blipFill>
+          <a:blip r:embed="rId3" cstate="print"/>
+          <a:srcRect/>
+          <a:stretch>
+            <a:fillRect/>
+          </a:stretch>
+        </p:blipFill>
+        <p:spPr bwMode="auto">
+          <a:xfrm>
+            <a:off x="1049338" y="3089275"/>
+            <a:ext cx="7045325" cy="2244725"/>
+          </a:xfrm>
+          <a:prstGeom prst="rect">
+            <a:avLst/>
+          </a:prstGeom>
+          <a:noFill/>
+          <a:ln w="9525">
+            <a:noFill/>
+            <a:miter lim="800000"/>
+            <a:headEnd/>
+            <a:tailEnd/>
+          </a:ln>
+        </p:spPr>
+      </p:pic>
+    </p:spTree>
+  </p:cSld>
+  <p:clrMapOvr>
+    <a:masterClrMapping/>
+  </p:clrMapOvr>
+</p:sld>
+</file>
+
+<file path=ppt/slides/slide17.xml><?xml version="1.0" encoding="utf-8"?>
+<p:sld xmlns:a="http://schemas.openxmlformats.org/drawingml/2006/main" xmlns:r="http://schemas.openxmlformats.org/officeDocument/2006/relationships" xmlns:p="http://schemas.openxmlformats.org/presentationml/2006/main">
+  <p:cSld>
+    <p:spTree>
+      <p:nvGrpSpPr>
+        <p:cNvPr id="1" name=""/>
+        <p:cNvGrpSpPr/>
+        <p:nvPr/>
+      </p:nvGrpSpPr>
+      <p:grpSpPr>
+        <a:xfrm>
+          <a:off x="0" y="0"/>
+          <a:ext cx="0" cy="0"/>
+          <a:chOff x="0" y="0"/>
+          <a:chExt cx="0" cy="0"/>
+        </a:xfrm>
+      </p:grpSpPr>
+      <p:sp>
+        <p:nvSpPr>
+          <p:cNvPr id="2" name="Title 1"/>
+          <p:cNvSpPr>
+            <a:spLocks noGrp="1"/>
+          </p:cNvSpPr>
+          <p:nvPr>
+            <p:ph type="title"/>
+          </p:nvPr>
+        </p:nvSpPr>
+        <p:spPr/>
+        <p:txBody>
+          <a:bodyPr/>
+          <a:lstStyle/>
+          <a:p>
+            <a:pPr algn="l"/>
+            <a:r>
+              <a:rPr lang="en-US" dirty="0" smtClean="0"/>
+              <a:t>5. Verify the OOM on the Server</a:t>
+            </a:r>
+            <a:endParaRPr lang="en-US" dirty="0"/>
+          </a:p>
+        </p:txBody>
+      </p:sp>
+      <p:sp>
+        <p:nvSpPr>
+          <p:cNvPr id="3" name="Content Placeholder 2"/>
+          <p:cNvSpPr>
+            <a:spLocks noGrp="1"/>
+          </p:cNvSpPr>
+          <p:nvPr>
+            <p:ph idx="1"/>
+          </p:nvPr>
+        </p:nvSpPr>
+        <p:spPr/>
+        <p:txBody>
+          <a:bodyPr/>
+          <a:lstStyle/>
+          <a:p>
+            <a:endParaRPr lang="en-US" dirty="0"/>
+          </a:p>
+        </p:txBody>
+      </p:sp>
+    </p:spTree>
+  </p:cSld>
+  <p:clrMapOvr>
+    <a:masterClrMapping/>
+  </p:clrMapOvr>
+</p:sld>
+</file>
+
+<file path=ppt/slides/slide18.xml><?xml version="1.0" encoding="utf-8"?>
+<p:sld xmlns:a="http://schemas.openxmlformats.org/drawingml/2006/main" xmlns:r="http://schemas.openxmlformats.org/officeDocument/2006/relationships" xmlns:p="http://schemas.openxmlformats.org/presentationml/2006/main">
+  <p:cSld>
+    <p:spTree>
+      <p:nvGrpSpPr>
+        <p:cNvPr id="1" name=""/>
+        <p:cNvGrpSpPr/>
+        <p:nvPr/>
+      </p:nvGrpSpPr>
+      <p:grpSpPr>
+        <a:xfrm>
+          <a:off x="0" y="0"/>
+          <a:ext cx="0" cy="0"/>
+          <a:chOff x="0" y="0"/>
+          <a:chExt cx="0" cy="0"/>
+        </a:xfrm>
+      </p:grpSpPr>
+      <p:sp>
+        <p:nvSpPr>
+          <p:cNvPr id="2" name="Title 1"/>
+          <p:cNvSpPr>
+            <a:spLocks noGrp="1"/>
+          </p:cNvSpPr>
+          <p:nvPr>
+            <p:ph type="title"/>
+          </p:nvPr>
+        </p:nvSpPr>
+        <p:spPr/>
+        <p:txBody>
+          <a:bodyPr/>
+          <a:lstStyle/>
+          <a:p>
+            <a:pPr algn="l"/>
+            <a:r>
+              <a:rPr lang="en-US" dirty="0" smtClean="0"/>
+              <a:t>6. Run the Script Locally</a:t>
+            </a:r>
+            <a:endParaRPr lang="en-US" dirty="0"/>
+          </a:p>
+        </p:txBody>
+      </p:sp>
+      <p:sp>
+        <p:nvSpPr>
+          <p:cNvPr id="3" name="Content Placeholder 2"/>
+          <p:cNvSpPr>
+            <a:spLocks noGrp="1"/>
+          </p:cNvSpPr>
+          <p:nvPr>
+            <p:ph idx="1"/>
+          </p:nvPr>
+        </p:nvSpPr>
+        <p:spPr/>
+        <p:txBody>
+          <a:bodyPr/>
+          <a:lstStyle/>
+          <a:p>
+            <a:r>
+              <a:rPr lang="en-US" dirty="0" smtClean="0"/>
+              <a:t>k6 </a:t>
+            </a:r>
+            <a:r>
+              <a:rPr lang="en-US" dirty="0" smtClean="0"/>
+              <a:t>run script.js</a:t>
+            </a:r>
+          </a:p>
+          <a:p>
+            <a:r>
+              <a:rPr lang="en-US" dirty="0" smtClean="0"/>
+              <a:t>k6 </a:t>
+            </a:r>
+            <a:r>
+              <a:rPr lang="en-US" dirty="0" smtClean="0"/>
+              <a:t>run --out 'web-dashboard=host=0.0.0.0&amp;port=5665&amp;export=</a:t>
+            </a:r>
+            <a:r>
+              <a:rPr lang="en-US" dirty="0" err="1" smtClean="0"/>
+              <a:t>report.html&amp;open</a:t>
+            </a:r>
+            <a:r>
+              <a:rPr lang="en-US" dirty="0" smtClean="0"/>
+              <a:t>=true' </a:t>
+            </a:r>
+            <a:r>
+              <a:rPr lang="en-US" dirty="0" smtClean="0"/>
+              <a:t>script.js</a:t>
+            </a:r>
+          </a:p>
+          <a:p>
+            <a:r>
+              <a:rPr lang="en-US" smtClean="0"/>
+              <a:t># Open: </a:t>
+            </a:r>
+            <a:r>
+              <a:rPr lang="en-US" smtClean="0">
+                <a:hlinkClick r:id="rId2"/>
+              </a:rPr>
+              <a:t>http</a:t>
+            </a:r>
+            <a:r>
+              <a:rPr lang="en-US" smtClean="0">
+                <a:hlinkClick r:id="rId2"/>
+              </a:rPr>
+              <a:t>://</a:t>
+            </a:r>
+            <a:r>
+              <a:rPr lang="en-US" smtClean="0">
+                <a:hlinkClick r:id="rId2"/>
+              </a:rPr>
+              <a:t>192.168.1.45:5665</a:t>
+            </a:r>
+            <a:endParaRPr lang="en-US" smtClean="0"/>
+          </a:p>
+          <a:p>
+            <a:endParaRPr lang="en-US" dirty="0" smtClean="0"/>
+          </a:p>
+          <a:p>
+            <a:endParaRPr lang="en-US" dirty="0"/>
+          </a:p>
+        </p:txBody>
+      </p:sp>
+    </p:spTree>
+  </p:cSld>
+  <p:clrMapOvr>
+    <a:masterClrMapping/>
+  </p:clrMapOvr>
+</p:sld>
+</file>
+
+<file path=ppt/slides/slide19.xml><?xml version="1.0" encoding="utf-8"?>
 <p:sld xmlns:a="http://schemas.openxmlformats.org/drawingml/2006/main" xmlns:r="http://schemas.openxmlformats.org/officeDocument/2006/relationships" xmlns:p="http://schemas.openxmlformats.org/presentationml/2006/main">
   <p:cSld>
     <p:spTree>
@@ -4765,856 +5249,6 @@
           <a:noFill/>
         </p:spPr>
       </p:pic>
-    </p:spTree>
-  </p:cSld>
-  <p:clrMapOvr>
-    <a:masterClrMapping/>
-  </p:clrMapOvr>
-</p:sld>
-</file>
-
-<file path=ppt/slides/slide15.xml><?xml version="1.0" encoding="utf-8"?>
-<p:sld xmlns:a="http://schemas.openxmlformats.org/drawingml/2006/main" xmlns:r="http://schemas.openxmlformats.org/officeDocument/2006/relationships" xmlns:p="http://schemas.openxmlformats.org/presentationml/2006/main">
-  <p:cSld>
-    <p:spTree>
-      <p:nvGrpSpPr>
-        <p:cNvPr id="1" name=""/>
-        <p:cNvGrpSpPr/>
-        <p:nvPr/>
-      </p:nvGrpSpPr>
-      <p:grpSpPr>
-        <a:xfrm>
-          <a:off x="0" y="0"/>
-          <a:ext cx="0" cy="0"/>
-          <a:chOff x="0" y="0"/>
-          <a:chExt cx="0" cy="0"/>
-        </a:xfrm>
-      </p:grpSpPr>
-      <p:sp>
-        <p:nvSpPr>
-          <p:cNvPr id="2" name="Title 1"/>
-          <p:cNvSpPr>
-            <a:spLocks noGrp="1"/>
-          </p:cNvSpPr>
-          <p:nvPr>
-            <p:ph type="title"/>
-          </p:nvPr>
-        </p:nvSpPr>
-        <p:spPr/>
-        <p:txBody>
-          <a:bodyPr/>
-          <a:lstStyle/>
-          <a:p>
-            <a:r>
-              <a:rPr lang="en-US" dirty="0" smtClean="0"/>
-              <a:t>Scaling Out Guidelines (I) [2]</a:t>
-            </a:r>
-            <a:endParaRPr lang="en-US" dirty="0"/>
-          </a:p>
-        </p:txBody>
-      </p:sp>
-      <p:sp>
-        <p:nvSpPr>
-          <p:cNvPr id="3" name="Content Placeholder 2"/>
-          <p:cNvSpPr>
-            <a:spLocks noGrp="1"/>
-          </p:cNvSpPr>
-          <p:nvPr>
-            <p:ph idx="1"/>
-          </p:nvPr>
-        </p:nvSpPr>
-        <p:spPr/>
-        <p:txBody>
-          <a:bodyPr/>
-          <a:lstStyle/>
-          <a:p>
-            <a:r>
-              <a:rPr lang="en-US" sz="2000" i="1" dirty="0" smtClean="0">
-                <a:solidFill>
-                  <a:srgbClr val="C00000"/>
-                </a:solidFill>
-              </a:rPr>
-              <a:t>Statelessness</a:t>
-            </a:r>
-            <a:r>
-              <a:rPr lang="en-US" sz="2000" dirty="0" smtClean="0"/>
-              <a:t> means that each </a:t>
-            </a:r>
-            <a:r>
-              <a:rPr lang="en-US" sz="2000" u="sng" dirty="0" smtClean="0"/>
-              <a:t>transaction can be handled by one instance as well as any other</a:t>
-            </a:r>
-            <a:r>
-              <a:rPr lang="en-US" sz="2000" dirty="0" smtClean="0"/>
-              <a:t>; a user may transact with dozens of different instances during a single session, without ever knowing it.</a:t>
-            </a:r>
-          </a:p>
-          <a:p>
-            <a:r>
-              <a:rPr lang="en-US" sz="2000" dirty="0" smtClean="0"/>
-              <a:t>Design the application to </a:t>
-            </a:r>
-            <a:r>
-              <a:rPr lang="en-US" sz="2000" i="1" dirty="0" smtClean="0">
-                <a:solidFill>
-                  <a:srgbClr val="C00000"/>
-                </a:solidFill>
-              </a:rPr>
-              <a:t>run in a stateless fashion</a:t>
-            </a:r>
-            <a:r>
-              <a:rPr lang="en-US" sz="2000" dirty="0" smtClean="0"/>
-              <a:t>, with any necessary user and </a:t>
-            </a:r>
-            <a:r>
-              <a:rPr lang="en-US" sz="2000" i="1" dirty="0" smtClean="0">
-                <a:solidFill>
-                  <a:srgbClr val="C00000"/>
-                </a:solidFill>
-              </a:rPr>
-              <a:t>session data</a:t>
-            </a:r>
-            <a:r>
-              <a:rPr lang="en-US" sz="2000" dirty="0" smtClean="0"/>
-              <a:t> stored either </a:t>
-            </a:r>
-            <a:r>
-              <a:rPr lang="en-US" sz="2000" u="sng" dirty="0" smtClean="0"/>
-              <a:t>on the client side</a:t>
-            </a:r>
-            <a:r>
-              <a:rPr lang="en-US" sz="2000" dirty="0" smtClean="0"/>
-              <a:t>, or in a </a:t>
-            </a:r>
-            <a:r>
-              <a:rPr lang="en-US" sz="2000" u="sng" dirty="0" smtClean="0"/>
-              <a:t>distributed store</a:t>
-            </a:r>
-            <a:r>
-              <a:rPr lang="en-US" sz="2000" dirty="0" smtClean="0"/>
-              <a:t> that's accessible to any application instance.</a:t>
-            </a:r>
-          </a:p>
-          <a:p>
-            <a:endParaRPr lang="en-US" sz="2000" dirty="0"/>
-          </a:p>
-        </p:txBody>
-      </p:sp>
-      <p:pic>
-        <p:nvPicPr>
-          <p:cNvPr id="4" name="Picture 3"/>
-          <p:cNvPicPr>
-            <a:picLocks noChangeAspect="1" noChangeArrowheads="1"/>
-          </p:cNvPicPr>
-          <p:nvPr/>
-        </p:nvPicPr>
-        <p:blipFill>
-          <a:blip r:embed="rId2" cstate="print"/>
-          <a:srcRect/>
-          <a:stretch>
-            <a:fillRect/>
-          </a:stretch>
-        </p:blipFill>
-        <p:spPr bwMode="auto">
-          <a:xfrm>
-            <a:off x="2667000" y="4114800"/>
-            <a:ext cx="3990975" cy="1619250"/>
-          </a:xfrm>
-          <a:prstGeom prst="rect">
-            <a:avLst/>
-          </a:prstGeom>
-          <a:noFill/>
-          <a:ln w="9525">
-            <a:noFill/>
-            <a:miter lim="800000"/>
-            <a:headEnd/>
-            <a:tailEnd/>
-          </a:ln>
-        </p:spPr>
-      </p:pic>
-    </p:spTree>
-  </p:cSld>
-  <p:clrMapOvr>
-    <a:masterClrMapping/>
-  </p:clrMapOvr>
-</p:sld>
-</file>
-
-<file path=ppt/slides/slide16.xml><?xml version="1.0" encoding="utf-8"?>
-<p:sld xmlns:a="http://schemas.openxmlformats.org/drawingml/2006/main" xmlns:r="http://schemas.openxmlformats.org/officeDocument/2006/relationships" xmlns:p="http://schemas.openxmlformats.org/presentationml/2006/main">
-  <p:cSld>
-    <p:spTree>
-      <p:nvGrpSpPr>
-        <p:cNvPr id="1" name=""/>
-        <p:cNvGrpSpPr/>
-        <p:nvPr/>
-      </p:nvGrpSpPr>
-      <p:grpSpPr>
-        <a:xfrm>
-          <a:off x="0" y="0"/>
-          <a:ext cx="0" cy="0"/>
-          <a:chOff x="0" y="0"/>
-          <a:chExt cx="0" cy="0"/>
-        </a:xfrm>
-      </p:grpSpPr>
-      <p:sp>
-        <p:nvSpPr>
-          <p:cNvPr id="2" name="Title 1"/>
-          <p:cNvSpPr>
-            <a:spLocks noGrp="1"/>
-          </p:cNvSpPr>
-          <p:nvPr>
-            <p:ph type="title"/>
-          </p:nvPr>
-        </p:nvSpPr>
-        <p:spPr/>
-        <p:txBody>
-          <a:bodyPr/>
-          <a:lstStyle/>
-          <a:p>
-            <a:r>
-              <a:rPr lang="en-US" dirty="0" smtClean="0"/>
-              <a:t>Scaling Out Guidelines (II)</a:t>
-            </a:r>
-            <a:endParaRPr lang="en-US" dirty="0"/>
-          </a:p>
-        </p:txBody>
-      </p:sp>
-      <p:sp>
-        <p:nvSpPr>
-          <p:cNvPr id="3" name="Content Placeholder 2"/>
-          <p:cNvSpPr>
-            <a:spLocks noGrp="1"/>
-          </p:cNvSpPr>
-          <p:nvPr>
-            <p:ph idx="1"/>
-          </p:nvPr>
-        </p:nvSpPr>
-        <p:spPr/>
-        <p:txBody>
-          <a:bodyPr/>
-          <a:lstStyle/>
-          <a:p>
-            <a:r>
-              <a:rPr lang="en-US" sz="2000" dirty="0" smtClean="0"/>
-              <a:t>Design the application to </a:t>
-            </a:r>
-            <a:r>
-              <a:rPr lang="en-US" sz="2000" i="1" dirty="0" smtClean="0">
-                <a:solidFill>
-                  <a:srgbClr val="C00000"/>
-                </a:solidFill>
-              </a:rPr>
-              <a:t>conduct I/O operations asynchronously</a:t>
-            </a:r>
-            <a:r>
-              <a:rPr lang="en-US" sz="2000" dirty="0" smtClean="0"/>
-              <a:t>, so that the application can perform useful work while waiting for input and output to complete.</a:t>
-            </a:r>
-          </a:p>
-          <a:p>
-            <a:r>
-              <a:rPr lang="en-US" sz="2000" i="1" dirty="0" smtClean="0">
-                <a:solidFill>
-                  <a:srgbClr val="C00000"/>
-                </a:solidFill>
-              </a:rPr>
-              <a:t>Pool resources</a:t>
-            </a:r>
-            <a:r>
-              <a:rPr lang="en-US" sz="2000" dirty="0" smtClean="0"/>
-              <a:t> such as </a:t>
-            </a:r>
-            <a:r>
-              <a:rPr lang="en-US" sz="2000" u="sng" dirty="0" smtClean="0"/>
-              <a:t>threads</a:t>
-            </a:r>
-            <a:r>
-              <a:rPr lang="en-US" sz="2000" dirty="0" smtClean="0"/>
-              <a:t>, </a:t>
-            </a:r>
-            <a:r>
-              <a:rPr lang="en-US" sz="2000" u="sng" dirty="0" smtClean="0"/>
-              <a:t>network connections</a:t>
-            </a:r>
-            <a:r>
-              <a:rPr lang="en-US" sz="2000" dirty="0" smtClean="0"/>
-              <a:t>, and </a:t>
-            </a:r>
-            <a:r>
-              <a:rPr lang="en-US" sz="2000" u="sng" dirty="0" smtClean="0"/>
-              <a:t>database connections</a:t>
-            </a:r>
-            <a:r>
-              <a:rPr lang="en-US" sz="2000" dirty="0" smtClean="0"/>
-              <a:t>; this helps maximize your computing resources, and it improves your ability to predict resource usage.</a:t>
-            </a:r>
-          </a:p>
-          <a:p>
-            <a:r>
-              <a:rPr lang="en-US" sz="2000" dirty="0" smtClean="0"/>
-              <a:t>Write your database operations in such a way as to </a:t>
-            </a:r>
-            <a:r>
-              <a:rPr lang="en-US" sz="2000" i="1" dirty="0" smtClean="0">
-                <a:solidFill>
-                  <a:srgbClr val="C00000"/>
-                </a:solidFill>
-              </a:rPr>
-              <a:t>maximize concurrency</a:t>
-            </a:r>
-            <a:r>
-              <a:rPr lang="en-US" sz="2000" dirty="0" smtClean="0"/>
-              <a:t> and </a:t>
-            </a:r>
-            <a:r>
-              <a:rPr lang="en-US" sz="2000" i="1" dirty="0" smtClean="0">
-                <a:solidFill>
-                  <a:srgbClr val="C00000"/>
-                </a:solidFill>
-              </a:rPr>
-              <a:t>minimize exclusive locking</a:t>
-            </a:r>
-            <a:r>
-              <a:rPr lang="en-US" sz="2000" dirty="0" smtClean="0"/>
-              <a:t>. For example, don't lock records when performing read-only operations.</a:t>
-            </a:r>
-          </a:p>
-          <a:p>
-            <a:endParaRPr lang="en-US" sz="2000" dirty="0"/>
-          </a:p>
-        </p:txBody>
-      </p:sp>
-      <p:pic>
-        <p:nvPicPr>
-          <p:cNvPr id="4" name="Picture 3"/>
-          <p:cNvPicPr>
-            <a:picLocks noChangeAspect="1" noChangeArrowheads="1"/>
-          </p:cNvPicPr>
-          <p:nvPr/>
-        </p:nvPicPr>
-        <p:blipFill>
-          <a:blip r:embed="rId2" cstate="print"/>
-          <a:srcRect/>
-          <a:stretch>
-            <a:fillRect/>
-          </a:stretch>
-        </p:blipFill>
-        <p:spPr bwMode="auto">
-          <a:xfrm>
-            <a:off x="2667000" y="4800600"/>
-            <a:ext cx="3990975" cy="1619250"/>
-          </a:xfrm>
-          <a:prstGeom prst="rect">
-            <a:avLst/>
-          </a:prstGeom>
-          <a:noFill/>
-          <a:ln w="9525">
-            <a:noFill/>
-            <a:miter lim="800000"/>
-            <a:headEnd/>
-            <a:tailEnd/>
-          </a:ln>
-        </p:spPr>
-      </p:pic>
-    </p:spTree>
-  </p:cSld>
-  <p:clrMapOvr>
-    <a:masterClrMapping/>
-  </p:clrMapOvr>
-</p:sld>
-</file>
-
-<file path=ppt/slides/slide17.xml><?xml version="1.0" encoding="utf-8"?>
-<p:sld xmlns:a="http://schemas.openxmlformats.org/drawingml/2006/main" xmlns:r="http://schemas.openxmlformats.org/officeDocument/2006/relationships" xmlns:p="http://schemas.openxmlformats.org/presentationml/2006/main">
-  <p:cSld>
-    <p:spTree>
-      <p:nvGrpSpPr>
-        <p:cNvPr id="1" name=""/>
-        <p:cNvGrpSpPr/>
-        <p:nvPr/>
-      </p:nvGrpSpPr>
-      <p:grpSpPr>
-        <a:xfrm>
-          <a:off x="0" y="0"/>
-          <a:ext cx="0" cy="0"/>
-          <a:chOff x="0" y="0"/>
-          <a:chExt cx="0" cy="0"/>
-        </a:xfrm>
-      </p:grpSpPr>
-      <p:pic>
-        <p:nvPicPr>
-          <p:cNvPr id="4" name="Picture 2" descr="https://lh3.ggpht.com/1IfZLL2QDSjZ0wS7sUhaMlsAOS8BBzdR3wZ1WawgRn7KZAM8nEVZYMOUM-lqQb0ikIzp=w300"/>
-          <p:cNvPicPr>
-            <a:picLocks noChangeAspect="1" noChangeArrowheads="1"/>
-          </p:cNvPicPr>
-          <p:nvPr/>
-        </p:nvPicPr>
-        <p:blipFill>
-          <a:blip r:embed="rId2" cstate="print"/>
-          <a:srcRect/>
-          <a:stretch>
-            <a:fillRect/>
-          </a:stretch>
-        </p:blipFill>
-        <p:spPr bwMode="auto">
-          <a:xfrm>
-            <a:off x="3276600" y="1905000"/>
-            <a:ext cx="2857500" cy="2857500"/>
-          </a:xfrm>
-          <a:prstGeom prst="rect">
-            <a:avLst/>
-          </a:prstGeom>
-          <a:noFill/>
-        </p:spPr>
-      </p:pic>
-    </p:spTree>
-  </p:cSld>
-  <p:clrMapOvr>
-    <a:masterClrMapping/>
-  </p:clrMapOvr>
-</p:sld>
-</file>
-
-<file path=ppt/slides/slide18.xml><?xml version="1.0" encoding="utf-8"?>
-<p:sld xmlns:a="http://schemas.openxmlformats.org/drawingml/2006/main" xmlns:r="http://schemas.openxmlformats.org/officeDocument/2006/relationships" xmlns:p="http://schemas.openxmlformats.org/presentationml/2006/main">
-  <p:cSld>
-    <p:spTree>
-      <p:nvGrpSpPr>
-        <p:cNvPr id="1" name=""/>
-        <p:cNvGrpSpPr/>
-        <p:nvPr/>
-      </p:nvGrpSpPr>
-      <p:grpSpPr>
-        <a:xfrm>
-          <a:off x="0" y="0"/>
-          <a:ext cx="0" cy="0"/>
-          <a:chOff x="0" y="0"/>
-          <a:chExt cx="0" cy="0"/>
-        </a:xfrm>
-      </p:grpSpPr>
-      <p:sp>
-        <p:nvSpPr>
-          <p:cNvPr id="2" name="Title 1"/>
-          <p:cNvSpPr>
-            <a:spLocks noGrp="1"/>
-          </p:cNvSpPr>
-          <p:nvPr>
-            <p:ph type="title"/>
-          </p:nvPr>
-        </p:nvSpPr>
-        <p:spPr/>
-        <p:txBody>
-          <a:bodyPr/>
-          <a:lstStyle/>
-          <a:p>
-            <a:r>
-              <a:rPr lang="en-US" dirty="0" smtClean="0"/>
-              <a:t>(ASP.NET) Session Storage</a:t>
-            </a:r>
-            <a:endParaRPr lang="en-US" dirty="0"/>
-          </a:p>
-        </p:txBody>
-      </p:sp>
-      <p:sp>
-        <p:nvSpPr>
-          <p:cNvPr id="3" name="Content Placeholder 2"/>
-          <p:cNvSpPr>
-            <a:spLocks noGrp="1"/>
-          </p:cNvSpPr>
-          <p:nvPr>
-            <p:ph idx="1"/>
-          </p:nvPr>
-        </p:nvSpPr>
-        <p:spPr/>
-        <p:txBody>
-          <a:bodyPr/>
-          <a:lstStyle/>
-          <a:p>
-            <a:r>
-              <a:rPr lang="en-US" sz="2600" i="1" dirty="0" smtClean="0">
-                <a:solidFill>
-                  <a:srgbClr val="C00000"/>
-                </a:solidFill>
-              </a:rPr>
-              <a:t>Machine key</a:t>
-            </a:r>
-            <a:r>
-              <a:rPr lang="en-US" sz="2600" dirty="0" smtClean="0"/>
-              <a:t> should be same for both servers: </a:t>
-            </a:r>
-            <a:r>
-              <a:rPr lang="en-US" sz="2600" u="sng" dirty="0" smtClean="0"/>
-              <a:t>View state</a:t>
-            </a:r>
-            <a:r>
-              <a:rPr lang="en-US" sz="2600" dirty="0" smtClean="0"/>
-              <a:t> and </a:t>
-            </a:r>
-            <a:r>
-              <a:rPr lang="en-US" sz="2600" u="sng" dirty="0" smtClean="0"/>
-              <a:t>session</a:t>
-            </a:r>
-            <a:r>
-              <a:rPr lang="en-US" sz="2600" dirty="0" smtClean="0"/>
-              <a:t> both </a:t>
-            </a:r>
-            <a:r>
-              <a:rPr lang="en-US" sz="2600" u="sng" dirty="0" smtClean="0"/>
-              <a:t>depend on</a:t>
-            </a:r>
-            <a:r>
-              <a:rPr lang="en-US" sz="2600" dirty="0" smtClean="0"/>
-              <a:t> the machine key.</a:t>
-            </a:r>
-          </a:p>
-          <a:p>
-            <a:r>
-              <a:rPr lang="en-US" sz="2600" dirty="0" smtClean="0"/>
-              <a:t>Session storage options:</a:t>
-            </a:r>
-          </a:p>
-          <a:p>
-            <a:pPr lvl="1"/>
-            <a:r>
-              <a:rPr lang="en-US" sz="2200" dirty="0" err="1" smtClean="0">
-                <a:latin typeface="Consolas" pitchFamily="49" charset="0"/>
-              </a:rPr>
-              <a:t>InProc</a:t>
-            </a:r>
-            <a:endParaRPr lang="en-US" sz="2200" dirty="0" smtClean="0">
-              <a:latin typeface="Consolas" pitchFamily="49" charset="0"/>
-            </a:endParaRPr>
-          </a:p>
-          <a:p>
-            <a:pPr lvl="1"/>
-            <a:r>
-              <a:rPr lang="en-US" sz="2200" dirty="0" err="1" smtClean="0">
-                <a:latin typeface="Consolas" pitchFamily="49" charset="0"/>
-              </a:rPr>
-              <a:t>StateServer</a:t>
-            </a:r>
-            <a:endParaRPr lang="en-US" sz="2200" dirty="0" smtClean="0">
-              <a:latin typeface="Consolas" pitchFamily="49" charset="0"/>
-            </a:endParaRPr>
-          </a:p>
-          <a:p>
-            <a:pPr lvl="1"/>
-            <a:r>
-              <a:rPr lang="en-US" sz="2200" b="1" dirty="0" err="1" smtClean="0">
-                <a:latin typeface="Consolas" pitchFamily="49" charset="0"/>
-              </a:rPr>
-              <a:t>SQLServer</a:t>
-            </a:r>
-            <a:endParaRPr lang="en-US" sz="2200" b="1" dirty="0" smtClean="0">
-              <a:latin typeface="Consolas" pitchFamily="49" charset="0"/>
-            </a:endParaRPr>
-          </a:p>
-        </p:txBody>
-      </p:sp>
-      <p:sp>
-        <p:nvSpPr>
-          <p:cNvPr id="4" name="Rectangle 3"/>
-          <p:cNvSpPr/>
-          <p:nvPr/>
-        </p:nvSpPr>
-        <p:spPr>
-          <a:xfrm>
-            <a:off x="533400" y="4495800"/>
-            <a:ext cx="7924800" cy="1754326"/>
-          </a:xfrm>
-          <a:prstGeom prst="rect">
-            <a:avLst/>
-          </a:prstGeom>
-        </p:spPr>
-        <p:style>
-          <a:lnRef idx="1">
-            <a:schemeClr val="dk1"/>
-          </a:lnRef>
-          <a:fillRef idx="2">
-            <a:schemeClr val="dk1"/>
-          </a:fillRef>
-          <a:effectRef idx="1">
-            <a:schemeClr val="dk1"/>
-          </a:effectRef>
-          <a:fontRef idx="minor">
-            <a:schemeClr val="dk1"/>
-          </a:fontRef>
-        </p:style>
-        <p:txBody>
-          <a:bodyPr wrap="square">
-            <a:spAutoFit/>
-          </a:bodyPr>
-          <a:lstStyle/>
-          <a:p>
-            <a:pPr>
-              <a:buNone/>
-            </a:pPr>
-            <a:r>
-              <a:rPr lang="en-US" dirty="0" smtClean="0">
-                <a:latin typeface="Consolas" pitchFamily="49" charset="0"/>
-              </a:rPr>
-              <a:t>&lt;system.web&gt;</a:t>
-            </a:r>
-          </a:p>
-          <a:p>
-            <a:pPr>
-              <a:buNone/>
-            </a:pPr>
-            <a:r>
-              <a:rPr lang="en-US" dirty="0" smtClean="0">
-                <a:latin typeface="Consolas" pitchFamily="49" charset="0"/>
-              </a:rPr>
-              <a:t>    &lt;</a:t>
-            </a:r>
-            <a:r>
-              <a:rPr lang="en-US" dirty="0" err="1" smtClean="0">
-                <a:latin typeface="Consolas" pitchFamily="49" charset="0"/>
-              </a:rPr>
-              <a:t>httpCookies</a:t>
-            </a:r>
-            <a:r>
-              <a:rPr lang="en-US" dirty="0" smtClean="0">
-                <a:latin typeface="Consolas" pitchFamily="49" charset="0"/>
-              </a:rPr>
-              <a:t> </a:t>
-            </a:r>
-            <a:r>
-              <a:rPr lang="en-US" dirty="0" err="1" smtClean="0">
-                <a:latin typeface="Consolas" pitchFamily="49" charset="0"/>
-              </a:rPr>
-              <a:t>requireSSL</a:t>
-            </a:r>
-            <a:r>
-              <a:rPr lang="en-US" dirty="0" smtClean="0">
-                <a:latin typeface="Consolas" pitchFamily="49" charset="0"/>
-              </a:rPr>
-              <a:t>="true" /&gt;</a:t>
-            </a:r>
-          </a:p>
-          <a:p>
-            <a:pPr>
-              <a:buNone/>
-            </a:pPr>
-            <a:r>
-              <a:rPr lang="en-US" dirty="0" smtClean="0">
-                <a:latin typeface="Consolas" pitchFamily="49" charset="0"/>
-              </a:rPr>
-              <a:t>    &lt;</a:t>
-            </a:r>
-            <a:r>
-              <a:rPr lang="en-US" dirty="0" err="1" smtClean="0">
-                <a:latin typeface="Consolas" pitchFamily="49" charset="0"/>
-              </a:rPr>
-              <a:t>machineKey</a:t>
-            </a:r>
-            <a:r>
-              <a:rPr lang="en-US" dirty="0" smtClean="0">
-                <a:latin typeface="Consolas" pitchFamily="49" charset="0"/>
-              </a:rPr>
-              <a:t> validation="SHA1" /&gt;</a:t>
-            </a:r>
-          </a:p>
-          <a:p>
-            <a:pPr>
-              <a:buNone/>
-            </a:pPr>
-            <a:r>
-              <a:rPr lang="en-US" dirty="0" smtClean="0">
-                <a:latin typeface="Consolas" pitchFamily="49" charset="0"/>
-              </a:rPr>
-              <a:t>    &lt;</a:t>
-            </a:r>
-            <a:r>
-              <a:rPr lang="en-US" dirty="0" err="1" smtClean="0">
-                <a:latin typeface="Consolas" pitchFamily="49" charset="0"/>
-              </a:rPr>
-              <a:t>sessionState</a:t>
-            </a:r>
-            <a:r>
-              <a:rPr lang="en-US" dirty="0" smtClean="0">
-                <a:latin typeface="Consolas" pitchFamily="49" charset="0"/>
-              </a:rPr>
-              <a:t> timeout="25" </a:t>
-            </a:r>
-            <a:r>
-              <a:rPr lang="en-US" dirty="0" err="1" smtClean="0">
-                <a:latin typeface="Consolas" pitchFamily="49" charset="0"/>
-              </a:rPr>
-              <a:t>cookieless</a:t>
-            </a:r>
-            <a:r>
-              <a:rPr lang="en-US" dirty="0" smtClean="0">
-                <a:latin typeface="Consolas" pitchFamily="49" charset="0"/>
-              </a:rPr>
-              <a:t>="false" </a:t>
-            </a:r>
-            <a:r>
-              <a:rPr lang="en-US" dirty="0" err="1" smtClean="0">
-                <a:latin typeface="Consolas" pitchFamily="49" charset="0"/>
-              </a:rPr>
-              <a:t>regenerateExpiredSessionId</a:t>
-            </a:r>
-            <a:r>
-              <a:rPr lang="en-US" dirty="0" smtClean="0">
-                <a:latin typeface="Consolas" pitchFamily="49" charset="0"/>
-              </a:rPr>
-              <a:t>="true" mode="</a:t>
-            </a:r>
-            <a:r>
-              <a:rPr lang="en-US" b="1" i="1" dirty="0" err="1" smtClean="0">
-                <a:solidFill>
-                  <a:srgbClr val="C00000"/>
-                </a:solidFill>
-                <a:latin typeface="Consolas" pitchFamily="49" charset="0"/>
-              </a:rPr>
-              <a:t>InProc</a:t>
-            </a:r>
-            <a:r>
-              <a:rPr lang="en-US" dirty="0" smtClean="0">
-                <a:latin typeface="Consolas" pitchFamily="49" charset="0"/>
-              </a:rPr>
-              <a:t>" /&gt;</a:t>
-            </a:r>
-          </a:p>
-          <a:p>
-            <a:pPr>
-              <a:buNone/>
-            </a:pPr>
-            <a:r>
-              <a:rPr lang="en-US" dirty="0" smtClean="0">
-                <a:latin typeface="Consolas" pitchFamily="49" charset="0"/>
-              </a:rPr>
-              <a:t>...</a:t>
-            </a:r>
-          </a:p>
-        </p:txBody>
-      </p:sp>
-    </p:spTree>
-  </p:cSld>
-  <p:clrMapOvr>
-    <a:masterClrMapping/>
-  </p:clrMapOvr>
-</p:sld>
-</file>
-
-<file path=ppt/slides/slide19.xml><?xml version="1.0" encoding="utf-8"?>
-<p:sld xmlns:a="http://schemas.openxmlformats.org/drawingml/2006/main" xmlns:r="http://schemas.openxmlformats.org/officeDocument/2006/relationships" xmlns:p="http://schemas.openxmlformats.org/presentationml/2006/main">
-  <p:cSld>
-    <p:spTree>
-      <p:nvGrpSpPr>
-        <p:cNvPr id="1" name=""/>
-        <p:cNvGrpSpPr/>
-        <p:nvPr/>
-      </p:nvGrpSpPr>
-      <p:grpSpPr>
-        <a:xfrm>
-          <a:off x="0" y="0"/>
-          <a:ext cx="0" cy="0"/>
-          <a:chOff x="0" y="0"/>
-          <a:chExt cx="0" cy="0"/>
-        </a:xfrm>
-      </p:grpSpPr>
-      <p:sp>
-        <p:nvSpPr>
-          <p:cNvPr id="2" name="Title 1"/>
-          <p:cNvSpPr>
-            <a:spLocks noGrp="1"/>
-          </p:cNvSpPr>
-          <p:nvPr>
-            <p:ph type="title"/>
-          </p:nvPr>
-        </p:nvSpPr>
-        <p:spPr/>
-        <p:txBody>
-          <a:bodyPr/>
-          <a:lstStyle/>
-          <a:p>
-            <a:pPr algn="l"/>
-            <a:r>
-              <a:rPr lang="en-US" dirty="0" smtClean="0"/>
-              <a:t>1. Create an SQL Server Database for </a:t>
-            </a:r>
-            <a:r>
-              <a:rPr lang="en-US" dirty="0" err="1" smtClean="0"/>
-              <a:t>SQLServer</a:t>
-            </a:r>
-            <a:r>
-              <a:rPr lang="en-US" dirty="0" smtClean="0"/>
-              <a:t> Session Mode</a:t>
-            </a:r>
-            <a:endParaRPr lang="en-US" dirty="0"/>
-          </a:p>
-        </p:txBody>
-      </p:sp>
-      <p:sp>
-        <p:nvSpPr>
-          <p:cNvPr id="3" name="Content Placeholder 2"/>
-          <p:cNvSpPr>
-            <a:spLocks noGrp="1"/>
-          </p:cNvSpPr>
-          <p:nvPr>
-            <p:ph idx="1"/>
-          </p:nvPr>
-        </p:nvSpPr>
-        <p:spPr/>
-        <p:txBody>
-          <a:bodyPr/>
-          <a:lstStyle/>
-          <a:p>
-            <a:pPr marL="342900" lvl="2" indent="-342900"/>
-            <a:r>
-              <a:rPr lang="en-US" sz="2200" b="1" dirty="0" smtClean="0"/>
-              <a:t>Run cmd.exe as Administrator</a:t>
-            </a:r>
-          </a:p>
-          <a:p>
-            <a:pPr marL="342900" lvl="2" indent="-342900"/>
-            <a:r>
-              <a:rPr lang="en-US" sz="2200" i="1" dirty="0" smtClean="0">
-                <a:latin typeface="Consolas" pitchFamily="49" charset="0"/>
-              </a:rPr>
-              <a:t>C:\Windows\Microsoft.NET\Framework\v4.0.30319\aspnet_regsql.exe -</a:t>
-            </a:r>
-            <a:r>
-              <a:rPr lang="en-US" sz="2200" i="1" dirty="0" err="1" smtClean="0">
-                <a:latin typeface="Consolas" pitchFamily="49" charset="0"/>
-              </a:rPr>
-              <a:t>ssadd</a:t>
-            </a:r>
-            <a:r>
-              <a:rPr lang="en-US" sz="2200" i="1" dirty="0" smtClean="0">
-                <a:latin typeface="Consolas" pitchFamily="49" charset="0"/>
-              </a:rPr>
-              <a:t> -</a:t>
-            </a:r>
-            <a:r>
-              <a:rPr lang="en-US" sz="2200" i="1" dirty="0" err="1" smtClean="0">
-                <a:latin typeface="Consolas" pitchFamily="49" charset="0"/>
-              </a:rPr>
-              <a:t>sstype</a:t>
-            </a:r>
-            <a:r>
-              <a:rPr lang="en-US" sz="2200" i="1" dirty="0" smtClean="0">
-                <a:latin typeface="Consolas" pitchFamily="49" charset="0"/>
-              </a:rPr>
-              <a:t> c -d apistate.example.com -S </a:t>
-            </a:r>
-            <a:r>
-              <a:rPr lang="en-US" sz="2200" i="1" dirty="0" err="1" smtClean="0">
-                <a:latin typeface="Consolas" pitchFamily="49" charset="0"/>
-              </a:rPr>
-              <a:t>localhost</a:t>
-            </a:r>
-            <a:r>
-              <a:rPr lang="en-US" sz="2200" i="1" dirty="0" smtClean="0">
-                <a:latin typeface="Consolas" pitchFamily="49" charset="0"/>
-              </a:rPr>
-              <a:t> –E</a:t>
-            </a:r>
-          </a:p>
-        </p:txBody>
-      </p:sp>
     </p:spTree>
   </p:cSld>
   <p:clrMapOvr>
@@ -5771,18 +5405,9 @@
           <a:bodyPr/>
           <a:lstStyle/>
           <a:p>
-            <a:pPr algn="l"/>
             <a:r>
               <a:rPr lang="en-US" dirty="0" smtClean="0"/>
-              <a:t>2. Create a Connection String for </a:t>
-            </a:r>
-            <a:r>
-              <a:rPr lang="en-US" dirty="0" err="1" smtClean="0"/>
-              <a:t>SQLServer</a:t>
-            </a:r>
-            <a:r>
-              <a:rPr lang="en-US" dirty="0" smtClean="0"/>
-              <a:t> Session Mode</a:t>
+              <a:t>Scaling Out Guidelines (I) [2]</a:t>
             </a:r>
             <a:endParaRPr lang="en-US" dirty="0"/>
           </a:p>
@@ -5804,251 +5429,109 @@
           <a:lstStyle/>
           <a:p>
             <a:r>
-              <a:rPr lang="en-US" sz="2400" dirty="0" smtClean="0">
-                <a:latin typeface="+mj-lt"/>
-              </a:rPr>
-              <a:t>Create </a:t>
-            </a:r>
-            <a:r>
-              <a:rPr lang="en-US" sz="2400" dirty="0" err="1" smtClean="0">
-                <a:latin typeface="+mj-lt"/>
-              </a:rPr>
-              <a:t>web.connectionStrings.config</a:t>
-            </a:r>
-            <a:r>
-              <a:rPr lang="en-US" sz="2400" dirty="0" smtClean="0">
-                <a:latin typeface="+mj-lt"/>
-              </a:rPr>
-              <a:t> file.</a:t>
-            </a:r>
-          </a:p>
-        </p:txBody>
-      </p:sp>
-      <p:sp>
-        <p:nvSpPr>
-          <p:cNvPr id="4" name="Rectangle 3"/>
-          <p:cNvSpPr/>
+              <a:rPr lang="en-US" sz="2000" i="1" dirty="0" smtClean="0">
+                <a:solidFill>
+                  <a:srgbClr val="C00000"/>
+                </a:solidFill>
+              </a:rPr>
+              <a:t>Statelessness</a:t>
+            </a:r>
+            <a:r>
+              <a:rPr lang="en-US" sz="2000" dirty="0" smtClean="0"/>
+              <a:t> means that each </a:t>
+            </a:r>
+            <a:r>
+              <a:rPr lang="en-US" sz="2000" u="sng" dirty="0" smtClean="0"/>
+              <a:t>transaction can be handled by one instance as well as any other</a:t>
+            </a:r>
+            <a:r>
+              <a:rPr lang="en-US" sz="2000" dirty="0" smtClean="0"/>
+              <a:t>; a user may transact with dozens of different instances during a single session, without ever knowing it.</a:t>
+            </a:r>
+          </a:p>
+          <a:p>
+            <a:r>
+              <a:rPr lang="en-US" sz="2000" dirty="0" smtClean="0"/>
+              <a:t>Design the application to </a:t>
+            </a:r>
+            <a:r>
+              <a:rPr lang="en-US" sz="2000" i="1" dirty="0" smtClean="0">
+                <a:solidFill>
+                  <a:srgbClr val="C00000"/>
+                </a:solidFill>
+              </a:rPr>
+              <a:t>run in a stateless fashion</a:t>
+            </a:r>
+            <a:r>
+              <a:rPr lang="en-US" sz="2000" dirty="0" smtClean="0"/>
+              <a:t>, with any necessary user and </a:t>
+            </a:r>
+            <a:r>
+              <a:rPr lang="en-US" sz="2000" i="1" dirty="0" smtClean="0">
+                <a:solidFill>
+                  <a:srgbClr val="C00000"/>
+                </a:solidFill>
+              </a:rPr>
+              <a:t>session data</a:t>
+            </a:r>
+            <a:r>
+              <a:rPr lang="en-US" sz="2000" dirty="0" smtClean="0"/>
+              <a:t> stored either </a:t>
+            </a:r>
+            <a:r>
+              <a:rPr lang="en-US" sz="2000" u="sng" dirty="0" smtClean="0"/>
+              <a:t>on the client side</a:t>
+            </a:r>
+            <a:r>
+              <a:rPr lang="en-US" sz="2000" dirty="0" smtClean="0"/>
+              <a:t>, or in a </a:t>
+            </a:r>
+            <a:r>
+              <a:rPr lang="en-US" sz="2000" u="sng" dirty="0" smtClean="0"/>
+              <a:t>distributed store</a:t>
+            </a:r>
+            <a:r>
+              <a:rPr lang="en-US" sz="2000" dirty="0" smtClean="0"/>
+              <a:t> that's accessible to any application instance.</a:t>
+            </a:r>
+          </a:p>
+          <a:p>
+            <a:endParaRPr lang="en-US" sz="2000" dirty="0"/>
+          </a:p>
+        </p:txBody>
+      </p:sp>
+      <p:pic>
+        <p:nvPicPr>
+          <p:cNvPr id="4" name="Picture 3"/>
+          <p:cNvPicPr>
+            <a:picLocks noChangeAspect="1" noChangeArrowheads="1"/>
+          </p:cNvPicPr>
           <p:nvPr/>
-        </p:nvSpPr>
-        <p:spPr>
+        </p:nvPicPr>
+        <p:blipFill>
+          <a:blip r:embed="rId2" cstate="print"/>
+          <a:srcRect/>
+          <a:stretch>
+            <a:fillRect/>
+          </a:stretch>
+        </p:blipFill>
+        <p:spPr bwMode="auto">
           <a:xfrm>
-            <a:off x="533400" y="2438400"/>
-            <a:ext cx="7924800" cy="3139321"/>
+            <a:off x="2667000" y="4114800"/>
+            <a:ext cx="3990975" cy="1619250"/>
           </a:xfrm>
           <a:prstGeom prst="rect">
             <a:avLst/>
           </a:prstGeom>
+          <a:noFill/>
+          <a:ln w="9525">
+            <a:noFill/>
+            <a:miter lim="800000"/>
+            <a:headEnd/>
+            <a:tailEnd/>
+          </a:ln>
         </p:spPr>
-        <p:style>
-          <a:lnRef idx="1">
-            <a:schemeClr val="dk1"/>
-          </a:lnRef>
-          <a:fillRef idx="2">
-            <a:schemeClr val="dk1"/>
-          </a:fillRef>
-          <a:effectRef idx="1">
-            <a:schemeClr val="dk1"/>
-          </a:effectRef>
-          <a:fontRef idx="minor">
-            <a:schemeClr val="dk1"/>
-          </a:fontRef>
-        </p:style>
-        <p:txBody>
-          <a:bodyPr wrap="square">
-            <a:spAutoFit/>
-          </a:bodyPr>
-          <a:lstStyle/>
-          <a:p>
-            <a:pPr>
-              <a:buNone/>
-            </a:pPr>
-            <a:r>
-              <a:rPr lang="en-US" dirty="0" smtClean="0">
-                <a:latin typeface="Consolas" pitchFamily="49" charset="0"/>
-              </a:rPr>
-              <a:t>&lt;?xml version="1.0" ?&gt;</a:t>
-            </a:r>
-          </a:p>
-          <a:p>
-            <a:pPr>
-              <a:buNone/>
-            </a:pPr>
-            <a:r>
-              <a:rPr lang="en-US" dirty="0" smtClean="0">
-                <a:latin typeface="Consolas" pitchFamily="49" charset="0"/>
-              </a:rPr>
-              <a:t>  &lt;</a:t>
-            </a:r>
-            <a:r>
-              <a:rPr lang="en-US" dirty="0" err="1" smtClean="0">
-                <a:latin typeface="Consolas" pitchFamily="49" charset="0"/>
-              </a:rPr>
-              <a:t>connectionStrings</a:t>
-            </a:r>
-            <a:r>
-              <a:rPr lang="en-US" dirty="0" smtClean="0">
-                <a:latin typeface="Consolas" pitchFamily="49" charset="0"/>
-              </a:rPr>
-              <a:t>&gt;</a:t>
-            </a:r>
-          </a:p>
-          <a:p>
-            <a:pPr>
-              <a:buNone/>
-            </a:pPr>
-            <a:r>
-              <a:rPr lang="en-US" dirty="0" smtClean="0">
-                <a:latin typeface="Consolas" pitchFamily="49" charset="0"/>
-              </a:rPr>
-              <a:t>    &lt;clear /&gt;</a:t>
-            </a:r>
-          </a:p>
-          <a:p>
-            <a:pPr>
-              <a:buNone/>
-            </a:pPr>
-            <a:r>
-              <a:rPr lang="en-US" dirty="0" smtClean="0">
-                <a:latin typeface="Consolas" pitchFamily="49" charset="0"/>
-              </a:rPr>
-              <a:t>...</a:t>
-            </a:r>
-          </a:p>
-          <a:p>
-            <a:pPr>
-              <a:buNone/>
-            </a:pPr>
-            <a:r>
-              <a:rPr lang="en-US" dirty="0" smtClean="0">
-                <a:latin typeface="Consolas" pitchFamily="49" charset="0"/>
-              </a:rPr>
-              <a:t>    &lt;add name="</a:t>
-            </a:r>
-            <a:r>
-              <a:rPr lang="en-US" b="1" i="1" dirty="0" err="1" smtClean="0">
-                <a:solidFill>
-                  <a:srgbClr val="C00000"/>
-                </a:solidFill>
-                <a:latin typeface="Consolas" pitchFamily="49" charset="0"/>
-              </a:rPr>
-              <a:t>snsState</a:t>
-            </a:r>
-            <a:r>
-              <a:rPr lang="en-US" dirty="0" smtClean="0">
-                <a:latin typeface="Consolas" pitchFamily="49" charset="0"/>
-              </a:rPr>
-              <a:t>" </a:t>
-            </a:r>
-            <a:r>
-              <a:rPr lang="en-US" dirty="0" err="1" smtClean="0">
-                <a:latin typeface="Consolas" pitchFamily="49" charset="0"/>
-              </a:rPr>
-              <a:t>connectionString</a:t>
-            </a:r>
-            <a:r>
-              <a:rPr lang="en-US" dirty="0" smtClean="0">
-                <a:latin typeface="Consolas" pitchFamily="49" charset="0"/>
-              </a:rPr>
-              <a:t>="Data Source=192.168.101.62;Initial Catalog=</a:t>
-            </a:r>
-            <a:r>
-              <a:rPr lang="en-US" dirty="0" err="1" smtClean="0">
-                <a:latin typeface="Consolas" pitchFamily="49" charset="0"/>
-              </a:rPr>
-              <a:t>apistate.example.com;Persist</a:t>
-            </a:r>
-            <a:r>
-              <a:rPr lang="en-US" dirty="0" smtClean="0">
-                <a:latin typeface="Consolas" pitchFamily="49" charset="0"/>
-              </a:rPr>
-              <a:t> Security Info=</a:t>
-            </a:r>
-            <a:r>
-              <a:rPr lang="en-US" dirty="0" err="1" smtClean="0">
-                <a:latin typeface="Consolas" pitchFamily="49" charset="0"/>
-              </a:rPr>
-              <a:t>True;User</a:t>
-            </a:r>
-            <a:r>
-              <a:rPr lang="en-US" dirty="0" smtClean="0">
-                <a:latin typeface="Consolas" pitchFamily="49" charset="0"/>
-              </a:rPr>
-              <a:t> ID=</a:t>
-            </a:r>
-            <a:r>
-              <a:rPr lang="en-US" dirty="0" err="1" smtClean="0">
-                <a:latin typeface="Consolas" pitchFamily="49" charset="0"/>
-              </a:rPr>
-              <a:t>api.example.com;Password</a:t>
-            </a:r>
-            <a:r>
-              <a:rPr lang="en-US" dirty="0" smtClean="0">
-                <a:latin typeface="Consolas" pitchFamily="49" charset="0"/>
-              </a:rPr>
-              <a:t>=$%</a:t>
-            </a:r>
-            <a:r>
-              <a:rPr lang="en-US" dirty="0" err="1" smtClean="0">
-                <a:latin typeface="Consolas" pitchFamily="49" charset="0"/>
-              </a:rPr>
-              <a:t>Ym</a:t>
-            </a:r>
-            <a:r>
-              <a:rPr lang="en-US" dirty="0" smtClean="0">
-                <a:latin typeface="Consolas" pitchFamily="49" charset="0"/>
-              </a:rPr>
-              <a:t>*k3xtt4#bNNu;Connect Timeout=60;Min Pool Size=0;Max Pool Size=100;" </a:t>
-            </a:r>
-            <a:r>
-              <a:rPr lang="en-US" dirty="0" err="1" smtClean="0">
-                <a:latin typeface="Consolas" pitchFamily="49" charset="0"/>
-              </a:rPr>
-              <a:t>providerName</a:t>
-            </a:r>
-            <a:r>
-              <a:rPr lang="en-US" dirty="0" smtClean="0">
-                <a:latin typeface="Consolas" pitchFamily="49" charset="0"/>
-              </a:rPr>
-              <a:t>="</a:t>
-            </a:r>
-            <a:r>
-              <a:rPr lang="en-US" dirty="0" err="1" smtClean="0">
-                <a:latin typeface="Consolas" pitchFamily="49" charset="0"/>
-              </a:rPr>
-              <a:t>System.Data.SqlClient</a:t>
-            </a:r>
-            <a:r>
-              <a:rPr lang="en-US" dirty="0" smtClean="0">
-                <a:latin typeface="Consolas" pitchFamily="49" charset="0"/>
-              </a:rPr>
-              <a:t>" /&gt;</a:t>
-            </a:r>
-          </a:p>
-          <a:p>
-            <a:pPr>
-              <a:buNone/>
-            </a:pPr>
-            <a:r>
-              <a:rPr lang="en-US" dirty="0" smtClean="0">
-                <a:latin typeface="Consolas" pitchFamily="49" charset="0"/>
-              </a:rPr>
-              <a:t>  &lt;/</a:t>
-            </a:r>
-            <a:r>
-              <a:rPr lang="en-US" dirty="0" err="1" smtClean="0">
-                <a:latin typeface="Consolas" pitchFamily="49" charset="0"/>
-              </a:rPr>
-              <a:t>connectionStrings</a:t>
-            </a:r>
-            <a:r>
-              <a:rPr lang="en-US" dirty="0" smtClean="0">
-                <a:latin typeface="Consolas" pitchFamily="49" charset="0"/>
-              </a:rPr>
-              <a:t>&gt;</a:t>
-            </a:r>
-          </a:p>
-        </p:txBody>
-      </p:sp>
+      </p:pic>
     </p:spTree>
   </p:cSld>
   <p:clrMapOvr>
@@ -6089,18 +5572,9 @@
           <a:bodyPr/>
           <a:lstStyle/>
           <a:p>
-            <a:pPr algn="l"/>
             <a:r>
               <a:rPr lang="en-US" dirty="0" smtClean="0"/>
-              <a:t>3. Enable </a:t>
-            </a:r>
-            <a:r>
-              <a:rPr lang="en-US" dirty="0" err="1" smtClean="0"/>
-              <a:t>SQLServer</a:t>
-            </a:r>
-            <a:r>
-              <a:rPr lang="en-US" dirty="0" smtClean="0"/>
-              <a:t> Session Mode</a:t>
+              <a:t>Scaling Out Guidelines (II)</a:t>
             </a:r>
             <a:endParaRPr lang="en-US" dirty="0"/>
           </a:p>
@@ -6122,154 +5596,98 @@
           <a:lstStyle/>
           <a:p>
             <a:r>
-              <a:rPr lang="en-US" sz="2200" dirty="0" smtClean="0">
-                <a:latin typeface="Consolas" pitchFamily="49" charset="0"/>
-              </a:rPr>
-              <a:t>&lt;</a:t>
-            </a:r>
-            <a:r>
-              <a:rPr lang="en-US" sz="2200" dirty="0" err="1" smtClean="0">
-                <a:latin typeface="Consolas" pitchFamily="49" charset="0"/>
-              </a:rPr>
-              <a:t>connectionStrings</a:t>
-            </a:r>
-            <a:r>
-              <a:rPr lang="en-US" sz="2200" dirty="0" smtClean="0">
-                <a:latin typeface="Consolas" pitchFamily="49" charset="0"/>
-              </a:rPr>
-              <a:t> </a:t>
-            </a:r>
-            <a:r>
-              <a:rPr lang="en-US" sz="2200" dirty="0" err="1" smtClean="0">
-                <a:latin typeface="Consolas" pitchFamily="49" charset="0"/>
-              </a:rPr>
-              <a:t>configSource</a:t>
-            </a:r>
-            <a:r>
-              <a:rPr lang="en-US" sz="2200" dirty="0" smtClean="0">
-                <a:latin typeface="Consolas" pitchFamily="49" charset="0"/>
-              </a:rPr>
-              <a:t>="</a:t>
-            </a:r>
-            <a:r>
-              <a:rPr lang="en-US" sz="2200" i="1" dirty="0" err="1" smtClean="0">
+              <a:rPr lang="en-US" sz="2000" dirty="0" smtClean="0"/>
+              <a:t>Design the application to </a:t>
+            </a:r>
+            <a:r>
+              <a:rPr lang="en-US" sz="2000" i="1" dirty="0" smtClean="0">
                 <a:solidFill>
                   <a:srgbClr val="C00000"/>
                 </a:solidFill>
-                <a:latin typeface="Consolas" pitchFamily="49" charset="0"/>
-              </a:rPr>
-              <a:t>web.connectionStrings.config</a:t>
-            </a:r>
-            <a:r>
-              <a:rPr lang="en-US" sz="2200" dirty="0" smtClean="0">
-                <a:latin typeface="Consolas" pitchFamily="49" charset="0"/>
-              </a:rPr>
-              <a:t>" /&gt;</a:t>
-            </a:r>
-          </a:p>
-          <a:p>
-            <a:r>
-              <a:rPr lang="en-US" sz="2200" dirty="0" smtClean="0">
-                <a:latin typeface="Consolas" pitchFamily="49" charset="0"/>
-              </a:rPr>
-              <a:t>&lt;</a:t>
-            </a:r>
-            <a:r>
-              <a:rPr lang="en-US" sz="2200" dirty="0" err="1" smtClean="0">
-                <a:latin typeface="Consolas" pitchFamily="49" charset="0"/>
-              </a:rPr>
-              <a:t>sessionState</a:t>
-            </a:r>
-            <a:r>
-              <a:rPr lang="en-US" sz="2200" dirty="0" smtClean="0">
-                <a:latin typeface="Consolas" pitchFamily="49" charset="0"/>
-              </a:rPr>
-              <a:t> timeout="25" </a:t>
-            </a:r>
-            <a:r>
-              <a:rPr lang="en-US" sz="2200" dirty="0" err="1" smtClean="0">
-                <a:latin typeface="Consolas" pitchFamily="49" charset="0"/>
-              </a:rPr>
-              <a:t>cookieless</a:t>
-            </a:r>
-            <a:r>
-              <a:rPr lang="en-US" sz="2200" dirty="0" smtClean="0">
-                <a:latin typeface="Consolas" pitchFamily="49" charset="0"/>
-              </a:rPr>
-              <a:t>="false" </a:t>
-            </a:r>
-            <a:r>
-              <a:rPr lang="en-US" sz="2200" dirty="0" err="1" smtClean="0">
-                <a:latin typeface="Consolas" pitchFamily="49" charset="0"/>
-              </a:rPr>
-              <a:t>regenerateExpiredSessionId</a:t>
-            </a:r>
-            <a:r>
-              <a:rPr lang="en-US" sz="2200" dirty="0" smtClean="0">
-                <a:latin typeface="Consolas" pitchFamily="49" charset="0"/>
-              </a:rPr>
-              <a:t>="true" mode="</a:t>
-            </a:r>
-            <a:r>
-              <a:rPr lang="en-US" sz="2200" b="1" i="1" dirty="0" err="1" smtClean="0">
+              </a:rPr>
+              <a:t>conduct I/O operations asynchronously</a:t>
+            </a:r>
+            <a:r>
+              <a:rPr lang="en-US" sz="2000" dirty="0" smtClean="0"/>
+              <a:t>, so that the application can perform useful work while waiting for input and output to complete.</a:t>
+            </a:r>
+          </a:p>
+          <a:p>
+            <a:r>
+              <a:rPr lang="en-US" sz="2000" i="1" dirty="0" smtClean="0">
                 <a:solidFill>
                   <a:srgbClr val="C00000"/>
                 </a:solidFill>
-                <a:latin typeface="Consolas" pitchFamily="49" charset="0"/>
-              </a:rPr>
-              <a:t>SQLServer</a:t>
-            </a:r>
-            <a:r>
-              <a:rPr lang="en-US" sz="2200" dirty="0" smtClean="0">
-                <a:latin typeface="Consolas" pitchFamily="49" charset="0"/>
-              </a:rPr>
-              <a:t>" </a:t>
-            </a:r>
-            <a:r>
-              <a:rPr lang="en-US" sz="2200" dirty="0" err="1" smtClean="0">
-                <a:latin typeface="Consolas" pitchFamily="49" charset="0"/>
-              </a:rPr>
-              <a:t>allowCustomSqlDatabase</a:t>
-            </a:r>
-            <a:r>
-              <a:rPr lang="en-US" sz="2200" dirty="0" smtClean="0">
-                <a:latin typeface="Consolas" pitchFamily="49" charset="0"/>
-              </a:rPr>
-              <a:t>="true" </a:t>
-            </a:r>
-            <a:r>
-              <a:rPr lang="en-US" sz="2200" dirty="0" err="1" smtClean="0">
-                <a:latin typeface="Consolas" pitchFamily="49" charset="0"/>
-              </a:rPr>
-              <a:t>sqlConnectionString</a:t>
-            </a:r>
-            <a:r>
-              <a:rPr lang="en-US" sz="2200" dirty="0" smtClean="0">
-                <a:latin typeface="Consolas" pitchFamily="49" charset="0"/>
-              </a:rPr>
-              <a:t>="</a:t>
-            </a:r>
-            <a:r>
-              <a:rPr lang="en-US" sz="2200" i="1" dirty="0" err="1" smtClean="0">
+              </a:rPr>
+              <a:t>Pool resources</a:t>
+            </a:r>
+            <a:r>
+              <a:rPr lang="en-US" sz="2000" dirty="0" smtClean="0"/>
+              <a:t> such as </a:t>
+            </a:r>
+            <a:r>
+              <a:rPr lang="en-US" sz="2000" u="sng" dirty="0" smtClean="0"/>
+              <a:t>threads</a:t>
+            </a:r>
+            <a:r>
+              <a:rPr lang="en-US" sz="2000" dirty="0" smtClean="0"/>
+              <a:t>, </a:t>
+            </a:r>
+            <a:r>
+              <a:rPr lang="en-US" sz="2000" u="sng" dirty="0" smtClean="0"/>
+              <a:t>network connections</a:t>
+            </a:r>
+            <a:r>
+              <a:rPr lang="en-US" sz="2000" dirty="0" smtClean="0"/>
+              <a:t>, and </a:t>
+            </a:r>
+            <a:r>
+              <a:rPr lang="en-US" sz="2000" u="sng" dirty="0" smtClean="0"/>
+              <a:t>database connections</a:t>
+            </a:r>
+            <a:r>
+              <a:rPr lang="en-US" sz="2000" dirty="0" smtClean="0"/>
+              <a:t>; this helps maximize your computing resources, and it improves your ability to predict resource usage.</a:t>
+            </a:r>
+          </a:p>
+          <a:p>
+            <a:r>
+              <a:rPr lang="en-US" sz="2000" dirty="0" smtClean="0"/>
+              <a:t>Write your database operations in such a way as to </a:t>
+            </a:r>
+            <a:r>
+              <a:rPr lang="en-US" sz="2000" i="1" dirty="0" smtClean="0">
                 <a:solidFill>
                   <a:srgbClr val="C00000"/>
                 </a:solidFill>
-                <a:latin typeface="Consolas" pitchFamily="49" charset="0"/>
-              </a:rPr>
-              <a:t>snsState</a:t>
-            </a:r>
-            <a:r>
-              <a:rPr lang="en-US" sz="2200" dirty="0" smtClean="0">
-                <a:latin typeface="Consolas" pitchFamily="49" charset="0"/>
-              </a:rPr>
-              <a:t>" /&gt;</a:t>
-            </a:r>
+              </a:rPr>
+              <a:t>maximize concurrency</a:t>
+            </a:r>
+            <a:r>
+              <a:rPr lang="en-US" sz="2000" dirty="0" smtClean="0"/>
+              <a:t> and </a:t>
+            </a:r>
+            <a:r>
+              <a:rPr lang="en-US" sz="2000" i="1" dirty="0" smtClean="0">
+                <a:solidFill>
+                  <a:srgbClr val="C00000"/>
+                </a:solidFill>
+              </a:rPr>
+              <a:t>minimize exclusive locking</a:t>
+            </a:r>
+            <a:r>
+              <a:rPr lang="en-US" sz="2000" dirty="0" smtClean="0"/>
+              <a:t>. For example, don't lock records when performing read-only operations.</a:t>
+            </a:r>
+          </a:p>
+          <a:p>
+            <a:endParaRPr lang="en-US" sz="2000" dirty="0"/>
           </a:p>
         </p:txBody>
       </p:sp>
       <p:pic>
         <p:nvPicPr>
-          <p:cNvPr id="2050" name="Picture 2"/>
+          <p:cNvPr id="4" name="Picture 3"/>
           <p:cNvPicPr>
             <a:picLocks noChangeAspect="1" noChangeArrowheads="1"/>
           </p:cNvPicPr>
@@ -6284,8 +5702,8 @@
         </p:blipFill>
         <p:spPr bwMode="auto">
           <a:xfrm>
-            <a:off x="1019175" y="4038600"/>
-            <a:ext cx="7105650" cy="2057400"/>
+            <a:off x="2667000" y="4800600"/>
+            <a:ext cx="3990975" cy="1619250"/>
           </a:xfrm>
           <a:prstGeom prst="rect">
             <a:avLst/>
@@ -6390,12 +5808,11 @@
           <a:bodyPr/>
           <a:lstStyle/>
           <a:p>
-            <a:pPr algn="l"/>
-            <a:r>
-              <a:rPr lang="en-US" sz="3800" dirty="0" smtClean="0"/>
-              <a:t>1. Enable State Service Remote Connection</a:t>
-            </a:r>
-            <a:endParaRPr lang="en-US" sz="3800" dirty="0"/>
+            <a:r>
+              <a:rPr lang="en-US" dirty="0" smtClean="0"/>
+              <a:t>(ASP.NET) Session Storage</a:t>
+            </a:r>
+            <a:endParaRPr lang="en-US" dirty="0"/>
           </a:p>
         </p:txBody>
       </p:sp>
@@ -6415,79 +5832,264 @@
           <a:lstStyle/>
           <a:p>
             <a:r>
-              <a:rPr lang="en-US" sz="2200" dirty="0" smtClean="0">
-                <a:latin typeface="Consolas" pitchFamily="49" charset="0"/>
-              </a:rPr>
-              <a:t>HKEY_LOCAL_MACHINE\SYSTEM\</a:t>
-            </a:r>
+              <a:rPr lang="en-US" sz="2600" i="1" dirty="0" smtClean="0">
+                <a:solidFill>
+                  <a:srgbClr val="C00000"/>
+                </a:solidFill>
+              </a:rPr>
+              <a:t>Machine key</a:t>
+            </a:r>
+            <a:r>
+              <a:rPr lang="en-US" sz="2600" dirty="0" smtClean="0"/>
+              <a:t> should be same for both servers: </a:t>
+            </a:r>
+            <a:r>
+              <a:rPr lang="en-US" sz="2600" u="sng" dirty="0" smtClean="0"/>
+              <a:t>View state</a:t>
+            </a:r>
+            <a:r>
+              <a:rPr lang="en-US" sz="2600" dirty="0" smtClean="0"/>
+              <a:t> and </a:t>
+            </a:r>
+            <a:r>
+              <a:rPr lang="en-US" sz="2600" u="sng" dirty="0" smtClean="0"/>
+              <a:t>session</a:t>
+            </a:r>
+            <a:r>
+              <a:rPr lang="en-US" sz="2600" dirty="0" smtClean="0"/>
+              <a:t> both </a:t>
+            </a:r>
+            <a:r>
+              <a:rPr lang="en-US" sz="2600" u="sng" dirty="0" smtClean="0"/>
+              <a:t>depend on</a:t>
+            </a:r>
+            <a:r>
+              <a:rPr lang="en-US" sz="2600" dirty="0" smtClean="0"/>
+              <a:t> the machine key.</a:t>
+            </a:r>
+          </a:p>
+          <a:p>
+            <a:r>
+              <a:rPr lang="en-US" sz="2600" dirty="0" smtClean="0"/>
+              <a:t>Session storage options:</a:t>
+            </a:r>
+          </a:p>
+          <a:p>
+            <a:pPr lvl="1"/>
             <a:r>
               <a:rPr lang="en-US" sz="2200" dirty="0" err="1" smtClean="0">
                 <a:latin typeface="Consolas" pitchFamily="49" charset="0"/>
               </a:rPr>
-              <a:t>CurrentControlSet</a:t>
-            </a:r>
-            <a:r>
-              <a:rPr lang="en-US" sz="2200" dirty="0" smtClean="0">
-                <a:latin typeface="Consolas" pitchFamily="49" charset="0"/>
-              </a:rPr>
-              <a:t>\Services\</a:t>
-            </a:r>
+              <a:t>InProc</a:t>
+            </a:r>
+            <a:endParaRPr lang="en-US" sz="2200" dirty="0" smtClean="0">
+              <a:latin typeface="Consolas" pitchFamily="49" charset="0"/>
+            </a:endParaRPr>
+          </a:p>
+          <a:p>
+            <a:pPr lvl="1"/>
             <a:r>
               <a:rPr lang="en-US" sz="2200" dirty="0" err="1" smtClean="0">
                 <a:latin typeface="Consolas" pitchFamily="49" charset="0"/>
               </a:rPr>
-              <a:t>aspnet_state</a:t>
-            </a:r>
-            <a:r>
-              <a:rPr lang="en-US" sz="2200" dirty="0" smtClean="0">
-                <a:latin typeface="Consolas" pitchFamily="49" charset="0"/>
-              </a:rPr>
-              <a:t>\Parameters\</a:t>
-            </a:r>
-            <a:r>
-              <a:rPr lang="en-US" sz="2200" dirty="0" err="1" smtClean="0">
-                <a:latin typeface="Consolas" pitchFamily="49" charset="0"/>
-              </a:rPr>
-              <a:t>AllowRemoteConnection</a:t>
-            </a:r>
-            <a:endParaRPr lang="en-US" sz="2200" dirty="0">
+              <a:t>StateServer</a:t>
+            </a:r>
+            <a:endParaRPr lang="en-US" sz="2200" dirty="0" smtClean="0">
               <a:latin typeface="Consolas" pitchFamily="49" charset="0"/>
             </a:endParaRPr>
           </a:p>
-        </p:txBody>
-      </p:sp>
-      <p:pic>
-        <p:nvPicPr>
-          <p:cNvPr id="2050" name="Picture 2"/>
-          <p:cNvPicPr>
-            <a:picLocks noChangeAspect="1" noChangeArrowheads="1"/>
-          </p:cNvPicPr>
+          <a:p>
+            <a:pPr lvl="1"/>
+            <a:r>
+              <a:rPr lang="en-US" sz="2200" b="1" dirty="0" err="1" smtClean="0">
+                <a:latin typeface="Consolas" pitchFamily="49" charset="0"/>
+              </a:rPr>
+              <a:t>SQLServer</a:t>
+            </a:r>
+            <a:endParaRPr lang="en-US" sz="2200" b="1" dirty="0" smtClean="0">
+              <a:latin typeface="Consolas" pitchFamily="49" charset="0"/>
+            </a:endParaRPr>
+          </a:p>
+        </p:txBody>
+      </p:sp>
+      <p:sp>
+        <p:nvSpPr>
+          <p:cNvPr id="4" name="Rectangle 3"/>
+          <p:cNvSpPr/>
           <p:nvPr/>
-        </p:nvPicPr>
-        <p:blipFill>
-          <a:blip r:embed="rId2" cstate="print"/>
-          <a:srcRect/>
-          <a:stretch>
-            <a:fillRect/>
-          </a:stretch>
-        </p:blipFill>
-        <p:spPr bwMode="auto">
+        </p:nvSpPr>
+        <p:spPr>
           <a:xfrm>
-            <a:off x="1371600" y="2667000"/>
-            <a:ext cx="6390640" cy="3220720"/>
+            <a:off x="533400" y="4495800"/>
+            <a:ext cx="7924800" cy="1754326"/>
           </a:xfrm>
           <a:prstGeom prst="rect">
             <a:avLst/>
           </a:prstGeom>
-          <a:noFill/>
-          <a:ln w="9525">
-            <a:noFill/>
-            <a:miter lim="800000"/>
-            <a:headEnd/>
-            <a:tailEnd/>
-          </a:ln>
         </p:spPr>
-      </p:pic>
+        <p:style>
+          <a:lnRef idx="1">
+            <a:schemeClr val="dk1"/>
+          </a:lnRef>
+          <a:fillRef idx="2">
+            <a:schemeClr val="dk1"/>
+          </a:fillRef>
+          <a:effectRef idx="1">
+            <a:schemeClr val="dk1"/>
+          </a:effectRef>
+          <a:fontRef idx="minor">
+            <a:schemeClr val="dk1"/>
+          </a:fontRef>
+        </p:style>
+        <p:txBody>
+          <a:bodyPr wrap="square">
+            <a:spAutoFit/>
+          </a:bodyPr>
+          <a:lstStyle/>
+          <a:p>
+            <a:pPr>
+              <a:buNone/>
+            </a:pPr>
+            <a:r>
+              <a:rPr lang="en-US" dirty="0" smtClean="0">
+                <a:latin typeface="Consolas" pitchFamily="49" charset="0"/>
+              </a:rPr>
+              <a:t>&lt;system.web&gt;</a:t>
+            </a:r>
+          </a:p>
+          <a:p>
+            <a:pPr>
+              <a:buNone/>
+            </a:pPr>
+            <a:r>
+              <a:rPr lang="en-US" dirty="0" smtClean="0">
+                <a:latin typeface="Consolas" pitchFamily="49" charset="0"/>
+              </a:rPr>
+              <a:t>    &lt;</a:t>
+            </a:r>
+            <a:r>
+              <a:rPr lang="en-US" dirty="0" err="1" smtClean="0">
+                <a:latin typeface="Consolas" pitchFamily="49" charset="0"/>
+              </a:rPr>
+              <a:t>httpCookies</a:t>
+            </a:r>
+            <a:r>
+              <a:rPr lang="en-US" dirty="0" smtClean="0">
+                <a:latin typeface="Consolas" pitchFamily="49" charset="0"/>
+              </a:rPr>
+              <a:t> </a:t>
+            </a:r>
+            <a:r>
+              <a:rPr lang="en-US" dirty="0" err="1" smtClean="0">
+                <a:latin typeface="Consolas" pitchFamily="49" charset="0"/>
+              </a:rPr>
+              <a:t>requireSSL</a:t>
+            </a:r>
+            <a:r>
+              <a:rPr lang="en-US" dirty="0" smtClean="0">
+                <a:latin typeface="Consolas" pitchFamily="49" charset="0"/>
+              </a:rPr>
+              <a:t>="true" /&gt;</a:t>
+            </a:r>
+          </a:p>
+          <a:p>
+            <a:pPr>
+              <a:buNone/>
+            </a:pPr>
+            <a:r>
+              <a:rPr lang="en-US" dirty="0" smtClean="0">
+                <a:latin typeface="Consolas" pitchFamily="49" charset="0"/>
+              </a:rPr>
+              <a:t>    &lt;</a:t>
+            </a:r>
+            <a:r>
+              <a:rPr lang="en-US" dirty="0" err="1" smtClean="0">
+                <a:latin typeface="Consolas" pitchFamily="49" charset="0"/>
+              </a:rPr>
+              <a:t>machineKey</a:t>
+            </a:r>
+            <a:r>
+              <a:rPr lang="en-US" dirty="0" smtClean="0">
+                <a:latin typeface="Consolas" pitchFamily="49" charset="0"/>
+              </a:rPr>
+              <a:t> validation="SHA1" /&gt;</a:t>
+            </a:r>
+          </a:p>
+          <a:p>
+            <a:pPr>
+              <a:buNone/>
+            </a:pPr>
+            <a:r>
+              <a:rPr lang="en-US" dirty="0" smtClean="0">
+                <a:latin typeface="Consolas" pitchFamily="49" charset="0"/>
+              </a:rPr>
+              <a:t>    &lt;</a:t>
+            </a:r>
+            <a:r>
+              <a:rPr lang="en-US" dirty="0" err="1" smtClean="0">
+                <a:latin typeface="Consolas" pitchFamily="49" charset="0"/>
+              </a:rPr>
+              <a:t>sessionState</a:t>
+            </a:r>
+            <a:r>
+              <a:rPr lang="en-US" dirty="0" smtClean="0">
+                <a:latin typeface="Consolas" pitchFamily="49" charset="0"/>
+              </a:rPr>
+              <a:t> timeout="25" </a:t>
+            </a:r>
+            <a:r>
+              <a:rPr lang="en-US" dirty="0" err="1" smtClean="0">
+                <a:latin typeface="Consolas" pitchFamily="49" charset="0"/>
+              </a:rPr>
+              <a:t>cookieless</a:t>
+            </a:r>
+            <a:r>
+              <a:rPr lang="en-US" dirty="0" smtClean="0">
+                <a:latin typeface="Consolas" pitchFamily="49" charset="0"/>
+              </a:rPr>
+              <a:t>="false" </a:t>
+            </a:r>
+            <a:r>
+              <a:rPr lang="en-US" dirty="0" err="1" smtClean="0">
+                <a:latin typeface="Consolas" pitchFamily="49" charset="0"/>
+              </a:rPr>
+              <a:t>regenerateExpiredSessionId</a:t>
+            </a:r>
+            <a:r>
+              <a:rPr lang="en-US" dirty="0" smtClean="0">
+                <a:latin typeface="Consolas" pitchFamily="49" charset="0"/>
+              </a:rPr>
+              <a:t>="true" mode="</a:t>
+            </a:r>
+            <a:r>
+              <a:rPr lang="en-US" b="1" i="1" dirty="0" err="1" smtClean="0">
+                <a:solidFill>
+                  <a:srgbClr val="C00000"/>
+                </a:solidFill>
+                <a:latin typeface="Consolas" pitchFamily="49" charset="0"/>
+              </a:rPr>
+              <a:t>InProc</a:t>
+            </a:r>
+            <a:r>
+              <a:rPr lang="en-US" dirty="0" smtClean="0">
+                <a:latin typeface="Consolas" pitchFamily="49" charset="0"/>
+              </a:rPr>
+              <a:t>" /&gt;</a:t>
+            </a:r>
+          </a:p>
+          <a:p>
+            <a:pPr>
+              <a:buNone/>
+            </a:pPr>
+            <a:r>
+              <a:rPr lang="en-US" dirty="0" smtClean="0">
+                <a:latin typeface="Consolas" pitchFamily="49" charset="0"/>
+              </a:rPr>
+              <a:t>...</a:t>
+            </a:r>
+          </a:p>
+        </p:txBody>
+      </p:sp>
     </p:spTree>
   </p:cSld>
   <p:clrMapOvr>
@@ -6531,7 +6133,15 @@
             <a:pPr algn="l"/>
             <a:r>
               <a:rPr lang="en-US" dirty="0" smtClean="0"/>
-              <a:t>2. Open State Service Firewall Port</a:t>
+              <a:t>1. Create an SQL Server Database for </a:t>
+            </a:r>
+            <a:r>
+              <a:rPr lang="en-US" dirty="0" err="1" smtClean="0"/>
+              <a:t>SQLServer</a:t>
+            </a:r>
+            <a:r>
+              <a:rPr lang="en-US" dirty="0" smtClean="0"/>
+              <a:t> Session Mode</a:t>
             </a:r>
             <a:endParaRPr lang="en-US" dirty="0"/>
           </a:p>
@@ -6552,56 +6162,59 @@
           <a:bodyPr/>
           <a:lstStyle/>
           <a:p>
-            <a:r>
-              <a:rPr lang="en-US" sz="2200" dirty="0" smtClean="0">
-                <a:latin typeface="+mj-lt"/>
-              </a:rPr>
-              <a:t>Port: </a:t>
-            </a:r>
-            <a:r>
-              <a:rPr lang="en-US" sz="2200" b="1" dirty="0" smtClean="0">
-                <a:latin typeface="+mj-lt"/>
-              </a:rPr>
-              <a:t>42424</a:t>
-            </a:r>
-            <a:endParaRPr lang="en-US" sz="2200" b="1" dirty="0">
-              <a:latin typeface="+mj-lt"/>
-            </a:endParaRPr>
-          </a:p>
-        </p:txBody>
-      </p:sp>
-      <p:pic>
-        <p:nvPicPr>
-          <p:cNvPr id="3074" name="Picture 2"/>
-          <p:cNvPicPr>
-            <a:picLocks noChangeAspect="1" noChangeArrowheads="1"/>
-          </p:cNvPicPr>
-          <p:nvPr/>
-        </p:nvPicPr>
-        <p:blipFill>
-          <a:blip r:embed="rId2" cstate="print"/>
-          <a:srcRect/>
-          <a:stretch>
-            <a:fillRect/>
-          </a:stretch>
-        </p:blipFill>
-        <p:spPr bwMode="auto">
-          <a:xfrm>
-            <a:off x="914400" y="2743200"/>
-            <a:ext cx="7287260" cy="3200400"/>
-          </a:xfrm>
-          <a:prstGeom prst="rect">
-            <a:avLst/>
-          </a:prstGeom>
-          <a:noFill/>
-          <a:ln w="9525">
-            <a:noFill/>
-            <a:miter lim="800000"/>
-            <a:headEnd/>
-            <a:tailEnd/>
-          </a:ln>
-        </p:spPr>
-      </p:pic>
+            <a:pPr marL="342900" lvl="2" indent="-342900"/>
+            <a:r>
+              <a:rPr lang="en-US" sz="2200" b="1" dirty="0" smtClean="0"/>
+              <a:t>Run cmd.exe as Administrator</a:t>
+            </a:r>
+          </a:p>
+          <a:p>
+            <a:pPr marL="342900" lvl="2" indent="-342900"/>
+            <a:r>
+              <a:rPr lang="en-US" sz="2200" i="1" dirty="0" smtClean="0">
+                <a:latin typeface="Consolas" pitchFamily="49" charset="0"/>
+              </a:rPr>
+              <a:t>C:\Windows\Microsoft.NET\Framework\v4.0.30319\aspnet_regsql.exe -</a:t>
+            </a:r>
+            <a:r>
+              <a:rPr lang="en-US" sz="2200" i="1" dirty="0" err="1" smtClean="0">
+                <a:latin typeface="Consolas" pitchFamily="49" charset="0"/>
+              </a:rPr>
+              <a:t>ssadd</a:t>
+            </a:r>
+            <a:r>
+              <a:rPr lang="en-US" sz="2200" i="1" dirty="0" smtClean="0">
+                <a:latin typeface="Consolas" pitchFamily="49" charset="0"/>
+              </a:rPr>
+              <a:t> -</a:t>
+            </a:r>
+            <a:r>
+              <a:rPr lang="en-US" sz="2200" i="1" dirty="0" err="1" smtClean="0">
+                <a:latin typeface="Consolas" pitchFamily="49" charset="0"/>
+              </a:rPr>
+              <a:t>sstype</a:t>
+            </a:r>
+            <a:r>
+              <a:rPr lang="en-US" sz="2200" i="1" dirty="0" smtClean="0">
+                <a:latin typeface="Consolas" pitchFamily="49" charset="0"/>
+              </a:rPr>
+              <a:t> c -d apistate.example.com -S </a:t>
+            </a:r>
+            <a:r>
+              <a:rPr lang="en-US" sz="2200" i="1" dirty="0" err="1" smtClean="0">
+                <a:latin typeface="Consolas" pitchFamily="49" charset="0"/>
+              </a:rPr>
+              <a:t>localhost</a:t>
+            </a:r>
+            <a:r>
+              <a:rPr lang="en-US" sz="2200" i="1" dirty="0" smtClean="0">
+                <a:latin typeface="Consolas" pitchFamily="49" charset="0"/>
+              </a:rPr>
+              <a:t> –E</a:t>
+            </a:r>
+          </a:p>
+        </p:txBody>
+      </p:sp>
     </p:spTree>
   </p:cSld>
   <p:clrMapOvr>
@@ -6645,7 +6258,15 @@
             <a:pPr algn="l"/>
             <a:r>
               <a:rPr lang="en-US" dirty="0" smtClean="0"/>
-              <a:t>3. Start Session State Service</a:t>
+              <a:t>2. Create a Connection String for </a:t>
+            </a:r>
+            <a:r>
+              <a:rPr lang="en-US" dirty="0" err="1" smtClean="0"/>
+              <a:t>SQLServer</a:t>
+            </a:r>
+            <a:r>
+              <a:rPr lang="en-US" dirty="0" smtClean="0"/>
+              <a:t> Session Mode</a:t>
             </a:r>
             <a:endParaRPr lang="en-US" dirty="0"/>
           </a:p>
@@ -6668,54 +6289,250 @@
           <a:p>
             <a:r>
               <a:rPr lang="en-US" sz="2400" dirty="0" smtClean="0">
-                <a:latin typeface="Consolas" pitchFamily="49" charset="0"/>
-              </a:rPr>
-              <a:t>net start </a:t>
+                <a:latin typeface="+mj-lt"/>
+              </a:rPr>
+              <a:t>Create </a:t>
             </a:r>
             <a:r>
               <a:rPr lang="en-US" sz="2400" dirty="0" err="1" smtClean="0">
-                <a:latin typeface="Consolas" pitchFamily="49" charset="0"/>
-              </a:rPr>
-              <a:t>aspnet_state</a:t>
-            </a:r>
-            <a:endParaRPr lang="en-US" sz="2400" dirty="0">
-              <a:latin typeface="Consolas" pitchFamily="49" charset="0"/>
-            </a:endParaRPr>
-          </a:p>
-        </p:txBody>
-      </p:sp>
-      <p:pic>
-        <p:nvPicPr>
-          <p:cNvPr id="1027" name="Picture 3"/>
-          <p:cNvPicPr>
-            <a:picLocks noChangeAspect="1" noChangeArrowheads="1"/>
-          </p:cNvPicPr>
+                <a:latin typeface="+mj-lt"/>
+              </a:rPr>
+              <a:t>web.connectionStrings.config</a:t>
+            </a:r>
+            <a:r>
+              <a:rPr lang="en-US" sz="2400" dirty="0" smtClean="0">
+                <a:latin typeface="+mj-lt"/>
+              </a:rPr>
+              <a:t> file.</a:t>
+            </a:r>
+          </a:p>
+        </p:txBody>
+      </p:sp>
+      <p:sp>
+        <p:nvSpPr>
+          <p:cNvPr id="4" name="Rectangle 3"/>
+          <p:cNvSpPr/>
           <p:nvPr/>
-        </p:nvPicPr>
-        <p:blipFill>
-          <a:blip r:embed="rId2" cstate="print"/>
-          <a:srcRect/>
-          <a:stretch>
-            <a:fillRect/>
-          </a:stretch>
-        </p:blipFill>
-        <p:spPr bwMode="auto">
+        </p:nvSpPr>
+        <p:spPr>
           <a:xfrm>
-            <a:off x="439738" y="2593975"/>
-            <a:ext cx="8264525" cy="2968625"/>
+            <a:off x="533400" y="2438400"/>
+            <a:ext cx="7924800" cy="3139321"/>
           </a:xfrm>
           <a:prstGeom prst="rect">
             <a:avLst/>
           </a:prstGeom>
-          <a:noFill/>
-          <a:ln w="9525">
-            <a:noFill/>
-            <a:miter lim="800000"/>
-            <a:headEnd/>
-            <a:tailEnd/>
-          </a:ln>
         </p:spPr>
-      </p:pic>
+        <p:style>
+          <a:lnRef idx="1">
+            <a:schemeClr val="dk1"/>
+          </a:lnRef>
+          <a:fillRef idx="2">
+            <a:schemeClr val="dk1"/>
+          </a:fillRef>
+          <a:effectRef idx="1">
+            <a:schemeClr val="dk1"/>
+          </a:effectRef>
+          <a:fontRef idx="minor">
+            <a:schemeClr val="dk1"/>
+          </a:fontRef>
+        </p:style>
+        <p:txBody>
+          <a:bodyPr wrap="square">
+            <a:spAutoFit/>
+          </a:bodyPr>
+          <a:lstStyle/>
+          <a:p>
+            <a:pPr>
+              <a:buNone/>
+            </a:pPr>
+            <a:r>
+              <a:rPr lang="en-US" dirty="0" smtClean="0">
+                <a:latin typeface="Consolas" pitchFamily="49" charset="0"/>
+              </a:rPr>
+              <a:t>&lt;?xml version="1.0" ?&gt;</a:t>
+            </a:r>
+          </a:p>
+          <a:p>
+            <a:pPr>
+              <a:buNone/>
+            </a:pPr>
+            <a:r>
+              <a:rPr lang="en-US" dirty="0" smtClean="0">
+                <a:latin typeface="Consolas" pitchFamily="49" charset="0"/>
+              </a:rPr>
+              <a:t>  &lt;</a:t>
+            </a:r>
+            <a:r>
+              <a:rPr lang="en-US" dirty="0" err="1" smtClean="0">
+                <a:latin typeface="Consolas" pitchFamily="49" charset="0"/>
+              </a:rPr>
+              <a:t>connectionStrings</a:t>
+            </a:r>
+            <a:r>
+              <a:rPr lang="en-US" dirty="0" smtClean="0">
+                <a:latin typeface="Consolas" pitchFamily="49" charset="0"/>
+              </a:rPr>
+              <a:t>&gt;</a:t>
+            </a:r>
+          </a:p>
+          <a:p>
+            <a:pPr>
+              <a:buNone/>
+            </a:pPr>
+            <a:r>
+              <a:rPr lang="en-US" dirty="0" smtClean="0">
+                <a:latin typeface="Consolas" pitchFamily="49" charset="0"/>
+              </a:rPr>
+              <a:t>    &lt;clear /&gt;</a:t>
+            </a:r>
+          </a:p>
+          <a:p>
+            <a:pPr>
+              <a:buNone/>
+            </a:pPr>
+            <a:r>
+              <a:rPr lang="en-US" dirty="0" smtClean="0">
+                <a:latin typeface="Consolas" pitchFamily="49" charset="0"/>
+              </a:rPr>
+              <a:t>...</a:t>
+            </a:r>
+          </a:p>
+          <a:p>
+            <a:pPr>
+              <a:buNone/>
+            </a:pPr>
+            <a:r>
+              <a:rPr lang="en-US" dirty="0" smtClean="0">
+                <a:latin typeface="Consolas" pitchFamily="49" charset="0"/>
+              </a:rPr>
+              <a:t>    &lt;add name="</a:t>
+            </a:r>
+            <a:r>
+              <a:rPr lang="en-US" b="1" i="1" dirty="0" err="1" smtClean="0">
+                <a:solidFill>
+                  <a:srgbClr val="C00000"/>
+                </a:solidFill>
+                <a:latin typeface="Consolas" pitchFamily="49" charset="0"/>
+              </a:rPr>
+              <a:t>snsState</a:t>
+            </a:r>
+            <a:r>
+              <a:rPr lang="en-US" dirty="0" smtClean="0">
+                <a:latin typeface="Consolas" pitchFamily="49" charset="0"/>
+              </a:rPr>
+              <a:t>" </a:t>
+            </a:r>
+            <a:r>
+              <a:rPr lang="en-US" dirty="0" err="1" smtClean="0">
+                <a:latin typeface="Consolas" pitchFamily="49" charset="0"/>
+              </a:rPr>
+              <a:t>connectionString</a:t>
+            </a:r>
+            <a:r>
+              <a:rPr lang="en-US" dirty="0" smtClean="0">
+                <a:latin typeface="Consolas" pitchFamily="49" charset="0"/>
+              </a:rPr>
+              <a:t>="Data Source=192.168.101.62;Initial Catalog=</a:t>
+            </a:r>
+            <a:r>
+              <a:rPr lang="en-US" dirty="0" err="1" smtClean="0">
+                <a:latin typeface="Consolas" pitchFamily="49" charset="0"/>
+              </a:rPr>
+              <a:t>apistate.example.com;Persist</a:t>
+            </a:r>
+            <a:r>
+              <a:rPr lang="en-US" dirty="0" smtClean="0">
+                <a:latin typeface="Consolas" pitchFamily="49" charset="0"/>
+              </a:rPr>
+              <a:t> Security Info=</a:t>
+            </a:r>
+            <a:r>
+              <a:rPr lang="en-US" dirty="0" err="1" smtClean="0">
+                <a:latin typeface="Consolas" pitchFamily="49" charset="0"/>
+              </a:rPr>
+              <a:t>True;User</a:t>
+            </a:r>
+            <a:r>
+              <a:rPr lang="en-US" dirty="0" smtClean="0">
+                <a:latin typeface="Consolas" pitchFamily="49" charset="0"/>
+              </a:rPr>
+              <a:t> ID=</a:t>
+            </a:r>
+            <a:r>
+              <a:rPr lang="en-US" dirty="0" err="1" smtClean="0">
+                <a:latin typeface="Consolas" pitchFamily="49" charset="0"/>
+              </a:rPr>
+              <a:t>api.example.com;Password</a:t>
+            </a:r>
+            <a:r>
+              <a:rPr lang="en-US" dirty="0" smtClean="0">
+                <a:latin typeface="Consolas" pitchFamily="49" charset="0"/>
+              </a:rPr>
+              <a:t>=$%</a:t>
+            </a:r>
+            <a:r>
+              <a:rPr lang="en-US" dirty="0" err="1" smtClean="0">
+                <a:latin typeface="Consolas" pitchFamily="49" charset="0"/>
+              </a:rPr>
+              <a:t>Ym</a:t>
+            </a:r>
+            <a:r>
+              <a:rPr lang="en-US" dirty="0" smtClean="0">
+                <a:latin typeface="Consolas" pitchFamily="49" charset="0"/>
+              </a:rPr>
+              <a:t>*k3xtt4#bNNu;Connect Timeout=60;Min Pool Size=0;Max Pool Size=100;" </a:t>
+            </a:r>
+            <a:r>
+              <a:rPr lang="en-US" dirty="0" err="1" smtClean="0">
+                <a:latin typeface="Consolas" pitchFamily="49" charset="0"/>
+              </a:rPr>
+              <a:t>providerName</a:t>
+            </a:r>
+            <a:r>
+              <a:rPr lang="en-US" dirty="0" smtClean="0">
+                <a:latin typeface="Consolas" pitchFamily="49" charset="0"/>
+              </a:rPr>
+              <a:t>="</a:t>
+            </a:r>
+            <a:r>
+              <a:rPr lang="en-US" dirty="0" err="1" smtClean="0">
+                <a:latin typeface="Consolas" pitchFamily="49" charset="0"/>
+              </a:rPr>
+              <a:t>System.Data.SqlClient</a:t>
+            </a:r>
+            <a:r>
+              <a:rPr lang="en-US" dirty="0" smtClean="0">
+                <a:latin typeface="Consolas" pitchFamily="49" charset="0"/>
+              </a:rPr>
+              <a:t>" /&gt;</a:t>
+            </a:r>
+          </a:p>
+          <a:p>
+            <a:pPr>
+              <a:buNone/>
+            </a:pPr>
+            <a:r>
+              <a:rPr lang="en-US" dirty="0" smtClean="0">
+                <a:latin typeface="Consolas" pitchFamily="49" charset="0"/>
+              </a:rPr>
+              <a:t>  &lt;/</a:t>
+            </a:r>
+            <a:r>
+              <a:rPr lang="en-US" dirty="0" err="1" smtClean="0">
+                <a:latin typeface="Consolas" pitchFamily="49" charset="0"/>
+              </a:rPr>
+              <a:t>connectionStrings</a:t>
+            </a:r>
+            <a:r>
+              <a:rPr lang="en-US" dirty="0" smtClean="0">
+                <a:latin typeface="Consolas" pitchFamily="49" charset="0"/>
+              </a:rPr>
+              <a:t>&gt;</a:t>
+            </a:r>
+          </a:p>
+        </p:txBody>
+      </p:sp>
     </p:spTree>
   </p:cSld>
   <p:clrMapOvr>
@@ -6758,247 +6575,214 @@
           <a:p>
             <a:pPr algn="l"/>
             <a:r>
-              <a:rPr lang="en-US" sz="4200" dirty="0" smtClean="0"/>
-              <a:t>4. Enable </a:t>
-            </a:r>
-            <a:r>
-              <a:rPr lang="en-US" sz="4200" dirty="0" err="1" smtClean="0"/>
-              <a:t>StateServer</a:t>
-            </a:r>
-            <a:r>
-              <a:rPr lang="en-US" sz="4200" dirty="0" smtClean="0"/>
+              <a:rPr lang="en-US" dirty="0" smtClean="0"/>
+              <a:t>3. Enable </a:t>
+            </a:r>
+            <a:r>
+              <a:rPr lang="en-US" dirty="0" err="1" smtClean="0"/>
+              <a:t>SQLServer</a:t>
+            </a:r>
+            <a:r>
+              <a:rPr lang="en-US" dirty="0" smtClean="0"/>
               <a:t> Session Mode</a:t>
             </a:r>
-            <a:endParaRPr lang="en-US" sz="4200" dirty="0"/>
-          </a:p>
-        </p:txBody>
-      </p:sp>
-      <p:sp>
-        <p:nvSpPr>
-          <p:cNvPr id="4" name="Rectangle 3"/>
-          <p:cNvSpPr/>
+            <a:endParaRPr lang="en-US" dirty="0"/>
+          </a:p>
+        </p:txBody>
+      </p:sp>
+      <p:sp>
+        <p:nvSpPr>
+          <p:cNvPr id="3" name="Content Placeholder 2"/>
+          <p:cNvSpPr>
+            <a:spLocks noGrp="1"/>
+          </p:cNvSpPr>
+          <p:nvPr>
+            <p:ph idx="1"/>
+          </p:nvPr>
+        </p:nvSpPr>
+        <p:spPr/>
+        <p:txBody>
+          <a:bodyPr/>
+          <a:lstStyle/>
+          <a:p>
+            <a:r>
+              <a:rPr lang="en-US" sz="2200" dirty="0" smtClean="0">
+                <a:latin typeface="Consolas" pitchFamily="49" charset="0"/>
+              </a:rPr>
+              <a:t>&lt;</a:t>
+            </a:r>
+            <a:r>
+              <a:rPr lang="en-US" sz="2200" dirty="0" err="1" smtClean="0">
+                <a:latin typeface="Consolas" pitchFamily="49" charset="0"/>
+              </a:rPr>
+              <a:t>connectionStrings</a:t>
+            </a:r>
+            <a:r>
+              <a:rPr lang="en-US" sz="2200" dirty="0" smtClean="0">
+                <a:latin typeface="Consolas" pitchFamily="49" charset="0"/>
+              </a:rPr>
+              <a:t> </a:t>
+            </a:r>
+            <a:r>
+              <a:rPr lang="en-US" sz="2200" dirty="0" err="1" smtClean="0">
+                <a:latin typeface="Consolas" pitchFamily="49" charset="0"/>
+              </a:rPr>
+              <a:t>configSource</a:t>
+            </a:r>
+            <a:r>
+              <a:rPr lang="en-US" sz="2200" dirty="0" smtClean="0">
+                <a:latin typeface="Consolas" pitchFamily="49" charset="0"/>
+              </a:rPr>
+              <a:t>="</a:t>
+            </a:r>
+            <a:r>
+              <a:rPr lang="en-US" sz="2200" i="1" dirty="0" err="1" smtClean="0">
+                <a:solidFill>
+                  <a:srgbClr val="C00000"/>
+                </a:solidFill>
+                <a:latin typeface="Consolas" pitchFamily="49" charset="0"/>
+              </a:rPr>
+              <a:t>web.connectionStrings.config</a:t>
+            </a:r>
+            <a:r>
+              <a:rPr lang="en-US" sz="2200" dirty="0" smtClean="0">
+                <a:latin typeface="Consolas" pitchFamily="49" charset="0"/>
+              </a:rPr>
+              <a:t>" /&gt;</a:t>
+            </a:r>
+          </a:p>
+          <a:p>
+            <a:r>
+              <a:rPr lang="en-US" sz="2200" dirty="0" smtClean="0">
+                <a:latin typeface="Consolas" pitchFamily="49" charset="0"/>
+              </a:rPr>
+              <a:t>&lt;</a:t>
+            </a:r>
+            <a:r>
+              <a:rPr lang="en-US" sz="2200" dirty="0" err="1" smtClean="0">
+                <a:latin typeface="Consolas" pitchFamily="49" charset="0"/>
+              </a:rPr>
+              <a:t>sessionState</a:t>
+            </a:r>
+            <a:r>
+              <a:rPr lang="en-US" sz="2200" dirty="0" smtClean="0">
+                <a:latin typeface="Consolas" pitchFamily="49" charset="0"/>
+              </a:rPr>
+              <a:t> timeout="25" </a:t>
+            </a:r>
+            <a:r>
+              <a:rPr lang="en-US" sz="2200" dirty="0" err="1" smtClean="0">
+                <a:latin typeface="Consolas" pitchFamily="49" charset="0"/>
+              </a:rPr>
+              <a:t>cookieless</a:t>
+            </a:r>
+            <a:r>
+              <a:rPr lang="en-US" sz="2200" dirty="0" smtClean="0">
+                <a:latin typeface="Consolas" pitchFamily="49" charset="0"/>
+              </a:rPr>
+              <a:t>="false" </a:t>
+            </a:r>
+            <a:r>
+              <a:rPr lang="en-US" sz="2200" dirty="0" err="1" smtClean="0">
+                <a:latin typeface="Consolas" pitchFamily="49" charset="0"/>
+              </a:rPr>
+              <a:t>regenerateExpiredSessionId</a:t>
+            </a:r>
+            <a:r>
+              <a:rPr lang="en-US" sz="2200" dirty="0" smtClean="0">
+                <a:latin typeface="Consolas" pitchFamily="49" charset="0"/>
+              </a:rPr>
+              <a:t>="true" mode="</a:t>
+            </a:r>
+            <a:r>
+              <a:rPr lang="en-US" sz="2200" b="1" i="1" dirty="0" err="1" smtClean="0">
+                <a:solidFill>
+                  <a:srgbClr val="C00000"/>
+                </a:solidFill>
+                <a:latin typeface="Consolas" pitchFamily="49" charset="0"/>
+              </a:rPr>
+              <a:t>SQLServer</a:t>
+            </a:r>
+            <a:r>
+              <a:rPr lang="en-US" sz="2200" dirty="0" smtClean="0">
+                <a:latin typeface="Consolas" pitchFamily="49" charset="0"/>
+              </a:rPr>
+              <a:t>" </a:t>
+            </a:r>
+            <a:r>
+              <a:rPr lang="en-US" sz="2200" dirty="0" err="1" smtClean="0">
+                <a:latin typeface="Consolas" pitchFamily="49" charset="0"/>
+              </a:rPr>
+              <a:t>allowCustomSqlDatabase</a:t>
+            </a:r>
+            <a:r>
+              <a:rPr lang="en-US" sz="2200" dirty="0" smtClean="0">
+                <a:latin typeface="Consolas" pitchFamily="49" charset="0"/>
+              </a:rPr>
+              <a:t>="true" </a:t>
+            </a:r>
+            <a:r>
+              <a:rPr lang="en-US" sz="2200" dirty="0" err="1" smtClean="0">
+                <a:latin typeface="Consolas" pitchFamily="49" charset="0"/>
+              </a:rPr>
+              <a:t>sqlConnectionString</a:t>
+            </a:r>
+            <a:r>
+              <a:rPr lang="en-US" sz="2200" dirty="0" smtClean="0">
+                <a:latin typeface="Consolas" pitchFamily="49" charset="0"/>
+              </a:rPr>
+              <a:t>="</a:t>
+            </a:r>
+            <a:r>
+              <a:rPr lang="en-US" sz="2200" i="1" dirty="0" err="1" smtClean="0">
+                <a:solidFill>
+                  <a:srgbClr val="C00000"/>
+                </a:solidFill>
+                <a:latin typeface="Consolas" pitchFamily="49" charset="0"/>
+              </a:rPr>
+              <a:t>snsState</a:t>
+            </a:r>
+            <a:r>
+              <a:rPr lang="en-US" sz="2200" dirty="0" smtClean="0">
+                <a:latin typeface="Consolas" pitchFamily="49" charset="0"/>
+              </a:rPr>
+              <a:t>" /&gt;</a:t>
+            </a:r>
+          </a:p>
+        </p:txBody>
+      </p:sp>
+      <p:pic>
+        <p:nvPicPr>
+          <p:cNvPr id="2050" name="Picture 2"/>
+          <p:cNvPicPr>
+            <a:picLocks noChangeAspect="1" noChangeArrowheads="1"/>
+          </p:cNvPicPr>
           <p:nvPr/>
-        </p:nvSpPr>
-        <p:spPr>
+        </p:nvPicPr>
+        <p:blipFill>
+          <a:blip r:embed="rId2" cstate="print"/>
+          <a:srcRect/>
+          <a:stretch>
+            <a:fillRect/>
+          </a:stretch>
+        </p:blipFill>
+        <p:spPr bwMode="auto">
           <a:xfrm>
-            <a:off x="533400" y="2438400"/>
-            <a:ext cx="7924800" cy="2554545"/>
+            <a:off x="1019175" y="4038600"/>
+            <a:ext cx="7105650" cy="2057400"/>
           </a:xfrm>
           <a:prstGeom prst="rect">
             <a:avLst/>
           </a:prstGeom>
+          <a:noFill/>
+          <a:ln w="9525">
+            <a:noFill/>
+            <a:miter lim="800000"/>
+            <a:headEnd/>
+            <a:tailEnd/>
+          </a:ln>
         </p:spPr>
-        <p:style>
-          <a:lnRef idx="1">
-            <a:schemeClr val="dk1"/>
-          </a:lnRef>
-          <a:fillRef idx="2">
-            <a:schemeClr val="dk1"/>
-          </a:fillRef>
-          <a:effectRef idx="1">
-            <a:schemeClr val="dk1"/>
-          </a:effectRef>
-          <a:fontRef idx="minor">
-            <a:schemeClr val="dk1"/>
-          </a:fontRef>
-        </p:style>
-        <p:txBody>
-          <a:bodyPr wrap="square">
-            <a:spAutoFit/>
-          </a:bodyPr>
-          <a:lstStyle/>
-          <a:p>
-            <a:pPr>
-              <a:buNone/>
-            </a:pPr>
-            <a:r>
-              <a:rPr lang="en-US" sz="2000" dirty="0" smtClean="0">
-                <a:latin typeface="Consolas" pitchFamily="49" charset="0"/>
-              </a:rPr>
-              <a:t> &lt;system.web&gt;</a:t>
-            </a:r>
-          </a:p>
-          <a:p>
-            <a:pPr>
-              <a:buNone/>
-            </a:pPr>
-            <a:r>
-              <a:rPr lang="en-US" sz="2000" dirty="0" smtClean="0">
-                <a:latin typeface="Consolas" pitchFamily="49" charset="0"/>
-              </a:rPr>
-              <a:t>    &lt;</a:t>
-            </a:r>
-            <a:r>
-              <a:rPr lang="en-US" sz="2000" dirty="0" err="1" smtClean="0">
-                <a:latin typeface="Consolas" pitchFamily="49" charset="0"/>
-              </a:rPr>
-              <a:t>httpCookies</a:t>
-            </a:r>
-            <a:r>
-              <a:rPr lang="en-US" sz="2000" dirty="0" smtClean="0">
-                <a:latin typeface="Consolas" pitchFamily="49" charset="0"/>
-              </a:rPr>
-              <a:t> </a:t>
-            </a:r>
-            <a:r>
-              <a:rPr lang="en-US" sz="2000" dirty="0" err="1" smtClean="0">
-                <a:latin typeface="Consolas" pitchFamily="49" charset="0"/>
-              </a:rPr>
-              <a:t>requireSSL</a:t>
-            </a:r>
-            <a:r>
-              <a:rPr lang="en-US" sz="2000" dirty="0" smtClean="0">
-                <a:latin typeface="Consolas" pitchFamily="49" charset="0"/>
-              </a:rPr>
-              <a:t>="true" /&gt;</a:t>
-            </a:r>
-          </a:p>
-          <a:p>
-            <a:pPr>
-              <a:buNone/>
-            </a:pPr>
-            <a:r>
-              <a:rPr lang="en-US" sz="2000" dirty="0" smtClean="0">
-                <a:latin typeface="Consolas" pitchFamily="49" charset="0"/>
-              </a:rPr>
-              <a:t>    &lt;</a:t>
-            </a:r>
-            <a:r>
-              <a:rPr lang="en-US" sz="2000" dirty="0" err="1" smtClean="0">
-                <a:latin typeface="Consolas" pitchFamily="49" charset="0"/>
-              </a:rPr>
-              <a:t>machineKey</a:t>
-            </a:r>
-            <a:r>
-              <a:rPr lang="en-US" sz="2000" dirty="0" smtClean="0">
-                <a:latin typeface="Consolas" pitchFamily="49" charset="0"/>
-              </a:rPr>
-              <a:t> validation="SHA1" /&gt;</a:t>
-            </a:r>
-          </a:p>
-          <a:p>
-            <a:pPr>
-              <a:buNone/>
-            </a:pPr>
-            <a:r>
-              <a:rPr lang="en-US" sz="2000" dirty="0" smtClean="0">
-                <a:latin typeface="Consolas" pitchFamily="49" charset="0"/>
-              </a:rPr>
-              <a:t>    &lt;</a:t>
-            </a:r>
-            <a:r>
-              <a:rPr lang="en-US" sz="2000" dirty="0" err="1" smtClean="0">
-                <a:latin typeface="Consolas" pitchFamily="49" charset="0"/>
-              </a:rPr>
-              <a:t>sessionState</a:t>
-            </a:r>
-            <a:r>
-              <a:rPr lang="en-US" sz="2000" dirty="0" smtClean="0">
-                <a:latin typeface="Consolas" pitchFamily="49" charset="0"/>
-              </a:rPr>
-              <a:t> timeout="25" </a:t>
-            </a:r>
-            <a:r>
-              <a:rPr lang="en-US" sz="2000" dirty="0" err="1" smtClean="0">
-                <a:latin typeface="Consolas" pitchFamily="49" charset="0"/>
-              </a:rPr>
-              <a:t>cookieless</a:t>
-            </a:r>
-            <a:r>
-              <a:rPr lang="en-US" sz="2000" dirty="0" smtClean="0">
-                <a:latin typeface="Consolas" pitchFamily="49" charset="0"/>
-              </a:rPr>
-              <a:t>="false" </a:t>
-            </a:r>
-            <a:r>
-              <a:rPr lang="en-US" sz="2000" dirty="0" err="1" smtClean="0">
-                <a:latin typeface="Consolas" pitchFamily="49" charset="0"/>
-              </a:rPr>
-              <a:t>regenerateExpiredSessionId</a:t>
-            </a:r>
-            <a:r>
-              <a:rPr lang="en-US" sz="2000" dirty="0" smtClean="0">
-                <a:latin typeface="Consolas" pitchFamily="49" charset="0"/>
-              </a:rPr>
-              <a:t>="true" mode="</a:t>
-            </a:r>
-            <a:r>
-              <a:rPr lang="en-US" sz="2000" b="1" dirty="0" err="1" smtClean="0">
-                <a:solidFill>
-                  <a:srgbClr val="C00000"/>
-                </a:solidFill>
-                <a:latin typeface="Consolas" pitchFamily="49" charset="0"/>
-              </a:rPr>
-              <a:t>StateServer</a:t>
-            </a:r>
-            <a:r>
-              <a:rPr lang="en-US" sz="2000" dirty="0" smtClean="0">
-                <a:latin typeface="Consolas" pitchFamily="49" charset="0"/>
-              </a:rPr>
-              <a:t>" </a:t>
-            </a:r>
-            <a:r>
-              <a:rPr lang="en-US" sz="2000" dirty="0" err="1" smtClean="0">
-                <a:latin typeface="Consolas" pitchFamily="49" charset="0"/>
-              </a:rPr>
-              <a:t>stateConnectionString</a:t>
-            </a:r>
-            <a:r>
-              <a:rPr lang="en-US" sz="2000" dirty="0" smtClean="0">
-                <a:latin typeface="Consolas" pitchFamily="49" charset="0"/>
-              </a:rPr>
-              <a:t>="</a:t>
-            </a:r>
-            <a:r>
-              <a:rPr lang="en-US" sz="2000" dirty="0" err="1" smtClean="0">
-                <a:latin typeface="Consolas" pitchFamily="49" charset="0"/>
-              </a:rPr>
-              <a:t>tcpip</a:t>
-            </a:r>
-            <a:r>
-              <a:rPr lang="en-US" sz="2000" dirty="0" smtClean="0">
-                <a:latin typeface="Consolas" pitchFamily="49" charset="0"/>
-              </a:rPr>
-              <a:t>=192.168.101.120:42424" </a:t>
-            </a:r>
-            <a:r>
-              <a:rPr lang="en-US" sz="2000" dirty="0" err="1" smtClean="0">
-                <a:latin typeface="Consolas" pitchFamily="49" charset="0"/>
-              </a:rPr>
-              <a:t>stateNetworkTimeout</a:t>
-            </a:r>
-            <a:r>
-              <a:rPr lang="en-US" sz="2000" dirty="0" smtClean="0">
-                <a:latin typeface="Consolas" pitchFamily="49" charset="0"/>
-              </a:rPr>
-              <a:t>="60" </a:t>
-            </a:r>
-            <a:r>
-              <a:rPr lang="en-US" sz="2000" dirty="0" err="1" smtClean="0">
-                <a:latin typeface="Consolas" pitchFamily="49" charset="0"/>
-              </a:rPr>
-              <a:t>useHostingIdentity</a:t>
-            </a:r>
-            <a:r>
-              <a:rPr lang="en-US" sz="2000" dirty="0" smtClean="0">
-                <a:latin typeface="Consolas" pitchFamily="49" charset="0"/>
-              </a:rPr>
-              <a:t>="false" /&gt;</a:t>
-            </a:r>
-          </a:p>
-          <a:p>
-            <a:pPr>
-              <a:buNone/>
-            </a:pPr>
-            <a:r>
-              <a:rPr lang="en-US" sz="2000" dirty="0" smtClean="0">
-                <a:latin typeface="Consolas" pitchFamily="49" charset="0"/>
-              </a:rPr>
-              <a:t>...</a:t>
-            </a:r>
-          </a:p>
-        </p:txBody>
-      </p:sp>
+      </p:pic>
     </p:spTree>
   </p:cSld>
   <p:clrMapOvr>
@@ -7090,11 +6874,12 @@
           <a:bodyPr/>
           <a:lstStyle/>
           <a:p>
-            <a:r>
-              <a:rPr lang="en-US" dirty="0" smtClean="0"/>
-              <a:t>Distributed Cache [3]</a:t>
-            </a:r>
-            <a:endParaRPr lang="en-US" dirty="0"/>
+            <a:pPr algn="l"/>
+            <a:r>
+              <a:rPr lang="en-US" sz="3800" dirty="0" smtClean="0"/>
+              <a:t>1. Enable State Service Remote Connection</a:t>
+            </a:r>
+            <a:endParaRPr lang="en-US" sz="3800" dirty="0"/>
           </a:p>
         </p:txBody>
       </p:sp>
@@ -7114,46 +6899,57 @@
           <a:lstStyle/>
           <a:p>
             <a:r>
-              <a:rPr lang="en-US" sz="2400" dirty="0" smtClean="0">
-                <a:hlinkClick r:id="rId2"/>
-              </a:rPr>
-              <a:t>https://github.com/memcached/memcached/wiki</a:t>
-            </a:r>
-            <a:endParaRPr lang="en-US" sz="2400" dirty="0" smtClean="0"/>
-          </a:p>
-          <a:p>
-            <a:r>
-              <a:rPr lang="en-US" sz="2400" dirty="0" smtClean="0">
-                <a:hlinkClick r:id="rId3"/>
-              </a:rPr>
-              <a:t>https://redis.io/docs/getting-started/</a:t>
-            </a:r>
-            <a:endParaRPr lang="en-US" sz="2400" dirty="0" smtClean="0"/>
-          </a:p>
-          <a:p>
-            <a:r>
-              <a:rPr lang="en-US" sz="2400" dirty="0" smtClean="0">
-                <a:hlinkClick r:id="rId4"/>
-              </a:rPr>
-              <a:t>https://codeburst.io/redis-what-and-why-d52b6829813</a:t>
-            </a:r>
-            <a:endParaRPr lang="en-US" sz="2400" dirty="0" smtClean="0"/>
-          </a:p>
-          <a:p>
-            <a:endParaRPr lang="en-US" sz="2400" dirty="0"/>
+              <a:rPr lang="en-US" sz="2200" dirty="0" smtClean="0">
+                <a:latin typeface="Consolas" pitchFamily="49" charset="0"/>
+              </a:rPr>
+              <a:t>HKEY_LOCAL_MACHINE\SYSTEM\</a:t>
+            </a:r>
+            <a:r>
+              <a:rPr lang="en-US" sz="2200" dirty="0" err="1" smtClean="0">
+                <a:latin typeface="Consolas" pitchFamily="49" charset="0"/>
+              </a:rPr>
+              <a:t>CurrentControlSet</a:t>
+            </a:r>
+            <a:r>
+              <a:rPr lang="en-US" sz="2200" dirty="0" smtClean="0">
+                <a:latin typeface="Consolas" pitchFamily="49" charset="0"/>
+              </a:rPr>
+              <a:t>\Services\</a:t>
+            </a:r>
+            <a:r>
+              <a:rPr lang="en-US" sz="2200" dirty="0" err="1" smtClean="0">
+                <a:latin typeface="Consolas" pitchFamily="49" charset="0"/>
+              </a:rPr>
+              <a:t>aspnet_state</a:t>
+            </a:r>
+            <a:r>
+              <a:rPr lang="en-US" sz="2200" dirty="0" smtClean="0">
+                <a:latin typeface="Consolas" pitchFamily="49" charset="0"/>
+              </a:rPr>
+              <a:t>\Parameters\</a:t>
+            </a:r>
+            <a:r>
+              <a:rPr lang="en-US" sz="2200" dirty="0" err="1" smtClean="0">
+                <a:latin typeface="Consolas" pitchFamily="49" charset="0"/>
+              </a:rPr>
+              <a:t>AllowRemoteConnection</a:t>
+            </a:r>
+            <a:endParaRPr lang="en-US" sz="2200" dirty="0">
+              <a:latin typeface="Consolas" pitchFamily="49" charset="0"/>
+            </a:endParaRPr>
           </a:p>
         </p:txBody>
       </p:sp>
       <p:pic>
         <p:nvPicPr>
-          <p:cNvPr id="8" name="Picture 6"/>
+          <p:cNvPr id="2050" name="Picture 2"/>
           <p:cNvPicPr>
             <a:picLocks noChangeAspect="1" noChangeArrowheads="1"/>
           </p:cNvPicPr>
           <p:nvPr/>
         </p:nvPicPr>
         <p:blipFill>
-          <a:blip r:embed="rId5" cstate="print"/>
+          <a:blip r:embed="rId2" cstate="print"/>
           <a:srcRect/>
           <a:stretch>
             <a:fillRect/>
@@ -7161,8 +6957,8 @@
         </p:blipFill>
         <p:spPr bwMode="auto">
           <a:xfrm>
-            <a:off x="2667000" y="3162300"/>
-            <a:ext cx="3954780" cy="3314700"/>
+            <a:off x="1371600" y="2667000"/>
+            <a:ext cx="6390640" cy="3220720"/>
           </a:xfrm>
           <a:prstGeom prst="rect">
             <a:avLst/>
@@ -7201,9 +6997,66 @@
           <a:chExt cx="0" cy="0"/>
         </a:xfrm>
       </p:grpSpPr>
+      <p:sp>
+        <p:nvSpPr>
+          <p:cNvPr id="2" name="Title 1"/>
+          <p:cNvSpPr>
+            <a:spLocks noGrp="1"/>
+          </p:cNvSpPr>
+          <p:nvPr>
+            <p:ph type="title"/>
+          </p:nvPr>
+        </p:nvSpPr>
+        <p:spPr/>
+        <p:txBody>
+          <a:bodyPr/>
+          <a:lstStyle/>
+          <a:p>
+            <a:pPr algn="l"/>
+            <a:r>
+              <a:rPr lang="en-US" dirty="0" smtClean="0"/>
+              <a:t>2. Open State Service Firewall Port</a:t>
+            </a:r>
+            <a:endParaRPr lang="en-US" dirty="0"/>
+          </a:p>
+        </p:txBody>
+      </p:sp>
+      <p:sp>
+        <p:nvSpPr>
+          <p:cNvPr id="3" name="Content Placeholder 2"/>
+          <p:cNvSpPr>
+            <a:spLocks noGrp="1"/>
+          </p:cNvSpPr>
+          <p:nvPr>
+            <p:ph idx="1"/>
+          </p:nvPr>
+        </p:nvSpPr>
+        <p:spPr/>
+        <p:txBody>
+          <a:bodyPr/>
+          <a:lstStyle/>
+          <a:p>
+            <a:r>
+              <a:rPr lang="en-US" sz="2200" dirty="0" smtClean="0">
+                <a:latin typeface="+mj-lt"/>
+              </a:rPr>
+              <a:t>Port: </a:t>
+            </a:r>
+            <a:r>
+              <a:rPr lang="en-US" sz="2200" b="1" dirty="0" smtClean="0">
+                <a:latin typeface="+mj-lt"/>
+              </a:rPr>
+              <a:t>42424</a:t>
+            </a:r>
+            <a:endParaRPr lang="en-US" sz="2200" b="1" dirty="0">
+              <a:latin typeface="+mj-lt"/>
+            </a:endParaRPr>
+          </a:p>
+        </p:txBody>
+      </p:sp>
       <p:pic>
         <p:nvPicPr>
-          <p:cNvPr id="4" name="Picture 2" descr="https://lh3.ggpht.com/1IfZLL2QDSjZ0wS7sUhaMlsAOS8BBzdR3wZ1WawgRn7KZAM8nEVZYMOUM-lqQb0ikIzp=w300"/>
+          <p:cNvPr id="3074" name="Picture 2"/>
           <p:cNvPicPr>
             <a:picLocks noChangeAspect="1" noChangeArrowheads="1"/>
           </p:cNvPicPr>
@@ -7218,13 +7071,19 @@
         </p:blipFill>
         <p:spPr bwMode="auto">
           <a:xfrm>
-            <a:off x="3276600" y="1905000"/>
-            <a:ext cx="2857500" cy="2857500"/>
+            <a:off x="914400" y="2743200"/>
+            <a:ext cx="7287260" cy="3200400"/>
           </a:xfrm>
           <a:prstGeom prst="rect">
             <a:avLst/>
           </a:prstGeom>
           <a:noFill/>
+          <a:ln w="9525">
+            <a:noFill/>
+            <a:miter lim="800000"/>
+            <a:headEnd/>
+            <a:tailEnd/>
+          </a:ln>
         </p:spPr>
       </p:pic>
     </p:spTree>
@@ -7385,9 +7244,10 @@
           <a:bodyPr/>
           <a:lstStyle/>
           <a:p>
+            <a:pPr algn="l"/>
             <a:r>
               <a:rPr lang="en-US" dirty="0" smtClean="0"/>
-              <a:t>Scaling Out File Server</a:t>
+              <a:t>3. Start Session State Service</a:t>
             </a:r>
             <a:endParaRPr lang="en-US" dirty="0"/>
           </a:p>
@@ -7409,25 +7269,33 @@
           <a:lstStyle/>
           <a:p>
             <a:r>
-              <a:rPr lang="en-US" sz="2200" dirty="0" smtClean="0">
-                <a:hlinkClick r:id="rId2"/>
-              </a:rPr>
-              <a:t>https://www.altaro.com/hyper-v/scale-out-file-server-hyper-v/</a:t>
-            </a:r>
-            <a:endParaRPr lang="en-US" sz="2200" dirty="0" smtClean="0"/>
+              <a:rPr lang="en-US" sz="2400" dirty="0" smtClean="0">
+                <a:latin typeface="Consolas" pitchFamily="49" charset="0"/>
+              </a:rPr>
+              <a:t>net start </a:t>
+            </a:r>
+            <a:r>
+              <a:rPr lang="en-US" sz="2400" dirty="0" err="1" smtClean="0">
+                <a:latin typeface="Consolas" pitchFamily="49" charset="0"/>
+              </a:rPr>
+              <a:t>aspnet_state</a:t>
+            </a:r>
+            <a:endParaRPr lang="en-US" sz="2400" dirty="0">
+              <a:latin typeface="Consolas" pitchFamily="49" charset="0"/>
+            </a:endParaRPr>
           </a:p>
         </p:txBody>
       </p:sp>
       <p:pic>
         <p:nvPicPr>
-          <p:cNvPr id="4" name="Picture 5"/>
+          <p:cNvPr id="1027" name="Picture 3"/>
           <p:cNvPicPr>
             <a:picLocks noChangeAspect="1" noChangeArrowheads="1"/>
           </p:cNvPicPr>
           <p:nvPr/>
         </p:nvPicPr>
         <p:blipFill>
-          <a:blip r:embed="rId3" cstate="print"/>
+          <a:blip r:embed="rId2" cstate="print"/>
           <a:srcRect/>
           <a:stretch>
             <a:fillRect/>
@@ -7435,8 +7303,8 @@
         </p:blipFill>
         <p:spPr bwMode="auto">
           <a:xfrm>
-            <a:off x="2743200" y="2362200"/>
-            <a:ext cx="3825240" cy="3634740"/>
+            <a:off x="439738" y="2593975"/>
+            <a:ext cx="8264525" cy="2968625"/>
           </a:xfrm>
           <a:prstGeom prst="rect">
             <a:avLst/>
@@ -7459,6 +7327,289 @@
 </file>
 
 <file path=ppt/slides/slide31.xml><?xml version="1.0" encoding="utf-8"?>
+<p:sld xmlns:a="http://schemas.openxmlformats.org/drawingml/2006/main" xmlns:r="http://schemas.openxmlformats.org/officeDocument/2006/relationships" xmlns:p="http://schemas.openxmlformats.org/presentationml/2006/main">
+  <p:cSld>
+    <p:spTree>
+      <p:nvGrpSpPr>
+        <p:cNvPr id="1" name=""/>
+        <p:cNvGrpSpPr/>
+        <p:nvPr/>
+      </p:nvGrpSpPr>
+      <p:grpSpPr>
+        <a:xfrm>
+          <a:off x="0" y="0"/>
+          <a:ext cx="0" cy="0"/>
+          <a:chOff x="0" y="0"/>
+          <a:chExt cx="0" cy="0"/>
+        </a:xfrm>
+      </p:grpSpPr>
+      <p:sp>
+        <p:nvSpPr>
+          <p:cNvPr id="2" name="Title 1"/>
+          <p:cNvSpPr>
+            <a:spLocks noGrp="1"/>
+          </p:cNvSpPr>
+          <p:nvPr>
+            <p:ph type="title"/>
+          </p:nvPr>
+        </p:nvSpPr>
+        <p:spPr/>
+        <p:txBody>
+          <a:bodyPr/>
+          <a:lstStyle/>
+          <a:p>
+            <a:pPr algn="l"/>
+            <a:r>
+              <a:rPr lang="en-US" sz="4200" dirty="0" smtClean="0"/>
+              <a:t>4. Enable </a:t>
+            </a:r>
+            <a:r>
+              <a:rPr lang="en-US" sz="4200" dirty="0" err="1" smtClean="0"/>
+              <a:t>StateServer</a:t>
+            </a:r>
+            <a:r>
+              <a:rPr lang="en-US" sz="4200" dirty="0" smtClean="0"/>
+              <a:t> Session Mode</a:t>
+            </a:r>
+            <a:endParaRPr lang="en-US" sz="4200" dirty="0"/>
+          </a:p>
+        </p:txBody>
+      </p:sp>
+      <p:sp>
+        <p:nvSpPr>
+          <p:cNvPr id="4" name="Rectangle 3"/>
+          <p:cNvSpPr/>
+          <p:nvPr/>
+        </p:nvSpPr>
+        <p:spPr>
+          <a:xfrm>
+            <a:off x="533400" y="2438400"/>
+            <a:ext cx="7924800" cy="2554545"/>
+          </a:xfrm>
+          <a:prstGeom prst="rect">
+            <a:avLst/>
+          </a:prstGeom>
+        </p:spPr>
+        <p:style>
+          <a:lnRef idx="1">
+            <a:schemeClr val="dk1"/>
+          </a:lnRef>
+          <a:fillRef idx="2">
+            <a:schemeClr val="dk1"/>
+          </a:fillRef>
+          <a:effectRef idx="1">
+            <a:schemeClr val="dk1"/>
+          </a:effectRef>
+          <a:fontRef idx="minor">
+            <a:schemeClr val="dk1"/>
+          </a:fontRef>
+        </p:style>
+        <p:txBody>
+          <a:bodyPr wrap="square">
+            <a:spAutoFit/>
+          </a:bodyPr>
+          <a:lstStyle/>
+          <a:p>
+            <a:pPr>
+              <a:buNone/>
+            </a:pPr>
+            <a:r>
+              <a:rPr lang="en-US" sz="2000" dirty="0" smtClean="0">
+                <a:latin typeface="Consolas" pitchFamily="49" charset="0"/>
+              </a:rPr>
+              <a:t> &lt;system.web&gt;</a:t>
+            </a:r>
+          </a:p>
+          <a:p>
+            <a:pPr>
+              <a:buNone/>
+            </a:pPr>
+            <a:r>
+              <a:rPr lang="en-US" sz="2000" dirty="0" smtClean="0">
+                <a:latin typeface="Consolas" pitchFamily="49" charset="0"/>
+              </a:rPr>
+              <a:t>    &lt;</a:t>
+            </a:r>
+            <a:r>
+              <a:rPr lang="en-US" sz="2000" dirty="0" err="1" smtClean="0">
+                <a:latin typeface="Consolas" pitchFamily="49" charset="0"/>
+              </a:rPr>
+              <a:t>httpCookies</a:t>
+            </a:r>
+            <a:r>
+              <a:rPr lang="en-US" sz="2000" dirty="0" smtClean="0">
+                <a:latin typeface="Consolas" pitchFamily="49" charset="0"/>
+              </a:rPr>
+              <a:t> </a:t>
+            </a:r>
+            <a:r>
+              <a:rPr lang="en-US" sz="2000" dirty="0" err="1" smtClean="0">
+                <a:latin typeface="Consolas" pitchFamily="49" charset="0"/>
+              </a:rPr>
+              <a:t>requireSSL</a:t>
+            </a:r>
+            <a:r>
+              <a:rPr lang="en-US" sz="2000" dirty="0" smtClean="0">
+                <a:latin typeface="Consolas" pitchFamily="49" charset="0"/>
+              </a:rPr>
+              <a:t>="true" /&gt;</a:t>
+            </a:r>
+          </a:p>
+          <a:p>
+            <a:pPr>
+              <a:buNone/>
+            </a:pPr>
+            <a:r>
+              <a:rPr lang="en-US" sz="2000" dirty="0" smtClean="0">
+                <a:latin typeface="Consolas" pitchFamily="49" charset="0"/>
+              </a:rPr>
+              <a:t>    &lt;</a:t>
+            </a:r>
+            <a:r>
+              <a:rPr lang="en-US" sz="2000" dirty="0" err="1" smtClean="0">
+                <a:latin typeface="Consolas" pitchFamily="49" charset="0"/>
+              </a:rPr>
+              <a:t>machineKey</a:t>
+            </a:r>
+            <a:r>
+              <a:rPr lang="en-US" sz="2000" dirty="0" smtClean="0">
+                <a:latin typeface="Consolas" pitchFamily="49" charset="0"/>
+              </a:rPr>
+              <a:t> validation="SHA1" /&gt;</a:t>
+            </a:r>
+          </a:p>
+          <a:p>
+            <a:pPr>
+              <a:buNone/>
+            </a:pPr>
+            <a:r>
+              <a:rPr lang="en-US" sz="2000" dirty="0" smtClean="0">
+                <a:latin typeface="Consolas" pitchFamily="49" charset="0"/>
+              </a:rPr>
+              <a:t>    &lt;</a:t>
+            </a:r>
+            <a:r>
+              <a:rPr lang="en-US" sz="2000" dirty="0" err="1" smtClean="0">
+                <a:latin typeface="Consolas" pitchFamily="49" charset="0"/>
+              </a:rPr>
+              <a:t>sessionState</a:t>
+            </a:r>
+            <a:r>
+              <a:rPr lang="en-US" sz="2000" dirty="0" smtClean="0">
+                <a:latin typeface="Consolas" pitchFamily="49" charset="0"/>
+              </a:rPr>
+              <a:t> timeout="25" </a:t>
+            </a:r>
+            <a:r>
+              <a:rPr lang="en-US" sz="2000" dirty="0" err="1" smtClean="0">
+                <a:latin typeface="Consolas" pitchFamily="49" charset="0"/>
+              </a:rPr>
+              <a:t>cookieless</a:t>
+            </a:r>
+            <a:r>
+              <a:rPr lang="en-US" sz="2000" dirty="0" smtClean="0">
+                <a:latin typeface="Consolas" pitchFamily="49" charset="0"/>
+              </a:rPr>
+              <a:t>="false" </a:t>
+            </a:r>
+            <a:r>
+              <a:rPr lang="en-US" sz="2000" dirty="0" err="1" smtClean="0">
+                <a:latin typeface="Consolas" pitchFamily="49" charset="0"/>
+              </a:rPr>
+              <a:t>regenerateExpiredSessionId</a:t>
+            </a:r>
+            <a:r>
+              <a:rPr lang="en-US" sz="2000" dirty="0" smtClean="0">
+                <a:latin typeface="Consolas" pitchFamily="49" charset="0"/>
+              </a:rPr>
+              <a:t>="true" mode="</a:t>
+            </a:r>
+            <a:r>
+              <a:rPr lang="en-US" sz="2000" b="1" dirty="0" err="1" smtClean="0">
+                <a:solidFill>
+                  <a:srgbClr val="C00000"/>
+                </a:solidFill>
+                <a:latin typeface="Consolas" pitchFamily="49" charset="0"/>
+              </a:rPr>
+              <a:t>StateServer</a:t>
+            </a:r>
+            <a:r>
+              <a:rPr lang="en-US" sz="2000" dirty="0" smtClean="0">
+                <a:latin typeface="Consolas" pitchFamily="49" charset="0"/>
+              </a:rPr>
+              <a:t>" </a:t>
+            </a:r>
+            <a:r>
+              <a:rPr lang="en-US" sz="2000" dirty="0" err="1" smtClean="0">
+                <a:latin typeface="Consolas" pitchFamily="49" charset="0"/>
+              </a:rPr>
+              <a:t>stateConnectionString</a:t>
+            </a:r>
+            <a:r>
+              <a:rPr lang="en-US" sz="2000" dirty="0" smtClean="0">
+                <a:latin typeface="Consolas" pitchFamily="49" charset="0"/>
+              </a:rPr>
+              <a:t>="</a:t>
+            </a:r>
+            <a:r>
+              <a:rPr lang="en-US" sz="2000" dirty="0" err="1" smtClean="0">
+                <a:latin typeface="Consolas" pitchFamily="49" charset="0"/>
+              </a:rPr>
+              <a:t>tcpip</a:t>
+            </a:r>
+            <a:r>
+              <a:rPr lang="en-US" sz="2000" dirty="0" smtClean="0">
+                <a:latin typeface="Consolas" pitchFamily="49" charset="0"/>
+              </a:rPr>
+              <a:t>=192.168.101.120:42424" </a:t>
+            </a:r>
+            <a:r>
+              <a:rPr lang="en-US" sz="2000" dirty="0" err="1" smtClean="0">
+                <a:latin typeface="Consolas" pitchFamily="49" charset="0"/>
+              </a:rPr>
+              <a:t>stateNetworkTimeout</a:t>
+            </a:r>
+            <a:r>
+              <a:rPr lang="en-US" sz="2000" dirty="0" smtClean="0">
+                <a:latin typeface="Consolas" pitchFamily="49" charset="0"/>
+              </a:rPr>
+              <a:t>="60" </a:t>
+            </a:r>
+            <a:r>
+              <a:rPr lang="en-US" sz="2000" dirty="0" err="1" smtClean="0">
+                <a:latin typeface="Consolas" pitchFamily="49" charset="0"/>
+              </a:rPr>
+              <a:t>useHostingIdentity</a:t>
+            </a:r>
+            <a:r>
+              <a:rPr lang="en-US" sz="2000" dirty="0" smtClean="0">
+                <a:latin typeface="Consolas" pitchFamily="49" charset="0"/>
+              </a:rPr>
+              <a:t>="false" /&gt;</a:t>
+            </a:r>
+          </a:p>
+          <a:p>
+            <a:pPr>
+              <a:buNone/>
+            </a:pPr>
+            <a:r>
+              <a:rPr lang="en-US" sz="2000" dirty="0" smtClean="0">
+                <a:latin typeface="Consolas" pitchFamily="49" charset="0"/>
+              </a:rPr>
+              <a:t>...</a:t>
+            </a:r>
+          </a:p>
+        </p:txBody>
+      </p:sp>
+    </p:spTree>
+  </p:cSld>
+  <p:clrMapOvr>
+    <a:masterClrMapping/>
+  </p:clrMapOvr>
+</p:sld>
+</file>
+
+<file path=ppt/slides/slide32.xml><?xml version="1.0" encoding="utf-8"?>
 <p:sld xmlns:a="http://schemas.openxmlformats.org/drawingml/2006/main" xmlns:r="http://schemas.openxmlformats.org/officeDocument/2006/relationships" xmlns:p="http://schemas.openxmlformats.org/presentationml/2006/main">
   <p:cSld>
     <p:spTree>
@@ -7509,7 +7660,340 @@
 </p:sld>
 </file>
 
-<file path=ppt/slides/slide32.xml><?xml version="1.0" encoding="utf-8"?>
+<file path=ppt/slides/slide33.xml><?xml version="1.0" encoding="utf-8"?>
+<p:sld xmlns:a="http://schemas.openxmlformats.org/drawingml/2006/main" xmlns:r="http://schemas.openxmlformats.org/officeDocument/2006/relationships" xmlns:p="http://schemas.openxmlformats.org/presentationml/2006/main">
+  <p:cSld>
+    <p:spTree>
+      <p:nvGrpSpPr>
+        <p:cNvPr id="1" name=""/>
+        <p:cNvGrpSpPr/>
+        <p:nvPr/>
+      </p:nvGrpSpPr>
+      <p:grpSpPr>
+        <a:xfrm>
+          <a:off x="0" y="0"/>
+          <a:ext cx="0" cy="0"/>
+          <a:chOff x="0" y="0"/>
+          <a:chExt cx="0" cy="0"/>
+        </a:xfrm>
+      </p:grpSpPr>
+      <p:sp>
+        <p:nvSpPr>
+          <p:cNvPr id="2" name="Title 1"/>
+          <p:cNvSpPr>
+            <a:spLocks noGrp="1"/>
+          </p:cNvSpPr>
+          <p:nvPr>
+            <p:ph type="title"/>
+          </p:nvPr>
+        </p:nvSpPr>
+        <p:spPr/>
+        <p:txBody>
+          <a:bodyPr/>
+          <a:lstStyle/>
+          <a:p>
+            <a:r>
+              <a:rPr lang="en-US" dirty="0" smtClean="0"/>
+              <a:t>Distributed Cache [3]</a:t>
+            </a:r>
+            <a:endParaRPr lang="en-US" dirty="0"/>
+          </a:p>
+        </p:txBody>
+      </p:sp>
+      <p:sp>
+        <p:nvSpPr>
+          <p:cNvPr id="3" name="Content Placeholder 2"/>
+          <p:cNvSpPr>
+            <a:spLocks noGrp="1"/>
+          </p:cNvSpPr>
+          <p:nvPr>
+            <p:ph idx="1"/>
+          </p:nvPr>
+        </p:nvSpPr>
+        <p:spPr/>
+        <p:txBody>
+          <a:bodyPr/>
+          <a:lstStyle/>
+          <a:p>
+            <a:r>
+              <a:rPr lang="en-US" sz="2400" dirty="0" smtClean="0">
+                <a:hlinkClick r:id="rId2"/>
+              </a:rPr>
+              <a:t>https://github.com/memcached/memcached/wiki</a:t>
+            </a:r>
+            <a:endParaRPr lang="en-US" sz="2400" dirty="0" smtClean="0"/>
+          </a:p>
+          <a:p>
+            <a:r>
+              <a:rPr lang="en-US" sz="2400" dirty="0" smtClean="0">
+                <a:hlinkClick r:id="rId3"/>
+              </a:rPr>
+              <a:t>https://redis.io/docs/getting-started/</a:t>
+            </a:r>
+            <a:endParaRPr lang="en-US" sz="2400" dirty="0" smtClean="0"/>
+          </a:p>
+          <a:p>
+            <a:r>
+              <a:rPr lang="en-US" sz="2400" dirty="0" smtClean="0">
+                <a:hlinkClick r:id="rId4"/>
+              </a:rPr>
+              <a:t>https://codeburst.io/redis-what-and-why-d52b6829813</a:t>
+            </a:r>
+            <a:endParaRPr lang="en-US" sz="2400" dirty="0" smtClean="0"/>
+          </a:p>
+          <a:p>
+            <a:endParaRPr lang="en-US" sz="2400" dirty="0"/>
+          </a:p>
+        </p:txBody>
+      </p:sp>
+      <p:pic>
+        <p:nvPicPr>
+          <p:cNvPr id="8" name="Picture 6"/>
+          <p:cNvPicPr>
+            <a:picLocks noChangeAspect="1" noChangeArrowheads="1"/>
+          </p:cNvPicPr>
+          <p:nvPr/>
+        </p:nvPicPr>
+        <p:blipFill>
+          <a:blip r:embed="rId5" cstate="print"/>
+          <a:srcRect/>
+          <a:stretch>
+            <a:fillRect/>
+          </a:stretch>
+        </p:blipFill>
+        <p:spPr bwMode="auto">
+          <a:xfrm>
+            <a:off x="2667000" y="3162300"/>
+            <a:ext cx="3954780" cy="3314700"/>
+          </a:xfrm>
+          <a:prstGeom prst="rect">
+            <a:avLst/>
+          </a:prstGeom>
+          <a:noFill/>
+          <a:ln w="9525">
+            <a:noFill/>
+            <a:miter lim="800000"/>
+            <a:headEnd/>
+            <a:tailEnd/>
+          </a:ln>
+        </p:spPr>
+      </p:pic>
+    </p:spTree>
+  </p:cSld>
+  <p:clrMapOvr>
+    <a:masterClrMapping/>
+  </p:clrMapOvr>
+</p:sld>
+</file>
+
+<file path=ppt/slides/slide34.xml><?xml version="1.0" encoding="utf-8"?>
+<p:sld xmlns:a="http://schemas.openxmlformats.org/drawingml/2006/main" xmlns:r="http://schemas.openxmlformats.org/officeDocument/2006/relationships" xmlns:p="http://schemas.openxmlformats.org/presentationml/2006/main">
+  <p:cSld>
+    <p:spTree>
+      <p:nvGrpSpPr>
+        <p:cNvPr id="1" name=""/>
+        <p:cNvGrpSpPr/>
+        <p:nvPr/>
+      </p:nvGrpSpPr>
+      <p:grpSpPr>
+        <a:xfrm>
+          <a:off x="0" y="0"/>
+          <a:ext cx="0" cy="0"/>
+          <a:chOff x="0" y="0"/>
+          <a:chExt cx="0" cy="0"/>
+        </a:xfrm>
+      </p:grpSpPr>
+      <p:pic>
+        <p:nvPicPr>
+          <p:cNvPr id="4" name="Picture 2" descr="https://lh3.ggpht.com/1IfZLL2QDSjZ0wS7sUhaMlsAOS8BBzdR3wZ1WawgRn7KZAM8nEVZYMOUM-lqQb0ikIzp=w300"/>
+          <p:cNvPicPr>
+            <a:picLocks noChangeAspect="1" noChangeArrowheads="1"/>
+          </p:cNvPicPr>
+          <p:nvPr/>
+        </p:nvPicPr>
+        <p:blipFill>
+          <a:blip r:embed="rId2" cstate="print"/>
+          <a:srcRect/>
+          <a:stretch>
+            <a:fillRect/>
+          </a:stretch>
+        </p:blipFill>
+        <p:spPr bwMode="auto">
+          <a:xfrm>
+            <a:off x="3276600" y="1905000"/>
+            <a:ext cx="2857500" cy="2857500"/>
+          </a:xfrm>
+          <a:prstGeom prst="rect">
+            <a:avLst/>
+          </a:prstGeom>
+          <a:noFill/>
+        </p:spPr>
+      </p:pic>
+    </p:spTree>
+  </p:cSld>
+  <p:clrMapOvr>
+    <a:masterClrMapping/>
+  </p:clrMapOvr>
+</p:sld>
+</file>
+
+<file path=ppt/slides/slide35.xml><?xml version="1.0" encoding="utf-8"?>
+<p:sld xmlns:a="http://schemas.openxmlformats.org/drawingml/2006/main" xmlns:r="http://schemas.openxmlformats.org/officeDocument/2006/relationships" xmlns:p="http://schemas.openxmlformats.org/presentationml/2006/main">
+  <p:cSld>
+    <p:spTree>
+      <p:nvGrpSpPr>
+        <p:cNvPr id="1" name=""/>
+        <p:cNvGrpSpPr/>
+        <p:nvPr/>
+      </p:nvGrpSpPr>
+      <p:grpSpPr>
+        <a:xfrm>
+          <a:off x="0" y="0"/>
+          <a:ext cx="0" cy="0"/>
+          <a:chOff x="0" y="0"/>
+          <a:chExt cx="0" cy="0"/>
+        </a:xfrm>
+      </p:grpSpPr>
+      <p:sp>
+        <p:nvSpPr>
+          <p:cNvPr id="2" name="Title 1"/>
+          <p:cNvSpPr>
+            <a:spLocks noGrp="1"/>
+          </p:cNvSpPr>
+          <p:nvPr>
+            <p:ph type="title"/>
+          </p:nvPr>
+        </p:nvSpPr>
+        <p:spPr/>
+        <p:txBody>
+          <a:bodyPr/>
+          <a:lstStyle/>
+          <a:p>
+            <a:r>
+              <a:rPr lang="en-US" dirty="0" smtClean="0"/>
+              <a:t>Scaling Out File Server</a:t>
+            </a:r>
+            <a:endParaRPr lang="en-US" dirty="0"/>
+          </a:p>
+        </p:txBody>
+      </p:sp>
+      <p:sp>
+        <p:nvSpPr>
+          <p:cNvPr id="3" name="Content Placeholder 2"/>
+          <p:cNvSpPr>
+            <a:spLocks noGrp="1"/>
+          </p:cNvSpPr>
+          <p:nvPr>
+            <p:ph idx="1"/>
+          </p:nvPr>
+        </p:nvSpPr>
+        <p:spPr/>
+        <p:txBody>
+          <a:bodyPr/>
+          <a:lstStyle/>
+          <a:p>
+            <a:r>
+              <a:rPr lang="en-US" sz="2200" dirty="0" smtClean="0">
+                <a:hlinkClick r:id="rId2"/>
+              </a:rPr>
+              <a:t>https://www.altaro.com/hyper-v/scale-out-file-server-hyper-v/</a:t>
+            </a:r>
+            <a:endParaRPr lang="en-US" sz="2200" dirty="0" smtClean="0"/>
+          </a:p>
+        </p:txBody>
+      </p:sp>
+      <p:pic>
+        <p:nvPicPr>
+          <p:cNvPr id="4" name="Picture 5"/>
+          <p:cNvPicPr>
+            <a:picLocks noChangeAspect="1" noChangeArrowheads="1"/>
+          </p:cNvPicPr>
+          <p:nvPr/>
+        </p:nvPicPr>
+        <p:blipFill>
+          <a:blip r:embed="rId3" cstate="print"/>
+          <a:srcRect/>
+          <a:stretch>
+            <a:fillRect/>
+          </a:stretch>
+        </p:blipFill>
+        <p:spPr bwMode="auto">
+          <a:xfrm>
+            <a:off x="2743200" y="2362200"/>
+            <a:ext cx="3825240" cy="3634740"/>
+          </a:xfrm>
+          <a:prstGeom prst="rect">
+            <a:avLst/>
+          </a:prstGeom>
+          <a:noFill/>
+          <a:ln w="9525">
+            <a:noFill/>
+            <a:miter lim="800000"/>
+            <a:headEnd/>
+            <a:tailEnd/>
+          </a:ln>
+        </p:spPr>
+      </p:pic>
+    </p:spTree>
+  </p:cSld>
+  <p:clrMapOvr>
+    <a:masterClrMapping/>
+  </p:clrMapOvr>
+</p:sld>
+</file>
+
+<file path=ppt/slides/slide36.xml><?xml version="1.0" encoding="utf-8"?>
+<p:sld xmlns:a="http://schemas.openxmlformats.org/drawingml/2006/main" xmlns:r="http://schemas.openxmlformats.org/officeDocument/2006/relationships" xmlns:p="http://schemas.openxmlformats.org/presentationml/2006/main">
+  <p:cSld>
+    <p:spTree>
+      <p:nvGrpSpPr>
+        <p:cNvPr id="1" name=""/>
+        <p:cNvGrpSpPr/>
+        <p:nvPr/>
+      </p:nvGrpSpPr>
+      <p:grpSpPr>
+        <a:xfrm>
+          <a:off x="0" y="0"/>
+          <a:ext cx="0" cy="0"/>
+          <a:chOff x="0" y="0"/>
+          <a:chExt cx="0" cy="0"/>
+        </a:xfrm>
+      </p:grpSpPr>
+      <p:pic>
+        <p:nvPicPr>
+          <p:cNvPr id="4" name="Picture 2" descr="https://lh3.ggpht.com/1IfZLL2QDSjZ0wS7sUhaMlsAOS8BBzdR3wZ1WawgRn7KZAM8nEVZYMOUM-lqQb0ikIzp=w300"/>
+          <p:cNvPicPr>
+            <a:picLocks noChangeAspect="1" noChangeArrowheads="1"/>
+          </p:cNvPicPr>
+          <p:nvPr/>
+        </p:nvPicPr>
+        <p:blipFill>
+          <a:blip r:embed="rId2" cstate="print"/>
+          <a:srcRect/>
+          <a:stretch>
+            <a:fillRect/>
+          </a:stretch>
+        </p:blipFill>
+        <p:spPr bwMode="auto">
+          <a:xfrm>
+            <a:off x="3276600" y="1905000"/>
+            <a:ext cx="2857500" cy="2857500"/>
+          </a:xfrm>
+          <a:prstGeom prst="rect">
+            <a:avLst/>
+          </a:prstGeom>
+          <a:noFill/>
+        </p:spPr>
+      </p:pic>
+    </p:spTree>
+  </p:cSld>
+  <p:clrMapOvr>
+    <a:masterClrMapping/>
+  </p:clrMapOvr>
+</p:sld>
+</file>
+
+<file path=ppt/slides/slide37.xml><?xml version="1.0" encoding="utf-8"?>
 <p:sld xmlns:a="http://schemas.openxmlformats.org/drawingml/2006/main" xmlns:r="http://schemas.openxmlformats.org/officeDocument/2006/relationships" xmlns:p="http://schemas.openxmlformats.org/presentationml/2006/main">
   <p:cSld>
     <p:spTree>
@@ -7675,7 +8159,7 @@
 </p:sld>
 </file>
 
-<file path=ppt/slides/slide33.xml><?xml version="1.0" encoding="utf-8"?>
+<file path=ppt/slides/slide38.xml><?xml version="1.0" encoding="utf-8"?>
 <p:sld xmlns:a="http://schemas.openxmlformats.org/drawingml/2006/main" xmlns:r="http://schemas.openxmlformats.org/officeDocument/2006/relationships" xmlns:p="http://schemas.openxmlformats.org/presentationml/2006/main">
   <p:cSld>
     <p:spTree>
@@ -7783,7 +8267,7 @@
 </p:sld>
 </file>
 
-<file path=ppt/slides/slide34.xml><?xml version="1.0" encoding="utf-8"?>
+<file path=ppt/slides/slide39.xml><?xml version="1.0" encoding="utf-8"?>
 <p:sld xmlns:a="http://schemas.openxmlformats.org/drawingml/2006/main" xmlns:r="http://schemas.openxmlformats.org/officeDocument/2006/relationships" xmlns:p="http://schemas.openxmlformats.org/presentationml/2006/main">
   <p:cSld>
     <p:spTree>
@@ -7969,7 +8453,179 @@
 </p:sld>
 </file>
 
-<file path=ppt/slides/slide35.xml><?xml version="1.0" encoding="utf-8"?>
+<file path=ppt/slides/slide4.xml><?xml version="1.0" encoding="utf-8"?>
+<p:sld xmlns:a="http://schemas.openxmlformats.org/drawingml/2006/main" xmlns:r="http://schemas.openxmlformats.org/officeDocument/2006/relationships" xmlns:p="http://schemas.openxmlformats.org/presentationml/2006/main">
+  <p:cSld>
+    <p:spTree>
+      <p:nvGrpSpPr>
+        <p:cNvPr id="1" name=""/>
+        <p:cNvGrpSpPr/>
+        <p:nvPr/>
+      </p:nvGrpSpPr>
+      <p:grpSpPr>
+        <a:xfrm>
+          <a:off x="0" y="0"/>
+          <a:ext cx="0" cy="0"/>
+          <a:chOff x="0" y="0"/>
+          <a:chExt cx="0" cy="0"/>
+        </a:xfrm>
+      </p:grpSpPr>
+      <p:sp>
+        <p:nvSpPr>
+          <p:cNvPr id="2" name="Title 1"/>
+          <p:cNvSpPr>
+            <a:spLocks noGrp="1"/>
+          </p:cNvSpPr>
+          <p:nvPr>
+            <p:ph type="title"/>
+          </p:nvPr>
+        </p:nvSpPr>
+        <p:spPr/>
+        <p:txBody>
+          <a:bodyPr/>
+          <a:lstStyle/>
+          <a:p>
+            <a:r>
+              <a:rPr lang="en-US" dirty="0" smtClean="0"/>
+              <a:t>References</a:t>
+            </a:r>
+            <a:endParaRPr lang="en-US" dirty="0"/>
+          </a:p>
+        </p:txBody>
+      </p:sp>
+      <p:sp>
+        <p:nvSpPr>
+          <p:cNvPr id="3" name="Content Placeholder 2"/>
+          <p:cNvSpPr>
+            <a:spLocks noGrp="1"/>
+          </p:cNvSpPr>
+          <p:nvPr>
+            <p:ph idx="1"/>
+          </p:nvPr>
+        </p:nvSpPr>
+        <p:spPr>
+          <a:xfrm>
+            <a:off x="457200" y="1600200"/>
+            <a:ext cx="5867400" cy="4724400"/>
+          </a:xfrm>
+        </p:spPr>
+        <p:txBody>
+          <a:bodyPr/>
+          <a:lstStyle/>
+          <a:p>
+            <a:pPr>
+              <a:buFont typeface="+mj-lt"/>
+              <a:buAutoNum type="arabicPeriod"/>
+            </a:pPr>
+            <a:r>
+              <a:rPr lang="en-US" sz="2400" dirty="0" smtClean="0"/>
+              <a:t>Bill Wilder (2012). Cloud Architecture Patterns: Using Microsoft Azure. O'Reilly Media.</a:t>
+            </a:r>
+          </a:p>
+          <a:p>
+            <a:pPr>
+              <a:buFont typeface="+mj-lt"/>
+              <a:buAutoNum type="arabicPeriod"/>
+            </a:pPr>
+            <a:r>
+              <a:rPr lang="en-US" sz="2400" dirty="0" smtClean="0"/>
+              <a:t>Frederick Chong and </a:t>
+            </a:r>
+            <a:r>
+              <a:rPr lang="en-US" sz="2400" dirty="0" err="1" smtClean="0"/>
+              <a:t>Gianpaolo</a:t>
+            </a:r>
+            <a:r>
+              <a:rPr lang="en-US" sz="2400" dirty="0" smtClean="0"/>
+              <a:t> </a:t>
+            </a:r>
+            <a:r>
+              <a:rPr lang="en-US" sz="2400" dirty="0" err="1" smtClean="0"/>
+              <a:t>Carraro</a:t>
+            </a:r>
+            <a:r>
+              <a:rPr lang="en-US" sz="2400" dirty="0" smtClean="0"/>
+              <a:t> (2006). Architecture Strategies For Catching The Long Tail.</a:t>
+            </a:r>
+          </a:p>
+          <a:p>
+            <a:pPr>
+              <a:buFont typeface="+mj-lt"/>
+              <a:buAutoNum type="arabicPeriod"/>
+            </a:pPr>
+            <a:r>
+              <a:rPr lang="en-US" sz="2400" dirty="0" smtClean="0"/>
+              <a:t>Ahmed </a:t>
+            </a:r>
+            <a:r>
+              <a:rPr lang="en-US" sz="2400" dirty="0" err="1" smtClean="0"/>
+              <a:t>Soliman</a:t>
+            </a:r>
+            <a:r>
+              <a:rPr lang="en-US" sz="2400" dirty="0" smtClean="0"/>
+              <a:t> (2013). Getting Started with </a:t>
+            </a:r>
+            <a:r>
+              <a:rPr lang="en-US" sz="2400" dirty="0" err="1" smtClean="0"/>
+              <a:t>Memcached</a:t>
+            </a:r>
+            <a:r>
+              <a:rPr lang="en-US" sz="2400" dirty="0" smtClean="0"/>
+              <a:t>. </a:t>
+            </a:r>
+            <a:r>
+              <a:rPr lang="en-US" sz="2400" dirty="0" err="1" smtClean="0"/>
+              <a:t>Packt</a:t>
+            </a:r>
+            <a:r>
+              <a:rPr lang="en-US" sz="2400" dirty="0" smtClean="0"/>
+              <a:t> Publishing.</a:t>
+            </a:r>
+          </a:p>
+        </p:txBody>
+      </p:sp>
+      <p:pic>
+        <p:nvPicPr>
+          <p:cNvPr id="4" name="Picture 4" descr="http://2.bp.blogspot.com/-FqRM_5NQE6Q/TaSdzyWfvtI/AAAAAAAAAFg/C_2LDJWJOx4/s1600/books-pile.jpg"/>
+          <p:cNvPicPr>
+            <a:picLocks noChangeAspect="1" noChangeArrowheads="1"/>
+          </p:cNvPicPr>
+          <p:nvPr/>
+        </p:nvPicPr>
+        <p:blipFill>
+          <a:blip r:embed="rId2" cstate="print"/>
+          <a:srcRect/>
+          <a:stretch>
+            <a:fillRect/>
+          </a:stretch>
+        </p:blipFill>
+        <p:spPr bwMode="auto">
+          <a:xfrm>
+            <a:off x="6248400" y="1676400"/>
+            <a:ext cx="2724150" cy="4133850"/>
+          </a:xfrm>
+          <a:prstGeom prst="rect">
+            <a:avLst/>
+          </a:prstGeom>
+          <a:noFill/>
+        </p:spPr>
+      </p:pic>
+    </p:spTree>
+  </p:cSld>
+  <p:clrMapOvr>
+    <a:masterClrMapping/>
+  </p:clrMapOvr>
+  <p:timing>
+    <p:tnLst>
+      <p:par>
+        <p:cTn id="1" dur="indefinite" restart="never" nodeType="tmRoot"/>
+      </p:par>
+    </p:tnLst>
+  </p:timing>
+</p:sld>
+</file>
+
+<file path=ppt/slides/slide40.xml><?xml version="1.0" encoding="utf-8"?>
 <p:sld xmlns:a="http://schemas.openxmlformats.org/drawingml/2006/main" xmlns:r="http://schemas.openxmlformats.org/officeDocument/2006/relationships" xmlns:p="http://schemas.openxmlformats.org/presentationml/2006/main">
   <p:cSld>
     <p:spTree>
@@ -8135,7 +8791,7 @@
 </p:sld>
 </file>
 
-<file path=ppt/slides/slide36.xml><?xml version="1.0" encoding="utf-8"?>
+<file path=ppt/slides/slide41.xml><?xml version="1.0" encoding="utf-8"?>
 <p:sld xmlns:a="http://schemas.openxmlformats.org/drawingml/2006/main" xmlns:r="http://schemas.openxmlformats.org/officeDocument/2006/relationships" xmlns:p="http://schemas.openxmlformats.org/presentationml/2006/main">
   <p:cSld>
     <p:spTree>
@@ -8310,7 +8966,7 @@
 </p:sld>
 </file>
 
-<file path=ppt/slides/slide37.xml><?xml version="1.0" encoding="utf-8"?>
+<file path=ppt/slides/slide42.xml><?xml version="1.0" encoding="utf-8"?>
 <p:sld xmlns:a="http://schemas.openxmlformats.org/drawingml/2006/main" xmlns:r="http://schemas.openxmlformats.org/officeDocument/2006/relationships" xmlns:p="http://schemas.openxmlformats.org/presentationml/2006/main">
   <p:cSld>
     <p:spTree>
@@ -8622,7 +9278,7 @@
 </p:sld>
 </file>
 
-<file path=ppt/slides/slide38.xml><?xml version="1.0" encoding="utf-8"?>
+<file path=ppt/slides/slide43.xml><?xml version="1.0" encoding="utf-8"?>
 <p:sld xmlns:a="http://schemas.openxmlformats.org/drawingml/2006/main" xmlns:r="http://schemas.openxmlformats.org/officeDocument/2006/relationships" xmlns:p="http://schemas.openxmlformats.org/presentationml/2006/main">
   <p:cSld>
     <p:spTree>
@@ -8828,7 +9484,7 @@
 </p:sld>
 </file>
 
-<file path=ppt/slides/slide39.xml><?xml version="1.0" encoding="utf-8"?>
+<file path=ppt/slides/slide44.xml><?xml version="1.0" encoding="utf-8"?>
 <p:sld xmlns:a="http://schemas.openxmlformats.org/drawingml/2006/main" xmlns:r="http://schemas.openxmlformats.org/officeDocument/2006/relationships" xmlns:p="http://schemas.openxmlformats.org/presentationml/2006/main">
   <p:cSld>
     <p:spTree>
@@ -8958,179 +9614,7 @@
 </p:sld>
 </file>
 
-<file path=ppt/slides/slide4.xml><?xml version="1.0" encoding="utf-8"?>
-<p:sld xmlns:a="http://schemas.openxmlformats.org/drawingml/2006/main" xmlns:r="http://schemas.openxmlformats.org/officeDocument/2006/relationships" xmlns:p="http://schemas.openxmlformats.org/presentationml/2006/main">
-  <p:cSld>
-    <p:spTree>
-      <p:nvGrpSpPr>
-        <p:cNvPr id="1" name=""/>
-        <p:cNvGrpSpPr/>
-        <p:nvPr/>
-      </p:nvGrpSpPr>
-      <p:grpSpPr>
-        <a:xfrm>
-          <a:off x="0" y="0"/>
-          <a:ext cx="0" cy="0"/>
-          <a:chOff x="0" y="0"/>
-          <a:chExt cx="0" cy="0"/>
-        </a:xfrm>
-      </p:grpSpPr>
-      <p:sp>
-        <p:nvSpPr>
-          <p:cNvPr id="2" name="Title 1"/>
-          <p:cNvSpPr>
-            <a:spLocks noGrp="1"/>
-          </p:cNvSpPr>
-          <p:nvPr>
-            <p:ph type="title"/>
-          </p:nvPr>
-        </p:nvSpPr>
-        <p:spPr/>
-        <p:txBody>
-          <a:bodyPr/>
-          <a:lstStyle/>
-          <a:p>
-            <a:r>
-              <a:rPr lang="en-US" dirty="0" smtClean="0"/>
-              <a:t>References</a:t>
-            </a:r>
-            <a:endParaRPr lang="en-US" dirty="0"/>
-          </a:p>
-        </p:txBody>
-      </p:sp>
-      <p:sp>
-        <p:nvSpPr>
-          <p:cNvPr id="3" name="Content Placeholder 2"/>
-          <p:cNvSpPr>
-            <a:spLocks noGrp="1"/>
-          </p:cNvSpPr>
-          <p:nvPr>
-            <p:ph idx="1"/>
-          </p:nvPr>
-        </p:nvSpPr>
-        <p:spPr>
-          <a:xfrm>
-            <a:off x="457200" y="1600200"/>
-            <a:ext cx="5867400" cy="4724400"/>
-          </a:xfrm>
-        </p:spPr>
-        <p:txBody>
-          <a:bodyPr/>
-          <a:lstStyle/>
-          <a:p>
-            <a:pPr>
-              <a:buFont typeface="+mj-lt"/>
-              <a:buAutoNum type="arabicPeriod"/>
-            </a:pPr>
-            <a:r>
-              <a:rPr lang="en-US" sz="2400" dirty="0" smtClean="0"/>
-              <a:t>Bill Wilder (2012). Cloud Architecture Patterns: Using Microsoft Azure. O'Reilly Media.</a:t>
-            </a:r>
-          </a:p>
-          <a:p>
-            <a:pPr>
-              <a:buFont typeface="+mj-lt"/>
-              <a:buAutoNum type="arabicPeriod"/>
-            </a:pPr>
-            <a:r>
-              <a:rPr lang="en-US" sz="2400" dirty="0" smtClean="0"/>
-              <a:t>Frederick Chong and </a:t>
-            </a:r>
-            <a:r>
-              <a:rPr lang="en-US" sz="2400" dirty="0" err="1" smtClean="0"/>
-              <a:t>Gianpaolo</a:t>
-            </a:r>
-            <a:r>
-              <a:rPr lang="en-US" sz="2400" dirty="0" smtClean="0"/>
-              <a:t> </a:t>
-            </a:r>
-            <a:r>
-              <a:rPr lang="en-US" sz="2400" dirty="0" err="1" smtClean="0"/>
-              <a:t>Carraro</a:t>
-            </a:r>
-            <a:r>
-              <a:rPr lang="en-US" sz="2400" dirty="0" smtClean="0"/>
-              <a:t> (2006). Architecture Strategies For Catching The Long Tail.</a:t>
-            </a:r>
-          </a:p>
-          <a:p>
-            <a:pPr>
-              <a:buFont typeface="+mj-lt"/>
-              <a:buAutoNum type="arabicPeriod"/>
-            </a:pPr>
-            <a:r>
-              <a:rPr lang="en-US" sz="2400" dirty="0" smtClean="0"/>
-              <a:t>Ahmed </a:t>
-            </a:r>
-            <a:r>
-              <a:rPr lang="en-US" sz="2400" dirty="0" err="1" smtClean="0"/>
-              <a:t>Soliman</a:t>
-            </a:r>
-            <a:r>
-              <a:rPr lang="en-US" sz="2400" dirty="0" smtClean="0"/>
-              <a:t> (2013). Getting Started with </a:t>
-            </a:r>
-            <a:r>
-              <a:rPr lang="en-US" sz="2400" dirty="0" err="1" smtClean="0"/>
-              <a:t>Memcached</a:t>
-            </a:r>
-            <a:r>
-              <a:rPr lang="en-US" sz="2400" dirty="0" smtClean="0"/>
-              <a:t>. </a:t>
-            </a:r>
-            <a:r>
-              <a:rPr lang="en-US" sz="2400" dirty="0" err="1" smtClean="0"/>
-              <a:t>Packt</a:t>
-            </a:r>
-            <a:r>
-              <a:rPr lang="en-US" sz="2400" dirty="0" smtClean="0"/>
-              <a:t> Publishing.</a:t>
-            </a:r>
-          </a:p>
-        </p:txBody>
-      </p:sp>
-      <p:pic>
-        <p:nvPicPr>
-          <p:cNvPr id="4" name="Picture 4" descr="http://2.bp.blogspot.com/-FqRM_5NQE6Q/TaSdzyWfvtI/AAAAAAAAAFg/C_2LDJWJOx4/s1600/books-pile.jpg"/>
-          <p:cNvPicPr>
-            <a:picLocks noChangeAspect="1" noChangeArrowheads="1"/>
-          </p:cNvPicPr>
-          <p:nvPr/>
-        </p:nvPicPr>
-        <p:blipFill>
-          <a:blip r:embed="rId2" cstate="print"/>
-          <a:srcRect/>
-          <a:stretch>
-            <a:fillRect/>
-          </a:stretch>
-        </p:blipFill>
-        <p:spPr bwMode="auto">
-          <a:xfrm>
-            <a:off x="6248400" y="1676400"/>
-            <a:ext cx="2724150" cy="4133850"/>
-          </a:xfrm>
-          <a:prstGeom prst="rect">
-            <a:avLst/>
-          </a:prstGeom>
-          <a:noFill/>
-        </p:spPr>
-      </p:pic>
-    </p:spTree>
-  </p:cSld>
-  <p:clrMapOvr>
-    <a:masterClrMapping/>
-  </p:clrMapOvr>
-  <p:timing>
-    <p:tnLst>
-      <p:par>
-        <p:cTn id="1" dur="indefinite" restart="never" nodeType="tmRoot"/>
-      </p:par>
-    </p:tnLst>
-  </p:timing>
-</p:sld>
-</file>
-
-<file path=ppt/slides/slide40.xml><?xml version="1.0" encoding="utf-8"?>
+<file path=ppt/slides/slide45.xml><?xml version="1.0" encoding="utf-8"?>
 <p:sld xmlns:a="http://schemas.openxmlformats.org/drawingml/2006/main" xmlns:r="http://schemas.openxmlformats.org/officeDocument/2006/relationships" xmlns:p="http://schemas.openxmlformats.org/presentationml/2006/main">
   <p:cSld>
     <p:spTree>
@@ -9247,7 +9731,7 @@
 </p:sld>
 </file>
 
-<file path=ppt/slides/slide41.xml><?xml version="1.0" encoding="utf-8"?>
+<file path=ppt/slides/slide46.xml><?xml version="1.0" encoding="utf-8"?>
 <p:sld xmlns:a="http://schemas.openxmlformats.org/drawingml/2006/main" xmlns:r="http://schemas.openxmlformats.org/officeDocument/2006/relationships" xmlns:p="http://schemas.openxmlformats.org/presentationml/2006/main">
   <p:cSld>
     <p:spTree>
@@ -9363,7 +9847,7 @@
 </p:sld>
 </file>
 
-<file path=ppt/slides/slide42.xml><?xml version="1.0" encoding="utf-8"?>
+<file path=ppt/slides/slide47.xml><?xml version="1.0" encoding="utf-8"?>
 <p:sld xmlns:a="http://schemas.openxmlformats.org/drawingml/2006/main" xmlns:r="http://schemas.openxmlformats.org/officeDocument/2006/relationships" xmlns:p="http://schemas.openxmlformats.org/presentationml/2006/main">
   <p:cSld>
     <p:spTree>
@@ -9537,7 +10021,7 @@
 </p:sld>
 </file>
 
-<file path=ppt/slides/slide43.xml><?xml version="1.0" encoding="utf-8"?>
+<file path=ppt/slides/slide48.xml><?xml version="1.0" encoding="utf-8"?>
 <p:sld xmlns:a="http://schemas.openxmlformats.org/drawingml/2006/main" xmlns:r="http://schemas.openxmlformats.org/officeDocument/2006/relationships" xmlns:p="http://schemas.openxmlformats.org/presentationml/2006/main">
   <p:cSld>
     <p:spTree>

--- a/Microservices/07.1. Scalability.pptx
+++ b/Microservices/07.1. Scalability.pptx
@@ -5,7 +5,7 @@
     <p:sldMasterId id="2147483708" r:id="rId1"/>
   </p:sldMasterIdLst>
   <p:notesMasterIdLst>
-    <p:notesMasterId r:id="rId50"/>
+    <p:notesMasterId r:id="rId51"/>
   </p:notesMasterIdLst>
   <p:sldIdLst>
     <p:sldId id="670" r:id="rId2"/>
@@ -26,36 +26,37 @@
     <p:sldId id="756" r:id="rId17"/>
     <p:sldId id="757" r:id="rId18"/>
     <p:sldId id="758" r:id="rId19"/>
-    <p:sldId id="752" r:id="rId20"/>
-    <p:sldId id="717" r:id="rId21"/>
-    <p:sldId id="724" r:id="rId22"/>
-    <p:sldId id="740" r:id="rId23"/>
-    <p:sldId id="741" r:id="rId24"/>
-    <p:sldId id="742" r:id="rId25"/>
-    <p:sldId id="743" r:id="rId26"/>
-    <p:sldId id="744" r:id="rId27"/>
-    <p:sldId id="745" r:id="rId28"/>
-    <p:sldId id="746" r:id="rId29"/>
-    <p:sldId id="747" r:id="rId30"/>
-    <p:sldId id="748" r:id="rId31"/>
-    <p:sldId id="749" r:id="rId32"/>
-    <p:sldId id="736" r:id="rId33"/>
-    <p:sldId id="668" r:id="rId34"/>
-    <p:sldId id="739" r:id="rId35"/>
-    <p:sldId id="669" r:id="rId36"/>
-    <p:sldId id="636" r:id="rId37"/>
-    <p:sldId id="750" r:id="rId38"/>
-    <p:sldId id="730" r:id="rId39"/>
-    <p:sldId id="726" r:id="rId40"/>
-    <p:sldId id="729" r:id="rId41"/>
-    <p:sldId id="731" r:id="rId42"/>
-    <p:sldId id="621" r:id="rId43"/>
-    <p:sldId id="732" r:id="rId44"/>
-    <p:sldId id="734" r:id="rId45"/>
-    <p:sldId id="735" r:id="rId46"/>
-    <p:sldId id="733" r:id="rId47"/>
-    <p:sldId id="624" r:id="rId48"/>
-    <p:sldId id="516" r:id="rId49"/>
+    <p:sldId id="759" r:id="rId20"/>
+    <p:sldId id="752" r:id="rId21"/>
+    <p:sldId id="717" r:id="rId22"/>
+    <p:sldId id="724" r:id="rId23"/>
+    <p:sldId id="740" r:id="rId24"/>
+    <p:sldId id="741" r:id="rId25"/>
+    <p:sldId id="742" r:id="rId26"/>
+    <p:sldId id="743" r:id="rId27"/>
+    <p:sldId id="744" r:id="rId28"/>
+    <p:sldId id="745" r:id="rId29"/>
+    <p:sldId id="746" r:id="rId30"/>
+    <p:sldId id="747" r:id="rId31"/>
+    <p:sldId id="748" r:id="rId32"/>
+    <p:sldId id="749" r:id="rId33"/>
+    <p:sldId id="736" r:id="rId34"/>
+    <p:sldId id="668" r:id="rId35"/>
+    <p:sldId id="739" r:id="rId36"/>
+    <p:sldId id="669" r:id="rId37"/>
+    <p:sldId id="636" r:id="rId38"/>
+    <p:sldId id="750" r:id="rId39"/>
+    <p:sldId id="730" r:id="rId40"/>
+    <p:sldId id="726" r:id="rId41"/>
+    <p:sldId id="729" r:id="rId42"/>
+    <p:sldId id="731" r:id="rId43"/>
+    <p:sldId id="621" r:id="rId44"/>
+    <p:sldId id="732" r:id="rId45"/>
+    <p:sldId id="734" r:id="rId46"/>
+    <p:sldId id="735" r:id="rId47"/>
+    <p:sldId id="733" r:id="rId48"/>
+    <p:sldId id="624" r:id="rId49"/>
+    <p:sldId id="516" r:id="rId50"/>
   </p:sldIdLst>
   <p:sldSz cx="9144000" cy="6858000" type="screen4x3"/>
   <p:notesSz cx="6858000" cy="9144000"/>
@@ -4650,28 +4651,14 @@
               <a:rPr lang="en-US" dirty="0" smtClean="0">
                 <a:hlinkClick r:id="rId2"/>
               </a:rPr>
-              <a:t>https://grafana.com/pricing/?</a:t>
-            </a:r>
-            <a:r>
-              <a:rPr lang="en-US" dirty="0" smtClean="0">
-                <a:hlinkClick r:id="rId2"/>
-              </a:rPr>
-              <a:t>src=k6io#k6-performance-testing</a:t>
+              <a:t>https://grafana.com/pricing/?src=k6io#k6-performance-testing</a:t>
             </a:r>
             <a:endParaRPr lang="en-US" dirty="0" smtClean="0"/>
           </a:p>
           <a:p>
             <a:r>
               <a:rPr lang="en-US" dirty="0" smtClean="0"/>
-              <a:t>brew </a:t>
-            </a:r>
-            <a:r>
-              <a:rPr lang="en-US" dirty="0" smtClean="0"/>
-              <a:t>install </a:t>
-            </a:r>
-            <a:r>
-              <a:rPr lang="en-US" dirty="0" smtClean="0"/>
-              <a:t>k6</a:t>
+              <a:t>brew install k6</a:t>
             </a:r>
           </a:p>
           <a:p>
@@ -4683,13 +4670,7 @@
               <a:rPr lang="en-US" dirty="0" smtClean="0">
                 <a:hlinkClick r:id="rId3"/>
               </a:rPr>
-              <a:t>https://</a:t>
-            </a:r>
-            <a:r>
-              <a:rPr lang="en-US" dirty="0" smtClean="0">
-                <a:hlinkClick r:id="rId3"/>
-              </a:rPr>
-              <a:t>grafana.com</a:t>
+              <a:t>https://grafana.com</a:t>
             </a:r>
             <a:r>
               <a:rPr lang="en-US" dirty="0" smtClean="0"/>
@@ -4699,19 +4680,7 @@
           <a:p>
             <a:r>
               <a:rPr lang="en-US" dirty="0" smtClean="0"/>
-              <a:t>k6 cloud login --token </a:t>
-            </a:r>
-            <a:r>
-              <a:rPr lang="en-US" dirty="0" smtClean="0"/>
-              <a:t>7e8f7f6 </a:t>
-            </a:r>
-            <a:r>
-              <a:rPr lang="en-US" dirty="0" smtClean="0"/>
-              <a:t>--stack </a:t>
-            </a:r>
-            <a:r>
-              <a:rPr lang="en-US" dirty="0" smtClean="0"/>
-              <a:t>valiantgranola1655</a:t>
+              <a:t>k6 cloud login --token 7e8f7f6 --stack valiantgranola1655</a:t>
             </a:r>
           </a:p>
           <a:p>
@@ -4840,11 +4809,7 @@
             <a:pPr algn="l"/>
             <a:r>
               <a:rPr lang="en-US" dirty="0" smtClean="0"/>
-              <a:t>3</a:t>
-            </a:r>
-            <a:r>
-              <a:rPr lang="en-US" dirty="0" smtClean="0"/>
-              <a:t>. Run the Script on Cloud</a:t>
+              <a:t>3. Run the Script on Cloud</a:t>
             </a:r>
             <a:endParaRPr lang="en-US" dirty="0"/>
           </a:p>
@@ -4875,11 +4840,7 @@
             </a:r>
             <a:r>
               <a:rPr lang="en-US" dirty="0" smtClean="0"/>
-              <a:t> run </a:t>
-            </a:r>
-            <a:r>
-              <a:rPr lang="en-US" dirty="0" smtClean="0"/>
-              <a:t>script.js</a:t>
+              <a:t> run script.js</a:t>
             </a:r>
           </a:p>
           <a:p>
@@ -4955,13 +4916,7 @@
               <a:rPr lang="en-US" sz="2400" dirty="0" smtClean="0">
                 <a:hlinkClick r:id="rId2"/>
               </a:rPr>
-              <a:t>https://</a:t>
-            </a:r>
-            <a:r>
-              <a:rPr lang="en-US" sz="2400" dirty="0" smtClean="0">
-                <a:hlinkClick r:id="rId2"/>
-              </a:rPr>
-              <a:t>valiantgranola1655.grafana.net/a/k6-app/runs/7719358</a:t>
+              <a:t>https://valiantgranola1655.grafana.net/a/k6-app/runs/7719358</a:t>
             </a:r>
             <a:endParaRPr lang="en-US" sz="2400" dirty="0" smtClean="0"/>
           </a:p>
@@ -5066,7 +5021,89 @@
           <a:bodyPr/>
           <a:lstStyle/>
           <a:p>
-            <a:endParaRPr lang="en-US" dirty="0"/>
+            <a:r>
+              <a:rPr lang="en-US" sz="2400" dirty="0" smtClean="0"/>
+              <a:t>When a process needs memory and the kernel has none left to give — no free RAM, nothing reclaimable, and no swap to page out to — the kernel can't just </a:t>
+            </a:r>
+            <a:r>
+              <a:rPr lang="en-US" sz="2400" dirty="0" smtClean="0"/>
+              <a:t>wait.</a:t>
+            </a:r>
+          </a:p>
+          <a:p>
+            <a:r>
+              <a:rPr lang="en-US" sz="2400" dirty="0" smtClean="0"/>
+              <a:t>To  </a:t>
+            </a:r>
+            <a:r>
+              <a:rPr lang="en-US" sz="2400" dirty="0" smtClean="0"/>
+              <a:t>avoid a total system freeze, it invokes the Out Of </a:t>
+            </a:r>
+            <a:r>
+              <a:rPr lang="en-US" sz="2400" dirty="0" smtClean="0"/>
+              <a:t>Memory (OOM) </a:t>
+            </a:r>
+            <a:r>
+              <a:rPr lang="en-US" sz="2400" dirty="0" smtClean="0"/>
+              <a:t>killer</a:t>
+            </a:r>
+            <a:r>
+              <a:rPr lang="en-US" sz="2400" dirty="0" smtClean="0"/>
+              <a:t>.</a:t>
+            </a:r>
+          </a:p>
+          <a:p>
+            <a:r>
+              <a:rPr lang="en-US" sz="2400" dirty="0" smtClean="0"/>
+              <a:t>The OOM killer picks a process to terminate to free </a:t>
+            </a:r>
+            <a:r>
+              <a:rPr lang="en-US" sz="2400" dirty="0" smtClean="0"/>
+              <a:t>memory.</a:t>
+            </a:r>
+          </a:p>
+          <a:p>
+            <a:r>
+              <a:rPr lang="en-US" sz="2400" dirty="0" smtClean="0"/>
+              <a:t>It </a:t>
+            </a:r>
+            <a:r>
+              <a:rPr lang="en-US" sz="2400" dirty="0" smtClean="0"/>
+              <a:t>scores every process (roughly by how much memory it's using, via </a:t>
+            </a:r>
+            <a:r>
+              <a:rPr lang="en-US" sz="2400" dirty="0" err="1" smtClean="0"/>
+              <a:t>oom_score</a:t>
+            </a:r>
+            <a:r>
+              <a:rPr lang="en-US" sz="2400" dirty="0" smtClean="0"/>
+              <a:t>) and kills the </a:t>
+            </a:r>
+            <a:r>
+              <a:rPr lang="en-US" sz="2400" dirty="0" smtClean="0"/>
+              <a:t>one that </a:t>
+            </a:r>
+            <a:r>
+              <a:rPr lang="en-US" sz="2400" dirty="0" smtClean="0"/>
+              <a:t>frees the </a:t>
+            </a:r>
+            <a:r>
+              <a:rPr lang="en-US" sz="2400" dirty="0" smtClean="0"/>
+              <a:t>most.</a:t>
+            </a:r>
+          </a:p>
+          <a:p>
+            <a:r>
+              <a:rPr lang="en-US" sz="2400" dirty="0" smtClean="0"/>
+              <a:t>The kill is a hard SIGKILL (signal 9) — the process is terminated instantly, no clean shutdown.</a:t>
+            </a:r>
+            <a:endParaRPr lang="en-US" sz="2400" dirty="0" smtClean="0"/>
+          </a:p>
+          <a:p>
+            <a:endParaRPr lang="en-US" sz="2400" dirty="0" smtClean="0"/>
+          </a:p>
+          <a:p>
+            <a:endParaRPr lang="en-US" sz="2400" dirty="0"/>
           </a:p>
         </p:txBody>
       </p:sp>
@@ -5136,21 +5173,13 @@
           <a:p>
             <a:r>
               <a:rPr lang="en-US" dirty="0" smtClean="0"/>
-              <a:t>k6 </a:t>
-            </a:r>
+              <a:t>k6 run script.js</a:t>
+            </a:r>
+          </a:p>
+          <a:p>
             <a:r>
               <a:rPr lang="en-US" dirty="0" smtClean="0"/>
-              <a:t>run script.js</a:t>
-            </a:r>
-          </a:p>
-          <a:p>
-            <a:r>
-              <a:rPr lang="en-US" dirty="0" smtClean="0"/>
-              <a:t>k6 </a:t>
-            </a:r>
-            <a:r>
-              <a:rPr lang="en-US" dirty="0" smtClean="0"/>
-              <a:t>run --out 'web-dashboard=host=0.0.0.0&amp;port=5665&amp;export=</a:t>
+              <a:t>k6 run --out 'web-dashboard=host=0.0.0.0&amp;port=5665&amp;export=</a:t>
             </a:r>
             <a:r>
               <a:rPr lang="en-US" dirty="0" err="1" smtClean="0"/>
@@ -5158,37 +5187,21 @@
             </a:r>
             <a:r>
               <a:rPr lang="en-US" dirty="0" smtClean="0"/>
-              <a:t>=true' </a:t>
-            </a:r>
+              <a:t>=true' script.js</a:t>
+            </a:r>
+          </a:p>
+          <a:p>
             <a:r>
               <a:rPr lang="en-US" dirty="0" smtClean="0"/>
-              <a:t>script.js</a:t>
-            </a:r>
-          </a:p>
-          <a:p>
-            <a:r>
-              <a:rPr lang="en-US" smtClean="0"/>
               <a:t># Open: </a:t>
             </a:r>
             <a:r>
-              <a:rPr lang="en-US" smtClean="0">
+              <a:rPr lang="en-US" dirty="0" smtClean="0">
                 <a:hlinkClick r:id="rId2"/>
               </a:rPr>
-              <a:t>http</a:t>
-            </a:r>
-            <a:r>
-              <a:rPr lang="en-US" smtClean="0">
-                <a:hlinkClick r:id="rId2"/>
-              </a:rPr>
-              <a:t>://</a:t>
-            </a:r>
-            <a:r>
-              <a:rPr lang="en-US" smtClean="0">
-                <a:hlinkClick r:id="rId2"/>
-              </a:rPr>
-              <a:t>192.168.1.45:5665</a:t>
-            </a:r>
-            <a:endParaRPr lang="en-US" smtClean="0"/>
+              <a:t>http://192.168.1.45:5665</a:t>
+            </a:r>
+            <a:endParaRPr lang="en-US" dirty="0" smtClean="0"/>
           </a:p>
           <a:p>
             <a:endParaRPr lang="en-US" dirty="0" smtClean="0"/>
@@ -5223,32 +5236,81 @@
           <a:chExt cx="0" cy="0"/>
         </a:xfrm>
       </p:grpSpPr>
-      <p:pic>
-        <p:nvPicPr>
-          <p:cNvPr id="4" name="Picture 2" descr="https://lh3.ggpht.com/1IfZLL2QDSjZ0wS7sUhaMlsAOS8BBzdR3wZ1WawgRn7KZAM8nEVZYMOUM-lqQb0ikIzp=w300"/>
-          <p:cNvPicPr>
-            <a:picLocks noChangeAspect="1" noChangeArrowheads="1"/>
-          </p:cNvPicPr>
-          <p:nvPr/>
-        </p:nvPicPr>
-        <p:blipFill>
-          <a:blip r:embed="rId2" cstate="print"/>
-          <a:srcRect/>
-          <a:stretch>
-            <a:fillRect/>
-          </a:stretch>
-        </p:blipFill>
-        <p:spPr bwMode="auto">
-          <a:xfrm>
-            <a:off x="3276600" y="1905000"/>
-            <a:ext cx="2857500" cy="2857500"/>
-          </a:xfrm>
-          <a:prstGeom prst="rect">
-            <a:avLst/>
-          </a:prstGeom>
-          <a:noFill/>
-        </p:spPr>
-      </p:pic>
+      <p:sp>
+        <p:nvSpPr>
+          <p:cNvPr id="2" name="Title 1"/>
+          <p:cNvSpPr>
+            <a:spLocks noGrp="1"/>
+          </p:cNvSpPr>
+          <p:nvPr>
+            <p:ph type="title"/>
+          </p:nvPr>
+        </p:nvSpPr>
+        <p:spPr/>
+        <p:txBody>
+          <a:bodyPr/>
+          <a:lstStyle/>
+          <a:p>
+            <a:pPr algn="l"/>
+            <a:r>
+              <a:rPr lang="en-US" dirty="0" smtClean="0"/>
+              <a:t>7</a:t>
+            </a:r>
+            <a:r>
+              <a:rPr lang="en-US" dirty="0" smtClean="0"/>
+              <a:t>. Check for Memory Leaks</a:t>
+            </a:r>
+            <a:endParaRPr lang="en-US" dirty="0"/>
+          </a:p>
+        </p:txBody>
+      </p:sp>
+      <p:sp>
+        <p:nvSpPr>
+          <p:cNvPr id="3" name="Content Placeholder 2"/>
+          <p:cNvSpPr>
+            <a:spLocks noGrp="1"/>
+          </p:cNvSpPr>
+          <p:nvPr>
+            <p:ph idx="1"/>
+          </p:nvPr>
+        </p:nvSpPr>
+        <p:spPr/>
+        <p:txBody>
+          <a:bodyPr/>
+          <a:lstStyle/>
+          <a:p>
+            <a:r>
+              <a:rPr lang="en-US" dirty="0" smtClean="0"/>
+              <a:t>Investigate the memory usage of each process during the load test</a:t>
+            </a:r>
+            <a:r>
+              <a:rPr lang="en-US" dirty="0" smtClean="0"/>
+              <a:t>.</a:t>
+            </a:r>
+          </a:p>
+          <a:p>
+            <a:r>
+              <a:rPr lang="en-US" dirty="0" smtClean="0"/>
+              <a:t>If a memory leak were present, the Resident Set Size (RSS) would continue to increase as a worker processes additional </a:t>
+            </a:r>
+            <a:r>
+              <a:rPr lang="en-US" dirty="0" smtClean="0"/>
+              <a:t>requests.</a:t>
+            </a:r>
+          </a:p>
+          <a:p>
+            <a:r>
+              <a:rPr lang="en-US" dirty="0" smtClean="0"/>
+              <a:t>Instead</a:t>
+            </a:r>
+            <a:r>
+              <a:rPr lang="en-US" dirty="0" smtClean="0"/>
+              <a:t>, each worker's RSS reaches a peak within the first 30–60 seconds and then remains essentially flat for the remainder of its lifetime.</a:t>
+            </a:r>
+            <a:endParaRPr lang="en-US" dirty="0"/>
+          </a:p>
+        </p:txBody>
+      </p:sp>
     </p:spTree>
   </p:cSld>
   <p:clrMapOvr>
@@ -5390,6 +5452,57 @@
           <a:chExt cx="0" cy="0"/>
         </a:xfrm>
       </p:grpSpPr>
+      <p:pic>
+        <p:nvPicPr>
+          <p:cNvPr id="4" name="Picture 2" descr="https://lh3.ggpht.com/1IfZLL2QDSjZ0wS7sUhaMlsAOS8BBzdR3wZ1WawgRn7KZAM8nEVZYMOUM-lqQb0ikIzp=w300"/>
+          <p:cNvPicPr>
+            <a:picLocks noChangeAspect="1" noChangeArrowheads="1"/>
+          </p:cNvPicPr>
+          <p:nvPr/>
+        </p:nvPicPr>
+        <p:blipFill>
+          <a:blip r:embed="rId2" cstate="print"/>
+          <a:srcRect/>
+          <a:stretch>
+            <a:fillRect/>
+          </a:stretch>
+        </p:blipFill>
+        <p:spPr bwMode="auto">
+          <a:xfrm>
+            <a:off x="3276600" y="1905000"/>
+            <a:ext cx="2857500" cy="2857500"/>
+          </a:xfrm>
+          <a:prstGeom prst="rect">
+            <a:avLst/>
+          </a:prstGeom>
+          <a:noFill/>
+        </p:spPr>
+      </p:pic>
+    </p:spTree>
+  </p:cSld>
+  <p:clrMapOvr>
+    <a:masterClrMapping/>
+  </p:clrMapOvr>
+</p:sld>
+</file>
+
+<file path=ppt/slides/slide21.xml><?xml version="1.0" encoding="utf-8"?>
+<p:sld xmlns:a="http://schemas.openxmlformats.org/drawingml/2006/main" xmlns:r="http://schemas.openxmlformats.org/officeDocument/2006/relationships" xmlns:p="http://schemas.openxmlformats.org/presentationml/2006/main">
+  <p:cSld>
+    <p:spTree>
+      <p:nvGrpSpPr>
+        <p:cNvPr id="1" name=""/>
+        <p:cNvGrpSpPr/>
+        <p:nvPr/>
+      </p:nvGrpSpPr>
+      <p:grpSpPr>
+        <a:xfrm>
+          <a:off x="0" y="0"/>
+          <a:ext cx="0" cy="0"/>
+          <a:chOff x="0" y="0"/>
+          <a:chExt cx="0" cy="0"/>
+        </a:xfrm>
+      </p:grpSpPr>
       <p:sp>
         <p:nvSpPr>
           <p:cNvPr id="2" name="Title 1"/>
@@ -5540,7 +5653,7 @@
 </p:sld>
 </file>
 
-<file path=ppt/slides/slide21.xml><?xml version="1.0" encoding="utf-8"?>
+<file path=ppt/slides/slide22.xml><?xml version="1.0" encoding="utf-8"?>
 <p:sld xmlns:a="http://schemas.openxmlformats.org/drawingml/2006/main" xmlns:r="http://schemas.openxmlformats.org/officeDocument/2006/relationships" xmlns:p="http://schemas.openxmlformats.org/presentationml/2006/main">
   <p:cSld>
     <p:spTree>
@@ -5725,7 +5838,7 @@
 </p:sld>
 </file>
 
-<file path=ppt/slides/slide22.xml><?xml version="1.0" encoding="utf-8"?>
+<file path=ppt/slides/slide23.xml><?xml version="1.0" encoding="utf-8"?>
 <p:sld xmlns:a="http://schemas.openxmlformats.org/drawingml/2006/main" xmlns:r="http://schemas.openxmlformats.org/officeDocument/2006/relationships" xmlns:p="http://schemas.openxmlformats.org/presentationml/2006/main">
   <p:cSld>
     <p:spTree>
@@ -5776,7 +5889,7 @@
 </p:sld>
 </file>
 
-<file path=ppt/slides/slide23.xml><?xml version="1.0" encoding="utf-8"?>
+<file path=ppt/slides/slide24.xml><?xml version="1.0" encoding="utf-8"?>
 <p:sld xmlns:a="http://schemas.openxmlformats.org/drawingml/2006/main" xmlns:r="http://schemas.openxmlformats.org/officeDocument/2006/relationships" xmlns:p="http://schemas.openxmlformats.org/presentationml/2006/main">
   <p:cSld>
     <p:spTree>
@@ -6086,131 +6199,6 @@
                 <a:latin typeface="Consolas" pitchFamily="49" charset="0"/>
               </a:rPr>
               <a:t>...</a:t>
-            </a:r>
-          </a:p>
-        </p:txBody>
-      </p:sp>
-    </p:spTree>
-  </p:cSld>
-  <p:clrMapOvr>
-    <a:masterClrMapping/>
-  </p:clrMapOvr>
-</p:sld>
-</file>
-
-<file path=ppt/slides/slide24.xml><?xml version="1.0" encoding="utf-8"?>
-<p:sld xmlns:a="http://schemas.openxmlformats.org/drawingml/2006/main" xmlns:r="http://schemas.openxmlformats.org/officeDocument/2006/relationships" xmlns:p="http://schemas.openxmlformats.org/presentationml/2006/main">
-  <p:cSld>
-    <p:spTree>
-      <p:nvGrpSpPr>
-        <p:cNvPr id="1" name=""/>
-        <p:cNvGrpSpPr/>
-        <p:nvPr/>
-      </p:nvGrpSpPr>
-      <p:grpSpPr>
-        <a:xfrm>
-          <a:off x="0" y="0"/>
-          <a:ext cx="0" cy="0"/>
-          <a:chOff x="0" y="0"/>
-          <a:chExt cx="0" cy="0"/>
-        </a:xfrm>
-      </p:grpSpPr>
-      <p:sp>
-        <p:nvSpPr>
-          <p:cNvPr id="2" name="Title 1"/>
-          <p:cNvSpPr>
-            <a:spLocks noGrp="1"/>
-          </p:cNvSpPr>
-          <p:nvPr>
-            <p:ph type="title"/>
-          </p:nvPr>
-        </p:nvSpPr>
-        <p:spPr/>
-        <p:txBody>
-          <a:bodyPr/>
-          <a:lstStyle/>
-          <a:p>
-            <a:pPr algn="l"/>
-            <a:r>
-              <a:rPr lang="en-US" dirty="0" smtClean="0"/>
-              <a:t>1. Create an SQL Server Database for </a:t>
-            </a:r>
-            <a:r>
-              <a:rPr lang="en-US" dirty="0" err="1" smtClean="0"/>
-              <a:t>SQLServer</a:t>
-            </a:r>
-            <a:r>
-              <a:rPr lang="en-US" dirty="0" smtClean="0"/>
-              <a:t> Session Mode</a:t>
-            </a:r>
-            <a:endParaRPr lang="en-US" dirty="0"/>
-          </a:p>
-        </p:txBody>
-      </p:sp>
-      <p:sp>
-        <p:nvSpPr>
-          <p:cNvPr id="3" name="Content Placeholder 2"/>
-          <p:cNvSpPr>
-            <a:spLocks noGrp="1"/>
-          </p:cNvSpPr>
-          <p:nvPr>
-            <p:ph idx="1"/>
-          </p:nvPr>
-        </p:nvSpPr>
-        <p:spPr/>
-        <p:txBody>
-          <a:bodyPr/>
-          <a:lstStyle/>
-          <a:p>
-            <a:pPr marL="342900" lvl="2" indent="-342900"/>
-            <a:r>
-              <a:rPr lang="en-US" sz="2200" b="1" dirty="0" smtClean="0"/>
-              <a:t>Run cmd.exe as Administrator</a:t>
-            </a:r>
-          </a:p>
-          <a:p>
-            <a:pPr marL="342900" lvl="2" indent="-342900"/>
-            <a:r>
-              <a:rPr lang="en-US" sz="2200" i="1" dirty="0" smtClean="0">
-                <a:latin typeface="Consolas" pitchFamily="49" charset="0"/>
-              </a:rPr>
-              <a:t>C:\Windows\Microsoft.NET\Framework\v4.0.30319\aspnet_regsql.exe -</a:t>
-            </a:r>
-            <a:r>
-              <a:rPr lang="en-US" sz="2200" i="1" dirty="0" err="1" smtClean="0">
-                <a:latin typeface="Consolas" pitchFamily="49" charset="0"/>
-              </a:rPr>
-              <a:t>ssadd</a:t>
-            </a:r>
-            <a:r>
-              <a:rPr lang="en-US" sz="2200" i="1" dirty="0" smtClean="0">
-                <a:latin typeface="Consolas" pitchFamily="49" charset="0"/>
-              </a:rPr>
-              <a:t> -</a:t>
-            </a:r>
-            <a:r>
-              <a:rPr lang="en-US" sz="2200" i="1" dirty="0" err="1" smtClean="0">
-                <a:latin typeface="Consolas" pitchFamily="49" charset="0"/>
-              </a:rPr>
-              <a:t>sstype</a:t>
-            </a:r>
-            <a:r>
-              <a:rPr lang="en-US" sz="2200" i="1" dirty="0" smtClean="0">
-                <a:latin typeface="Consolas" pitchFamily="49" charset="0"/>
-              </a:rPr>
-              <a:t> c -d apistate.example.com -S </a:t>
-            </a:r>
-            <a:r>
-              <a:rPr lang="en-US" sz="2200" i="1" dirty="0" err="1" smtClean="0">
-                <a:latin typeface="Consolas" pitchFamily="49" charset="0"/>
-              </a:rPr>
-              <a:t>localhost</a:t>
-            </a:r>
-            <a:r>
-              <a:rPr lang="en-US" sz="2200" i="1" dirty="0" smtClean="0">
-                <a:latin typeface="Consolas" pitchFamily="49" charset="0"/>
-              </a:rPr>
-              <a:t> –E</a:t>
             </a:r>
           </a:p>
         </p:txBody>
@@ -6258,6 +6246,131 @@
             <a:pPr algn="l"/>
             <a:r>
               <a:rPr lang="en-US" dirty="0" smtClean="0"/>
+              <a:t>1. Create an SQL Server Database for </a:t>
+            </a:r>
+            <a:r>
+              <a:rPr lang="en-US" dirty="0" err="1" smtClean="0"/>
+              <a:t>SQLServer</a:t>
+            </a:r>
+            <a:r>
+              <a:rPr lang="en-US" dirty="0" smtClean="0"/>
+              <a:t> Session Mode</a:t>
+            </a:r>
+            <a:endParaRPr lang="en-US" dirty="0"/>
+          </a:p>
+        </p:txBody>
+      </p:sp>
+      <p:sp>
+        <p:nvSpPr>
+          <p:cNvPr id="3" name="Content Placeholder 2"/>
+          <p:cNvSpPr>
+            <a:spLocks noGrp="1"/>
+          </p:cNvSpPr>
+          <p:nvPr>
+            <p:ph idx="1"/>
+          </p:nvPr>
+        </p:nvSpPr>
+        <p:spPr/>
+        <p:txBody>
+          <a:bodyPr/>
+          <a:lstStyle/>
+          <a:p>
+            <a:pPr marL="342900" lvl="2" indent="-342900"/>
+            <a:r>
+              <a:rPr lang="en-US" sz="2200" b="1" dirty="0" smtClean="0"/>
+              <a:t>Run cmd.exe as Administrator</a:t>
+            </a:r>
+          </a:p>
+          <a:p>
+            <a:pPr marL="342900" lvl="2" indent="-342900"/>
+            <a:r>
+              <a:rPr lang="en-US" sz="2200" i="1" dirty="0" smtClean="0">
+                <a:latin typeface="Consolas" pitchFamily="49" charset="0"/>
+              </a:rPr>
+              <a:t>C:\Windows\Microsoft.NET\Framework\v4.0.30319\aspnet_regsql.exe -</a:t>
+            </a:r>
+            <a:r>
+              <a:rPr lang="en-US" sz="2200" i="1" dirty="0" err="1" smtClean="0">
+                <a:latin typeface="Consolas" pitchFamily="49" charset="0"/>
+              </a:rPr>
+              <a:t>ssadd</a:t>
+            </a:r>
+            <a:r>
+              <a:rPr lang="en-US" sz="2200" i="1" dirty="0" smtClean="0">
+                <a:latin typeface="Consolas" pitchFamily="49" charset="0"/>
+              </a:rPr>
+              <a:t> -</a:t>
+            </a:r>
+            <a:r>
+              <a:rPr lang="en-US" sz="2200" i="1" dirty="0" err="1" smtClean="0">
+                <a:latin typeface="Consolas" pitchFamily="49" charset="0"/>
+              </a:rPr>
+              <a:t>sstype</a:t>
+            </a:r>
+            <a:r>
+              <a:rPr lang="en-US" sz="2200" i="1" dirty="0" smtClean="0">
+                <a:latin typeface="Consolas" pitchFamily="49" charset="0"/>
+              </a:rPr>
+              <a:t> c -d apistate.example.com -S </a:t>
+            </a:r>
+            <a:r>
+              <a:rPr lang="en-US" sz="2200" i="1" dirty="0" err="1" smtClean="0">
+                <a:latin typeface="Consolas" pitchFamily="49" charset="0"/>
+              </a:rPr>
+              <a:t>localhost</a:t>
+            </a:r>
+            <a:r>
+              <a:rPr lang="en-US" sz="2200" i="1" dirty="0" smtClean="0">
+                <a:latin typeface="Consolas" pitchFamily="49" charset="0"/>
+              </a:rPr>
+              <a:t> –E</a:t>
+            </a:r>
+          </a:p>
+        </p:txBody>
+      </p:sp>
+    </p:spTree>
+  </p:cSld>
+  <p:clrMapOvr>
+    <a:masterClrMapping/>
+  </p:clrMapOvr>
+</p:sld>
+</file>
+
+<file path=ppt/slides/slide26.xml><?xml version="1.0" encoding="utf-8"?>
+<p:sld xmlns:a="http://schemas.openxmlformats.org/drawingml/2006/main" xmlns:r="http://schemas.openxmlformats.org/officeDocument/2006/relationships" xmlns:p="http://schemas.openxmlformats.org/presentationml/2006/main">
+  <p:cSld>
+    <p:spTree>
+      <p:nvGrpSpPr>
+        <p:cNvPr id="1" name=""/>
+        <p:cNvGrpSpPr/>
+        <p:nvPr/>
+      </p:nvGrpSpPr>
+      <p:grpSpPr>
+        <a:xfrm>
+          <a:off x="0" y="0"/>
+          <a:ext cx="0" cy="0"/>
+          <a:chOff x="0" y="0"/>
+          <a:chExt cx="0" cy="0"/>
+        </a:xfrm>
+      </p:grpSpPr>
+      <p:sp>
+        <p:nvSpPr>
+          <p:cNvPr id="2" name="Title 1"/>
+          <p:cNvSpPr>
+            <a:spLocks noGrp="1"/>
+          </p:cNvSpPr>
+          <p:nvPr>
+            <p:ph type="title"/>
+          </p:nvPr>
+        </p:nvSpPr>
+        <p:spPr/>
+        <p:txBody>
+          <a:bodyPr/>
+          <a:lstStyle/>
+          <a:p>
+            <a:pPr algn="l"/>
+            <a:r>
+              <a:rPr lang="en-US" dirty="0" smtClean="0"/>
               <a:t>2. Create a Connection String for </a:t>
             </a:r>
             <a:r>
@@ -6541,7 +6654,7 @@
 </p:sld>
 </file>
 
-<file path=ppt/slides/slide26.xml><?xml version="1.0" encoding="utf-8"?>
+<file path=ppt/slides/slide27.xml><?xml version="1.0" encoding="utf-8"?>
 <p:sld xmlns:a="http://schemas.openxmlformats.org/drawingml/2006/main" xmlns:r="http://schemas.openxmlformats.org/officeDocument/2006/relationships" xmlns:p="http://schemas.openxmlformats.org/presentationml/2006/main">
   <p:cSld>
     <p:spTree>
@@ -6791,7 +6904,7 @@
 </p:sld>
 </file>
 
-<file path=ppt/slides/slide27.xml><?xml version="1.0" encoding="utf-8"?>
+<file path=ppt/slides/slide28.xml><?xml version="1.0" encoding="utf-8"?>
 <p:sld xmlns:a="http://schemas.openxmlformats.org/drawingml/2006/main" xmlns:r="http://schemas.openxmlformats.org/officeDocument/2006/relationships" xmlns:p="http://schemas.openxmlformats.org/presentationml/2006/main">
   <p:cSld>
     <p:spTree>
@@ -6842,7 +6955,7 @@
 </p:sld>
 </file>
 
-<file path=ppt/slides/slide28.xml><?xml version="1.0" encoding="utf-8"?>
+<file path=ppt/slides/slide29.xml><?xml version="1.0" encoding="utf-8"?>
 <p:sld xmlns:a="http://schemas.openxmlformats.org/drawingml/2006/main" xmlns:r="http://schemas.openxmlformats.org/officeDocument/2006/relationships" xmlns:p="http://schemas.openxmlformats.org/presentationml/2006/main">
   <p:cSld>
     <p:spTree>
@@ -6959,120 +7072,6 @@
           <a:xfrm>
             <a:off x="1371600" y="2667000"/>
             <a:ext cx="6390640" cy="3220720"/>
-          </a:xfrm>
-          <a:prstGeom prst="rect">
-            <a:avLst/>
-          </a:prstGeom>
-          <a:noFill/>
-          <a:ln w="9525">
-            <a:noFill/>
-            <a:miter lim="800000"/>
-            <a:headEnd/>
-            <a:tailEnd/>
-          </a:ln>
-        </p:spPr>
-      </p:pic>
-    </p:spTree>
-  </p:cSld>
-  <p:clrMapOvr>
-    <a:masterClrMapping/>
-  </p:clrMapOvr>
-</p:sld>
-</file>
-
-<file path=ppt/slides/slide29.xml><?xml version="1.0" encoding="utf-8"?>
-<p:sld xmlns:a="http://schemas.openxmlformats.org/drawingml/2006/main" xmlns:r="http://schemas.openxmlformats.org/officeDocument/2006/relationships" xmlns:p="http://schemas.openxmlformats.org/presentationml/2006/main">
-  <p:cSld>
-    <p:spTree>
-      <p:nvGrpSpPr>
-        <p:cNvPr id="1" name=""/>
-        <p:cNvGrpSpPr/>
-        <p:nvPr/>
-      </p:nvGrpSpPr>
-      <p:grpSpPr>
-        <a:xfrm>
-          <a:off x="0" y="0"/>
-          <a:ext cx="0" cy="0"/>
-          <a:chOff x="0" y="0"/>
-          <a:chExt cx="0" cy="0"/>
-        </a:xfrm>
-      </p:grpSpPr>
-      <p:sp>
-        <p:nvSpPr>
-          <p:cNvPr id="2" name="Title 1"/>
-          <p:cNvSpPr>
-            <a:spLocks noGrp="1"/>
-          </p:cNvSpPr>
-          <p:nvPr>
-            <p:ph type="title"/>
-          </p:nvPr>
-        </p:nvSpPr>
-        <p:spPr/>
-        <p:txBody>
-          <a:bodyPr/>
-          <a:lstStyle/>
-          <a:p>
-            <a:pPr algn="l"/>
-            <a:r>
-              <a:rPr lang="en-US" dirty="0" smtClean="0"/>
-              <a:t>2. Open State Service Firewall Port</a:t>
-            </a:r>
-            <a:endParaRPr lang="en-US" dirty="0"/>
-          </a:p>
-        </p:txBody>
-      </p:sp>
-      <p:sp>
-        <p:nvSpPr>
-          <p:cNvPr id="3" name="Content Placeholder 2"/>
-          <p:cNvSpPr>
-            <a:spLocks noGrp="1"/>
-          </p:cNvSpPr>
-          <p:nvPr>
-            <p:ph idx="1"/>
-          </p:nvPr>
-        </p:nvSpPr>
-        <p:spPr/>
-        <p:txBody>
-          <a:bodyPr/>
-          <a:lstStyle/>
-          <a:p>
-            <a:r>
-              <a:rPr lang="en-US" sz="2200" dirty="0" smtClean="0">
-                <a:latin typeface="+mj-lt"/>
-              </a:rPr>
-              <a:t>Port: </a:t>
-            </a:r>
-            <a:r>
-              <a:rPr lang="en-US" sz="2200" b="1" dirty="0" smtClean="0">
-                <a:latin typeface="+mj-lt"/>
-              </a:rPr>
-              <a:t>42424</a:t>
-            </a:r>
-            <a:endParaRPr lang="en-US" sz="2200" b="1" dirty="0">
-              <a:latin typeface="+mj-lt"/>
-            </a:endParaRPr>
-          </a:p>
-        </p:txBody>
-      </p:sp>
-      <p:pic>
-        <p:nvPicPr>
-          <p:cNvPr id="3074" name="Picture 2"/>
-          <p:cNvPicPr>
-            <a:picLocks noChangeAspect="1" noChangeArrowheads="1"/>
-          </p:cNvPicPr>
-          <p:nvPr/>
-        </p:nvPicPr>
-        <p:blipFill>
-          <a:blip r:embed="rId2" cstate="print"/>
-          <a:srcRect/>
-          <a:stretch>
-            <a:fillRect/>
-          </a:stretch>
-        </p:blipFill>
-        <p:spPr bwMode="auto">
-          <a:xfrm>
-            <a:off x="914400" y="2743200"/>
-            <a:ext cx="7287260" cy="3200400"/>
           </a:xfrm>
           <a:prstGeom prst="rect">
             <a:avLst/>
@@ -7247,6 +7246,120 @@
             <a:pPr algn="l"/>
             <a:r>
               <a:rPr lang="en-US" dirty="0" smtClean="0"/>
+              <a:t>2. Open State Service Firewall Port</a:t>
+            </a:r>
+            <a:endParaRPr lang="en-US" dirty="0"/>
+          </a:p>
+        </p:txBody>
+      </p:sp>
+      <p:sp>
+        <p:nvSpPr>
+          <p:cNvPr id="3" name="Content Placeholder 2"/>
+          <p:cNvSpPr>
+            <a:spLocks noGrp="1"/>
+          </p:cNvSpPr>
+          <p:nvPr>
+            <p:ph idx="1"/>
+          </p:nvPr>
+        </p:nvSpPr>
+        <p:spPr/>
+        <p:txBody>
+          <a:bodyPr/>
+          <a:lstStyle/>
+          <a:p>
+            <a:r>
+              <a:rPr lang="en-US" sz="2200" dirty="0" smtClean="0">
+                <a:latin typeface="+mj-lt"/>
+              </a:rPr>
+              <a:t>Port: </a:t>
+            </a:r>
+            <a:r>
+              <a:rPr lang="en-US" sz="2200" b="1" dirty="0" smtClean="0">
+                <a:latin typeface="+mj-lt"/>
+              </a:rPr>
+              <a:t>42424</a:t>
+            </a:r>
+            <a:endParaRPr lang="en-US" sz="2200" b="1" dirty="0">
+              <a:latin typeface="+mj-lt"/>
+            </a:endParaRPr>
+          </a:p>
+        </p:txBody>
+      </p:sp>
+      <p:pic>
+        <p:nvPicPr>
+          <p:cNvPr id="3074" name="Picture 2"/>
+          <p:cNvPicPr>
+            <a:picLocks noChangeAspect="1" noChangeArrowheads="1"/>
+          </p:cNvPicPr>
+          <p:nvPr/>
+        </p:nvPicPr>
+        <p:blipFill>
+          <a:blip r:embed="rId2" cstate="print"/>
+          <a:srcRect/>
+          <a:stretch>
+            <a:fillRect/>
+          </a:stretch>
+        </p:blipFill>
+        <p:spPr bwMode="auto">
+          <a:xfrm>
+            <a:off x="914400" y="2743200"/>
+            <a:ext cx="7287260" cy="3200400"/>
+          </a:xfrm>
+          <a:prstGeom prst="rect">
+            <a:avLst/>
+          </a:prstGeom>
+          <a:noFill/>
+          <a:ln w="9525">
+            <a:noFill/>
+            <a:miter lim="800000"/>
+            <a:headEnd/>
+            <a:tailEnd/>
+          </a:ln>
+        </p:spPr>
+      </p:pic>
+    </p:spTree>
+  </p:cSld>
+  <p:clrMapOvr>
+    <a:masterClrMapping/>
+  </p:clrMapOvr>
+</p:sld>
+</file>
+
+<file path=ppt/slides/slide31.xml><?xml version="1.0" encoding="utf-8"?>
+<p:sld xmlns:a="http://schemas.openxmlformats.org/drawingml/2006/main" xmlns:r="http://schemas.openxmlformats.org/officeDocument/2006/relationships" xmlns:p="http://schemas.openxmlformats.org/presentationml/2006/main">
+  <p:cSld>
+    <p:spTree>
+      <p:nvGrpSpPr>
+        <p:cNvPr id="1" name=""/>
+        <p:cNvGrpSpPr/>
+        <p:nvPr/>
+      </p:nvGrpSpPr>
+      <p:grpSpPr>
+        <a:xfrm>
+          <a:off x="0" y="0"/>
+          <a:ext cx="0" cy="0"/>
+          <a:chOff x="0" y="0"/>
+          <a:chExt cx="0" cy="0"/>
+        </a:xfrm>
+      </p:grpSpPr>
+      <p:sp>
+        <p:nvSpPr>
+          <p:cNvPr id="2" name="Title 1"/>
+          <p:cNvSpPr>
+            <a:spLocks noGrp="1"/>
+          </p:cNvSpPr>
+          <p:nvPr>
+            <p:ph type="title"/>
+          </p:nvPr>
+        </p:nvSpPr>
+        <p:spPr/>
+        <p:txBody>
+          <a:bodyPr/>
+          <a:lstStyle/>
+          <a:p>
+            <a:pPr algn="l"/>
+            <a:r>
+              <a:rPr lang="en-US" dirty="0" smtClean="0"/>
               <a:t>3. Start Session State Service</a:t>
             </a:r>
             <a:endParaRPr lang="en-US" dirty="0"/>
@@ -7326,7 +7439,7 @@
 </p:sld>
 </file>
 
-<file path=ppt/slides/slide31.xml><?xml version="1.0" encoding="utf-8"?>
+<file path=ppt/slides/slide32.xml><?xml version="1.0" encoding="utf-8"?>
 <p:sld xmlns:a="http://schemas.openxmlformats.org/drawingml/2006/main" xmlns:r="http://schemas.openxmlformats.org/officeDocument/2006/relationships" xmlns:p="http://schemas.openxmlformats.org/presentationml/2006/main">
   <p:cSld>
     <p:spTree>
@@ -7609,7 +7722,7 @@
 </p:sld>
 </file>
 
-<file path=ppt/slides/slide32.xml><?xml version="1.0" encoding="utf-8"?>
+<file path=ppt/slides/slide33.xml><?xml version="1.0" encoding="utf-8"?>
 <p:sld xmlns:a="http://schemas.openxmlformats.org/drawingml/2006/main" xmlns:r="http://schemas.openxmlformats.org/officeDocument/2006/relationships" xmlns:p="http://schemas.openxmlformats.org/presentationml/2006/main">
   <p:cSld>
     <p:spTree>
@@ -7660,7 +7773,7 @@
 </p:sld>
 </file>
 
-<file path=ppt/slides/slide33.xml><?xml version="1.0" encoding="utf-8"?>
+<file path=ppt/slides/slide34.xml><?xml version="1.0" encoding="utf-8"?>
 <p:sld xmlns:a="http://schemas.openxmlformats.org/drawingml/2006/main" xmlns:r="http://schemas.openxmlformats.org/officeDocument/2006/relationships" xmlns:p="http://schemas.openxmlformats.org/presentationml/2006/main">
   <p:cSld>
     <p:spTree>
@@ -7786,7 +7899,7 @@
 </p:sld>
 </file>
 
-<file path=ppt/slides/slide34.xml><?xml version="1.0" encoding="utf-8"?>
+<file path=ppt/slides/slide35.xml><?xml version="1.0" encoding="utf-8"?>
 <p:sld xmlns:a="http://schemas.openxmlformats.org/drawingml/2006/main" xmlns:r="http://schemas.openxmlformats.org/officeDocument/2006/relationships" xmlns:p="http://schemas.openxmlformats.org/presentationml/2006/main">
   <p:cSld>
     <p:spTree>
@@ -7837,7 +7950,7 @@
 </p:sld>
 </file>
 
-<file path=ppt/slides/slide35.xml><?xml version="1.0" encoding="utf-8"?>
+<file path=ppt/slides/slide36.xml><?xml version="1.0" encoding="utf-8"?>
 <p:sld xmlns:a="http://schemas.openxmlformats.org/drawingml/2006/main" xmlns:r="http://schemas.openxmlformats.org/officeDocument/2006/relationships" xmlns:p="http://schemas.openxmlformats.org/presentationml/2006/main">
   <p:cSld>
     <p:spTree>
@@ -7942,7 +8055,7 @@
 </p:sld>
 </file>
 
-<file path=ppt/slides/slide36.xml><?xml version="1.0" encoding="utf-8"?>
+<file path=ppt/slides/slide37.xml><?xml version="1.0" encoding="utf-8"?>
 <p:sld xmlns:a="http://schemas.openxmlformats.org/drawingml/2006/main" xmlns:r="http://schemas.openxmlformats.org/officeDocument/2006/relationships" xmlns:p="http://schemas.openxmlformats.org/presentationml/2006/main">
   <p:cSld>
     <p:spTree>
@@ -7993,7 +8106,7 @@
 </p:sld>
 </file>
 
-<file path=ppt/slides/slide37.xml><?xml version="1.0" encoding="utf-8"?>
+<file path=ppt/slides/slide38.xml><?xml version="1.0" encoding="utf-8"?>
 <p:sld xmlns:a="http://schemas.openxmlformats.org/drawingml/2006/main" xmlns:r="http://schemas.openxmlformats.org/officeDocument/2006/relationships" xmlns:p="http://schemas.openxmlformats.org/presentationml/2006/main">
   <p:cSld>
     <p:spTree>
@@ -8159,7 +8272,7 @@
 </p:sld>
 </file>
 
-<file path=ppt/slides/slide38.xml><?xml version="1.0" encoding="utf-8"?>
+<file path=ppt/slides/slide39.xml><?xml version="1.0" encoding="utf-8"?>
 <p:sld xmlns:a="http://schemas.openxmlformats.org/drawingml/2006/main" xmlns:r="http://schemas.openxmlformats.org/officeDocument/2006/relationships" xmlns:p="http://schemas.openxmlformats.org/presentationml/2006/main">
   <p:cSld>
     <p:spTree>
@@ -8257,192 +8370,6 @@
             <a:avLst/>
           </a:prstGeom>
           <a:noFill/>
-        </p:spPr>
-      </p:pic>
-    </p:spTree>
-  </p:cSld>
-  <p:clrMapOvr>
-    <a:masterClrMapping/>
-  </p:clrMapOvr>
-</p:sld>
-</file>
-
-<file path=ppt/slides/slide39.xml><?xml version="1.0" encoding="utf-8"?>
-<p:sld xmlns:a="http://schemas.openxmlformats.org/drawingml/2006/main" xmlns:r="http://schemas.openxmlformats.org/officeDocument/2006/relationships" xmlns:p="http://schemas.openxmlformats.org/presentationml/2006/main">
-  <p:cSld>
-    <p:spTree>
-      <p:nvGrpSpPr>
-        <p:cNvPr id="1" name=""/>
-        <p:cNvGrpSpPr/>
-        <p:nvPr/>
-      </p:nvGrpSpPr>
-      <p:grpSpPr>
-        <a:xfrm>
-          <a:off x="0" y="0"/>
-          <a:ext cx="0" cy="0"/>
-          <a:chOff x="0" y="0"/>
-          <a:chExt cx="0" cy="0"/>
-        </a:xfrm>
-      </p:grpSpPr>
-      <p:sp>
-        <p:nvSpPr>
-          <p:cNvPr id="2" name="Title 1"/>
-          <p:cNvSpPr>
-            <a:spLocks noGrp="1"/>
-          </p:cNvSpPr>
-          <p:nvPr>
-            <p:ph type="title"/>
-          </p:nvPr>
-        </p:nvSpPr>
-        <p:spPr/>
-        <p:txBody>
-          <a:bodyPr/>
-          <a:lstStyle/>
-          <a:p>
-            <a:r>
-              <a:rPr lang="en-US" dirty="0" smtClean="0"/>
-              <a:t>Scalable Shared Databases</a:t>
-            </a:r>
-            <a:endParaRPr lang="en-US" dirty="0"/>
-          </a:p>
-        </p:txBody>
-      </p:sp>
-      <p:sp>
-        <p:nvSpPr>
-          <p:cNvPr id="3" name="Content Placeholder 2"/>
-          <p:cNvSpPr>
-            <a:spLocks noGrp="1"/>
-          </p:cNvSpPr>
-          <p:nvPr>
-            <p:ph idx="1"/>
-          </p:nvPr>
-        </p:nvSpPr>
-        <p:spPr/>
-        <p:txBody>
-          <a:bodyPr/>
-          <a:lstStyle/>
-          <a:p>
-            <a:pPr marL="457200" indent="-457200">
-              <a:buFont typeface="Arial" pitchFamily="34" charset="0"/>
-              <a:buChar char="•"/>
-            </a:pPr>
-            <a:r>
-              <a:rPr lang="en-US" sz="2000" dirty="0" smtClean="0"/>
-              <a:t>You create </a:t>
-            </a:r>
-            <a:r>
-              <a:rPr lang="en-US" sz="2000" i="1" dirty="0" smtClean="0">
-                <a:solidFill>
-                  <a:srgbClr val="C00000"/>
-                </a:solidFill>
-              </a:rPr>
-              <a:t>a database</a:t>
-            </a:r>
-            <a:r>
-              <a:rPr lang="en-US" sz="2000" dirty="0" smtClean="0"/>
-              <a:t> on a </a:t>
-            </a:r>
-            <a:r>
-              <a:rPr lang="en-US" sz="2000" i="1" dirty="0" smtClean="0">
-                <a:solidFill>
-                  <a:srgbClr val="C00000"/>
-                </a:solidFill>
-              </a:rPr>
-              <a:t>storage area network (SAN)</a:t>
-            </a:r>
-            <a:r>
-              <a:rPr lang="en-US" sz="2000" dirty="0" smtClean="0"/>
-              <a:t>, and up to eight SQL Server instances running on different servers attach to the database, and start handling queries.</a:t>
-            </a:r>
-          </a:p>
-          <a:p>
-            <a:pPr marL="457200" indent="-457200">
-              <a:buFont typeface="Arial" pitchFamily="34" charset="0"/>
-              <a:buChar char="•"/>
-            </a:pPr>
-            <a:r>
-              <a:rPr lang="en-US" sz="2000" dirty="0" smtClean="0"/>
-              <a:t>Scalable Shared Databases work only if the database is attached as a </a:t>
-            </a:r>
-            <a:r>
-              <a:rPr lang="en-US" sz="2000" i="1" dirty="0" smtClean="0">
-                <a:solidFill>
-                  <a:srgbClr val="C00000"/>
-                </a:solidFill>
-              </a:rPr>
-              <a:t>Read Only</a:t>
-            </a:r>
-            <a:r>
-              <a:rPr lang="en-US" sz="2000" dirty="0" smtClean="0"/>
-              <a:t> database.</a:t>
-            </a:r>
-          </a:p>
-          <a:p>
-            <a:pPr marL="457200" indent="-457200">
-              <a:buFont typeface="Arial" pitchFamily="34" charset="0"/>
-              <a:buChar char="•"/>
-            </a:pPr>
-            <a:r>
-              <a:rPr lang="en-US" sz="2000" dirty="0" smtClean="0"/>
-              <a:t>Scalable Shared Databases are great for data warehouses or reporting databases, but they are </a:t>
-            </a:r>
-            <a:r>
-              <a:rPr lang="en-US" sz="2000" i="1" dirty="0" smtClean="0">
-                <a:solidFill>
-                  <a:srgbClr val="C00000"/>
-                </a:solidFill>
-              </a:rPr>
-              <a:t>not suitable</a:t>
-            </a:r>
-            <a:r>
-              <a:rPr lang="en-US" sz="2000" dirty="0" smtClean="0"/>
-              <a:t> for applications that </a:t>
-            </a:r>
-            <a:r>
-              <a:rPr lang="en-US" sz="2000" u="sng" dirty="0" smtClean="0"/>
-              <a:t>update</a:t>
-            </a:r>
-            <a:r>
-              <a:rPr lang="en-US" sz="2000" dirty="0" smtClean="0"/>
-              <a:t> data.</a:t>
-            </a:r>
-          </a:p>
-          <a:p>
-            <a:endParaRPr lang="en-US" sz="2000" dirty="0"/>
-          </a:p>
-        </p:txBody>
-      </p:sp>
-      <p:pic>
-        <p:nvPicPr>
-          <p:cNvPr id="4" name="Picture 2"/>
-          <p:cNvPicPr>
-            <a:picLocks noChangeAspect="1" noChangeArrowheads="1"/>
-          </p:cNvPicPr>
-          <p:nvPr/>
-        </p:nvPicPr>
-        <p:blipFill>
-          <a:blip r:embed="rId2" cstate="print"/>
-          <a:srcRect/>
-          <a:stretch>
-            <a:fillRect/>
-          </a:stretch>
-        </p:blipFill>
-        <p:spPr bwMode="auto">
-          <a:xfrm>
-            <a:off x="2057400" y="4114800"/>
-            <a:ext cx="5314950" cy="2428875"/>
-          </a:xfrm>
-          <a:prstGeom prst="rect">
-            <a:avLst/>
-          </a:prstGeom>
-          <a:noFill/>
-          <a:ln w="9525">
-            <a:noFill/>
-            <a:miter lim="800000"/>
-            <a:headEnd/>
-            <a:tailEnd/>
-          </a:ln>
-          <a:effectLst/>
         </p:spPr>
       </p:pic>
     </p:spTree>
@@ -8658,6 +8585,192 @@
           <a:lstStyle/>
           <a:p>
             <a:r>
+              <a:rPr lang="en-US" dirty="0" smtClean="0"/>
+              <a:t>Scalable Shared Databases</a:t>
+            </a:r>
+            <a:endParaRPr lang="en-US" dirty="0"/>
+          </a:p>
+        </p:txBody>
+      </p:sp>
+      <p:sp>
+        <p:nvSpPr>
+          <p:cNvPr id="3" name="Content Placeholder 2"/>
+          <p:cNvSpPr>
+            <a:spLocks noGrp="1"/>
+          </p:cNvSpPr>
+          <p:nvPr>
+            <p:ph idx="1"/>
+          </p:nvPr>
+        </p:nvSpPr>
+        <p:spPr/>
+        <p:txBody>
+          <a:bodyPr/>
+          <a:lstStyle/>
+          <a:p>
+            <a:pPr marL="457200" indent="-457200">
+              <a:buFont typeface="Arial" pitchFamily="34" charset="0"/>
+              <a:buChar char="•"/>
+            </a:pPr>
+            <a:r>
+              <a:rPr lang="en-US" sz="2000" dirty="0" smtClean="0"/>
+              <a:t>You create </a:t>
+            </a:r>
+            <a:r>
+              <a:rPr lang="en-US" sz="2000" i="1" dirty="0" smtClean="0">
+                <a:solidFill>
+                  <a:srgbClr val="C00000"/>
+                </a:solidFill>
+              </a:rPr>
+              <a:t>a database</a:t>
+            </a:r>
+            <a:r>
+              <a:rPr lang="en-US" sz="2000" dirty="0" smtClean="0"/>
+              <a:t> on a </a:t>
+            </a:r>
+            <a:r>
+              <a:rPr lang="en-US" sz="2000" i="1" dirty="0" smtClean="0">
+                <a:solidFill>
+                  <a:srgbClr val="C00000"/>
+                </a:solidFill>
+              </a:rPr>
+              <a:t>storage area network (SAN)</a:t>
+            </a:r>
+            <a:r>
+              <a:rPr lang="en-US" sz="2000" dirty="0" smtClean="0"/>
+              <a:t>, and up to eight SQL Server instances running on different servers attach to the database, and start handling queries.</a:t>
+            </a:r>
+          </a:p>
+          <a:p>
+            <a:pPr marL="457200" indent="-457200">
+              <a:buFont typeface="Arial" pitchFamily="34" charset="0"/>
+              <a:buChar char="•"/>
+            </a:pPr>
+            <a:r>
+              <a:rPr lang="en-US" sz="2000" dirty="0" smtClean="0"/>
+              <a:t>Scalable Shared Databases work only if the database is attached as a </a:t>
+            </a:r>
+            <a:r>
+              <a:rPr lang="en-US" sz="2000" i="1" dirty="0" smtClean="0">
+                <a:solidFill>
+                  <a:srgbClr val="C00000"/>
+                </a:solidFill>
+              </a:rPr>
+              <a:t>Read Only</a:t>
+            </a:r>
+            <a:r>
+              <a:rPr lang="en-US" sz="2000" dirty="0" smtClean="0"/>
+              <a:t> database.</a:t>
+            </a:r>
+          </a:p>
+          <a:p>
+            <a:pPr marL="457200" indent="-457200">
+              <a:buFont typeface="Arial" pitchFamily="34" charset="0"/>
+              <a:buChar char="•"/>
+            </a:pPr>
+            <a:r>
+              <a:rPr lang="en-US" sz="2000" dirty="0" smtClean="0"/>
+              <a:t>Scalable Shared Databases are great for data warehouses or reporting databases, but they are </a:t>
+            </a:r>
+            <a:r>
+              <a:rPr lang="en-US" sz="2000" i="1" dirty="0" smtClean="0">
+                <a:solidFill>
+                  <a:srgbClr val="C00000"/>
+                </a:solidFill>
+              </a:rPr>
+              <a:t>not suitable</a:t>
+            </a:r>
+            <a:r>
+              <a:rPr lang="en-US" sz="2000" dirty="0" smtClean="0"/>
+              <a:t> for applications that </a:t>
+            </a:r>
+            <a:r>
+              <a:rPr lang="en-US" sz="2000" u="sng" dirty="0" smtClean="0"/>
+              <a:t>update</a:t>
+            </a:r>
+            <a:r>
+              <a:rPr lang="en-US" sz="2000" dirty="0" smtClean="0"/>
+              <a:t> data.</a:t>
+            </a:r>
+          </a:p>
+          <a:p>
+            <a:endParaRPr lang="en-US" sz="2000" dirty="0"/>
+          </a:p>
+        </p:txBody>
+      </p:sp>
+      <p:pic>
+        <p:nvPicPr>
+          <p:cNvPr id="4" name="Picture 2"/>
+          <p:cNvPicPr>
+            <a:picLocks noChangeAspect="1" noChangeArrowheads="1"/>
+          </p:cNvPicPr>
+          <p:nvPr/>
+        </p:nvPicPr>
+        <p:blipFill>
+          <a:blip r:embed="rId2" cstate="print"/>
+          <a:srcRect/>
+          <a:stretch>
+            <a:fillRect/>
+          </a:stretch>
+        </p:blipFill>
+        <p:spPr bwMode="auto">
+          <a:xfrm>
+            <a:off x="2057400" y="4114800"/>
+            <a:ext cx="5314950" cy="2428875"/>
+          </a:xfrm>
+          <a:prstGeom prst="rect">
+            <a:avLst/>
+          </a:prstGeom>
+          <a:noFill/>
+          <a:ln w="9525">
+            <a:noFill/>
+            <a:miter lim="800000"/>
+            <a:headEnd/>
+            <a:tailEnd/>
+          </a:ln>
+          <a:effectLst/>
+        </p:spPr>
+      </p:pic>
+    </p:spTree>
+  </p:cSld>
+  <p:clrMapOvr>
+    <a:masterClrMapping/>
+  </p:clrMapOvr>
+</p:sld>
+</file>
+
+<file path=ppt/slides/slide41.xml><?xml version="1.0" encoding="utf-8"?>
+<p:sld xmlns:a="http://schemas.openxmlformats.org/drawingml/2006/main" xmlns:r="http://schemas.openxmlformats.org/officeDocument/2006/relationships" xmlns:p="http://schemas.openxmlformats.org/presentationml/2006/main">
+  <p:cSld>
+    <p:spTree>
+      <p:nvGrpSpPr>
+        <p:cNvPr id="1" name=""/>
+        <p:cNvGrpSpPr/>
+        <p:nvPr/>
+      </p:nvGrpSpPr>
+      <p:grpSpPr>
+        <a:xfrm>
+          <a:off x="0" y="0"/>
+          <a:ext cx="0" cy="0"/>
+          <a:chOff x="0" y="0"/>
+          <a:chExt cx="0" cy="0"/>
+        </a:xfrm>
+      </p:grpSpPr>
+      <p:sp>
+        <p:nvSpPr>
+          <p:cNvPr id="2" name="Title 1"/>
+          <p:cNvSpPr>
+            <a:spLocks noGrp="1"/>
+          </p:cNvSpPr>
+          <p:nvPr>
+            <p:ph type="title"/>
+          </p:nvPr>
+        </p:nvSpPr>
+        <p:spPr/>
+        <p:txBody>
+          <a:bodyPr/>
+          <a:lstStyle/>
+          <a:p>
+            <a:r>
               <a:rPr lang="en-US" sz="4000" dirty="0" smtClean="0"/>
               <a:t>Linked Servers and Distributed Queries</a:t>
             </a:r>
@@ -8791,7 +8904,7 @@
 </p:sld>
 </file>
 
-<file path=ppt/slides/slide41.xml><?xml version="1.0" encoding="utf-8"?>
+<file path=ppt/slides/slide42.xml><?xml version="1.0" encoding="utf-8"?>
 <p:sld xmlns:a="http://schemas.openxmlformats.org/drawingml/2006/main" xmlns:r="http://schemas.openxmlformats.org/officeDocument/2006/relationships" xmlns:p="http://schemas.openxmlformats.org/presentationml/2006/main">
   <p:cSld>
     <p:spTree>
@@ -8966,7 +9079,7 @@
 </p:sld>
 </file>
 
-<file path=ppt/slides/slide42.xml><?xml version="1.0" encoding="utf-8"?>
+<file path=ppt/slides/slide43.xml><?xml version="1.0" encoding="utf-8"?>
 <p:sld xmlns:a="http://schemas.openxmlformats.org/drawingml/2006/main" xmlns:r="http://schemas.openxmlformats.org/officeDocument/2006/relationships" xmlns:p="http://schemas.openxmlformats.org/presentationml/2006/main">
   <p:cSld>
     <p:spTree>
@@ -9278,7 +9391,7 @@
 </p:sld>
 </file>
 
-<file path=ppt/slides/slide43.xml><?xml version="1.0" encoding="utf-8"?>
+<file path=ppt/slides/slide44.xml><?xml version="1.0" encoding="utf-8"?>
 <p:sld xmlns:a="http://schemas.openxmlformats.org/drawingml/2006/main" xmlns:r="http://schemas.openxmlformats.org/officeDocument/2006/relationships" xmlns:p="http://schemas.openxmlformats.org/presentationml/2006/main">
   <p:cSld>
     <p:spTree>
@@ -9484,7 +9597,7 @@
 </p:sld>
 </file>
 
-<file path=ppt/slides/slide44.xml><?xml version="1.0" encoding="utf-8"?>
+<file path=ppt/slides/slide45.xml><?xml version="1.0" encoding="utf-8"?>
 <p:sld xmlns:a="http://schemas.openxmlformats.org/drawingml/2006/main" xmlns:r="http://schemas.openxmlformats.org/officeDocument/2006/relationships" xmlns:p="http://schemas.openxmlformats.org/presentationml/2006/main">
   <p:cSld>
     <p:spTree>
@@ -9614,7 +9727,7 @@
 </p:sld>
 </file>
 
-<file path=ppt/slides/slide45.xml><?xml version="1.0" encoding="utf-8"?>
+<file path=ppt/slides/slide46.xml><?xml version="1.0" encoding="utf-8"?>
 <p:sld xmlns:a="http://schemas.openxmlformats.org/drawingml/2006/main" xmlns:r="http://schemas.openxmlformats.org/officeDocument/2006/relationships" xmlns:p="http://schemas.openxmlformats.org/presentationml/2006/main">
   <p:cSld>
     <p:spTree>
@@ -9731,7 +9844,7 @@
 </p:sld>
 </file>
 
-<file path=ppt/slides/slide46.xml><?xml version="1.0" encoding="utf-8"?>
+<file path=ppt/slides/slide47.xml><?xml version="1.0" encoding="utf-8"?>
 <p:sld xmlns:a="http://schemas.openxmlformats.org/drawingml/2006/main" xmlns:r="http://schemas.openxmlformats.org/officeDocument/2006/relationships" xmlns:p="http://schemas.openxmlformats.org/presentationml/2006/main">
   <p:cSld>
     <p:spTree>
@@ -9847,7 +9960,7 @@
 </p:sld>
 </file>
 
-<file path=ppt/slides/slide47.xml><?xml version="1.0" encoding="utf-8"?>
+<file path=ppt/slides/slide48.xml><?xml version="1.0" encoding="utf-8"?>
 <p:sld xmlns:a="http://schemas.openxmlformats.org/drawingml/2006/main" xmlns:r="http://schemas.openxmlformats.org/officeDocument/2006/relationships" xmlns:p="http://schemas.openxmlformats.org/presentationml/2006/main">
   <p:cSld>
     <p:spTree>
@@ -10021,7 +10134,7 @@
 </p:sld>
 </file>
 
-<file path=ppt/slides/slide48.xml><?xml version="1.0" encoding="utf-8"?>
+<file path=ppt/slides/slide49.xml><?xml version="1.0" encoding="utf-8"?>
 <p:sld xmlns:a="http://schemas.openxmlformats.org/drawingml/2006/main" xmlns:r="http://schemas.openxmlformats.org/officeDocument/2006/relationships" xmlns:p="http://schemas.openxmlformats.org/presentationml/2006/main">
   <p:cSld>
     <p:spTree>

--- a/Microservices/07.1. Scalability.pptx
+++ b/Microservices/07.1. Scalability.pptx
@@ -5,7 +5,7 @@
     <p:sldMasterId id="2147483708" r:id="rId1"/>
   </p:sldMasterIdLst>
   <p:notesMasterIdLst>
-    <p:notesMasterId r:id="rId51"/>
+    <p:notesMasterId r:id="rId52"/>
   </p:notesMasterIdLst>
   <p:sldIdLst>
     <p:sldId id="670" r:id="rId2"/>
@@ -27,36 +27,37 @@
     <p:sldId id="757" r:id="rId18"/>
     <p:sldId id="758" r:id="rId19"/>
     <p:sldId id="759" r:id="rId20"/>
-    <p:sldId id="752" r:id="rId21"/>
-    <p:sldId id="717" r:id="rId22"/>
-    <p:sldId id="724" r:id="rId23"/>
-    <p:sldId id="740" r:id="rId24"/>
-    <p:sldId id="741" r:id="rId25"/>
-    <p:sldId id="742" r:id="rId26"/>
-    <p:sldId id="743" r:id="rId27"/>
-    <p:sldId id="744" r:id="rId28"/>
-    <p:sldId id="745" r:id="rId29"/>
-    <p:sldId id="746" r:id="rId30"/>
-    <p:sldId id="747" r:id="rId31"/>
-    <p:sldId id="748" r:id="rId32"/>
-    <p:sldId id="749" r:id="rId33"/>
-    <p:sldId id="736" r:id="rId34"/>
-    <p:sldId id="668" r:id="rId35"/>
-    <p:sldId id="739" r:id="rId36"/>
-    <p:sldId id="669" r:id="rId37"/>
-    <p:sldId id="636" r:id="rId38"/>
-    <p:sldId id="750" r:id="rId39"/>
-    <p:sldId id="730" r:id="rId40"/>
-    <p:sldId id="726" r:id="rId41"/>
-    <p:sldId id="729" r:id="rId42"/>
-    <p:sldId id="731" r:id="rId43"/>
-    <p:sldId id="621" r:id="rId44"/>
-    <p:sldId id="732" r:id="rId45"/>
-    <p:sldId id="734" r:id="rId46"/>
-    <p:sldId id="735" r:id="rId47"/>
-    <p:sldId id="733" r:id="rId48"/>
-    <p:sldId id="624" r:id="rId49"/>
-    <p:sldId id="516" r:id="rId50"/>
+    <p:sldId id="760" r:id="rId21"/>
+    <p:sldId id="752" r:id="rId22"/>
+    <p:sldId id="717" r:id="rId23"/>
+    <p:sldId id="724" r:id="rId24"/>
+    <p:sldId id="740" r:id="rId25"/>
+    <p:sldId id="741" r:id="rId26"/>
+    <p:sldId id="742" r:id="rId27"/>
+    <p:sldId id="743" r:id="rId28"/>
+    <p:sldId id="744" r:id="rId29"/>
+    <p:sldId id="745" r:id="rId30"/>
+    <p:sldId id="746" r:id="rId31"/>
+    <p:sldId id="747" r:id="rId32"/>
+    <p:sldId id="748" r:id="rId33"/>
+    <p:sldId id="749" r:id="rId34"/>
+    <p:sldId id="736" r:id="rId35"/>
+    <p:sldId id="668" r:id="rId36"/>
+    <p:sldId id="739" r:id="rId37"/>
+    <p:sldId id="669" r:id="rId38"/>
+    <p:sldId id="636" r:id="rId39"/>
+    <p:sldId id="750" r:id="rId40"/>
+    <p:sldId id="730" r:id="rId41"/>
+    <p:sldId id="726" r:id="rId42"/>
+    <p:sldId id="729" r:id="rId43"/>
+    <p:sldId id="731" r:id="rId44"/>
+    <p:sldId id="621" r:id="rId45"/>
+    <p:sldId id="732" r:id="rId46"/>
+    <p:sldId id="734" r:id="rId47"/>
+    <p:sldId id="735" r:id="rId48"/>
+    <p:sldId id="733" r:id="rId49"/>
+    <p:sldId id="624" r:id="rId50"/>
+    <p:sldId id="516" r:id="rId51"/>
   </p:sldIdLst>
   <p:sldSz cx="9144000" cy="6858000" type="screen4x3"/>
   <p:notesSz cx="6858000" cy="9144000"/>
@@ -5452,32 +5453,171 @@
           <a:chExt cx="0" cy="0"/>
         </a:xfrm>
       </p:grpSpPr>
-      <p:pic>
-        <p:nvPicPr>
-          <p:cNvPr id="4" name="Picture 2" descr="https://lh3.ggpht.com/1IfZLL2QDSjZ0wS7sUhaMlsAOS8BBzdR3wZ1WawgRn7KZAM8nEVZYMOUM-lqQb0ikIzp=w300"/>
-          <p:cNvPicPr>
-            <a:picLocks noChangeAspect="1" noChangeArrowheads="1"/>
-          </p:cNvPicPr>
-          <p:nvPr/>
-        </p:nvPicPr>
-        <p:blipFill>
-          <a:blip r:embed="rId2" cstate="print"/>
-          <a:srcRect/>
-          <a:stretch>
-            <a:fillRect/>
-          </a:stretch>
-        </p:blipFill>
-        <p:spPr bwMode="auto">
-          <a:xfrm>
-            <a:off x="3276600" y="1905000"/>
-            <a:ext cx="2857500" cy="2857500"/>
-          </a:xfrm>
-          <a:prstGeom prst="rect">
-            <a:avLst/>
-          </a:prstGeom>
-          <a:noFill/>
-        </p:spPr>
-      </p:pic>
+      <p:sp>
+        <p:nvSpPr>
+          <p:cNvPr id="2" name="Title 1"/>
+          <p:cNvSpPr>
+            <a:spLocks noGrp="1"/>
+          </p:cNvSpPr>
+          <p:nvPr>
+            <p:ph type="title"/>
+          </p:nvPr>
+        </p:nvSpPr>
+        <p:spPr/>
+        <p:txBody>
+          <a:bodyPr/>
+          <a:lstStyle/>
+          <a:p>
+            <a:pPr algn="l"/>
+            <a:r>
+              <a:rPr lang="en-US" dirty="0" smtClean="0"/>
+              <a:t>8</a:t>
+            </a:r>
+            <a:r>
+              <a:rPr lang="en-US" dirty="0" smtClean="0"/>
+              <a:t>. Understand PHP-FPM</a:t>
+            </a:r>
+            <a:endParaRPr lang="en-US" dirty="0"/>
+          </a:p>
+        </p:txBody>
+      </p:sp>
+      <p:sp>
+        <p:nvSpPr>
+          <p:cNvPr id="3" name="Content Placeholder 2"/>
+          <p:cNvSpPr>
+            <a:spLocks noGrp="1"/>
+          </p:cNvSpPr>
+          <p:nvPr>
+            <p:ph idx="1"/>
+          </p:nvPr>
+        </p:nvSpPr>
+        <p:spPr/>
+        <p:txBody>
+          <a:bodyPr/>
+          <a:lstStyle/>
+          <a:p>
+            <a:r>
+              <a:rPr lang="en-US" sz="2400" dirty="0" smtClean="0"/>
+              <a:t>The process manager is a feature of PHP-FPM (</a:t>
+            </a:r>
+            <a:r>
+              <a:rPr lang="en-US" sz="2400" dirty="0" err="1" smtClean="0"/>
+              <a:t>FastCGI</a:t>
+            </a:r>
+            <a:r>
+              <a:rPr lang="en-US" sz="2400" dirty="0" smtClean="0"/>
+              <a:t> Process Manager), which is part of PHP </a:t>
+            </a:r>
+            <a:r>
+              <a:rPr lang="en-US" sz="2400" dirty="0" smtClean="0"/>
+              <a:t>itself.</a:t>
+            </a:r>
+          </a:p>
+          <a:p>
+            <a:r>
+              <a:rPr lang="en-US" sz="2400" dirty="0" smtClean="0"/>
+              <a:t>PHP-FPM decides "I want to run 5 </a:t>
+            </a:r>
+            <a:r>
+              <a:rPr lang="en-US" sz="2400" dirty="0" smtClean="0"/>
+              <a:t>site </a:t>
+            </a:r>
+            <a:r>
+              <a:rPr lang="en-US" sz="2400" dirty="0" smtClean="0"/>
+              <a:t>workers" (pm/</a:t>
+            </a:r>
+            <a:r>
+              <a:rPr lang="en-US" sz="2400" dirty="0" err="1" smtClean="0"/>
+              <a:t>max_children</a:t>
+            </a:r>
+            <a:r>
+              <a:rPr lang="en-US" sz="2400" dirty="0" smtClean="0"/>
+              <a:t>). It uses ordinary OS calls (fork) to create them — but the policy (how many, when) </a:t>
+            </a:r>
+            <a:r>
+              <a:rPr lang="en-US" sz="2400" dirty="0" smtClean="0"/>
+              <a:t>is </a:t>
+            </a:r>
+            <a:r>
+              <a:rPr lang="en-US" sz="2400" dirty="0" smtClean="0"/>
+              <a:t>entirely PHP's</a:t>
+            </a:r>
+            <a:r>
+              <a:rPr lang="en-US" sz="2400" dirty="0" smtClean="0"/>
+              <a:t>.</a:t>
+            </a:r>
+          </a:p>
+          <a:p>
+            <a:r>
+              <a:rPr lang="en-US" sz="2400" dirty="0" err="1" smtClean="0"/>
+              <a:t>systemd</a:t>
+            </a:r>
+            <a:r>
+              <a:rPr lang="en-US" sz="2400" dirty="0" smtClean="0"/>
+              <a:t> launches the FPM master as a service and, with our proposed </a:t>
+            </a:r>
+            <a:r>
+              <a:rPr lang="en-US" sz="2400" dirty="0" err="1" smtClean="0"/>
+              <a:t>MemoryMax</a:t>
+            </a:r>
+            <a:r>
+              <a:rPr lang="en-US" sz="2400" dirty="0" smtClean="0"/>
+              <a:t>=2000M</a:t>
+            </a:r>
+            <a:r>
+              <a:rPr lang="en-US" sz="2400" dirty="0" smtClean="0"/>
+              <a:t>, wraps all its workers in a </a:t>
+            </a:r>
+            <a:r>
+              <a:rPr lang="en-US" sz="2400" dirty="0" err="1" smtClean="0"/>
+              <a:t>cgroup</a:t>
+            </a:r>
+            <a:r>
+              <a:rPr lang="en-US" sz="2400" dirty="0" smtClean="0"/>
+              <a:t> — a kernel memory </a:t>
+            </a:r>
+            <a:r>
+              <a:rPr lang="en-US" sz="2400" dirty="0" smtClean="0"/>
+              <a:t>boundary.</a:t>
+            </a:r>
+          </a:p>
+          <a:p>
+            <a:r>
+              <a:rPr lang="en-US" sz="2400" dirty="0" smtClean="0"/>
+              <a:t>The kernel doesn't </a:t>
+            </a:r>
+            <a:r>
+              <a:rPr lang="en-US" sz="2400" dirty="0" smtClean="0"/>
+              <a:t>know or care about "dynamic </a:t>
+            </a:r>
+            <a:r>
+              <a:rPr lang="en-US" sz="2400" dirty="0" err="1" smtClean="0"/>
+              <a:t>vs</a:t>
+            </a:r>
+            <a:r>
+              <a:rPr lang="en-US" sz="2400" dirty="0" smtClean="0"/>
+              <a:t> </a:t>
+            </a:r>
+            <a:r>
+              <a:rPr lang="en-US" sz="2400" dirty="0" err="1" smtClean="0"/>
+              <a:t>ondemand</a:t>
+            </a:r>
+            <a:r>
+              <a:rPr lang="en-US" sz="2400" dirty="0" smtClean="0"/>
+              <a:t>"; it just enforces "this group of processes can't exceed </a:t>
+            </a:r>
+            <a:r>
+              <a:rPr lang="en-US" sz="2400" dirty="0" smtClean="0"/>
+              <a:t>2.0 </a:t>
+            </a:r>
+            <a:r>
+              <a:rPr lang="en-US" sz="2400" dirty="0" smtClean="0"/>
+              <a:t>GB."</a:t>
+            </a:r>
+            <a:endParaRPr lang="en-US" sz="2400" dirty="0"/>
+          </a:p>
+        </p:txBody>
+      </p:sp>
     </p:spTree>
   </p:cSld>
   <p:clrMapOvr>
@@ -5487,358 +5627,6 @@
 </file>
 
 <file path=ppt/slides/slide21.xml><?xml version="1.0" encoding="utf-8"?>
-<p:sld xmlns:a="http://schemas.openxmlformats.org/drawingml/2006/main" xmlns:r="http://schemas.openxmlformats.org/officeDocument/2006/relationships" xmlns:p="http://schemas.openxmlformats.org/presentationml/2006/main">
-  <p:cSld>
-    <p:spTree>
-      <p:nvGrpSpPr>
-        <p:cNvPr id="1" name=""/>
-        <p:cNvGrpSpPr/>
-        <p:nvPr/>
-      </p:nvGrpSpPr>
-      <p:grpSpPr>
-        <a:xfrm>
-          <a:off x="0" y="0"/>
-          <a:ext cx="0" cy="0"/>
-          <a:chOff x="0" y="0"/>
-          <a:chExt cx="0" cy="0"/>
-        </a:xfrm>
-      </p:grpSpPr>
-      <p:sp>
-        <p:nvSpPr>
-          <p:cNvPr id="2" name="Title 1"/>
-          <p:cNvSpPr>
-            <a:spLocks noGrp="1"/>
-          </p:cNvSpPr>
-          <p:nvPr>
-            <p:ph type="title"/>
-          </p:nvPr>
-        </p:nvSpPr>
-        <p:spPr/>
-        <p:txBody>
-          <a:bodyPr/>
-          <a:lstStyle/>
-          <a:p>
-            <a:r>
-              <a:rPr lang="en-US" dirty="0" smtClean="0"/>
-              <a:t>Scaling Out Guidelines (I) [2]</a:t>
-            </a:r>
-            <a:endParaRPr lang="en-US" dirty="0"/>
-          </a:p>
-        </p:txBody>
-      </p:sp>
-      <p:sp>
-        <p:nvSpPr>
-          <p:cNvPr id="3" name="Content Placeholder 2"/>
-          <p:cNvSpPr>
-            <a:spLocks noGrp="1"/>
-          </p:cNvSpPr>
-          <p:nvPr>
-            <p:ph idx="1"/>
-          </p:nvPr>
-        </p:nvSpPr>
-        <p:spPr/>
-        <p:txBody>
-          <a:bodyPr/>
-          <a:lstStyle/>
-          <a:p>
-            <a:r>
-              <a:rPr lang="en-US" sz="2000" i="1" dirty="0" smtClean="0">
-                <a:solidFill>
-                  <a:srgbClr val="C00000"/>
-                </a:solidFill>
-              </a:rPr>
-              <a:t>Statelessness</a:t>
-            </a:r>
-            <a:r>
-              <a:rPr lang="en-US" sz="2000" dirty="0" smtClean="0"/>
-              <a:t> means that each </a:t>
-            </a:r>
-            <a:r>
-              <a:rPr lang="en-US" sz="2000" u="sng" dirty="0" smtClean="0"/>
-              <a:t>transaction can be handled by one instance as well as any other</a:t>
-            </a:r>
-            <a:r>
-              <a:rPr lang="en-US" sz="2000" dirty="0" smtClean="0"/>
-              <a:t>; a user may transact with dozens of different instances during a single session, without ever knowing it.</a:t>
-            </a:r>
-          </a:p>
-          <a:p>
-            <a:r>
-              <a:rPr lang="en-US" sz="2000" dirty="0" smtClean="0"/>
-              <a:t>Design the application to </a:t>
-            </a:r>
-            <a:r>
-              <a:rPr lang="en-US" sz="2000" i="1" dirty="0" smtClean="0">
-                <a:solidFill>
-                  <a:srgbClr val="C00000"/>
-                </a:solidFill>
-              </a:rPr>
-              <a:t>run in a stateless fashion</a:t>
-            </a:r>
-            <a:r>
-              <a:rPr lang="en-US" sz="2000" dirty="0" smtClean="0"/>
-              <a:t>, with any necessary user and </a:t>
-            </a:r>
-            <a:r>
-              <a:rPr lang="en-US" sz="2000" i="1" dirty="0" smtClean="0">
-                <a:solidFill>
-                  <a:srgbClr val="C00000"/>
-                </a:solidFill>
-              </a:rPr>
-              <a:t>session data</a:t>
-            </a:r>
-            <a:r>
-              <a:rPr lang="en-US" sz="2000" dirty="0" smtClean="0"/>
-              <a:t> stored either </a:t>
-            </a:r>
-            <a:r>
-              <a:rPr lang="en-US" sz="2000" u="sng" dirty="0" smtClean="0"/>
-              <a:t>on the client side</a:t>
-            </a:r>
-            <a:r>
-              <a:rPr lang="en-US" sz="2000" dirty="0" smtClean="0"/>
-              <a:t>, or in a </a:t>
-            </a:r>
-            <a:r>
-              <a:rPr lang="en-US" sz="2000" u="sng" dirty="0" smtClean="0"/>
-              <a:t>distributed store</a:t>
-            </a:r>
-            <a:r>
-              <a:rPr lang="en-US" sz="2000" dirty="0" smtClean="0"/>
-              <a:t> that's accessible to any application instance.</a:t>
-            </a:r>
-          </a:p>
-          <a:p>
-            <a:endParaRPr lang="en-US" sz="2000" dirty="0"/>
-          </a:p>
-        </p:txBody>
-      </p:sp>
-      <p:pic>
-        <p:nvPicPr>
-          <p:cNvPr id="4" name="Picture 3"/>
-          <p:cNvPicPr>
-            <a:picLocks noChangeAspect="1" noChangeArrowheads="1"/>
-          </p:cNvPicPr>
-          <p:nvPr/>
-        </p:nvPicPr>
-        <p:blipFill>
-          <a:blip r:embed="rId2" cstate="print"/>
-          <a:srcRect/>
-          <a:stretch>
-            <a:fillRect/>
-          </a:stretch>
-        </p:blipFill>
-        <p:spPr bwMode="auto">
-          <a:xfrm>
-            <a:off x="2667000" y="4114800"/>
-            <a:ext cx="3990975" cy="1619250"/>
-          </a:xfrm>
-          <a:prstGeom prst="rect">
-            <a:avLst/>
-          </a:prstGeom>
-          <a:noFill/>
-          <a:ln w="9525">
-            <a:noFill/>
-            <a:miter lim="800000"/>
-            <a:headEnd/>
-            <a:tailEnd/>
-          </a:ln>
-        </p:spPr>
-      </p:pic>
-    </p:spTree>
-  </p:cSld>
-  <p:clrMapOvr>
-    <a:masterClrMapping/>
-  </p:clrMapOvr>
-</p:sld>
-</file>
-
-<file path=ppt/slides/slide22.xml><?xml version="1.0" encoding="utf-8"?>
-<p:sld xmlns:a="http://schemas.openxmlformats.org/drawingml/2006/main" xmlns:r="http://schemas.openxmlformats.org/officeDocument/2006/relationships" xmlns:p="http://schemas.openxmlformats.org/presentationml/2006/main">
-  <p:cSld>
-    <p:spTree>
-      <p:nvGrpSpPr>
-        <p:cNvPr id="1" name=""/>
-        <p:cNvGrpSpPr/>
-        <p:nvPr/>
-      </p:nvGrpSpPr>
-      <p:grpSpPr>
-        <a:xfrm>
-          <a:off x="0" y="0"/>
-          <a:ext cx="0" cy="0"/>
-          <a:chOff x="0" y="0"/>
-          <a:chExt cx="0" cy="0"/>
-        </a:xfrm>
-      </p:grpSpPr>
-      <p:sp>
-        <p:nvSpPr>
-          <p:cNvPr id="2" name="Title 1"/>
-          <p:cNvSpPr>
-            <a:spLocks noGrp="1"/>
-          </p:cNvSpPr>
-          <p:nvPr>
-            <p:ph type="title"/>
-          </p:nvPr>
-        </p:nvSpPr>
-        <p:spPr/>
-        <p:txBody>
-          <a:bodyPr/>
-          <a:lstStyle/>
-          <a:p>
-            <a:r>
-              <a:rPr lang="en-US" dirty="0" smtClean="0"/>
-              <a:t>Scaling Out Guidelines (II)</a:t>
-            </a:r>
-            <a:endParaRPr lang="en-US" dirty="0"/>
-          </a:p>
-        </p:txBody>
-      </p:sp>
-      <p:sp>
-        <p:nvSpPr>
-          <p:cNvPr id="3" name="Content Placeholder 2"/>
-          <p:cNvSpPr>
-            <a:spLocks noGrp="1"/>
-          </p:cNvSpPr>
-          <p:nvPr>
-            <p:ph idx="1"/>
-          </p:nvPr>
-        </p:nvSpPr>
-        <p:spPr/>
-        <p:txBody>
-          <a:bodyPr/>
-          <a:lstStyle/>
-          <a:p>
-            <a:r>
-              <a:rPr lang="en-US" sz="2000" dirty="0" smtClean="0"/>
-              <a:t>Design the application to </a:t>
-            </a:r>
-            <a:r>
-              <a:rPr lang="en-US" sz="2000" i="1" dirty="0" smtClean="0">
-                <a:solidFill>
-                  <a:srgbClr val="C00000"/>
-                </a:solidFill>
-              </a:rPr>
-              <a:t>conduct I/O operations asynchronously</a:t>
-            </a:r>
-            <a:r>
-              <a:rPr lang="en-US" sz="2000" dirty="0" smtClean="0"/>
-              <a:t>, so that the application can perform useful work while waiting for input and output to complete.</a:t>
-            </a:r>
-          </a:p>
-          <a:p>
-            <a:r>
-              <a:rPr lang="en-US" sz="2000" i="1" dirty="0" smtClean="0">
-                <a:solidFill>
-                  <a:srgbClr val="C00000"/>
-                </a:solidFill>
-              </a:rPr>
-              <a:t>Pool resources</a:t>
-            </a:r>
-            <a:r>
-              <a:rPr lang="en-US" sz="2000" dirty="0" smtClean="0"/>
-              <a:t> such as </a:t>
-            </a:r>
-            <a:r>
-              <a:rPr lang="en-US" sz="2000" u="sng" dirty="0" smtClean="0"/>
-              <a:t>threads</a:t>
-            </a:r>
-            <a:r>
-              <a:rPr lang="en-US" sz="2000" dirty="0" smtClean="0"/>
-              <a:t>, </a:t>
-            </a:r>
-            <a:r>
-              <a:rPr lang="en-US" sz="2000" u="sng" dirty="0" smtClean="0"/>
-              <a:t>network connections</a:t>
-            </a:r>
-            <a:r>
-              <a:rPr lang="en-US" sz="2000" dirty="0" smtClean="0"/>
-              <a:t>, and </a:t>
-            </a:r>
-            <a:r>
-              <a:rPr lang="en-US" sz="2000" u="sng" dirty="0" smtClean="0"/>
-              <a:t>database connections</a:t>
-            </a:r>
-            <a:r>
-              <a:rPr lang="en-US" sz="2000" dirty="0" smtClean="0"/>
-              <a:t>; this helps maximize your computing resources, and it improves your ability to predict resource usage.</a:t>
-            </a:r>
-          </a:p>
-          <a:p>
-            <a:r>
-              <a:rPr lang="en-US" sz="2000" dirty="0" smtClean="0"/>
-              <a:t>Write your database operations in such a way as to </a:t>
-            </a:r>
-            <a:r>
-              <a:rPr lang="en-US" sz="2000" i="1" dirty="0" smtClean="0">
-                <a:solidFill>
-                  <a:srgbClr val="C00000"/>
-                </a:solidFill>
-              </a:rPr>
-              <a:t>maximize concurrency</a:t>
-            </a:r>
-            <a:r>
-              <a:rPr lang="en-US" sz="2000" dirty="0" smtClean="0"/>
-              <a:t> and </a:t>
-            </a:r>
-            <a:r>
-              <a:rPr lang="en-US" sz="2000" i="1" dirty="0" smtClean="0">
-                <a:solidFill>
-                  <a:srgbClr val="C00000"/>
-                </a:solidFill>
-              </a:rPr>
-              <a:t>minimize exclusive locking</a:t>
-            </a:r>
-            <a:r>
-              <a:rPr lang="en-US" sz="2000" dirty="0" smtClean="0"/>
-              <a:t>. For example, don't lock records when performing read-only operations.</a:t>
-            </a:r>
-          </a:p>
-          <a:p>
-            <a:endParaRPr lang="en-US" sz="2000" dirty="0"/>
-          </a:p>
-        </p:txBody>
-      </p:sp>
-      <p:pic>
-        <p:nvPicPr>
-          <p:cNvPr id="4" name="Picture 3"/>
-          <p:cNvPicPr>
-            <a:picLocks noChangeAspect="1" noChangeArrowheads="1"/>
-          </p:cNvPicPr>
-          <p:nvPr/>
-        </p:nvPicPr>
-        <p:blipFill>
-          <a:blip r:embed="rId2" cstate="print"/>
-          <a:srcRect/>
-          <a:stretch>
-            <a:fillRect/>
-          </a:stretch>
-        </p:blipFill>
-        <p:spPr bwMode="auto">
-          <a:xfrm>
-            <a:off x="2667000" y="4800600"/>
-            <a:ext cx="3990975" cy="1619250"/>
-          </a:xfrm>
-          <a:prstGeom prst="rect">
-            <a:avLst/>
-          </a:prstGeom>
-          <a:noFill/>
-          <a:ln w="9525">
-            <a:noFill/>
-            <a:miter lim="800000"/>
-            <a:headEnd/>
-            <a:tailEnd/>
-          </a:ln>
-        </p:spPr>
-      </p:pic>
-    </p:spTree>
-  </p:cSld>
-  <p:clrMapOvr>
-    <a:masterClrMapping/>
-  </p:clrMapOvr>
-</p:sld>
-</file>
-
-<file path=ppt/slides/slide23.xml><?xml version="1.0" encoding="utf-8"?>
 <p:sld xmlns:a="http://schemas.openxmlformats.org/drawingml/2006/main" xmlns:r="http://schemas.openxmlformats.org/officeDocument/2006/relationships" xmlns:p="http://schemas.openxmlformats.org/presentationml/2006/main">
   <p:cSld>
     <p:spTree>
@@ -5889,7 +5677,7 @@
 </p:sld>
 </file>
 
-<file path=ppt/slides/slide24.xml><?xml version="1.0" encoding="utf-8"?>
+<file path=ppt/slides/slide22.xml><?xml version="1.0" encoding="utf-8"?>
 <p:sld xmlns:a="http://schemas.openxmlformats.org/drawingml/2006/main" xmlns:r="http://schemas.openxmlformats.org/officeDocument/2006/relationships" xmlns:p="http://schemas.openxmlformats.org/presentationml/2006/main">
   <p:cSld>
     <p:spTree>
@@ -5923,7 +5711,7 @@
           <a:p>
             <a:r>
               <a:rPr lang="en-US" dirty="0" smtClean="0"/>
-              <a:t>(ASP.NET) Session Storage</a:t>
+              <a:t>Scaling Out Guidelines (I) [2]</a:t>
             </a:r>
             <a:endParaRPr lang="en-US" dirty="0"/>
           </a:p>
@@ -5945,928 +5733,80 @@
           <a:lstStyle/>
           <a:p>
             <a:r>
-              <a:rPr lang="en-US" sz="2600" i="1" dirty="0" smtClean="0">
+              <a:rPr lang="en-US" sz="2000" i="1" dirty="0" smtClean="0">
                 <a:solidFill>
                   <a:srgbClr val="C00000"/>
                 </a:solidFill>
               </a:rPr>
-              <a:t>Machine key</a:t>
-            </a:r>
-            <a:r>
-              <a:rPr lang="en-US" sz="2600" dirty="0" smtClean="0"/>
-              <a:t> should be same for both servers: </a:t>
-            </a:r>
-            <a:r>
-              <a:rPr lang="en-US" sz="2600" u="sng" dirty="0" smtClean="0"/>
-              <a:t>View state</a:t>
-            </a:r>
-            <a:r>
-              <a:rPr lang="en-US" sz="2600" dirty="0" smtClean="0"/>
-              <a:t> and </a:t>
-            </a:r>
-            <a:r>
-              <a:rPr lang="en-US" sz="2600" u="sng" dirty="0" smtClean="0"/>
-              <a:t>session</a:t>
-            </a:r>
-            <a:r>
-              <a:rPr lang="en-US" sz="2600" dirty="0" smtClean="0"/>
-              <a:t> both </a:t>
-            </a:r>
-            <a:r>
-              <a:rPr lang="en-US" sz="2600" u="sng" dirty="0" smtClean="0"/>
-              <a:t>depend on</a:t>
-            </a:r>
-            <a:r>
-              <a:rPr lang="en-US" sz="2600" dirty="0" smtClean="0"/>
-              <a:t> the machine key.</a:t>
-            </a:r>
-          </a:p>
-          <a:p>
-            <a:r>
-              <a:rPr lang="en-US" sz="2600" dirty="0" smtClean="0"/>
-              <a:t>Session storage options:</a:t>
-            </a:r>
-          </a:p>
-          <a:p>
-            <a:pPr lvl="1"/>
-            <a:r>
-              <a:rPr lang="en-US" sz="2200" dirty="0" err="1" smtClean="0">
-                <a:latin typeface="Consolas" pitchFamily="49" charset="0"/>
-              </a:rPr>
-              <a:t>InProc</a:t>
-            </a:r>
-            <a:endParaRPr lang="en-US" sz="2200" dirty="0" smtClean="0">
-              <a:latin typeface="Consolas" pitchFamily="49" charset="0"/>
-            </a:endParaRPr>
-          </a:p>
-          <a:p>
-            <a:pPr lvl="1"/>
-            <a:r>
-              <a:rPr lang="en-US" sz="2200" dirty="0" err="1" smtClean="0">
-                <a:latin typeface="Consolas" pitchFamily="49" charset="0"/>
-              </a:rPr>
-              <a:t>StateServer</a:t>
-            </a:r>
-            <a:endParaRPr lang="en-US" sz="2200" dirty="0" smtClean="0">
-              <a:latin typeface="Consolas" pitchFamily="49" charset="0"/>
-            </a:endParaRPr>
-          </a:p>
-          <a:p>
-            <a:pPr lvl="1"/>
-            <a:r>
-              <a:rPr lang="en-US" sz="2200" b="1" dirty="0" err="1" smtClean="0">
-                <a:latin typeface="Consolas" pitchFamily="49" charset="0"/>
-              </a:rPr>
-              <a:t>SQLServer</a:t>
-            </a:r>
-            <a:endParaRPr lang="en-US" sz="2200" b="1" dirty="0" smtClean="0">
-              <a:latin typeface="Consolas" pitchFamily="49" charset="0"/>
-            </a:endParaRPr>
-          </a:p>
-        </p:txBody>
-      </p:sp>
-      <p:sp>
-        <p:nvSpPr>
-          <p:cNvPr id="4" name="Rectangle 3"/>
-          <p:cNvSpPr/>
-          <p:nvPr/>
-        </p:nvSpPr>
-        <p:spPr>
-          <a:xfrm>
-            <a:off x="533400" y="4495800"/>
-            <a:ext cx="7924800" cy="1754326"/>
-          </a:xfrm>
-          <a:prstGeom prst="rect">
-            <a:avLst/>
-          </a:prstGeom>
-        </p:spPr>
-        <p:style>
-          <a:lnRef idx="1">
-            <a:schemeClr val="dk1"/>
-          </a:lnRef>
-          <a:fillRef idx="2">
-            <a:schemeClr val="dk1"/>
-          </a:fillRef>
-          <a:effectRef idx="1">
-            <a:schemeClr val="dk1"/>
-          </a:effectRef>
-          <a:fontRef idx="minor">
-            <a:schemeClr val="dk1"/>
-          </a:fontRef>
-        </p:style>
-        <p:txBody>
-          <a:bodyPr wrap="square">
-            <a:spAutoFit/>
-          </a:bodyPr>
-          <a:lstStyle/>
-          <a:p>
-            <a:pPr>
-              <a:buNone/>
-            </a:pPr>
-            <a:r>
-              <a:rPr lang="en-US" dirty="0" smtClean="0">
-                <a:latin typeface="Consolas" pitchFamily="49" charset="0"/>
-              </a:rPr>
-              <a:t>&lt;system.web&gt;</a:t>
-            </a:r>
-          </a:p>
-          <a:p>
-            <a:pPr>
-              <a:buNone/>
-            </a:pPr>
-            <a:r>
-              <a:rPr lang="en-US" dirty="0" smtClean="0">
-                <a:latin typeface="Consolas" pitchFamily="49" charset="0"/>
-              </a:rPr>
-              <a:t>    &lt;</a:t>
-            </a:r>
-            <a:r>
-              <a:rPr lang="en-US" dirty="0" err="1" smtClean="0">
-                <a:latin typeface="Consolas" pitchFamily="49" charset="0"/>
-              </a:rPr>
-              <a:t>httpCookies</a:t>
-            </a:r>
-            <a:r>
-              <a:rPr lang="en-US" dirty="0" smtClean="0">
-                <a:latin typeface="Consolas" pitchFamily="49" charset="0"/>
-              </a:rPr>
-              <a:t> </a:t>
-            </a:r>
-            <a:r>
-              <a:rPr lang="en-US" dirty="0" err="1" smtClean="0">
-                <a:latin typeface="Consolas" pitchFamily="49" charset="0"/>
-              </a:rPr>
-              <a:t>requireSSL</a:t>
-            </a:r>
-            <a:r>
-              <a:rPr lang="en-US" dirty="0" smtClean="0">
-                <a:latin typeface="Consolas" pitchFamily="49" charset="0"/>
-              </a:rPr>
-              <a:t>="true" /&gt;</a:t>
-            </a:r>
-          </a:p>
-          <a:p>
-            <a:pPr>
-              <a:buNone/>
-            </a:pPr>
-            <a:r>
-              <a:rPr lang="en-US" dirty="0" smtClean="0">
-                <a:latin typeface="Consolas" pitchFamily="49" charset="0"/>
-              </a:rPr>
-              <a:t>    &lt;</a:t>
-            </a:r>
-            <a:r>
-              <a:rPr lang="en-US" dirty="0" err="1" smtClean="0">
-                <a:latin typeface="Consolas" pitchFamily="49" charset="0"/>
-              </a:rPr>
-              <a:t>machineKey</a:t>
-            </a:r>
-            <a:r>
-              <a:rPr lang="en-US" dirty="0" smtClean="0">
-                <a:latin typeface="Consolas" pitchFamily="49" charset="0"/>
-              </a:rPr>
-              <a:t> validation="SHA1" /&gt;</a:t>
-            </a:r>
-          </a:p>
-          <a:p>
-            <a:pPr>
-              <a:buNone/>
-            </a:pPr>
-            <a:r>
-              <a:rPr lang="en-US" dirty="0" smtClean="0">
-                <a:latin typeface="Consolas" pitchFamily="49" charset="0"/>
-              </a:rPr>
-              <a:t>    &lt;</a:t>
-            </a:r>
-            <a:r>
-              <a:rPr lang="en-US" dirty="0" err="1" smtClean="0">
-                <a:latin typeface="Consolas" pitchFamily="49" charset="0"/>
-              </a:rPr>
-              <a:t>sessionState</a:t>
-            </a:r>
-            <a:r>
-              <a:rPr lang="en-US" dirty="0" smtClean="0">
-                <a:latin typeface="Consolas" pitchFamily="49" charset="0"/>
-              </a:rPr>
-              <a:t> timeout="25" </a:t>
-            </a:r>
-            <a:r>
-              <a:rPr lang="en-US" dirty="0" err="1" smtClean="0">
-                <a:latin typeface="Consolas" pitchFamily="49" charset="0"/>
-              </a:rPr>
-              <a:t>cookieless</a:t>
-            </a:r>
-            <a:r>
-              <a:rPr lang="en-US" dirty="0" smtClean="0">
-                <a:latin typeface="Consolas" pitchFamily="49" charset="0"/>
-              </a:rPr>
-              <a:t>="false" </a:t>
-            </a:r>
-            <a:r>
-              <a:rPr lang="en-US" dirty="0" err="1" smtClean="0">
-                <a:latin typeface="Consolas" pitchFamily="49" charset="0"/>
-              </a:rPr>
-              <a:t>regenerateExpiredSessionId</a:t>
-            </a:r>
-            <a:r>
-              <a:rPr lang="en-US" dirty="0" smtClean="0">
-                <a:latin typeface="Consolas" pitchFamily="49" charset="0"/>
-              </a:rPr>
-              <a:t>="true" mode="</a:t>
-            </a:r>
-            <a:r>
-              <a:rPr lang="en-US" b="1" i="1" dirty="0" err="1" smtClean="0">
+              <a:t>Statelessness</a:t>
+            </a:r>
+            <a:r>
+              <a:rPr lang="en-US" sz="2000" dirty="0" smtClean="0"/>
+              <a:t> means that each </a:t>
+            </a:r>
+            <a:r>
+              <a:rPr lang="en-US" sz="2000" u="sng" dirty="0" smtClean="0"/>
+              <a:t>transaction can be handled by one instance as well as any other</a:t>
+            </a:r>
+            <a:r>
+              <a:rPr lang="en-US" sz="2000" dirty="0" smtClean="0"/>
+              <a:t>; a user may transact with dozens of different instances during a single session, without ever knowing it.</a:t>
+            </a:r>
+          </a:p>
+          <a:p>
+            <a:r>
+              <a:rPr lang="en-US" sz="2000" dirty="0" smtClean="0"/>
+              <a:t>Design the application to </a:t>
+            </a:r>
+            <a:r>
+              <a:rPr lang="en-US" sz="2000" i="1" dirty="0" smtClean="0">
                 <a:solidFill>
                   <a:srgbClr val="C00000"/>
                 </a:solidFill>
-                <a:latin typeface="Consolas" pitchFamily="49" charset="0"/>
-              </a:rPr>
-              <a:t>InProc</a:t>
-            </a:r>
-            <a:r>
-              <a:rPr lang="en-US" dirty="0" smtClean="0">
-                <a:latin typeface="Consolas" pitchFamily="49" charset="0"/>
-              </a:rPr>
-              <a:t>" /&gt;</a:t>
-            </a:r>
-          </a:p>
-          <a:p>
-            <a:pPr>
-              <a:buNone/>
-            </a:pPr>
-            <a:r>
-              <a:rPr lang="en-US" dirty="0" smtClean="0">
-                <a:latin typeface="Consolas" pitchFamily="49" charset="0"/>
-              </a:rPr>
-              <a:t>...</a:t>
-            </a:r>
-          </a:p>
-        </p:txBody>
-      </p:sp>
-    </p:spTree>
-  </p:cSld>
-  <p:clrMapOvr>
-    <a:masterClrMapping/>
-  </p:clrMapOvr>
-</p:sld>
-</file>
-
-<file path=ppt/slides/slide25.xml><?xml version="1.0" encoding="utf-8"?>
-<p:sld xmlns:a="http://schemas.openxmlformats.org/drawingml/2006/main" xmlns:r="http://schemas.openxmlformats.org/officeDocument/2006/relationships" xmlns:p="http://schemas.openxmlformats.org/presentationml/2006/main">
-  <p:cSld>
-    <p:spTree>
-      <p:nvGrpSpPr>
-        <p:cNvPr id="1" name=""/>
-        <p:cNvGrpSpPr/>
-        <p:nvPr/>
-      </p:nvGrpSpPr>
-      <p:grpSpPr>
-        <a:xfrm>
-          <a:off x="0" y="0"/>
-          <a:ext cx="0" cy="0"/>
-          <a:chOff x="0" y="0"/>
-          <a:chExt cx="0" cy="0"/>
-        </a:xfrm>
-      </p:grpSpPr>
-      <p:sp>
-        <p:nvSpPr>
-          <p:cNvPr id="2" name="Title 1"/>
-          <p:cNvSpPr>
-            <a:spLocks noGrp="1"/>
-          </p:cNvSpPr>
-          <p:nvPr>
-            <p:ph type="title"/>
-          </p:nvPr>
-        </p:nvSpPr>
-        <p:spPr/>
-        <p:txBody>
-          <a:bodyPr/>
-          <a:lstStyle/>
-          <a:p>
-            <a:pPr algn="l"/>
-            <a:r>
-              <a:rPr lang="en-US" dirty="0" smtClean="0"/>
-              <a:t>1. Create an SQL Server Database for </a:t>
-            </a:r>
-            <a:r>
-              <a:rPr lang="en-US" dirty="0" err="1" smtClean="0"/>
-              <a:t>SQLServer</a:t>
-            </a:r>
-            <a:r>
-              <a:rPr lang="en-US" dirty="0" smtClean="0"/>
-              <a:t> Session Mode</a:t>
-            </a:r>
-            <a:endParaRPr lang="en-US" dirty="0"/>
-          </a:p>
-        </p:txBody>
-      </p:sp>
-      <p:sp>
-        <p:nvSpPr>
-          <p:cNvPr id="3" name="Content Placeholder 2"/>
-          <p:cNvSpPr>
-            <a:spLocks noGrp="1"/>
-          </p:cNvSpPr>
-          <p:nvPr>
-            <p:ph idx="1"/>
-          </p:nvPr>
-        </p:nvSpPr>
-        <p:spPr/>
-        <p:txBody>
-          <a:bodyPr/>
-          <a:lstStyle/>
-          <a:p>
-            <a:pPr marL="342900" lvl="2" indent="-342900"/>
-            <a:r>
-              <a:rPr lang="en-US" sz="2200" b="1" dirty="0" smtClean="0"/>
-              <a:t>Run cmd.exe as Administrator</a:t>
-            </a:r>
-          </a:p>
-          <a:p>
-            <a:pPr marL="342900" lvl="2" indent="-342900"/>
-            <a:r>
-              <a:rPr lang="en-US" sz="2200" i="1" dirty="0" smtClean="0">
-                <a:latin typeface="Consolas" pitchFamily="49" charset="0"/>
-              </a:rPr>
-              <a:t>C:\Windows\Microsoft.NET\Framework\v4.0.30319\aspnet_regsql.exe -</a:t>
-            </a:r>
-            <a:r>
-              <a:rPr lang="en-US" sz="2200" i="1" dirty="0" err="1" smtClean="0">
-                <a:latin typeface="Consolas" pitchFamily="49" charset="0"/>
-              </a:rPr>
-              <a:t>ssadd</a:t>
-            </a:r>
-            <a:r>
-              <a:rPr lang="en-US" sz="2200" i="1" dirty="0" smtClean="0">
-                <a:latin typeface="Consolas" pitchFamily="49" charset="0"/>
-              </a:rPr>
-              <a:t> -</a:t>
-            </a:r>
-            <a:r>
-              <a:rPr lang="en-US" sz="2200" i="1" dirty="0" err="1" smtClean="0">
-                <a:latin typeface="Consolas" pitchFamily="49" charset="0"/>
-              </a:rPr>
-              <a:t>sstype</a:t>
-            </a:r>
-            <a:r>
-              <a:rPr lang="en-US" sz="2200" i="1" dirty="0" smtClean="0">
-                <a:latin typeface="Consolas" pitchFamily="49" charset="0"/>
-              </a:rPr>
-              <a:t> c -d apistate.example.com -S </a:t>
-            </a:r>
-            <a:r>
-              <a:rPr lang="en-US" sz="2200" i="1" dirty="0" err="1" smtClean="0">
-                <a:latin typeface="Consolas" pitchFamily="49" charset="0"/>
-              </a:rPr>
-              <a:t>localhost</a:t>
-            </a:r>
-            <a:r>
-              <a:rPr lang="en-US" sz="2200" i="1" dirty="0" smtClean="0">
-                <a:latin typeface="Consolas" pitchFamily="49" charset="0"/>
-              </a:rPr>
-              <a:t> –E</a:t>
-            </a:r>
-          </a:p>
-        </p:txBody>
-      </p:sp>
-    </p:spTree>
-  </p:cSld>
-  <p:clrMapOvr>
-    <a:masterClrMapping/>
-  </p:clrMapOvr>
-</p:sld>
-</file>
-
-<file path=ppt/slides/slide26.xml><?xml version="1.0" encoding="utf-8"?>
-<p:sld xmlns:a="http://schemas.openxmlformats.org/drawingml/2006/main" xmlns:r="http://schemas.openxmlformats.org/officeDocument/2006/relationships" xmlns:p="http://schemas.openxmlformats.org/presentationml/2006/main">
-  <p:cSld>
-    <p:spTree>
-      <p:nvGrpSpPr>
-        <p:cNvPr id="1" name=""/>
-        <p:cNvGrpSpPr/>
-        <p:nvPr/>
-      </p:nvGrpSpPr>
-      <p:grpSpPr>
-        <a:xfrm>
-          <a:off x="0" y="0"/>
-          <a:ext cx="0" cy="0"/>
-          <a:chOff x="0" y="0"/>
-          <a:chExt cx="0" cy="0"/>
-        </a:xfrm>
-      </p:grpSpPr>
-      <p:sp>
-        <p:nvSpPr>
-          <p:cNvPr id="2" name="Title 1"/>
-          <p:cNvSpPr>
-            <a:spLocks noGrp="1"/>
-          </p:cNvSpPr>
-          <p:nvPr>
-            <p:ph type="title"/>
-          </p:nvPr>
-        </p:nvSpPr>
-        <p:spPr/>
-        <p:txBody>
-          <a:bodyPr/>
-          <a:lstStyle/>
-          <a:p>
-            <a:pPr algn="l"/>
-            <a:r>
-              <a:rPr lang="en-US" dirty="0" smtClean="0"/>
-              <a:t>2. Create a Connection String for </a:t>
-            </a:r>
-            <a:r>
-              <a:rPr lang="en-US" dirty="0" err="1" smtClean="0"/>
-              <a:t>SQLServer</a:t>
-            </a:r>
-            <a:r>
-              <a:rPr lang="en-US" dirty="0" smtClean="0"/>
-              <a:t> Session Mode</a:t>
-            </a:r>
-            <a:endParaRPr lang="en-US" dirty="0"/>
-          </a:p>
-        </p:txBody>
-      </p:sp>
-      <p:sp>
-        <p:nvSpPr>
-          <p:cNvPr id="3" name="Content Placeholder 2"/>
-          <p:cNvSpPr>
-            <a:spLocks noGrp="1"/>
-          </p:cNvSpPr>
-          <p:nvPr>
-            <p:ph idx="1"/>
-          </p:nvPr>
-        </p:nvSpPr>
-        <p:spPr/>
-        <p:txBody>
-          <a:bodyPr/>
-          <a:lstStyle/>
-          <a:p>
-            <a:r>
-              <a:rPr lang="en-US" sz="2400" dirty="0" smtClean="0">
-                <a:latin typeface="+mj-lt"/>
-              </a:rPr>
-              <a:t>Create </a:t>
-            </a:r>
-            <a:r>
-              <a:rPr lang="en-US" sz="2400" dirty="0" err="1" smtClean="0">
-                <a:latin typeface="+mj-lt"/>
-              </a:rPr>
-              <a:t>web.connectionStrings.config</a:t>
-            </a:r>
-            <a:r>
-              <a:rPr lang="en-US" sz="2400" dirty="0" smtClean="0">
-                <a:latin typeface="+mj-lt"/>
-              </a:rPr>
-              <a:t> file.</a:t>
-            </a:r>
-          </a:p>
-        </p:txBody>
-      </p:sp>
-      <p:sp>
-        <p:nvSpPr>
-          <p:cNvPr id="4" name="Rectangle 3"/>
-          <p:cNvSpPr/>
-          <p:nvPr/>
-        </p:nvSpPr>
-        <p:spPr>
-          <a:xfrm>
-            <a:off x="533400" y="2438400"/>
-            <a:ext cx="7924800" cy="3139321"/>
-          </a:xfrm>
-          <a:prstGeom prst="rect">
-            <a:avLst/>
-          </a:prstGeom>
-        </p:spPr>
-        <p:style>
-          <a:lnRef idx="1">
-            <a:schemeClr val="dk1"/>
-          </a:lnRef>
-          <a:fillRef idx="2">
-            <a:schemeClr val="dk1"/>
-          </a:fillRef>
-          <a:effectRef idx="1">
-            <a:schemeClr val="dk1"/>
-          </a:effectRef>
-          <a:fontRef idx="minor">
-            <a:schemeClr val="dk1"/>
-          </a:fontRef>
-        </p:style>
-        <p:txBody>
-          <a:bodyPr wrap="square">
-            <a:spAutoFit/>
-          </a:bodyPr>
-          <a:lstStyle/>
-          <a:p>
-            <a:pPr>
-              <a:buNone/>
-            </a:pPr>
-            <a:r>
-              <a:rPr lang="en-US" dirty="0" smtClean="0">
-                <a:latin typeface="Consolas" pitchFamily="49" charset="0"/>
-              </a:rPr>
-              <a:t>&lt;?xml version="1.0" ?&gt;</a:t>
-            </a:r>
-          </a:p>
-          <a:p>
-            <a:pPr>
-              <a:buNone/>
-            </a:pPr>
-            <a:r>
-              <a:rPr lang="en-US" dirty="0" smtClean="0">
-                <a:latin typeface="Consolas" pitchFamily="49" charset="0"/>
-              </a:rPr>
-              <a:t>  &lt;</a:t>
-            </a:r>
-            <a:r>
-              <a:rPr lang="en-US" dirty="0" err="1" smtClean="0">
-                <a:latin typeface="Consolas" pitchFamily="49" charset="0"/>
-              </a:rPr>
-              <a:t>connectionStrings</a:t>
-            </a:r>
-            <a:r>
-              <a:rPr lang="en-US" dirty="0" smtClean="0">
-                <a:latin typeface="Consolas" pitchFamily="49" charset="0"/>
-              </a:rPr>
-              <a:t>&gt;</a:t>
-            </a:r>
-          </a:p>
-          <a:p>
-            <a:pPr>
-              <a:buNone/>
-            </a:pPr>
-            <a:r>
-              <a:rPr lang="en-US" dirty="0" smtClean="0">
-                <a:latin typeface="Consolas" pitchFamily="49" charset="0"/>
-              </a:rPr>
-              <a:t>    &lt;clear /&gt;</a:t>
-            </a:r>
-          </a:p>
-          <a:p>
-            <a:pPr>
-              <a:buNone/>
-            </a:pPr>
-            <a:r>
-              <a:rPr lang="en-US" dirty="0" smtClean="0">
-                <a:latin typeface="Consolas" pitchFamily="49" charset="0"/>
-              </a:rPr>
-              <a:t>...</a:t>
-            </a:r>
-          </a:p>
-          <a:p>
-            <a:pPr>
-              <a:buNone/>
-            </a:pPr>
-            <a:r>
-              <a:rPr lang="en-US" dirty="0" smtClean="0">
-                <a:latin typeface="Consolas" pitchFamily="49" charset="0"/>
-              </a:rPr>
-              <a:t>    &lt;add name="</a:t>
-            </a:r>
-            <a:r>
-              <a:rPr lang="en-US" b="1" i="1" dirty="0" err="1" smtClean="0">
+              </a:rPr>
+              <a:t>run in a stateless fashion</a:t>
+            </a:r>
+            <a:r>
+              <a:rPr lang="en-US" sz="2000" dirty="0" smtClean="0"/>
+              <a:t>, with any necessary user and </a:t>
+            </a:r>
+            <a:r>
+              <a:rPr lang="en-US" sz="2000" i="1" dirty="0" smtClean="0">
                 <a:solidFill>
                   <a:srgbClr val="C00000"/>
                 </a:solidFill>
-                <a:latin typeface="Consolas" pitchFamily="49" charset="0"/>
-              </a:rPr>
-              <a:t>snsState</a:t>
-            </a:r>
-            <a:r>
-              <a:rPr lang="en-US" dirty="0" smtClean="0">
-                <a:latin typeface="Consolas" pitchFamily="49" charset="0"/>
-              </a:rPr>
-              <a:t>" </a:t>
-            </a:r>
-            <a:r>
-              <a:rPr lang="en-US" dirty="0" err="1" smtClean="0">
-                <a:latin typeface="Consolas" pitchFamily="49" charset="0"/>
-              </a:rPr>
-              <a:t>connectionString</a:t>
-            </a:r>
-            <a:r>
-              <a:rPr lang="en-US" dirty="0" smtClean="0">
-                <a:latin typeface="Consolas" pitchFamily="49" charset="0"/>
-              </a:rPr>
-              <a:t>="Data Source=192.168.101.62;Initial Catalog=</a:t>
-            </a:r>
-            <a:r>
-              <a:rPr lang="en-US" dirty="0" err="1" smtClean="0">
-                <a:latin typeface="Consolas" pitchFamily="49" charset="0"/>
-              </a:rPr>
-              <a:t>apistate.example.com;Persist</a:t>
-            </a:r>
-            <a:r>
-              <a:rPr lang="en-US" dirty="0" smtClean="0">
-                <a:latin typeface="Consolas" pitchFamily="49" charset="0"/>
-              </a:rPr>
-              <a:t> Security Info=</a:t>
-            </a:r>
-            <a:r>
-              <a:rPr lang="en-US" dirty="0" err="1" smtClean="0">
-                <a:latin typeface="Consolas" pitchFamily="49" charset="0"/>
-              </a:rPr>
-              <a:t>True;User</a:t>
-            </a:r>
-            <a:r>
-              <a:rPr lang="en-US" dirty="0" smtClean="0">
-                <a:latin typeface="Consolas" pitchFamily="49" charset="0"/>
-              </a:rPr>
-              <a:t> ID=</a:t>
-            </a:r>
-            <a:r>
-              <a:rPr lang="en-US" dirty="0" err="1" smtClean="0">
-                <a:latin typeface="Consolas" pitchFamily="49" charset="0"/>
-              </a:rPr>
-              <a:t>api.example.com;Password</a:t>
-            </a:r>
-            <a:r>
-              <a:rPr lang="en-US" dirty="0" smtClean="0">
-                <a:latin typeface="Consolas" pitchFamily="49" charset="0"/>
-              </a:rPr>
-              <a:t>=$%</a:t>
-            </a:r>
-            <a:r>
-              <a:rPr lang="en-US" dirty="0" err="1" smtClean="0">
-                <a:latin typeface="Consolas" pitchFamily="49" charset="0"/>
-              </a:rPr>
-              <a:t>Ym</a:t>
-            </a:r>
-            <a:r>
-              <a:rPr lang="en-US" dirty="0" smtClean="0">
-                <a:latin typeface="Consolas" pitchFamily="49" charset="0"/>
-              </a:rPr>
-              <a:t>*k3xtt4#bNNu;Connect Timeout=60;Min Pool Size=0;Max Pool Size=100;" </a:t>
-            </a:r>
-            <a:r>
-              <a:rPr lang="en-US" dirty="0" err="1" smtClean="0">
-                <a:latin typeface="Consolas" pitchFamily="49" charset="0"/>
-              </a:rPr>
-              <a:t>providerName</a:t>
-            </a:r>
-            <a:r>
-              <a:rPr lang="en-US" dirty="0" smtClean="0">
-                <a:latin typeface="Consolas" pitchFamily="49" charset="0"/>
-              </a:rPr>
-              <a:t>="</a:t>
-            </a:r>
-            <a:r>
-              <a:rPr lang="en-US" dirty="0" err="1" smtClean="0">
-                <a:latin typeface="Consolas" pitchFamily="49" charset="0"/>
-              </a:rPr>
-              <a:t>System.Data.SqlClient</a:t>
-            </a:r>
-            <a:r>
-              <a:rPr lang="en-US" dirty="0" smtClean="0">
-                <a:latin typeface="Consolas" pitchFamily="49" charset="0"/>
-              </a:rPr>
-              <a:t>" /&gt;</a:t>
-            </a:r>
-          </a:p>
-          <a:p>
-            <a:pPr>
-              <a:buNone/>
-            </a:pPr>
-            <a:r>
-              <a:rPr lang="en-US" dirty="0" smtClean="0">
-                <a:latin typeface="Consolas" pitchFamily="49" charset="0"/>
-              </a:rPr>
-              <a:t>  &lt;/</a:t>
-            </a:r>
-            <a:r>
-              <a:rPr lang="en-US" dirty="0" err="1" smtClean="0">
-                <a:latin typeface="Consolas" pitchFamily="49" charset="0"/>
-              </a:rPr>
-              <a:t>connectionStrings</a:t>
-            </a:r>
-            <a:r>
-              <a:rPr lang="en-US" dirty="0" smtClean="0">
-                <a:latin typeface="Consolas" pitchFamily="49" charset="0"/>
-              </a:rPr>
-              <a:t>&gt;</a:t>
-            </a:r>
-          </a:p>
-        </p:txBody>
-      </p:sp>
-    </p:spTree>
-  </p:cSld>
-  <p:clrMapOvr>
-    <a:masterClrMapping/>
-  </p:clrMapOvr>
-</p:sld>
-</file>
-
-<file path=ppt/slides/slide27.xml><?xml version="1.0" encoding="utf-8"?>
-<p:sld xmlns:a="http://schemas.openxmlformats.org/drawingml/2006/main" xmlns:r="http://schemas.openxmlformats.org/officeDocument/2006/relationships" xmlns:p="http://schemas.openxmlformats.org/presentationml/2006/main">
-  <p:cSld>
-    <p:spTree>
-      <p:nvGrpSpPr>
-        <p:cNvPr id="1" name=""/>
-        <p:cNvGrpSpPr/>
-        <p:nvPr/>
-      </p:nvGrpSpPr>
-      <p:grpSpPr>
-        <a:xfrm>
-          <a:off x="0" y="0"/>
-          <a:ext cx="0" cy="0"/>
-          <a:chOff x="0" y="0"/>
-          <a:chExt cx="0" cy="0"/>
-        </a:xfrm>
-      </p:grpSpPr>
-      <p:sp>
-        <p:nvSpPr>
-          <p:cNvPr id="2" name="Title 1"/>
-          <p:cNvSpPr>
-            <a:spLocks noGrp="1"/>
-          </p:cNvSpPr>
-          <p:nvPr>
-            <p:ph type="title"/>
-          </p:nvPr>
-        </p:nvSpPr>
-        <p:spPr/>
-        <p:txBody>
-          <a:bodyPr/>
-          <a:lstStyle/>
-          <a:p>
-            <a:pPr algn="l"/>
-            <a:r>
-              <a:rPr lang="en-US" dirty="0" smtClean="0"/>
-              <a:t>3. Enable </a:t>
-            </a:r>
-            <a:r>
-              <a:rPr lang="en-US" dirty="0" err="1" smtClean="0"/>
-              <a:t>SQLServer</a:t>
-            </a:r>
-            <a:r>
-              <a:rPr lang="en-US" dirty="0" smtClean="0"/>
-              <a:t> Session Mode</a:t>
-            </a:r>
-            <a:endParaRPr lang="en-US" dirty="0"/>
-          </a:p>
-        </p:txBody>
-      </p:sp>
-      <p:sp>
-        <p:nvSpPr>
-          <p:cNvPr id="3" name="Content Placeholder 2"/>
-          <p:cNvSpPr>
-            <a:spLocks noGrp="1"/>
-          </p:cNvSpPr>
-          <p:nvPr>
-            <p:ph idx="1"/>
-          </p:nvPr>
-        </p:nvSpPr>
-        <p:spPr/>
-        <p:txBody>
-          <a:bodyPr/>
-          <a:lstStyle/>
-          <a:p>
-            <a:r>
-              <a:rPr lang="en-US" sz="2200" dirty="0" smtClean="0">
-                <a:latin typeface="Consolas" pitchFamily="49" charset="0"/>
-              </a:rPr>
-              <a:t>&lt;</a:t>
-            </a:r>
-            <a:r>
-              <a:rPr lang="en-US" sz="2200" dirty="0" err="1" smtClean="0">
-                <a:latin typeface="Consolas" pitchFamily="49" charset="0"/>
-              </a:rPr>
-              <a:t>connectionStrings</a:t>
-            </a:r>
-            <a:r>
-              <a:rPr lang="en-US" sz="2200" dirty="0" smtClean="0">
-                <a:latin typeface="Consolas" pitchFamily="49" charset="0"/>
-              </a:rPr>
-              <a:t> </a:t>
-            </a:r>
-            <a:r>
-              <a:rPr lang="en-US" sz="2200" dirty="0" err="1" smtClean="0">
-                <a:latin typeface="Consolas" pitchFamily="49" charset="0"/>
-              </a:rPr>
-              <a:t>configSource</a:t>
-            </a:r>
-            <a:r>
-              <a:rPr lang="en-US" sz="2200" dirty="0" smtClean="0">
-                <a:latin typeface="Consolas" pitchFamily="49" charset="0"/>
-              </a:rPr>
-              <a:t>="</a:t>
-            </a:r>
-            <a:r>
-              <a:rPr lang="en-US" sz="2200" i="1" dirty="0" err="1" smtClean="0">
-                <a:solidFill>
-                  <a:srgbClr val="C00000"/>
-                </a:solidFill>
-                <a:latin typeface="Consolas" pitchFamily="49" charset="0"/>
-              </a:rPr>
-              <a:t>web.connectionStrings.config</a:t>
-            </a:r>
-            <a:r>
-              <a:rPr lang="en-US" sz="2200" dirty="0" smtClean="0">
-                <a:latin typeface="Consolas" pitchFamily="49" charset="0"/>
-              </a:rPr>
-              <a:t>" /&gt;</a:t>
-            </a:r>
-          </a:p>
-          <a:p>
-            <a:r>
-              <a:rPr lang="en-US" sz="2200" dirty="0" smtClean="0">
-                <a:latin typeface="Consolas" pitchFamily="49" charset="0"/>
-              </a:rPr>
-              <a:t>&lt;</a:t>
-            </a:r>
-            <a:r>
-              <a:rPr lang="en-US" sz="2200" dirty="0" err="1" smtClean="0">
-                <a:latin typeface="Consolas" pitchFamily="49" charset="0"/>
-              </a:rPr>
-              <a:t>sessionState</a:t>
-            </a:r>
-            <a:r>
-              <a:rPr lang="en-US" sz="2200" dirty="0" smtClean="0">
-                <a:latin typeface="Consolas" pitchFamily="49" charset="0"/>
-              </a:rPr>
-              <a:t> timeout="25" </a:t>
-            </a:r>
-            <a:r>
-              <a:rPr lang="en-US" sz="2200" dirty="0" err="1" smtClean="0">
-                <a:latin typeface="Consolas" pitchFamily="49" charset="0"/>
-              </a:rPr>
-              <a:t>cookieless</a:t>
-            </a:r>
-            <a:r>
-              <a:rPr lang="en-US" sz="2200" dirty="0" smtClean="0">
-                <a:latin typeface="Consolas" pitchFamily="49" charset="0"/>
-              </a:rPr>
-              <a:t>="false" </a:t>
-            </a:r>
-            <a:r>
-              <a:rPr lang="en-US" sz="2200" dirty="0" err="1" smtClean="0">
-                <a:latin typeface="Consolas" pitchFamily="49" charset="0"/>
-              </a:rPr>
-              <a:t>regenerateExpiredSessionId</a:t>
-            </a:r>
-            <a:r>
-              <a:rPr lang="en-US" sz="2200" dirty="0" smtClean="0">
-                <a:latin typeface="Consolas" pitchFamily="49" charset="0"/>
-              </a:rPr>
-              <a:t>="true" mode="</a:t>
-            </a:r>
-            <a:r>
-              <a:rPr lang="en-US" sz="2200" b="1" i="1" dirty="0" err="1" smtClean="0">
-                <a:solidFill>
-                  <a:srgbClr val="C00000"/>
-                </a:solidFill>
-                <a:latin typeface="Consolas" pitchFamily="49" charset="0"/>
-              </a:rPr>
-              <a:t>SQLServer</a:t>
-            </a:r>
-            <a:r>
-              <a:rPr lang="en-US" sz="2200" dirty="0" smtClean="0">
-                <a:latin typeface="Consolas" pitchFamily="49" charset="0"/>
-              </a:rPr>
-              <a:t>" </a:t>
-            </a:r>
-            <a:r>
-              <a:rPr lang="en-US" sz="2200" dirty="0" err="1" smtClean="0">
-                <a:latin typeface="Consolas" pitchFamily="49" charset="0"/>
-              </a:rPr>
-              <a:t>allowCustomSqlDatabase</a:t>
-            </a:r>
-            <a:r>
-              <a:rPr lang="en-US" sz="2200" dirty="0" smtClean="0">
-                <a:latin typeface="Consolas" pitchFamily="49" charset="0"/>
-              </a:rPr>
-              <a:t>="true" </a:t>
-            </a:r>
-            <a:r>
-              <a:rPr lang="en-US" sz="2200" dirty="0" err="1" smtClean="0">
-                <a:latin typeface="Consolas" pitchFamily="49" charset="0"/>
-              </a:rPr>
-              <a:t>sqlConnectionString</a:t>
-            </a:r>
-            <a:r>
-              <a:rPr lang="en-US" sz="2200" dirty="0" smtClean="0">
-                <a:latin typeface="Consolas" pitchFamily="49" charset="0"/>
-              </a:rPr>
-              <a:t>="</a:t>
-            </a:r>
-            <a:r>
-              <a:rPr lang="en-US" sz="2200" i="1" dirty="0" err="1" smtClean="0">
-                <a:solidFill>
-                  <a:srgbClr val="C00000"/>
-                </a:solidFill>
-                <a:latin typeface="Consolas" pitchFamily="49" charset="0"/>
-              </a:rPr>
-              <a:t>snsState</a:t>
-            </a:r>
-            <a:r>
-              <a:rPr lang="en-US" sz="2200" dirty="0" smtClean="0">
-                <a:latin typeface="Consolas" pitchFamily="49" charset="0"/>
-              </a:rPr>
-              <a:t>" /&gt;</a:t>
-            </a:r>
+              </a:rPr>
+              <a:t>session data</a:t>
+            </a:r>
+            <a:r>
+              <a:rPr lang="en-US" sz="2000" dirty="0" smtClean="0"/>
+              <a:t> stored either </a:t>
+            </a:r>
+            <a:r>
+              <a:rPr lang="en-US" sz="2000" u="sng" dirty="0" smtClean="0"/>
+              <a:t>on the client side</a:t>
+            </a:r>
+            <a:r>
+              <a:rPr lang="en-US" sz="2000" dirty="0" smtClean="0"/>
+              <a:t>, or in a </a:t>
+            </a:r>
+            <a:r>
+              <a:rPr lang="en-US" sz="2000" u="sng" dirty="0" smtClean="0"/>
+              <a:t>distributed store</a:t>
+            </a:r>
+            <a:r>
+              <a:rPr lang="en-US" sz="2000" dirty="0" smtClean="0"/>
+              <a:t> that's accessible to any application instance.</a:t>
+            </a:r>
+          </a:p>
+          <a:p>
+            <a:endParaRPr lang="en-US" sz="2000" dirty="0"/>
           </a:p>
         </p:txBody>
       </p:sp>
       <p:pic>
         <p:nvPicPr>
-          <p:cNvPr id="2050" name="Picture 2"/>
+          <p:cNvPr id="4" name="Picture 3"/>
           <p:cNvPicPr>
             <a:picLocks noChangeAspect="1" noChangeArrowheads="1"/>
           </p:cNvPicPr>
@@ -6881,8 +5821,8 @@
         </p:blipFill>
         <p:spPr bwMode="auto">
           <a:xfrm>
-            <a:off x="1019175" y="4038600"/>
-            <a:ext cx="7105650" cy="2057400"/>
+            <a:off x="2667000" y="4114800"/>
+            <a:ext cx="3990975" cy="1619250"/>
           </a:xfrm>
           <a:prstGeom prst="rect">
             <a:avLst/>
@@ -6904,7 +5844,192 @@
 </p:sld>
 </file>
 
-<file path=ppt/slides/slide28.xml><?xml version="1.0" encoding="utf-8"?>
+<file path=ppt/slides/slide23.xml><?xml version="1.0" encoding="utf-8"?>
+<p:sld xmlns:a="http://schemas.openxmlformats.org/drawingml/2006/main" xmlns:r="http://schemas.openxmlformats.org/officeDocument/2006/relationships" xmlns:p="http://schemas.openxmlformats.org/presentationml/2006/main">
+  <p:cSld>
+    <p:spTree>
+      <p:nvGrpSpPr>
+        <p:cNvPr id="1" name=""/>
+        <p:cNvGrpSpPr/>
+        <p:nvPr/>
+      </p:nvGrpSpPr>
+      <p:grpSpPr>
+        <a:xfrm>
+          <a:off x="0" y="0"/>
+          <a:ext cx="0" cy="0"/>
+          <a:chOff x="0" y="0"/>
+          <a:chExt cx="0" cy="0"/>
+        </a:xfrm>
+      </p:grpSpPr>
+      <p:sp>
+        <p:nvSpPr>
+          <p:cNvPr id="2" name="Title 1"/>
+          <p:cNvSpPr>
+            <a:spLocks noGrp="1"/>
+          </p:cNvSpPr>
+          <p:nvPr>
+            <p:ph type="title"/>
+          </p:nvPr>
+        </p:nvSpPr>
+        <p:spPr/>
+        <p:txBody>
+          <a:bodyPr/>
+          <a:lstStyle/>
+          <a:p>
+            <a:r>
+              <a:rPr lang="en-US" dirty="0" smtClean="0"/>
+              <a:t>Scaling Out Guidelines (II)</a:t>
+            </a:r>
+            <a:endParaRPr lang="en-US" dirty="0"/>
+          </a:p>
+        </p:txBody>
+      </p:sp>
+      <p:sp>
+        <p:nvSpPr>
+          <p:cNvPr id="3" name="Content Placeholder 2"/>
+          <p:cNvSpPr>
+            <a:spLocks noGrp="1"/>
+          </p:cNvSpPr>
+          <p:nvPr>
+            <p:ph idx="1"/>
+          </p:nvPr>
+        </p:nvSpPr>
+        <p:spPr/>
+        <p:txBody>
+          <a:bodyPr/>
+          <a:lstStyle/>
+          <a:p>
+            <a:r>
+              <a:rPr lang="en-US" sz="2000" dirty="0" smtClean="0"/>
+              <a:t>Design the application to </a:t>
+            </a:r>
+            <a:r>
+              <a:rPr lang="en-US" sz="2000" i="1" dirty="0" smtClean="0">
+                <a:solidFill>
+                  <a:srgbClr val="C00000"/>
+                </a:solidFill>
+              </a:rPr>
+              <a:t>conduct I/O operations asynchronously</a:t>
+            </a:r>
+            <a:r>
+              <a:rPr lang="en-US" sz="2000" dirty="0" smtClean="0"/>
+              <a:t>, so that the application can perform useful work while waiting for input and output to complete.</a:t>
+            </a:r>
+          </a:p>
+          <a:p>
+            <a:r>
+              <a:rPr lang="en-US" sz="2000" i="1" dirty="0" smtClean="0">
+                <a:solidFill>
+                  <a:srgbClr val="C00000"/>
+                </a:solidFill>
+              </a:rPr>
+              <a:t>Pool resources</a:t>
+            </a:r>
+            <a:r>
+              <a:rPr lang="en-US" sz="2000" dirty="0" smtClean="0"/>
+              <a:t> such as </a:t>
+            </a:r>
+            <a:r>
+              <a:rPr lang="en-US" sz="2000" u="sng" dirty="0" smtClean="0"/>
+              <a:t>threads</a:t>
+            </a:r>
+            <a:r>
+              <a:rPr lang="en-US" sz="2000" dirty="0" smtClean="0"/>
+              <a:t>, </a:t>
+            </a:r>
+            <a:r>
+              <a:rPr lang="en-US" sz="2000" u="sng" dirty="0" smtClean="0"/>
+              <a:t>network connections</a:t>
+            </a:r>
+            <a:r>
+              <a:rPr lang="en-US" sz="2000" dirty="0" smtClean="0"/>
+              <a:t>, and </a:t>
+            </a:r>
+            <a:r>
+              <a:rPr lang="en-US" sz="2000" u="sng" dirty="0" smtClean="0"/>
+              <a:t>database connections</a:t>
+            </a:r>
+            <a:r>
+              <a:rPr lang="en-US" sz="2000" dirty="0" smtClean="0"/>
+              <a:t>; this helps maximize your computing resources, and it improves your ability to predict resource usage.</a:t>
+            </a:r>
+          </a:p>
+          <a:p>
+            <a:r>
+              <a:rPr lang="en-US" sz="2000" dirty="0" smtClean="0"/>
+              <a:t>Write your database operations in such a way as to </a:t>
+            </a:r>
+            <a:r>
+              <a:rPr lang="en-US" sz="2000" i="1" dirty="0" smtClean="0">
+                <a:solidFill>
+                  <a:srgbClr val="C00000"/>
+                </a:solidFill>
+              </a:rPr>
+              <a:t>maximize concurrency</a:t>
+            </a:r>
+            <a:r>
+              <a:rPr lang="en-US" sz="2000" dirty="0" smtClean="0"/>
+              <a:t> and </a:t>
+            </a:r>
+            <a:r>
+              <a:rPr lang="en-US" sz="2000" i="1" dirty="0" smtClean="0">
+                <a:solidFill>
+                  <a:srgbClr val="C00000"/>
+                </a:solidFill>
+              </a:rPr>
+              <a:t>minimize exclusive locking</a:t>
+            </a:r>
+            <a:r>
+              <a:rPr lang="en-US" sz="2000" dirty="0" smtClean="0"/>
+              <a:t>. For example, don't lock records when performing read-only operations.</a:t>
+            </a:r>
+          </a:p>
+          <a:p>
+            <a:endParaRPr lang="en-US" sz="2000" dirty="0"/>
+          </a:p>
+        </p:txBody>
+      </p:sp>
+      <p:pic>
+        <p:nvPicPr>
+          <p:cNvPr id="4" name="Picture 3"/>
+          <p:cNvPicPr>
+            <a:picLocks noChangeAspect="1" noChangeArrowheads="1"/>
+          </p:cNvPicPr>
+          <p:nvPr/>
+        </p:nvPicPr>
+        <p:blipFill>
+          <a:blip r:embed="rId2" cstate="print"/>
+          <a:srcRect/>
+          <a:stretch>
+            <a:fillRect/>
+          </a:stretch>
+        </p:blipFill>
+        <p:spPr bwMode="auto">
+          <a:xfrm>
+            <a:off x="2667000" y="4800600"/>
+            <a:ext cx="3990975" cy="1619250"/>
+          </a:xfrm>
+          <a:prstGeom prst="rect">
+            <a:avLst/>
+          </a:prstGeom>
+          <a:noFill/>
+          <a:ln w="9525">
+            <a:noFill/>
+            <a:miter lim="800000"/>
+            <a:headEnd/>
+            <a:tailEnd/>
+          </a:ln>
+        </p:spPr>
+      </p:pic>
+    </p:spTree>
+  </p:cSld>
+  <p:clrMapOvr>
+    <a:masterClrMapping/>
+  </p:clrMapOvr>
+</p:sld>
+</file>
+
+<file path=ppt/slides/slide24.xml><?xml version="1.0" encoding="utf-8"?>
 <p:sld xmlns:a="http://schemas.openxmlformats.org/drawingml/2006/main" xmlns:r="http://schemas.openxmlformats.org/officeDocument/2006/relationships" xmlns:p="http://schemas.openxmlformats.org/presentationml/2006/main">
   <p:cSld>
     <p:spTree>
@@ -6955,6 +6080,1021 @@
 </p:sld>
 </file>
 
+<file path=ppt/slides/slide25.xml><?xml version="1.0" encoding="utf-8"?>
+<p:sld xmlns:a="http://schemas.openxmlformats.org/drawingml/2006/main" xmlns:r="http://schemas.openxmlformats.org/officeDocument/2006/relationships" xmlns:p="http://schemas.openxmlformats.org/presentationml/2006/main">
+  <p:cSld>
+    <p:spTree>
+      <p:nvGrpSpPr>
+        <p:cNvPr id="1" name=""/>
+        <p:cNvGrpSpPr/>
+        <p:nvPr/>
+      </p:nvGrpSpPr>
+      <p:grpSpPr>
+        <a:xfrm>
+          <a:off x="0" y="0"/>
+          <a:ext cx="0" cy="0"/>
+          <a:chOff x="0" y="0"/>
+          <a:chExt cx="0" cy="0"/>
+        </a:xfrm>
+      </p:grpSpPr>
+      <p:sp>
+        <p:nvSpPr>
+          <p:cNvPr id="2" name="Title 1"/>
+          <p:cNvSpPr>
+            <a:spLocks noGrp="1"/>
+          </p:cNvSpPr>
+          <p:nvPr>
+            <p:ph type="title"/>
+          </p:nvPr>
+        </p:nvSpPr>
+        <p:spPr/>
+        <p:txBody>
+          <a:bodyPr/>
+          <a:lstStyle/>
+          <a:p>
+            <a:r>
+              <a:rPr lang="en-US" dirty="0" smtClean="0"/>
+              <a:t>(ASP.NET) Session Storage</a:t>
+            </a:r>
+            <a:endParaRPr lang="en-US" dirty="0"/>
+          </a:p>
+        </p:txBody>
+      </p:sp>
+      <p:sp>
+        <p:nvSpPr>
+          <p:cNvPr id="3" name="Content Placeholder 2"/>
+          <p:cNvSpPr>
+            <a:spLocks noGrp="1"/>
+          </p:cNvSpPr>
+          <p:nvPr>
+            <p:ph idx="1"/>
+          </p:nvPr>
+        </p:nvSpPr>
+        <p:spPr/>
+        <p:txBody>
+          <a:bodyPr/>
+          <a:lstStyle/>
+          <a:p>
+            <a:r>
+              <a:rPr lang="en-US" sz="2600" i="1" dirty="0" smtClean="0">
+                <a:solidFill>
+                  <a:srgbClr val="C00000"/>
+                </a:solidFill>
+              </a:rPr>
+              <a:t>Machine key</a:t>
+            </a:r>
+            <a:r>
+              <a:rPr lang="en-US" sz="2600" dirty="0" smtClean="0"/>
+              <a:t> should be same for both servers: </a:t>
+            </a:r>
+            <a:r>
+              <a:rPr lang="en-US" sz="2600" u="sng" dirty="0" smtClean="0"/>
+              <a:t>View state</a:t>
+            </a:r>
+            <a:r>
+              <a:rPr lang="en-US" sz="2600" dirty="0" smtClean="0"/>
+              <a:t> and </a:t>
+            </a:r>
+            <a:r>
+              <a:rPr lang="en-US" sz="2600" u="sng" dirty="0" smtClean="0"/>
+              <a:t>session</a:t>
+            </a:r>
+            <a:r>
+              <a:rPr lang="en-US" sz="2600" dirty="0" smtClean="0"/>
+              <a:t> both </a:t>
+            </a:r>
+            <a:r>
+              <a:rPr lang="en-US" sz="2600" u="sng" dirty="0" smtClean="0"/>
+              <a:t>depend on</a:t>
+            </a:r>
+            <a:r>
+              <a:rPr lang="en-US" sz="2600" dirty="0" smtClean="0"/>
+              <a:t> the machine key.</a:t>
+            </a:r>
+          </a:p>
+          <a:p>
+            <a:r>
+              <a:rPr lang="en-US" sz="2600" dirty="0" smtClean="0"/>
+              <a:t>Session storage options:</a:t>
+            </a:r>
+          </a:p>
+          <a:p>
+            <a:pPr lvl="1"/>
+            <a:r>
+              <a:rPr lang="en-US" sz="2200" dirty="0" err="1" smtClean="0">
+                <a:latin typeface="Consolas" pitchFamily="49" charset="0"/>
+              </a:rPr>
+              <a:t>InProc</a:t>
+            </a:r>
+            <a:endParaRPr lang="en-US" sz="2200" dirty="0" smtClean="0">
+              <a:latin typeface="Consolas" pitchFamily="49" charset="0"/>
+            </a:endParaRPr>
+          </a:p>
+          <a:p>
+            <a:pPr lvl="1"/>
+            <a:r>
+              <a:rPr lang="en-US" sz="2200" dirty="0" err="1" smtClean="0">
+                <a:latin typeface="Consolas" pitchFamily="49" charset="0"/>
+              </a:rPr>
+              <a:t>StateServer</a:t>
+            </a:r>
+            <a:endParaRPr lang="en-US" sz="2200" dirty="0" smtClean="0">
+              <a:latin typeface="Consolas" pitchFamily="49" charset="0"/>
+            </a:endParaRPr>
+          </a:p>
+          <a:p>
+            <a:pPr lvl="1"/>
+            <a:r>
+              <a:rPr lang="en-US" sz="2200" b="1" dirty="0" err="1" smtClean="0">
+                <a:latin typeface="Consolas" pitchFamily="49" charset="0"/>
+              </a:rPr>
+              <a:t>SQLServer</a:t>
+            </a:r>
+            <a:endParaRPr lang="en-US" sz="2200" b="1" dirty="0" smtClean="0">
+              <a:latin typeface="Consolas" pitchFamily="49" charset="0"/>
+            </a:endParaRPr>
+          </a:p>
+        </p:txBody>
+      </p:sp>
+      <p:sp>
+        <p:nvSpPr>
+          <p:cNvPr id="4" name="Rectangle 3"/>
+          <p:cNvSpPr/>
+          <p:nvPr/>
+        </p:nvSpPr>
+        <p:spPr>
+          <a:xfrm>
+            <a:off x="533400" y="4495800"/>
+            <a:ext cx="7924800" cy="1754326"/>
+          </a:xfrm>
+          <a:prstGeom prst="rect">
+            <a:avLst/>
+          </a:prstGeom>
+        </p:spPr>
+        <p:style>
+          <a:lnRef idx="1">
+            <a:schemeClr val="dk1"/>
+          </a:lnRef>
+          <a:fillRef idx="2">
+            <a:schemeClr val="dk1"/>
+          </a:fillRef>
+          <a:effectRef idx="1">
+            <a:schemeClr val="dk1"/>
+          </a:effectRef>
+          <a:fontRef idx="minor">
+            <a:schemeClr val="dk1"/>
+          </a:fontRef>
+        </p:style>
+        <p:txBody>
+          <a:bodyPr wrap="square">
+            <a:spAutoFit/>
+          </a:bodyPr>
+          <a:lstStyle/>
+          <a:p>
+            <a:pPr>
+              <a:buNone/>
+            </a:pPr>
+            <a:r>
+              <a:rPr lang="en-US" dirty="0" smtClean="0">
+                <a:latin typeface="Consolas" pitchFamily="49" charset="0"/>
+              </a:rPr>
+              <a:t>&lt;system.web&gt;</a:t>
+            </a:r>
+          </a:p>
+          <a:p>
+            <a:pPr>
+              <a:buNone/>
+            </a:pPr>
+            <a:r>
+              <a:rPr lang="en-US" dirty="0" smtClean="0">
+                <a:latin typeface="Consolas" pitchFamily="49" charset="0"/>
+              </a:rPr>
+              <a:t>    &lt;</a:t>
+            </a:r>
+            <a:r>
+              <a:rPr lang="en-US" dirty="0" err="1" smtClean="0">
+                <a:latin typeface="Consolas" pitchFamily="49" charset="0"/>
+              </a:rPr>
+              <a:t>httpCookies</a:t>
+            </a:r>
+            <a:r>
+              <a:rPr lang="en-US" dirty="0" smtClean="0">
+                <a:latin typeface="Consolas" pitchFamily="49" charset="0"/>
+              </a:rPr>
+              <a:t> </a:t>
+            </a:r>
+            <a:r>
+              <a:rPr lang="en-US" dirty="0" err="1" smtClean="0">
+                <a:latin typeface="Consolas" pitchFamily="49" charset="0"/>
+              </a:rPr>
+              <a:t>requireSSL</a:t>
+            </a:r>
+            <a:r>
+              <a:rPr lang="en-US" dirty="0" smtClean="0">
+                <a:latin typeface="Consolas" pitchFamily="49" charset="0"/>
+              </a:rPr>
+              <a:t>="true" /&gt;</a:t>
+            </a:r>
+          </a:p>
+          <a:p>
+            <a:pPr>
+              <a:buNone/>
+            </a:pPr>
+            <a:r>
+              <a:rPr lang="en-US" dirty="0" smtClean="0">
+                <a:latin typeface="Consolas" pitchFamily="49" charset="0"/>
+              </a:rPr>
+              <a:t>    &lt;</a:t>
+            </a:r>
+            <a:r>
+              <a:rPr lang="en-US" dirty="0" err="1" smtClean="0">
+                <a:latin typeface="Consolas" pitchFamily="49" charset="0"/>
+              </a:rPr>
+              <a:t>machineKey</a:t>
+            </a:r>
+            <a:r>
+              <a:rPr lang="en-US" dirty="0" smtClean="0">
+                <a:latin typeface="Consolas" pitchFamily="49" charset="0"/>
+              </a:rPr>
+              <a:t> validation="SHA1" /&gt;</a:t>
+            </a:r>
+          </a:p>
+          <a:p>
+            <a:pPr>
+              <a:buNone/>
+            </a:pPr>
+            <a:r>
+              <a:rPr lang="en-US" dirty="0" smtClean="0">
+                <a:latin typeface="Consolas" pitchFamily="49" charset="0"/>
+              </a:rPr>
+              <a:t>    &lt;</a:t>
+            </a:r>
+            <a:r>
+              <a:rPr lang="en-US" dirty="0" err="1" smtClean="0">
+                <a:latin typeface="Consolas" pitchFamily="49" charset="0"/>
+              </a:rPr>
+              <a:t>sessionState</a:t>
+            </a:r>
+            <a:r>
+              <a:rPr lang="en-US" dirty="0" smtClean="0">
+                <a:latin typeface="Consolas" pitchFamily="49" charset="0"/>
+              </a:rPr>
+              <a:t> timeout="25" </a:t>
+            </a:r>
+            <a:r>
+              <a:rPr lang="en-US" dirty="0" err="1" smtClean="0">
+                <a:latin typeface="Consolas" pitchFamily="49" charset="0"/>
+              </a:rPr>
+              <a:t>cookieless</a:t>
+            </a:r>
+            <a:r>
+              <a:rPr lang="en-US" dirty="0" smtClean="0">
+                <a:latin typeface="Consolas" pitchFamily="49" charset="0"/>
+              </a:rPr>
+              <a:t>="false" </a:t>
+            </a:r>
+            <a:r>
+              <a:rPr lang="en-US" dirty="0" err="1" smtClean="0">
+                <a:latin typeface="Consolas" pitchFamily="49" charset="0"/>
+              </a:rPr>
+              <a:t>regenerateExpiredSessionId</a:t>
+            </a:r>
+            <a:r>
+              <a:rPr lang="en-US" dirty="0" smtClean="0">
+                <a:latin typeface="Consolas" pitchFamily="49" charset="0"/>
+              </a:rPr>
+              <a:t>="true" mode="</a:t>
+            </a:r>
+            <a:r>
+              <a:rPr lang="en-US" b="1" i="1" dirty="0" err="1" smtClean="0">
+                <a:solidFill>
+                  <a:srgbClr val="C00000"/>
+                </a:solidFill>
+                <a:latin typeface="Consolas" pitchFamily="49" charset="0"/>
+              </a:rPr>
+              <a:t>InProc</a:t>
+            </a:r>
+            <a:r>
+              <a:rPr lang="en-US" dirty="0" smtClean="0">
+                <a:latin typeface="Consolas" pitchFamily="49" charset="0"/>
+              </a:rPr>
+              <a:t>" /&gt;</a:t>
+            </a:r>
+          </a:p>
+          <a:p>
+            <a:pPr>
+              <a:buNone/>
+            </a:pPr>
+            <a:r>
+              <a:rPr lang="en-US" dirty="0" smtClean="0">
+                <a:latin typeface="Consolas" pitchFamily="49" charset="0"/>
+              </a:rPr>
+              <a:t>...</a:t>
+            </a:r>
+          </a:p>
+        </p:txBody>
+      </p:sp>
+    </p:spTree>
+  </p:cSld>
+  <p:clrMapOvr>
+    <a:masterClrMapping/>
+  </p:clrMapOvr>
+</p:sld>
+</file>
+
+<file path=ppt/slides/slide26.xml><?xml version="1.0" encoding="utf-8"?>
+<p:sld xmlns:a="http://schemas.openxmlformats.org/drawingml/2006/main" xmlns:r="http://schemas.openxmlformats.org/officeDocument/2006/relationships" xmlns:p="http://schemas.openxmlformats.org/presentationml/2006/main">
+  <p:cSld>
+    <p:spTree>
+      <p:nvGrpSpPr>
+        <p:cNvPr id="1" name=""/>
+        <p:cNvGrpSpPr/>
+        <p:nvPr/>
+      </p:nvGrpSpPr>
+      <p:grpSpPr>
+        <a:xfrm>
+          <a:off x="0" y="0"/>
+          <a:ext cx="0" cy="0"/>
+          <a:chOff x="0" y="0"/>
+          <a:chExt cx="0" cy="0"/>
+        </a:xfrm>
+      </p:grpSpPr>
+      <p:sp>
+        <p:nvSpPr>
+          <p:cNvPr id="2" name="Title 1"/>
+          <p:cNvSpPr>
+            <a:spLocks noGrp="1"/>
+          </p:cNvSpPr>
+          <p:nvPr>
+            <p:ph type="title"/>
+          </p:nvPr>
+        </p:nvSpPr>
+        <p:spPr/>
+        <p:txBody>
+          <a:bodyPr/>
+          <a:lstStyle/>
+          <a:p>
+            <a:pPr algn="l"/>
+            <a:r>
+              <a:rPr lang="en-US" dirty="0" smtClean="0"/>
+              <a:t>1. Create an SQL Server Database for </a:t>
+            </a:r>
+            <a:r>
+              <a:rPr lang="en-US" dirty="0" err="1" smtClean="0"/>
+              <a:t>SQLServer</a:t>
+            </a:r>
+            <a:r>
+              <a:rPr lang="en-US" dirty="0" smtClean="0"/>
+              <a:t> Session Mode</a:t>
+            </a:r>
+            <a:endParaRPr lang="en-US" dirty="0"/>
+          </a:p>
+        </p:txBody>
+      </p:sp>
+      <p:sp>
+        <p:nvSpPr>
+          <p:cNvPr id="3" name="Content Placeholder 2"/>
+          <p:cNvSpPr>
+            <a:spLocks noGrp="1"/>
+          </p:cNvSpPr>
+          <p:nvPr>
+            <p:ph idx="1"/>
+          </p:nvPr>
+        </p:nvSpPr>
+        <p:spPr/>
+        <p:txBody>
+          <a:bodyPr/>
+          <a:lstStyle/>
+          <a:p>
+            <a:pPr marL="342900" lvl="2" indent="-342900"/>
+            <a:r>
+              <a:rPr lang="en-US" sz="2200" b="1" dirty="0" smtClean="0"/>
+              <a:t>Run cmd.exe as Administrator</a:t>
+            </a:r>
+          </a:p>
+          <a:p>
+            <a:pPr marL="342900" lvl="2" indent="-342900"/>
+            <a:r>
+              <a:rPr lang="en-US" sz="2200" i="1" dirty="0" smtClean="0">
+                <a:latin typeface="Consolas" pitchFamily="49" charset="0"/>
+              </a:rPr>
+              <a:t>C:\Windows\Microsoft.NET\Framework\v4.0.30319\aspnet_regsql.exe -</a:t>
+            </a:r>
+            <a:r>
+              <a:rPr lang="en-US" sz="2200" i="1" dirty="0" err="1" smtClean="0">
+                <a:latin typeface="Consolas" pitchFamily="49" charset="0"/>
+              </a:rPr>
+              <a:t>ssadd</a:t>
+            </a:r>
+            <a:r>
+              <a:rPr lang="en-US" sz="2200" i="1" dirty="0" smtClean="0">
+                <a:latin typeface="Consolas" pitchFamily="49" charset="0"/>
+              </a:rPr>
+              <a:t> -</a:t>
+            </a:r>
+            <a:r>
+              <a:rPr lang="en-US" sz="2200" i="1" dirty="0" err="1" smtClean="0">
+                <a:latin typeface="Consolas" pitchFamily="49" charset="0"/>
+              </a:rPr>
+              <a:t>sstype</a:t>
+            </a:r>
+            <a:r>
+              <a:rPr lang="en-US" sz="2200" i="1" dirty="0" smtClean="0">
+                <a:latin typeface="Consolas" pitchFamily="49" charset="0"/>
+              </a:rPr>
+              <a:t> c -d apistate.example.com -S </a:t>
+            </a:r>
+            <a:r>
+              <a:rPr lang="en-US" sz="2200" i="1" dirty="0" err="1" smtClean="0">
+                <a:latin typeface="Consolas" pitchFamily="49" charset="0"/>
+              </a:rPr>
+              <a:t>localhost</a:t>
+            </a:r>
+            <a:r>
+              <a:rPr lang="en-US" sz="2200" i="1" dirty="0" smtClean="0">
+                <a:latin typeface="Consolas" pitchFamily="49" charset="0"/>
+              </a:rPr>
+              <a:t> –E</a:t>
+            </a:r>
+          </a:p>
+        </p:txBody>
+      </p:sp>
+    </p:spTree>
+  </p:cSld>
+  <p:clrMapOvr>
+    <a:masterClrMapping/>
+  </p:clrMapOvr>
+</p:sld>
+</file>
+
+<file path=ppt/slides/slide27.xml><?xml version="1.0" encoding="utf-8"?>
+<p:sld xmlns:a="http://schemas.openxmlformats.org/drawingml/2006/main" xmlns:r="http://schemas.openxmlformats.org/officeDocument/2006/relationships" xmlns:p="http://schemas.openxmlformats.org/presentationml/2006/main">
+  <p:cSld>
+    <p:spTree>
+      <p:nvGrpSpPr>
+        <p:cNvPr id="1" name=""/>
+        <p:cNvGrpSpPr/>
+        <p:nvPr/>
+      </p:nvGrpSpPr>
+      <p:grpSpPr>
+        <a:xfrm>
+          <a:off x="0" y="0"/>
+          <a:ext cx="0" cy="0"/>
+          <a:chOff x="0" y="0"/>
+          <a:chExt cx="0" cy="0"/>
+        </a:xfrm>
+      </p:grpSpPr>
+      <p:sp>
+        <p:nvSpPr>
+          <p:cNvPr id="2" name="Title 1"/>
+          <p:cNvSpPr>
+            <a:spLocks noGrp="1"/>
+          </p:cNvSpPr>
+          <p:nvPr>
+            <p:ph type="title"/>
+          </p:nvPr>
+        </p:nvSpPr>
+        <p:spPr/>
+        <p:txBody>
+          <a:bodyPr/>
+          <a:lstStyle/>
+          <a:p>
+            <a:pPr algn="l"/>
+            <a:r>
+              <a:rPr lang="en-US" dirty="0" smtClean="0"/>
+              <a:t>2. Create a Connection String for </a:t>
+            </a:r>
+            <a:r>
+              <a:rPr lang="en-US" dirty="0" err="1" smtClean="0"/>
+              <a:t>SQLServer</a:t>
+            </a:r>
+            <a:r>
+              <a:rPr lang="en-US" dirty="0" smtClean="0"/>
+              <a:t> Session Mode</a:t>
+            </a:r>
+            <a:endParaRPr lang="en-US" dirty="0"/>
+          </a:p>
+        </p:txBody>
+      </p:sp>
+      <p:sp>
+        <p:nvSpPr>
+          <p:cNvPr id="3" name="Content Placeholder 2"/>
+          <p:cNvSpPr>
+            <a:spLocks noGrp="1"/>
+          </p:cNvSpPr>
+          <p:nvPr>
+            <p:ph idx="1"/>
+          </p:nvPr>
+        </p:nvSpPr>
+        <p:spPr/>
+        <p:txBody>
+          <a:bodyPr/>
+          <a:lstStyle/>
+          <a:p>
+            <a:r>
+              <a:rPr lang="en-US" sz="2400" dirty="0" smtClean="0">
+                <a:latin typeface="+mj-lt"/>
+              </a:rPr>
+              <a:t>Create </a:t>
+            </a:r>
+            <a:r>
+              <a:rPr lang="en-US" sz="2400" dirty="0" err="1" smtClean="0">
+                <a:latin typeface="+mj-lt"/>
+              </a:rPr>
+              <a:t>web.connectionStrings.config</a:t>
+            </a:r>
+            <a:r>
+              <a:rPr lang="en-US" sz="2400" dirty="0" smtClean="0">
+                <a:latin typeface="+mj-lt"/>
+              </a:rPr>
+              <a:t> file.</a:t>
+            </a:r>
+          </a:p>
+        </p:txBody>
+      </p:sp>
+      <p:sp>
+        <p:nvSpPr>
+          <p:cNvPr id="4" name="Rectangle 3"/>
+          <p:cNvSpPr/>
+          <p:nvPr/>
+        </p:nvSpPr>
+        <p:spPr>
+          <a:xfrm>
+            <a:off x="533400" y="2438400"/>
+            <a:ext cx="7924800" cy="3139321"/>
+          </a:xfrm>
+          <a:prstGeom prst="rect">
+            <a:avLst/>
+          </a:prstGeom>
+        </p:spPr>
+        <p:style>
+          <a:lnRef idx="1">
+            <a:schemeClr val="dk1"/>
+          </a:lnRef>
+          <a:fillRef idx="2">
+            <a:schemeClr val="dk1"/>
+          </a:fillRef>
+          <a:effectRef idx="1">
+            <a:schemeClr val="dk1"/>
+          </a:effectRef>
+          <a:fontRef idx="minor">
+            <a:schemeClr val="dk1"/>
+          </a:fontRef>
+        </p:style>
+        <p:txBody>
+          <a:bodyPr wrap="square">
+            <a:spAutoFit/>
+          </a:bodyPr>
+          <a:lstStyle/>
+          <a:p>
+            <a:pPr>
+              <a:buNone/>
+            </a:pPr>
+            <a:r>
+              <a:rPr lang="en-US" dirty="0" smtClean="0">
+                <a:latin typeface="Consolas" pitchFamily="49" charset="0"/>
+              </a:rPr>
+              <a:t>&lt;?xml version="1.0" ?&gt;</a:t>
+            </a:r>
+          </a:p>
+          <a:p>
+            <a:pPr>
+              <a:buNone/>
+            </a:pPr>
+            <a:r>
+              <a:rPr lang="en-US" dirty="0" smtClean="0">
+                <a:latin typeface="Consolas" pitchFamily="49" charset="0"/>
+              </a:rPr>
+              <a:t>  &lt;</a:t>
+            </a:r>
+            <a:r>
+              <a:rPr lang="en-US" dirty="0" err="1" smtClean="0">
+                <a:latin typeface="Consolas" pitchFamily="49" charset="0"/>
+              </a:rPr>
+              <a:t>connectionStrings</a:t>
+            </a:r>
+            <a:r>
+              <a:rPr lang="en-US" dirty="0" smtClean="0">
+                <a:latin typeface="Consolas" pitchFamily="49" charset="0"/>
+              </a:rPr>
+              <a:t>&gt;</a:t>
+            </a:r>
+          </a:p>
+          <a:p>
+            <a:pPr>
+              <a:buNone/>
+            </a:pPr>
+            <a:r>
+              <a:rPr lang="en-US" dirty="0" smtClean="0">
+                <a:latin typeface="Consolas" pitchFamily="49" charset="0"/>
+              </a:rPr>
+              <a:t>    &lt;clear /&gt;</a:t>
+            </a:r>
+          </a:p>
+          <a:p>
+            <a:pPr>
+              <a:buNone/>
+            </a:pPr>
+            <a:r>
+              <a:rPr lang="en-US" dirty="0" smtClean="0">
+                <a:latin typeface="Consolas" pitchFamily="49" charset="0"/>
+              </a:rPr>
+              <a:t>...</a:t>
+            </a:r>
+          </a:p>
+          <a:p>
+            <a:pPr>
+              <a:buNone/>
+            </a:pPr>
+            <a:r>
+              <a:rPr lang="en-US" dirty="0" smtClean="0">
+                <a:latin typeface="Consolas" pitchFamily="49" charset="0"/>
+              </a:rPr>
+              <a:t>    &lt;add name="</a:t>
+            </a:r>
+            <a:r>
+              <a:rPr lang="en-US" b="1" i="1" dirty="0" err="1" smtClean="0">
+                <a:solidFill>
+                  <a:srgbClr val="C00000"/>
+                </a:solidFill>
+                <a:latin typeface="Consolas" pitchFamily="49" charset="0"/>
+              </a:rPr>
+              <a:t>snsState</a:t>
+            </a:r>
+            <a:r>
+              <a:rPr lang="en-US" dirty="0" smtClean="0">
+                <a:latin typeface="Consolas" pitchFamily="49" charset="0"/>
+              </a:rPr>
+              <a:t>" </a:t>
+            </a:r>
+            <a:r>
+              <a:rPr lang="en-US" dirty="0" err="1" smtClean="0">
+                <a:latin typeface="Consolas" pitchFamily="49" charset="0"/>
+              </a:rPr>
+              <a:t>connectionString</a:t>
+            </a:r>
+            <a:r>
+              <a:rPr lang="en-US" dirty="0" smtClean="0">
+                <a:latin typeface="Consolas" pitchFamily="49" charset="0"/>
+              </a:rPr>
+              <a:t>="Data Source=192.168.101.62;Initial Catalog=</a:t>
+            </a:r>
+            <a:r>
+              <a:rPr lang="en-US" dirty="0" err="1" smtClean="0">
+                <a:latin typeface="Consolas" pitchFamily="49" charset="0"/>
+              </a:rPr>
+              <a:t>apistate.example.com;Persist</a:t>
+            </a:r>
+            <a:r>
+              <a:rPr lang="en-US" dirty="0" smtClean="0">
+                <a:latin typeface="Consolas" pitchFamily="49" charset="0"/>
+              </a:rPr>
+              <a:t> Security Info=</a:t>
+            </a:r>
+            <a:r>
+              <a:rPr lang="en-US" dirty="0" err="1" smtClean="0">
+                <a:latin typeface="Consolas" pitchFamily="49" charset="0"/>
+              </a:rPr>
+              <a:t>True;User</a:t>
+            </a:r>
+            <a:r>
+              <a:rPr lang="en-US" dirty="0" smtClean="0">
+                <a:latin typeface="Consolas" pitchFamily="49" charset="0"/>
+              </a:rPr>
+              <a:t> ID=</a:t>
+            </a:r>
+            <a:r>
+              <a:rPr lang="en-US" dirty="0" err="1" smtClean="0">
+                <a:latin typeface="Consolas" pitchFamily="49" charset="0"/>
+              </a:rPr>
+              <a:t>api.example.com;Password</a:t>
+            </a:r>
+            <a:r>
+              <a:rPr lang="en-US" dirty="0" smtClean="0">
+                <a:latin typeface="Consolas" pitchFamily="49" charset="0"/>
+              </a:rPr>
+              <a:t>=$%</a:t>
+            </a:r>
+            <a:r>
+              <a:rPr lang="en-US" dirty="0" err="1" smtClean="0">
+                <a:latin typeface="Consolas" pitchFamily="49" charset="0"/>
+              </a:rPr>
+              <a:t>Ym</a:t>
+            </a:r>
+            <a:r>
+              <a:rPr lang="en-US" dirty="0" smtClean="0">
+                <a:latin typeface="Consolas" pitchFamily="49" charset="0"/>
+              </a:rPr>
+              <a:t>*k3xtt4#bNNu;Connect Timeout=60;Min Pool Size=0;Max Pool Size=100;" </a:t>
+            </a:r>
+            <a:r>
+              <a:rPr lang="en-US" dirty="0" err="1" smtClean="0">
+                <a:latin typeface="Consolas" pitchFamily="49" charset="0"/>
+              </a:rPr>
+              <a:t>providerName</a:t>
+            </a:r>
+            <a:r>
+              <a:rPr lang="en-US" dirty="0" smtClean="0">
+                <a:latin typeface="Consolas" pitchFamily="49" charset="0"/>
+              </a:rPr>
+              <a:t>="</a:t>
+            </a:r>
+            <a:r>
+              <a:rPr lang="en-US" dirty="0" err="1" smtClean="0">
+                <a:latin typeface="Consolas" pitchFamily="49" charset="0"/>
+              </a:rPr>
+              <a:t>System.Data.SqlClient</a:t>
+            </a:r>
+            <a:r>
+              <a:rPr lang="en-US" dirty="0" smtClean="0">
+                <a:latin typeface="Consolas" pitchFamily="49" charset="0"/>
+              </a:rPr>
+              <a:t>" /&gt;</a:t>
+            </a:r>
+          </a:p>
+          <a:p>
+            <a:pPr>
+              <a:buNone/>
+            </a:pPr>
+            <a:r>
+              <a:rPr lang="en-US" dirty="0" smtClean="0">
+                <a:latin typeface="Consolas" pitchFamily="49" charset="0"/>
+              </a:rPr>
+              <a:t>  &lt;/</a:t>
+            </a:r>
+            <a:r>
+              <a:rPr lang="en-US" dirty="0" err="1" smtClean="0">
+                <a:latin typeface="Consolas" pitchFamily="49" charset="0"/>
+              </a:rPr>
+              <a:t>connectionStrings</a:t>
+            </a:r>
+            <a:r>
+              <a:rPr lang="en-US" dirty="0" smtClean="0">
+                <a:latin typeface="Consolas" pitchFamily="49" charset="0"/>
+              </a:rPr>
+              <a:t>&gt;</a:t>
+            </a:r>
+          </a:p>
+        </p:txBody>
+      </p:sp>
+    </p:spTree>
+  </p:cSld>
+  <p:clrMapOvr>
+    <a:masterClrMapping/>
+  </p:clrMapOvr>
+</p:sld>
+</file>
+
+<file path=ppt/slides/slide28.xml><?xml version="1.0" encoding="utf-8"?>
+<p:sld xmlns:a="http://schemas.openxmlformats.org/drawingml/2006/main" xmlns:r="http://schemas.openxmlformats.org/officeDocument/2006/relationships" xmlns:p="http://schemas.openxmlformats.org/presentationml/2006/main">
+  <p:cSld>
+    <p:spTree>
+      <p:nvGrpSpPr>
+        <p:cNvPr id="1" name=""/>
+        <p:cNvGrpSpPr/>
+        <p:nvPr/>
+      </p:nvGrpSpPr>
+      <p:grpSpPr>
+        <a:xfrm>
+          <a:off x="0" y="0"/>
+          <a:ext cx="0" cy="0"/>
+          <a:chOff x="0" y="0"/>
+          <a:chExt cx="0" cy="0"/>
+        </a:xfrm>
+      </p:grpSpPr>
+      <p:sp>
+        <p:nvSpPr>
+          <p:cNvPr id="2" name="Title 1"/>
+          <p:cNvSpPr>
+            <a:spLocks noGrp="1"/>
+          </p:cNvSpPr>
+          <p:nvPr>
+            <p:ph type="title"/>
+          </p:nvPr>
+        </p:nvSpPr>
+        <p:spPr/>
+        <p:txBody>
+          <a:bodyPr/>
+          <a:lstStyle/>
+          <a:p>
+            <a:pPr algn="l"/>
+            <a:r>
+              <a:rPr lang="en-US" dirty="0" smtClean="0"/>
+              <a:t>3. Enable </a:t>
+            </a:r>
+            <a:r>
+              <a:rPr lang="en-US" dirty="0" err="1" smtClean="0"/>
+              <a:t>SQLServer</a:t>
+            </a:r>
+            <a:r>
+              <a:rPr lang="en-US" dirty="0" smtClean="0"/>
+              <a:t> Session Mode</a:t>
+            </a:r>
+            <a:endParaRPr lang="en-US" dirty="0"/>
+          </a:p>
+        </p:txBody>
+      </p:sp>
+      <p:sp>
+        <p:nvSpPr>
+          <p:cNvPr id="3" name="Content Placeholder 2"/>
+          <p:cNvSpPr>
+            <a:spLocks noGrp="1"/>
+          </p:cNvSpPr>
+          <p:nvPr>
+            <p:ph idx="1"/>
+          </p:nvPr>
+        </p:nvSpPr>
+        <p:spPr/>
+        <p:txBody>
+          <a:bodyPr/>
+          <a:lstStyle/>
+          <a:p>
+            <a:r>
+              <a:rPr lang="en-US" sz="2200" dirty="0" smtClean="0">
+                <a:latin typeface="Consolas" pitchFamily="49" charset="0"/>
+              </a:rPr>
+              <a:t>&lt;</a:t>
+            </a:r>
+            <a:r>
+              <a:rPr lang="en-US" sz="2200" dirty="0" err="1" smtClean="0">
+                <a:latin typeface="Consolas" pitchFamily="49" charset="0"/>
+              </a:rPr>
+              <a:t>connectionStrings</a:t>
+            </a:r>
+            <a:r>
+              <a:rPr lang="en-US" sz="2200" dirty="0" smtClean="0">
+                <a:latin typeface="Consolas" pitchFamily="49" charset="0"/>
+              </a:rPr>
+              <a:t> </a:t>
+            </a:r>
+            <a:r>
+              <a:rPr lang="en-US" sz="2200" dirty="0" err="1" smtClean="0">
+                <a:latin typeface="Consolas" pitchFamily="49" charset="0"/>
+              </a:rPr>
+              <a:t>configSource</a:t>
+            </a:r>
+            <a:r>
+              <a:rPr lang="en-US" sz="2200" dirty="0" smtClean="0">
+                <a:latin typeface="Consolas" pitchFamily="49" charset="0"/>
+              </a:rPr>
+              <a:t>="</a:t>
+            </a:r>
+            <a:r>
+              <a:rPr lang="en-US" sz="2200" i="1" dirty="0" err="1" smtClean="0">
+                <a:solidFill>
+                  <a:srgbClr val="C00000"/>
+                </a:solidFill>
+                <a:latin typeface="Consolas" pitchFamily="49" charset="0"/>
+              </a:rPr>
+              <a:t>web.connectionStrings.config</a:t>
+            </a:r>
+            <a:r>
+              <a:rPr lang="en-US" sz="2200" dirty="0" smtClean="0">
+                <a:latin typeface="Consolas" pitchFamily="49" charset="0"/>
+              </a:rPr>
+              <a:t>" /&gt;</a:t>
+            </a:r>
+          </a:p>
+          <a:p>
+            <a:r>
+              <a:rPr lang="en-US" sz="2200" dirty="0" smtClean="0">
+                <a:latin typeface="Consolas" pitchFamily="49" charset="0"/>
+              </a:rPr>
+              <a:t>&lt;</a:t>
+            </a:r>
+            <a:r>
+              <a:rPr lang="en-US" sz="2200" dirty="0" err="1" smtClean="0">
+                <a:latin typeface="Consolas" pitchFamily="49" charset="0"/>
+              </a:rPr>
+              <a:t>sessionState</a:t>
+            </a:r>
+            <a:r>
+              <a:rPr lang="en-US" sz="2200" dirty="0" smtClean="0">
+                <a:latin typeface="Consolas" pitchFamily="49" charset="0"/>
+              </a:rPr>
+              <a:t> timeout="25" </a:t>
+            </a:r>
+            <a:r>
+              <a:rPr lang="en-US" sz="2200" dirty="0" err="1" smtClean="0">
+                <a:latin typeface="Consolas" pitchFamily="49" charset="0"/>
+              </a:rPr>
+              <a:t>cookieless</a:t>
+            </a:r>
+            <a:r>
+              <a:rPr lang="en-US" sz="2200" dirty="0" smtClean="0">
+                <a:latin typeface="Consolas" pitchFamily="49" charset="0"/>
+              </a:rPr>
+              <a:t>="false" </a:t>
+            </a:r>
+            <a:r>
+              <a:rPr lang="en-US" sz="2200" dirty="0" err="1" smtClean="0">
+                <a:latin typeface="Consolas" pitchFamily="49" charset="0"/>
+              </a:rPr>
+              <a:t>regenerateExpiredSessionId</a:t>
+            </a:r>
+            <a:r>
+              <a:rPr lang="en-US" sz="2200" dirty="0" smtClean="0">
+                <a:latin typeface="Consolas" pitchFamily="49" charset="0"/>
+              </a:rPr>
+              <a:t>="true" mode="</a:t>
+            </a:r>
+            <a:r>
+              <a:rPr lang="en-US" sz="2200" b="1" i="1" dirty="0" err="1" smtClean="0">
+                <a:solidFill>
+                  <a:srgbClr val="C00000"/>
+                </a:solidFill>
+                <a:latin typeface="Consolas" pitchFamily="49" charset="0"/>
+              </a:rPr>
+              <a:t>SQLServer</a:t>
+            </a:r>
+            <a:r>
+              <a:rPr lang="en-US" sz="2200" dirty="0" smtClean="0">
+                <a:latin typeface="Consolas" pitchFamily="49" charset="0"/>
+              </a:rPr>
+              <a:t>" </a:t>
+            </a:r>
+            <a:r>
+              <a:rPr lang="en-US" sz="2200" dirty="0" err="1" smtClean="0">
+                <a:latin typeface="Consolas" pitchFamily="49" charset="0"/>
+              </a:rPr>
+              <a:t>allowCustomSqlDatabase</a:t>
+            </a:r>
+            <a:r>
+              <a:rPr lang="en-US" sz="2200" dirty="0" smtClean="0">
+                <a:latin typeface="Consolas" pitchFamily="49" charset="0"/>
+              </a:rPr>
+              <a:t>="true" </a:t>
+            </a:r>
+            <a:r>
+              <a:rPr lang="en-US" sz="2200" dirty="0" err="1" smtClean="0">
+                <a:latin typeface="Consolas" pitchFamily="49" charset="0"/>
+              </a:rPr>
+              <a:t>sqlConnectionString</a:t>
+            </a:r>
+            <a:r>
+              <a:rPr lang="en-US" sz="2200" dirty="0" smtClean="0">
+                <a:latin typeface="Consolas" pitchFamily="49" charset="0"/>
+              </a:rPr>
+              <a:t>="</a:t>
+            </a:r>
+            <a:r>
+              <a:rPr lang="en-US" sz="2200" i="1" dirty="0" err="1" smtClean="0">
+                <a:solidFill>
+                  <a:srgbClr val="C00000"/>
+                </a:solidFill>
+                <a:latin typeface="Consolas" pitchFamily="49" charset="0"/>
+              </a:rPr>
+              <a:t>snsState</a:t>
+            </a:r>
+            <a:r>
+              <a:rPr lang="en-US" sz="2200" dirty="0" smtClean="0">
+                <a:latin typeface="Consolas" pitchFamily="49" charset="0"/>
+              </a:rPr>
+              <a:t>" /&gt;</a:t>
+            </a:r>
+          </a:p>
+        </p:txBody>
+      </p:sp>
+      <p:pic>
+        <p:nvPicPr>
+          <p:cNvPr id="2050" name="Picture 2"/>
+          <p:cNvPicPr>
+            <a:picLocks noChangeAspect="1" noChangeArrowheads="1"/>
+          </p:cNvPicPr>
+          <p:nvPr/>
+        </p:nvPicPr>
+        <p:blipFill>
+          <a:blip r:embed="rId2" cstate="print"/>
+          <a:srcRect/>
+          <a:stretch>
+            <a:fillRect/>
+          </a:stretch>
+        </p:blipFill>
+        <p:spPr bwMode="auto">
+          <a:xfrm>
+            <a:off x="1019175" y="4038600"/>
+            <a:ext cx="7105650" cy="2057400"/>
+          </a:xfrm>
+          <a:prstGeom prst="rect">
+            <a:avLst/>
+          </a:prstGeom>
+          <a:noFill/>
+          <a:ln w="9525">
+            <a:noFill/>
+            <a:miter lim="800000"/>
+            <a:headEnd/>
+            <a:tailEnd/>
+          </a:ln>
+        </p:spPr>
+      </p:pic>
+    </p:spTree>
+  </p:cSld>
+  <p:clrMapOvr>
+    <a:masterClrMapping/>
+  </p:clrMapOvr>
+</p:sld>
+</file>
+
 <file path=ppt/slides/slide29.xml><?xml version="1.0" encoding="utf-8"?>
 <p:sld xmlns:a="http://schemas.openxmlformats.org/drawingml/2006/main" xmlns:r="http://schemas.openxmlformats.org/officeDocument/2006/relationships" xmlns:p="http://schemas.openxmlformats.org/presentationml/2006/main">
   <p:cSld>
@@ -6972,90 +7112,9 @@
           <a:chExt cx="0" cy="0"/>
         </a:xfrm>
       </p:grpSpPr>
-      <p:sp>
-        <p:nvSpPr>
-          <p:cNvPr id="2" name="Title 1"/>
-          <p:cNvSpPr>
-            <a:spLocks noGrp="1"/>
-          </p:cNvSpPr>
-          <p:nvPr>
-            <p:ph type="title"/>
-          </p:nvPr>
-        </p:nvSpPr>
-        <p:spPr/>
-        <p:txBody>
-          <a:bodyPr/>
-          <a:lstStyle/>
-          <a:p>
-            <a:pPr algn="l"/>
-            <a:r>
-              <a:rPr lang="en-US" sz="3800" dirty="0" smtClean="0"/>
-              <a:t>1. Enable State Service Remote Connection</a:t>
-            </a:r>
-            <a:endParaRPr lang="en-US" sz="3800" dirty="0"/>
-          </a:p>
-        </p:txBody>
-      </p:sp>
-      <p:sp>
-        <p:nvSpPr>
-          <p:cNvPr id="3" name="Content Placeholder 2"/>
-          <p:cNvSpPr>
-            <a:spLocks noGrp="1"/>
-          </p:cNvSpPr>
-          <p:nvPr>
-            <p:ph idx="1"/>
-          </p:nvPr>
-        </p:nvSpPr>
-        <p:spPr/>
-        <p:txBody>
-          <a:bodyPr/>
-          <a:lstStyle/>
-          <a:p>
-            <a:r>
-              <a:rPr lang="en-US" sz="2200" dirty="0" smtClean="0">
-                <a:latin typeface="Consolas" pitchFamily="49" charset="0"/>
-              </a:rPr>
-              <a:t>HKEY_LOCAL_MACHINE\SYSTEM\</a:t>
-            </a:r>
-            <a:r>
-              <a:rPr lang="en-US" sz="2200" dirty="0" err="1" smtClean="0">
-                <a:latin typeface="Consolas" pitchFamily="49" charset="0"/>
-              </a:rPr>
-              <a:t>CurrentControlSet</a:t>
-            </a:r>
-            <a:r>
-              <a:rPr lang="en-US" sz="2200" dirty="0" smtClean="0">
-                <a:latin typeface="Consolas" pitchFamily="49" charset="0"/>
-              </a:rPr>
-              <a:t>\Services\</a:t>
-            </a:r>
-            <a:r>
-              <a:rPr lang="en-US" sz="2200" dirty="0" err="1" smtClean="0">
-                <a:latin typeface="Consolas" pitchFamily="49" charset="0"/>
-              </a:rPr>
-              <a:t>aspnet_state</a:t>
-            </a:r>
-            <a:r>
-              <a:rPr lang="en-US" sz="2200" dirty="0" smtClean="0">
-                <a:latin typeface="Consolas" pitchFamily="49" charset="0"/>
-              </a:rPr>
-              <a:t>\Parameters\</a:t>
-            </a:r>
-            <a:r>
-              <a:rPr lang="en-US" sz="2200" dirty="0" err="1" smtClean="0">
-                <a:latin typeface="Consolas" pitchFamily="49" charset="0"/>
-              </a:rPr>
-              <a:t>AllowRemoteConnection</a:t>
-            </a:r>
-            <a:endParaRPr lang="en-US" sz="2200" dirty="0">
-              <a:latin typeface="Consolas" pitchFamily="49" charset="0"/>
-            </a:endParaRPr>
-          </a:p>
-        </p:txBody>
-      </p:sp>
       <p:pic>
         <p:nvPicPr>
-          <p:cNvPr id="2050" name="Picture 2"/>
+          <p:cNvPr id="4" name="Picture 2" descr="https://lh3.ggpht.com/1IfZLL2QDSjZ0wS7sUhaMlsAOS8BBzdR3wZ1WawgRn7KZAM8nEVZYMOUM-lqQb0ikIzp=w300"/>
           <p:cNvPicPr>
             <a:picLocks noChangeAspect="1" noChangeArrowheads="1"/>
           </p:cNvPicPr>
@@ -7070,19 +7129,13 @@
         </p:blipFill>
         <p:spPr bwMode="auto">
           <a:xfrm>
-            <a:off x="1371600" y="2667000"/>
-            <a:ext cx="6390640" cy="3220720"/>
+            <a:off x="3276600" y="1905000"/>
+            <a:ext cx="2857500" cy="2857500"/>
           </a:xfrm>
           <a:prstGeom prst="rect">
             <a:avLst/>
           </a:prstGeom>
           <a:noFill/>
-          <a:ln w="9525">
-            <a:noFill/>
-            <a:miter lim="800000"/>
-            <a:headEnd/>
-            <a:tailEnd/>
-          </a:ln>
         </p:spPr>
       </p:pic>
     </p:spTree>
@@ -7245,6 +7298,144 @@
           <a:p>
             <a:pPr algn="l"/>
             <a:r>
+              <a:rPr lang="en-US" sz="3800" dirty="0" smtClean="0"/>
+              <a:t>1. Enable State Service Remote Connection</a:t>
+            </a:r>
+            <a:endParaRPr lang="en-US" sz="3800" dirty="0"/>
+          </a:p>
+        </p:txBody>
+      </p:sp>
+      <p:sp>
+        <p:nvSpPr>
+          <p:cNvPr id="3" name="Content Placeholder 2"/>
+          <p:cNvSpPr>
+            <a:spLocks noGrp="1"/>
+          </p:cNvSpPr>
+          <p:nvPr>
+            <p:ph idx="1"/>
+          </p:nvPr>
+        </p:nvSpPr>
+        <p:spPr/>
+        <p:txBody>
+          <a:bodyPr/>
+          <a:lstStyle/>
+          <a:p>
+            <a:r>
+              <a:rPr lang="en-US" sz="2200" dirty="0" smtClean="0">
+                <a:latin typeface="Consolas" pitchFamily="49" charset="0"/>
+              </a:rPr>
+              <a:t>HKEY_LOCAL_MACHINE\SYSTEM\</a:t>
+            </a:r>
+            <a:r>
+              <a:rPr lang="en-US" sz="2200" dirty="0" err="1" smtClean="0">
+                <a:latin typeface="Consolas" pitchFamily="49" charset="0"/>
+              </a:rPr>
+              <a:t>CurrentControlSet</a:t>
+            </a:r>
+            <a:r>
+              <a:rPr lang="en-US" sz="2200" dirty="0" smtClean="0">
+                <a:latin typeface="Consolas" pitchFamily="49" charset="0"/>
+              </a:rPr>
+              <a:t>\Services\</a:t>
+            </a:r>
+            <a:r>
+              <a:rPr lang="en-US" sz="2200" dirty="0" err="1" smtClean="0">
+                <a:latin typeface="Consolas" pitchFamily="49" charset="0"/>
+              </a:rPr>
+              <a:t>aspnet_state</a:t>
+            </a:r>
+            <a:r>
+              <a:rPr lang="en-US" sz="2200" dirty="0" smtClean="0">
+                <a:latin typeface="Consolas" pitchFamily="49" charset="0"/>
+              </a:rPr>
+              <a:t>\Parameters\</a:t>
+            </a:r>
+            <a:r>
+              <a:rPr lang="en-US" sz="2200" dirty="0" err="1" smtClean="0">
+                <a:latin typeface="Consolas" pitchFamily="49" charset="0"/>
+              </a:rPr>
+              <a:t>AllowRemoteConnection</a:t>
+            </a:r>
+            <a:endParaRPr lang="en-US" sz="2200" dirty="0">
+              <a:latin typeface="Consolas" pitchFamily="49" charset="0"/>
+            </a:endParaRPr>
+          </a:p>
+        </p:txBody>
+      </p:sp>
+      <p:pic>
+        <p:nvPicPr>
+          <p:cNvPr id="2050" name="Picture 2"/>
+          <p:cNvPicPr>
+            <a:picLocks noChangeAspect="1" noChangeArrowheads="1"/>
+          </p:cNvPicPr>
+          <p:nvPr/>
+        </p:nvPicPr>
+        <p:blipFill>
+          <a:blip r:embed="rId2" cstate="print"/>
+          <a:srcRect/>
+          <a:stretch>
+            <a:fillRect/>
+          </a:stretch>
+        </p:blipFill>
+        <p:spPr bwMode="auto">
+          <a:xfrm>
+            <a:off x="1371600" y="2667000"/>
+            <a:ext cx="6390640" cy="3220720"/>
+          </a:xfrm>
+          <a:prstGeom prst="rect">
+            <a:avLst/>
+          </a:prstGeom>
+          <a:noFill/>
+          <a:ln w="9525">
+            <a:noFill/>
+            <a:miter lim="800000"/>
+            <a:headEnd/>
+            <a:tailEnd/>
+          </a:ln>
+        </p:spPr>
+      </p:pic>
+    </p:spTree>
+  </p:cSld>
+  <p:clrMapOvr>
+    <a:masterClrMapping/>
+  </p:clrMapOvr>
+</p:sld>
+</file>
+
+<file path=ppt/slides/slide31.xml><?xml version="1.0" encoding="utf-8"?>
+<p:sld xmlns:a="http://schemas.openxmlformats.org/drawingml/2006/main" xmlns:r="http://schemas.openxmlformats.org/officeDocument/2006/relationships" xmlns:p="http://schemas.openxmlformats.org/presentationml/2006/main">
+  <p:cSld>
+    <p:spTree>
+      <p:nvGrpSpPr>
+        <p:cNvPr id="1" name=""/>
+        <p:cNvGrpSpPr/>
+        <p:nvPr/>
+      </p:nvGrpSpPr>
+      <p:grpSpPr>
+        <a:xfrm>
+          <a:off x="0" y="0"/>
+          <a:ext cx="0" cy="0"/>
+          <a:chOff x="0" y="0"/>
+          <a:chExt cx="0" cy="0"/>
+        </a:xfrm>
+      </p:grpSpPr>
+      <p:sp>
+        <p:nvSpPr>
+          <p:cNvPr id="2" name="Title 1"/>
+          <p:cNvSpPr>
+            <a:spLocks noGrp="1"/>
+          </p:cNvSpPr>
+          <p:nvPr>
+            <p:ph type="title"/>
+          </p:nvPr>
+        </p:nvSpPr>
+        <p:spPr/>
+        <p:txBody>
+          <a:bodyPr/>
+          <a:lstStyle/>
+          <a:p>
+            <a:pPr algn="l"/>
+            <a:r>
               <a:rPr lang="en-US" dirty="0" smtClean="0"/>
               <a:t>2. Open State Service Firewall Port</a:t>
             </a:r>
@@ -7325,7 +7516,7 @@
 </p:sld>
 </file>
 
-<file path=ppt/slides/slide31.xml><?xml version="1.0" encoding="utf-8"?>
+<file path=ppt/slides/slide32.xml><?xml version="1.0" encoding="utf-8"?>
 <p:sld xmlns:a="http://schemas.openxmlformats.org/drawingml/2006/main" xmlns:r="http://schemas.openxmlformats.org/officeDocument/2006/relationships" xmlns:p="http://schemas.openxmlformats.org/presentationml/2006/main">
   <p:cSld>
     <p:spTree>
@@ -7439,7 +7630,7 @@
 </p:sld>
 </file>
 
-<file path=ppt/slides/slide32.xml><?xml version="1.0" encoding="utf-8"?>
+<file path=ppt/slides/slide33.xml><?xml version="1.0" encoding="utf-8"?>
 <p:sld xmlns:a="http://schemas.openxmlformats.org/drawingml/2006/main" xmlns:r="http://schemas.openxmlformats.org/officeDocument/2006/relationships" xmlns:p="http://schemas.openxmlformats.org/presentationml/2006/main">
   <p:cSld>
     <p:spTree>
@@ -7722,7 +7913,7 @@
 </p:sld>
 </file>
 
-<file path=ppt/slides/slide33.xml><?xml version="1.0" encoding="utf-8"?>
+<file path=ppt/slides/slide34.xml><?xml version="1.0" encoding="utf-8"?>
 <p:sld xmlns:a="http://schemas.openxmlformats.org/drawingml/2006/main" xmlns:r="http://schemas.openxmlformats.org/officeDocument/2006/relationships" xmlns:p="http://schemas.openxmlformats.org/presentationml/2006/main">
   <p:cSld>
     <p:spTree>
@@ -7773,7 +7964,7 @@
 </p:sld>
 </file>
 
-<file path=ppt/slides/slide34.xml><?xml version="1.0" encoding="utf-8"?>
+<file path=ppt/slides/slide35.xml><?xml version="1.0" encoding="utf-8"?>
 <p:sld xmlns:a="http://schemas.openxmlformats.org/drawingml/2006/main" xmlns:r="http://schemas.openxmlformats.org/officeDocument/2006/relationships" xmlns:p="http://schemas.openxmlformats.org/presentationml/2006/main">
   <p:cSld>
     <p:spTree>
@@ -7899,7 +8090,7 @@
 </p:sld>
 </file>
 
-<file path=ppt/slides/slide35.xml><?xml version="1.0" encoding="utf-8"?>
+<file path=ppt/slides/slide36.xml><?xml version="1.0" encoding="utf-8"?>
 <p:sld xmlns:a="http://schemas.openxmlformats.org/drawingml/2006/main" xmlns:r="http://schemas.openxmlformats.org/officeDocument/2006/relationships" xmlns:p="http://schemas.openxmlformats.org/presentationml/2006/main">
   <p:cSld>
     <p:spTree>
@@ -7950,7 +8141,7 @@
 </p:sld>
 </file>
 
-<file path=ppt/slides/slide36.xml><?xml version="1.0" encoding="utf-8"?>
+<file path=ppt/slides/slide37.xml><?xml version="1.0" encoding="utf-8"?>
 <p:sld xmlns:a="http://schemas.openxmlformats.org/drawingml/2006/main" xmlns:r="http://schemas.openxmlformats.org/officeDocument/2006/relationships" xmlns:p="http://schemas.openxmlformats.org/presentationml/2006/main">
   <p:cSld>
     <p:spTree>
@@ -8055,7 +8246,7 @@
 </p:sld>
 </file>
 
-<file path=ppt/slides/slide37.xml><?xml version="1.0" encoding="utf-8"?>
+<file path=ppt/slides/slide38.xml><?xml version="1.0" encoding="utf-8"?>
 <p:sld xmlns:a="http://schemas.openxmlformats.org/drawingml/2006/main" xmlns:r="http://schemas.openxmlformats.org/officeDocument/2006/relationships" xmlns:p="http://schemas.openxmlformats.org/presentationml/2006/main">
   <p:cSld>
     <p:spTree>
@@ -8106,7 +8297,7 @@
 </p:sld>
 </file>
 
-<file path=ppt/slides/slide38.xml><?xml version="1.0" encoding="utf-8"?>
+<file path=ppt/slides/slide39.xml><?xml version="1.0" encoding="utf-8"?>
 <p:sld xmlns:a="http://schemas.openxmlformats.org/drawingml/2006/main" xmlns:r="http://schemas.openxmlformats.org/officeDocument/2006/relationships" xmlns:p="http://schemas.openxmlformats.org/presentationml/2006/main">
   <p:cSld>
     <p:spTree>
@@ -8262,114 +8453,6 @@
             <a:headEnd/>
             <a:tailEnd/>
           </a:ln>
-        </p:spPr>
-      </p:pic>
-    </p:spTree>
-  </p:cSld>
-  <p:clrMapOvr>
-    <a:masterClrMapping/>
-  </p:clrMapOvr>
-</p:sld>
-</file>
-
-<file path=ppt/slides/slide39.xml><?xml version="1.0" encoding="utf-8"?>
-<p:sld xmlns:a="http://schemas.openxmlformats.org/drawingml/2006/main" xmlns:r="http://schemas.openxmlformats.org/officeDocument/2006/relationships" xmlns:p="http://schemas.openxmlformats.org/presentationml/2006/main">
-  <p:cSld>
-    <p:spTree>
-      <p:nvGrpSpPr>
-        <p:cNvPr id="1" name=""/>
-        <p:cNvGrpSpPr/>
-        <p:nvPr/>
-      </p:nvGrpSpPr>
-      <p:grpSpPr>
-        <a:xfrm>
-          <a:off x="0" y="0"/>
-          <a:ext cx="0" cy="0"/>
-          <a:chOff x="0" y="0"/>
-          <a:chExt cx="0" cy="0"/>
-        </a:xfrm>
-      </p:grpSpPr>
-      <p:sp>
-        <p:nvSpPr>
-          <p:cNvPr id="2" name="Title 1"/>
-          <p:cNvSpPr>
-            <a:spLocks noGrp="1"/>
-          </p:cNvSpPr>
-          <p:nvPr>
-            <p:ph type="title"/>
-          </p:nvPr>
-        </p:nvSpPr>
-        <p:spPr/>
-        <p:txBody>
-          <a:bodyPr/>
-          <a:lstStyle/>
-          <a:p>
-            <a:r>
-              <a:rPr lang="en-US" dirty="0" smtClean="0"/>
-              <a:t>Scaling Out Database</a:t>
-            </a:r>
-            <a:endParaRPr lang="en-US" dirty="0"/>
-          </a:p>
-        </p:txBody>
-      </p:sp>
-      <p:sp>
-        <p:nvSpPr>
-          <p:cNvPr id="3" name="Content Placeholder 2"/>
-          <p:cNvSpPr>
-            <a:spLocks noGrp="1"/>
-          </p:cNvSpPr>
-          <p:nvPr>
-            <p:ph idx="1"/>
-          </p:nvPr>
-        </p:nvSpPr>
-        <p:spPr>
-          <a:xfrm>
-            <a:off x="457200" y="1600200"/>
-            <a:ext cx="4267200" cy="4525963"/>
-          </a:xfrm>
-        </p:spPr>
-        <p:txBody>
-          <a:bodyPr/>
-          <a:lstStyle/>
-          <a:p>
-            <a:r>
-              <a:rPr lang="en-US" sz="2400" dirty="0" smtClean="0"/>
-              <a:t>Scaling processing</a:t>
-            </a:r>
-          </a:p>
-          <a:p>
-            <a:r>
-              <a:rPr lang="en-US" sz="2400" dirty="0" smtClean="0"/>
-              <a:t>Scaling storage</a:t>
-            </a:r>
-            <a:endParaRPr lang="en-US" sz="2400" dirty="0"/>
-          </a:p>
-        </p:txBody>
-      </p:sp>
-      <p:pic>
-        <p:nvPicPr>
-          <p:cNvPr id="4" name="Picture 2" descr="http://www.cestfait.ch/sites/default/files/db_replication.jpg"/>
-          <p:cNvPicPr>
-            <a:picLocks noChangeAspect="1" noChangeArrowheads="1"/>
-          </p:cNvPicPr>
-          <p:nvPr/>
-        </p:nvPicPr>
-        <p:blipFill>
-          <a:blip r:embed="rId2" cstate="print"/>
-          <a:srcRect/>
-          <a:stretch>
-            <a:fillRect/>
-          </a:stretch>
-        </p:blipFill>
-        <p:spPr bwMode="auto">
-          <a:xfrm>
-            <a:off x="4114800" y="1752600"/>
-            <a:ext cx="4095750" cy="4286250"/>
-          </a:xfrm>
-          <a:prstGeom prst="rect">
-            <a:avLst/>
-          </a:prstGeom>
-          <a:noFill/>
         </p:spPr>
       </p:pic>
     </p:spTree>
@@ -8586,6 +8669,114 @@
           <a:p>
             <a:r>
               <a:rPr lang="en-US" dirty="0" smtClean="0"/>
+              <a:t>Scaling Out Database</a:t>
+            </a:r>
+            <a:endParaRPr lang="en-US" dirty="0"/>
+          </a:p>
+        </p:txBody>
+      </p:sp>
+      <p:sp>
+        <p:nvSpPr>
+          <p:cNvPr id="3" name="Content Placeholder 2"/>
+          <p:cNvSpPr>
+            <a:spLocks noGrp="1"/>
+          </p:cNvSpPr>
+          <p:nvPr>
+            <p:ph idx="1"/>
+          </p:nvPr>
+        </p:nvSpPr>
+        <p:spPr>
+          <a:xfrm>
+            <a:off x="457200" y="1600200"/>
+            <a:ext cx="4267200" cy="4525963"/>
+          </a:xfrm>
+        </p:spPr>
+        <p:txBody>
+          <a:bodyPr/>
+          <a:lstStyle/>
+          <a:p>
+            <a:r>
+              <a:rPr lang="en-US" sz="2400" dirty="0" smtClean="0"/>
+              <a:t>Scaling processing</a:t>
+            </a:r>
+          </a:p>
+          <a:p>
+            <a:r>
+              <a:rPr lang="en-US" sz="2400" dirty="0" smtClean="0"/>
+              <a:t>Scaling storage</a:t>
+            </a:r>
+            <a:endParaRPr lang="en-US" sz="2400" dirty="0"/>
+          </a:p>
+        </p:txBody>
+      </p:sp>
+      <p:pic>
+        <p:nvPicPr>
+          <p:cNvPr id="4" name="Picture 2" descr="http://www.cestfait.ch/sites/default/files/db_replication.jpg"/>
+          <p:cNvPicPr>
+            <a:picLocks noChangeAspect="1" noChangeArrowheads="1"/>
+          </p:cNvPicPr>
+          <p:nvPr/>
+        </p:nvPicPr>
+        <p:blipFill>
+          <a:blip r:embed="rId2" cstate="print"/>
+          <a:srcRect/>
+          <a:stretch>
+            <a:fillRect/>
+          </a:stretch>
+        </p:blipFill>
+        <p:spPr bwMode="auto">
+          <a:xfrm>
+            <a:off x="4114800" y="1752600"/>
+            <a:ext cx="4095750" cy="4286250"/>
+          </a:xfrm>
+          <a:prstGeom prst="rect">
+            <a:avLst/>
+          </a:prstGeom>
+          <a:noFill/>
+        </p:spPr>
+      </p:pic>
+    </p:spTree>
+  </p:cSld>
+  <p:clrMapOvr>
+    <a:masterClrMapping/>
+  </p:clrMapOvr>
+</p:sld>
+</file>
+
+<file path=ppt/slides/slide41.xml><?xml version="1.0" encoding="utf-8"?>
+<p:sld xmlns:a="http://schemas.openxmlformats.org/drawingml/2006/main" xmlns:r="http://schemas.openxmlformats.org/officeDocument/2006/relationships" xmlns:p="http://schemas.openxmlformats.org/presentationml/2006/main">
+  <p:cSld>
+    <p:spTree>
+      <p:nvGrpSpPr>
+        <p:cNvPr id="1" name=""/>
+        <p:cNvGrpSpPr/>
+        <p:nvPr/>
+      </p:nvGrpSpPr>
+      <p:grpSpPr>
+        <a:xfrm>
+          <a:off x="0" y="0"/>
+          <a:ext cx="0" cy="0"/>
+          <a:chOff x="0" y="0"/>
+          <a:chExt cx="0" cy="0"/>
+        </a:xfrm>
+      </p:grpSpPr>
+      <p:sp>
+        <p:nvSpPr>
+          <p:cNvPr id="2" name="Title 1"/>
+          <p:cNvSpPr>
+            <a:spLocks noGrp="1"/>
+          </p:cNvSpPr>
+          <p:nvPr>
+            <p:ph type="title"/>
+          </p:nvPr>
+        </p:nvSpPr>
+        <p:spPr/>
+        <p:txBody>
+          <a:bodyPr/>
+          <a:lstStyle/>
+          <a:p>
+            <a:r>
+              <a:rPr lang="en-US" dirty="0" smtClean="0"/>
               <a:t>Scalable Shared Databases</a:t>
             </a:r>
             <a:endParaRPr lang="en-US" dirty="0"/>
@@ -8738,7 +8929,7 @@
 </p:sld>
 </file>
 
-<file path=ppt/slides/slide41.xml><?xml version="1.0" encoding="utf-8"?>
+<file path=ppt/slides/slide42.xml><?xml version="1.0" encoding="utf-8"?>
 <p:sld xmlns:a="http://schemas.openxmlformats.org/drawingml/2006/main" xmlns:r="http://schemas.openxmlformats.org/officeDocument/2006/relationships" xmlns:p="http://schemas.openxmlformats.org/presentationml/2006/main">
   <p:cSld>
     <p:spTree>
@@ -8904,7 +9095,7 @@
 </p:sld>
 </file>
 
-<file path=ppt/slides/slide42.xml><?xml version="1.0" encoding="utf-8"?>
+<file path=ppt/slides/slide43.xml><?xml version="1.0" encoding="utf-8"?>
 <p:sld xmlns:a="http://schemas.openxmlformats.org/drawingml/2006/main" xmlns:r="http://schemas.openxmlformats.org/officeDocument/2006/relationships" xmlns:p="http://schemas.openxmlformats.org/presentationml/2006/main">
   <p:cSld>
     <p:spTree>
@@ -9079,7 +9270,7 @@
 </p:sld>
 </file>
 
-<file path=ppt/slides/slide43.xml><?xml version="1.0" encoding="utf-8"?>
+<file path=ppt/slides/slide44.xml><?xml version="1.0" encoding="utf-8"?>
 <p:sld xmlns:a="http://schemas.openxmlformats.org/drawingml/2006/main" xmlns:r="http://schemas.openxmlformats.org/officeDocument/2006/relationships" xmlns:p="http://schemas.openxmlformats.org/presentationml/2006/main">
   <p:cSld>
     <p:spTree>
@@ -9391,7 +9582,7 @@
 </p:sld>
 </file>
 
-<file path=ppt/slides/slide44.xml><?xml version="1.0" encoding="utf-8"?>
+<file path=ppt/slides/slide45.xml><?xml version="1.0" encoding="utf-8"?>
 <p:sld xmlns:a="http://schemas.openxmlformats.org/drawingml/2006/main" xmlns:r="http://schemas.openxmlformats.org/officeDocument/2006/relationships" xmlns:p="http://schemas.openxmlformats.org/presentationml/2006/main">
   <p:cSld>
     <p:spTree>
@@ -9597,7 +9788,7 @@
 </p:sld>
 </file>
 
-<file path=ppt/slides/slide45.xml><?xml version="1.0" encoding="utf-8"?>
+<file path=ppt/slides/slide46.xml><?xml version="1.0" encoding="utf-8"?>
 <p:sld xmlns:a="http://schemas.openxmlformats.org/drawingml/2006/main" xmlns:r="http://schemas.openxmlformats.org/officeDocument/2006/relationships" xmlns:p="http://schemas.openxmlformats.org/presentationml/2006/main">
   <p:cSld>
     <p:spTree>
@@ -9727,7 +9918,7 @@
 </p:sld>
 </file>
 
-<file path=ppt/slides/slide46.xml><?xml version="1.0" encoding="utf-8"?>
+<file path=ppt/slides/slide47.xml><?xml version="1.0" encoding="utf-8"?>
 <p:sld xmlns:a="http://schemas.openxmlformats.org/drawingml/2006/main" xmlns:r="http://schemas.openxmlformats.org/officeDocument/2006/relationships" xmlns:p="http://schemas.openxmlformats.org/presentationml/2006/main">
   <p:cSld>
     <p:spTree>
@@ -9844,7 +10035,7 @@
 </p:sld>
 </file>
 
-<file path=ppt/slides/slide47.xml><?xml version="1.0" encoding="utf-8"?>
+<file path=ppt/slides/slide48.xml><?xml version="1.0" encoding="utf-8"?>
 <p:sld xmlns:a="http://schemas.openxmlformats.org/drawingml/2006/main" xmlns:r="http://schemas.openxmlformats.org/officeDocument/2006/relationships" xmlns:p="http://schemas.openxmlformats.org/presentationml/2006/main">
   <p:cSld>
     <p:spTree>
@@ -9960,7 +10151,7 @@
 </p:sld>
 </file>
 
-<file path=ppt/slides/slide48.xml><?xml version="1.0" encoding="utf-8"?>
+<file path=ppt/slides/slide49.xml><?xml version="1.0" encoding="utf-8"?>
 <p:sld xmlns:a="http://schemas.openxmlformats.org/drawingml/2006/main" xmlns:r="http://schemas.openxmlformats.org/officeDocument/2006/relationships" xmlns:p="http://schemas.openxmlformats.org/presentationml/2006/main">
   <p:cSld>
     <p:spTree>
@@ -10134,7 +10325,178 @@
 </p:sld>
 </file>
 
-<file path=ppt/slides/slide49.xml><?xml version="1.0" encoding="utf-8"?>
+<file path=ppt/slides/slide5.xml><?xml version="1.0" encoding="utf-8"?>
+<p:sld xmlns:a="http://schemas.openxmlformats.org/drawingml/2006/main" xmlns:r="http://schemas.openxmlformats.org/officeDocument/2006/relationships" xmlns:p="http://schemas.openxmlformats.org/presentationml/2006/main">
+  <p:cSld>
+    <p:spTree>
+      <p:nvGrpSpPr>
+        <p:cNvPr id="1" name=""/>
+        <p:cNvGrpSpPr/>
+        <p:nvPr/>
+      </p:nvGrpSpPr>
+      <p:grpSpPr>
+        <a:xfrm>
+          <a:off x="0" y="0"/>
+          <a:ext cx="0" cy="0"/>
+          <a:chOff x="0" y="0"/>
+          <a:chExt cx="0" cy="0"/>
+        </a:xfrm>
+      </p:grpSpPr>
+      <p:sp>
+        <p:nvSpPr>
+          <p:cNvPr id="2" name="Title 1"/>
+          <p:cNvSpPr>
+            <a:spLocks noGrp="1"/>
+          </p:cNvSpPr>
+          <p:nvPr>
+            <p:ph type="title"/>
+          </p:nvPr>
+        </p:nvSpPr>
+        <p:spPr/>
+        <p:txBody>
+          <a:bodyPr/>
+          <a:lstStyle/>
+          <a:p>
+            <a:r>
+              <a:rPr lang="en-US" dirty="0" smtClean="0"/>
+              <a:t>Scalability [1]</a:t>
+            </a:r>
+            <a:endParaRPr lang="en-US" dirty="0"/>
+          </a:p>
+        </p:txBody>
+      </p:sp>
+      <p:pic>
+        <p:nvPicPr>
+          <p:cNvPr id="98306" name="Picture 2" descr="http://www.the4thmarketeer.com/wp-content/uploads/2011/09/scalabilty.jpg"/>
+          <p:cNvPicPr>
+            <a:picLocks noChangeAspect="1" noChangeArrowheads="1"/>
+          </p:cNvPicPr>
+          <p:nvPr/>
+        </p:nvPicPr>
+        <p:blipFill>
+          <a:blip r:embed="rId2" cstate="print"/>
+          <a:srcRect/>
+          <a:stretch>
+            <a:fillRect/>
+          </a:stretch>
+        </p:blipFill>
+        <p:spPr bwMode="auto">
+          <a:xfrm>
+            <a:off x="76200" y="2286000"/>
+            <a:ext cx="2488790" cy="2057400"/>
+          </a:xfrm>
+          <a:prstGeom prst="rect">
+            <a:avLst/>
+          </a:prstGeom>
+          <a:noFill/>
+        </p:spPr>
+      </p:pic>
+      <p:sp>
+        <p:nvSpPr>
+          <p:cNvPr id="3" name="Content Placeholder 2"/>
+          <p:cNvSpPr>
+            <a:spLocks noGrp="1"/>
+          </p:cNvSpPr>
+          <p:nvPr>
+            <p:ph idx="1"/>
+          </p:nvPr>
+        </p:nvSpPr>
+        <p:spPr>
+          <a:xfrm>
+            <a:off x="2514600" y="1600200"/>
+            <a:ext cx="6400800" cy="4525963"/>
+          </a:xfrm>
+        </p:spPr>
+        <p:txBody>
+          <a:bodyPr>
+            <a:noAutofit/>
+          </a:bodyPr>
+          <a:lstStyle/>
+          <a:p>
+            <a:r>
+              <a:rPr lang="en-US" sz="2800" i="1" dirty="0" smtClean="0">
+                <a:solidFill>
+                  <a:srgbClr val="C00000"/>
+                </a:solidFill>
+              </a:rPr>
+              <a:t>Scaling</a:t>
+            </a:r>
+            <a:r>
+              <a:rPr lang="en-US" sz="2800" dirty="0" smtClean="0"/>
+              <a:t> is about </a:t>
+            </a:r>
+            <a:r>
+              <a:rPr lang="en-US" sz="2800" u="sng" dirty="0" smtClean="0"/>
+              <a:t>allocating resources</a:t>
+            </a:r>
+            <a:r>
+              <a:rPr lang="en-US" sz="2800" dirty="0" smtClean="0"/>
+              <a:t> for an application and managing those resources efficiently to minimize contention.</a:t>
+            </a:r>
+          </a:p>
+          <a:p>
+            <a:r>
+              <a:rPr lang="en-US" sz="2800" dirty="0" smtClean="0"/>
+              <a:t>The </a:t>
+            </a:r>
+            <a:r>
+              <a:rPr lang="en-US" sz="2800" i="1" dirty="0" smtClean="0">
+                <a:solidFill>
+                  <a:srgbClr val="C00000"/>
+                </a:solidFill>
+              </a:rPr>
+              <a:t>scalability</a:t>
+            </a:r>
+            <a:r>
+              <a:rPr lang="en-US" sz="2800" dirty="0" smtClean="0"/>
+              <a:t> of an application is a measure of </a:t>
+            </a:r>
+            <a:r>
+              <a:rPr lang="en-US" sz="2800" u="sng" dirty="0" smtClean="0"/>
+              <a:t>the number of users</a:t>
+            </a:r>
+            <a:r>
+              <a:rPr lang="en-US" sz="2800" dirty="0" smtClean="0"/>
+              <a:t> it can effectively support at the same time.</a:t>
+            </a:r>
+          </a:p>
+          <a:p>
+            <a:r>
+              <a:rPr lang="en-US" sz="2800" dirty="0" smtClean="0"/>
+              <a:t>The point at which an application </a:t>
+            </a:r>
+            <a:r>
+              <a:rPr lang="en-US" sz="2800" i="1" dirty="0" smtClean="0">
+                <a:solidFill>
+                  <a:srgbClr val="C00000"/>
+                </a:solidFill>
+              </a:rPr>
+              <a:t>cannot handle </a:t>
+            </a:r>
+            <a:r>
+              <a:rPr lang="en-US" sz="2800" dirty="0" smtClean="0"/>
+              <a:t>additional users effectively is the </a:t>
+            </a:r>
+            <a:r>
+              <a:rPr lang="en-US" sz="2800" u="sng" dirty="0" smtClean="0"/>
+              <a:t>limit</a:t>
+            </a:r>
+            <a:r>
+              <a:rPr lang="en-US" sz="2800" dirty="0" smtClean="0"/>
+              <a:t> of its scalability.</a:t>
+            </a:r>
+          </a:p>
+        </p:txBody>
+      </p:sp>
+    </p:spTree>
+  </p:cSld>
+  <p:clrMapOvr>
+    <a:masterClrMapping/>
+  </p:clrMapOvr>
+</p:sld>
+</file>
+
+<file path=ppt/slides/slide50.xml><?xml version="1.0" encoding="utf-8"?>
 <p:sld xmlns:a="http://schemas.openxmlformats.org/drawingml/2006/main" xmlns:r="http://schemas.openxmlformats.org/officeDocument/2006/relationships" xmlns:p="http://schemas.openxmlformats.org/presentationml/2006/main">
   <p:cSld>
     <p:spTree>
@@ -10211,177 +10573,6 @@
       </p:par>
     </p:tnLst>
   </p:timing>
-</p:sld>
-</file>
-
-<file path=ppt/slides/slide5.xml><?xml version="1.0" encoding="utf-8"?>
-<p:sld xmlns:a="http://schemas.openxmlformats.org/drawingml/2006/main" xmlns:r="http://schemas.openxmlformats.org/officeDocument/2006/relationships" xmlns:p="http://schemas.openxmlformats.org/presentationml/2006/main">
-  <p:cSld>
-    <p:spTree>
-      <p:nvGrpSpPr>
-        <p:cNvPr id="1" name=""/>
-        <p:cNvGrpSpPr/>
-        <p:nvPr/>
-      </p:nvGrpSpPr>
-      <p:grpSpPr>
-        <a:xfrm>
-          <a:off x="0" y="0"/>
-          <a:ext cx="0" cy="0"/>
-          <a:chOff x="0" y="0"/>
-          <a:chExt cx="0" cy="0"/>
-        </a:xfrm>
-      </p:grpSpPr>
-      <p:sp>
-        <p:nvSpPr>
-          <p:cNvPr id="2" name="Title 1"/>
-          <p:cNvSpPr>
-            <a:spLocks noGrp="1"/>
-          </p:cNvSpPr>
-          <p:nvPr>
-            <p:ph type="title"/>
-          </p:nvPr>
-        </p:nvSpPr>
-        <p:spPr/>
-        <p:txBody>
-          <a:bodyPr/>
-          <a:lstStyle/>
-          <a:p>
-            <a:r>
-              <a:rPr lang="en-US" dirty="0" smtClean="0"/>
-              <a:t>Scalability [1]</a:t>
-            </a:r>
-            <a:endParaRPr lang="en-US" dirty="0"/>
-          </a:p>
-        </p:txBody>
-      </p:sp>
-      <p:pic>
-        <p:nvPicPr>
-          <p:cNvPr id="98306" name="Picture 2" descr="http://www.the4thmarketeer.com/wp-content/uploads/2011/09/scalabilty.jpg"/>
-          <p:cNvPicPr>
-            <a:picLocks noChangeAspect="1" noChangeArrowheads="1"/>
-          </p:cNvPicPr>
-          <p:nvPr/>
-        </p:nvPicPr>
-        <p:blipFill>
-          <a:blip r:embed="rId2" cstate="print"/>
-          <a:srcRect/>
-          <a:stretch>
-            <a:fillRect/>
-          </a:stretch>
-        </p:blipFill>
-        <p:spPr bwMode="auto">
-          <a:xfrm>
-            <a:off x="76200" y="2286000"/>
-            <a:ext cx="2488790" cy="2057400"/>
-          </a:xfrm>
-          <a:prstGeom prst="rect">
-            <a:avLst/>
-          </a:prstGeom>
-          <a:noFill/>
-        </p:spPr>
-      </p:pic>
-      <p:sp>
-        <p:nvSpPr>
-          <p:cNvPr id="3" name="Content Placeholder 2"/>
-          <p:cNvSpPr>
-            <a:spLocks noGrp="1"/>
-          </p:cNvSpPr>
-          <p:nvPr>
-            <p:ph idx="1"/>
-          </p:nvPr>
-        </p:nvSpPr>
-        <p:spPr>
-          <a:xfrm>
-            <a:off x="2514600" y="1600200"/>
-            <a:ext cx="6400800" cy="4525963"/>
-          </a:xfrm>
-        </p:spPr>
-        <p:txBody>
-          <a:bodyPr>
-            <a:noAutofit/>
-          </a:bodyPr>
-          <a:lstStyle/>
-          <a:p>
-            <a:r>
-              <a:rPr lang="en-US" sz="2800" i="1" dirty="0" smtClean="0">
-                <a:solidFill>
-                  <a:srgbClr val="C00000"/>
-                </a:solidFill>
-              </a:rPr>
-              <a:t>Scaling</a:t>
-            </a:r>
-            <a:r>
-              <a:rPr lang="en-US" sz="2800" dirty="0" smtClean="0"/>
-              <a:t> is about </a:t>
-            </a:r>
-            <a:r>
-              <a:rPr lang="en-US" sz="2800" u="sng" dirty="0" smtClean="0"/>
-              <a:t>allocating resources</a:t>
-            </a:r>
-            <a:r>
-              <a:rPr lang="en-US" sz="2800" dirty="0" smtClean="0"/>
-              <a:t> for an application and managing those resources efficiently to minimize contention.</a:t>
-            </a:r>
-          </a:p>
-          <a:p>
-            <a:r>
-              <a:rPr lang="en-US" sz="2800" dirty="0" smtClean="0"/>
-              <a:t>The </a:t>
-            </a:r>
-            <a:r>
-              <a:rPr lang="en-US" sz="2800" i="1" dirty="0" smtClean="0">
-                <a:solidFill>
-                  <a:srgbClr val="C00000"/>
-                </a:solidFill>
-              </a:rPr>
-              <a:t>scalability</a:t>
-            </a:r>
-            <a:r>
-              <a:rPr lang="en-US" sz="2800" dirty="0" smtClean="0"/>
-              <a:t> of an application is a measure of </a:t>
-            </a:r>
-            <a:r>
-              <a:rPr lang="en-US" sz="2800" u="sng" dirty="0" smtClean="0"/>
-              <a:t>the number of users</a:t>
-            </a:r>
-            <a:r>
-              <a:rPr lang="en-US" sz="2800" dirty="0" smtClean="0"/>
-              <a:t> it can effectively support at the same time.</a:t>
-            </a:r>
-          </a:p>
-          <a:p>
-            <a:r>
-              <a:rPr lang="en-US" sz="2800" dirty="0" smtClean="0"/>
-              <a:t>The point at which an application </a:t>
-            </a:r>
-            <a:r>
-              <a:rPr lang="en-US" sz="2800" i="1" dirty="0" smtClean="0">
-                <a:solidFill>
-                  <a:srgbClr val="C00000"/>
-                </a:solidFill>
-              </a:rPr>
-              <a:t>cannot handle </a:t>
-            </a:r>
-            <a:r>
-              <a:rPr lang="en-US" sz="2800" dirty="0" smtClean="0"/>
-              <a:t>additional users effectively is the </a:t>
-            </a:r>
-            <a:r>
-              <a:rPr lang="en-US" sz="2800" u="sng" dirty="0" smtClean="0"/>
-              <a:t>limit</a:t>
-            </a:r>
-            <a:r>
-              <a:rPr lang="en-US" sz="2800" dirty="0" smtClean="0"/>
-              <a:t> of its scalability.</a:t>
-            </a:r>
-          </a:p>
-        </p:txBody>
-      </p:sp>
-    </p:spTree>
-  </p:cSld>
-  <p:clrMapOvr>
-    <a:masterClrMapping/>
-  </p:clrMapOvr>
 </p:sld>
 </file>
 

--- a/Microservices/07.1. Scalability.pptx
+++ b/Microservices/07.1. Scalability.pptx
@@ -5,7 +5,7 @@
     <p:sldMasterId id="2147483708" r:id="rId1"/>
   </p:sldMasterIdLst>
   <p:notesMasterIdLst>
-    <p:notesMasterId r:id="rId52"/>
+    <p:notesMasterId r:id="rId54"/>
   </p:notesMasterIdLst>
   <p:sldIdLst>
     <p:sldId id="670" r:id="rId2"/>
@@ -25,39 +25,41 @@
     <p:sldId id="755" r:id="rId16"/>
     <p:sldId id="756" r:id="rId17"/>
     <p:sldId id="757" r:id="rId18"/>
-    <p:sldId id="758" r:id="rId19"/>
-    <p:sldId id="759" r:id="rId20"/>
-    <p:sldId id="760" r:id="rId21"/>
-    <p:sldId id="752" r:id="rId22"/>
-    <p:sldId id="717" r:id="rId23"/>
-    <p:sldId id="724" r:id="rId24"/>
-    <p:sldId id="740" r:id="rId25"/>
-    <p:sldId id="741" r:id="rId26"/>
-    <p:sldId id="742" r:id="rId27"/>
-    <p:sldId id="743" r:id="rId28"/>
-    <p:sldId id="744" r:id="rId29"/>
-    <p:sldId id="745" r:id="rId30"/>
-    <p:sldId id="746" r:id="rId31"/>
-    <p:sldId id="747" r:id="rId32"/>
-    <p:sldId id="748" r:id="rId33"/>
-    <p:sldId id="749" r:id="rId34"/>
-    <p:sldId id="736" r:id="rId35"/>
-    <p:sldId id="668" r:id="rId36"/>
-    <p:sldId id="739" r:id="rId37"/>
-    <p:sldId id="669" r:id="rId38"/>
-    <p:sldId id="636" r:id="rId39"/>
-    <p:sldId id="750" r:id="rId40"/>
-    <p:sldId id="730" r:id="rId41"/>
-    <p:sldId id="726" r:id="rId42"/>
-    <p:sldId id="729" r:id="rId43"/>
-    <p:sldId id="731" r:id="rId44"/>
-    <p:sldId id="621" r:id="rId45"/>
-    <p:sldId id="732" r:id="rId46"/>
-    <p:sldId id="734" r:id="rId47"/>
-    <p:sldId id="735" r:id="rId48"/>
-    <p:sldId id="733" r:id="rId49"/>
-    <p:sldId id="624" r:id="rId50"/>
-    <p:sldId id="516" r:id="rId51"/>
+    <p:sldId id="761" r:id="rId19"/>
+    <p:sldId id="758" r:id="rId20"/>
+    <p:sldId id="759" r:id="rId21"/>
+    <p:sldId id="760" r:id="rId22"/>
+    <p:sldId id="762" r:id="rId23"/>
+    <p:sldId id="752" r:id="rId24"/>
+    <p:sldId id="717" r:id="rId25"/>
+    <p:sldId id="724" r:id="rId26"/>
+    <p:sldId id="740" r:id="rId27"/>
+    <p:sldId id="741" r:id="rId28"/>
+    <p:sldId id="742" r:id="rId29"/>
+    <p:sldId id="743" r:id="rId30"/>
+    <p:sldId id="744" r:id="rId31"/>
+    <p:sldId id="745" r:id="rId32"/>
+    <p:sldId id="746" r:id="rId33"/>
+    <p:sldId id="747" r:id="rId34"/>
+    <p:sldId id="748" r:id="rId35"/>
+    <p:sldId id="749" r:id="rId36"/>
+    <p:sldId id="736" r:id="rId37"/>
+    <p:sldId id="668" r:id="rId38"/>
+    <p:sldId id="739" r:id="rId39"/>
+    <p:sldId id="669" r:id="rId40"/>
+    <p:sldId id="636" r:id="rId41"/>
+    <p:sldId id="750" r:id="rId42"/>
+    <p:sldId id="730" r:id="rId43"/>
+    <p:sldId id="726" r:id="rId44"/>
+    <p:sldId id="729" r:id="rId45"/>
+    <p:sldId id="731" r:id="rId46"/>
+    <p:sldId id="621" r:id="rId47"/>
+    <p:sldId id="732" r:id="rId48"/>
+    <p:sldId id="734" r:id="rId49"/>
+    <p:sldId id="735" r:id="rId50"/>
+    <p:sldId id="733" r:id="rId51"/>
+    <p:sldId id="624" r:id="rId52"/>
+    <p:sldId id="516" r:id="rId53"/>
   </p:sldIdLst>
   <p:sldSz cx="9144000" cy="6858000" type="screen4x3"/>
   <p:notesSz cx="6858000" cy="9144000"/>
@@ -5001,7 +5003,7 @@
             <a:pPr algn="l"/>
             <a:r>
               <a:rPr lang="en-US" dirty="0" smtClean="0"/>
-              <a:t>5. Verify the OOM on the Server</a:t>
+              <a:t>5. Understand the OOM</a:t>
             </a:r>
             <a:endParaRPr lang="en-US" dirty="0"/>
           </a:p>
@@ -5024,53 +5026,25 @@
           <a:p>
             <a:r>
               <a:rPr lang="en-US" sz="2400" dirty="0" smtClean="0"/>
-              <a:t>When a process needs memory and the kernel has none left to give — no free RAM, nothing reclaimable, and no swap to page out to — the kernel can't just </a:t>
-            </a:r>
+              <a:t>When a process needs memory and the kernel has none left to give — no free RAM, nothing reclaimable, and no swap to page out to — the kernel can't just wait.</a:t>
+            </a:r>
+          </a:p>
+          <a:p>
             <a:r>
               <a:rPr lang="en-US" sz="2400" dirty="0" smtClean="0"/>
-              <a:t>wait.</a:t>
+              <a:t>To  avoid a total system freeze, it invokes the Out Of Memory (OOM) killer.</a:t>
             </a:r>
           </a:p>
           <a:p>
             <a:r>
               <a:rPr lang="en-US" sz="2400" dirty="0" smtClean="0"/>
-              <a:t>To  </a:t>
-            </a:r>
+              <a:t>The OOM killer picks a process to terminate to free memory.</a:t>
+            </a:r>
+          </a:p>
+          <a:p>
             <a:r>
               <a:rPr lang="en-US" sz="2400" dirty="0" smtClean="0"/>
-              <a:t>avoid a total system freeze, it invokes the Out Of </a:t>
-            </a:r>
-            <a:r>
-              <a:rPr lang="en-US" sz="2400" dirty="0" smtClean="0"/>
-              <a:t>Memory (OOM) </a:t>
-            </a:r>
-            <a:r>
-              <a:rPr lang="en-US" sz="2400" dirty="0" smtClean="0"/>
-              <a:t>killer</a:t>
-            </a:r>
-            <a:r>
-              <a:rPr lang="en-US" sz="2400" dirty="0" smtClean="0"/>
-              <a:t>.</a:t>
-            </a:r>
-          </a:p>
-          <a:p>
-            <a:r>
-              <a:rPr lang="en-US" sz="2400" dirty="0" smtClean="0"/>
-              <a:t>The OOM killer picks a process to terminate to free </a:t>
-            </a:r>
-            <a:r>
-              <a:rPr lang="en-US" sz="2400" dirty="0" smtClean="0"/>
-              <a:t>memory.</a:t>
-            </a:r>
-          </a:p>
-          <a:p>
-            <a:r>
-              <a:rPr lang="en-US" sz="2400" dirty="0" smtClean="0"/>
-              <a:t>It </a:t>
-            </a:r>
-            <a:r>
-              <a:rPr lang="en-US" sz="2400" dirty="0" smtClean="0"/>
-              <a:t>scores every process (roughly by how much memory it's using, via </a:t>
+              <a:t>It scores every process (roughly by how much memory it's using, via </a:t>
             </a:r>
             <a:r>
               <a:rPr lang="en-US" sz="2400" dirty="0" err="1" smtClean="0"/>
@@ -5078,19 +5052,7 @@
             </a:r>
             <a:r>
               <a:rPr lang="en-US" sz="2400" dirty="0" smtClean="0"/>
-              <a:t>) and kills the </a:t>
-            </a:r>
-            <a:r>
-              <a:rPr lang="en-US" sz="2400" dirty="0" smtClean="0"/>
-              <a:t>one that </a:t>
-            </a:r>
-            <a:r>
-              <a:rPr lang="en-US" sz="2400" dirty="0" smtClean="0"/>
-              <a:t>frees the </a:t>
-            </a:r>
-            <a:r>
-              <a:rPr lang="en-US" sz="2400" dirty="0" smtClean="0"/>
-              <a:t>most.</a:t>
+              <a:t>) and kills the one that frees the most.</a:t>
             </a:r>
           </a:p>
           <a:p>
@@ -5098,13 +5060,6 @@
               <a:rPr lang="en-US" sz="2400" dirty="0" smtClean="0"/>
               <a:t>The kill is a hard SIGKILL (signal 9) — the process is terminated instantly, no clean shutdown.</a:t>
             </a:r>
-            <a:endParaRPr lang="en-US" sz="2400" dirty="0" smtClean="0"/>
-          </a:p>
-          <a:p>
-            <a:endParaRPr lang="en-US" sz="2400" dirty="0" smtClean="0"/>
-          </a:p>
-          <a:p>
-            <a:endParaRPr lang="en-US" sz="2400" dirty="0"/>
           </a:p>
         </p:txBody>
       </p:sp>
@@ -5151,7 +5106,7 @@
             <a:pPr algn="l"/>
             <a:r>
               <a:rPr lang="en-US" dirty="0" smtClean="0"/>
-              <a:t>6. Run the Script Locally</a:t>
+              <a:t>6. Verify the OOM</a:t>
             </a:r>
             <a:endParaRPr lang="en-US" dirty="0"/>
           </a:p>
@@ -5173,42 +5128,73 @@
           <a:lstStyle/>
           <a:p>
             <a:r>
-              <a:rPr lang="en-US" dirty="0" smtClean="0"/>
-              <a:t>k6 run script.js</a:t>
-            </a:r>
-          </a:p>
-          <a:p>
-            <a:r>
-              <a:rPr lang="en-US" dirty="0" smtClean="0"/>
-              <a:t>k6 run --out 'web-dashboard=host=0.0.0.0&amp;port=5665&amp;export=</a:t>
-            </a:r>
-            <a:r>
-              <a:rPr lang="en-US" dirty="0" err="1" smtClean="0"/>
-              <a:t>report.html&amp;open</a:t>
-            </a:r>
-            <a:r>
-              <a:rPr lang="en-US" dirty="0" smtClean="0"/>
-              <a:t>=true' script.js</a:t>
-            </a:r>
-          </a:p>
-          <a:p>
-            <a:r>
-              <a:rPr lang="en-US" dirty="0" smtClean="0"/>
-              <a:t># Open: </a:t>
-            </a:r>
-            <a:r>
-              <a:rPr lang="en-US" dirty="0" smtClean="0">
-                <a:hlinkClick r:id="rId2"/>
-              </a:rPr>
-              <a:t>http://192.168.1.45:5665</a:t>
-            </a:r>
-            <a:endParaRPr lang="en-US" dirty="0" smtClean="0"/>
-          </a:p>
-          <a:p>
-            <a:endParaRPr lang="en-US" dirty="0" smtClean="0"/>
-          </a:p>
-          <a:p>
-            <a:endParaRPr lang="en-US" dirty="0"/>
+              <a:rPr lang="en-US" sz="2800" dirty="0" smtClean="0"/>
+              <a:t>Ask Claude Code to record baseline (pre-test):</a:t>
+            </a:r>
+          </a:p>
+          <a:p>
+            <a:pPr lvl="1"/>
+            <a:r>
+              <a:rPr lang="en-US" sz="2400" dirty="0" smtClean="0"/>
+              <a:t>OOM kills this boot: 0.</a:t>
+            </a:r>
+          </a:p>
+          <a:p>
+            <a:pPr lvl="1"/>
+            <a:r>
+              <a:rPr lang="en-US" sz="2400" dirty="0" err="1" smtClean="0"/>
+              <a:t>MySQL</a:t>
+            </a:r>
+            <a:r>
+              <a:rPr lang="en-US" sz="2400" dirty="0" smtClean="0"/>
+              <a:t> PID: 847, 0 restarts.</a:t>
+            </a:r>
+          </a:p>
+          <a:p>
+            <a:pPr lvl="1"/>
+            <a:r>
+              <a:rPr lang="en-US" sz="2400" dirty="0" smtClean="0"/>
+              <a:t>Memory: used 1679 MB / available 2229 MB</a:t>
+            </a:r>
+          </a:p>
+          <a:p>
+            <a:pPr lvl="1"/>
+            <a:r>
+              <a:rPr lang="en-US" sz="2400" dirty="0" err="1" smtClean="0"/>
+              <a:t>MySQL</a:t>
+            </a:r>
+            <a:r>
+              <a:rPr lang="en-US" sz="2400" dirty="0" smtClean="0"/>
+              <a:t> Resident Set Size (RSS): 746 MB</a:t>
+            </a:r>
+          </a:p>
+          <a:p>
+            <a:pPr lvl="1"/>
+            <a:r>
+              <a:rPr lang="en-US" sz="2400" dirty="0" smtClean="0"/>
+              <a:t>php8.4 total: 754 MB</a:t>
+            </a:r>
+          </a:p>
+          <a:p>
+            <a:pPr lvl="1"/>
+            <a:r>
+              <a:rPr lang="en-US" sz="2400" dirty="0" smtClean="0"/>
+              <a:t>The sampler logs every 3 s for ~20 min into /</a:t>
+            </a:r>
+            <a:r>
+              <a:rPr lang="en-US" sz="2400" dirty="0" err="1" smtClean="0"/>
+              <a:t>tmp</a:t>
+            </a:r>
+            <a:r>
+              <a:rPr lang="en-US" sz="2400" dirty="0" smtClean="0"/>
+              <a:t>/oom_watch.log.</a:t>
+            </a:r>
+          </a:p>
+          <a:p>
+            <a:r>
+              <a:rPr lang="en-US" sz="2800" dirty="0" smtClean="0"/>
+              <a:t>Run a load test.</a:t>
+            </a:r>
           </a:p>
         </p:txBody>
       </p:sp>
@@ -5255,59 +5241,63 @@
             <a:pPr algn="l"/>
             <a:r>
               <a:rPr lang="en-US" dirty="0" smtClean="0"/>
-              <a:t>7</a:t>
-            </a:r>
+              <a:t>7. Run the Script Locally</a:t>
+            </a:r>
+            <a:endParaRPr lang="en-US" dirty="0"/>
+          </a:p>
+        </p:txBody>
+      </p:sp>
+      <p:sp>
+        <p:nvSpPr>
+          <p:cNvPr id="3" name="Content Placeholder 2"/>
+          <p:cNvSpPr>
+            <a:spLocks noGrp="1"/>
+          </p:cNvSpPr>
+          <p:nvPr>
+            <p:ph idx="1"/>
+          </p:nvPr>
+        </p:nvSpPr>
+        <p:spPr/>
+        <p:txBody>
+          <a:bodyPr/>
+          <a:lstStyle/>
+          <a:p>
             <a:r>
               <a:rPr lang="en-US" dirty="0" smtClean="0"/>
-              <a:t>. Check for Memory Leaks</a:t>
-            </a:r>
-            <a:endParaRPr lang="en-US" dirty="0"/>
-          </a:p>
-        </p:txBody>
-      </p:sp>
-      <p:sp>
-        <p:nvSpPr>
-          <p:cNvPr id="3" name="Content Placeholder 2"/>
-          <p:cNvSpPr>
-            <a:spLocks noGrp="1"/>
-          </p:cNvSpPr>
-          <p:nvPr>
-            <p:ph idx="1"/>
-          </p:nvPr>
-        </p:nvSpPr>
-        <p:spPr/>
-        <p:txBody>
-          <a:bodyPr/>
-          <a:lstStyle/>
+              <a:t>k6 run script.js</a:t>
+            </a:r>
+          </a:p>
           <a:p>
             <a:r>
               <a:rPr lang="en-US" dirty="0" smtClean="0"/>
-              <a:t>Investigate the memory usage of each process during the load test</a:t>
+              <a:t>k6 run --out 'web-dashboard=host=0.0.0.0&amp;port=5665&amp;export=</a:t>
+            </a:r>
+            <a:r>
+              <a:rPr lang="en-US" dirty="0" err="1" smtClean="0"/>
+              <a:t>report.html&amp;open</a:t>
             </a:r>
             <a:r>
               <a:rPr lang="en-US" dirty="0" smtClean="0"/>
-              <a:t>.</a:t>
+              <a:t>=true' script.js</a:t>
             </a:r>
           </a:p>
           <a:p>
             <a:r>
               <a:rPr lang="en-US" dirty="0" smtClean="0"/>
-              <a:t>If a memory leak were present, the Resident Set Size (RSS) would continue to increase as a worker processes additional </a:t>
-            </a:r>
-            <a:r>
-              <a:rPr lang="en-US" dirty="0" smtClean="0"/>
-              <a:t>requests.</a:t>
-            </a:r>
-          </a:p>
-          <a:p>
-            <a:r>
-              <a:rPr lang="en-US" dirty="0" smtClean="0"/>
-              <a:t>Instead</a:t>
-            </a:r>
-            <a:r>
-              <a:rPr lang="en-US" dirty="0" smtClean="0"/>
-              <a:t>, each worker's RSS reaches a peak within the first 30–60 seconds and then remains essentially flat for the remainder of its lifetime.</a:t>
-            </a:r>
+              <a:t># Open: </a:t>
+            </a:r>
+            <a:r>
+              <a:rPr lang="en-US" dirty="0" smtClean="0">
+                <a:hlinkClick r:id="rId2"/>
+              </a:rPr>
+              <a:t>http://192.168.1.45:5665</a:t>
+            </a:r>
+            <a:endParaRPr lang="en-US" dirty="0" smtClean="0"/>
+          </a:p>
+          <a:p>
+            <a:endParaRPr lang="en-US" dirty="0" smtClean="0"/>
+          </a:p>
+          <a:p>
             <a:endParaRPr lang="en-US" dirty="0"/>
           </a:p>
         </p:txBody>
@@ -5471,150 +5461,44 @@
             <a:pPr algn="l"/>
             <a:r>
               <a:rPr lang="en-US" dirty="0" smtClean="0"/>
-              <a:t>8</a:t>
-            </a:r>
+              <a:t>8. Check for Memory Leaks</a:t>
+            </a:r>
+            <a:endParaRPr lang="en-US" dirty="0"/>
+          </a:p>
+        </p:txBody>
+      </p:sp>
+      <p:sp>
+        <p:nvSpPr>
+          <p:cNvPr id="3" name="Content Placeholder 2"/>
+          <p:cNvSpPr>
+            <a:spLocks noGrp="1"/>
+          </p:cNvSpPr>
+          <p:nvPr>
+            <p:ph idx="1"/>
+          </p:nvPr>
+        </p:nvSpPr>
+        <p:spPr/>
+        <p:txBody>
+          <a:bodyPr/>
+          <a:lstStyle/>
+          <a:p>
             <a:r>
               <a:rPr lang="en-US" dirty="0" smtClean="0"/>
-              <a:t>. Understand PHP-FPM</a:t>
+              <a:t>Investigate the memory usage of each process during the load test.</a:t>
+            </a:r>
+          </a:p>
+          <a:p>
+            <a:r>
+              <a:rPr lang="en-US" dirty="0" smtClean="0"/>
+              <a:t>If a memory leak were present, the Resident Set Size (RSS) would continue to increase as a worker processes additional requests.</a:t>
+            </a:r>
+          </a:p>
+          <a:p>
+            <a:r>
+              <a:rPr lang="en-US" dirty="0" smtClean="0"/>
+              <a:t>Instead, each worker's RSS reaches a peak within the first 30–60 seconds and then remains essentially flat for the remainder of its lifetime.</a:t>
             </a:r>
             <a:endParaRPr lang="en-US" dirty="0"/>
-          </a:p>
-        </p:txBody>
-      </p:sp>
-      <p:sp>
-        <p:nvSpPr>
-          <p:cNvPr id="3" name="Content Placeholder 2"/>
-          <p:cNvSpPr>
-            <a:spLocks noGrp="1"/>
-          </p:cNvSpPr>
-          <p:nvPr>
-            <p:ph idx="1"/>
-          </p:nvPr>
-        </p:nvSpPr>
-        <p:spPr/>
-        <p:txBody>
-          <a:bodyPr/>
-          <a:lstStyle/>
-          <a:p>
-            <a:r>
-              <a:rPr lang="en-US" sz="2400" dirty="0" smtClean="0"/>
-              <a:t>The process manager is a feature of PHP-FPM (</a:t>
-            </a:r>
-            <a:r>
-              <a:rPr lang="en-US" sz="2400" dirty="0" err="1" smtClean="0"/>
-              <a:t>FastCGI</a:t>
-            </a:r>
-            <a:r>
-              <a:rPr lang="en-US" sz="2400" dirty="0" smtClean="0"/>
-              <a:t> Process Manager), which is part of PHP </a:t>
-            </a:r>
-            <a:r>
-              <a:rPr lang="en-US" sz="2400" dirty="0" smtClean="0"/>
-              <a:t>itself.</a:t>
-            </a:r>
-          </a:p>
-          <a:p>
-            <a:r>
-              <a:rPr lang="en-US" sz="2400" dirty="0" smtClean="0"/>
-              <a:t>PHP-FPM decides "I want to run 5 </a:t>
-            </a:r>
-            <a:r>
-              <a:rPr lang="en-US" sz="2400" dirty="0" smtClean="0"/>
-              <a:t>site </a:t>
-            </a:r>
-            <a:r>
-              <a:rPr lang="en-US" sz="2400" dirty="0" smtClean="0"/>
-              <a:t>workers" (pm/</a:t>
-            </a:r>
-            <a:r>
-              <a:rPr lang="en-US" sz="2400" dirty="0" err="1" smtClean="0"/>
-              <a:t>max_children</a:t>
-            </a:r>
-            <a:r>
-              <a:rPr lang="en-US" sz="2400" dirty="0" smtClean="0"/>
-              <a:t>). It uses ordinary OS calls (fork) to create them — but the policy (how many, when) </a:t>
-            </a:r>
-            <a:r>
-              <a:rPr lang="en-US" sz="2400" dirty="0" smtClean="0"/>
-              <a:t>is </a:t>
-            </a:r>
-            <a:r>
-              <a:rPr lang="en-US" sz="2400" dirty="0" smtClean="0"/>
-              <a:t>entirely PHP's</a:t>
-            </a:r>
-            <a:r>
-              <a:rPr lang="en-US" sz="2400" dirty="0" smtClean="0"/>
-              <a:t>.</a:t>
-            </a:r>
-          </a:p>
-          <a:p>
-            <a:r>
-              <a:rPr lang="en-US" sz="2400" dirty="0" err="1" smtClean="0"/>
-              <a:t>systemd</a:t>
-            </a:r>
-            <a:r>
-              <a:rPr lang="en-US" sz="2400" dirty="0" smtClean="0"/>
-              <a:t> launches the FPM master as a service and, with our proposed </a:t>
-            </a:r>
-            <a:r>
-              <a:rPr lang="en-US" sz="2400" dirty="0" err="1" smtClean="0"/>
-              <a:t>MemoryMax</a:t>
-            </a:r>
-            <a:r>
-              <a:rPr lang="en-US" sz="2400" dirty="0" smtClean="0"/>
-              <a:t>=2000M</a:t>
-            </a:r>
-            <a:r>
-              <a:rPr lang="en-US" sz="2400" dirty="0" smtClean="0"/>
-              <a:t>, wraps all its workers in a </a:t>
-            </a:r>
-            <a:r>
-              <a:rPr lang="en-US" sz="2400" dirty="0" err="1" smtClean="0"/>
-              <a:t>cgroup</a:t>
-            </a:r>
-            <a:r>
-              <a:rPr lang="en-US" sz="2400" dirty="0" smtClean="0"/>
-              <a:t> — a kernel memory </a:t>
-            </a:r>
-            <a:r>
-              <a:rPr lang="en-US" sz="2400" dirty="0" smtClean="0"/>
-              <a:t>boundary.</a:t>
-            </a:r>
-          </a:p>
-          <a:p>
-            <a:r>
-              <a:rPr lang="en-US" sz="2400" dirty="0" smtClean="0"/>
-              <a:t>The kernel doesn't </a:t>
-            </a:r>
-            <a:r>
-              <a:rPr lang="en-US" sz="2400" dirty="0" smtClean="0"/>
-              <a:t>know or care about "dynamic </a:t>
-            </a:r>
-            <a:r>
-              <a:rPr lang="en-US" sz="2400" dirty="0" err="1" smtClean="0"/>
-              <a:t>vs</a:t>
-            </a:r>
-            <a:r>
-              <a:rPr lang="en-US" sz="2400" dirty="0" smtClean="0"/>
-              <a:t> </a:t>
-            </a:r>
-            <a:r>
-              <a:rPr lang="en-US" sz="2400" dirty="0" err="1" smtClean="0"/>
-              <a:t>ondemand</a:t>
-            </a:r>
-            <a:r>
-              <a:rPr lang="en-US" sz="2400" dirty="0" smtClean="0"/>
-              <a:t>"; it just enforces "this group of processes can't exceed </a:t>
-            </a:r>
-            <a:r>
-              <a:rPr lang="en-US" sz="2400" dirty="0" smtClean="0"/>
-              <a:t>2.0 </a:t>
-            </a:r>
-            <a:r>
-              <a:rPr lang="en-US" sz="2400" dirty="0" smtClean="0"/>
-              <a:t>GB."</a:t>
-            </a:r>
-            <a:endParaRPr lang="en-US" sz="2400" dirty="0"/>
           </a:p>
         </p:txBody>
       </p:sp>
@@ -5627,6 +5511,243 @@
 </file>
 
 <file path=ppt/slides/slide21.xml><?xml version="1.0" encoding="utf-8"?>
+<p:sld xmlns:a="http://schemas.openxmlformats.org/drawingml/2006/main" xmlns:r="http://schemas.openxmlformats.org/officeDocument/2006/relationships" xmlns:p="http://schemas.openxmlformats.org/presentationml/2006/main">
+  <p:cSld>
+    <p:spTree>
+      <p:nvGrpSpPr>
+        <p:cNvPr id="1" name=""/>
+        <p:cNvGrpSpPr/>
+        <p:nvPr/>
+      </p:nvGrpSpPr>
+      <p:grpSpPr>
+        <a:xfrm>
+          <a:off x="0" y="0"/>
+          <a:ext cx="0" cy="0"/>
+          <a:chOff x="0" y="0"/>
+          <a:chExt cx="0" cy="0"/>
+        </a:xfrm>
+      </p:grpSpPr>
+      <p:sp>
+        <p:nvSpPr>
+          <p:cNvPr id="2" name="Title 1"/>
+          <p:cNvSpPr>
+            <a:spLocks noGrp="1"/>
+          </p:cNvSpPr>
+          <p:nvPr>
+            <p:ph type="title"/>
+          </p:nvPr>
+        </p:nvSpPr>
+        <p:spPr/>
+        <p:txBody>
+          <a:bodyPr/>
+          <a:lstStyle/>
+          <a:p>
+            <a:pPr algn="l"/>
+            <a:r>
+              <a:rPr lang="en-US" dirty="0" smtClean="0"/>
+              <a:t>9. Understand PHP-FPM</a:t>
+            </a:r>
+            <a:endParaRPr lang="en-US" dirty="0"/>
+          </a:p>
+        </p:txBody>
+      </p:sp>
+      <p:sp>
+        <p:nvSpPr>
+          <p:cNvPr id="3" name="Content Placeholder 2"/>
+          <p:cNvSpPr>
+            <a:spLocks noGrp="1"/>
+          </p:cNvSpPr>
+          <p:nvPr>
+            <p:ph idx="1"/>
+          </p:nvPr>
+        </p:nvSpPr>
+        <p:spPr/>
+        <p:txBody>
+          <a:bodyPr/>
+          <a:lstStyle/>
+          <a:p>
+            <a:r>
+              <a:rPr lang="en-US" sz="2400" dirty="0" smtClean="0"/>
+              <a:t>The process manager is a feature of PHP-FPM (</a:t>
+            </a:r>
+            <a:r>
+              <a:rPr lang="en-US" sz="2400" dirty="0" err="1" smtClean="0"/>
+              <a:t>FastCGI</a:t>
+            </a:r>
+            <a:r>
+              <a:rPr lang="en-US" sz="2400" dirty="0" smtClean="0"/>
+              <a:t> Process Manager), which is part of PHP itself.</a:t>
+            </a:r>
+          </a:p>
+          <a:p>
+            <a:r>
+              <a:rPr lang="en-US" sz="2400" dirty="0" smtClean="0"/>
+              <a:t>PHP-FPM decides "I want to run 5 site workers" (pm/</a:t>
+            </a:r>
+            <a:r>
+              <a:rPr lang="en-US" sz="2400" dirty="0" err="1" smtClean="0"/>
+              <a:t>max_children</a:t>
+            </a:r>
+            <a:r>
+              <a:rPr lang="en-US" sz="2400" dirty="0" smtClean="0"/>
+              <a:t>). It uses ordinary OS calls (fork) to create them — but the policy (how many, when) is entirely PHP's.</a:t>
+            </a:r>
+          </a:p>
+          <a:p>
+            <a:r>
+              <a:rPr lang="en-US" sz="2400" dirty="0" err="1" smtClean="0"/>
+              <a:t>systemd</a:t>
+            </a:r>
+            <a:r>
+              <a:rPr lang="en-US" sz="2400" dirty="0" smtClean="0"/>
+              <a:t> launches the FPM master as a service and, with our proposed </a:t>
+            </a:r>
+            <a:r>
+              <a:rPr lang="en-US" sz="2400" dirty="0" err="1" smtClean="0"/>
+              <a:t>MemoryMax</a:t>
+            </a:r>
+            <a:r>
+              <a:rPr lang="en-US" sz="2400" dirty="0" smtClean="0"/>
+              <a:t>=2000M, wraps all its workers in a </a:t>
+            </a:r>
+            <a:r>
+              <a:rPr lang="en-US" sz="2400" dirty="0" err="1" smtClean="0"/>
+              <a:t>cgroup</a:t>
+            </a:r>
+            <a:r>
+              <a:rPr lang="en-US" sz="2400" dirty="0" smtClean="0"/>
+              <a:t> — a kernel memory boundary.</a:t>
+            </a:r>
+          </a:p>
+          <a:p>
+            <a:r>
+              <a:rPr lang="en-US" sz="2400" dirty="0" smtClean="0"/>
+              <a:t>The kernel doesn't know or care about "dynamic </a:t>
+            </a:r>
+            <a:r>
+              <a:rPr lang="en-US" sz="2400" dirty="0" err="1" smtClean="0"/>
+              <a:t>vs</a:t>
+            </a:r>
+            <a:r>
+              <a:rPr lang="en-US" sz="2400" dirty="0" smtClean="0"/>
+              <a:t> </a:t>
+            </a:r>
+            <a:r>
+              <a:rPr lang="en-US" sz="2400" dirty="0" err="1" smtClean="0"/>
+              <a:t>ondemand</a:t>
+            </a:r>
+            <a:r>
+              <a:rPr lang="en-US" sz="2400" dirty="0" smtClean="0"/>
+              <a:t>"; it just enforces "this group of processes can't exceed 2.0 GB."</a:t>
+            </a:r>
+            <a:endParaRPr lang="en-US" sz="2400" dirty="0"/>
+          </a:p>
+        </p:txBody>
+      </p:sp>
+    </p:spTree>
+  </p:cSld>
+  <p:clrMapOvr>
+    <a:masterClrMapping/>
+  </p:clrMapOvr>
+</p:sld>
+</file>
+
+<file path=ppt/slides/slide22.xml><?xml version="1.0" encoding="utf-8"?>
+<p:sld xmlns:a="http://schemas.openxmlformats.org/drawingml/2006/main" xmlns:r="http://schemas.openxmlformats.org/officeDocument/2006/relationships" xmlns:p="http://schemas.openxmlformats.org/presentationml/2006/main">
+  <p:cSld>
+    <p:spTree>
+      <p:nvGrpSpPr>
+        <p:cNvPr id="1" name=""/>
+        <p:cNvGrpSpPr/>
+        <p:nvPr/>
+      </p:nvGrpSpPr>
+      <p:grpSpPr>
+        <a:xfrm>
+          <a:off x="0" y="0"/>
+          <a:ext cx="0" cy="0"/>
+          <a:chOff x="0" y="0"/>
+          <a:chExt cx="0" cy="0"/>
+        </a:xfrm>
+      </p:grpSpPr>
+      <p:sp>
+        <p:nvSpPr>
+          <p:cNvPr id="2" name="Title 1"/>
+          <p:cNvSpPr>
+            <a:spLocks noGrp="1"/>
+          </p:cNvSpPr>
+          <p:nvPr>
+            <p:ph type="title"/>
+          </p:nvPr>
+        </p:nvSpPr>
+        <p:spPr/>
+        <p:txBody>
+          <a:bodyPr/>
+          <a:lstStyle/>
+          <a:p>
+            <a:pPr algn="l"/>
+            <a:r>
+              <a:rPr lang="en-US" dirty="0" smtClean="0"/>
+              <a:t>10. Reallocate Resources</a:t>
+            </a:r>
+            <a:endParaRPr lang="en-US" dirty="0"/>
+          </a:p>
+        </p:txBody>
+      </p:sp>
+      <p:sp>
+        <p:nvSpPr>
+          <p:cNvPr id="3" name="Content Placeholder 2"/>
+          <p:cNvSpPr>
+            <a:spLocks noGrp="1"/>
+          </p:cNvSpPr>
+          <p:nvPr>
+            <p:ph idx="1"/>
+          </p:nvPr>
+        </p:nvSpPr>
+        <p:spPr/>
+        <p:txBody>
+          <a:bodyPr/>
+          <a:lstStyle/>
+          <a:p>
+            <a:r>
+              <a:rPr lang="en-US" sz="2400" dirty="0" err="1" smtClean="0"/>
+              <a:t>max_children</a:t>
+            </a:r>
+            <a:r>
+              <a:rPr lang="en-US" sz="2400" dirty="0" smtClean="0"/>
+              <a:t> = 4 for resource-intensive sites</a:t>
+            </a:r>
+            <a:r>
+              <a:rPr lang="en-US" sz="2400" dirty="0" smtClean="0"/>
+              <a:t>.</a:t>
+            </a:r>
+            <a:endParaRPr lang="en-US" sz="2400" smtClean="0"/>
+          </a:p>
+          <a:p>
+            <a:r>
+              <a:rPr lang="en-US" sz="2400" smtClean="0"/>
+              <a:t>max_children</a:t>
+            </a:r>
+            <a:r>
+              <a:rPr lang="en-US" sz="2400" dirty="0" smtClean="0"/>
+              <a:t> </a:t>
+            </a:r>
+            <a:r>
+              <a:rPr lang="en-US" sz="2400" dirty="0" smtClean="0"/>
+              <a:t>= 1 for lightweight sites.</a:t>
+            </a:r>
+            <a:endParaRPr lang="en-US" sz="2400" dirty="0"/>
+          </a:p>
+        </p:txBody>
+      </p:sp>
+    </p:spTree>
+  </p:cSld>
+  <p:clrMapOvr>
+    <a:masterClrMapping/>
+  </p:clrMapOvr>
+</p:sld>
+</file>
+
+<file path=ppt/slides/slide23.xml><?xml version="1.0" encoding="utf-8"?>
 <p:sld xmlns:a="http://schemas.openxmlformats.org/drawingml/2006/main" xmlns:r="http://schemas.openxmlformats.org/officeDocument/2006/relationships" xmlns:p="http://schemas.openxmlformats.org/presentationml/2006/main">
   <p:cSld>
     <p:spTree>
@@ -5677,7 +5798,7 @@
 </p:sld>
 </file>
 
-<file path=ppt/slides/slide22.xml><?xml version="1.0" encoding="utf-8"?>
+<file path=ppt/slides/slide24.xml><?xml version="1.0" encoding="utf-8"?>
 <p:sld xmlns:a="http://schemas.openxmlformats.org/drawingml/2006/main" xmlns:r="http://schemas.openxmlformats.org/officeDocument/2006/relationships" xmlns:p="http://schemas.openxmlformats.org/presentationml/2006/main">
   <p:cSld>
     <p:spTree>
@@ -5844,7 +5965,7 @@
 </p:sld>
 </file>
 
-<file path=ppt/slides/slide23.xml><?xml version="1.0" encoding="utf-8"?>
+<file path=ppt/slides/slide25.xml><?xml version="1.0" encoding="utf-8"?>
 <p:sld xmlns:a="http://schemas.openxmlformats.org/drawingml/2006/main" xmlns:r="http://schemas.openxmlformats.org/officeDocument/2006/relationships" xmlns:p="http://schemas.openxmlformats.org/presentationml/2006/main">
   <p:cSld>
     <p:spTree>
@@ -6029,7 +6150,7 @@
 </p:sld>
 </file>
 
-<file path=ppt/slides/slide24.xml><?xml version="1.0" encoding="utf-8"?>
+<file path=ppt/slides/slide26.xml><?xml version="1.0" encoding="utf-8"?>
 <p:sld xmlns:a="http://schemas.openxmlformats.org/drawingml/2006/main" xmlns:r="http://schemas.openxmlformats.org/officeDocument/2006/relationships" xmlns:p="http://schemas.openxmlformats.org/presentationml/2006/main">
   <p:cSld>
     <p:spTree>
@@ -6080,7 +6201,7 @@
 </p:sld>
 </file>
 
-<file path=ppt/slides/slide25.xml><?xml version="1.0" encoding="utf-8"?>
+<file path=ppt/slides/slide27.xml><?xml version="1.0" encoding="utf-8"?>
 <p:sld xmlns:a="http://schemas.openxmlformats.org/drawingml/2006/main" xmlns:r="http://schemas.openxmlformats.org/officeDocument/2006/relationships" xmlns:p="http://schemas.openxmlformats.org/presentationml/2006/main">
   <p:cSld>
     <p:spTree>
@@ -6390,449 +6511,6 @@
                 <a:latin typeface="Consolas" pitchFamily="49" charset="0"/>
               </a:rPr>
               <a:t>...</a:t>
-            </a:r>
-          </a:p>
-        </p:txBody>
-      </p:sp>
-    </p:spTree>
-  </p:cSld>
-  <p:clrMapOvr>
-    <a:masterClrMapping/>
-  </p:clrMapOvr>
-</p:sld>
-</file>
-
-<file path=ppt/slides/slide26.xml><?xml version="1.0" encoding="utf-8"?>
-<p:sld xmlns:a="http://schemas.openxmlformats.org/drawingml/2006/main" xmlns:r="http://schemas.openxmlformats.org/officeDocument/2006/relationships" xmlns:p="http://schemas.openxmlformats.org/presentationml/2006/main">
-  <p:cSld>
-    <p:spTree>
-      <p:nvGrpSpPr>
-        <p:cNvPr id="1" name=""/>
-        <p:cNvGrpSpPr/>
-        <p:nvPr/>
-      </p:nvGrpSpPr>
-      <p:grpSpPr>
-        <a:xfrm>
-          <a:off x="0" y="0"/>
-          <a:ext cx="0" cy="0"/>
-          <a:chOff x="0" y="0"/>
-          <a:chExt cx="0" cy="0"/>
-        </a:xfrm>
-      </p:grpSpPr>
-      <p:sp>
-        <p:nvSpPr>
-          <p:cNvPr id="2" name="Title 1"/>
-          <p:cNvSpPr>
-            <a:spLocks noGrp="1"/>
-          </p:cNvSpPr>
-          <p:nvPr>
-            <p:ph type="title"/>
-          </p:nvPr>
-        </p:nvSpPr>
-        <p:spPr/>
-        <p:txBody>
-          <a:bodyPr/>
-          <a:lstStyle/>
-          <a:p>
-            <a:pPr algn="l"/>
-            <a:r>
-              <a:rPr lang="en-US" dirty="0" smtClean="0"/>
-              <a:t>1. Create an SQL Server Database for </a:t>
-            </a:r>
-            <a:r>
-              <a:rPr lang="en-US" dirty="0" err="1" smtClean="0"/>
-              <a:t>SQLServer</a:t>
-            </a:r>
-            <a:r>
-              <a:rPr lang="en-US" dirty="0" smtClean="0"/>
-              <a:t> Session Mode</a:t>
-            </a:r>
-            <a:endParaRPr lang="en-US" dirty="0"/>
-          </a:p>
-        </p:txBody>
-      </p:sp>
-      <p:sp>
-        <p:nvSpPr>
-          <p:cNvPr id="3" name="Content Placeholder 2"/>
-          <p:cNvSpPr>
-            <a:spLocks noGrp="1"/>
-          </p:cNvSpPr>
-          <p:nvPr>
-            <p:ph idx="1"/>
-          </p:nvPr>
-        </p:nvSpPr>
-        <p:spPr/>
-        <p:txBody>
-          <a:bodyPr/>
-          <a:lstStyle/>
-          <a:p>
-            <a:pPr marL="342900" lvl="2" indent="-342900"/>
-            <a:r>
-              <a:rPr lang="en-US" sz="2200" b="1" dirty="0" smtClean="0"/>
-              <a:t>Run cmd.exe as Administrator</a:t>
-            </a:r>
-          </a:p>
-          <a:p>
-            <a:pPr marL="342900" lvl="2" indent="-342900"/>
-            <a:r>
-              <a:rPr lang="en-US" sz="2200" i="1" dirty="0" smtClean="0">
-                <a:latin typeface="Consolas" pitchFamily="49" charset="0"/>
-              </a:rPr>
-              <a:t>C:\Windows\Microsoft.NET\Framework\v4.0.30319\aspnet_regsql.exe -</a:t>
-            </a:r>
-            <a:r>
-              <a:rPr lang="en-US" sz="2200" i="1" dirty="0" err="1" smtClean="0">
-                <a:latin typeface="Consolas" pitchFamily="49" charset="0"/>
-              </a:rPr>
-              <a:t>ssadd</a:t>
-            </a:r>
-            <a:r>
-              <a:rPr lang="en-US" sz="2200" i="1" dirty="0" smtClean="0">
-                <a:latin typeface="Consolas" pitchFamily="49" charset="0"/>
-              </a:rPr>
-              <a:t> -</a:t>
-            </a:r>
-            <a:r>
-              <a:rPr lang="en-US" sz="2200" i="1" dirty="0" err="1" smtClean="0">
-                <a:latin typeface="Consolas" pitchFamily="49" charset="0"/>
-              </a:rPr>
-              <a:t>sstype</a:t>
-            </a:r>
-            <a:r>
-              <a:rPr lang="en-US" sz="2200" i="1" dirty="0" smtClean="0">
-                <a:latin typeface="Consolas" pitchFamily="49" charset="0"/>
-              </a:rPr>
-              <a:t> c -d apistate.example.com -S </a:t>
-            </a:r>
-            <a:r>
-              <a:rPr lang="en-US" sz="2200" i="1" dirty="0" err="1" smtClean="0">
-                <a:latin typeface="Consolas" pitchFamily="49" charset="0"/>
-              </a:rPr>
-              <a:t>localhost</a:t>
-            </a:r>
-            <a:r>
-              <a:rPr lang="en-US" sz="2200" i="1" dirty="0" smtClean="0">
-                <a:latin typeface="Consolas" pitchFamily="49" charset="0"/>
-              </a:rPr>
-              <a:t> –E</a:t>
-            </a:r>
-          </a:p>
-        </p:txBody>
-      </p:sp>
-    </p:spTree>
-  </p:cSld>
-  <p:clrMapOvr>
-    <a:masterClrMapping/>
-  </p:clrMapOvr>
-</p:sld>
-</file>
-
-<file path=ppt/slides/slide27.xml><?xml version="1.0" encoding="utf-8"?>
-<p:sld xmlns:a="http://schemas.openxmlformats.org/drawingml/2006/main" xmlns:r="http://schemas.openxmlformats.org/officeDocument/2006/relationships" xmlns:p="http://schemas.openxmlformats.org/presentationml/2006/main">
-  <p:cSld>
-    <p:spTree>
-      <p:nvGrpSpPr>
-        <p:cNvPr id="1" name=""/>
-        <p:cNvGrpSpPr/>
-        <p:nvPr/>
-      </p:nvGrpSpPr>
-      <p:grpSpPr>
-        <a:xfrm>
-          <a:off x="0" y="0"/>
-          <a:ext cx="0" cy="0"/>
-          <a:chOff x="0" y="0"/>
-          <a:chExt cx="0" cy="0"/>
-        </a:xfrm>
-      </p:grpSpPr>
-      <p:sp>
-        <p:nvSpPr>
-          <p:cNvPr id="2" name="Title 1"/>
-          <p:cNvSpPr>
-            <a:spLocks noGrp="1"/>
-          </p:cNvSpPr>
-          <p:nvPr>
-            <p:ph type="title"/>
-          </p:nvPr>
-        </p:nvSpPr>
-        <p:spPr/>
-        <p:txBody>
-          <a:bodyPr/>
-          <a:lstStyle/>
-          <a:p>
-            <a:pPr algn="l"/>
-            <a:r>
-              <a:rPr lang="en-US" dirty="0" smtClean="0"/>
-              <a:t>2. Create a Connection String for </a:t>
-            </a:r>
-            <a:r>
-              <a:rPr lang="en-US" dirty="0" err="1" smtClean="0"/>
-              <a:t>SQLServer</a:t>
-            </a:r>
-            <a:r>
-              <a:rPr lang="en-US" dirty="0" smtClean="0"/>
-              <a:t> Session Mode</a:t>
-            </a:r>
-            <a:endParaRPr lang="en-US" dirty="0"/>
-          </a:p>
-        </p:txBody>
-      </p:sp>
-      <p:sp>
-        <p:nvSpPr>
-          <p:cNvPr id="3" name="Content Placeholder 2"/>
-          <p:cNvSpPr>
-            <a:spLocks noGrp="1"/>
-          </p:cNvSpPr>
-          <p:nvPr>
-            <p:ph idx="1"/>
-          </p:nvPr>
-        </p:nvSpPr>
-        <p:spPr/>
-        <p:txBody>
-          <a:bodyPr/>
-          <a:lstStyle/>
-          <a:p>
-            <a:r>
-              <a:rPr lang="en-US" sz="2400" dirty="0" smtClean="0">
-                <a:latin typeface="+mj-lt"/>
-              </a:rPr>
-              <a:t>Create </a:t>
-            </a:r>
-            <a:r>
-              <a:rPr lang="en-US" sz="2400" dirty="0" err="1" smtClean="0">
-                <a:latin typeface="+mj-lt"/>
-              </a:rPr>
-              <a:t>web.connectionStrings.config</a:t>
-            </a:r>
-            <a:r>
-              <a:rPr lang="en-US" sz="2400" dirty="0" smtClean="0">
-                <a:latin typeface="+mj-lt"/>
-              </a:rPr>
-              <a:t> file.</a:t>
-            </a:r>
-          </a:p>
-        </p:txBody>
-      </p:sp>
-      <p:sp>
-        <p:nvSpPr>
-          <p:cNvPr id="4" name="Rectangle 3"/>
-          <p:cNvSpPr/>
-          <p:nvPr/>
-        </p:nvSpPr>
-        <p:spPr>
-          <a:xfrm>
-            <a:off x="533400" y="2438400"/>
-            <a:ext cx="7924800" cy="3139321"/>
-          </a:xfrm>
-          <a:prstGeom prst="rect">
-            <a:avLst/>
-          </a:prstGeom>
-        </p:spPr>
-        <p:style>
-          <a:lnRef idx="1">
-            <a:schemeClr val="dk1"/>
-          </a:lnRef>
-          <a:fillRef idx="2">
-            <a:schemeClr val="dk1"/>
-          </a:fillRef>
-          <a:effectRef idx="1">
-            <a:schemeClr val="dk1"/>
-          </a:effectRef>
-          <a:fontRef idx="minor">
-            <a:schemeClr val="dk1"/>
-          </a:fontRef>
-        </p:style>
-        <p:txBody>
-          <a:bodyPr wrap="square">
-            <a:spAutoFit/>
-          </a:bodyPr>
-          <a:lstStyle/>
-          <a:p>
-            <a:pPr>
-              <a:buNone/>
-            </a:pPr>
-            <a:r>
-              <a:rPr lang="en-US" dirty="0" smtClean="0">
-                <a:latin typeface="Consolas" pitchFamily="49" charset="0"/>
-              </a:rPr>
-              <a:t>&lt;?xml version="1.0" ?&gt;</a:t>
-            </a:r>
-          </a:p>
-          <a:p>
-            <a:pPr>
-              <a:buNone/>
-            </a:pPr>
-            <a:r>
-              <a:rPr lang="en-US" dirty="0" smtClean="0">
-                <a:latin typeface="Consolas" pitchFamily="49" charset="0"/>
-              </a:rPr>
-              <a:t>  &lt;</a:t>
-            </a:r>
-            <a:r>
-              <a:rPr lang="en-US" dirty="0" err="1" smtClean="0">
-                <a:latin typeface="Consolas" pitchFamily="49" charset="0"/>
-              </a:rPr>
-              <a:t>connectionStrings</a:t>
-            </a:r>
-            <a:r>
-              <a:rPr lang="en-US" dirty="0" smtClean="0">
-                <a:latin typeface="Consolas" pitchFamily="49" charset="0"/>
-              </a:rPr>
-              <a:t>&gt;</a:t>
-            </a:r>
-          </a:p>
-          <a:p>
-            <a:pPr>
-              <a:buNone/>
-            </a:pPr>
-            <a:r>
-              <a:rPr lang="en-US" dirty="0" smtClean="0">
-                <a:latin typeface="Consolas" pitchFamily="49" charset="0"/>
-              </a:rPr>
-              <a:t>    &lt;clear /&gt;</a:t>
-            </a:r>
-          </a:p>
-          <a:p>
-            <a:pPr>
-              <a:buNone/>
-            </a:pPr>
-            <a:r>
-              <a:rPr lang="en-US" dirty="0" smtClean="0">
-                <a:latin typeface="Consolas" pitchFamily="49" charset="0"/>
-              </a:rPr>
-              <a:t>...</a:t>
-            </a:r>
-          </a:p>
-          <a:p>
-            <a:pPr>
-              <a:buNone/>
-            </a:pPr>
-            <a:r>
-              <a:rPr lang="en-US" dirty="0" smtClean="0">
-                <a:latin typeface="Consolas" pitchFamily="49" charset="0"/>
-              </a:rPr>
-              <a:t>    &lt;add name="</a:t>
-            </a:r>
-            <a:r>
-              <a:rPr lang="en-US" b="1" i="1" dirty="0" err="1" smtClean="0">
-                <a:solidFill>
-                  <a:srgbClr val="C00000"/>
-                </a:solidFill>
-                <a:latin typeface="Consolas" pitchFamily="49" charset="0"/>
-              </a:rPr>
-              <a:t>snsState</a:t>
-            </a:r>
-            <a:r>
-              <a:rPr lang="en-US" dirty="0" smtClean="0">
-                <a:latin typeface="Consolas" pitchFamily="49" charset="0"/>
-              </a:rPr>
-              <a:t>" </a:t>
-            </a:r>
-            <a:r>
-              <a:rPr lang="en-US" dirty="0" err="1" smtClean="0">
-                <a:latin typeface="Consolas" pitchFamily="49" charset="0"/>
-              </a:rPr>
-              <a:t>connectionString</a:t>
-            </a:r>
-            <a:r>
-              <a:rPr lang="en-US" dirty="0" smtClean="0">
-                <a:latin typeface="Consolas" pitchFamily="49" charset="0"/>
-              </a:rPr>
-              <a:t>="Data Source=192.168.101.62;Initial Catalog=</a:t>
-            </a:r>
-            <a:r>
-              <a:rPr lang="en-US" dirty="0" err="1" smtClean="0">
-                <a:latin typeface="Consolas" pitchFamily="49" charset="0"/>
-              </a:rPr>
-              <a:t>apistate.example.com;Persist</a:t>
-            </a:r>
-            <a:r>
-              <a:rPr lang="en-US" dirty="0" smtClean="0">
-                <a:latin typeface="Consolas" pitchFamily="49" charset="0"/>
-              </a:rPr>
-              <a:t> Security Info=</a:t>
-            </a:r>
-            <a:r>
-              <a:rPr lang="en-US" dirty="0" err="1" smtClean="0">
-                <a:latin typeface="Consolas" pitchFamily="49" charset="0"/>
-              </a:rPr>
-              <a:t>True;User</a:t>
-            </a:r>
-            <a:r>
-              <a:rPr lang="en-US" dirty="0" smtClean="0">
-                <a:latin typeface="Consolas" pitchFamily="49" charset="0"/>
-              </a:rPr>
-              <a:t> ID=</a:t>
-            </a:r>
-            <a:r>
-              <a:rPr lang="en-US" dirty="0" err="1" smtClean="0">
-                <a:latin typeface="Consolas" pitchFamily="49" charset="0"/>
-              </a:rPr>
-              <a:t>api.example.com;Password</a:t>
-            </a:r>
-            <a:r>
-              <a:rPr lang="en-US" dirty="0" smtClean="0">
-                <a:latin typeface="Consolas" pitchFamily="49" charset="0"/>
-              </a:rPr>
-              <a:t>=$%</a:t>
-            </a:r>
-            <a:r>
-              <a:rPr lang="en-US" dirty="0" err="1" smtClean="0">
-                <a:latin typeface="Consolas" pitchFamily="49" charset="0"/>
-              </a:rPr>
-              <a:t>Ym</a:t>
-            </a:r>
-            <a:r>
-              <a:rPr lang="en-US" dirty="0" smtClean="0">
-                <a:latin typeface="Consolas" pitchFamily="49" charset="0"/>
-              </a:rPr>
-              <a:t>*k3xtt4#bNNu;Connect Timeout=60;Min Pool Size=0;Max Pool Size=100;" </a:t>
-            </a:r>
-            <a:r>
-              <a:rPr lang="en-US" dirty="0" err="1" smtClean="0">
-                <a:latin typeface="Consolas" pitchFamily="49" charset="0"/>
-              </a:rPr>
-              <a:t>providerName</a:t>
-            </a:r>
-            <a:r>
-              <a:rPr lang="en-US" dirty="0" smtClean="0">
-                <a:latin typeface="Consolas" pitchFamily="49" charset="0"/>
-              </a:rPr>
-              <a:t>="</a:t>
-            </a:r>
-            <a:r>
-              <a:rPr lang="en-US" dirty="0" err="1" smtClean="0">
-                <a:latin typeface="Consolas" pitchFamily="49" charset="0"/>
-              </a:rPr>
-              <a:t>System.Data.SqlClient</a:t>
-            </a:r>
-            <a:r>
-              <a:rPr lang="en-US" dirty="0" smtClean="0">
-                <a:latin typeface="Consolas" pitchFamily="49" charset="0"/>
-              </a:rPr>
-              <a:t>" /&gt;</a:t>
-            </a:r>
-          </a:p>
-          <a:p>
-            <a:pPr>
-              <a:buNone/>
-            </a:pPr>
-            <a:r>
-              <a:rPr lang="en-US" dirty="0" smtClean="0">
-                <a:latin typeface="Consolas" pitchFamily="49" charset="0"/>
-              </a:rPr>
-              <a:t>  &lt;/</a:t>
-            </a:r>
-            <a:r>
-              <a:rPr lang="en-US" dirty="0" err="1" smtClean="0">
-                <a:latin typeface="Consolas" pitchFamily="49" charset="0"/>
-              </a:rPr>
-              <a:t>connectionStrings</a:t>
-            </a:r>
-            <a:r>
-              <a:rPr lang="en-US" dirty="0" smtClean="0">
-                <a:latin typeface="Consolas" pitchFamily="49" charset="0"/>
-              </a:rPr>
-              <a:t>&gt;</a:t>
             </a:r>
           </a:p>
         </p:txBody>
@@ -6880,7 +6558,7 @@
             <a:pPr algn="l"/>
             <a:r>
               <a:rPr lang="en-US" dirty="0" smtClean="0"/>
-              <a:t>3. Enable </a:t>
+              <a:t>1. Create an SQL Server Database for </a:t>
             </a:r>
             <a:r>
               <a:rPr lang="en-US" dirty="0" err="1" smtClean="0"/>
@@ -6909,184 +6587,59 @@
           <a:bodyPr/>
           <a:lstStyle/>
           <a:p>
-            <a:r>
-              <a:rPr lang="en-US" sz="2200" dirty="0" smtClean="0">
+            <a:pPr marL="342900" lvl="2" indent="-342900"/>
+            <a:r>
+              <a:rPr lang="en-US" sz="2200" b="1" dirty="0" smtClean="0"/>
+              <a:t>Run cmd.exe as Administrator</a:t>
+            </a:r>
+          </a:p>
+          <a:p>
+            <a:pPr marL="342900" lvl="2" indent="-342900"/>
+            <a:r>
+              <a:rPr lang="en-US" sz="2200" i="1" dirty="0" smtClean="0">
                 <a:latin typeface="Consolas" pitchFamily="49" charset="0"/>
               </a:rPr>
-              <a:t>&lt;</a:t>
-            </a:r>
-            <a:r>
-              <a:rPr lang="en-US" sz="2200" dirty="0" err="1" smtClean="0">
+              <a:t>C:\Windows\Microsoft.NET\Framework\v4.0.30319\aspnet_regsql.exe -</a:t>
+            </a:r>
+            <a:r>
+              <a:rPr lang="en-US" sz="2200" i="1" dirty="0" err="1" smtClean="0">
                 <a:latin typeface="Consolas" pitchFamily="49" charset="0"/>
               </a:rPr>
-              <a:t>connectionStrings</a:t>
-            </a:r>
-            <a:r>
-              <a:rPr lang="en-US" sz="2200" dirty="0" smtClean="0">
+              <a:t>ssadd</a:t>
+            </a:r>
+            <a:r>
+              <a:rPr lang="en-US" sz="2200" i="1" dirty="0" smtClean="0">
                 <a:latin typeface="Consolas" pitchFamily="49" charset="0"/>
               </a:rPr>
-              <a:t> </a:t>
-            </a:r>
-            <a:r>
-              <a:rPr lang="en-US" sz="2200" dirty="0" err="1" smtClean="0">
+              <a:t> -</a:t>
+            </a:r>
+            <a:r>
+              <a:rPr lang="en-US" sz="2200" i="1" dirty="0" err="1" smtClean="0">
                 <a:latin typeface="Consolas" pitchFamily="49" charset="0"/>
               </a:rPr>
-              <a:t>configSource</a:t>
-            </a:r>
-            <a:r>
-              <a:rPr lang="en-US" sz="2200" dirty="0" smtClean="0">
+              <a:t>sstype</a:t>
+            </a:r>
+            <a:r>
+              <a:rPr lang="en-US" sz="2200" i="1" dirty="0" smtClean="0">
                 <a:latin typeface="Consolas" pitchFamily="49" charset="0"/>
               </a:rPr>
-              <a:t>="</a:t>
+              <a:t> c -d apistate.example.com -S </a:t>
             </a:r>
             <a:r>
               <a:rPr lang="en-US" sz="2200" i="1" dirty="0" err="1" smtClean="0">
-                <a:solidFill>
-                  <a:srgbClr val="C00000"/>
-                </a:solidFill>
                 <a:latin typeface="Consolas" pitchFamily="49" charset="0"/>
               </a:rPr>
-              <a:t>web.connectionStrings.config</a:t>
-            </a:r>
-            <a:r>
-              <a:rPr lang="en-US" sz="2200" dirty="0" smtClean="0">
+              <a:t>localhost</a:t>
+            </a:r>
+            <a:r>
+              <a:rPr lang="en-US" sz="2200" i="1" dirty="0" smtClean="0">
                 <a:latin typeface="Consolas" pitchFamily="49" charset="0"/>
               </a:rPr>
-              <a:t>" /&gt;</a:t>
-            </a:r>
-          </a:p>
-          <a:p>
-            <a:r>
-              <a:rPr lang="en-US" sz="2200" dirty="0" smtClean="0">
-                <a:latin typeface="Consolas" pitchFamily="49" charset="0"/>
-              </a:rPr>
-              <a:t>&lt;</a:t>
-            </a:r>
-            <a:r>
-              <a:rPr lang="en-US" sz="2200" dirty="0" err="1" smtClean="0">
-                <a:latin typeface="Consolas" pitchFamily="49" charset="0"/>
-              </a:rPr>
-              <a:t>sessionState</a:t>
-            </a:r>
-            <a:r>
-              <a:rPr lang="en-US" sz="2200" dirty="0" smtClean="0">
-                <a:latin typeface="Consolas" pitchFamily="49" charset="0"/>
-              </a:rPr>
-              <a:t> timeout="25" </a:t>
-            </a:r>
-            <a:r>
-              <a:rPr lang="en-US" sz="2200" dirty="0" err="1" smtClean="0">
-                <a:latin typeface="Consolas" pitchFamily="49" charset="0"/>
-              </a:rPr>
-              <a:t>cookieless</a:t>
-            </a:r>
-            <a:r>
-              <a:rPr lang="en-US" sz="2200" dirty="0" smtClean="0">
-                <a:latin typeface="Consolas" pitchFamily="49" charset="0"/>
-              </a:rPr>
-              <a:t>="false" </a:t>
-            </a:r>
-            <a:r>
-              <a:rPr lang="en-US" sz="2200" dirty="0" err="1" smtClean="0">
-                <a:latin typeface="Consolas" pitchFamily="49" charset="0"/>
-              </a:rPr>
-              <a:t>regenerateExpiredSessionId</a:t>
-            </a:r>
-            <a:r>
-              <a:rPr lang="en-US" sz="2200" dirty="0" smtClean="0">
-                <a:latin typeface="Consolas" pitchFamily="49" charset="0"/>
-              </a:rPr>
-              <a:t>="true" mode="</a:t>
-            </a:r>
-            <a:r>
-              <a:rPr lang="en-US" sz="2200" b="1" i="1" dirty="0" err="1" smtClean="0">
-                <a:solidFill>
-                  <a:srgbClr val="C00000"/>
-                </a:solidFill>
-                <a:latin typeface="Consolas" pitchFamily="49" charset="0"/>
-              </a:rPr>
-              <a:t>SQLServer</a:t>
-            </a:r>
-            <a:r>
-              <a:rPr lang="en-US" sz="2200" dirty="0" smtClean="0">
-                <a:latin typeface="Consolas" pitchFamily="49" charset="0"/>
-              </a:rPr>
-              <a:t>" </a:t>
-            </a:r>
-            <a:r>
-              <a:rPr lang="en-US" sz="2200" dirty="0" err="1" smtClean="0">
-                <a:latin typeface="Consolas" pitchFamily="49" charset="0"/>
-              </a:rPr>
-              <a:t>allowCustomSqlDatabase</a:t>
-            </a:r>
-            <a:r>
-              <a:rPr lang="en-US" sz="2200" dirty="0" smtClean="0">
-                <a:latin typeface="Consolas" pitchFamily="49" charset="0"/>
-              </a:rPr>
-              <a:t>="true" </a:t>
-            </a:r>
-            <a:r>
-              <a:rPr lang="en-US" sz="2200" dirty="0" err="1" smtClean="0">
-                <a:latin typeface="Consolas" pitchFamily="49" charset="0"/>
-              </a:rPr>
-              <a:t>sqlConnectionString</a:t>
-            </a:r>
-            <a:r>
-              <a:rPr lang="en-US" sz="2200" dirty="0" smtClean="0">
-                <a:latin typeface="Consolas" pitchFamily="49" charset="0"/>
-              </a:rPr>
-              <a:t>="</a:t>
-            </a:r>
-            <a:r>
-              <a:rPr lang="en-US" sz="2200" i="1" dirty="0" err="1" smtClean="0">
-                <a:solidFill>
-                  <a:srgbClr val="C00000"/>
-                </a:solidFill>
-                <a:latin typeface="Consolas" pitchFamily="49" charset="0"/>
-              </a:rPr>
-              <a:t>snsState</a:t>
-            </a:r>
-            <a:r>
-              <a:rPr lang="en-US" sz="2200" dirty="0" smtClean="0">
-                <a:latin typeface="Consolas" pitchFamily="49" charset="0"/>
-              </a:rPr>
-              <a:t>" /&gt;</a:t>
-            </a:r>
-          </a:p>
-        </p:txBody>
-      </p:sp>
-      <p:pic>
-        <p:nvPicPr>
-          <p:cNvPr id="2050" name="Picture 2"/>
-          <p:cNvPicPr>
-            <a:picLocks noChangeAspect="1" noChangeArrowheads="1"/>
-          </p:cNvPicPr>
-          <p:nvPr/>
-        </p:nvPicPr>
-        <p:blipFill>
-          <a:blip r:embed="rId2" cstate="print"/>
-          <a:srcRect/>
-          <a:stretch>
-            <a:fillRect/>
-          </a:stretch>
-        </p:blipFill>
-        <p:spPr bwMode="auto">
-          <a:xfrm>
-            <a:off x="1019175" y="4038600"/>
-            <a:ext cx="7105650" cy="2057400"/>
-          </a:xfrm>
-          <a:prstGeom prst="rect">
-            <a:avLst/>
-          </a:prstGeom>
-          <a:noFill/>
-          <a:ln w="9525">
-            <a:noFill/>
-            <a:miter lim="800000"/>
-            <a:headEnd/>
-            <a:tailEnd/>
-          </a:ln>
-        </p:spPr>
-      </p:pic>
+              <a:t> –E</a:t>
+            </a:r>
+          </a:p>
+        </p:txBody>
+      </p:sp>
     </p:spTree>
   </p:cSld>
   <p:clrMapOvr>
@@ -7112,32 +6665,299 @@
           <a:chExt cx="0" cy="0"/>
         </a:xfrm>
       </p:grpSpPr>
-      <p:pic>
-        <p:nvPicPr>
-          <p:cNvPr id="4" name="Picture 2" descr="https://lh3.ggpht.com/1IfZLL2QDSjZ0wS7sUhaMlsAOS8BBzdR3wZ1WawgRn7KZAM8nEVZYMOUM-lqQb0ikIzp=w300"/>
-          <p:cNvPicPr>
-            <a:picLocks noChangeAspect="1" noChangeArrowheads="1"/>
-          </p:cNvPicPr>
+      <p:sp>
+        <p:nvSpPr>
+          <p:cNvPr id="2" name="Title 1"/>
+          <p:cNvSpPr>
+            <a:spLocks noGrp="1"/>
+          </p:cNvSpPr>
+          <p:nvPr>
+            <p:ph type="title"/>
+          </p:nvPr>
+        </p:nvSpPr>
+        <p:spPr/>
+        <p:txBody>
+          <a:bodyPr/>
+          <a:lstStyle/>
+          <a:p>
+            <a:pPr algn="l"/>
+            <a:r>
+              <a:rPr lang="en-US" dirty="0" smtClean="0"/>
+              <a:t>2. Create a Connection String for </a:t>
+            </a:r>
+            <a:r>
+              <a:rPr lang="en-US" dirty="0" err="1" smtClean="0"/>
+              <a:t>SQLServer</a:t>
+            </a:r>
+            <a:r>
+              <a:rPr lang="en-US" dirty="0" smtClean="0"/>
+              <a:t> Session Mode</a:t>
+            </a:r>
+            <a:endParaRPr lang="en-US" dirty="0"/>
+          </a:p>
+        </p:txBody>
+      </p:sp>
+      <p:sp>
+        <p:nvSpPr>
+          <p:cNvPr id="3" name="Content Placeholder 2"/>
+          <p:cNvSpPr>
+            <a:spLocks noGrp="1"/>
+          </p:cNvSpPr>
+          <p:nvPr>
+            <p:ph idx="1"/>
+          </p:nvPr>
+        </p:nvSpPr>
+        <p:spPr/>
+        <p:txBody>
+          <a:bodyPr/>
+          <a:lstStyle/>
+          <a:p>
+            <a:r>
+              <a:rPr lang="en-US" sz="2400" dirty="0" smtClean="0">
+                <a:latin typeface="+mj-lt"/>
+              </a:rPr>
+              <a:t>Create </a:t>
+            </a:r>
+            <a:r>
+              <a:rPr lang="en-US" sz="2400" dirty="0" err="1" smtClean="0">
+                <a:latin typeface="+mj-lt"/>
+              </a:rPr>
+              <a:t>web.connectionStrings.config</a:t>
+            </a:r>
+            <a:r>
+              <a:rPr lang="en-US" sz="2400" dirty="0" smtClean="0">
+                <a:latin typeface="+mj-lt"/>
+              </a:rPr>
+              <a:t> file.</a:t>
+            </a:r>
+          </a:p>
+        </p:txBody>
+      </p:sp>
+      <p:sp>
+        <p:nvSpPr>
+          <p:cNvPr id="4" name="Rectangle 3"/>
+          <p:cNvSpPr/>
           <p:nvPr/>
-        </p:nvPicPr>
-        <p:blipFill>
-          <a:blip r:embed="rId2" cstate="print"/>
-          <a:srcRect/>
-          <a:stretch>
-            <a:fillRect/>
-          </a:stretch>
-        </p:blipFill>
-        <p:spPr bwMode="auto">
+        </p:nvSpPr>
+        <p:spPr>
           <a:xfrm>
-            <a:off x="3276600" y="1905000"/>
-            <a:ext cx="2857500" cy="2857500"/>
+            <a:off x="533400" y="2438400"/>
+            <a:ext cx="7924800" cy="3139321"/>
           </a:xfrm>
           <a:prstGeom prst="rect">
             <a:avLst/>
           </a:prstGeom>
-          <a:noFill/>
         </p:spPr>
-      </p:pic>
+        <p:style>
+          <a:lnRef idx="1">
+            <a:schemeClr val="dk1"/>
+          </a:lnRef>
+          <a:fillRef idx="2">
+            <a:schemeClr val="dk1"/>
+          </a:fillRef>
+          <a:effectRef idx="1">
+            <a:schemeClr val="dk1"/>
+          </a:effectRef>
+          <a:fontRef idx="minor">
+            <a:schemeClr val="dk1"/>
+          </a:fontRef>
+        </p:style>
+        <p:txBody>
+          <a:bodyPr wrap="square">
+            <a:spAutoFit/>
+          </a:bodyPr>
+          <a:lstStyle/>
+          <a:p>
+            <a:pPr>
+              <a:buNone/>
+            </a:pPr>
+            <a:r>
+              <a:rPr lang="en-US" dirty="0" smtClean="0">
+                <a:latin typeface="Consolas" pitchFamily="49" charset="0"/>
+              </a:rPr>
+              <a:t>&lt;?xml version="1.0" ?&gt;</a:t>
+            </a:r>
+          </a:p>
+          <a:p>
+            <a:pPr>
+              <a:buNone/>
+            </a:pPr>
+            <a:r>
+              <a:rPr lang="en-US" dirty="0" smtClean="0">
+                <a:latin typeface="Consolas" pitchFamily="49" charset="0"/>
+              </a:rPr>
+              <a:t>  &lt;</a:t>
+            </a:r>
+            <a:r>
+              <a:rPr lang="en-US" dirty="0" err="1" smtClean="0">
+                <a:latin typeface="Consolas" pitchFamily="49" charset="0"/>
+              </a:rPr>
+              <a:t>connectionStrings</a:t>
+            </a:r>
+            <a:r>
+              <a:rPr lang="en-US" dirty="0" smtClean="0">
+                <a:latin typeface="Consolas" pitchFamily="49" charset="0"/>
+              </a:rPr>
+              <a:t>&gt;</a:t>
+            </a:r>
+          </a:p>
+          <a:p>
+            <a:pPr>
+              <a:buNone/>
+            </a:pPr>
+            <a:r>
+              <a:rPr lang="en-US" dirty="0" smtClean="0">
+                <a:latin typeface="Consolas" pitchFamily="49" charset="0"/>
+              </a:rPr>
+              <a:t>    &lt;clear /&gt;</a:t>
+            </a:r>
+          </a:p>
+          <a:p>
+            <a:pPr>
+              <a:buNone/>
+            </a:pPr>
+            <a:r>
+              <a:rPr lang="en-US" dirty="0" smtClean="0">
+                <a:latin typeface="Consolas" pitchFamily="49" charset="0"/>
+              </a:rPr>
+              <a:t>...</a:t>
+            </a:r>
+          </a:p>
+          <a:p>
+            <a:pPr>
+              <a:buNone/>
+            </a:pPr>
+            <a:r>
+              <a:rPr lang="en-US" dirty="0" smtClean="0">
+                <a:latin typeface="Consolas" pitchFamily="49" charset="0"/>
+              </a:rPr>
+              <a:t>    &lt;add name="</a:t>
+            </a:r>
+            <a:r>
+              <a:rPr lang="en-US" b="1" i="1" dirty="0" err="1" smtClean="0">
+                <a:solidFill>
+                  <a:srgbClr val="C00000"/>
+                </a:solidFill>
+                <a:latin typeface="Consolas" pitchFamily="49" charset="0"/>
+              </a:rPr>
+              <a:t>snsState</a:t>
+            </a:r>
+            <a:r>
+              <a:rPr lang="en-US" dirty="0" smtClean="0">
+                <a:latin typeface="Consolas" pitchFamily="49" charset="0"/>
+              </a:rPr>
+              <a:t>" </a:t>
+            </a:r>
+            <a:r>
+              <a:rPr lang="en-US" dirty="0" err="1" smtClean="0">
+                <a:latin typeface="Consolas" pitchFamily="49" charset="0"/>
+              </a:rPr>
+              <a:t>connectionString</a:t>
+            </a:r>
+            <a:r>
+              <a:rPr lang="en-US" dirty="0" smtClean="0">
+                <a:latin typeface="Consolas" pitchFamily="49" charset="0"/>
+              </a:rPr>
+              <a:t>="Data Source=192.168.101.62;Initial Catalog=</a:t>
+            </a:r>
+            <a:r>
+              <a:rPr lang="en-US" dirty="0" err="1" smtClean="0">
+                <a:latin typeface="Consolas" pitchFamily="49" charset="0"/>
+              </a:rPr>
+              <a:t>apistate.example.com;Persist</a:t>
+            </a:r>
+            <a:r>
+              <a:rPr lang="en-US" dirty="0" smtClean="0">
+                <a:latin typeface="Consolas" pitchFamily="49" charset="0"/>
+              </a:rPr>
+              <a:t> Security Info=</a:t>
+            </a:r>
+            <a:r>
+              <a:rPr lang="en-US" dirty="0" err="1" smtClean="0">
+                <a:latin typeface="Consolas" pitchFamily="49" charset="0"/>
+              </a:rPr>
+              <a:t>True;User</a:t>
+            </a:r>
+            <a:r>
+              <a:rPr lang="en-US" dirty="0" smtClean="0">
+                <a:latin typeface="Consolas" pitchFamily="49" charset="0"/>
+              </a:rPr>
+              <a:t> ID=</a:t>
+            </a:r>
+            <a:r>
+              <a:rPr lang="en-US" dirty="0" err="1" smtClean="0">
+                <a:latin typeface="Consolas" pitchFamily="49" charset="0"/>
+              </a:rPr>
+              <a:t>api.example.com;Password</a:t>
+            </a:r>
+            <a:r>
+              <a:rPr lang="en-US" dirty="0" smtClean="0">
+                <a:latin typeface="Consolas" pitchFamily="49" charset="0"/>
+              </a:rPr>
+              <a:t>=$%</a:t>
+            </a:r>
+            <a:r>
+              <a:rPr lang="en-US" dirty="0" err="1" smtClean="0">
+                <a:latin typeface="Consolas" pitchFamily="49" charset="0"/>
+              </a:rPr>
+              <a:t>Ym</a:t>
+            </a:r>
+            <a:r>
+              <a:rPr lang="en-US" dirty="0" smtClean="0">
+                <a:latin typeface="Consolas" pitchFamily="49" charset="0"/>
+              </a:rPr>
+              <a:t>*k3xtt4#bNNu;Connect Timeout=60;Min Pool Size=0;Max Pool Size=100;" </a:t>
+            </a:r>
+            <a:r>
+              <a:rPr lang="en-US" dirty="0" err="1" smtClean="0">
+                <a:latin typeface="Consolas" pitchFamily="49" charset="0"/>
+              </a:rPr>
+              <a:t>providerName</a:t>
+            </a:r>
+            <a:r>
+              <a:rPr lang="en-US" dirty="0" smtClean="0">
+                <a:latin typeface="Consolas" pitchFamily="49" charset="0"/>
+              </a:rPr>
+              <a:t>="</a:t>
+            </a:r>
+            <a:r>
+              <a:rPr lang="en-US" dirty="0" err="1" smtClean="0">
+                <a:latin typeface="Consolas" pitchFamily="49" charset="0"/>
+              </a:rPr>
+              <a:t>System.Data.SqlClient</a:t>
+            </a:r>
+            <a:r>
+              <a:rPr lang="en-US" dirty="0" smtClean="0">
+                <a:latin typeface="Consolas" pitchFamily="49" charset="0"/>
+              </a:rPr>
+              <a:t>" /&gt;</a:t>
+            </a:r>
+          </a:p>
+          <a:p>
+            <a:pPr>
+              <a:buNone/>
+            </a:pPr>
+            <a:r>
+              <a:rPr lang="en-US" dirty="0" smtClean="0">
+                <a:latin typeface="Consolas" pitchFamily="49" charset="0"/>
+              </a:rPr>
+              <a:t>  &lt;/</a:t>
+            </a:r>
+            <a:r>
+              <a:rPr lang="en-US" dirty="0" err="1" smtClean="0">
+                <a:latin typeface="Consolas" pitchFamily="49" charset="0"/>
+              </a:rPr>
+              <a:t>connectionStrings</a:t>
+            </a:r>
+            <a:r>
+              <a:rPr lang="en-US" dirty="0" smtClean="0">
+                <a:latin typeface="Consolas" pitchFamily="49" charset="0"/>
+              </a:rPr>
+              <a:t>&gt;</a:t>
+            </a:r>
+          </a:p>
+        </p:txBody>
+      </p:sp>
     </p:spTree>
   </p:cSld>
   <p:clrMapOvr>
@@ -7298,10 +7118,18 @@
           <a:p>
             <a:pPr algn="l"/>
             <a:r>
-              <a:rPr lang="en-US" sz="3800" dirty="0" smtClean="0"/>
-              <a:t>1. Enable State Service Remote Connection</a:t>
-            </a:r>
-            <a:endParaRPr lang="en-US" sz="3800" dirty="0"/>
+              <a:rPr lang="en-US" dirty="0" smtClean="0"/>
+              <a:t>3. Enable </a:t>
+            </a:r>
+            <a:r>
+              <a:rPr lang="en-US" dirty="0" err="1" smtClean="0"/>
+              <a:t>SQLServer</a:t>
+            </a:r>
+            <a:r>
+              <a:rPr lang="en-US" dirty="0" smtClean="0"/>
+              <a:t> Session Mode</a:t>
+            </a:r>
+            <a:endParaRPr lang="en-US" dirty="0"/>
           </a:p>
         </p:txBody>
       </p:sp>
@@ -7324,41 +7152,145 @@
               <a:rPr lang="en-US" sz="2200" dirty="0" smtClean="0">
                 <a:latin typeface="Consolas" pitchFamily="49" charset="0"/>
               </a:rPr>
-              <a:t>HKEY_LOCAL_MACHINE\SYSTEM\</a:t>
+              <a:t>&lt;</a:t>
             </a:r>
             <a:r>
               <a:rPr lang="en-US" sz="2200" dirty="0" err="1" smtClean="0">
                 <a:latin typeface="Consolas" pitchFamily="49" charset="0"/>
               </a:rPr>
-              <a:t>CurrentControlSet</a:t>
+              <a:t>connectionStrings</a:t>
             </a:r>
             <a:r>
               <a:rPr lang="en-US" sz="2200" dirty="0" smtClean="0">
                 <a:latin typeface="Consolas" pitchFamily="49" charset="0"/>
               </a:rPr>
-              <a:t>\Services\</a:t>
+              <a:t> </a:t>
             </a:r>
             <a:r>
               <a:rPr lang="en-US" sz="2200" dirty="0" err="1" smtClean="0">
                 <a:latin typeface="Consolas" pitchFamily="49" charset="0"/>
               </a:rPr>
-              <a:t>aspnet_state</a:t>
+              <a:t>configSource</a:t>
             </a:r>
             <a:r>
               <a:rPr lang="en-US" sz="2200" dirty="0" smtClean="0">
                 <a:latin typeface="Consolas" pitchFamily="49" charset="0"/>
               </a:rPr>
-              <a:t>\Parameters\</a:t>
+              <a:t>="</a:t>
+            </a:r>
+            <a:r>
+              <a:rPr lang="en-US" sz="2200" i="1" dirty="0" err="1" smtClean="0">
+                <a:solidFill>
+                  <a:srgbClr val="C00000"/>
+                </a:solidFill>
+                <a:latin typeface="Consolas" pitchFamily="49" charset="0"/>
+              </a:rPr>
+              <a:t>web.connectionStrings.config</a:t>
+            </a:r>
+            <a:r>
+              <a:rPr lang="en-US" sz="2200" dirty="0" smtClean="0">
+                <a:latin typeface="Consolas" pitchFamily="49" charset="0"/>
+              </a:rPr>
+              <a:t>" /&gt;</a:t>
+            </a:r>
+          </a:p>
+          <a:p>
+            <a:r>
+              <a:rPr lang="en-US" sz="2200" dirty="0" smtClean="0">
+                <a:latin typeface="Consolas" pitchFamily="49" charset="0"/>
+              </a:rPr>
+              <a:t>&lt;</a:t>
             </a:r>
             <a:r>
               <a:rPr lang="en-US" sz="2200" dirty="0" err="1" smtClean="0">
                 <a:latin typeface="Consolas" pitchFamily="49" charset="0"/>
               </a:rPr>
-              <a:t>AllowRemoteConnection</a:t>
-            </a:r>
-            <a:endParaRPr lang="en-US" sz="2200" dirty="0">
-              <a:latin typeface="Consolas" pitchFamily="49" charset="0"/>
-            </a:endParaRPr>
+              <a:t>sessionState</a:t>
+            </a:r>
+            <a:r>
+              <a:rPr lang="en-US" sz="2200" dirty="0" smtClean="0">
+                <a:latin typeface="Consolas" pitchFamily="49" charset="0"/>
+              </a:rPr>
+              <a:t> timeout="25" </a:t>
+            </a:r>
+            <a:r>
+              <a:rPr lang="en-US" sz="2200" dirty="0" err="1" smtClean="0">
+                <a:latin typeface="Consolas" pitchFamily="49" charset="0"/>
+              </a:rPr>
+              <a:t>cookieless</a:t>
+            </a:r>
+            <a:r>
+              <a:rPr lang="en-US" sz="2200" dirty="0" smtClean="0">
+                <a:latin typeface="Consolas" pitchFamily="49" charset="0"/>
+              </a:rPr>
+              <a:t>="false" </a:t>
+            </a:r>
+            <a:r>
+              <a:rPr lang="en-US" sz="2200" dirty="0" err="1" smtClean="0">
+                <a:latin typeface="Consolas" pitchFamily="49" charset="0"/>
+              </a:rPr>
+              <a:t>regenerateExpiredSessionId</a:t>
+            </a:r>
+            <a:r>
+              <a:rPr lang="en-US" sz="2200" dirty="0" smtClean="0">
+                <a:latin typeface="Consolas" pitchFamily="49" charset="0"/>
+              </a:rPr>
+              <a:t>="true" mode="</a:t>
+            </a:r>
+            <a:r>
+              <a:rPr lang="en-US" sz="2200" b="1" i="1" dirty="0" err="1" smtClean="0">
+                <a:solidFill>
+                  <a:srgbClr val="C00000"/>
+                </a:solidFill>
+                <a:latin typeface="Consolas" pitchFamily="49" charset="0"/>
+              </a:rPr>
+              <a:t>SQLServer</a:t>
+            </a:r>
+            <a:r>
+              <a:rPr lang="en-US" sz="2200" dirty="0" smtClean="0">
+                <a:latin typeface="Consolas" pitchFamily="49" charset="0"/>
+              </a:rPr>
+              <a:t>" </a:t>
+            </a:r>
+            <a:r>
+              <a:rPr lang="en-US" sz="2200" dirty="0" err="1" smtClean="0">
+                <a:latin typeface="Consolas" pitchFamily="49" charset="0"/>
+              </a:rPr>
+              <a:t>allowCustomSqlDatabase</a:t>
+            </a:r>
+            <a:r>
+              <a:rPr lang="en-US" sz="2200" dirty="0" smtClean="0">
+                <a:latin typeface="Consolas" pitchFamily="49" charset="0"/>
+              </a:rPr>
+              <a:t>="true" </a:t>
+            </a:r>
+            <a:r>
+              <a:rPr lang="en-US" sz="2200" dirty="0" err="1" smtClean="0">
+                <a:latin typeface="Consolas" pitchFamily="49" charset="0"/>
+              </a:rPr>
+              <a:t>sqlConnectionString</a:t>
+            </a:r>
+            <a:r>
+              <a:rPr lang="en-US" sz="2200" dirty="0" smtClean="0">
+                <a:latin typeface="Consolas" pitchFamily="49" charset="0"/>
+              </a:rPr>
+              <a:t>="</a:t>
+            </a:r>
+            <a:r>
+              <a:rPr lang="en-US" sz="2200" i="1" dirty="0" err="1" smtClean="0">
+                <a:solidFill>
+                  <a:srgbClr val="C00000"/>
+                </a:solidFill>
+                <a:latin typeface="Consolas" pitchFamily="49" charset="0"/>
+              </a:rPr>
+              <a:t>snsState</a:t>
+            </a:r>
+            <a:r>
+              <a:rPr lang="en-US" sz="2200" dirty="0" smtClean="0">
+                <a:latin typeface="Consolas" pitchFamily="49" charset="0"/>
+              </a:rPr>
+              <a:t>" /&gt;</a:t>
+            </a:r>
           </a:p>
         </p:txBody>
       </p:sp>
@@ -7379,8 +7311,8 @@
         </p:blipFill>
         <p:spPr bwMode="auto">
           <a:xfrm>
-            <a:off x="1371600" y="2667000"/>
-            <a:ext cx="6390640" cy="3220720"/>
+            <a:off x="1019175" y="4038600"/>
+            <a:ext cx="7105650" cy="2057400"/>
           </a:xfrm>
           <a:prstGeom prst="rect">
             <a:avLst/>
@@ -7403,517 +7335,6 @@
 </file>
 
 <file path=ppt/slides/slide31.xml><?xml version="1.0" encoding="utf-8"?>
-<p:sld xmlns:a="http://schemas.openxmlformats.org/drawingml/2006/main" xmlns:r="http://schemas.openxmlformats.org/officeDocument/2006/relationships" xmlns:p="http://schemas.openxmlformats.org/presentationml/2006/main">
-  <p:cSld>
-    <p:spTree>
-      <p:nvGrpSpPr>
-        <p:cNvPr id="1" name=""/>
-        <p:cNvGrpSpPr/>
-        <p:nvPr/>
-      </p:nvGrpSpPr>
-      <p:grpSpPr>
-        <a:xfrm>
-          <a:off x="0" y="0"/>
-          <a:ext cx="0" cy="0"/>
-          <a:chOff x="0" y="0"/>
-          <a:chExt cx="0" cy="0"/>
-        </a:xfrm>
-      </p:grpSpPr>
-      <p:sp>
-        <p:nvSpPr>
-          <p:cNvPr id="2" name="Title 1"/>
-          <p:cNvSpPr>
-            <a:spLocks noGrp="1"/>
-          </p:cNvSpPr>
-          <p:nvPr>
-            <p:ph type="title"/>
-          </p:nvPr>
-        </p:nvSpPr>
-        <p:spPr/>
-        <p:txBody>
-          <a:bodyPr/>
-          <a:lstStyle/>
-          <a:p>
-            <a:pPr algn="l"/>
-            <a:r>
-              <a:rPr lang="en-US" dirty="0" smtClean="0"/>
-              <a:t>2. Open State Service Firewall Port</a:t>
-            </a:r>
-            <a:endParaRPr lang="en-US" dirty="0"/>
-          </a:p>
-        </p:txBody>
-      </p:sp>
-      <p:sp>
-        <p:nvSpPr>
-          <p:cNvPr id="3" name="Content Placeholder 2"/>
-          <p:cNvSpPr>
-            <a:spLocks noGrp="1"/>
-          </p:cNvSpPr>
-          <p:nvPr>
-            <p:ph idx="1"/>
-          </p:nvPr>
-        </p:nvSpPr>
-        <p:spPr/>
-        <p:txBody>
-          <a:bodyPr/>
-          <a:lstStyle/>
-          <a:p>
-            <a:r>
-              <a:rPr lang="en-US" sz="2200" dirty="0" smtClean="0">
-                <a:latin typeface="+mj-lt"/>
-              </a:rPr>
-              <a:t>Port: </a:t>
-            </a:r>
-            <a:r>
-              <a:rPr lang="en-US" sz="2200" b="1" dirty="0" smtClean="0">
-                <a:latin typeface="+mj-lt"/>
-              </a:rPr>
-              <a:t>42424</a:t>
-            </a:r>
-            <a:endParaRPr lang="en-US" sz="2200" b="1" dirty="0">
-              <a:latin typeface="+mj-lt"/>
-            </a:endParaRPr>
-          </a:p>
-        </p:txBody>
-      </p:sp>
-      <p:pic>
-        <p:nvPicPr>
-          <p:cNvPr id="3074" name="Picture 2"/>
-          <p:cNvPicPr>
-            <a:picLocks noChangeAspect="1" noChangeArrowheads="1"/>
-          </p:cNvPicPr>
-          <p:nvPr/>
-        </p:nvPicPr>
-        <p:blipFill>
-          <a:blip r:embed="rId2" cstate="print"/>
-          <a:srcRect/>
-          <a:stretch>
-            <a:fillRect/>
-          </a:stretch>
-        </p:blipFill>
-        <p:spPr bwMode="auto">
-          <a:xfrm>
-            <a:off x="914400" y="2743200"/>
-            <a:ext cx="7287260" cy="3200400"/>
-          </a:xfrm>
-          <a:prstGeom prst="rect">
-            <a:avLst/>
-          </a:prstGeom>
-          <a:noFill/>
-          <a:ln w="9525">
-            <a:noFill/>
-            <a:miter lim="800000"/>
-            <a:headEnd/>
-            <a:tailEnd/>
-          </a:ln>
-        </p:spPr>
-      </p:pic>
-    </p:spTree>
-  </p:cSld>
-  <p:clrMapOvr>
-    <a:masterClrMapping/>
-  </p:clrMapOvr>
-</p:sld>
-</file>
-
-<file path=ppt/slides/slide32.xml><?xml version="1.0" encoding="utf-8"?>
-<p:sld xmlns:a="http://schemas.openxmlformats.org/drawingml/2006/main" xmlns:r="http://schemas.openxmlformats.org/officeDocument/2006/relationships" xmlns:p="http://schemas.openxmlformats.org/presentationml/2006/main">
-  <p:cSld>
-    <p:spTree>
-      <p:nvGrpSpPr>
-        <p:cNvPr id="1" name=""/>
-        <p:cNvGrpSpPr/>
-        <p:nvPr/>
-      </p:nvGrpSpPr>
-      <p:grpSpPr>
-        <a:xfrm>
-          <a:off x="0" y="0"/>
-          <a:ext cx="0" cy="0"/>
-          <a:chOff x="0" y="0"/>
-          <a:chExt cx="0" cy="0"/>
-        </a:xfrm>
-      </p:grpSpPr>
-      <p:sp>
-        <p:nvSpPr>
-          <p:cNvPr id="2" name="Title 1"/>
-          <p:cNvSpPr>
-            <a:spLocks noGrp="1"/>
-          </p:cNvSpPr>
-          <p:nvPr>
-            <p:ph type="title"/>
-          </p:nvPr>
-        </p:nvSpPr>
-        <p:spPr/>
-        <p:txBody>
-          <a:bodyPr/>
-          <a:lstStyle/>
-          <a:p>
-            <a:pPr algn="l"/>
-            <a:r>
-              <a:rPr lang="en-US" dirty="0" smtClean="0"/>
-              <a:t>3. Start Session State Service</a:t>
-            </a:r>
-            <a:endParaRPr lang="en-US" dirty="0"/>
-          </a:p>
-        </p:txBody>
-      </p:sp>
-      <p:sp>
-        <p:nvSpPr>
-          <p:cNvPr id="3" name="Content Placeholder 2"/>
-          <p:cNvSpPr>
-            <a:spLocks noGrp="1"/>
-          </p:cNvSpPr>
-          <p:nvPr>
-            <p:ph idx="1"/>
-          </p:nvPr>
-        </p:nvSpPr>
-        <p:spPr/>
-        <p:txBody>
-          <a:bodyPr/>
-          <a:lstStyle/>
-          <a:p>
-            <a:r>
-              <a:rPr lang="en-US" sz="2400" dirty="0" smtClean="0">
-                <a:latin typeface="Consolas" pitchFamily="49" charset="0"/>
-              </a:rPr>
-              <a:t>net start </a:t>
-            </a:r>
-            <a:r>
-              <a:rPr lang="en-US" sz="2400" dirty="0" err="1" smtClean="0">
-                <a:latin typeface="Consolas" pitchFamily="49" charset="0"/>
-              </a:rPr>
-              <a:t>aspnet_state</a:t>
-            </a:r>
-            <a:endParaRPr lang="en-US" sz="2400" dirty="0">
-              <a:latin typeface="Consolas" pitchFamily="49" charset="0"/>
-            </a:endParaRPr>
-          </a:p>
-        </p:txBody>
-      </p:sp>
-      <p:pic>
-        <p:nvPicPr>
-          <p:cNvPr id="1027" name="Picture 3"/>
-          <p:cNvPicPr>
-            <a:picLocks noChangeAspect="1" noChangeArrowheads="1"/>
-          </p:cNvPicPr>
-          <p:nvPr/>
-        </p:nvPicPr>
-        <p:blipFill>
-          <a:blip r:embed="rId2" cstate="print"/>
-          <a:srcRect/>
-          <a:stretch>
-            <a:fillRect/>
-          </a:stretch>
-        </p:blipFill>
-        <p:spPr bwMode="auto">
-          <a:xfrm>
-            <a:off x="439738" y="2593975"/>
-            <a:ext cx="8264525" cy="2968625"/>
-          </a:xfrm>
-          <a:prstGeom prst="rect">
-            <a:avLst/>
-          </a:prstGeom>
-          <a:noFill/>
-          <a:ln w="9525">
-            <a:noFill/>
-            <a:miter lim="800000"/>
-            <a:headEnd/>
-            <a:tailEnd/>
-          </a:ln>
-        </p:spPr>
-      </p:pic>
-    </p:spTree>
-  </p:cSld>
-  <p:clrMapOvr>
-    <a:masterClrMapping/>
-  </p:clrMapOvr>
-</p:sld>
-</file>
-
-<file path=ppt/slides/slide33.xml><?xml version="1.0" encoding="utf-8"?>
-<p:sld xmlns:a="http://schemas.openxmlformats.org/drawingml/2006/main" xmlns:r="http://schemas.openxmlformats.org/officeDocument/2006/relationships" xmlns:p="http://schemas.openxmlformats.org/presentationml/2006/main">
-  <p:cSld>
-    <p:spTree>
-      <p:nvGrpSpPr>
-        <p:cNvPr id="1" name=""/>
-        <p:cNvGrpSpPr/>
-        <p:nvPr/>
-      </p:nvGrpSpPr>
-      <p:grpSpPr>
-        <a:xfrm>
-          <a:off x="0" y="0"/>
-          <a:ext cx="0" cy="0"/>
-          <a:chOff x="0" y="0"/>
-          <a:chExt cx="0" cy="0"/>
-        </a:xfrm>
-      </p:grpSpPr>
-      <p:sp>
-        <p:nvSpPr>
-          <p:cNvPr id="2" name="Title 1"/>
-          <p:cNvSpPr>
-            <a:spLocks noGrp="1"/>
-          </p:cNvSpPr>
-          <p:nvPr>
-            <p:ph type="title"/>
-          </p:nvPr>
-        </p:nvSpPr>
-        <p:spPr/>
-        <p:txBody>
-          <a:bodyPr/>
-          <a:lstStyle/>
-          <a:p>
-            <a:pPr algn="l"/>
-            <a:r>
-              <a:rPr lang="en-US" sz="4200" dirty="0" smtClean="0"/>
-              <a:t>4. Enable </a:t>
-            </a:r>
-            <a:r>
-              <a:rPr lang="en-US" sz="4200" dirty="0" err="1" smtClean="0"/>
-              <a:t>StateServer</a:t>
-            </a:r>
-            <a:r>
-              <a:rPr lang="en-US" sz="4200" dirty="0" smtClean="0"/>
-              <a:t> Session Mode</a:t>
-            </a:r>
-            <a:endParaRPr lang="en-US" sz="4200" dirty="0"/>
-          </a:p>
-        </p:txBody>
-      </p:sp>
-      <p:sp>
-        <p:nvSpPr>
-          <p:cNvPr id="4" name="Rectangle 3"/>
-          <p:cNvSpPr/>
-          <p:nvPr/>
-        </p:nvSpPr>
-        <p:spPr>
-          <a:xfrm>
-            <a:off x="533400" y="2438400"/>
-            <a:ext cx="7924800" cy="2554545"/>
-          </a:xfrm>
-          <a:prstGeom prst="rect">
-            <a:avLst/>
-          </a:prstGeom>
-        </p:spPr>
-        <p:style>
-          <a:lnRef idx="1">
-            <a:schemeClr val="dk1"/>
-          </a:lnRef>
-          <a:fillRef idx="2">
-            <a:schemeClr val="dk1"/>
-          </a:fillRef>
-          <a:effectRef idx="1">
-            <a:schemeClr val="dk1"/>
-          </a:effectRef>
-          <a:fontRef idx="minor">
-            <a:schemeClr val="dk1"/>
-          </a:fontRef>
-        </p:style>
-        <p:txBody>
-          <a:bodyPr wrap="square">
-            <a:spAutoFit/>
-          </a:bodyPr>
-          <a:lstStyle/>
-          <a:p>
-            <a:pPr>
-              <a:buNone/>
-            </a:pPr>
-            <a:r>
-              <a:rPr lang="en-US" sz="2000" dirty="0" smtClean="0">
-                <a:latin typeface="Consolas" pitchFamily="49" charset="0"/>
-              </a:rPr>
-              <a:t> &lt;system.web&gt;</a:t>
-            </a:r>
-          </a:p>
-          <a:p>
-            <a:pPr>
-              <a:buNone/>
-            </a:pPr>
-            <a:r>
-              <a:rPr lang="en-US" sz="2000" dirty="0" smtClean="0">
-                <a:latin typeface="Consolas" pitchFamily="49" charset="0"/>
-              </a:rPr>
-              <a:t>    &lt;</a:t>
-            </a:r>
-            <a:r>
-              <a:rPr lang="en-US" sz="2000" dirty="0" err="1" smtClean="0">
-                <a:latin typeface="Consolas" pitchFamily="49" charset="0"/>
-              </a:rPr>
-              <a:t>httpCookies</a:t>
-            </a:r>
-            <a:r>
-              <a:rPr lang="en-US" sz="2000" dirty="0" smtClean="0">
-                <a:latin typeface="Consolas" pitchFamily="49" charset="0"/>
-              </a:rPr>
-              <a:t> </a:t>
-            </a:r>
-            <a:r>
-              <a:rPr lang="en-US" sz="2000" dirty="0" err="1" smtClean="0">
-                <a:latin typeface="Consolas" pitchFamily="49" charset="0"/>
-              </a:rPr>
-              <a:t>requireSSL</a:t>
-            </a:r>
-            <a:r>
-              <a:rPr lang="en-US" sz="2000" dirty="0" smtClean="0">
-                <a:latin typeface="Consolas" pitchFamily="49" charset="0"/>
-              </a:rPr>
-              <a:t>="true" /&gt;</a:t>
-            </a:r>
-          </a:p>
-          <a:p>
-            <a:pPr>
-              <a:buNone/>
-            </a:pPr>
-            <a:r>
-              <a:rPr lang="en-US" sz="2000" dirty="0" smtClean="0">
-                <a:latin typeface="Consolas" pitchFamily="49" charset="0"/>
-              </a:rPr>
-              <a:t>    &lt;</a:t>
-            </a:r>
-            <a:r>
-              <a:rPr lang="en-US" sz="2000" dirty="0" err="1" smtClean="0">
-                <a:latin typeface="Consolas" pitchFamily="49" charset="0"/>
-              </a:rPr>
-              <a:t>machineKey</a:t>
-            </a:r>
-            <a:r>
-              <a:rPr lang="en-US" sz="2000" dirty="0" smtClean="0">
-                <a:latin typeface="Consolas" pitchFamily="49" charset="0"/>
-              </a:rPr>
-              <a:t> validation="SHA1" /&gt;</a:t>
-            </a:r>
-          </a:p>
-          <a:p>
-            <a:pPr>
-              <a:buNone/>
-            </a:pPr>
-            <a:r>
-              <a:rPr lang="en-US" sz="2000" dirty="0" smtClean="0">
-                <a:latin typeface="Consolas" pitchFamily="49" charset="0"/>
-              </a:rPr>
-              <a:t>    &lt;</a:t>
-            </a:r>
-            <a:r>
-              <a:rPr lang="en-US" sz="2000" dirty="0" err="1" smtClean="0">
-                <a:latin typeface="Consolas" pitchFamily="49" charset="0"/>
-              </a:rPr>
-              <a:t>sessionState</a:t>
-            </a:r>
-            <a:r>
-              <a:rPr lang="en-US" sz="2000" dirty="0" smtClean="0">
-                <a:latin typeface="Consolas" pitchFamily="49" charset="0"/>
-              </a:rPr>
-              <a:t> timeout="25" </a:t>
-            </a:r>
-            <a:r>
-              <a:rPr lang="en-US" sz="2000" dirty="0" err="1" smtClean="0">
-                <a:latin typeface="Consolas" pitchFamily="49" charset="0"/>
-              </a:rPr>
-              <a:t>cookieless</a:t>
-            </a:r>
-            <a:r>
-              <a:rPr lang="en-US" sz="2000" dirty="0" smtClean="0">
-                <a:latin typeface="Consolas" pitchFamily="49" charset="0"/>
-              </a:rPr>
-              <a:t>="false" </a:t>
-            </a:r>
-            <a:r>
-              <a:rPr lang="en-US" sz="2000" dirty="0" err="1" smtClean="0">
-                <a:latin typeface="Consolas" pitchFamily="49" charset="0"/>
-              </a:rPr>
-              <a:t>regenerateExpiredSessionId</a:t>
-            </a:r>
-            <a:r>
-              <a:rPr lang="en-US" sz="2000" dirty="0" smtClean="0">
-                <a:latin typeface="Consolas" pitchFamily="49" charset="0"/>
-              </a:rPr>
-              <a:t>="true" mode="</a:t>
-            </a:r>
-            <a:r>
-              <a:rPr lang="en-US" sz="2000" b="1" dirty="0" err="1" smtClean="0">
-                <a:solidFill>
-                  <a:srgbClr val="C00000"/>
-                </a:solidFill>
-                <a:latin typeface="Consolas" pitchFamily="49" charset="0"/>
-              </a:rPr>
-              <a:t>StateServer</a:t>
-            </a:r>
-            <a:r>
-              <a:rPr lang="en-US" sz="2000" dirty="0" smtClean="0">
-                <a:latin typeface="Consolas" pitchFamily="49" charset="0"/>
-              </a:rPr>
-              <a:t>" </a:t>
-            </a:r>
-            <a:r>
-              <a:rPr lang="en-US" sz="2000" dirty="0" err="1" smtClean="0">
-                <a:latin typeface="Consolas" pitchFamily="49" charset="0"/>
-              </a:rPr>
-              <a:t>stateConnectionString</a:t>
-            </a:r>
-            <a:r>
-              <a:rPr lang="en-US" sz="2000" dirty="0" smtClean="0">
-                <a:latin typeface="Consolas" pitchFamily="49" charset="0"/>
-              </a:rPr>
-              <a:t>="</a:t>
-            </a:r>
-            <a:r>
-              <a:rPr lang="en-US" sz="2000" dirty="0" err="1" smtClean="0">
-                <a:latin typeface="Consolas" pitchFamily="49" charset="0"/>
-              </a:rPr>
-              <a:t>tcpip</a:t>
-            </a:r>
-            <a:r>
-              <a:rPr lang="en-US" sz="2000" dirty="0" smtClean="0">
-                <a:latin typeface="Consolas" pitchFamily="49" charset="0"/>
-              </a:rPr>
-              <a:t>=192.168.101.120:42424" </a:t>
-            </a:r>
-            <a:r>
-              <a:rPr lang="en-US" sz="2000" dirty="0" err="1" smtClean="0">
-                <a:latin typeface="Consolas" pitchFamily="49" charset="0"/>
-              </a:rPr>
-              <a:t>stateNetworkTimeout</a:t>
-            </a:r>
-            <a:r>
-              <a:rPr lang="en-US" sz="2000" dirty="0" smtClean="0">
-                <a:latin typeface="Consolas" pitchFamily="49" charset="0"/>
-              </a:rPr>
-              <a:t>="60" </a:t>
-            </a:r>
-            <a:r>
-              <a:rPr lang="en-US" sz="2000" dirty="0" err="1" smtClean="0">
-                <a:latin typeface="Consolas" pitchFamily="49" charset="0"/>
-              </a:rPr>
-              <a:t>useHostingIdentity</a:t>
-            </a:r>
-            <a:r>
-              <a:rPr lang="en-US" sz="2000" dirty="0" smtClean="0">
-                <a:latin typeface="Consolas" pitchFamily="49" charset="0"/>
-              </a:rPr>
-              <a:t>="false" /&gt;</a:t>
-            </a:r>
-          </a:p>
-          <a:p>
-            <a:pPr>
-              <a:buNone/>
-            </a:pPr>
-            <a:r>
-              <a:rPr lang="en-US" sz="2000" dirty="0" smtClean="0">
-                <a:latin typeface="Consolas" pitchFamily="49" charset="0"/>
-              </a:rPr>
-              <a:t>...</a:t>
-            </a:r>
-          </a:p>
-        </p:txBody>
-      </p:sp>
-    </p:spTree>
-  </p:cSld>
-  <p:clrMapOvr>
-    <a:masterClrMapping/>
-  </p:clrMapOvr>
-</p:sld>
-</file>
-
-<file path=ppt/slides/slide34.xml><?xml version="1.0" encoding="utf-8"?>
 <p:sld xmlns:a="http://schemas.openxmlformats.org/drawingml/2006/main" xmlns:r="http://schemas.openxmlformats.org/officeDocument/2006/relationships" xmlns:p="http://schemas.openxmlformats.org/presentationml/2006/main">
   <p:cSld>
     <p:spTree>
@@ -7964,6 +7385,372 @@
 </p:sld>
 </file>
 
+<file path=ppt/slides/slide32.xml><?xml version="1.0" encoding="utf-8"?>
+<p:sld xmlns:a="http://schemas.openxmlformats.org/drawingml/2006/main" xmlns:r="http://schemas.openxmlformats.org/officeDocument/2006/relationships" xmlns:p="http://schemas.openxmlformats.org/presentationml/2006/main">
+  <p:cSld>
+    <p:spTree>
+      <p:nvGrpSpPr>
+        <p:cNvPr id="1" name=""/>
+        <p:cNvGrpSpPr/>
+        <p:nvPr/>
+      </p:nvGrpSpPr>
+      <p:grpSpPr>
+        <a:xfrm>
+          <a:off x="0" y="0"/>
+          <a:ext cx="0" cy="0"/>
+          <a:chOff x="0" y="0"/>
+          <a:chExt cx="0" cy="0"/>
+        </a:xfrm>
+      </p:grpSpPr>
+      <p:sp>
+        <p:nvSpPr>
+          <p:cNvPr id="2" name="Title 1"/>
+          <p:cNvSpPr>
+            <a:spLocks noGrp="1"/>
+          </p:cNvSpPr>
+          <p:nvPr>
+            <p:ph type="title"/>
+          </p:nvPr>
+        </p:nvSpPr>
+        <p:spPr/>
+        <p:txBody>
+          <a:bodyPr/>
+          <a:lstStyle/>
+          <a:p>
+            <a:pPr algn="l"/>
+            <a:r>
+              <a:rPr lang="en-US" sz="3800" dirty="0" smtClean="0"/>
+              <a:t>1. Enable State Service Remote Connection</a:t>
+            </a:r>
+            <a:endParaRPr lang="en-US" sz="3800" dirty="0"/>
+          </a:p>
+        </p:txBody>
+      </p:sp>
+      <p:sp>
+        <p:nvSpPr>
+          <p:cNvPr id="3" name="Content Placeholder 2"/>
+          <p:cNvSpPr>
+            <a:spLocks noGrp="1"/>
+          </p:cNvSpPr>
+          <p:nvPr>
+            <p:ph idx="1"/>
+          </p:nvPr>
+        </p:nvSpPr>
+        <p:spPr/>
+        <p:txBody>
+          <a:bodyPr/>
+          <a:lstStyle/>
+          <a:p>
+            <a:r>
+              <a:rPr lang="en-US" sz="2200" dirty="0" smtClean="0">
+                <a:latin typeface="Consolas" pitchFamily="49" charset="0"/>
+              </a:rPr>
+              <a:t>HKEY_LOCAL_MACHINE\SYSTEM\</a:t>
+            </a:r>
+            <a:r>
+              <a:rPr lang="en-US" sz="2200" dirty="0" err="1" smtClean="0">
+                <a:latin typeface="Consolas" pitchFamily="49" charset="0"/>
+              </a:rPr>
+              <a:t>CurrentControlSet</a:t>
+            </a:r>
+            <a:r>
+              <a:rPr lang="en-US" sz="2200" dirty="0" smtClean="0">
+                <a:latin typeface="Consolas" pitchFamily="49" charset="0"/>
+              </a:rPr>
+              <a:t>\Services\</a:t>
+            </a:r>
+            <a:r>
+              <a:rPr lang="en-US" sz="2200" dirty="0" err="1" smtClean="0">
+                <a:latin typeface="Consolas" pitchFamily="49" charset="0"/>
+              </a:rPr>
+              <a:t>aspnet_state</a:t>
+            </a:r>
+            <a:r>
+              <a:rPr lang="en-US" sz="2200" dirty="0" smtClean="0">
+                <a:latin typeface="Consolas" pitchFamily="49" charset="0"/>
+              </a:rPr>
+              <a:t>\Parameters\</a:t>
+            </a:r>
+            <a:r>
+              <a:rPr lang="en-US" sz="2200" dirty="0" err="1" smtClean="0">
+                <a:latin typeface="Consolas" pitchFamily="49" charset="0"/>
+              </a:rPr>
+              <a:t>AllowRemoteConnection</a:t>
+            </a:r>
+            <a:endParaRPr lang="en-US" sz="2200" dirty="0">
+              <a:latin typeface="Consolas" pitchFamily="49" charset="0"/>
+            </a:endParaRPr>
+          </a:p>
+        </p:txBody>
+      </p:sp>
+      <p:pic>
+        <p:nvPicPr>
+          <p:cNvPr id="2050" name="Picture 2"/>
+          <p:cNvPicPr>
+            <a:picLocks noChangeAspect="1" noChangeArrowheads="1"/>
+          </p:cNvPicPr>
+          <p:nvPr/>
+        </p:nvPicPr>
+        <p:blipFill>
+          <a:blip r:embed="rId2" cstate="print"/>
+          <a:srcRect/>
+          <a:stretch>
+            <a:fillRect/>
+          </a:stretch>
+        </p:blipFill>
+        <p:spPr bwMode="auto">
+          <a:xfrm>
+            <a:off x="1371600" y="2667000"/>
+            <a:ext cx="6390640" cy="3220720"/>
+          </a:xfrm>
+          <a:prstGeom prst="rect">
+            <a:avLst/>
+          </a:prstGeom>
+          <a:noFill/>
+          <a:ln w="9525">
+            <a:noFill/>
+            <a:miter lim="800000"/>
+            <a:headEnd/>
+            <a:tailEnd/>
+          </a:ln>
+        </p:spPr>
+      </p:pic>
+    </p:spTree>
+  </p:cSld>
+  <p:clrMapOvr>
+    <a:masterClrMapping/>
+  </p:clrMapOvr>
+</p:sld>
+</file>
+
+<file path=ppt/slides/slide33.xml><?xml version="1.0" encoding="utf-8"?>
+<p:sld xmlns:a="http://schemas.openxmlformats.org/drawingml/2006/main" xmlns:r="http://schemas.openxmlformats.org/officeDocument/2006/relationships" xmlns:p="http://schemas.openxmlformats.org/presentationml/2006/main">
+  <p:cSld>
+    <p:spTree>
+      <p:nvGrpSpPr>
+        <p:cNvPr id="1" name=""/>
+        <p:cNvGrpSpPr/>
+        <p:nvPr/>
+      </p:nvGrpSpPr>
+      <p:grpSpPr>
+        <a:xfrm>
+          <a:off x="0" y="0"/>
+          <a:ext cx="0" cy="0"/>
+          <a:chOff x="0" y="0"/>
+          <a:chExt cx="0" cy="0"/>
+        </a:xfrm>
+      </p:grpSpPr>
+      <p:sp>
+        <p:nvSpPr>
+          <p:cNvPr id="2" name="Title 1"/>
+          <p:cNvSpPr>
+            <a:spLocks noGrp="1"/>
+          </p:cNvSpPr>
+          <p:nvPr>
+            <p:ph type="title"/>
+          </p:nvPr>
+        </p:nvSpPr>
+        <p:spPr/>
+        <p:txBody>
+          <a:bodyPr/>
+          <a:lstStyle/>
+          <a:p>
+            <a:pPr algn="l"/>
+            <a:r>
+              <a:rPr lang="en-US" dirty="0" smtClean="0"/>
+              <a:t>2. Open State Service Firewall Port</a:t>
+            </a:r>
+            <a:endParaRPr lang="en-US" dirty="0"/>
+          </a:p>
+        </p:txBody>
+      </p:sp>
+      <p:sp>
+        <p:nvSpPr>
+          <p:cNvPr id="3" name="Content Placeholder 2"/>
+          <p:cNvSpPr>
+            <a:spLocks noGrp="1"/>
+          </p:cNvSpPr>
+          <p:nvPr>
+            <p:ph idx="1"/>
+          </p:nvPr>
+        </p:nvSpPr>
+        <p:spPr/>
+        <p:txBody>
+          <a:bodyPr/>
+          <a:lstStyle/>
+          <a:p>
+            <a:r>
+              <a:rPr lang="en-US" sz="2200" dirty="0" smtClean="0">
+                <a:latin typeface="+mj-lt"/>
+              </a:rPr>
+              <a:t>Port: </a:t>
+            </a:r>
+            <a:r>
+              <a:rPr lang="en-US" sz="2200" b="1" dirty="0" smtClean="0">
+                <a:latin typeface="+mj-lt"/>
+              </a:rPr>
+              <a:t>42424</a:t>
+            </a:r>
+            <a:endParaRPr lang="en-US" sz="2200" b="1" dirty="0">
+              <a:latin typeface="+mj-lt"/>
+            </a:endParaRPr>
+          </a:p>
+        </p:txBody>
+      </p:sp>
+      <p:pic>
+        <p:nvPicPr>
+          <p:cNvPr id="3074" name="Picture 2"/>
+          <p:cNvPicPr>
+            <a:picLocks noChangeAspect="1" noChangeArrowheads="1"/>
+          </p:cNvPicPr>
+          <p:nvPr/>
+        </p:nvPicPr>
+        <p:blipFill>
+          <a:blip r:embed="rId2" cstate="print"/>
+          <a:srcRect/>
+          <a:stretch>
+            <a:fillRect/>
+          </a:stretch>
+        </p:blipFill>
+        <p:spPr bwMode="auto">
+          <a:xfrm>
+            <a:off x="914400" y="2743200"/>
+            <a:ext cx="7287260" cy="3200400"/>
+          </a:xfrm>
+          <a:prstGeom prst="rect">
+            <a:avLst/>
+          </a:prstGeom>
+          <a:noFill/>
+          <a:ln w="9525">
+            <a:noFill/>
+            <a:miter lim="800000"/>
+            <a:headEnd/>
+            <a:tailEnd/>
+          </a:ln>
+        </p:spPr>
+      </p:pic>
+    </p:spTree>
+  </p:cSld>
+  <p:clrMapOvr>
+    <a:masterClrMapping/>
+  </p:clrMapOvr>
+</p:sld>
+</file>
+
+<file path=ppt/slides/slide34.xml><?xml version="1.0" encoding="utf-8"?>
+<p:sld xmlns:a="http://schemas.openxmlformats.org/drawingml/2006/main" xmlns:r="http://schemas.openxmlformats.org/officeDocument/2006/relationships" xmlns:p="http://schemas.openxmlformats.org/presentationml/2006/main">
+  <p:cSld>
+    <p:spTree>
+      <p:nvGrpSpPr>
+        <p:cNvPr id="1" name=""/>
+        <p:cNvGrpSpPr/>
+        <p:nvPr/>
+      </p:nvGrpSpPr>
+      <p:grpSpPr>
+        <a:xfrm>
+          <a:off x="0" y="0"/>
+          <a:ext cx="0" cy="0"/>
+          <a:chOff x="0" y="0"/>
+          <a:chExt cx="0" cy="0"/>
+        </a:xfrm>
+      </p:grpSpPr>
+      <p:sp>
+        <p:nvSpPr>
+          <p:cNvPr id="2" name="Title 1"/>
+          <p:cNvSpPr>
+            <a:spLocks noGrp="1"/>
+          </p:cNvSpPr>
+          <p:nvPr>
+            <p:ph type="title"/>
+          </p:nvPr>
+        </p:nvSpPr>
+        <p:spPr/>
+        <p:txBody>
+          <a:bodyPr/>
+          <a:lstStyle/>
+          <a:p>
+            <a:pPr algn="l"/>
+            <a:r>
+              <a:rPr lang="en-US" dirty="0" smtClean="0"/>
+              <a:t>3. Start Session State Service</a:t>
+            </a:r>
+            <a:endParaRPr lang="en-US" dirty="0"/>
+          </a:p>
+        </p:txBody>
+      </p:sp>
+      <p:sp>
+        <p:nvSpPr>
+          <p:cNvPr id="3" name="Content Placeholder 2"/>
+          <p:cNvSpPr>
+            <a:spLocks noGrp="1"/>
+          </p:cNvSpPr>
+          <p:nvPr>
+            <p:ph idx="1"/>
+          </p:nvPr>
+        </p:nvSpPr>
+        <p:spPr/>
+        <p:txBody>
+          <a:bodyPr/>
+          <a:lstStyle/>
+          <a:p>
+            <a:r>
+              <a:rPr lang="en-US" sz="2400" dirty="0" smtClean="0">
+                <a:latin typeface="Consolas" pitchFamily="49" charset="0"/>
+              </a:rPr>
+              <a:t>net start </a:t>
+            </a:r>
+            <a:r>
+              <a:rPr lang="en-US" sz="2400" dirty="0" err="1" smtClean="0">
+                <a:latin typeface="Consolas" pitchFamily="49" charset="0"/>
+              </a:rPr>
+              <a:t>aspnet_state</a:t>
+            </a:r>
+            <a:endParaRPr lang="en-US" sz="2400" dirty="0">
+              <a:latin typeface="Consolas" pitchFamily="49" charset="0"/>
+            </a:endParaRPr>
+          </a:p>
+        </p:txBody>
+      </p:sp>
+      <p:pic>
+        <p:nvPicPr>
+          <p:cNvPr id="1027" name="Picture 3"/>
+          <p:cNvPicPr>
+            <a:picLocks noChangeAspect="1" noChangeArrowheads="1"/>
+          </p:cNvPicPr>
+          <p:nvPr/>
+        </p:nvPicPr>
+        <p:blipFill>
+          <a:blip r:embed="rId2" cstate="print"/>
+          <a:srcRect/>
+          <a:stretch>
+            <a:fillRect/>
+          </a:stretch>
+        </p:blipFill>
+        <p:spPr bwMode="auto">
+          <a:xfrm>
+            <a:off x="439738" y="2593975"/>
+            <a:ext cx="8264525" cy="2968625"/>
+          </a:xfrm>
+          <a:prstGeom prst="rect">
+            <a:avLst/>
+          </a:prstGeom>
+          <a:noFill/>
+          <a:ln w="9525">
+            <a:noFill/>
+            <a:miter lim="800000"/>
+            <a:headEnd/>
+            <a:tailEnd/>
+          </a:ln>
+        </p:spPr>
+      </p:pic>
+    </p:spTree>
+  </p:cSld>
+  <p:clrMapOvr>
+    <a:masterClrMapping/>
+  </p:clrMapOvr>
+</p:sld>
+</file>
+
 <file path=ppt/slides/slide35.xml><?xml version="1.0" encoding="utf-8"?>
 <p:sld xmlns:a="http://schemas.openxmlformats.org/drawingml/2006/main" xmlns:r="http://schemas.openxmlformats.org/officeDocument/2006/relationships" xmlns:p="http://schemas.openxmlformats.org/presentationml/2006/main">
   <p:cSld>
@@ -7996,92 +7783,249 @@
           <a:bodyPr/>
           <a:lstStyle/>
           <a:p>
-            <a:r>
-              <a:rPr lang="en-US" dirty="0" smtClean="0"/>
-              <a:t>Distributed Cache [3]</a:t>
-            </a:r>
-            <a:endParaRPr lang="en-US" dirty="0"/>
-          </a:p>
-        </p:txBody>
-      </p:sp>
-      <p:sp>
-        <p:nvSpPr>
-          <p:cNvPr id="3" name="Content Placeholder 2"/>
-          <p:cNvSpPr>
-            <a:spLocks noGrp="1"/>
-          </p:cNvSpPr>
-          <p:nvPr>
-            <p:ph idx="1"/>
-          </p:nvPr>
-        </p:nvSpPr>
-        <p:spPr/>
-        <p:txBody>
-          <a:bodyPr/>
-          <a:lstStyle/>
-          <a:p>
-            <a:r>
-              <a:rPr lang="en-US" sz="2400" dirty="0" smtClean="0">
-                <a:hlinkClick r:id="rId2"/>
-              </a:rPr>
-              <a:t>https://github.com/memcached/memcached/wiki</a:t>
-            </a:r>
-            <a:endParaRPr lang="en-US" sz="2400" dirty="0" smtClean="0"/>
-          </a:p>
-          <a:p>
-            <a:r>
-              <a:rPr lang="en-US" sz="2400" dirty="0" smtClean="0">
-                <a:hlinkClick r:id="rId3"/>
-              </a:rPr>
-              <a:t>https://redis.io/docs/getting-started/</a:t>
-            </a:r>
-            <a:endParaRPr lang="en-US" sz="2400" dirty="0" smtClean="0"/>
-          </a:p>
-          <a:p>
-            <a:r>
-              <a:rPr lang="en-US" sz="2400" dirty="0" smtClean="0">
-                <a:hlinkClick r:id="rId4"/>
-              </a:rPr>
-              <a:t>https://codeburst.io/redis-what-and-why-d52b6829813</a:t>
-            </a:r>
-            <a:endParaRPr lang="en-US" sz="2400" dirty="0" smtClean="0"/>
-          </a:p>
-          <a:p>
-            <a:endParaRPr lang="en-US" sz="2400" dirty="0"/>
-          </a:p>
-        </p:txBody>
-      </p:sp>
-      <p:pic>
-        <p:nvPicPr>
-          <p:cNvPr id="8" name="Picture 6"/>
-          <p:cNvPicPr>
-            <a:picLocks noChangeAspect="1" noChangeArrowheads="1"/>
-          </p:cNvPicPr>
+            <a:pPr algn="l"/>
+            <a:r>
+              <a:rPr lang="en-US" sz="4200" dirty="0" smtClean="0"/>
+              <a:t>4. Enable </a:t>
+            </a:r>
+            <a:r>
+              <a:rPr lang="en-US" sz="4200" dirty="0" err="1" smtClean="0"/>
+              <a:t>StateServer</a:t>
+            </a:r>
+            <a:r>
+              <a:rPr lang="en-US" sz="4200" dirty="0" smtClean="0"/>
+              <a:t> Session Mode</a:t>
+            </a:r>
+            <a:endParaRPr lang="en-US" sz="4200" dirty="0"/>
+          </a:p>
+        </p:txBody>
+      </p:sp>
+      <p:sp>
+        <p:nvSpPr>
+          <p:cNvPr id="4" name="Rectangle 3"/>
+          <p:cNvSpPr/>
           <p:nvPr/>
-        </p:nvPicPr>
-        <p:blipFill>
-          <a:blip r:embed="rId5" cstate="print"/>
-          <a:srcRect/>
-          <a:stretch>
-            <a:fillRect/>
-          </a:stretch>
-        </p:blipFill>
-        <p:spPr bwMode="auto">
+        </p:nvSpPr>
+        <p:spPr>
           <a:xfrm>
-            <a:off x="2667000" y="3162300"/>
-            <a:ext cx="3954780" cy="3314700"/>
+            <a:off x="533400" y="2438400"/>
+            <a:ext cx="7924800" cy="2554545"/>
           </a:xfrm>
           <a:prstGeom prst="rect">
             <a:avLst/>
           </a:prstGeom>
-          <a:noFill/>
-          <a:ln w="9525">
-            <a:noFill/>
-            <a:miter lim="800000"/>
-            <a:headEnd/>
-            <a:tailEnd/>
-          </a:ln>
         </p:spPr>
-      </p:pic>
+        <p:style>
+          <a:lnRef idx="1">
+            <a:schemeClr val="dk1"/>
+          </a:lnRef>
+          <a:fillRef idx="2">
+            <a:schemeClr val="dk1"/>
+          </a:fillRef>
+          <a:effectRef idx="1">
+            <a:schemeClr val="dk1"/>
+          </a:effectRef>
+          <a:fontRef idx="minor">
+            <a:schemeClr val="dk1"/>
+          </a:fontRef>
+        </p:style>
+        <p:txBody>
+          <a:bodyPr wrap="square">
+            <a:spAutoFit/>
+          </a:bodyPr>
+          <a:lstStyle/>
+          <a:p>
+            <a:pPr>
+              <a:buNone/>
+            </a:pPr>
+            <a:r>
+              <a:rPr lang="en-US" sz="2000" dirty="0" smtClean="0">
+                <a:latin typeface="Consolas" pitchFamily="49" charset="0"/>
+              </a:rPr>
+              <a:t> &lt;system.web&gt;</a:t>
+            </a:r>
+          </a:p>
+          <a:p>
+            <a:pPr>
+              <a:buNone/>
+            </a:pPr>
+            <a:r>
+              <a:rPr lang="en-US" sz="2000" dirty="0" smtClean="0">
+                <a:latin typeface="Consolas" pitchFamily="49" charset="0"/>
+              </a:rPr>
+              <a:t>    &lt;</a:t>
+            </a:r>
+            <a:r>
+              <a:rPr lang="en-US" sz="2000" dirty="0" err="1" smtClean="0">
+                <a:latin typeface="Consolas" pitchFamily="49" charset="0"/>
+              </a:rPr>
+              <a:t>httpCookies</a:t>
+            </a:r>
+            <a:r>
+              <a:rPr lang="en-US" sz="2000" dirty="0" smtClean="0">
+                <a:latin typeface="Consolas" pitchFamily="49" charset="0"/>
+              </a:rPr>
+              <a:t> </a:t>
+            </a:r>
+            <a:r>
+              <a:rPr lang="en-US" sz="2000" dirty="0" err="1" smtClean="0">
+                <a:latin typeface="Consolas" pitchFamily="49" charset="0"/>
+              </a:rPr>
+              <a:t>requireSSL</a:t>
+            </a:r>
+            <a:r>
+              <a:rPr lang="en-US" sz="2000" dirty="0" smtClean="0">
+                <a:latin typeface="Consolas" pitchFamily="49" charset="0"/>
+              </a:rPr>
+              <a:t>="true" /&gt;</a:t>
+            </a:r>
+          </a:p>
+          <a:p>
+            <a:pPr>
+              <a:buNone/>
+            </a:pPr>
+            <a:r>
+              <a:rPr lang="en-US" sz="2000" dirty="0" smtClean="0">
+                <a:latin typeface="Consolas" pitchFamily="49" charset="0"/>
+              </a:rPr>
+              <a:t>    &lt;</a:t>
+            </a:r>
+            <a:r>
+              <a:rPr lang="en-US" sz="2000" dirty="0" err="1" smtClean="0">
+                <a:latin typeface="Consolas" pitchFamily="49" charset="0"/>
+              </a:rPr>
+              <a:t>machineKey</a:t>
+            </a:r>
+            <a:r>
+              <a:rPr lang="en-US" sz="2000" dirty="0" smtClean="0">
+                <a:latin typeface="Consolas" pitchFamily="49" charset="0"/>
+              </a:rPr>
+              <a:t> validation="SHA1" /&gt;</a:t>
+            </a:r>
+          </a:p>
+          <a:p>
+            <a:pPr>
+              <a:buNone/>
+            </a:pPr>
+            <a:r>
+              <a:rPr lang="en-US" sz="2000" dirty="0" smtClean="0">
+                <a:latin typeface="Consolas" pitchFamily="49" charset="0"/>
+              </a:rPr>
+              <a:t>    &lt;</a:t>
+            </a:r>
+            <a:r>
+              <a:rPr lang="en-US" sz="2000" dirty="0" err="1" smtClean="0">
+                <a:latin typeface="Consolas" pitchFamily="49" charset="0"/>
+              </a:rPr>
+              <a:t>sessionState</a:t>
+            </a:r>
+            <a:r>
+              <a:rPr lang="en-US" sz="2000" dirty="0" smtClean="0">
+                <a:latin typeface="Consolas" pitchFamily="49" charset="0"/>
+              </a:rPr>
+              <a:t> timeout="25" </a:t>
+            </a:r>
+            <a:r>
+              <a:rPr lang="en-US" sz="2000" dirty="0" err="1" smtClean="0">
+                <a:latin typeface="Consolas" pitchFamily="49" charset="0"/>
+              </a:rPr>
+              <a:t>cookieless</a:t>
+            </a:r>
+            <a:r>
+              <a:rPr lang="en-US" sz="2000" dirty="0" smtClean="0">
+                <a:latin typeface="Consolas" pitchFamily="49" charset="0"/>
+              </a:rPr>
+              <a:t>="false" </a:t>
+            </a:r>
+            <a:r>
+              <a:rPr lang="en-US" sz="2000" dirty="0" err="1" smtClean="0">
+                <a:latin typeface="Consolas" pitchFamily="49" charset="0"/>
+              </a:rPr>
+              <a:t>regenerateExpiredSessionId</a:t>
+            </a:r>
+            <a:r>
+              <a:rPr lang="en-US" sz="2000" dirty="0" smtClean="0">
+                <a:latin typeface="Consolas" pitchFamily="49" charset="0"/>
+              </a:rPr>
+              <a:t>="true" mode="</a:t>
+            </a:r>
+            <a:r>
+              <a:rPr lang="en-US" sz="2000" b="1" dirty="0" err="1" smtClean="0">
+                <a:solidFill>
+                  <a:srgbClr val="C00000"/>
+                </a:solidFill>
+                <a:latin typeface="Consolas" pitchFamily="49" charset="0"/>
+              </a:rPr>
+              <a:t>StateServer</a:t>
+            </a:r>
+            <a:r>
+              <a:rPr lang="en-US" sz="2000" dirty="0" smtClean="0">
+                <a:latin typeface="Consolas" pitchFamily="49" charset="0"/>
+              </a:rPr>
+              <a:t>" </a:t>
+            </a:r>
+            <a:r>
+              <a:rPr lang="en-US" sz="2000" dirty="0" err="1" smtClean="0">
+                <a:latin typeface="Consolas" pitchFamily="49" charset="0"/>
+              </a:rPr>
+              <a:t>stateConnectionString</a:t>
+            </a:r>
+            <a:r>
+              <a:rPr lang="en-US" sz="2000" dirty="0" smtClean="0">
+                <a:latin typeface="Consolas" pitchFamily="49" charset="0"/>
+              </a:rPr>
+              <a:t>="</a:t>
+            </a:r>
+            <a:r>
+              <a:rPr lang="en-US" sz="2000" dirty="0" err="1" smtClean="0">
+                <a:latin typeface="Consolas" pitchFamily="49" charset="0"/>
+              </a:rPr>
+              <a:t>tcpip</a:t>
+            </a:r>
+            <a:r>
+              <a:rPr lang="en-US" sz="2000" dirty="0" smtClean="0">
+                <a:latin typeface="Consolas" pitchFamily="49" charset="0"/>
+              </a:rPr>
+              <a:t>=192.168.101.120:42424" </a:t>
+            </a:r>
+            <a:r>
+              <a:rPr lang="en-US" sz="2000" dirty="0" err="1" smtClean="0">
+                <a:latin typeface="Consolas" pitchFamily="49" charset="0"/>
+              </a:rPr>
+              <a:t>stateNetworkTimeout</a:t>
+            </a:r>
+            <a:r>
+              <a:rPr lang="en-US" sz="2000" dirty="0" smtClean="0">
+                <a:latin typeface="Consolas" pitchFamily="49" charset="0"/>
+              </a:rPr>
+              <a:t>="60" </a:t>
+            </a:r>
+            <a:r>
+              <a:rPr lang="en-US" sz="2000" dirty="0" err="1" smtClean="0">
+                <a:latin typeface="Consolas" pitchFamily="49" charset="0"/>
+              </a:rPr>
+              <a:t>useHostingIdentity</a:t>
+            </a:r>
+            <a:r>
+              <a:rPr lang="en-US" sz="2000" dirty="0" smtClean="0">
+                <a:latin typeface="Consolas" pitchFamily="49" charset="0"/>
+              </a:rPr>
+              <a:t>="false" /&gt;</a:t>
+            </a:r>
+          </a:p>
+          <a:p>
+            <a:pPr>
+              <a:buNone/>
+            </a:pPr>
+            <a:r>
+              <a:rPr lang="en-US" sz="2000" dirty="0" smtClean="0">
+                <a:latin typeface="Consolas" pitchFamily="49" charset="0"/>
+              </a:rPr>
+              <a:t>...</a:t>
+            </a:r>
+          </a:p>
+        </p:txBody>
+      </p:sp>
     </p:spTree>
   </p:cSld>
   <p:clrMapOvr>
@@ -8175,7 +8119,7 @@
           <a:p>
             <a:r>
               <a:rPr lang="en-US" dirty="0" smtClean="0"/>
-              <a:t>Scaling Out File Server</a:t>
+              <a:t>Distributed Cache [3]</a:t>
             </a:r>
             <a:endParaRPr lang="en-US" dirty="0"/>
           </a:p>
@@ -8197,25 +8141,46 @@
           <a:lstStyle/>
           <a:p>
             <a:r>
-              <a:rPr lang="en-US" sz="2200" dirty="0" smtClean="0">
+              <a:rPr lang="en-US" sz="2400" dirty="0" smtClean="0">
                 <a:hlinkClick r:id="rId2"/>
               </a:rPr>
-              <a:t>https://www.altaro.com/hyper-v/scale-out-file-server-hyper-v/</a:t>
-            </a:r>
-            <a:endParaRPr lang="en-US" sz="2200" dirty="0" smtClean="0"/>
+              <a:t>https://github.com/memcached/memcached/wiki</a:t>
+            </a:r>
+            <a:endParaRPr lang="en-US" sz="2400" dirty="0" smtClean="0"/>
+          </a:p>
+          <a:p>
+            <a:r>
+              <a:rPr lang="en-US" sz="2400" dirty="0" smtClean="0">
+                <a:hlinkClick r:id="rId3"/>
+              </a:rPr>
+              <a:t>https://redis.io/docs/getting-started/</a:t>
+            </a:r>
+            <a:endParaRPr lang="en-US" sz="2400" dirty="0" smtClean="0"/>
+          </a:p>
+          <a:p>
+            <a:r>
+              <a:rPr lang="en-US" sz="2400" dirty="0" smtClean="0">
+                <a:hlinkClick r:id="rId4"/>
+              </a:rPr>
+              <a:t>https://codeburst.io/redis-what-and-why-d52b6829813</a:t>
+            </a:r>
+            <a:endParaRPr lang="en-US" sz="2400" dirty="0" smtClean="0"/>
+          </a:p>
+          <a:p>
+            <a:endParaRPr lang="en-US" sz="2400" dirty="0"/>
           </a:p>
         </p:txBody>
       </p:sp>
       <p:pic>
         <p:nvPicPr>
-          <p:cNvPr id="4" name="Picture 5"/>
+          <p:cNvPr id="8" name="Picture 6"/>
           <p:cNvPicPr>
             <a:picLocks noChangeAspect="1" noChangeArrowheads="1"/>
           </p:cNvPicPr>
           <p:nvPr/>
         </p:nvPicPr>
         <p:blipFill>
-          <a:blip r:embed="rId3" cstate="print"/>
+          <a:blip r:embed="rId5" cstate="print"/>
           <a:srcRect/>
           <a:stretch>
             <a:fillRect/>
@@ -8223,8 +8188,8 @@
         </p:blipFill>
         <p:spPr bwMode="auto">
           <a:xfrm>
-            <a:off x="2743200" y="2362200"/>
-            <a:ext cx="3825240" cy="3634740"/>
+            <a:off x="2667000" y="3162300"/>
+            <a:ext cx="3954780" cy="3314700"/>
           </a:xfrm>
           <a:prstGeom prst="rect">
             <a:avLst/>
@@ -8314,118 +8279,57 @@
           <a:chExt cx="0" cy="0"/>
         </a:xfrm>
       </p:grpSpPr>
+      <p:sp>
+        <p:nvSpPr>
+          <p:cNvPr id="2" name="Title 1"/>
+          <p:cNvSpPr>
+            <a:spLocks noGrp="1"/>
+          </p:cNvSpPr>
+          <p:nvPr>
+            <p:ph type="title"/>
+          </p:nvPr>
+        </p:nvSpPr>
+        <p:spPr/>
+        <p:txBody>
+          <a:bodyPr/>
+          <a:lstStyle/>
+          <a:p>
+            <a:r>
+              <a:rPr lang="en-US" dirty="0" smtClean="0"/>
+              <a:t>Scaling Out File Server</a:t>
+            </a:r>
+            <a:endParaRPr lang="en-US" dirty="0"/>
+          </a:p>
+        </p:txBody>
+      </p:sp>
+      <p:sp>
+        <p:nvSpPr>
+          <p:cNvPr id="3" name="Content Placeholder 2"/>
+          <p:cNvSpPr>
+            <a:spLocks noGrp="1"/>
+          </p:cNvSpPr>
+          <p:nvPr>
+            <p:ph idx="1"/>
+          </p:nvPr>
+        </p:nvSpPr>
+        <p:spPr/>
+        <p:txBody>
+          <a:bodyPr/>
+          <a:lstStyle/>
+          <a:p>
+            <a:r>
+              <a:rPr lang="en-US" sz="2200" dirty="0" smtClean="0">
+                <a:hlinkClick r:id="rId2"/>
+              </a:rPr>
+              <a:t>https://www.altaro.com/hyper-v/scale-out-file-server-hyper-v/</a:t>
+            </a:r>
+            <a:endParaRPr lang="en-US" sz="2200" dirty="0" smtClean="0"/>
+          </a:p>
+        </p:txBody>
+      </p:sp>
       <p:pic>
         <p:nvPicPr>
-          <p:cNvPr id="4" name="Picture 2" descr="https://img.haikudeck.com/mg/C42A8FE8-C585-4360-984E-C8FC75522987.jpg"/>
-          <p:cNvPicPr>
-            <a:picLocks noChangeAspect="1" noChangeArrowheads="1"/>
-          </p:cNvPicPr>
-          <p:nvPr/>
-        </p:nvPicPr>
-        <p:blipFill>
-          <a:blip r:embed="rId2" cstate="print"/>
-          <a:srcRect/>
-          <a:stretch>
-            <a:fillRect/>
-          </a:stretch>
-        </p:blipFill>
-        <p:spPr bwMode="auto">
-          <a:xfrm>
-            <a:off x="1524000" y="3810000"/>
-            <a:ext cx="3251200" cy="2438400"/>
-          </a:xfrm>
-          <a:prstGeom prst="rect">
-            <a:avLst/>
-          </a:prstGeom>
-          <a:noFill/>
-        </p:spPr>
-      </p:pic>
-      <p:sp>
-        <p:nvSpPr>
-          <p:cNvPr id="2" name="Title 1"/>
-          <p:cNvSpPr>
-            <a:spLocks noGrp="1"/>
-          </p:cNvSpPr>
-          <p:nvPr>
-            <p:ph type="title"/>
-          </p:nvPr>
-        </p:nvSpPr>
-        <p:spPr/>
-        <p:txBody>
-          <a:bodyPr/>
-          <a:lstStyle/>
-          <a:p>
-            <a:r>
-              <a:rPr lang="en-US" dirty="0" smtClean="0"/>
-              <a:t>Identify a Concrete Problem</a:t>
-            </a:r>
-            <a:endParaRPr lang="en-US" dirty="0"/>
-          </a:p>
-        </p:txBody>
-      </p:sp>
-      <p:sp>
-        <p:nvSpPr>
-          <p:cNvPr id="3" name="Content Placeholder 2"/>
-          <p:cNvSpPr>
-            <a:spLocks noGrp="1"/>
-          </p:cNvSpPr>
-          <p:nvPr>
-            <p:ph idx="1"/>
-          </p:nvPr>
-        </p:nvSpPr>
-        <p:spPr/>
-        <p:txBody>
-          <a:bodyPr/>
-          <a:lstStyle/>
-          <a:p>
-            <a:r>
-              <a:rPr lang="en-US" sz="2400" dirty="0" smtClean="0"/>
-              <a:t>As an architect, I want the data to </a:t>
-            </a:r>
-            <a:r>
-              <a:rPr lang="en-US" sz="2400" i="1" dirty="0" smtClean="0">
-                <a:solidFill>
-                  <a:srgbClr val="C00000"/>
-                </a:solidFill>
-              </a:rPr>
-              <a:t>scale horizontally</a:t>
-            </a:r>
-            <a:r>
-              <a:rPr lang="en-US" sz="2400" dirty="0" smtClean="0"/>
-              <a:t> so it can serve as many clients as needed.</a:t>
-            </a:r>
-          </a:p>
-          <a:p>
-            <a:pPr lvl="1"/>
-            <a:r>
-              <a:rPr lang="en-US" sz="2000" dirty="0" err="1" smtClean="0"/>
-              <a:t>MongoDB</a:t>
-            </a:r>
-            <a:r>
-              <a:rPr lang="en-US" sz="2000" dirty="0" smtClean="0"/>
-              <a:t> (Cassandra)</a:t>
-            </a:r>
-          </a:p>
-          <a:p>
-            <a:pPr lvl="1"/>
-            <a:r>
-              <a:rPr lang="en-US" sz="2000" dirty="0" err="1" smtClean="0"/>
-              <a:t>mySQL</a:t>
-            </a:r>
-            <a:endParaRPr lang="en-US" sz="2000" dirty="0" smtClean="0"/>
-          </a:p>
-          <a:p>
-            <a:pPr lvl="1"/>
-            <a:r>
-              <a:rPr lang="en-US" sz="2000" dirty="0" smtClean="0"/>
-              <a:t>MS SQL</a:t>
-            </a:r>
-          </a:p>
-        </p:txBody>
-      </p:sp>
-      <p:pic>
-        <p:nvPicPr>
-          <p:cNvPr id="5" name="Picture 3"/>
+          <p:cNvPr id="4" name="Picture 5"/>
           <p:cNvPicPr>
             <a:picLocks noChangeAspect="1" noChangeArrowheads="1"/>
           </p:cNvPicPr>
@@ -8440,8 +8344,8 @@
         </p:blipFill>
         <p:spPr bwMode="auto">
           <a:xfrm>
-            <a:off x="5486400" y="4572000"/>
-            <a:ext cx="2181225" cy="1257300"/>
+            <a:off x="2743200" y="2362200"/>
+            <a:ext cx="3825240" cy="3634740"/>
           </a:xfrm>
           <a:prstGeom prst="rect">
             <a:avLst/>
@@ -8652,6 +8556,223 @@
           <a:chExt cx="0" cy="0"/>
         </a:xfrm>
       </p:grpSpPr>
+      <p:pic>
+        <p:nvPicPr>
+          <p:cNvPr id="4" name="Picture 2" descr="https://lh3.ggpht.com/1IfZLL2QDSjZ0wS7sUhaMlsAOS8BBzdR3wZ1WawgRn7KZAM8nEVZYMOUM-lqQb0ikIzp=w300"/>
+          <p:cNvPicPr>
+            <a:picLocks noChangeAspect="1" noChangeArrowheads="1"/>
+          </p:cNvPicPr>
+          <p:nvPr/>
+        </p:nvPicPr>
+        <p:blipFill>
+          <a:blip r:embed="rId2" cstate="print"/>
+          <a:srcRect/>
+          <a:stretch>
+            <a:fillRect/>
+          </a:stretch>
+        </p:blipFill>
+        <p:spPr bwMode="auto">
+          <a:xfrm>
+            <a:off x="3276600" y="1905000"/>
+            <a:ext cx="2857500" cy="2857500"/>
+          </a:xfrm>
+          <a:prstGeom prst="rect">
+            <a:avLst/>
+          </a:prstGeom>
+          <a:noFill/>
+        </p:spPr>
+      </p:pic>
+    </p:spTree>
+  </p:cSld>
+  <p:clrMapOvr>
+    <a:masterClrMapping/>
+  </p:clrMapOvr>
+</p:sld>
+</file>
+
+<file path=ppt/slides/slide41.xml><?xml version="1.0" encoding="utf-8"?>
+<p:sld xmlns:a="http://schemas.openxmlformats.org/drawingml/2006/main" xmlns:r="http://schemas.openxmlformats.org/officeDocument/2006/relationships" xmlns:p="http://schemas.openxmlformats.org/presentationml/2006/main">
+  <p:cSld>
+    <p:spTree>
+      <p:nvGrpSpPr>
+        <p:cNvPr id="1" name=""/>
+        <p:cNvGrpSpPr/>
+        <p:nvPr/>
+      </p:nvGrpSpPr>
+      <p:grpSpPr>
+        <a:xfrm>
+          <a:off x="0" y="0"/>
+          <a:ext cx="0" cy="0"/>
+          <a:chOff x="0" y="0"/>
+          <a:chExt cx="0" cy="0"/>
+        </a:xfrm>
+      </p:grpSpPr>
+      <p:pic>
+        <p:nvPicPr>
+          <p:cNvPr id="4" name="Picture 2" descr="https://img.haikudeck.com/mg/C42A8FE8-C585-4360-984E-C8FC75522987.jpg"/>
+          <p:cNvPicPr>
+            <a:picLocks noChangeAspect="1" noChangeArrowheads="1"/>
+          </p:cNvPicPr>
+          <p:nvPr/>
+        </p:nvPicPr>
+        <p:blipFill>
+          <a:blip r:embed="rId2" cstate="print"/>
+          <a:srcRect/>
+          <a:stretch>
+            <a:fillRect/>
+          </a:stretch>
+        </p:blipFill>
+        <p:spPr bwMode="auto">
+          <a:xfrm>
+            <a:off x="1524000" y="3810000"/>
+            <a:ext cx="3251200" cy="2438400"/>
+          </a:xfrm>
+          <a:prstGeom prst="rect">
+            <a:avLst/>
+          </a:prstGeom>
+          <a:noFill/>
+        </p:spPr>
+      </p:pic>
+      <p:sp>
+        <p:nvSpPr>
+          <p:cNvPr id="2" name="Title 1"/>
+          <p:cNvSpPr>
+            <a:spLocks noGrp="1"/>
+          </p:cNvSpPr>
+          <p:nvPr>
+            <p:ph type="title"/>
+          </p:nvPr>
+        </p:nvSpPr>
+        <p:spPr/>
+        <p:txBody>
+          <a:bodyPr/>
+          <a:lstStyle/>
+          <a:p>
+            <a:r>
+              <a:rPr lang="en-US" dirty="0" smtClean="0"/>
+              <a:t>Identify a Concrete Problem</a:t>
+            </a:r>
+            <a:endParaRPr lang="en-US" dirty="0"/>
+          </a:p>
+        </p:txBody>
+      </p:sp>
+      <p:sp>
+        <p:nvSpPr>
+          <p:cNvPr id="3" name="Content Placeholder 2"/>
+          <p:cNvSpPr>
+            <a:spLocks noGrp="1"/>
+          </p:cNvSpPr>
+          <p:nvPr>
+            <p:ph idx="1"/>
+          </p:nvPr>
+        </p:nvSpPr>
+        <p:spPr/>
+        <p:txBody>
+          <a:bodyPr/>
+          <a:lstStyle/>
+          <a:p>
+            <a:r>
+              <a:rPr lang="en-US" sz="2400" dirty="0" smtClean="0"/>
+              <a:t>As an architect, I want the data to </a:t>
+            </a:r>
+            <a:r>
+              <a:rPr lang="en-US" sz="2400" i="1" dirty="0" smtClean="0">
+                <a:solidFill>
+                  <a:srgbClr val="C00000"/>
+                </a:solidFill>
+              </a:rPr>
+              <a:t>scale horizontally</a:t>
+            </a:r>
+            <a:r>
+              <a:rPr lang="en-US" sz="2400" dirty="0" smtClean="0"/>
+              <a:t> so it can serve as many clients as needed.</a:t>
+            </a:r>
+          </a:p>
+          <a:p>
+            <a:pPr lvl="1"/>
+            <a:r>
+              <a:rPr lang="en-US" sz="2000" dirty="0" err="1" smtClean="0"/>
+              <a:t>MongoDB</a:t>
+            </a:r>
+            <a:r>
+              <a:rPr lang="en-US" sz="2000" dirty="0" smtClean="0"/>
+              <a:t> (Cassandra)</a:t>
+            </a:r>
+          </a:p>
+          <a:p>
+            <a:pPr lvl="1"/>
+            <a:r>
+              <a:rPr lang="en-US" sz="2000" dirty="0" err="1" smtClean="0"/>
+              <a:t>mySQL</a:t>
+            </a:r>
+            <a:endParaRPr lang="en-US" sz="2000" dirty="0" smtClean="0"/>
+          </a:p>
+          <a:p>
+            <a:pPr lvl="1"/>
+            <a:r>
+              <a:rPr lang="en-US" sz="2000" dirty="0" smtClean="0"/>
+              <a:t>MS SQL</a:t>
+            </a:r>
+          </a:p>
+        </p:txBody>
+      </p:sp>
+      <p:pic>
+        <p:nvPicPr>
+          <p:cNvPr id="5" name="Picture 3"/>
+          <p:cNvPicPr>
+            <a:picLocks noChangeAspect="1" noChangeArrowheads="1"/>
+          </p:cNvPicPr>
+          <p:nvPr/>
+        </p:nvPicPr>
+        <p:blipFill>
+          <a:blip r:embed="rId3" cstate="print"/>
+          <a:srcRect/>
+          <a:stretch>
+            <a:fillRect/>
+          </a:stretch>
+        </p:blipFill>
+        <p:spPr bwMode="auto">
+          <a:xfrm>
+            <a:off x="5486400" y="4572000"/>
+            <a:ext cx="2181225" cy="1257300"/>
+          </a:xfrm>
+          <a:prstGeom prst="rect">
+            <a:avLst/>
+          </a:prstGeom>
+          <a:noFill/>
+          <a:ln w="9525">
+            <a:noFill/>
+            <a:miter lim="800000"/>
+            <a:headEnd/>
+            <a:tailEnd/>
+          </a:ln>
+        </p:spPr>
+      </p:pic>
+    </p:spTree>
+  </p:cSld>
+  <p:clrMapOvr>
+    <a:masterClrMapping/>
+  </p:clrMapOvr>
+</p:sld>
+</file>
+
+<file path=ppt/slides/slide42.xml><?xml version="1.0" encoding="utf-8"?>
+<p:sld xmlns:a="http://schemas.openxmlformats.org/drawingml/2006/main" xmlns:r="http://schemas.openxmlformats.org/officeDocument/2006/relationships" xmlns:p="http://schemas.openxmlformats.org/presentationml/2006/main">
+  <p:cSld>
+    <p:spTree>
+      <p:nvGrpSpPr>
+        <p:cNvPr id="1" name=""/>
+        <p:cNvGrpSpPr/>
+        <p:nvPr/>
+      </p:nvGrpSpPr>
+      <p:grpSpPr>
+        <a:xfrm>
+          <a:off x="0" y="0"/>
+          <a:ext cx="0" cy="0"/>
+          <a:chOff x="0" y="0"/>
+          <a:chExt cx="0" cy="0"/>
+        </a:xfrm>
+      </p:grpSpPr>
       <p:sp>
         <p:nvSpPr>
           <p:cNvPr id="2" name="Title 1"/>
@@ -8743,7 +8864,7 @@
 </p:sld>
 </file>
 
-<file path=ppt/slides/slide41.xml><?xml version="1.0" encoding="utf-8"?>
+<file path=ppt/slides/slide43.xml><?xml version="1.0" encoding="utf-8"?>
 <p:sld xmlns:a="http://schemas.openxmlformats.org/drawingml/2006/main" xmlns:r="http://schemas.openxmlformats.org/officeDocument/2006/relationships" xmlns:p="http://schemas.openxmlformats.org/presentationml/2006/main">
   <p:cSld>
     <p:spTree>
@@ -8929,7 +9050,7 @@
 </p:sld>
 </file>
 
-<file path=ppt/slides/slide42.xml><?xml version="1.0" encoding="utf-8"?>
+<file path=ppt/slides/slide44.xml><?xml version="1.0" encoding="utf-8"?>
 <p:sld xmlns:a="http://schemas.openxmlformats.org/drawingml/2006/main" xmlns:r="http://schemas.openxmlformats.org/officeDocument/2006/relationships" xmlns:p="http://schemas.openxmlformats.org/presentationml/2006/main">
   <p:cSld>
     <p:spTree>
@@ -9095,7 +9216,7 @@
 </p:sld>
 </file>
 
-<file path=ppt/slides/slide43.xml><?xml version="1.0" encoding="utf-8"?>
+<file path=ppt/slides/slide45.xml><?xml version="1.0" encoding="utf-8"?>
 <p:sld xmlns:a="http://schemas.openxmlformats.org/drawingml/2006/main" xmlns:r="http://schemas.openxmlformats.org/officeDocument/2006/relationships" xmlns:p="http://schemas.openxmlformats.org/presentationml/2006/main">
   <p:cSld>
     <p:spTree>
@@ -9270,7 +9391,7 @@
 </p:sld>
 </file>
 
-<file path=ppt/slides/slide44.xml><?xml version="1.0" encoding="utf-8"?>
+<file path=ppt/slides/slide46.xml><?xml version="1.0" encoding="utf-8"?>
 <p:sld xmlns:a="http://schemas.openxmlformats.org/drawingml/2006/main" xmlns:r="http://schemas.openxmlformats.org/officeDocument/2006/relationships" xmlns:p="http://schemas.openxmlformats.org/presentationml/2006/main">
   <p:cSld>
     <p:spTree>
@@ -9582,7 +9703,7 @@
 </p:sld>
 </file>
 
-<file path=ppt/slides/slide45.xml><?xml version="1.0" encoding="utf-8"?>
+<file path=ppt/slides/slide47.xml><?xml version="1.0" encoding="utf-8"?>
 <p:sld xmlns:a="http://schemas.openxmlformats.org/drawingml/2006/main" xmlns:r="http://schemas.openxmlformats.org/officeDocument/2006/relationships" xmlns:p="http://schemas.openxmlformats.org/presentationml/2006/main">
   <p:cSld>
     <p:spTree>
@@ -9788,7 +9909,7 @@
 </p:sld>
 </file>
 
-<file path=ppt/slides/slide46.xml><?xml version="1.0" encoding="utf-8"?>
+<file path=ppt/slides/slide48.xml><?xml version="1.0" encoding="utf-8"?>
 <p:sld xmlns:a="http://schemas.openxmlformats.org/drawingml/2006/main" xmlns:r="http://schemas.openxmlformats.org/officeDocument/2006/relationships" xmlns:p="http://schemas.openxmlformats.org/presentationml/2006/main">
   <p:cSld>
     <p:spTree>
@@ -9918,7 +10039,7 @@
 </p:sld>
 </file>
 
-<file path=ppt/slides/slide47.xml><?xml version="1.0" encoding="utf-8"?>
+<file path=ppt/slides/slide49.xml><?xml version="1.0" encoding="utf-8"?>
 <p:sld xmlns:a="http://schemas.openxmlformats.org/drawingml/2006/main" xmlns:r="http://schemas.openxmlformats.org/officeDocument/2006/relationships" xmlns:p="http://schemas.openxmlformats.org/presentationml/2006/main">
   <p:cSld>
     <p:spTree>
@@ -10035,7 +10156,178 @@
 </p:sld>
 </file>
 
-<file path=ppt/slides/slide48.xml><?xml version="1.0" encoding="utf-8"?>
+<file path=ppt/slides/slide5.xml><?xml version="1.0" encoding="utf-8"?>
+<p:sld xmlns:a="http://schemas.openxmlformats.org/drawingml/2006/main" xmlns:r="http://schemas.openxmlformats.org/officeDocument/2006/relationships" xmlns:p="http://schemas.openxmlformats.org/presentationml/2006/main">
+  <p:cSld>
+    <p:spTree>
+      <p:nvGrpSpPr>
+        <p:cNvPr id="1" name=""/>
+        <p:cNvGrpSpPr/>
+        <p:nvPr/>
+      </p:nvGrpSpPr>
+      <p:grpSpPr>
+        <a:xfrm>
+          <a:off x="0" y="0"/>
+          <a:ext cx="0" cy="0"/>
+          <a:chOff x="0" y="0"/>
+          <a:chExt cx="0" cy="0"/>
+        </a:xfrm>
+      </p:grpSpPr>
+      <p:sp>
+        <p:nvSpPr>
+          <p:cNvPr id="2" name="Title 1"/>
+          <p:cNvSpPr>
+            <a:spLocks noGrp="1"/>
+          </p:cNvSpPr>
+          <p:nvPr>
+            <p:ph type="title"/>
+          </p:nvPr>
+        </p:nvSpPr>
+        <p:spPr/>
+        <p:txBody>
+          <a:bodyPr/>
+          <a:lstStyle/>
+          <a:p>
+            <a:r>
+              <a:rPr lang="en-US" dirty="0" smtClean="0"/>
+              <a:t>Scalability [1]</a:t>
+            </a:r>
+            <a:endParaRPr lang="en-US" dirty="0"/>
+          </a:p>
+        </p:txBody>
+      </p:sp>
+      <p:pic>
+        <p:nvPicPr>
+          <p:cNvPr id="98306" name="Picture 2" descr="http://www.the4thmarketeer.com/wp-content/uploads/2011/09/scalabilty.jpg"/>
+          <p:cNvPicPr>
+            <a:picLocks noChangeAspect="1" noChangeArrowheads="1"/>
+          </p:cNvPicPr>
+          <p:nvPr/>
+        </p:nvPicPr>
+        <p:blipFill>
+          <a:blip r:embed="rId2" cstate="print"/>
+          <a:srcRect/>
+          <a:stretch>
+            <a:fillRect/>
+          </a:stretch>
+        </p:blipFill>
+        <p:spPr bwMode="auto">
+          <a:xfrm>
+            <a:off x="76200" y="2286000"/>
+            <a:ext cx="2488790" cy="2057400"/>
+          </a:xfrm>
+          <a:prstGeom prst="rect">
+            <a:avLst/>
+          </a:prstGeom>
+          <a:noFill/>
+        </p:spPr>
+      </p:pic>
+      <p:sp>
+        <p:nvSpPr>
+          <p:cNvPr id="3" name="Content Placeholder 2"/>
+          <p:cNvSpPr>
+            <a:spLocks noGrp="1"/>
+          </p:cNvSpPr>
+          <p:nvPr>
+            <p:ph idx="1"/>
+          </p:nvPr>
+        </p:nvSpPr>
+        <p:spPr>
+          <a:xfrm>
+            <a:off x="2514600" y="1600200"/>
+            <a:ext cx="6400800" cy="4525963"/>
+          </a:xfrm>
+        </p:spPr>
+        <p:txBody>
+          <a:bodyPr>
+            <a:noAutofit/>
+          </a:bodyPr>
+          <a:lstStyle/>
+          <a:p>
+            <a:r>
+              <a:rPr lang="en-US" sz="2800" i="1" dirty="0" smtClean="0">
+                <a:solidFill>
+                  <a:srgbClr val="C00000"/>
+                </a:solidFill>
+              </a:rPr>
+              <a:t>Scaling</a:t>
+            </a:r>
+            <a:r>
+              <a:rPr lang="en-US" sz="2800" dirty="0" smtClean="0"/>
+              <a:t> is about </a:t>
+            </a:r>
+            <a:r>
+              <a:rPr lang="en-US" sz="2800" u="sng" dirty="0" smtClean="0"/>
+              <a:t>allocating resources</a:t>
+            </a:r>
+            <a:r>
+              <a:rPr lang="en-US" sz="2800" dirty="0" smtClean="0"/>
+              <a:t> for an application and managing those resources efficiently to minimize contention.</a:t>
+            </a:r>
+          </a:p>
+          <a:p>
+            <a:r>
+              <a:rPr lang="en-US" sz="2800" dirty="0" smtClean="0"/>
+              <a:t>The </a:t>
+            </a:r>
+            <a:r>
+              <a:rPr lang="en-US" sz="2800" i="1" dirty="0" smtClean="0">
+                <a:solidFill>
+                  <a:srgbClr val="C00000"/>
+                </a:solidFill>
+              </a:rPr>
+              <a:t>scalability</a:t>
+            </a:r>
+            <a:r>
+              <a:rPr lang="en-US" sz="2800" dirty="0" smtClean="0"/>
+              <a:t> of an application is a measure of </a:t>
+            </a:r>
+            <a:r>
+              <a:rPr lang="en-US" sz="2800" u="sng" dirty="0" smtClean="0"/>
+              <a:t>the number of users</a:t>
+            </a:r>
+            <a:r>
+              <a:rPr lang="en-US" sz="2800" dirty="0" smtClean="0"/>
+              <a:t> it can effectively support at the same time.</a:t>
+            </a:r>
+          </a:p>
+          <a:p>
+            <a:r>
+              <a:rPr lang="en-US" sz="2800" dirty="0" smtClean="0"/>
+              <a:t>The point at which an application </a:t>
+            </a:r>
+            <a:r>
+              <a:rPr lang="en-US" sz="2800" i="1" dirty="0" smtClean="0">
+                <a:solidFill>
+                  <a:srgbClr val="C00000"/>
+                </a:solidFill>
+              </a:rPr>
+              <a:t>cannot handle </a:t>
+            </a:r>
+            <a:r>
+              <a:rPr lang="en-US" sz="2800" dirty="0" smtClean="0"/>
+              <a:t>additional users effectively is the </a:t>
+            </a:r>
+            <a:r>
+              <a:rPr lang="en-US" sz="2800" u="sng" dirty="0" smtClean="0"/>
+              <a:t>limit</a:t>
+            </a:r>
+            <a:r>
+              <a:rPr lang="en-US" sz="2800" dirty="0" smtClean="0"/>
+              <a:t> of its scalability.</a:t>
+            </a:r>
+          </a:p>
+        </p:txBody>
+      </p:sp>
+    </p:spTree>
+  </p:cSld>
+  <p:clrMapOvr>
+    <a:masterClrMapping/>
+  </p:clrMapOvr>
+</p:sld>
+</file>
+
+<file path=ppt/slides/slide50.xml><?xml version="1.0" encoding="utf-8"?>
 <p:sld xmlns:a="http://schemas.openxmlformats.org/drawingml/2006/main" xmlns:r="http://schemas.openxmlformats.org/officeDocument/2006/relationships" xmlns:p="http://schemas.openxmlformats.org/presentationml/2006/main">
   <p:cSld>
     <p:spTree>
@@ -10151,7 +10443,7 @@
 </p:sld>
 </file>
 
-<file path=ppt/slides/slide49.xml><?xml version="1.0" encoding="utf-8"?>
+<file path=ppt/slides/slide51.xml><?xml version="1.0" encoding="utf-8"?>
 <p:sld xmlns:a="http://schemas.openxmlformats.org/drawingml/2006/main" xmlns:r="http://schemas.openxmlformats.org/officeDocument/2006/relationships" xmlns:p="http://schemas.openxmlformats.org/presentationml/2006/main">
   <p:cSld>
     <p:spTree>
@@ -10325,178 +10617,7 @@
 </p:sld>
 </file>
 
-<file path=ppt/slides/slide5.xml><?xml version="1.0" encoding="utf-8"?>
-<p:sld xmlns:a="http://schemas.openxmlformats.org/drawingml/2006/main" xmlns:r="http://schemas.openxmlformats.org/officeDocument/2006/relationships" xmlns:p="http://schemas.openxmlformats.org/presentationml/2006/main">
-  <p:cSld>
-    <p:spTree>
-      <p:nvGrpSpPr>
-        <p:cNvPr id="1" name=""/>
-        <p:cNvGrpSpPr/>
-        <p:nvPr/>
-      </p:nvGrpSpPr>
-      <p:grpSpPr>
-        <a:xfrm>
-          <a:off x="0" y="0"/>
-          <a:ext cx="0" cy="0"/>
-          <a:chOff x="0" y="0"/>
-          <a:chExt cx="0" cy="0"/>
-        </a:xfrm>
-      </p:grpSpPr>
-      <p:sp>
-        <p:nvSpPr>
-          <p:cNvPr id="2" name="Title 1"/>
-          <p:cNvSpPr>
-            <a:spLocks noGrp="1"/>
-          </p:cNvSpPr>
-          <p:nvPr>
-            <p:ph type="title"/>
-          </p:nvPr>
-        </p:nvSpPr>
-        <p:spPr/>
-        <p:txBody>
-          <a:bodyPr/>
-          <a:lstStyle/>
-          <a:p>
-            <a:r>
-              <a:rPr lang="en-US" dirty="0" smtClean="0"/>
-              <a:t>Scalability [1]</a:t>
-            </a:r>
-            <a:endParaRPr lang="en-US" dirty="0"/>
-          </a:p>
-        </p:txBody>
-      </p:sp>
-      <p:pic>
-        <p:nvPicPr>
-          <p:cNvPr id="98306" name="Picture 2" descr="http://www.the4thmarketeer.com/wp-content/uploads/2011/09/scalabilty.jpg"/>
-          <p:cNvPicPr>
-            <a:picLocks noChangeAspect="1" noChangeArrowheads="1"/>
-          </p:cNvPicPr>
-          <p:nvPr/>
-        </p:nvPicPr>
-        <p:blipFill>
-          <a:blip r:embed="rId2" cstate="print"/>
-          <a:srcRect/>
-          <a:stretch>
-            <a:fillRect/>
-          </a:stretch>
-        </p:blipFill>
-        <p:spPr bwMode="auto">
-          <a:xfrm>
-            <a:off x="76200" y="2286000"/>
-            <a:ext cx="2488790" cy="2057400"/>
-          </a:xfrm>
-          <a:prstGeom prst="rect">
-            <a:avLst/>
-          </a:prstGeom>
-          <a:noFill/>
-        </p:spPr>
-      </p:pic>
-      <p:sp>
-        <p:nvSpPr>
-          <p:cNvPr id="3" name="Content Placeholder 2"/>
-          <p:cNvSpPr>
-            <a:spLocks noGrp="1"/>
-          </p:cNvSpPr>
-          <p:nvPr>
-            <p:ph idx="1"/>
-          </p:nvPr>
-        </p:nvSpPr>
-        <p:spPr>
-          <a:xfrm>
-            <a:off x="2514600" y="1600200"/>
-            <a:ext cx="6400800" cy="4525963"/>
-          </a:xfrm>
-        </p:spPr>
-        <p:txBody>
-          <a:bodyPr>
-            <a:noAutofit/>
-          </a:bodyPr>
-          <a:lstStyle/>
-          <a:p>
-            <a:r>
-              <a:rPr lang="en-US" sz="2800" i="1" dirty="0" smtClean="0">
-                <a:solidFill>
-                  <a:srgbClr val="C00000"/>
-                </a:solidFill>
-              </a:rPr>
-              <a:t>Scaling</a:t>
-            </a:r>
-            <a:r>
-              <a:rPr lang="en-US" sz="2800" dirty="0" smtClean="0"/>
-              <a:t> is about </a:t>
-            </a:r>
-            <a:r>
-              <a:rPr lang="en-US" sz="2800" u="sng" dirty="0" smtClean="0"/>
-              <a:t>allocating resources</a:t>
-            </a:r>
-            <a:r>
-              <a:rPr lang="en-US" sz="2800" dirty="0" smtClean="0"/>
-              <a:t> for an application and managing those resources efficiently to minimize contention.</a:t>
-            </a:r>
-          </a:p>
-          <a:p>
-            <a:r>
-              <a:rPr lang="en-US" sz="2800" dirty="0" smtClean="0"/>
-              <a:t>The </a:t>
-            </a:r>
-            <a:r>
-              <a:rPr lang="en-US" sz="2800" i="1" dirty="0" smtClean="0">
-                <a:solidFill>
-                  <a:srgbClr val="C00000"/>
-                </a:solidFill>
-              </a:rPr>
-              <a:t>scalability</a:t>
-            </a:r>
-            <a:r>
-              <a:rPr lang="en-US" sz="2800" dirty="0" smtClean="0"/>
-              <a:t> of an application is a measure of </a:t>
-            </a:r>
-            <a:r>
-              <a:rPr lang="en-US" sz="2800" u="sng" dirty="0" smtClean="0"/>
-              <a:t>the number of users</a:t>
-            </a:r>
-            <a:r>
-              <a:rPr lang="en-US" sz="2800" dirty="0" smtClean="0"/>
-              <a:t> it can effectively support at the same time.</a:t>
-            </a:r>
-          </a:p>
-          <a:p>
-            <a:r>
-              <a:rPr lang="en-US" sz="2800" dirty="0" smtClean="0"/>
-              <a:t>The point at which an application </a:t>
-            </a:r>
-            <a:r>
-              <a:rPr lang="en-US" sz="2800" i="1" dirty="0" smtClean="0">
-                <a:solidFill>
-                  <a:srgbClr val="C00000"/>
-                </a:solidFill>
-              </a:rPr>
-              <a:t>cannot handle </a:t>
-            </a:r>
-            <a:r>
-              <a:rPr lang="en-US" sz="2800" dirty="0" smtClean="0"/>
-              <a:t>additional users effectively is the </a:t>
-            </a:r>
-            <a:r>
-              <a:rPr lang="en-US" sz="2800" u="sng" dirty="0" smtClean="0"/>
-              <a:t>limit</a:t>
-            </a:r>
-            <a:r>
-              <a:rPr lang="en-US" sz="2800" dirty="0" smtClean="0"/>
-              <a:t> of its scalability.</a:t>
-            </a:r>
-          </a:p>
-        </p:txBody>
-      </p:sp>
-    </p:spTree>
-  </p:cSld>
-  <p:clrMapOvr>
-    <a:masterClrMapping/>
-  </p:clrMapOvr>
-</p:sld>
-</file>
-
-<file path=ppt/slides/slide50.xml><?xml version="1.0" encoding="utf-8"?>
+<file path=ppt/slides/slide52.xml><?xml version="1.0" encoding="utf-8"?>
 <p:sld xmlns:a="http://schemas.openxmlformats.org/drawingml/2006/main" xmlns:r="http://schemas.openxmlformats.org/officeDocument/2006/relationships" xmlns:p="http://schemas.openxmlformats.org/presentationml/2006/main">
   <p:cSld>
     <p:spTree>

--- a/Microservices/07.1. Scalability.pptx
+++ b/Microservices/07.1. Scalability.pptx
@@ -4812,7 +4812,15 @@
             <a:pPr algn="l"/>
             <a:r>
               <a:rPr lang="en-US" dirty="0" smtClean="0"/>
-              <a:t>3. Run the Script on Cloud</a:t>
+              <a:t>3. Run the Script </a:t>
+            </a:r>
+            <a:r>
+              <a:rPr lang="en-US" dirty="0" smtClean="0"/>
+              <a:t>on the </a:t>
+            </a:r>
+            <a:r>
+              <a:rPr lang="en-US" dirty="0" smtClean="0"/>
+              <a:t>Cloud</a:t>
             </a:r>
             <a:endParaRPr lang="en-US" dirty="0"/>
           </a:p>
@@ -5720,11 +5728,10 @@
               <a:rPr lang="en-US" sz="2400" dirty="0" smtClean="0"/>
               <a:t>.</a:t>
             </a:r>
-            <a:endParaRPr lang="en-US" sz="2400" smtClean="0"/>
-          </a:p>
-          <a:p>
-            <a:r>
-              <a:rPr lang="en-US" sz="2400" smtClean="0"/>
+          </a:p>
+          <a:p>
+            <a:r>
+              <a:rPr lang="en-US" sz="2400" dirty="0" err="1" smtClean="0"/>
               <a:t>max_children</a:t>
             </a:r>
             <a:r>

--- a/Microservices/07.1. Scalability.pptx
+++ b/Microservices/07.1. Scalability.pptx
@@ -5,7 +5,7 @@
     <p:sldMasterId id="2147483708" r:id="rId1"/>
   </p:sldMasterIdLst>
   <p:notesMasterIdLst>
-    <p:notesMasterId r:id="rId54"/>
+    <p:notesMasterId r:id="rId43"/>
   </p:notesMasterIdLst>
   <p:sldIdLst>
     <p:sldId id="670" r:id="rId2"/>
@@ -19,47 +19,36 @@
     <p:sldId id="651" r:id="rId10"/>
     <p:sldId id="655" r:id="rId11"/>
     <p:sldId id="751" r:id="rId12"/>
-    <p:sldId id="616" r:id="rId13"/>
-    <p:sldId id="753" r:id="rId14"/>
-    <p:sldId id="754" r:id="rId15"/>
-    <p:sldId id="755" r:id="rId16"/>
-    <p:sldId id="756" r:id="rId17"/>
-    <p:sldId id="757" r:id="rId18"/>
-    <p:sldId id="761" r:id="rId19"/>
-    <p:sldId id="758" r:id="rId20"/>
-    <p:sldId id="759" r:id="rId21"/>
-    <p:sldId id="760" r:id="rId22"/>
-    <p:sldId id="762" r:id="rId23"/>
-    <p:sldId id="752" r:id="rId24"/>
-    <p:sldId id="717" r:id="rId25"/>
-    <p:sldId id="724" r:id="rId26"/>
-    <p:sldId id="740" r:id="rId27"/>
-    <p:sldId id="741" r:id="rId28"/>
-    <p:sldId id="742" r:id="rId29"/>
-    <p:sldId id="743" r:id="rId30"/>
-    <p:sldId id="744" r:id="rId31"/>
-    <p:sldId id="745" r:id="rId32"/>
-    <p:sldId id="746" r:id="rId33"/>
-    <p:sldId id="747" r:id="rId34"/>
-    <p:sldId id="748" r:id="rId35"/>
-    <p:sldId id="749" r:id="rId36"/>
-    <p:sldId id="736" r:id="rId37"/>
-    <p:sldId id="668" r:id="rId38"/>
-    <p:sldId id="739" r:id="rId39"/>
-    <p:sldId id="669" r:id="rId40"/>
-    <p:sldId id="636" r:id="rId41"/>
-    <p:sldId id="750" r:id="rId42"/>
-    <p:sldId id="730" r:id="rId43"/>
-    <p:sldId id="726" r:id="rId44"/>
-    <p:sldId id="729" r:id="rId45"/>
-    <p:sldId id="731" r:id="rId46"/>
-    <p:sldId id="621" r:id="rId47"/>
-    <p:sldId id="732" r:id="rId48"/>
-    <p:sldId id="734" r:id="rId49"/>
-    <p:sldId id="735" r:id="rId50"/>
-    <p:sldId id="733" r:id="rId51"/>
-    <p:sldId id="624" r:id="rId52"/>
-    <p:sldId id="516" r:id="rId53"/>
+    <p:sldId id="752" r:id="rId13"/>
+    <p:sldId id="717" r:id="rId14"/>
+    <p:sldId id="724" r:id="rId15"/>
+    <p:sldId id="740" r:id="rId16"/>
+    <p:sldId id="741" r:id="rId17"/>
+    <p:sldId id="742" r:id="rId18"/>
+    <p:sldId id="743" r:id="rId19"/>
+    <p:sldId id="744" r:id="rId20"/>
+    <p:sldId id="745" r:id="rId21"/>
+    <p:sldId id="746" r:id="rId22"/>
+    <p:sldId id="747" r:id="rId23"/>
+    <p:sldId id="748" r:id="rId24"/>
+    <p:sldId id="749" r:id="rId25"/>
+    <p:sldId id="736" r:id="rId26"/>
+    <p:sldId id="668" r:id="rId27"/>
+    <p:sldId id="739" r:id="rId28"/>
+    <p:sldId id="669" r:id="rId29"/>
+    <p:sldId id="636" r:id="rId30"/>
+    <p:sldId id="750" r:id="rId31"/>
+    <p:sldId id="730" r:id="rId32"/>
+    <p:sldId id="726" r:id="rId33"/>
+    <p:sldId id="729" r:id="rId34"/>
+    <p:sldId id="731" r:id="rId35"/>
+    <p:sldId id="621" r:id="rId36"/>
+    <p:sldId id="732" r:id="rId37"/>
+    <p:sldId id="734" r:id="rId38"/>
+    <p:sldId id="735" r:id="rId39"/>
+    <p:sldId id="733" r:id="rId40"/>
+    <p:sldId id="624" r:id="rId41"/>
+    <p:sldId id="516" r:id="rId42"/>
   </p:sldIdLst>
   <p:sldSz cx="9144000" cy="6858000" type="screen4x3"/>
   <p:notesSz cx="6858000" cy="9144000"/>
@@ -274,7 +263,7 @@
             <a:fld id="{2F0940CE-BE1D-4C40-AF8B-3898A4D1F5EC}" type="datetimeFigureOut">
               <a:rPr lang="en-US" smtClean="0"/>
               <a:pPr/>
-              <a:t>6/9/2026</a:t>
+              <a:t>7/15/2026</a:t>
             </a:fld>
             <a:endParaRPr lang="en-US"/>
           </a:p>
@@ -813,7 +802,7 @@
               <a:pPr>
                 <a:defRPr/>
               </a:pPr>
-              <a:t>6/9/2026</a:t>
+              <a:t>7/15/2026</a:t>
             </a:fld>
             <a:endParaRPr lang="en-US"/>
           </a:p>
@@ -1005,7 +994,7 @@
               <a:pPr>
                 <a:defRPr/>
               </a:pPr>
-              <a:t>6/9/2026</a:t>
+              <a:t>7/15/2026</a:t>
             </a:fld>
             <a:endParaRPr lang="en-US"/>
           </a:p>
@@ -1207,7 +1196,7 @@
               <a:pPr>
                 <a:defRPr/>
               </a:pPr>
-              <a:t>6/9/2026</a:t>
+              <a:t>7/15/2026</a:t>
             </a:fld>
             <a:endParaRPr lang="en-US"/>
           </a:p>
@@ -1399,7 +1388,7 @@
               <a:pPr>
                 <a:defRPr/>
               </a:pPr>
-              <a:t>6/9/2026</a:t>
+              <a:t>7/15/2026</a:t>
             </a:fld>
             <a:endParaRPr lang="en-US"/>
           </a:p>
@@ -1667,7 +1656,7 @@
               <a:pPr>
                 <a:defRPr/>
               </a:pPr>
-              <a:t>6/9/2026</a:t>
+              <a:t>7/15/2026</a:t>
             </a:fld>
             <a:endParaRPr lang="en-US"/>
           </a:p>
@@ -1977,7 +1966,7 @@
               <a:pPr>
                 <a:defRPr/>
               </a:pPr>
-              <a:t>6/9/2026</a:t>
+              <a:t>7/15/2026</a:t>
             </a:fld>
             <a:endParaRPr lang="en-US"/>
           </a:p>
@@ -2421,7 +2410,7 @@
               <a:pPr>
                 <a:defRPr/>
               </a:pPr>
-              <a:t>6/9/2026</a:t>
+              <a:t>7/15/2026</a:t>
             </a:fld>
             <a:endParaRPr lang="en-US"/>
           </a:p>
@@ -2561,7 +2550,7 @@
               <a:pPr>
                 <a:defRPr/>
               </a:pPr>
-              <a:t>6/9/2026</a:t>
+              <a:t>7/15/2026</a:t>
             </a:fld>
             <a:endParaRPr lang="en-US"/>
           </a:p>
@@ -2678,7 +2667,7 @@
               <a:pPr>
                 <a:defRPr/>
               </a:pPr>
-              <a:t>6/9/2026</a:t>
+              <a:t>7/15/2026</a:t>
             </a:fld>
             <a:endParaRPr lang="en-US"/>
           </a:p>
@@ -2977,7 +2966,7 @@
               <a:pPr>
                 <a:defRPr/>
               </a:pPr>
-              <a:t>6/9/2026</a:t>
+              <a:t>7/15/2026</a:t>
             </a:fld>
             <a:endParaRPr lang="en-US"/>
           </a:p>
@@ -3255,7 +3244,7 @@
               <a:pPr>
                 <a:defRPr/>
               </a:pPr>
-              <a:t>6/9/2026</a:t>
+              <a:t>7/15/2026</a:t>
             </a:fld>
             <a:endParaRPr lang="en-US"/>
           </a:p>
@@ -3503,7 +3492,7 @@
               <a:pPr>
                 <a:defRPr/>
               </a:pPr>
-              <a:t>6/9/2026</a:t>
+              <a:t>7/15/2026</a:t>
             </a:fld>
             <a:endParaRPr lang="en-US"/>
           </a:p>
@@ -4622,14 +4611,9 @@
           <a:bodyPr/>
           <a:lstStyle/>
           <a:p>
-            <a:pPr algn="l"/>
             <a:r>
               <a:rPr lang="en-US" dirty="0" smtClean="0"/>
-              <a:t>1. Install k6 on </a:t>
-            </a:r>
-            <a:r>
-              <a:rPr lang="en-US" dirty="0" err="1" smtClean="0"/>
-              <a:t>macOS</a:t>
+              <a:t>Scaling Out Guidelines (I) [2]</a:t>
             </a:r>
             <a:endParaRPr lang="en-US" dirty="0"/>
           </a:p>
@@ -4651,46 +4635,109 @@
           <a:lstStyle/>
           <a:p>
             <a:r>
-              <a:rPr lang="en-US" dirty="0" smtClean="0">
-                <a:hlinkClick r:id="rId2"/>
-              </a:rPr>
-              <a:t>https://grafana.com/pricing/?src=k6io#k6-performance-testing</a:t>
-            </a:r>
-            <a:endParaRPr lang="en-US" dirty="0" smtClean="0"/>
-          </a:p>
-          <a:p>
-            <a:r>
-              <a:rPr lang="en-US" dirty="0" smtClean="0"/>
-              <a:t>brew install k6</a:t>
-            </a:r>
-          </a:p>
-          <a:p>
-            <a:r>
-              <a:rPr lang="en-US" dirty="0" smtClean="0"/>
-              <a:t># Go to </a:t>
-            </a:r>
-            <a:r>
-              <a:rPr lang="en-US" dirty="0" smtClean="0">
-                <a:hlinkClick r:id="rId3"/>
-              </a:rPr>
-              <a:t>https://grafana.com</a:t>
-            </a:r>
-            <a:r>
-              <a:rPr lang="en-US" dirty="0" smtClean="0"/>
-              <a:t> &gt; My Account to find a stack.</a:t>
-            </a:r>
-          </a:p>
-          <a:p>
-            <a:r>
-              <a:rPr lang="en-US" dirty="0" smtClean="0"/>
-              <a:t>k6 cloud login --token 7e8f7f6 --stack valiantgranola1655</a:t>
-            </a:r>
-          </a:p>
-          <a:p>
-            <a:endParaRPr lang="en-US" dirty="0"/>
-          </a:p>
-        </p:txBody>
-      </p:sp>
+              <a:rPr lang="en-US" sz="2000" i="1" dirty="0" smtClean="0">
+                <a:solidFill>
+                  <a:srgbClr val="C00000"/>
+                </a:solidFill>
+              </a:rPr>
+              <a:t>Statelessness</a:t>
+            </a:r>
+            <a:r>
+              <a:rPr lang="en-US" sz="2000" dirty="0" smtClean="0"/>
+              <a:t> means that each </a:t>
+            </a:r>
+            <a:r>
+              <a:rPr lang="en-US" sz="2000" u="sng" dirty="0" smtClean="0"/>
+              <a:t>transaction can be handled by one instance as well as any other</a:t>
+            </a:r>
+            <a:r>
+              <a:rPr lang="en-US" sz="2000" dirty="0" smtClean="0"/>
+              <a:t>; a user may transact with dozens of different instances during a single session, without ever knowing it.</a:t>
+            </a:r>
+          </a:p>
+          <a:p>
+            <a:r>
+              <a:rPr lang="en-US" sz="2000" dirty="0" smtClean="0"/>
+              <a:t>Design the application to </a:t>
+            </a:r>
+            <a:r>
+              <a:rPr lang="en-US" sz="2000" i="1" dirty="0" smtClean="0">
+                <a:solidFill>
+                  <a:srgbClr val="C00000"/>
+                </a:solidFill>
+              </a:rPr>
+              <a:t>run in a stateless fashion</a:t>
+            </a:r>
+            <a:r>
+              <a:rPr lang="en-US" sz="2000" dirty="0" smtClean="0"/>
+              <a:t>, with any necessary user and </a:t>
+            </a:r>
+            <a:r>
+              <a:rPr lang="en-US" sz="2000" i="1" dirty="0" smtClean="0">
+                <a:solidFill>
+                  <a:srgbClr val="C00000"/>
+                </a:solidFill>
+              </a:rPr>
+              <a:t>session data</a:t>
+            </a:r>
+            <a:r>
+              <a:rPr lang="en-US" sz="2000" dirty="0" smtClean="0"/>
+              <a:t> stored either </a:t>
+            </a:r>
+            <a:r>
+              <a:rPr lang="en-US" sz="2000" u="sng" dirty="0" smtClean="0"/>
+              <a:t>on the client side</a:t>
+            </a:r>
+            <a:r>
+              <a:rPr lang="en-US" sz="2000" dirty="0" smtClean="0"/>
+              <a:t>, or in a </a:t>
+            </a:r>
+            <a:r>
+              <a:rPr lang="en-US" sz="2000" u="sng" dirty="0" smtClean="0"/>
+              <a:t>distributed store</a:t>
+            </a:r>
+            <a:r>
+              <a:rPr lang="en-US" sz="2000" dirty="0" smtClean="0"/>
+              <a:t> that's accessible to any application instance.</a:t>
+            </a:r>
+          </a:p>
+          <a:p>
+            <a:endParaRPr lang="en-US" sz="2000" dirty="0"/>
+          </a:p>
+        </p:txBody>
+      </p:sp>
+      <p:pic>
+        <p:nvPicPr>
+          <p:cNvPr id="4" name="Picture 3"/>
+          <p:cNvPicPr>
+            <a:picLocks noChangeAspect="1" noChangeArrowheads="1"/>
+          </p:cNvPicPr>
+          <p:nvPr/>
+        </p:nvPicPr>
+        <p:blipFill>
+          <a:blip r:embed="rId2" cstate="print"/>
+          <a:srcRect/>
+          <a:stretch>
+            <a:fillRect/>
+          </a:stretch>
+        </p:blipFill>
+        <p:spPr bwMode="auto">
+          <a:xfrm>
+            <a:off x="2667000" y="4114800"/>
+            <a:ext cx="3990975" cy="1619250"/>
+          </a:xfrm>
+          <a:prstGeom prst="rect">
+            <a:avLst/>
+          </a:prstGeom>
+          <a:noFill/>
+          <a:ln w="9525">
+            <a:noFill/>
+            <a:miter lim="800000"/>
+            <a:headEnd/>
+            <a:tailEnd/>
+          </a:ln>
+        </p:spPr>
+      </p:pic>
     </p:spTree>
   </p:cSld>
   <p:clrMapOvr>
@@ -4731,10 +4778,9 @@
           <a:bodyPr/>
           <a:lstStyle/>
           <a:p>
-            <a:pPr algn="l"/>
             <a:r>
               <a:rPr lang="en-US" dirty="0" smtClean="0"/>
-              <a:t>2. Create Script</a:t>
+              <a:t>Scaling Out Guidelines (II)</a:t>
             </a:r>
             <a:endParaRPr lang="en-US" dirty="0"/>
           </a:p>
@@ -4756,19 +4802,127 @@
           <a:lstStyle/>
           <a:p>
             <a:r>
-              <a:rPr lang="en-US" dirty="0" smtClean="0"/>
-              <a:t>Ask Claude Code to create one: 100 users, 10 minutes.</a:t>
-            </a:r>
-          </a:p>
-          <a:p>
-            <a:r>
-              <a:rPr lang="en-US" dirty="0" smtClean="0"/>
-              <a:t>Min # of users =?, min duration = ?</a:t>
-            </a:r>
-            <a:endParaRPr lang="en-US" dirty="0"/>
-          </a:p>
-        </p:txBody>
-      </p:sp>
+              <a:rPr lang="en-US" sz="2000" dirty="0" smtClean="0"/>
+              <a:t>Design the application to </a:t>
+            </a:r>
+            <a:r>
+              <a:rPr lang="en-US" sz="2000" i="1" dirty="0" smtClean="0">
+                <a:solidFill>
+                  <a:srgbClr val="C00000"/>
+                </a:solidFill>
+              </a:rPr>
+              <a:t>conduct I/O operations asynchronously</a:t>
+            </a:r>
+            <a:r>
+              <a:rPr lang="en-US" sz="2000" dirty="0" smtClean="0"/>
+              <a:t>, so that the application can perform useful work while waiting for input and output to complete.</a:t>
+            </a:r>
+          </a:p>
+          <a:p>
+            <a:r>
+              <a:rPr lang="en-US" sz="2000" i="1" dirty="0" smtClean="0">
+                <a:solidFill>
+                  <a:srgbClr val="C00000"/>
+                </a:solidFill>
+              </a:rPr>
+              <a:t>Pool resources</a:t>
+            </a:r>
+            <a:r>
+              <a:rPr lang="en-US" sz="2000" dirty="0" smtClean="0"/>
+              <a:t> such as </a:t>
+            </a:r>
+            <a:r>
+              <a:rPr lang="en-US" sz="2000" u="sng" dirty="0" smtClean="0"/>
+              <a:t>threads</a:t>
+            </a:r>
+            <a:r>
+              <a:rPr lang="en-US" sz="2000" dirty="0" smtClean="0"/>
+              <a:t>, </a:t>
+            </a:r>
+            <a:r>
+              <a:rPr lang="en-US" sz="2000" u="sng" dirty="0" smtClean="0"/>
+              <a:t>network connections</a:t>
+            </a:r>
+            <a:r>
+              <a:rPr lang="en-US" sz="2000" dirty="0" smtClean="0"/>
+              <a:t>, and </a:t>
+            </a:r>
+            <a:r>
+              <a:rPr lang="en-US" sz="2000" u="sng" dirty="0" smtClean="0"/>
+              <a:t>database connections</a:t>
+            </a:r>
+            <a:r>
+              <a:rPr lang="en-US" sz="2000" dirty="0" smtClean="0"/>
+              <a:t>; this helps maximize your computing resources, and it improves your ability to predict resource usage.</a:t>
+            </a:r>
+          </a:p>
+          <a:p>
+            <a:r>
+              <a:rPr lang="en-US" sz="2000" dirty="0" smtClean="0"/>
+              <a:t>Write your database operations in such a way as to </a:t>
+            </a:r>
+            <a:r>
+              <a:rPr lang="en-US" sz="2000" i="1" dirty="0" smtClean="0">
+                <a:solidFill>
+                  <a:srgbClr val="C00000"/>
+                </a:solidFill>
+              </a:rPr>
+              <a:t>maximize concurrency</a:t>
+            </a:r>
+            <a:r>
+              <a:rPr lang="en-US" sz="2000" dirty="0" smtClean="0"/>
+              <a:t> and </a:t>
+            </a:r>
+            <a:r>
+              <a:rPr lang="en-US" sz="2000" i="1" dirty="0" smtClean="0">
+                <a:solidFill>
+                  <a:srgbClr val="C00000"/>
+                </a:solidFill>
+              </a:rPr>
+              <a:t>minimize exclusive locking</a:t>
+            </a:r>
+            <a:r>
+              <a:rPr lang="en-US" sz="2000" dirty="0" smtClean="0"/>
+              <a:t>. For example, don't lock records when performing read-only operations.</a:t>
+            </a:r>
+          </a:p>
+          <a:p>
+            <a:endParaRPr lang="en-US" sz="2000" dirty="0"/>
+          </a:p>
+        </p:txBody>
+      </p:sp>
+      <p:pic>
+        <p:nvPicPr>
+          <p:cNvPr id="4" name="Picture 3"/>
+          <p:cNvPicPr>
+            <a:picLocks noChangeAspect="1" noChangeArrowheads="1"/>
+          </p:cNvPicPr>
+          <p:nvPr/>
+        </p:nvPicPr>
+        <p:blipFill>
+          <a:blip r:embed="rId2" cstate="print"/>
+          <a:srcRect/>
+          <a:stretch>
+            <a:fillRect/>
+          </a:stretch>
+        </p:blipFill>
+        <p:spPr bwMode="auto">
+          <a:xfrm>
+            <a:off x="2667000" y="4800600"/>
+            <a:ext cx="3990975" cy="1619250"/>
+          </a:xfrm>
+          <a:prstGeom prst="rect">
+            <a:avLst/>
+          </a:prstGeom>
+          <a:noFill/>
+          <a:ln w="9525">
+            <a:noFill/>
+            <a:miter lim="800000"/>
+            <a:headEnd/>
+            <a:tailEnd/>
+          </a:ln>
+        </p:spPr>
+      </p:pic>
     </p:spTree>
   </p:cSld>
   <p:clrMapOvr>
@@ -4794,71 +4948,32 @@
           <a:chExt cx="0" cy="0"/>
         </a:xfrm>
       </p:grpSpPr>
-      <p:sp>
-        <p:nvSpPr>
-          <p:cNvPr id="2" name="Title 1"/>
-          <p:cNvSpPr>
-            <a:spLocks noGrp="1"/>
-          </p:cNvSpPr>
-          <p:nvPr>
-            <p:ph type="title"/>
-          </p:nvPr>
-        </p:nvSpPr>
-        <p:spPr/>
-        <p:txBody>
-          <a:bodyPr/>
-          <a:lstStyle/>
-          <a:p>
-            <a:pPr algn="l"/>
-            <a:r>
-              <a:rPr lang="en-US" dirty="0" smtClean="0"/>
-              <a:t>3. Run the Script </a:t>
-            </a:r>
-            <a:r>
-              <a:rPr lang="en-US" dirty="0" smtClean="0"/>
-              <a:t>on the </a:t>
-            </a:r>
-            <a:r>
-              <a:rPr lang="en-US" dirty="0" smtClean="0"/>
-              <a:t>Cloud</a:t>
-            </a:r>
-            <a:endParaRPr lang="en-US" dirty="0"/>
-          </a:p>
-        </p:txBody>
-      </p:sp>
-      <p:sp>
-        <p:nvSpPr>
-          <p:cNvPr id="3" name="Content Placeholder 2"/>
-          <p:cNvSpPr>
-            <a:spLocks noGrp="1"/>
-          </p:cNvSpPr>
-          <p:nvPr>
-            <p:ph idx="1"/>
-          </p:nvPr>
-        </p:nvSpPr>
-        <p:spPr/>
-        <p:txBody>
-          <a:bodyPr/>
-          <a:lstStyle/>
-          <a:p>
-            <a:r>
-              <a:rPr lang="en-US" dirty="0" smtClean="0"/>
-              <a:t>k6 </a:t>
-            </a:r>
-            <a:r>
-              <a:rPr lang="en-US" b="1" dirty="0" smtClean="0"/>
-              <a:t>cloud</a:t>
-            </a:r>
-            <a:r>
-              <a:rPr lang="en-US" dirty="0" smtClean="0"/>
-              <a:t> run script.js</a:t>
-            </a:r>
-          </a:p>
-          <a:p>
-            <a:endParaRPr lang="en-US" dirty="0"/>
-          </a:p>
-        </p:txBody>
-      </p:sp>
+      <p:pic>
+        <p:nvPicPr>
+          <p:cNvPr id="4" name="Picture 2" descr="https://lh3.ggpht.com/1IfZLL2QDSjZ0wS7sUhaMlsAOS8BBzdR3wZ1WawgRn7KZAM8nEVZYMOUM-lqQb0ikIzp=w300"/>
+          <p:cNvPicPr>
+            <a:picLocks noChangeAspect="1" noChangeArrowheads="1"/>
+          </p:cNvPicPr>
+          <p:nvPr/>
+        </p:nvPicPr>
+        <p:blipFill>
+          <a:blip r:embed="rId2" cstate="print"/>
+          <a:srcRect/>
+          <a:stretch>
+            <a:fillRect/>
+          </a:stretch>
+        </p:blipFill>
+        <p:spPr bwMode="auto">
+          <a:xfrm>
+            <a:off x="3276600" y="1905000"/>
+            <a:ext cx="2857500" cy="2857500"/>
+          </a:xfrm>
+          <a:prstGeom prst="rect">
+            <a:avLst/>
+          </a:prstGeom>
+          <a:noFill/>
+        </p:spPr>
+      </p:pic>
     </p:spTree>
   </p:cSld>
   <p:clrMapOvr>
@@ -4899,10 +5014,9 @@
           <a:bodyPr/>
           <a:lstStyle/>
           <a:p>
-            <a:pPr algn="l"/>
             <a:r>
               <a:rPr lang="en-US" dirty="0" smtClean="0"/>
-              <a:t>4. Review the Output</a:t>
+              <a:t>(ASP.NET) Session Storage</a:t>
             </a:r>
             <a:endParaRPr lang="en-US" dirty="0"/>
           </a:p>
@@ -4924,50 +5038,264 @@
           <a:lstStyle/>
           <a:p>
             <a:r>
-              <a:rPr lang="en-US" sz="2400" dirty="0" smtClean="0">
-                <a:hlinkClick r:id="rId2"/>
-              </a:rPr>
-              <a:t>https://valiantgranola1655.grafana.net/a/k6-app/runs/7719358</a:t>
-            </a:r>
-            <a:endParaRPr lang="en-US" sz="2400" dirty="0" smtClean="0"/>
-          </a:p>
-          <a:p>
-            <a:endParaRPr lang="en-US" sz="2400" dirty="0"/>
-          </a:p>
-        </p:txBody>
-      </p:sp>
-      <p:pic>
-        <p:nvPicPr>
-          <p:cNvPr id="1027" name="Picture 3"/>
-          <p:cNvPicPr>
-            <a:picLocks noChangeAspect="1" noChangeArrowheads="1"/>
-          </p:cNvPicPr>
+              <a:rPr lang="en-US" sz="2600" i="1" dirty="0" smtClean="0">
+                <a:solidFill>
+                  <a:srgbClr val="C00000"/>
+                </a:solidFill>
+              </a:rPr>
+              <a:t>Machine key</a:t>
+            </a:r>
+            <a:r>
+              <a:rPr lang="en-US" sz="2600" dirty="0" smtClean="0"/>
+              <a:t> should be same for both servers: </a:t>
+            </a:r>
+            <a:r>
+              <a:rPr lang="en-US" sz="2600" u="sng" dirty="0" smtClean="0"/>
+              <a:t>View state</a:t>
+            </a:r>
+            <a:r>
+              <a:rPr lang="en-US" sz="2600" dirty="0" smtClean="0"/>
+              <a:t> and </a:t>
+            </a:r>
+            <a:r>
+              <a:rPr lang="en-US" sz="2600" u="sng" dirty="0" smtClean="0"/>
+              <a:t>session</a:t>
+            </a:r>
+            <a:r>
+              <a:rPr lang="en-US" sz="2600" dirty="0" smtClean="0"/>
+              <a:t> both </a:t>
+            </a:r>
+            <a:r>
+              <a:rPr lang="en-US" sz="2600" u="sng" dirty="0" smtClean="0"/>
+              <a:t>depend on</a:t>
+            </a:r>
+            <a:r>
+              <a:rPr lang="en-US" sz="2600" dirty="0" smtClean="0"/>
+              <a:t> the machine key.</a:t>
+            </a:r>
+          </a:p>
+          <a:p>
+            <a:r>
+              <a:rPr lang="en-US" sz="2600" dirty="0" smtClean="0"/>
+              <a:t>Session storage options:</a:t>
+            </a:r>
+          </a:p>
+          <a:p>
+            <a:pPr lvl="1"/>
+            <a:r>
+              <a:rPr lang="en-US" sz="2200" dirty="0" err="1" smtClean="0">
+                <a:latin typeface="Consolas" pitchFamily="49" charset="0"/>
+              </a:rPr>
+              <a:t>InProc</a:t>
+            </a:r>
+            <a:endParaRPr lang="en-US" sz="2200" dirty="0" smtClean="0">
+              <a:latin typeface="Consolas" pitchFamily="49" charset="0"/>
+            </a:endParaRPr>
+          </a:p>
+          <a:p>
+            <a:pPr lvl="1"/>
+            <a:r>
+              <a:rPr lang="en-US" sz="2200" dirty="0" err="1" smtClean="0">
+                <a:latin typeface="Consolas" pitchFamily="49" charset="0"/>
+              </a:rPr>
+              <a:t>StateServer</a:t>
+            </a:r>
+            <a:endParaRPr lang="en-US" sz="2200" dirty="0" smtClean="0">
+              <a:latin typeface="Consolas" pitchFamily="49" charset="0"/>
+            </a:endParaRPr>
+          </a:p>
+          <a:p>
+            <a:pPr lvl="1"/>
+            <a:r>
+              <a:rPr lang="en-US" sz="2200" b="1" dirty="0" err="1" smtClean="0">
+                <a:latin typeface="Consolas" pitchFamily="49" charset="0"/>
+              </a:rPr>
+              <a:t>SQLServer</a:t>
+            </a:r>
+            <a:endParaRPr lang="en-US" sz="2200" b="1" dirty="0" smtClean="0">
+              <a:latin typeface="Consolas" pitchFamily="49" charset="0"/>
+            </a:endParaRPr>
+          </a:p>
+        </p:txBody>
+      </p:sp>
+      <p:sp>
+        <p:nvSpPr>
+          <p:cNvPr id="4" name="Rectangle 3"/>
+          <p:cNvSpPr/>
           <p:nvPr/>
-        </p:nvPicPr>
-        <p:blipFill>
-          <a:blip r:embed="rId3" cstate="print"/>
-          <a:srcRect/>
-          <a:stretch>
-            <a:fillRect/>
-          </a:stretch>
-        </p:blipFill>
-        <p:spPr bwMode="auto">
+        </p:nvSpPr>
+        <p:spPr>
           <a:xfrm>
-            <a:off x="1049338" y="3089275"/>
-            <a:ext cx="7045325" cy="2244725"/>
+            <a:off x="533400" y="4495800"/>
+            <a:ext cx="7924800" cy="1754326"/>
           </a:xfrm>
           <a:prstGeom prst="rect">
             <a:avLst/>
           </a:prstGeom>
-          <a:noFill/>
-          <a:ln w="9525">
-            <a:noFill/>
-            <a:miter lim="800000"/>
-            <a:headEnd/>
-            <a:tailEnd/>
-          </a:ln>
         </p:spPr>
-      </p:pic>
+        <p:style>
+          <a:lnRef idx="1">
+            <a:schemeClr val="dk1"/>
+          </a:lnRef>
+          <a:fillRef idx="2">
+            <a:schemeClr val="dk1"/>
+          </a:fillRef>
+          <a:effectRef idx="1">
+            <a:schemeClr val="dk1"/>
+          </a:effectRef>
+          <a:fontRef idx="minor">
+            <a:schemeClr val="dk1"/>
+          </a:fontRef>
+        </p:style>
+        <p:txBody>
+          <a:bodyPr wrap="square">
+            <a:spAutoFit/>
+          </a:bodyPr>
+          <a:lstStyle/>
+          <a:p>
+            <a:pPr>
+              <a:buNone/>
+            </a:pPr>
+            <a:r>
+              <a:rPr lang="en-US" dirty="0" smtClean="0">
+                <a:latin typeface="Consolas" pitchFamily="49" charset="0"/>
+              </a:rPr>
+              <a:t>&lt;system.web&gt;</a:t>
+            </a:r>
+          </a:p>
+          <a:p>
+            <a:pPr>
+              <a:buNone/>
+            </a:pPr>
+            <a:r>
+              <a:rPr lang="en-US" dirty="0" smtClean="0">
+                <a:latin typeface="Consolas" pitchFamily="49" charset="0"/>
+              </a:rPr>
+              <a:t>    &lt;</a:t>
+            </a:r>
+            <a:r>
+              <a:rPr lang="en-US" dirty="0" err="1" smtClean="0">
+                <a:latin typeface="Consolas" pitchFamily="49" charset="0"/>
+              </a:rPr>
+              <a:t>httpCookies</a:t>
+            </a:r>
+            <a:r>
+              <a:rPr lang="en-US" dirty="0" smtClean="0">
+                <a:latin typeface="Consolas" pitchFamily="49" charset="0"/>
+              </a:rPr>
+              <a:t> </a:t>
+            </a:r>
+            <a:r>
+              <a:rPr lang="en-US" dirty="0" err="1" smtClean="0">
+                <a:latin typeface="Consolas" pitchFamily="49" charset="0"/>
+              </a:rPr>
+              <a:t>requireSSL</a:t>
+            </a:r>
+            <a:r>
+              <a:rPr lang="en-US" dirty="0" smtClean="0">
+                <a:latin typeface="Consolas" pitchFamily="49" charset="0"/>
+              </a:rPr>
+              <a:t>="true" /&gt;</a:t>
+            </a:r>
+          </a:p>
+          <a:p>
+            <a:pPr>
+              <a:buNone/>
+            </a:pPr>
+            <a:r>
+              <a:rPr lang="en-US" dirty="0" smtClean="0">
+                <a:latin typeface="Consolas" pitchFamily="49" charset="0"/>
+              </a:rPr>
+              <a:t>    &lt;</a:t>
+            </a:r>
+            <a:r>
+              <a:rPr lang="en-US" dirty="0" err="1" smtClean="0">
+                <a:latin typeface="Consolas" pitchFamily="49" charset="0"/>
+              </a:rPr>
+              <a:t>machineKey</a:t>
+            </a:r>
+            <a:r>
+              <a:rPr lang="en-US" dirty="0" smtClean="0">
+                <a:latin typeface="Consolas" pitchFamily="49" charset="0"/>
+              </a:rPr>
+              <a:t> validation="SHA1" /&gt;</a:t>
+            </a:r>
+          </a:p>
+          <a:p>
+            <a:pPr>
+              <a:buNone/>
+            </a:pPr>
+            <a:r>
+              <a:rPr lang="en-US" dirty="0" smtClean="0">
+                <a:latin typeface="Consolas" pitchFamily="49" charset="0"/>
+              </a:rPr>
+              <a:t>    &lt;</a:t>
+            </a:r>
+            <a:r>
+              <a:rPr lang="en-US" dirty="0" err="1" smtClean="0">
+                <a:latin typeface="Consolas" pitchFamily="49" charset="0"/>
+              </a:rPr>
+              <a:t>sessionState</a:t>
+            </a:r>
+            <a:r>
+              <a:rPr lang="en-US" dirty="0" smtClean="0">
+                <a:latin typeface="Consolas" pitchFamily="49" charset="0"/>
+              </a:rPr>
+              <a:t> timeout="25" </a:t>
+            </a:r>
+            <a:r>
+              <a:rPr lang="en-US" dirty="0" err="1" smtClean="0">
+                <a:latin typeface="Consolas" pitchFamily="49" charset="0"/>
+              </a:rPr>
+              <a:t>cookieless</a:t>
+            </a:r>
+            <a:r>
+              <a:rPr lang="en-US" dirty="0" smtClean="0">
+                <a:latin typeface="Consolas" pitchFamily="49" charset="0"/>
+              </a:rPr>
+              <a:t>="false" </a:t>
+            </a:r>
+            <a:r>
+              <a:rPr lang="en-US" dirty="0" err="1" smtClean="0">
+                <a:latin typeface="Consolas" pitchFamily="49" charset="0"/>
+              </a:rPr>
+              <a:t>regenerateExpiredSessionId</a:t>
+            </a:r>
+            <a:r>
+              <a:rPr lang="en-US" dirty="0" smtClean="0">
+                <a:latin typeface="Consolas" pitchFamily="49" charset="0"/>
+              </a:rPr>
+              <a:t>="true" mode="</a:t>
+            </a:r>
+            <a:r>
+              <a:rPr lang="en-US" b="1" i="1" dirty="0" err="1" smtClean="0">
+                <a:solidFill>
+                  <a:srgbClr val="C00000"/>
+                </a:solidFill>
+                <a:latin typeface="Consolas" pitchFamily="49" charset="0"/>
+              </a:rPr>
+              <a:t>InProc</a:t>
+            </a:r>
+            <a:r>
+              <a:rPr lang="en-US" dirty="0" smtClean="0">
+                <a:latin typeface="Consolas" pitchFamily="49" charset="0"/>
+              </a:rPr>
+              <a:t>" /&gt;</a:t>
+            </a:r>
+          </a:p>
+          <a:p>
+            <a:pPr>
+              <a:buNone/>
+            </a:pPr>
+            <a:r>
+              <a:rPr lang="en-US" dirty="0" smtClean="0">
+                <a:latin typeface="Consolas" pitchFamily="49" charset="0"/>
+              </a:rPr>
+              <a:t>...</a:t>
+            </a:r>
+          </a:p>
+        </p:txBody>
+      </p:sp>
     </p:spTree>
   </p:cSld>
   <p:clrMapOvr>
@@ -5011,7 +5339,15 @@
             <a:pPr algn="l"/>
             <a:r>
               <a:rPr lang="en-US" dirty="0" smtClean="0"/>
-              <a:t>5. Understand the OOM</a:t>
+              <a:t>1. Create an SQL Server Database for </a:t>
+            </a:r>
+            <a:r>
+              <a:rPr lang="en-US" dirty="0" err="1" smtClean="0"/>
+              <a:t>SQLServer</a:t>
+            </a:r>
+            <a:r>
+              <a:rPr lang="en-US" dirty="0" smtClean="0"/>
+              <a:t> Session Mode</a:t>
             </a:r>
             <a:endParaRPr lang="en-US" dirty="0"/>
           </a:p>
@@ -5032,41 +5368,55 @@
           <a:bodyPr/>
           <a:lstStyle/>
           <a:p>
-            <a:r>
-              <a:rPr lang="en-US" sz="2400" dirty="0" smtClean="0"/>
-              <a:t>When a process needs memory and the kernel has none left to give — no free RAM, nothing reclaimable, and no swap to page out to — the kernel can't just wait.</a:t>
-            </a:r>
-          </a:p>
-          <a:p>
-            <a:r>
-              <a:rPr lang="en-US" sz="2400" dirty="0" smtClean="0"/>
-              <a:t>To  avoid a total system freeze, it invokes the Out Of Memory (OOM) killer.</a:t>
-            </a:r>
-          </a:p>
-          <a:p>
-            <a:r>
-              <a:rPr lang="en-US" sz="2400" dirty="0" smtClean="0"/>
-              <a:t>The OOM killer picks a process to terminate to free memory.</a:t>
-            </a:r>
-          </a:p>
-          <a:p>
-            <a:r>
-              <a:rPr lang="en-US" sz="2400" dirty="0" smtClean="0"/>
-              <a:t>It scores every process (roughly by how much memory it's using, via </a:t>
-            </a:r>
-            <a:r>
-              <a:rPr lang="en-US" sz="2400" dirty="0" err="1" smtClean="0"/>
-              <a:t>oom_score</a:t>
-            </a:r>
-            <a:r>
-              <a:rPr lang="en-US" sz="2400" dirty="0" smtClean="0"/>
-              <a:t>) and kills the one that frees the most.</a:t>
-            </a:r>
-          </a:p>
-          <a:p>
-            <a:r>
-              <a:rPr lang="en-US" sz="2400" dirty="0" smtClean="0"/>
-              <a:t>The kill is a hard SIGKILL (signal 9) — the process is terminated instantly, no clean shutdown.</a:t>
+            <a:pPr marL="342900" lvl="2" indent="-342900"/>
+            <a:r>
+              <a:rPr lang="en-US" sz="2200" b="1" dirty="0" smtClean="0"/>
+              <a:t>Run cmd.exe as Administrator</a:t>
+            </a:r>
+          </a:p>
+          <a:p>
+            <a:pPr marL="342900" lvl="2" indent="-342900"/>
+            <a:r>
+              <a:rPr lang="en-US" sz="2200" i="1" dirty="0" smtClean="0">
+                <a:latin typeface="Consolas" pitchFamily="49" charset="0"/>
+              </a:rPr>
+              <a:t>C:\Windows\Microsoft.NET\Framework\v4.0.30319\aspnet_regsql.exe -</a:t>
+            </a:r>
+            <a:r>
+              <a:rPr lang="en-US" sz="2200" i="1" dirty="0" err="1" smtClean="0">
+                <a:latin typeface="Consolas" pitchFamily="49" charset="0"/>
+              </a:rPr>
+              <a:t>ssadd</a:t>
+            </a:r>
+            <a:r>
+              <a:rPr lang="en-US" sz="2200" i="1" dirty="0" smtClean="0">
+                <a:latin typeface="Consolas" pitchFamily="49" charset="0"/>
+              </a:rPr>
+              <a:t> -</a:t>
+            </a:r>
+            <a:r>
+              <a:rPr lang="en-US" sz="2200" i="1" dirty="0" err="1" smtClean="0">
+                <a:latin typeface="Consolas" pitchFamily="49" charset="0"/>
+              </a:rPr>
+              <a:t>sstype</a:t>
+            </a:r>
+            <a:r>
+              <a:rPr lang="en-US" sz="2200" i="1" dirty="0" smtClean="0">
+                <a:latin typeface="Consolas" pitchFamily="49" charset="0"/>
+              </a:rPr>
+              <a:t> c -d apistate.example.com -S </a:t>
+            </a:r>
+            <a:r>
+              <a:rPr lang="en-US" sz="2200" i="1" dirty="0" err="1" smtClean="0">
+                <a:latin typeface="Consolas" pitchFamily="49" charset="0"/>
+              </a:rPr>
+              <a:t>localhost</a:t>
+            </a:r>
+            <a:r>
+              <a:rPr lang="en-US" sz="2200" i="1" dirty="0" smtClean="0">
+                <a:latin typeface="Consolas" pitchFamily="49" charset="0"/>
+              </a:rPr>
+              <a:t> –E</a:t>
             </a:r>
           </a:p>
         </p:txBody>
@@ -5114,7 +5464,15 @@
             <a:pPr algn="l"/>
             <a:r>
               <a:rPr lang="en-US" dirty="0" smtClean="0"/>
-              <a:t>6. Verify the OOM</a:t>
+              <a:t>2. Create a Connection String for </a:t>
+            </a:r>
+            <a:r>
+              <a:rPr lang="en-US" dirty="0" err="1" smtClean="0"/>
+              <a:t>SQLServer</a:t>
+            </a:r>
+            <a:r>
+              <a:rPr lang="en-US" dirty="0" smtClean="0"/>
+              <a:t> Session Mode</a:t>
             </a:r>
             <a:endParaRPr lang="en-US" dirty="0"/>
           </a:p>
@@ -5136,72 +5494,247 @@
           <a:lstStyle/>
           <a:p>
             <a:r>
-              <a:rPr lang="en-US" sz="2800" dirty="0" smtClean="0"/>
-              <a:t>Ask Claude Code to record baseline (pre-test):</a:t>
-            </a:r>
-          </a:p>
-          <a:p>
-            <a:pPr lvl="1"/>
-            <a:r>
-              <a:rPr lang="en-US" sz="2400" dirty="0" smtClean="0"/>
-              <a:t>OOM kills this boot: 0.</a:t>
-            </a:r>
-          </a:p>
-          <a:p>
-            <a:pPr lvl="1"/>
-            <a:r>
-              <a:rPr lang="en-US" sz="2400" dirty="0" err="1" smtClean="0"/>
-              <a:t>MySQL</a:t>
-            </a:r>
-            <a:r>
-              <a:rPr lang="en-US" sz="2400" dirty="0" smtClean="0"/>
-              <a:t> PID: 847, 0 restarts.</a:t>
-            </a:r>
-          </a:p>
-          <a:p>
-            <a:pPr lvl="1"/>
-            <a:r>
-              <a:rPr lang="en-US" sz="2400" dirty="0" smtClean="0"/>
-              <a:t>Memory: used 1679 MB / available 2229 MB</a:t>
-            </a:r>
-          </a:p>
-          <a:p>
-            <a:pPr lvl="1"/>
-            <a:r>
-              <a:rPr lang="en-US" sz="2400" dirty="0" err="1" smtClean="0"/>
-              <a:t>MySQL</a:t>
-            </a:r>
-            <a:r>
-              <a:rPr lang="en-US" sz="2400" dirty="0" smtClean="0"/>
-              <a:t> Resident Set Size (RSS): 746 MB</a:t>
-            </a:r>
-          </a:p>
-          <a:p>
-            <a:pPr lvl="1"/>
-            <a:r>
-              <a:rPr lang="en-US" sz="2400" dirty="0" smtClean="0"/>
-              <a:t>php8.4 total: 754 MB</a:t>
-            </a:r>
-          </a:p>
-          <a:p>
-            <a:pPr lvl="1"/>
-            <a:r>
-              <a:rPr lang="en-US" sz="2400" dirty="0" smtClean="0"/>
-              <a:t>The sampler logs every 3 s for ~20 min into /</a:t>
-            </a:r>
-            <a:r>
-              <a:rPr lang="en-US" sz="2400" dirty="0" err="1" smtClean="0"/>
-              <a:t>tmp</a:t>
-            </a:r>
-            <a:r>
-              <a:rPr lang="en-US" sz="2400" dirty="0" smtClean="0"/>
-              <a:t>/oom_watch.log.</a:t>
-            </a:r>
-          </a:p>
-          <a:p>
-            <a:r>
-              <a:rPr lang="en-US" sz="2800" dirty="0" smtClean="0"/>
-              <a:t>Run a load test.</a:t>
+              <a:rPr lang="en-US" sz="2400" dirty="0" smtClean="0">
+                <a:latin typeface="+mj-lt"/>
+              </a:rPr>
+              <a:t>Create </a:t>
+            </a:r>
+            <a:r>
+              <a:rPr lang="en-US" sz="2400" dirty="0" err="1" smtClean="0">
+                <a:latin typeface="+mj-lt"/>
+              </a:rPr>
+              <a:t>web.connectionStrings.config</a:t>
+            </a:r>
+            <a:r>
+              <a:rPr lang="en-US" sz="2400" dirty="0" smtClean="0">
+                <a:latin typeface="+mj-lt"/>
+              </a:rPr>
+              <a:t> file.</a:t>
+            </a:r>
+          </a:p>
+        </p:txBody>
+      </p:sp>
+      <p:sp>
+        <p:nvSpPr>
+          <p:cNvPr id="4" name="Rectangle 3"/>
+          <p:cNvSpPr/>
+          <p:nvPr/>
+        </p:nvSpPr>
+        <p:spPr>
+          <a:xfrm>
+            <a:off x="533400" y="2438400"/>
+            <a:ext cx="7924800" cy="3139321"/>
+          </a:xfrm>
+          <a:prstGeom prst="rect">
+            <a:avLst/>
+          </a:prstGeom>
+        </p:spPr>
+        <p:style>
+          <a:lnRef idx="1">
+            <a:schemeClr val="dk1"/>
+          </a:lnRef>
+          <a:fillRef idx="2">
+            <a:schemeClr val="dk1"/>
+          </a:fillRef>
+          <a:effectRef idx="1">
+            <a:schemeClr val="dk1"/>
+          </a:effectRef>
+          <a:fontRef idx="minor">
+            <a:schemeClr val="dk1"/>
+          </a:fontRef>
+        </p:style>
+        <p:txBody>
+          <a:bodyPr wrap="square">
+            <a:spAutoFit/>
+          </a:bodyPr>
+          <a:lstStyle/>
+          <a:p>
+            <a:pPr>
+              <a:buNone/>
+            </a:pPr>
+            <a:r>
+              <a:rPr lang="en-US" dirty="0" smtClean="0">
+                <a:latin typeface="Consolas" pitchFamily="49" charset="0"/>
+              </a:rPr>
+              <a:t>&lt;?xml version="1.0" ?&gt;</a:t>
+            </a:r>
+          </a:p>
+          <a:p>
+            <a:pPr>
+              <a:buNone/>
+            </a:pPr>
+            <a:r>
+              <a:rPr lang="en-US" dirty="0" smtClean="0">
+                <a:latin typeface="Consolas" pitchFamily="49" charset="0"/>
+              </a:rPr>
+              <a:t>  &lt;</a:t>
+            </a:r>
+            <a:r>
+              <a:rPr lang="en-US" dirty="0" err="1" smtClean="0">
+                <a:latin typeface="Consolas" pitchFamily="49" charset="0"/>
+              </a:rPr>
+              <a:t>connectionStrings</a:t>
+            </a:r>
+            <a:r>
+              <a:rPr lang="en-US" dirty="0" smtClean="0">
+                <a:latin typeface="Consolas" pitchFamily="49" charset="0"/>
+              </a:rPr>
+              <a:t>&gt;</a:t>
+            </a:r>
+          </a:p>
+          <a:p>
+            <a:pPr>
+              <a:buNone/>
+            </a:pPr>
+            <a:r>
+              <a:rPr lang="en-US" dirty="0" smtClean="0">
+                <a:latin typeface="Consolas" pitchFamily="49" charset="0"/>
+              </a:rPr>
+              <a:t>    &lt;clear /&gt;</a:t>
+            </a:r>
+          </a:p>
+          <a:p>
+            <a:pPr>
+              <a:buNone/>
+            </a:pPr>
+            <a:r>
+              <a:rPr lang="en-US" dirty="0" smtClean="0">
+                <a:latin typeface="Consolas" pitchFamily="49" charset="0"/>
+              </a:rPr>
+              <a:t>...</a:t>
+            </a:r>
+          </a:p>
+          <a:p>
+            <a:pPr>
+              <a:buNone/>
+            </a:pPr>
+            <a:r>
+              <a:rPr lang="en-US" dirty="0" smtClean="0">
+                <a:latin typeface="Consolas" pitchFamily="49" charset="0"/>
+              </a:rPr>
+              <a:t>    &lt;add name="</a:t>
+            </a:r>
+            <a:r>
+              <a:rPr lang="en-US" b="1" i="1" dirty="0" err="1" smtClean="0">
+                <a:solidFill>
+                  <a:srgbClr val="C00000"/>
+                </a:solidFill>
+                <a:latin typeface="Consolas" pitchFamily="49" charset="0"/>
+              </a:rPr>
+              <a:t>snsState</a:t>
+            </a:r>
+            <a:r>
+              <a:rPr lang="en-US" dirty="0" smtClean="0">
+                <a:latin typeface="Consolas" pitchFamily="49" charset="0"/>
+              </a:rPr>
+              <a:t>" </a:t>
+            </a:r>
+            <a:r>
+              <a:rPr lang="en-US" dirty="0" err="1" smtClean="0">
+                <a:latin typeface="Consolas" pitchFamily="49" charset="0"/>
+              </a:rPr>
+              <a:t>connectionString</a:t>
+            </a:r>
+            <a:r>
+              <a:rPr lang="en-US" dirty="0" smtClean="0">
+                <a:latin typeface="Consolas" pitchFamily="49" charset="0"/>
+              </a:rPr>
+              <a:t>="Data Source=192.168.101.62;Initial Catalog=</a:t>
+            </a:r>
+            <a:r>
+              <a:rPr lang="en-US" dirty="0" err="1" smtClean="0">
+                <a:latin typeface="Consolas" pitchFamily="49" charset="0"/>
+              </a:rPr>
+              <a:t>apistate.example.com;Persist</a:t>
+            </a:r>
+            <a:r>
+              <a:rPr lang="en-US" dirty="0" smtClean="0">
+                <a:latin typeface="Consolas" pitchFamily="49" charset="0"/>
+              </a:rPr>
+              <a:t> Security Info=</a:t>
+            </a:r>
+            <a:r>
+              <a:rPr lang="en-US" dirty="0" err="1" smtClean="0">
+                <a:latin typeface="Consolas" pitchFamily="49" charset="0"/>
+              </a:rPr>
+              <a:t>True;User</a:t>
+            </a:r>
+            <a:r>
+              <a:rPr lang="en-US" dirty="0" smtClean="0">
+                <a:latin typeface="Consolas" pitchFamily="49" charset="0"/>
+              </a:rPr>
+              <a:t> ID=</a:t>
+            </a:r>
+            <a:r>
+              <a:rPr lang="en-US" dirty="0" err="1" smtClean="0">
+                <a:latin typeface="Consolas" pitchFamily="49" charset="0"/>
+              </a:rPr>
+              <a:t>api.example.com;Password</a:t>
+            </a:r>
+            <a:r>
+              <a:rPr lang="en-US" dirty="0" smtClean="0">
+                <a:latin typeface="Consolas" pitchFamily="49" charset="0"/>
+              </a:rPr>
+              <a:t>=$%</a:t>
+            </a:r>
+            <a:r>
+              <a:rPr lang="en-US" dirty="0" err="1" smtClean="0">
+                <a:latin typeface="Consolas" pitchFamily="49" charset="0"/>
+              </a:rPr>
+              <a:t>Ym</a:t>
+            </a:r>
+            <a:r>
+              <a:rPr lang="en-US" dirty="0" smtClean="0">
+                <a:latin typeface="Consolas" pitchFamily="49" charset="0"/>
+              </a:rPr>
+              <a:t>*k3xtt4#bNNu;Connect Timeout=60;Min Pool Size=0;Max Pool Size=100;" </a:t>
+            </a:r>
+            <a:r>
+              <a:rPr lang="en-US" dirty="0" err="1" smtClean="0">
+                <a:latin typeface="Consolas" pitchFamily="49" charset="0"/>
+              </a:rPr>
+              <a:t>providerName</a:t>
+            </a:r>
+            <a:r>
+              <a:rPr lang="en-US" dirty="0" smtClean="0">
+                <a:latin typeface="Consolas" pitchFamily="49" charset="0"/>
+              </a:rPr>
+              <a:t>="</a:t>
+            </a:r>
+            <a:r>
+              <a:rPr lang="en-US" dirty="0" err="1" smtClean="0">
+                <a:latin typeface="Consolas" pitchFamily="49" charset="0"/>
+              </a:rPr>
+              <a:t>System.Data.SqlClient</a:t>
+            </a:r>
+            <a:r>
+              <a:rPr lang="en-US" dirty="0" smtClean="0">
+                <a:latin typeface="Consolas" pitchFamily="49" charset="0"/>
+              </a:rPr>
+              <a:t>" /&gt;</a:t>
+            </a:r>
+          </a:p>
+          <a:p>
+            <a:pPr>
+              <a:buNone/>
+            </a:pPr>
+            <a:r>
+              <a:rPr lang="en-US" dirty="0" smtClean="0">
+                <a:latin typeface="Consolas" pitchFamily="49" charset="0"/>
+              </a:rPr>
+              <a:t>  &lt;/</a:t>
+            </a:r>
+            <a:r>
+              <a:rPr lang="en-US" dirty="0" err="1" smtClean="0">
+                <a:latin typeface="Consolas" pitchFamily="49" charset="0"/>
+              </a:rPr>
+              <a:t>connectionStrings</a:t>
+            </a:r>
+            <a:r>
+              <a:rPr lang="en-US" dirty="0" smtClean="0">
+                <a:latin typeface="Consolas" pitchFamily="49" charset="0"/>
+              </a:rPr>
+              <a:t>&gt;</a:t>
             </a:r>
           </a:p>
         </p:txBody>
@@ -5249,7 +5782,15 @@
             <a:pPr algn="l"/>
             <a:r>
               <a:rPr lang="en-US" dirty="0" smtClean="0"/>
-              <a:t>7. Run the Script Locally</a:t>
+              <a:t>3. Enable </a:t>
+            </a:r>
+            <a:r>
+              <a:rPr lang="en-US" dirty="0" err="1" smtClean="0"/>
+              <a:t>SQLServer</a:t>
+            </a:r>
+            <a:r>
+              <a:rPr lang="en-US" dirty="0" smtClean="0"/>
+              <a:t> Session Mode</a:t>
             </a:r>
             <a:endParaRPr lang="en-US" dirty="0"/>
           </a:p>
@@ -5271,45 +5812,183 @@
           <a:lstStyle/>
           <a:p>
             <a:r>
-              <a:rPr lang="en-US" dirty="0" smtClean="0"/>
-              <a:t>k6 run script.js</a:t>
-            </a:r>
-          </a:p>
-          <a:p>
-            <a:r>
-              <a:rPr lang="en-US" dirty="0" smtClean="0"/>
-              <a:t>k6 run --out 'web-dashboard=host=0.0.0.0&amp;port=5665&amp;export=</a:t>
-            </a:r>
-            <a:r>
-              <a:rPr lang="en-US" dirty="0" err="1" smtClean="0"/>
-              <a:t>report.html&amp;open</a:t>
-            </a:r>
-            <a:r>
-              <a:rPr lang="en-US" dirty="0" smtClean="0"/>
-              <a:t>=true' script.js</a:t>
-            </a:r>
-          </a:p>
-          <a:p>
-            <a:r>
-              <a:rPr lang="en-US" dirty="0" smtClean="0"/>
-              <a:t># Open: </a:t>
-            </a:r>
-            <a:r>
-              <a:rPr lang="en-US" dirty="0" smtClean="0">
-                <a:hlinkClick r:id="rId2"/>
-              </a:rPr>
-              <a:t>http://192.168.1.45:5665</a:t>
-            </a:r>
-            <a:endParaRPr lang="en-US" dirty="0" smtClean="0"/>
-          </a:p>
-          <a:p>
-            <a:endParaRPr lang="en-US" dirty="0" smtClean="0"/>
-          </a:p>
-          <a:p>
-            <a:endParaRPr lang="en-US" dirty="0"/>
-          </a:p>
-        </p:txBody>
-      </p:sp>
+              <a:rPr lang="en-US" sz="2200" dirty="0" smtClean="0">
+                <a:latin typeface="Consolas" pitchFamily="49" charset="0"/>
+              </a:rPr>
+              <a:t>&lt;</a:t>
+            </a:r>
+            <a:r>
+              <a:rPr lang="en-US" sz="2200" dirty="0" err="1" smtClean="0">
+                <a:latin typeface="Consolas" pitchFamily="49" charset="0"/>
+              </a:rPr>
+              <a:t>connectionStrings</a:t>
+            </a:r>
+            <a:r>
+              <a:rPr lang="en-US" sz="2200" dirty="0" smtClean="0">
+                <a:latin typeface="Consolas" pitchFamily="49" charset="0"/>
+              </a:rPr>
+              <a:t> </a:t>
+            </a:r>
+            <a:r>
+              <a:rPr lang="en-US" sz="2200" dirty="0" err="1" smtClean="0">
+                <a:latin typeface="Consolas" pitchFamily="49" charset="0"/>
+              </a:rPr>
+              <a:t>configSource</a:t>
+            </a:r>
+            <a:r>
+              <a:rPr lang="en-US" sz="2200" dirty="0" smtClean="0">
+                <a:latin typeface="Consolas" pitchFamily="49" charset="0"/>
+              </a:rPr>
+              <a:t>="</a:t>
+            </a:r>
+            <a:r>
+              <a:rPr lang="en-US" sz="2200" i="1" dirty="0" err="1" smtClean="0">
+                <a:solidFill>
+                  <a:srgbClr val="C00000"/>
+                </a:solidFill>
+                <a:latin typeface="Consolas" pitchFamily="49" charset="0"/>
+              </a:rPr>
+              <a:t>web.connectionStrings.config</a:t>
+            </a:r>
+            <a:r>
+              <a:rPr lang="en-US" sz="2200" dirty="0" smtClean="0">
+                <a:latin typeface="Consolas" pitchFamily="49" charset="0"/>
+              </a:rPr>
+              <a:t>" /&gt;</a:t>
+            </a:r>
+          </a:p>
+          <a:p>
+            <a:r>
+              <a:rPr lang="en-US" sz="2200" dirty="0" smtClean="0">
+                <a:latin typeface="Consolas" pitchFamily="49" charset="0"/>
+              </a:rPr>
+              <a:t>&lt;</a:t>
+            </a:r>
+            <a:r>
+              <a:rPr lang="en-US" sz="2200" dirty="0" err="1" smtClean="0">
+                <a:latin typeface="Consolas" pitchFamily="49" charset="0"/>
+              </a:rPr>
+              <a:t>sessionState</a:t>
+            </a:r>
+            <a:r>
+              <a:rPr lang="en-US" sz="2200" dirty="0" smtClean="0">
+                <a:latin typeface="Consolas" pitchFamily="49" charset="0"/>
+              </a:rPr>
+              <a:t> timeout="25" </a:t>
+            </a:r>
+            <a:r>
+              <a:rPr lang="en-US" sz="2200" dirty="0" err="1" smtClean="0">
+                <a:latin typeface="Consolas" pitchFamily="49" charset="0"/>
+              </a:rPr>
+              <a:t>cookieless</a:t>
+            </a:r>
+            <a:r>
+              <a:rPr lang="en-US" sz="2200" dirty="0" smtClean="0">
+                <a:latin typeface="Consolas" pitchFamily="49" charset="0"/>
+              </a:rPr>
+              <a:t>="false" </a:t>
+            </a:r>
+            <a:r>
+              <a:rPr lang="en-US" sz="2200" dirty="0" err="1" smtClean="0">
+                <a:latin typeface="Consolas" pitchFamily="49" charset="0"/>
+              </a:rPr>
+              <a:t>regenerateExpiredSessionId</a:t>
+            </a:r>
+            <a:r>
+              <a:rPr lang="en-US" sz="2200" dirty="0" smtClean="0">
+                <a:latin typeface="Consolas" pitchFamily="49" charset="0"/>
+              </a:rPr>
+              <a:t>="true" mode="</a:t>
+            </a:r>
+            <a:r>
+              <a:rPr lang="en-US" sz="2200" b="1" i="1" dirty="0" err="1" smtClean="0">
+                <a:solidFill>
+                  <a:srgbClr val="C00000"/>
+                </a:solidFill>
+                <a:latin typeface="Consolas" pitchFamily="49" charset="0"/>
+              </a:rPr>
+              <a:t>SQLServer</a:t>
+            </a:r>
+            <a:r>
+              <a:rPr lang="en-US" sz="2200" dirty="0" smtClean="0">
+                <a:latin typeface="Consolas" pitchFamily="49" charset="0"/>
+              </a:rPr>
+              <a:t>" </a:t>
+            </a:r>
+            <a:r>
+              <a:rPr lang="en-US" sz="2200" dirty="0" err="1" smtClean="0">
+                <a:latin typeface="Consolas" pitchFamily="49" charset="0"/>
+              </a:rPr>
+              <a:t>allowCustomSqlDatabase</a:t>
+            </a:r>
+            <a:r>
+              <a:rPr lang="en-US" sz="2200" dirty="0" smtClean="0">
+                <a:latin typeface="Consolas" pitchFamily="49" charset="0"/>
+              </a:rPr>
+              <a:t>="true" </a:t>
+            </a:r>
+            <a:r>
+              <a:rPr lang="en-US" sz="2200" dirty="0" err="1" smtClean="0">
+                <a:latin typeface="Consolas" pitchFamily="49" charset="0"/>
+              </a:rPr>
+              <a:t>sqlConnectionString</a:t>
+            </a:r>
+            <a:r>
+              <a:rPr lang="en-US" sz="2200" dirty="0" smtClean="0">
+                <a:latin typeface="Consolas" pitchFamily="49" charset="0"/>
+              </a:rPr>
+              <a:t>="</a:t>
+            </a:r>
+            <a:r>
+              <a:rPr lang="en-US" sz="2200" i="1" dirty="0" err="1" smtClean="0">
+                <a:solidFill>
+                  <a:srgbClr val="C00000"/>
+                </a:solidFill>
+                <a:latin typeface="Consolas" pitchFamily="49" charset="0"/>
+              </a:rPr>
+              <a:t>snsState</a:t>
+            </a:r>
+            <a:r>
+              <a:rPr lang="en-US" sz="2200" dirty="0" smtClean="0">
+                <a:latin typeface="Consolas" pitchFamily="49" charset="0"/>
+              </a:rPr>
+              <a:t>" /&gt;</a:t>
+            </a:r>
+          </a:p>
+        </p:txBody>
+      </p:sp>
+      <p:pic>
+        <p:nvPicPr>
+          <p:cNvPr id="2050" name="Picture 2"/>
+          <p:cNvPicPr>
+            <a:picLocks noChangeAspect="1" noChangeArrowheads="1"/>
+          </p:cNvPicPr>
+          <p:nvPr/>
+        </p:nvPicPr>
+        <p:blipFill>
+          <a:blip r:embed="rId2" cstate="print"/>
+          <a:srcRect/>
+          <a:stretch>
+            <a:fillRect/>
+          </a:stretch>
+        </p:blipFill>
+        <p:spPr bwMode="auto">
+          <a:xfrm>
+            <a:off x="1019175" y="4038600"/>
+            <a:ext cx="7105650" cy="2057400"/>
+          </a:xfrm>
+          <a:prstGeom prst="rect">
+            <a:avLst/>
+          </a:prstGeom>
+          <a:noFill/>
+          <a:ln w="9525">
+            <a:noFill/>
+            <a:miter lim="800000"/>
+            <a:headEnd/>
+            <a:tailEnd/>
+          </a:ln>
+        </p:spPr>
+      </p:pic>
     </p:spTree>
   </p:cSld>
   <p:clrMapOvr>
@@ -5451,65 +6130,32 @@
           <a:chExt cx="0" cy="0"/>
         </a:xfrm>
       </p:grpSpPr>
-      <p:sp>
-        <p:nvSpPr>
-          <p:cNvPr id="2" name="Title 1"/>
-          <p:cNvSpPr>
-            <a:spLocks noGrp="1"/>
-          </p:cNvSpPr>
-          <p:nvPr>
-            <p:ph type="title"/>
-          </p:nvPr>
-        </p:nvSpPr>
-        <p:spPr/>
-        <p:txBody>
-          <a:bodyPr/>
-          <a:lstStyle/>
-          <a:p>
-            <a:pPr algn="l"/>
-            <a:r>
-              <a:rPr lang="en-US" dirty="0" smtClean="0"/>
-              <a:t>8. Check for Memory Leaks</a:t>
-            </a:r>
-            <a:endParaRPr lang="en-US" dirty="0"/>
-          </a:p>
-        </p:txBody>
-      </p:sp>
-      <p:sp>
-        <p:nvSpPr>
-          <p:cNvPr id="3" name="Content Placeholder 2"/>
-          <p:cNvSpPr>
-            <a:spLocks noGrp="1"/>
-          </p:cNvSpPr>
-          <p:nvPr>
-            <p:ph idx="1"/>
-          </p:nvPr>
-        </p:nvSpPr>
-        <p:spPr/>
-        <p:txBody>
-          <a:bodyPr/>
-          <a:lstStyle/>
-          <a:p>
-            <a:r>
-              <a:rPr lang="en-US" dirty="0" smtClean="0"/>
-              <a:t>Investigate the memory usage of each process during the load test.</a:t>
-            </a:r>
-          </a:p>
-          <a:p>
-            <a:r>
-              <a:rPr lang="en-US" dirty="0" smtClean="0"/>
-              <a:t>If a memory leak were present, the Resident Set Size (RSS) would continue to increase as a worker processes additional requests.</a:t>
-            </a:r>
-          </a:p>
-          <a:p>
-            <a:r>
-              <a:rPr lang="en-US" dirty="0" smtClean="0"/>
-              <a:t>Instead, each worker's RSS reaches a peak within the first 30–60 seconds and then remains essentially flat for the remainder of its lifetime.</a:t>
-            </a:r>
-            <a:endParaRPr lang="en-US" dirty="0"/>
-          </a:p>
-        </p:txBody>
-      </p:sp>
+      <p:pic>
+        <p:nvPicPr>
+          <p:cNvPr id="4" name="Picture 2" descr="https://lh3.ggpht.com/1IfZLL2QDSjZ0wS7sUhaMlsAOS8BBzdR3wZ1WawgRn7KZAM8nEVZYMOUM-lqQb0ikIzp=w300"/>
+          <p:cNvPicPr>
+            <a:picLocks noChangeAspect="1" noChangeArrowheads="1"/>
+          </p:cNvPicPr>
+          <p:nvPr/>
+        </p:nvPicPr>
+        <p:blipFill>
+          <a:blip r:embed="rId2" cstate="print"/>
+          <a:srcRect/>
+          <a:stretch>
+            <a:fillRect/>
+          </a:stretch>
+        </p:blipFill>
+        <p:spPr bwMode="auto">
+          <a:xfrm>
+            <a:off x="3276600" y="1905000"/>
+            <a:ext cx="2857500" cy="2857500"/>
+          </a:xfrm>
+          <a:prstGeom prst="rect">
+            <a:avLst/>
+          </a:prstGeom>
+          <a:noFill/>
+        </p:spPr>
+      </p:pic>
     </p:spTree>
   </p:cSld>
   <p:clrMapOvr>
@@ -5552,10 +6198,10 @@
           <a:p>
             <a:pPr algn="l"/>
             <a:r>
-              <a:rPr lang="en-US" dirty="0" smtClean="0"/>
-              <a:t>9. Understand PHP-FPM</a:t>
-            </a:r>
-            <a:endParaRPr lang="en-US" dirty="0"/>
+              <a:rPr lang="en-US" sz="3800" dirty="0" smtClean="0"/>
+              <a:t>1. Enable State Service Remote Connection</a:t>
+            </a:r>
+            <a:endParaRPr lang="en-US" sz="3800" dirty="0"/>
           </a:p>
         </p:txBody>
       </p:sp>
@@ -5575,83 +6221,79 @@
           <a:lstStyle/>
           <a:p>
             <a:r>
-              <a:rPr lang="en-US" sz="2400" dirty="0" smtClean="0"/>
-              <a:t>The process manager is a feature of PHP-FPM (</a:t>
-            </a:r>
-            <a:r>
-              <a:rPr lang="en-US" sz="2400" dirty="0" err="1" smtClean="0"/>
-              <a:t>FastCGI</a:t>
-            </a:r>
-            <a:r>
-              <a:rPr lang="en-US" sz="2400" dirty="0" smtClean="0"/>
-              <a:t> Process Manager), which is part of PHP itself.</a:t>
-            </a:r>
-          </a:p>
-          <a:p>
-            <a:r>
-              <a:rPr lang="en-US" sz="2400" dirty="0" smtClean="0"/>
-              <a:t>PHP-FPM decides "I want to run 5 site workers" (pm/</a:t>
-            </a:r>
-            <a:r>
-              <a:rPr lang="en-US" sz="2400" dirty="0" err="1" smtClean="0"/>
-              <a:t>max_children</a:t>
-            </a:r>
-            <a:r>
-              <a:rPr lang="en-US" sz="2400" dirty="0" smtClean="0"/>
-              <a:t>). It uses ordinary OS calls (fork) to create them — but the policy (how many, when) is entirely PHP's.</a:t>
-            </a:r>
-          </a:p>
-          <a:p>
-            <a:r>
-              <a:rPr lang="en-US" sz="2400" dirty="0" err="1" smtClean="0"/>
-              <a:t>systemd</a:t>
-            </a:r>
-            <a:r>
-              <a:rPr lang="en-US" sz="2400" dirty="0" smtClean="0"/>
-              <a:t> launches the FPM master as a service and, with our proposed </a:t>
-            </a:r>
-            <a:r>
-              <a:rPr lang="en-US" sz="2400" dirty="0" err="1" smtClean="0"/>
-              <a:t>MemoryMax</a:t>
-            </a:r>
-            <a:r>
-              <a:rPr lang="en-US" sz="2400" dirty="0" smtClean="0"/>
-              <a:t>=2000M, wraps all its workers in a </a:t>
-            </a:r>
-            <a:r>
-              <a:rPr lang="en-US" sz="2400" dirty="0" err="1" smtClean="0"/>
-              <a:t>cgroup</a:t>
-            </a:r>
-            <a:r>
-              <a:rPr lang="en-US" sz="2400" dirty="0" smtClean="0"/>
-              <a:t> — a kernel memory boundary.</a:t>
-            </a:r>
-          </a:p>
-          <a:p>
-            <a:r>
-              <a:rPr lang="en-US" sz="2400" dirty="0" smtClean="0"/>
-              <a:t>The kernel doesn't know or care about "dynamic </a:t>
-            </a:r>
-            <a:r>
-              <a:rPr lang="en-US" sz="2400" dirty="0" err="1" smtClean="0"/>
-              <a:t>vs</a:t>
-            </a:r>
-            <a:r>
-              <a:rPr lang="en-US" sz="2400" dirty="0" smtClean="0"/>
-              <a:t> </a:t>
-            </a:r>
-            <a:r>
-              <a:rPr lang="en-US" sz="2400" dirty="0" err="1" smtClean="0"/>
-              <a:t>ondemand</a:t>
-            </a:r>
-            <a:r>
-              <a:rPr lang="en-US" sz="2400" dirty="0" smtClean="0"/>
-              <a:t>"; it just enforces "this group of processes can't exceed 2.0 GB."</a:t>
-            </a:r>
-            <a:endParaRPr lang="en-US" sz="2400" dirty="0"/>
-          </a:p>
-        </p:txBody>
-      </p:sp>
+              <a:rPr lang="en-US" sz="2200" dirty="0" smtClean="0">
+                <a:latin typeface="Consolas" pitchFamily="49" charset="0"/>
+              </a:rPr>
+              <a:t>HKEY_LOCAL_MACHINE\SYSTEM\</a:t>
+            </a:r>
+            <a:r>
+              <a:rPr lang="en-US" sz="2200" dirty="0" err="1" smtClean="0">
+                <a:latin typeface="Consolas" pitchFamily="49" charset="0"/>
+              </a:rPr>
+              <a:t>CurrentControlSet</a:t>
+            </a:r>
+            <a:r>
+              <a:rPr lang="en-US" sz="2200" dirty="0" smtClean="0">
+                <a:latin typeface="Consolas" pitchFamily="49" charset="0"/>
+              </a:rPr>
+              <a:t>\Services\</a:t>
+            </a:r>
+            <a:r>
+              <a:rPr lang="en-US" sz="2200" dirty="0" err="1" smtClean="0">
+                <a:latin typeface="Consolas" pitchFamily="49" charset="0"/>
+              </a:rPr>
+              <a:t>aspnet_state</a:t>
+            </a:r>
+            <a:r>
+              <a:rPr lang="en-US" sz="2200" dirty="0" smtClean="0">
+                <a:latin typeface="Consolas" pitchFamily="49" charset="0"/>
+              </a:rPr>
+              <a:t>\Parameters\</a:t>
+            </a:r>
+            <a:r>
+              <a:rPr lang="en-US" sz="2200" dirty="0" err="1" smtClean="0">
+                <a:latin typeface="Consolas" pitchFamily="49" charset="0"/>
+              </a:rPr>
+              <a:t>AllowRemoteConnection</a:t>
+            </a:r>
+            <a:endParaRPr lang="en-US" sz="2200" dirty="0">
+              <a:latin typeface="Consolas" pitchFamily="49" charset="0"/>
+            </a:endParaRPr>
+          </a:p>
+        </p:txBody>
+      </p:sp>
+      <p:pic>
+        <p:nvPicPr>
+          <p:cNvPr id="2050" name="Picture 2"/>
+          <p:cNvPicPr>
+            <a:picLocks noChangeAspect="1" noChangeArrowheads="1"/>
+          </p:cNvPicPr>
+          <p:nvPr/>
+        </p:nvPicPr>
+        <p:blipFill>
+          <a:blip r:embed="rId2" cstate="print"/>
+          <a:srcRect/>
+          <a:stretch>
+            <a:fillRect/>
+          </a:stretch>
+        </p:blipFill>
+        <p:spPr bwMode="auto">
+          <a:xfrm>
+            <a:off x="1371600" y="2667000"/>
+            <a:ext cx="6390640" cy="3220720"/>
+          </a:xfrm>
+          <a:prstGeom prst="rect">
+            <a:avLst/>
+          </a:prstGeom>
+          <a:noFill/>
+          <a:ln w="9525">
+            <a:noFill/>
+            <a:miter lim="800000"/>
+            <a:headEnd/>
+            <a:tailEnd/>
+          </a:ln>
+        </p:spPr>
+      </p:pic>
     </p:spTree>
   </p:cSld>
   <p:clrMapOvr>
@@ -5695,7 +6337,7 @@
             <a:pPr algn="l"/>
             <a:r>
               <a:rPr lang="en-US" dirty="0" smtClean="0"/>
-              <a:t>10. Reallocate Resources</a:t>
+              <a:t>2. Open State Service Firewall Port</a:t>
             </a:r>
             <a:endParaRPr lang="en-US" dirty="0"/>
           </a:p>
@@ -5717,35 +6359,55 @@
           <a:lstStyle/>
           <a:p>
             <a:r>
-              <a:rPr lang="en-US" sz="2400" dirty="0" err="1" smtClean="0"/>
-              <a:t>max_children</a:t>
-            </a:r>
-            <a:r>
-              <a:rPr lang="en-US" sz="2400" dirty="0" smtClean="0"/>
-              <a:t> = 4 for resource-intensive sites</a:t>
-            </a:r>
-            <a:r>
-              <a:rPr lang="en-US" sz="2400" dirty="0" smtClean="0"/>
-              <a:t>.</a:t>
-            </a:r>
-          </a:p>
-          <a:p>
-            <a:r>
-              <a:rPr lang="en-US" sz="2400" dirty="0" err="1" smtClean="0"/>
-              <a:t>max_children</a:t>
-            </a:r>
-            <a:r>
-              <a:rPr lang="en-US" sz="2400" dirty="0" smtClean="0"/>
-              <a:t> </a:t>
-            </a:r>
-            <a:r>
-              <a:rPr lang="en-US" sz="2400" dirty="0" smtClean="0"/>
-              <a:t>= 1 for lightweight sites.</a:t>
-            </a:r>
-            <a:endParaRPr lang="en-US" sz="2400" dirty="0"/>
-          </a:p>
-        </p:txBody>
-      </p:sp>
+              <a:rPr lang="en-US" sz="2200" dirty="0" smtClean="0">
+                <a:latin typeface="+mj-lt"/>
+              </a:rPr>
+              <a:t>Port: </a:t>
+            </a:r>
+            <a:r>
+              <a:rPr lang="en-US" sz="2200" b="1" dirty="0" smtClean="0">
+                <a:latin typeface="+mj-lt"/>
+              </a:rPr>
+              <a:t>42424</a:t>
+            </a:r>
+            <a:endParaRPr lang="en-US" sz="2200" b="1" dirty="0">
+              <a:latin typeface="+mj-lt"/>
+            </a:endParaRPr>
+          </a:p>
+        </p:txBody>
+      </p:sp>
+      <p:pic>
+        <p:nvPicPr>
+          <p:cNvPr id="3074" name="Picture 2"/>
+          <p:cNvPicPr>
+            <a:picLocks noChangeAspect="1" noChangeArrowheads="1"/>
+          </p:cNvPicPr>
+          <p:nvPr/>
+        </p:nvPicPr>
+        <p:blipFill>
+          <a:blip r:embed="rId2" cstate="print"/>
+          <a:srcRect/>
+          <a:stretch>
+            <a:fillRect/>
+          </a:stretch>
+        </p:blipFill>
+        <p:spPr bwMode="auto">
+          <a:xfrm>
+            <a:off x="914400" y="2743200"/>
+            <a:ext cx="7287260" cy="3200400"/>
+          </a:xfrm>
+          <a:prstGeom prst="rect">
+            <a:avLst/>
+          </a:prstGeom>
+          <a:noFill/>
+          <a:ln w="9525">
+            <a:noFill/>
+            <a:miter lim="800000"/>
+            <a:headEnd/>
+            <a:tailEnd/>
+          </a:ln>
+        </p:spPr>
+      </p:pic>
     </p:spTree>
   </p:cSld>
   <p:clrMapOvr>
@@ -5755,6 +6417,403 @@
 </file>
 
 <file path=ppt/slides/slide23.xml><?xml version="1.0" encoding="utf-8"?>
+<p:sld xmlns:a="http://schemas.openxmlformats.org/drawingml/2006/main" xmlns:r="http://schemas.openxmlformats.org/officeDocument/2006/relationships" xmlns:p="http://schemas.openxmlformats.org/presentationml/2006/main">
+  <p:cSld>
+    <p:spTree>
+      <p:nvGrpSpPr>
+        <p:cNvPr id="1" name=""/>
+        <p:cNvGrpSpPr/>
+        <p:nvPr/>
+      </p:nvGrpSpPr>
+      <p:grpSpPr>
+        <a:xfrm>
+          <a:off x="0" y="0"/>
+          <a:ext cx="0" cy="0"/>
+          <a:chOff x="0" y="0"/>
+          <a:chExt cx="0" cy="0"/>
+        </a:xfrm>
+      </p:grpSpPr>
+      <p:sp>
+        <p:nvSpPr>
+          <p:cNvPr id="2" name="Title 1"/>
+          <p:cNvSpPr>
+            <a:spLocks noGrp="1"/>
+          </p:cNvSpPr>
+          <p:nvPr>
+            <p:ph type="title"/>
+          </p:nvPr>
+        </p:nvSpPr>
+        <p:spPr/>
+        <p:txBody>
+          <a:bodyPr/>
+          <a:lstStyle/>
+          <a:p>
+            <a:pPr algn="l"/>
+            <a:r>
+              <a:rPr lang="en-US" dirty="0" smtClean="0"/>
+              <a:t>3. Start Session State Service</a:t>
+            </a:r>
+            <a:endParaRPr lang="en-US" dirty="0"/>
+          </a:p>
+        </p:txBody>
+      </p:sp>
+      <p:sp>
+        <p:nvSpPr>
+          <p:cNvPr id="3" name="Content Placeholder 2"/>
+          <p:cNvSpPr>
+            <a:spLocks noGrp="1"/>
+          </p:cNvSpPr>
+          <p:nvPr>
+            <p:ph idx="1"/>
+          </p:nvPr>
+        </p:nvSpPr>
+        <p:spPr/>
+        <p:txBody>
+          <a:bodyPr/>
+          <a:lstStyle/>
+          <a:p>
+            <a:r>
+              <a:rPr lang="en-US" sz="2400" dirty="0" smtClean="0">
+                <a:latin typeface="Consolas" pitchFamily="49" charset="0"/>
+              </a:rPr>
+              <a:t>net start </a:t>
+            </a:r>
+            <a:r>
+              <a:rPr lang="en-US" sz="2400" dirty="0" err="1" smtClean="0">
+                <a:latin typeface="Consolas" pitchFamily="49" charset="0"/>
+              </a:rPr>
+              <a:t>aspnet_state</a:t>
+            </a:r>
+            <a:endParaRPr lang="en-US" sz="2400" dirty="0">
+              <a:latin typeface="Consolas" pitchFamily="49" charset="0"/>
+            </a:endParaRPr>
+          </a:p>
+        </p:txBody>
+      </p:sp>
+      <p:pic>
+        <p:nvPicPr>
+          <p:cNvPr id="1027" name="Picture 3"/>
+          <p:cNvPicPr>
+            <a:picLocks noChangeAspect="1" noChangeArrowheads="1"/>
+          </p:cNvPicPr>
+          <p:nvPr/>
+        </p:nvPicPr>
+        <p:blipFill>
+          <a:blip r:embed="rId2" cstate="print"/>
+          <a:srcRect/>
+          <a:stretch>
+            <a:fillRect/>
+          </a:stretch>
+        </p:blipFill>
+        <p:spPr bwMode="auto">
+          <a:xfrm>
+            <a:off x="439738" y="2593975"/>
+            <a:ext cx="8264525" cy="2968625"/>
+          </a:xfrm>
+          <a:prstGeom prst="rect">
+            <a:avLst/>
+          </a:prstGeom>
+          <a:noFill/>
+          <a:ln w="9525">
+            <a:noFill/>
+            <a:miter lim="800000"/>
+            <a:headEnd/>
+            <a:tailEnd/>
+          </a:ln>
+        </p:spPr>
+      </p:pic>
+    </p:spTree>
+  </p:cSld>
+  <p:clrMapOvr>
+    <a:masterClrMapping/>
+  </p:clrMapOvr>
+</p:sld>
+</file>
+
+<file path=ppt/slides/slide24.xml><?xml version="1.0" encoding="utf-8"?>
+<p:sld xmlns:a="http://schemas.openxmlformats.org/drawingml/2006/main" xmlns:r="http://schemas.openxmlformats.org/officeDocument/2006/relationships" xmlns:p="http://schemas.openxmlformats.org/presentationml/2006/main">
+  <p:cSld>
+    <p:spTree>
+      <p:nvGrpSpPr>
+        <p:cNvPr id="1" name=""/>
+        <p:cNvGrpSpPr/>
+        <p:nvPr/>
+      </p:nvGrpSpPr>
+      <p:grpSpPr>
+        <a:xfrm>
+          <a:off x="0" y="0"/>
+          <a:ext cx="0" cy="0"/>
+          <a:chOff x="0" y="0"/>
+          <a:chExt cx="0" cy="0"/>
+        </a:xfrm>
+      </p:grpSpPr>
+      <p:sp>
+        <p:nvSpPr>
+          <p:cNvPr id="2" name="Title 1"/>
+          <p:cNvSpPr>
+            <a:spLocks noGrp="1"/>
+          </p:cNvSpPr>
+          <p:nvPr>
+            <p:ph type="title"/>
+          </p:nvPr>
+        </p:nvSpPr>
+        <p:spPr/>
+        <p:txBody>
+          <a:bodyPr/>
+          <a:lstStyle/>
+          <a:p>
+            <a:pPr algn="l"/>
+            <a:r>
+              <a:rPr lang="en-US" sz="4200" dirty="0" smtClean="0"/>
+              <a:t>4. Enable </a:t>
+            </a:r>
+            <a:r>
+              <a:rPr lang="en-US" sz="4200" dirty="0" err="1" smtClean="0"/>
+              <a:t>StateServer</a:t>
+            </a:r>
+            <a:r>
+              <a:rPr lang="en-US" sz="4200" dirty="0" smtClean="0"/>
+              <a:t> Session Mode</a:t>
+            </a:r>
+            <a:endParaRPr lang="en-US" sz="4200" dirty="0"/>
+          </a:p>
+        </p:txBody>
+      </p:sp>
+      <p:sp>
+        <p:nvSpPr>
+          <p:cNvPr id="4" name="Rectangle 3"/>
+          <p:cNvSpPr/>
+          <p:nvPr/>
+        </p:nvSpPr>
+        <p:spPr>
+          <a:xfrm>
+            <a:off x="533400" y="2438400"/>
+            <a:ext cx="7924800" cy="2554545"/>
+          </a:xfrm>
+          <a:prstGeom prst="rect">
+            <a:avLst/>
+          </a:prstGeom>
+        </p:spPr>
+        <p:style>
+          <a:lnRef idx="1">
+            <a:schemeClr val="dk1"/>
+          </a:lnRef>
+          <a:fillRef idx="2">
+            <a:schemeClr val="dk1"/>
+          </a:fillRef>
+          <a:effectRef idx="1">
+            <a:schemeClr val="dk1"/>
+          </a:effectRef>
+          <a:fontRef idx="minor">
+            <a:schemeClr val="dk1"/>
+          </a:fontRef>
+        </p:style>
+        <p:txBody>
+          <a:bodyPr wrap="square">
+            <a:spAutoFit/>
+          </a:bodyPr>
+          <a:lstStyle/>
+          <a:p>
+            <a:pPr>
+              <a:buNone/>
+            </a:pPr>
+            <a:r>
+              <a:rPr lang="en-US" sz="2000" dirty="0" smtClean="0">
+                <a:latin typeface="Consolas" pitchFamily="49" charset="0"/>
+              </a:rPr>
+              <a:t> &lt;system.web&gt;</a:t>
+            </a:r>
+          </a:p>
+          <a:p>
+            <a:pPr>
+              <a:buNone/>
+            </a:pPr>
+            <a:r>
+              <a:rPr lang="en-US" sz="2000" dirty="0" smtClean="0">
+                <a:latin typeface="Consolas" pitchFamily="49" charset="0"/>
+              </a:rPr>
+              <a:t>    &lt;</a:t>
+            </a:r>
+            <a:r>
+              <a:rPr lang="en-US" sz="2000" dirty="0" err="1" smtClean="0">
+                <a:latin typeface="Consolas" pitchFamily="49" charset="0"/>
+              </a:rPr>
+              <a:t>httpCookies</a:t>
+            </a:r>
+            <a:r>
+              <a:rPr lang="en-US" sz="2000" dirty="0" smtClean="0">
+                <a:latin typeface="Consolas" pitchFamily="49" charset="0"/>
+              </a:rPr>
+              <a:t> </a:t>
+            </a:r>
+            <a:r>
+              <a:rPr lang="en-US" sz="2000" dirty="0" err="1" smtClean="0">
+                <a:latin typeface="Consolas" pitchFamily="49" charset="0"/>
+              </a:rPr>
+              <a:t>requireSSL</a:t>
+            </a:r>
+            <a:r>
+              <a:rPr lang="en-US" sz="2000" dirty="0" smtClean="0">
+                <a:latin typeface="Consolas" pitchFamily="49" charset="0"/>
+              </a:rPr>
+              <a:t>="true" /&gt;</a:t>
+            </a:r>
+          </a:p>
+          <a:p>
+            <a:pPr>
+              <a:buNone/>
+            </a:pPr>
+            <a:r>
+              <a:rPr lang="en-US" sz="2000" dirty="0" smtClean="0">
+                <a:latin typeface="Consolas" pitchFamily="49" charset="0"/>
+              </a:rPr>
+              <a:t>    &lt;</a:t>
+            </a:r>
+            <a:r>
+              <a:rPr lang="en-US" sz="2000" dirty="0" err="1" smtClean="0">
+                <a:latin typeface="Consolas" pitchFamily="49" charset="0"/>
+              </a:rPr>
+              <a:t>machineKey</a:t>
+            </a:r>
+            <a:r>
+              <a:rPr lang="en-US" sz="2000" dirty="0" smtClean="0">
+                <a:latin typeface="Consolas" pitchFamily="49" charset="0"/>
+              </a:rPr>
+              <a:t> validation="SHA1" /&gt;</a:t>
+            </a:r>
+          </a:p>
+          <a:p>
+            <a:pPr>
+              <a:buNone/>
+            </a:pPr>
+            <a:r>
+              <a:rPr lang="en-US" sz="2000" dirty="0" smtClean="0">
+                <a:latin typeface="Consolas" pitchFamily="49" charset="0"/>
+              </a:rPr>
+              <a:t>    &lt;</a:t>
+            </a:r>
+            <a:r>
+              <a:rPr lang="en-US" sz="2000" dirty="0" err="1" smtClean="0">
+                <a:latin typeface="Consolas" pitchFamily="49" charset="0"/>
+              </a:rPr>
+              <a:t>sessionState</a:t>
+            </a:r>
+            <a:r>
+              <a:rPr lang="en-US" sz="2000" dirty="0" smtClean="0">
+                <a:latin typeface="Consolas" pitchFamily="49" charset="0"/>
+              </a:rPr>
+              <a:t> timeout="25" </a:t>
+            </a:r>
+            <a:r>
+              <a:rPr lang="en-US" sz="2000" dirty="0" err="1" smtClean="0">
+                <a:latin typeface="Consolas" pitchFamily="49" charset="0"/>
+              </a:rPr>
+              <a:t>cookieless</a:t>
+            </a:r>
+            <a:r>
+              <a:rPr lang="en-US" sz="2000" dirty="0" smtClean="0">
+                <a:latin typeface="Consolas" pitchFamily="49" charset="0"/>
+              </a:rPr>
+              <a:t>="false" </a:t>
+            </a:r>
+            <a:r>
+              <a:rPr lang="en-US" sz="2000" dirty="0" err="1" smtClean="0">
+                <a:latin typeface="Consolas" pitchFamily="49" charset="0"/>
+              </a:rPr>
+              <a:t>regenerateExpiredSessionId</a:t>
+            </a:r>
+            <a:r>
+              <a:rPr lang="en-US" sz="2000" dirty="0" smtClean="0">
+                <a:latin typeface="Consolas" pitchFamily="49" charset="0"/>
+              </a:rPr>
+              <a:t>="true" mode="</a:t>
+            </a:r>
+            <a:r>
+              <a:rPr lang="en-US" sz="2000" b="1" dirty="0" err="1" smtClean="0">
+                <a:solidFill>
+                  <a:srgbClr val="C00000"/>
+                </a:solidFill>
+                <a:latin typeface="Consolas" pitchFamily="49" charset="0"/>
+              </a:rPr>
+              <a:t>StateServer</a:t>
+            </a:r>
+            <a:r>
+              <a:rPr lang="en-US" sz="2000" dirty="0" smtClean="0">
+                <a:latin typeface="Consolas" pitchFamily="49" charset="0"/>
+              </a:rPr>
+              <a:t>" </a:t>
+            </a:r>
+            <a:r>
+              <a:rPr lang="en-US" sz="2000" dirty="0" err="1" smtClean="0">
+                <a:latin typeface="Consolas" pitchFamily="49" charset="0"/>
+              </a:rPr>
+              <a:t>stateConnectionString</a:t>
+            </a:r>
+            <a:r>
+              <a:rPr lang="en-US" sz="2000" dirty="0" smtClean="0">
+                <a:latin typeface="Consolas" pitchFamily="49" charset="0"/>
+              </a:rPr>
+              <a:t>="</a:t>
+            </a:r>
+            <a:r>
+              <a:rPr lang="en-US" sz="2000" dirty="0" err="1" smtClean="0">
+                <a:latin typeface="Consolas" pitchFamily="49" charset="0"/>
+              </a:rPr>
+              <a:t>tcpip</a:t>
+            </a:r>
+            <a:r>
+              <a:rPr lang="en-US" sz="2000" dirty="0" smtClean="0">
+                <a:latin typeface="Consolas" pitchFamily="49" charset="0"/>
+              </a:rPr>
+              <a:t>=192.168.101.120:42424" </a:t>
+            </a:r>
+            <a:r>
+              <a:rPr lang="en-US" sz="2000" dirty="0" err="1" smtClean="0">
+                <a:latin typeface="Consolas" pitchFamily="49" charset="0"/>
+              </a:rPr>
+              <a:t>stateNetworkTimeout</a:t>
+            </a:r>
+            <a:r>
+              <a:rPr lang="en-US" sz="2000" dirty="0" smtClean="0">
+                <a:latin typeface="Consolas" pitchFamily="49" charset="0"/>
+              </a:rPr>
+              <a:t>="60" </a:t>
+            </a:r>
+            <a:r>
+              <a:rPr lang="en-US" sz="2000" dirty="0" err="1" smtClean="0">
+                <a:latin typeface="Consolas" pitchFamily="49" charset="0"/>
+              </a:rPr>
+              <a:t>useHostingIdentity</a:t>
+            </a:r>
+            <a:r>
+              <a:rPr lang="en-US" sz="2000" dirty="0" smtClean="0">
+                <a:latin typeface="Consolas" pitchFamily="49" charset="0"/>
+              </a:rPr>
+              <a:t>="false" /&gt;</a:t>
+            </a:r>
+          </a:p>
+          <a:p>
+            <a:pPr>
+              <a:buNone/>
+            </a:pPr>
+            <a:r>
+              <a:rPr lang="en-US" sz="2000" dirty="0" smtClean="0">
+                <a:latin typeface="Consolas" pitchFamily="49" charset="0"/>
+              </a:rPr>
+              <a:t>...</a:t>
+            </a:r>
+          </a:p>
+        </p:txBody>
+      </p:sp>
+    </p:spTree>
+  </p:cSld>
+  <p:clrMapOvr>
+    <a:masterClrMapping/>
+  </p:clrMapOvr>
+</p:sld>
+</file>
+
+<file path=ppt/slides/slide25.xml><?xml version="1.0" encoding="utf-8"?>
 <p:sld xmlns:a="http://schemas.openxmlformats.org/drawingml/2006/main" xmlns:r="http://schemas.openxmlformats.org/officeDocument/2006/relationships" xmlns:p="http://schemas.openxmlformats.org/presentationml/2006/main">
   <p:cSld>
     <p:spTree>
@@ -5805,7 +6864,7 @@
 </p:sld>
 </file>
 
-<file path=ppt/slides/slide24.xml><?xml version="1.0" encoding="utf-8"?>
+<file path=ppt/slides/slide26.xml><?xml version="1.0" encoding="utf-8"?>
 <p:sld xmlns:a="http://schemas.openxmlformats.org/drawingml/2006/main" xmlns:r="http://schemas.openxmlformats.org/officeDocument/2006/relationships" xmlns:p="http://schemas.openxmlformats.org/presentationml/2006/main">
   <p:cSld>
     <p:spTree>
@@ -5839,7 +6898,7 @@
           <a:p>
             <a:r>
               <a:rPr lang="en-US" dirty="0" smtClean="0"/>
-              <a:t>Scaling Out Guidelines (I) [2]</a:t>
+              <a:t>Distributed Cache [3]</a:t>
             </a:r>
             <a:endParaRPr lang="en-US" dirty="0"/>
           </a:p>
@@ -5861,87 +6920,46 @@
           <a:lstStyle/>
           <a:p>
             <a:r>
-              <a:rPr lang="en-US" sz="2000" i="1" dirty="0" smtClean="0">
-                <a:solidFill>
-                  <a:srgbClr val="C00000"/>
-                </a:solidFill>
-              </a:rPr>
-              <a:t>Statelessness</a:t>
-            </a:r>
-            <a:r>
-              <a:rPr lang="en-US" sz="2000" dirty="0" smtClean="0"/>
-              <a:t> means that each </a:t>
-            </a:r>
-            <a:r>
-              <a:rPr lang="en-US" sz="2000" u="sng" dirty="0" smtClean="0"/>
-              <a:t>transaction can be handled by one instance as well as any other</a:t>
-            </a:r>
-            <a:r>
-              <a:rPr lang="en-US" sz="2000" dirty="0" smtClean="0"/>
-              <a:t>; a user may transact with dozens of different instances during a single session, without ever knowing it.</a:t>
-            </a:r>
-          </a:p>
-          <a:p>
-            <a:r>
-              <a:rPr lang="en-US" sz="2000" dirty="0" smtClean="0"/>
-              <a:t>Design the application to </a:t>
-            </a:r>
-            <a:r>
-              <a:rPr lang="en-US" sz="2000" i="1" dirty="0" smtClean="0">
-                <a:solidFill>
-                  <a:srgbClr val="C00000"/>
-                </a:solidFill>
-              </a:rPr>
-              <a:t>run in a stateless fashion</a:t>
-            </a:r>
-            <a:r>
-              <a:rPr lang="en-US" sz="2000" dirty="0" smtClean="0"/>
-              <a:t>, with any necessary user and </a:t>
-            </a:r>
-            <a:r>
-              <a:rPr lang="en-US" sz="2000" i="1" dirty="0" smtClean="0">
-                <a:solidFill>
-                  <a:srgbClr val="C00000"/>
-                </a:solidFill>
-              </a:rPr>
-              <a:t>session data</a:t>
-            </a:r>
-            <a:r>
-              <a:rPr lang="en-US" sz="2000" dirty="0" smtClean="0"/>
-              <a:t> stored either </a:t>
-            </a:r>
-            <a:r>
-              <a:rPr lang="en-US" sz="2000" u="sng" dirty="0" smtClean="0"/>
-              <a:t>on the client side</a:t>
-            </a:r>
-            <a:r>
-              <a:rPr lang="en-US" sz="2000" dirty="0" smtClean="0"/>
-              <a:t>, or in a </a:t>
-            </a:r>
-            <a:r>
-              <a:rPr lang="en-US" sz="2000" u="sng" dirty="0" smtClean="0"/>
-              <a:t>distributed store</a:t>
-            </a:r>
-            <a:r>
-              <a:rPr lang="en-US" sz="2000" dirty="0" smtClean="0"/>
-              <a:t> that's accessible to any application instance.</a:t>
-            </a:r>
-          </a:p>
-          <a:p>
-            <a:endParaRPr lang="en-US" sz="2000" dirty="0"/>
+              <a:rPr lang="en-US" sz="2400" dirty="0" smtClean="0">
+                <a:hlinkClick r:id="rId2"/>
+              </a:rPr>
+              <a:t>https://github.com/memcached/memcached/wiki</a:t>
+            </a:r>
+            <a:endParaRPr lang="en-US" sz="2400" dirty="0" smtClean="0"/>
+          </a:p>
+          <a:p>
+            <a:r>
+              <a:rPr lang="en-US" sz="2400" dirty="0" smtClean="0">
+                <a:hlinkClick r:id="rId3"/>
+              </a:rPr>
+              <a:t>https://redis.io/docs/getting-started/</a:t>
+            </a:r>
+            <a:endParaRPr lang="en-US" sz="2400" dirty="0" smtClean="0"/>
+          </a:p>
+          <a:p>
+            <a:r>
+              <a:rPr lang="en-US" sz="2400" dirty="0" smtClean="0">
+                <a:hlinkClick r:id="rId4"/>
+              </a:rPr>
+              <a:t>https://codeburst.io/redis-what-and-why-d52b6829813</a:t>
+            </a:r>
+            <a:endParaRPr lang="en-US" sz="2400" dirty="0" smtClean="0"/>
+          </a:p>
+          <a:p>
+            <a:endParaRPr lang="en-US" sz="2400" dirty="0"/>
           </a:p>
         </p:txBody>
       </p:sp>
       <p:pic>
         <p:nvPicPr>
-          <p:cNvPr id="4" name="Picture 3"/>
+          <p:cNvPr id="8" name="Picture 6"/>
           <p:cNvPicPr>
             <a:picLocks noChangeAspect="1" noChangeArrowheads="1"/>
           </p:cNvPicPr>
           <p:nvPr/>
         </p:nvPicPr>
         <p:blipFill>
-          <a:blip r:embed="rId2" cstate="print"/>
+          <a:blip r:embed="rId5" cstate="print"/>
           <a:srcRect/>
           <a:stretch>
             <a:fillRect/>
@@ -5949,8 +6967,8 @@
         </p:blipFill>
         <p:spPr bwMode="auto">
           <a:xfrm>
-            <a:off x="2667000" y="4114800"/>
-            <a:ext cx="3990975" cy="1619250"/>
+            <a:off x="2667000" y="3162300"/>
+            <a:ext cx="3954780" cy="3314700"/>
           </a:xfrm>
           <a:prstGeom prst="rect">
             <a:avLst/>
@@ -5972,192 +6990,7 @@
 </p:sld>
 </file>
 
-<file path=ppt/slides/slide25.xml><?xml version="1.0" encoding="utf-8"?>
-<p:sld xmlns:a="http://schemas.openxmlformats.org/drawingml/2006/main" xmlns:r="http://schemas.openxmlformats.org/officeDocument/2006/relationships" xmlns:p="http://schemas.openxmlformats.org/presentationml/2006/main">
-  <p:cSld>
-    <p:spTree>
-      <p:nvGrpSpPr>
-        <p:cNvPr id="1" name=""/>
-        <p:cNvGrpSpPr/>
-        <p:nvPr/>
-      </p:nvGrpSpPr>
-      <p:grpSpPr>
-        <a:xfrm>
-          <a:off x="0" y="0"/>
-          <a:ext cx="0" cy="0"/>
-          <a:chOff x="0" y="0"/>
-          <a:chExt cx="0" cy="0"/>
-        </a:xfrm>
-      </p:grpSpPr>
-      <p:sp>
-        <p:nvSpPr>
-          <p:cNvPr id="2" name="Title 1"/>
-          <p:cNvSpPr>
-            <a:spLocks noGrp="1"/>
-          </p:cNvSpPr>
-          <p:nvPr>
-            <p:ph type="title"/>
-          </p:nvPr>
-        </p:nvSpPr>
-        <p:spPr/>
-        <p:txBody>
-          <a:bodyPr/>
-          <a:lstStyle/>
-          <a:p>
-            <a:r>
-              <a:rPr lang="en-US" dirty="0" smtClean="0"/>
-              <a:t>Scaling Out Guidelines (II)</a:t>
-            </a:r>
-            <a:endParaRPr lang="en-US" dirty="0"/>
-          </a:p>
-        </p:txBody>
-      </p:sp>
-      <p:sp>
-        <p:nvSpPr>
-          <p:cNvPr id="3" name="Content Placeholder 2"/>
-          <p:cNvSpPr>
-            <a:spLocks noGrp="1"/>
-          </p:cNvSpPr>
-          <p:nvPr>
-            <p:ph idx="1"/>
-          </p:nvPr>
-        </p:nvSpPr>
-        <p:spPr/>
-        <p:txBody>
-          <a:bodyPr/>
-          <a:lstStyle/>
-          <a:p>
-            <a:r>
-              <a:rPr lang="en-US" sz="2000" dirty="0" smtClean="0"/>
-              <a:t>Design the application to </a:t>
-            </a:r>
-            <a:r>
-              <a:rPr lang="en-US" sz="2000" i="1" dirty="0" smtClean="0">
-                <a:solidFill>
-                  <a:srgbClr val="C00000"/>
-                </a:solidFill>
-              </a:rPr>
-              <a:t>conduct I/O operations asynchronously</a:t>
-            </a:r>
-            <a:r>
-              <a:rPr lang="en-US" sz="2000" dirty="0" smtClean="0"/>
-              <a:t>, so that the application can perform useful work while waiting for input and output to complete.</a:t>
-            </a:r>
-          </a:p>
-          <a:p>
-            <a:r>
-              <a:rPr lang="en-US" sz="2000" i="1" dirty="0" smtClean="0">
-                <a:solidFill>
-                  <a:srgbClr val="C00000"/>
-                </a:solidFill>
-              </a:rPr>
-              <a:t>Pool resources</a:t>
-            </a:r>
-            <a:r>
-              <a:rPr lang="en-US" sz="2000" dirty="0" smtClean="0"/>
-              <a:t> such as </a:t>
-            </a:r>
-            <a:r>
-              <a:rPr lang="en-US" sz="2000" u="sng" dirty="0" smtClean="0"/>
-              <a:t>threads</a:t>
-            </a:r>
-            <a:r>
-              <a:rPr lang="en-US" sz="2000" dirty="0" smtClean="0"/>
-              <a:t>, </a:t>
-            </a:r>
-            <a:r>
-              <a:rPr lang="en-US" sz="2000" u="sng" dirty="0" smtClean="0"/>
-              <a:t>network connections</a:t>
-            </a:r>
-            <a:r>
-              <a:rPr lang="en-US" sz="2000" dirty="0" smtClean="0"/>
-              <a:t>, and </a:t>
-            </a:r>
-            <a:r>
-              <a:rPr lang="en-US" sz="2000" u="sng" dirty="0" smtClean="0"/>
-              <a:t>database connections</a:t>
-            </a:r>
-            <a:r>
-              <a:rPr lang="en-US" sz="2000" dirty="0" smtClean="0"/>
-              <a:t>; this helps maximize your computing resources, and it improves your ability to predict resource usage.</a:t>
-            </a:r>
-          </a:p>
-          <a:p>
-            <a:r>
-              <a:rPr lang="en-US" sz="2000" dirty="0" smtClean="0"/>
-              <a:t>Write your database operations in such a way as to </a:t>
-            </a:r>
-            <a:r>
-              <a:rPr lang="en-US" sz="2000" i="1" dirty="0" smtClean="0">
-                <a:solidFill>
-                  <a:srgbClr val="C00000"/>
-                </a:solidFill>
-              </a:rPr>
-              <a:t>maximize concurrency</a:t>
-            </a:r>
-            <a:r>
-              <a:rPr lang="en-US" sz="2000" dirty="0" smtClean="0"/>
-              <a:t> and </a:t>
-            </a:r>
-            <a:r>
-              <a:rPr lang="en-US" sz="2000" i="1" dirty="0" smtClean="0">
-                <a:solidFill>
-                  <a:srgbClr val="C00000"/>
-                </a:solidFill>
-              </a:rPr>
-              <a:t>minimize exclusive locking</a:t>
-            </a:r>
-            <a:r>
-              <a:rPr lang="en-US" sz="2000" dirty="0" smtClean="0"/>
-              <a:t>. For example, don't lock records when performing read-only operations.</a:t>
-            </a:r>
-          </a:p>
-          <a:p>
-            <a:endParaRPr lang="en-US" sz="2000" dirty="0"/>
-          </a:p>
-        </p:txBody>
-      </p:sp>
-      <p:pic>
-        <p:nvPicPr>
-          <p:cNvPr id="4" name="Picture 3"/>
-          <p:cNvPicPr>
-            <a:picLocks noChangeAspect="1" noChangeArrowheads="1"/>
-          </p:cNvPicPr>
-          <p:nvPr/>
-        </p:nvPicPr>
-        <p:blipFill>
-          <a:blip r:embed="rId2" cstate="print"/>
-          <a:srcRect/>
-          <a:stretch>
-            <a:fillRect/>
-          </a:stretch>
-        </p:blipFill>
-        <p:spPr bwMode="auto">
-          <a:xfrm>
-            <a:off x="2667000" y="4800600"/>
-            <a:ext cx="3990975" cy="1619250"/>
-          </a:xfrm>
-          <a:prstGeom prst="rect">
-            <a:avLst/>
-          </a:prstGeom>
-          <a:noFill/>
-          <a:ln w="9525">
-            <a:noFill/>
-            <a:miter lim="800000"/>
-            <a:headEnd/>
-            <a:tailEnd/>
-          </a:ln>
-        </p:spPr>
-      </p:pic>
-    </p:spTree>
-  </p:cSld>
-  <p:clrMapOvr>
-    <a:masterClrMapping/>
-  </p:clrMapOvr>
-</p:sld>
-</file>
-
-<file path=ppt/slides/slide26.xml><?xml version="1.0" encoding="utf-8"?>
+<file path=ppt/slides/slide27.xml><?xml version="1.0" encoding="utf-8"?>
 <p:sld xmlns:a="http://schemas.openxmlformats.org/drawingml/2006/main" xmlns:r="http://schemas.openxmlformats.org/officeDocument/2006/relationships" xmlns:p="http://schemas.openxmlformats.org/presentationml/2006/main">
   <p:cSld>
     <p:spTree>
@@ -6208,328 +7041,6 @@
 </p:sld>
 </file>
 
-<file path=ppt/slides/slide27.xml><?xml version="1.0" encoding="utf-8"?>
-<p:sld xmlns:a="http://schemas.openxmlformats.org/drawingml/2006/main" xmlns:r="http://schemas.openxmlformats.org/officeDocument/2006/relationships" xmlns:p="http://schemas.openxmlformats.org/presentationml/2006/main">
-  <p:cSld>
-    <p:spTree>
-      <p:nvGrpSpPr>
-        <p:cNvPr id="1" name=""/>
-        <p:cNvGrpSpPr/>
-        <p:nvPr/>
-      </p:nvGrpSpPr>
-      <p:grpSpPr>
-        <a:xfrm>
-          <a:off x="0" y="0"/>
-          <a:ext cx="0" cy="0"/>
-          <a:chOff x="0" y="0"/>
-          <a:chExt cx="0" cy="0"/>
-        </a:xfrm>
-      </p:grpSpPr>
-      <p:sp>
-        <p:nvSpPr>
-          <p:cNvPr id="2" name="Title 1"/>
-          <p:cNvSpPr>
-            <a:spLocks noGrp="1"/>
-          </p:cNvSpPr>
-          <p:nvPr>
-            <p:ph type="title"/>
-          </p:nvPr>
-        </p:nvSpPr>
-        <p:spPr/>
-        <p:txBody>
-          <a:bodyPr/>
-          <a:lstStyle/>
-          <a:p>
-            <a:r>
-              <a:rPr lang="en-US" dirty="0" smtClean="0"/>
-              <a:t>(ASP.NET) Session Storage</a:t>
-            </a:r>
-            <a:endParaRPr lang="en-US" dirty="0"/>
-          </a:p>
-        </p:txBody>
-      </p:sp>
-      <p:sp>
-        <p:nvSpPr>
-          <p:cNvPr id="3" name="Content Placeholder 2"/>
-          <p:cNvSpPr>
-            <a:spLocks noGrp="1"/>
-          </p:cNvSpPr>
-          <p:nvPr>
-            <p:ph idx="1"/>
-          </p:nvPr>
-        </p:nvSpPr>
-        <p:spPr/>
-        <p:txBody>
-          <a:bodyPr/>
-          <a:lstStyle/>
-          <a:p>
-            <a:r>
-              <a:rPr lang="en-US" sz="2600" i="1" dirty="0" smtClean="0">
-                <a:solidFill>
-                  <a:srgbClr val="C00000"/>
-                </a:solidFill>
-              </a:rPr>
-              <a:t>Machine key</a:t>
-            </a:r>
-            <a:r>
-              <a:rPr lang="en-US" sz="2600" dirty="0" smtClean="0"/>
-              <a:t> should be same for both servers: </a:t>
-            </a:r>
-            <a:r>
-              <a:rPr lang="en-US" sz="2600" u="sng" dirty="0" smtClean="0"/>
-              <a:t>View state</a:t>
-            </a:r>
-            <a:r>
-              <a:rPr lang="en-US" sz="2600" dirty="0" smtClean="0"/>
-              <a:t> and </a:t>
-            </a:r>
-            <a:r>
-              <a:rPr lang="en-US" sz="2600" u="sng" dirty="0" smtClean="0"/>
-              <a:t>session</a:t>
-            </a:r>
-            <a:r>
-              <a:rPr lang="en-US" sz="2600" dirty="0" smtClean="0"/>
-              <a:t> both </a:t>
-            </a:r>
-            <a:r>
-              <a:rPr lang="en-US" sz="2600" u="sng" dirty="0" smtClean="0"/>
-              <a:t>depend on</a:t>
-            </a:r>
-            <a:r>
-              <a:rPr lang="en-US" sz="2600" dirty="0" smtClean="0"/>
-              <a:t> the machine key.</a:t>
-            </a:r>
-          </a:p>
-          <a:p>
-            <a:r>
-              <a:rPr lang="en-US" sz="2600" dirty="0" smtClean="0"/>
-              <a:t>Session storage options:</a:t>
-            </a:r>
-          </a:p>
-          <a:p>
-            <a:pPr lvl="1"/>
-            <a:r>
-              <a:rPr lang="en-US" sz="2200" dirty="0" err="1" smtClean="0">
-                <a:latin typeface="Consolas" pitchFamily="49" charset="0"/>
-              </a:rPr>
-              <a:t>InProc</a:t>
-            </a:r>
-            <a:endParaRPr lang="en-US" sz="2200" dirty="0" smtClean="0">
-              <a:latin typeface="Consolas" pitchFamily="49" charset="0"/>
-            </a:endParaRPr>
-          </a:p>
-          <a:p>
-            <a:pPr lvl="1"/>
-            <a:r>
-              <a:rPr lang="en-US" sz="2200" dirty="0" err="1" smtClean="0">
-                <a:latin typeface="Consolas" pitchFamily="49" charset="0"/>
-              </a:rPr>
-              <a:t>StateServer</a:t>
-            </a:r>
-            <a:endParaRPr lang="en-US" sz="2200" dirty="0" smtClean="0">
-              <a:latin typeface="Consolas" pitchFamily="49" charset="0"/>
-            </a:endParaRPr>
-          </a:p>
-          <a:p>
-            <a:pPr lvl="1"/>
-            <a:r>
-              <a:rPr lang="en-US" sz="2200" b="1" dirty="0" err="1" smtClean="0">
-                <a:latin typeface="Consolas" pitchFamily="49" charset="0"/>
-              </a:rPr>
-              <a:t>SQLServer</a:t>
-            </a:r>
-            <a:endParaRPr lang="en-US" sz="2200" b="1" dirty="0" smtClean="0">
-              <a:latin typeface="Consolas" pitchFamily="49" charset="0"/>
-            </a:endParaRPr>
-          </a:p>
-        </p:txBody>
-      </p:sp>
-      <p:sp>
-        <p:nvSpPr>
-          <p:cNvPr id="4" name="Rectangle 3"/>
-          <p:cNvSpPr/>
-          <p:nvPr/>
-        </p:nvSpPr>
-        <p:spPr>
-          <a:xfrm>
-            <a:off x="533400" y="4495800"/>
-            <a:ext cx="7924800" cy="1754326"/>
-          </a:xfrm>
-          <a:prstGeom prst="rect">
-            <a:avLst/>
-          </a:prstGeom>
-        </p:spPr>
-        <p:style>
-          <a:lnRef idx="1">
-            <a:schemeClr val="dk1"/>
-          </a:lnRef>
-          <a:fillRef idx="2">
-            <a:schemeClr val="dk1"/>
-          </a:fillRef>
-          <a:effectRef idx="1">
-            <a:schemeClr val="dk1"/>
-          </a:effectRef>
-          <a:fontRef idx="minor">
-            <a:schemeClr val="dk1"/>
-          </a:fontRef>
-        </p:style>
-        <p:txBody>
-          <a:bodyPr wrap="square">
-            <a:spAutoFit/>
-          </a:bodyPr>
-          <a:lstStyle/>
-          <a:p>
-            <a:pPr>
-              <a:buNone/>
-            </a:pPr>
-            <a:r>
-              <a:rPr lang="en-US" dirty="0" smtClean="0">
-                <a:latin typeface="Consolas" pitchFamily="49" charset="0"/>
-              </a:rPr>
-              <a:t>&lt;system.web&gt;</a:t>
-            </a:r>
-          </a:p>
-          <a:p>
-            <a:pPr>
-              <a:buNone/>
-            </a:pPr>
-            <a:r>
-              <a:rPr lang="en-US" dirty="0" smtClean="0">
-                <a:latin typeface="Consolas" pitchFamily="49" charset="0"/>
-              </a:rPr>
-              <a:t>    &lt;</a:t>
-            </a:r>
-            <a:r>
-              <a:rPr lang="en-US" dirty="0" err="1" smtClean="0">
-                <a:latin typeface="Consolas" pitchFamily="49" charset="0"/>
-              </a:rPr>
-              <a:t>httpCookies</a:t>
-            </a:r>
-            <a:r>
-              <a:rPr lang="en-US" dirty="0" smtClean="0">
-                <a:latin typeface="Consolas" pitchFamily="49" charset="0"/>
-              </a:rPr>
-              <a:t> </a:t>
-            </a:r>
-            <a:r>
-              <a:rPr lang="en-US" dirty="0" err="1" smtClean="0">
-                <a:latin typeface="Consolas" pitchFamily="49" charset="0"/>
-              </a:rPr>
-              <a:t>requireSSL</a:t>
-            </a:r>
-            <a:r>
-              <a:rPr lang="en-US" dirty="0" smtClean="0">
-                <a:latin typeface="Consolas" pitchFamily="49" charset="0"/>
-              </a:rPr>
-              <a:t>="true" /&gt;</a:t>
-            </a:r>
-          </a:p>
-          <a:p>
-            <a:pPr>
-              <a:buNone/>
-            </a:pPr>
-            <a:r>
-              <a:rPr lang="en-US" dirty="0" smtClean="0">
-                <a:latin typeface="Consolas" pitchFamily="49" charset="0"/>
-              </a:rPr>
-              <a:t>    &lt;</a:t>
-            </a:r>
-            <a:r>
-              <a:rPr lang="en-US" dirty="0" err="1" smtClean="0">
-                <a:latin typeface="Consolas" pitchFamily="49" charset="0"/>
-              </a:rPr>
-              <a:t>machineKey</a:t>
-            </a:r>
-            <a:r>
-              <a:rPr lang="en-US" dirty="0" smtClean="0">
-                <a:latin typeface="Consolas" pitchFamily="49" charset="0"/>
-              </a:rPr>
-              <a:t> validation="SHA1" /&gt;</a:t>
-            </a:r>
-          </a:p>
-          <a:p>
-            <a:pPr>
-              <a:buNone/>
-            </a:pPr>
-            <a:r>
-              <a:rPr lang="en-US" dirty="0" smtClean="0">
-                <a:latin typeface="Consolas" pitchFamily="49" charset="0"/>
-              </a:rPr>
-              <a:t>    &lt;</a:t>
-            </a:r>
-            <a:r>
-              <a:rPr lang="en-US" dirty="0" err="1" smtClean="0">
-                <a:latin typeface="Consolas" pitchFamily="49" charset="0"/>
-              </a:rPr>
-              <a:t>sessionState</a:t>
-            </a:r>
-            <a:r>
-              <a:rPr lang="en-US" dirty="0" smtClean="0">
-                <a:latin typeface="Consolas" pitchFamily="49" charset="0"/>
-              </a:rPr>
-              <a:t> timeout="25" </a:t>
-            </a:r>
-            <a:r>
-              <a:rPr lang="en-US" dirty="0" err="1" smtClean="0">
-                <a:latin typeface="Consolas" pitchFamily="49" charset="0"/>
-              </a:rPr>
-              <a:t>cookieless</a:t>
-            </a:r>
-            <a:r>
-              <a:rPr lang="en-US" dirty="0" smtClean="0">
-                <a:latin typeface="Consolas" pitchFamily="49" charset="0"/>
-              </a:rPr>
-              <a:t>="false" </a:t>
-            </a:r>
-            <a:r>
-              <a:rPr lang="en-US" dirty="0" err="1" smtClean="0">
-                <a:latin typeface="Consolas" pitchFamily="49" charset="0"/>
-              </a:rPr>
-              <a:t>regenerateExpiredSessionId</a:t>
-            </a:r>
-            <a:r>
-              <a:rPr lang="en-US" dirty="0" smtClean="0">
-                <a:latin typeface="Consolas" pitchFamily="49" charset="0"/>
-              </a:rPr>
-              <a:t>="true" mode="</a:t>
-            </a:r>
-            <a:r>
-              <a:rPr lang="en-US" b="1" i="1" dirty="0" err="1" smtClean="0">
-                <a:solidFill>
-                  <a:srgbClr val="C00000"/>
-                </a:solidFill>
-                <a:latin typeface="Consolas" pitchFamily="49" charset="0"/>
-              </a:rPr>
-              <a:t>InProc</a:t>
-            </a:r>
-            <a:r>
-              <a:rPr lang="en-US" dirty="0" smtClean="0">
-                <a:latin typeface="Consolas" pitchFamily="49" charset="0"/>
-              </a:rPr>
-              <a:t>" /&gt;</a:t>
-            </a:r>
-          </a:p>
-          <a:p>
-            <a:pPr>
-              <a:buNone/>
-            </a:pPr>
-            <a:r>
-              <a:rPr lang="en-US" dirty="0" smtClean="0">
-                <a:latin typeface="Consolas" pitchFamily="49" charset="0"/>
-              </a:rPr>
-              <a:t>...</a:t>
-            </a:r>
-          </a:p>
-        </p:txBody>
-      </p:sp>
-    </p:spTree>
-  </p:cSld>
-  <p:clrMapOvr>
-    <a:masterClrMapping/>
-  </p:clrMapOvr>
-</p:sld>
-</file>
-
 <file path=ppt/slides/slide28.xml><?xml version="1.0" encoding="utf-8"?>
 <p:sld xmlns:a="http://schemas.openxmlformats.org/drawingml/2006/main" xmlns:r="http://schemas.openxmlformats.org/officeDocument/2006/relationships" xmlns:p="http://schemas.openxmlformats.org/presentationml/2006/main">
   <p:cSld>
@@ -6562,18 +7073,9 @@
           <a:bodyPr/>
           <a:lstStyle/>
           <a:p>
-            <a:pPr algn="l"/>
             <a:r>
               <a:rPr lang="en-US" dirty="0" smtClean="0"/>
-              <a:t>1. Create an SQL Server Database for </a:t>
-            </a:r>
-            <a:r>
-              <a:rPr lang="en-US" dirty="0" err="1" smtClean="0"/>
-              <a:t>SQLServer</a:t>
-            </a:r>
-            <a:r>
-              <a:rPr lang="en-US" dirty="0" smtClean="0"/>
-              <a:t> Session Mode</a:t>
+              <a:t>Scaling Out File Server</a:t>
             </a:r>
             <a:endParaRPr lang="en-US" dirty="0"/>
           </a:p>
@@ -6594,59 +7096,48 @@
           <a:bodyPr/>
           <a:lstStyle/>
           <a:p>
-            <a:pPr marL="342900" lvl="2" indent="-342900"/>
-            <a:r>
-              <a:rPr lang="en-US" sz="2200" b="1" dirty="0" smtClean="0"/>
-              <a:t>Run cmd.exe as Administrator</a:t>
-            </a:r>
-          </a:p>
-          <a:p>
-            <a:pPr marL="342900" lvl="2" indent="-342900"/>
-            <a:r>
-              <a:rPr lang="en-US" sz="2200" i="1" dirty="0" smtClean="0">
-                <a:latin typeface="Consolas" pitchFamily="49" charset="0"/>
-              </a:rPr>
-              <a:t>C:\Windows\Microsoft.NET\Framework\v4.0.30319\aspnet_regsql.exe -</a:t>
-            </a:r>
-            <a:r>
-              <a:rPr lang="en-US" sz="2200" i="1" dirty="0" err="1" smtClean="0">
-                <a:latin typeface="Consolas" pitchFamily="49" charset="0"/>
-              </a:rPr>
-              <a:t>ssadd</a:t>
-            </a:r>
-            <a:r>
-              <a:rPr lang="en-US" sz="2200" i="1" dirty="0" smtClean="0">
-                <a:latin typeface="Consolas" pitchFamily="49" charset="0"/>
-              </a:rPr>
-              <a:t> -</a:t>
-            </a:r>
-            <a:r>
-              <a:rPr lang="en-US" sz="2200" i="1" dirty="0" err="1" smtClean="0">
-                <a:latin typeface="Consolas" pitchFamily="49" charset="0"/>
-              </a:rPr>
-              <a:t>sstype</a:t>
-            </a:r>
-            <a:r>
-              <a:rPr lang="en-US" sz="2200" i="1" dirty="0" smtClean="0">
-                <a:latin typeface="Consolas" pitchFamily="49" charset="0"/>
-              </a:rPr>
-              <a:t> c -d apistate.example.com -S </a:t>
-            </a:r>
-            <a:r>
-              <a:rPr lang="en-US" sz="2200" i="1" dirty="0" err="1" smtClean="0">
-                <a:latin typeface="Consolas" pitchFamily="49" charset="0"/>
-              </a:rPr>
-              <a:t>localhost</a:t>
-            </a:r>
-            <a:r>
-              <a:rPr lang="en-US" sz="2200" i="1" dirty="0" smtClean="0">
-                <a:latin typeface="Consolas" pitchFamily="49" charset="0"/>
-              </a:rPr>
-              <a:t> –E</a:t>
-            </a:r>
-          </a:p>
-        </p:txBody>
-      </p:sp>
+            <a:r>
+              <a:rPr lang="en-US" sz="2200" dirty="0" smtClean="0">
+                <a:hlinkClick r:id="rId2"/>
+              </a:rPr>
+              <a:t>https://www.altaro.com/hyper-v/scale-out-file-server-hyper-v/</a:t>
+            </a:r>
+            <a:endParaRPr lang="en-US" sz="2200" dirty="0" smtClean="0"/>
+          </a:p>
+        </p:txBody>
+      </p:sp>
+      <p:pic>
+        <p:nvPicPr>
+          <p:cNvPr id="4" name="Picture 5"/>
+          <p:cNvPicPr>
+            <a:picLocks noChangeAspect="1" noChangeArrowheads="1"/>
+          </p:cNvPicPr>
+          <p:nvPr/>
+        </p:nvPicPr>
+        <p:blipFill>
+          <a:blip r:embed="rId3" cstate="print"/>
+          <a:srcRect/>
+          <a:stretch>
+            <a:fillRect/>
+          </a:stretch>
+        </p:blipFill>
+        <p:spPr bwMode="auto">
+          <a:xfrm>
+            <a:off x="2743200" y="2362200"/>
+            <a:ext cx="3825240" cy="3634740"/>
+          </a:xfrm>
+          <a:prstGeom prst="rect">
+            <a:avLst/>
+          </a:prstGeom>
+          <a:noFill/>
+          <a:ln w="9525">
+            <a:noFill/>
+            <a:miter lim="800000"/>
+            <a:headEnd/>
+            <a:tailEnd/>
+          </a:ln>
+        </p:spPr>
+      </p:pic>
     </p:spTree>
   </p:cSld>
   <p:clrMapOvr>
@@ -6672,299 +7163,32 @@
           <a:chExt cx="0" cy="0"/>
         </a:xfrm>
       </p:grpSpPr>
-      <p:sp>
-        <p:nvSpPr>
-          <p:cNvPr id="2" name="Title 1"/>
-          <p:cNvSpPr>
-            <a:spLocks noGrp="1"/>
-          </p:cNvSpPr>
-          <p:nvPr>
-            <p:ph type="title"/>
-          </p:nvPr>
-        </p:nvSpPr>
-        <p:spPr/>
-        <p:txBody>
-          <a:bodyPr/>
-          <a:lstStyle/>
-          <a:p>
-            <a:pPr algn="l"/>
-            <a:r>
-              <a:rPr lang="en-US" dirty="0" smtClean="0"/>
-              <a:t>2. Create a Connection String for </a:t>
-            </a:r>
-            <a:r>
-              <a:rPr lang="en-US" dirty="0" err="1" smtClean="0"/>
-              <a:t>SQLServer</a:t>
-            </a:r>
-            <a:r>
-              <a:rPr lang="en-US" dirty="0" smtClean="0"/>
-              <a:t> Session Mode</a:t>
-            </a:r>
-            <a:endParaRPr lang="en-US" dirty="0"/>
-          </a:p>
-        </p:txBody>
-      </p:sp>
-      <p:sp>
-        <p:nvSpPr>
-          <p:cNvPr id="3" name="Content Placeholder 2"/>
-          <p:cNvSpPr>
-            <a:spLocks noGrp="1"/>
-          </p:cNvSpPr>
-          <p:nvPr>
-            <p:ph idx="1"/>
-          </p:nvPr>
-        </p:nvSpPr>
-        <p:spPr/>
-        <p:txBody>
-          <a:bodyPr/>
-          <a:lstStyle/>
-          <a:p>
-            <a:r>
-              <a:rPr lang="en-US" sz="2400" dirty="0" smtClean="0">
-                <a:latin typeface="+mj-lt"/>
-              </a:rPr>
-              <a:t>Create </a:t>
-            </a:r>
-            <a:r>
-              <a:rPr lang="en-US" sz="2400" dirty="0" err="1" smtClean="0">
-                <a:latin typeface="+mj-lt"/>
-              </a:rPr>
-              <a:t>web.connectionStrings.config</a:t>
-            </a:r>
-            <a:r>
-              <a:rPr lang="en-US" sz="2400" dirty="0" smtClean="0">
-                <a:latin typeface="+mj-lt"/>
-              </a:rPr>
-              <a:t> file.</a:t>
-            </a:r>
-          </a:p>
-        </p:txBody>
-      </p:sp>
-      <p:sp>
-        <p:nvSpPr>
-          <p:cNvPr id="4" name="Rectangle 3"/>
-          <p:cNvSpPr/>
+      <p:pic>
+        <p:nvPicPr>
+          <p:cNvPr id="4" name="Picture 2" descr="https://lh3.ggpht.com/1IfZLL2QDSjZ0wS7sUhaMlsAOS8BBzdR3wZ1WawgRn7KZAM8nEVZYMOUM-lqQb0ikIzp=w300"/>
+          <p:cNvPicPr>
+            <a:picLocks noChangeAspect="1" noChangeArrowheads="1"/>
+          </p:cNvPicPr>
           <p:nvPr/>
-        </p:nvSpPr>
-        <p:spPr>
+        </p:nvPicPr>
+        <p:blipFill>
+          <a:blip r:embed="rId2" cstate="print"/>
+          <a:srcRect/>
+          <a:stretch>
+            <a:fillRect/>
+          </a:stretch>
+        </p:blipFill>
+        <p:spPr bwMode="auto">
           <a:xfrm>
-            <a:off x="533400" y="2438400"/>
-            <a:ext cx="7924800" cy="3139321"/>
+            <a:off x="3276600" y="1905000"/>
+            <a:ext cx="2857500" cy="2857500"/>
           </a:xfrm>
           <a:prstGeom prst="rect">
             <a:avLst/>
           </a:prstGeom>
+          <a:noFill/>
         </p:spPr>
-        <p:style>
-          <a:lnRef idx="1">
-            <a:schemeClr val="dk1"/>
-          </a:lnRef>
-          <a:fillRef idx="2">
-            <a:schemeClr val="dk1"/>
-          </a:fillRef>
-          <a:effectRef idx="1">
-            <a:schemeClr val="dk1"/>
-          </a:effectRef>
-          <a:fontRef idx="minor">
-            <a:schemeClr val="dk1"/>
-          </a:fontRef>
-        </p:style>
-        <p:txBody>
-          <a:bodyPr wrap="square">
-            <a:spAutoFit/>
-          </a:bodyPr>
-          <a:lstStyle/>
-          <a:p>
-            <a:pPr>
-              <a:buNone/>
-            </a:pPr>
-            <a:r>
-              <a:rPr lang="en-US" dirty="0" smtClean="0">
-                <a:latin typeface="Consolas" pitchFamily="49" charset="0"/>
-              </a:rPr>
-              <a:t>&lt;?xml version="1.0" ?&gt;</a:t>
-            </a:r>
-          </a:p>
-          <a:p>
-            <a:pPr>
-              <a:buNone/>
-            </a:pPr>
-            <a:r>
-              <a:rPr lang="en-US" dirty="0" smtClean="0">
-                <a:latin typeface="Consolas" pitchFamily="49" charset="0"/>
-              </a:rPr>
-              <a:t>  &lt;</a:t>
-            </a:r>
-            <a:r>
-              <a:rPr lang="en-US" dirty="0" err="1" smtClean="0">
-                <a:latin typeface="Consolas" pitchFamily="49" charset="0"/>
-              </a:rPr>
-              <a:t>connectionStrings</a:t>
-            </a:r>
-            <a:r>
-              <a:rPr lang="en-US" dirty="0" smtClean="0">
-                <a:latin typeface="Consolas" pitchFamily="49" charset="0"/>
-              </a:rPr>
-              <a:t>&gt;</a:t>
-            </a:r>
-          </a:p>
-          <a:p>
-            <a:pPr>
-              <a:buNone/>
-            </a:pPr>
-            <a:r>
-              <a:rPr lang="en-US" dirty="0" smtClean="0">
-                <a:latin typeface="Consolas" pitchFamily="49" charset="0"/>
-              </a:rPr>
-              <a:t>    &lt;clear /&gt;</a:t>
-            </a:r>
-          </a:p>
-          <a:p>
-            <a:pPr>
-              <a:buNone/>
-            </a:pPr>
-            <a:r>
-              <a:rPr lang="en-US" dirty="0" smtClean="0">
-                <a:latin typeface="Consolas" pitchFamily="49" charset="0"/>
-              </a:rPr>
-              <a:t>...</a:t>
-            </a:r>
-          </a:p>
-          <a:p>
-            <a:pPr>
-              <a:buNone/>
-            </a:pPr>
-            <a:r>
-              <a:rPr lang="en-US" dirty="0" smtClean="0">
-                <a:latin typeface="Consolas" pitchFamily="49" charset="0"/>
-              </a:rPr>
-              <a:t>    &lt;add name="</a:t>
-            </a:r>
-            <a:r>
-              <a:rPr lang="en-US" b="1" i="1" dirty="0" err="1" smtClean="0">
-                <a:solidFill>
-                  <a:srgbClr val="C00000"/>
-                </a:solidFill>
-                <a:latin typeface="Consolas" pitchFamily="49" charset="0"/>
-              </a:rPr>
-              <a:t>snsState</a:t>
-            </a:r>
-            <a:r>
-              <a:rPr lang="en-US" dirty="0" smtClean="0">
-                <a:latin typeface="Consolas" pitchFamily="49" charset="0"/>
-              </a:rPr>
-              <a:t>" </a:t>
-            </a:r>
-            <a:r>
-              <a:rPr lang="en-US" dirty="0" err="1" smtClean="0">
-                <a:latin typeface="Consolas" pitchFamily="49" charset="0"/>
-              </a:rPr>
-              <a:t>connectionString</a:t>
-            </a:r>
-            <a:r>
-              <a:rPr lang="en-US" dirty="0" smtClean="0">
-                <a:latin typeface="Consolas" pitchFamily="49" charset="0"/>
-              </a:rPr>
-              <a:t>="Data Source=192.168.101.62;Initial Catalog=</a:t>
-            </a:r>
-            <a:r>
-              <a:rPr lang="en-US" dirty="0" err="1" smtClean="0">
-                <a:latin typeface="Consolas" pitchFamily="49" charset="0"/>
-              </a:rPr>
-              <a:t>apistate.example.com;Persist</a:t>
-            </a:r>
-            <a:r>
-              <a:rPr lang="en-US" dirty="0" smtClean="0">
-                <a:latin typeface="Consolas" pitchFamily="49" charset="0"/>
-              </a:rPr>
-              <a:t> Security Info=</a:t>
-            </a:r>
-            <a:r>
-              <a:rPr lang="en-US" dirty="0" err="1" smtClean="0">
-                <a:latin typeface="Consolas" pitchFamily="49" charset="0"/>
-              </a:rPr>
-              <a:t>True;User</a:t>
-            </a:r>
-            <a:r>
-              <a:rPr lang="en-US" dirty="0" smtClean="0">
-                <a:latin typeface="Consolas" pitchFamily="49" charset="0"/>
-              </a:rPr>
-              <a:t> ID=</a:t>
-            </a:r>
-            <a:r>
-              <a:rPr lang="en-US" dirty="0" err="1" smtClean="0">
-                <a:latin typeface="Consolas" pitchFamily="49" charset="0"/>
-              </a:rPr>
-              <a:t>api.example.com;Password</a:t>
-            </a:r>
-            <a:r>
-              <a:rPr lang="en-US" dirty="0" smtClean="0">
-                <a:latin typeface="Consolas" pitchFamily="49" charset="0"/>
-              </a:rPr>
-              <a:t>=$%</a:t>
-            </a:r>
-            <a:r>
-              <a:rPr lang="en-US" dirty="0" err="1" smtClean="0">
-                <a:latin typeface="Consolas" pitchFamily="49" charset="0"/>
-              </a:rPr>
-              <a:t>Ym</a:t>
-            </a:r>
-            <a:r>
-              <a:rPr lang="en-US" dirty="0" smtClean="0">
-                <a:latin typeface="Consolas" pitchFamily="49" charset="0"/>
-              </a:rPr>
-              <a:t>*k3xtt4#bNNu;Connect Timeout=60;Min Pool Size=0;Max Pool Size=100;" </a:t>
-            </a:r>
-            <a:r>
-              <a:rPr lang="en-US" dirty="0" err="1" smtClean="0">
-                <a:latin typeface="Consolas" pitchFamily="49" charset="0"/>
-              </a:rPr>
-              <a:t>providerName</a:t>
-            </a:r>
-            <a:r>
-              <a:rPr lang="en-US" dirty="0" smtClean="0">
-                <a:latin typeface="Consolas" pitchFamily="49" charset="0"/>
-              </a:rPr>
-              <a:t>="</a:t>
-            </a:r>
-            <a:r>
-              <a:rPr lang="en-US" dirty="0" err="1" smtClean="0">
-                <a:latin typeface="Consolas" pitchFamily="49" charset="0"/>
-              </a:rPr>
-              <a:t>System.Data.SqlClient</a:t>
-            </a:r>
-            <a:r>
-              <a:rPr lang="en-US" dirty="0" smtClean="0">
-                <a:latin typeface="Consolas" pitchFamily="49" charset="0"/>
-              </a:rPr>
-              <a:t>" /&gt;</a:t>
-            </a:r>
-          </a:p>
-          <a:p>
-            <a:pPr>
-              <a:buNone/>
-            </a:pPr>
-            <a:r>
-              <a:rPr lang="en-US" dirty="0" smtClean="0">
-                <a:latin typeface="Consolas" pitchFamily="49" charset="0"/>
-              </a:rPr>
-              <a:t>  &lt;/</a:t>
-            </a:r>
-            <a:r>
-              <a:rPr lang="en-US" dirty="0" err="1" smtClean="0">
-                <a:latin typeface="Consolas" pitchFamily="49" charset="0"/>
-              </a:rPr>
-              <a:t>connectionStrings</a:t>
-            </a:r>
-            <a:r>
-              <a:rPr lang="en-US" dirty="0" smtClean="0">
-                <a:latin typeface="Consolas" pitchFamily="49" charset="0"/>
-              </a:rPr>
-              <a:t>&gt;</a:t>
-            </a:r>
-          </a:p>
-        </p:txBody>
-      </p:sp>
+      </p:pic>
     </p:spTree>
   </p:cSld>
   <p:clrMapOvr>
@@ -7108,1512 +7332,6 @@
           <a:chExt cx="0" cy="0"/>
         </a:xfrm>
       </p:grpSpPr>
-      <p:sp>
-        <p:nvSpPr>
-          <p:cNvPr id="2" name="Title 1"/>
-          <p:cNvSpPr>
-            <a:spLocks noGrp="1"/>
-          </p:cNvSpPr>
-          <p:nvPr>
-            <p:ph type="title"/>
-          </p:nvPr>
-        </p:nvSpPr>
-        <p:spPr/>
-        <p:txBody>
-          <a:bodyPr/>
-          <a:lstStyle/>
-          <a:p>
-            <a:pPr algn="l"/>
-            <a:r>
-              <a:rPr lang="en-US" dirty="0" smtClean="0"/>
-              <a:t>3. Enable </a:t>
-            </a:r>
-            <a:r>
-              <a:rPr lang="en-US" dirty="0" err="1" smtClean="0"/>
-              <a:t>SQLServer</a:t>
-            </a:r>
-            <a:r>
-              <a:rPr lang="en-US" dirty="0" smtClean="0"/>
-              <a:t> Session Mode</a:t>
-            </a:r>
-            <a:endParaRPr lang="en-US" dirty="0"/>
-          </a:p>
-        </p:txBody>
-      </p:sp>
-      <p:sp>
-        <p:nvSpPr>
-          <p:cNvPr id="3" name="Content Placeholder 2"/>
-          <p:cNvSpPr>
-            <a:spLocks noGrp="1"/>
-          </p:cNvSpPr>
-          <p:nvPr>
-            <p:ph idx="1"/>
-          </p:nvPr>
-        </p:nvSpPr>
-        <p:spPr/>
-        <p:txBody>
-          <a:bodyPr/>
-          <a:lstStyle/>
-          <a:p>
-            <a:r>
-              <a:rPr lang="en-US" sz="2200" dirty="0" smtClean="0">
-                <a:latin typeface="Consolas" pitchFamily="49" charset="0"/>
-              </a:rPr>
-              <a:t>&lt;</a:t>
-            </a:r>
-            <a:r>
-              <a:rPr lang="en-US" sz="2200" dirty="0" err="1" smtClean="0">
-                <a:latin typeface="Consolas" pitchFamily="49" charset="0"/>
-              </a:rPr>
-              <a:t>connectionStrings</a:t>
-            </a:r>
-            <a:r>
-              <a:rPr lang="en-US" sz="2200" dirty="0" smtClean="0">
-                <a:latin typeface="Consolas" pitchFamily="49" charset="0"/>
-              </a:rPr>
-              <a:t> </a:t>
-            </a:r>
-            <a:r>
-              <a:rPr lang="en-US" sz="2200" dirty="0" err="1" smtClean="0">
-                <a:latin typeface="Consolas" pitchFamily="49" charset="0"/>
-              </a:rPr>
-              <a:t>configSource</a:t>
-            </a:r>
-            <a:r>
-              <a:rPr lang="en-US" sz="2200" dirty="0" smtClean="0">
-                <a:latin typeface="Consolas" pitchFamily="49" charset="0"/>
-              </a:rPr>
-              <a:t>="</a:t>
-            </a:r>
-            <a:r>
-              <a:rPr lang="en-US" sz="2200" i="1" dirty="0" err="1" smtClean="0">
-                <a:solidFill>
-                  <a:srgbClr val="C00000"/>
-                </a:solidFill>
-                <a:latin typeface="Consolas" pitchFamily="49" charset="0"/>
-              </a:rPr>
-              <a:t>web.connectionStrings.config</a:t>
-            </a:r>
-            <a:r>
-              <a:rPr lang="en-US" sz="2200" dirty="0" smtClean="0">
-                <a:latin typeface="Consolas" pitchFamily="49" charset="0"/>
-              </a:rPr>
-              <a:t>" /&gt;</a:t>
-            </a:r>
-          </a:p>
-          <a:p>
-            <a:r>
-              <a:rPr lang="en-US" sz="2200" dirty="0" smtClean="0">
-                <a:latin typeface="Consolas" pitchFamily="49" charset="0"/>
-              </a:rPr>
-              <a:t>&lt;</a:t>
-            </a:r>
-            <a:r>
-              <a:rPr lang="en-US" sz="2200" dirty="0" err="1" smtClean="0">
-                <a:latin typeface="Consolas" pitchFamily="49" charset="0"/>
-              </a:rPr>
-              <a:t>sessionState</a:t>
-            </a:r>
-            <a:r>
-              <a:rPr lang="en-US" sz="2200" dirty="0" smtClean="0">
-                <a:latin typeface="Consolas" pitchFamily="49" charset="0"/>
-              </a:rPr>
-              <a:t> timeout="25" </a:t>
-            </a:r>
-            <a:r>
-              <a:rPr lang="en-US" sz="2200" dirty="0" err="1" smtClean="0">
-                <a:latin typeface="Consolas" pitchFamily="49" charset="0"/>
-              </a:rPr>
-              <a:t>cookieless</a:t>
-            </a:r>
-            <a:r>
-              <a:rPr lang="en-US" sz="2200" dirty="0" smtClean="0">
-                <a:latin typeface="Consolas" pitchFamily="49" charset="0"/>
-              </a:rPr>
-              <a:t>="false" </a:t>
-            </a:r>
-            <a:r>
-              <a:rPr lang="en-US" sz="2200" dirty="0" err="1" smtClean="0">
-                <a:latin typeface="Consolas" pitchFamily="49" charset="0"/>
-              </a:rPr>
-              <a:t>regenerateExpiredSessionId</a:t>
-            </a:r>
-            <a:r>
-              <a:rPr lang="en-US" sz="2200" dirty="0" smtClean="0">
-                <a:latin typeface="Consolas" pitchFamily="49" charset="0"/>
-              </a:rPr>
-              <a:t>="true" mode="</a:t>
-            </a:r>
-            <a:r>
-              <a:rPr lang="en-US" sz="2200" b="1" i="1" dirty="0" err="1" smtClean="0">
-                <a:solidFill>
-                  <a:srgbClr val="C00000"/>
-                </a:solidFill>
-                <a:latin typeface="Consolas" pitchFamily="49" charset="0"/>
-              </a:rPr>
-              <a:t>SQLServer</a:t>
-            </a:r>
-            <a:r>
-              <a:rPr lang="en-US" sz="2200" dirty="0" smtClean="0">
-                <a:latin typeface="Consolas" pitchFamily="49" charset="0"/>
-              </a:rPr>
-              <a:t>" </a:t>
-            </a:r>
-            <a:r>
-              <a:rPr lang="en-US" sz="2200" dirty="0" err="1" smtClean="0">
-                <a:latin typeface="Consolas" pitchFamily="49" charset="0"/>
-              </a:rPr>
-              <a:t>allowCustomSqlDatabase</a:t>
-            </a:r>
-            <a:r>
-              <a:rPr lang="en-US" sz="2200" dirty="0" smtClean="0">
-                <a:latin typeface="Consolas" pitchFamily="49" charset="0"/>
-              </a:rPr>
-              <a:t>="true" </a:t>
-            </a:r>
-            <a:r>
-              <a:rPr lang="en-US" sz="2200" dirty="0" err="1" smtClean="0">
-                <a:latin typeface="Consolas" pitchFamily="49" charset="0"/>
-              </a:rPr>
-              <a:t>sqlConnectionString</a:t>
-            </a:r>
-            <a:r>
-              <a:rPr lang="en-US" sz="2200" dirty="0" smtClean="0">
-                <a:latin typeface="Consolas" pitchFamily="49" charset="0"/>
-              </a:rPr>
-              <a:t>="</a:t>
-            </a:r>
-            <a:r>
-              <a:rPr lang="en-US" sz="2200" i="1" dirty="0" err="1" smtClean="0">
-                <a:solidFill>
-                  <a:srgbClr val="C00000"/>
-                </a:solidFill>
-                <a:latin typeface="Consolas" pitchFamily="49" charset="0"/>
-              </a:rPr>
-              <a:t>snsState</a:t>
-            </a:r>
-            <a:r>
-              <a:rPr lang="en-US" sz="2200" dirty="0" smtClean="0">
-                <a:latin typeface="Consolas" pitchFamily="49" charset="0"/>
-              </a:rPr>
-              <a:t>" /&gt;</a:t>
-            </a:r>
-          </a:p>
-        </p:txBody>
-      </p:sp>
-      <p:pic>
-        <p:nvPicPr>
-          <p:cNvPr id="2050" name="Picture 2"/>
-          <p:cNvPicPr>
-            <a:picLocks noChangeAspect="1" noChangeArrowheads="1"/>
-          </p:cNvPicPr>
-          <p:nvPr/>
-        </p:nvPicPr>
-        <p:blipFill>
-          <a:blip r:embed="rId2" cstate="print"/>
-          <a:srcRect/>
-          <a:stretch>
-            <a:fillRect/>
-          </a:stretch>
-        </p:blipFill>
-        <p:spPr bwMode="auto">
-          <a:xfrm>
-            <a:off x="1019175" y="4038600"/>
-            <a:ext cx="7105650" cy="2057400"/>
-          </a:xfrm>
-          <a:prstGeom prst="rect">
-            <a:avLst/>
-          </a:prstGeom>
-          <a:noFill/>
-          <a:ln w="9525">
-            <a:noFill/>
-            <a:miter lim="800000"/>
-            <a:headEnd/>
-            <a:tailEnd/>
-          </a:ln>
-        </p:spPr>
-      </p:pic>
-    </p:spTree>
-  </p:cSld>
-  <p:clrMapOvr>
-    <a:masterClrMapping/>
-  </p:clrMapOvr>
-</p:sld>
-</file>
-
-<file path=ppt/slides/slide31.xml><?xml version="1.0" encoding="utf-8"?>
-<p:sld xmlns:a="http://schemas.openxmlformats.org/drawingml/2006/main" xmlns:r="http://schemas.openxmlformats.org/officeDocument/2006/relationships" xmlns:p="http://schemas.openxmlformats.org/presentationml/2006/main">
-  <p:cSld>
-    <p:spTree>
-      <p:nvGrpSpPr>
-        <p:cNvPr id="1" name=""/>
-        <p:cNvGrpSpPr/>
-        <p:nvPr/>
-      </p:nvGrpSpPr>
-      <p:grpSpPr>
-        <a:xfrm>
-          <a:off x="0" y="0"/>
-          <a:ext cx="0" cy="0"/>
-          <a:chOff x="0" y="0"/>
-          <a:chExt cx="0" cy="0"/>
-        </a:xfrm>
-      </p:grpSpPr>
-      <p:pic>
-        <p:nvPicPr>
-          <p:cNvPr id="4" name="Picture 2" descr="https://lh3.ggpht.com/1IfZLL2QDSjZ0wS7sUhaMlsAOS8BBzdR3wZ1WawgRn7KZAM8nEVZYMOUM-lqQb0ikIzp=w300"/>
-          <p:cNvPicPr>
-            <a:picLocks noChangeAspect="1" noChangeArrowheads="1"/>
-          </p:cNvPicPr>
-          <p:nvPr/>
-        </p:nvPicPr>
-        <p:blipFill>
-          <a:blip r:embed="rId2" cstate="print"/>
-          <a:srcRect/>
-          <a:stretch>
-            <a:fillRect/>
-          </a:stretch>
-        </p:blipFill>
-        <p:spPr bwMode="auto">
-          <a:xfrm>
-            <a:off x="3276600" y="1905000"/>
-            <a:ext cx="2857500" cy="2857500"/>
-          </a:xfrm>
-          <a:prstGeom prst="rect">
-            <a:avLst/>
-          </a:prstGeom>
-          <a:noFill/>
-        </p:spPr>
-      </p:pic>
-    </p:spTree>
-  </p:cSld>
-  <p:clrMapOvr>
-    <a:masterClrMapping/>
-  </p:clrMapOvr>
-</p:sld>
-</file>
-
-<file path=ppt/slides/slide32.xml><?xml version="1.0" encoding="utf-8"?>
-<p:sld xmlns:a="http://schemas.openxmlformats.org/drawingml/2006/main" xmlns:r="http://schemas.openxmlformats.org/officeDocument/2006/relationships" xmlns:p="http://schemas.openxmlformats.org/presentationml/2006/main">
-  <p:cSld>
-    <p:spTree>
-      <p:nvGrpSpPr>
-        <p:cNvPr id="1" name=""/>
-        <p:cNvGrpSpPr/>
-        <p:nvPr/>
-      </p:nvGrpSpPr>
-      <p:grpSpPr>
-        <a:xfrm>
-          <a:off x="0" y="0"/>
-          <a:ext cx="0" cy="0"/>
-          <a:chOff x="0" y="0"/>
-          <a:chExt cx="0" cy="0"/>
-        </a:xfrm>
-      </p:grpSpPr>
-      <p:sp>
-        <p:nvSpPr>
-          <p:cNvPr id="2" name="Title 1"/>
-          <p:cNvSpPr>
-            <a:spLocks noGrp="1"/>
-          </p:cNvSpPr>
-          <p:nvPr>
-            <p:ph type="title"/>
-          </p:nvPr>
-        </p:nvSpPr>
-        <p:spPr/>
-        <p:txBody>
-          <a:bodyPr/>
-          <a:lstStyle/>
-          <a:p>
-            <a:pPr algn="l"/>
-            <a:r>
-              <a:rPr lang="en-US" sz="3800" dirty="0" smtClean="0"/>
-              <a:t>1. Enable State Service Remote Connection</a:t>
-            </a:r>
-            <a:endParaRPr lang="en-US" sz="3800" dirty="0"/>
-          </a:p>
-        </p:txBody>
-      </p:sp>
-      <p:sp>
-        <p:nvSpPr>
-          <p:cNvPr id="3" name="Content Placeholder 2"/>
-          <p:cNvSpPr>
-            <a:spLocks noGrp="1"/>
-          </p:cNvSpPr>
-          <p:nvPr>
-            <p:ph idx="1"/>
-          </p:nvPr>
-        </p:nvSpPr>
-        <p:spPr/>
-        <p:txBody>
-          <a:bodyPr/>
-          <a:lstStyle/>
-          <a:p>
-            <a:r>
-              <a:rPr lang="en-US" sz="2200" dirty="0" smtClean="0">
-                <a:latin typeface="Consolas" pitchFamily="49" charset="0"/>
-              </a:rPr>
-              <a:t>HKEY_LOCAL_MACHINE\SYSTEM\</a:t>
-            </a:r>
-            <a:r>
-              <a:rPr lang="en-US" sz="2200" dirty="0" err="1" smtClean="0">
-                <a:latin typeface="Consolas" pitchFamily="49" charset="0"/>
-              </a:rPr>
-              <a:t>CurrentControlSet</a:t>
-            </a:r>
-            <a:r>
-              <a:rPr lang="en-US" sz="2200" dirty="0" smtClean="0">
-                <a:latin typeface="Consolas" pitchFamily="49" charset="0"/>
-              </a:rPr>
-              <a:t>\Services\</a:t>
-            </a:r>
-            <a:r>
-              <a:rPr lang="en-US" sz="2200" dirty="0" err="1" smtClean="0">
-                <a:latin typeface="Consolas" pitchFamily="49" charset="0"/>
-              </a:rPr>
-              <a:t>aspnet_state</a:t>
-            </a:r>
-            <a:r>
-              <a:rPr lang="en-US" sz="2200" dirty="0" smtClean="0">
-                <a:latin typeface="Consolas" pitchFamily="49" charset="0"/>
-              </a:rPr>
-              <a:t>\Parameters\</a:t>
-            </a:r>
-            <a:r>
-              <a:rPr lang="en-US" sz="2200" dirty="0" err="1" smtClean="0">
-                <a:latin typeface="Consolas" pitchFamily="49" charset="0"/>
-              </a:rPr>
-              <a:t>AllowRemoteConnection</a:t>
-            </a:r>
-            <a:endParaRPr lang="en-US" sz="2200" dirty="0">
-              <a:latin typeface="Consolas" pitchFamily="49" charset="0"/>
-            </a:endParaRPr>
-          </a:p>
-        </p:txBody>
-      </p:sp>
-      <p:pic>
-        <p:nvPicPr>
-          <p:cNvPr id="2050" name="Picture 2"/>
-          <p:cNvPicPr>
-            <a:picLocks noChangeAspect="1" noChangeArrowheads="1"/>
-          </p:cNvPicPr>
-          <p:nvPr/>
-        </p:nvPicPr>
-        <p:blipFill>
-          <a:blip r:embed="rId2" cstate="print"/>
-          <a:srcRect/>
-          <a:stretch>
-            <a:fillRect/>
-          </a:stretch>
-        </p:blipFill>
-        <p:spPr bwMode="auto">
-          <a:xfrm>
-            <a:off x="1371600" y="2667000"/>
-            <a:ext cx="6390640" cy="3220720"/>
-          </a:xfrm>
-          <a:prstGeom prst="rect">
-            <a:avLst/>
-          </a:prstGeom>
-          <a:noFill/>
-          <a:ln w="9525">
-            <a:noFill/>
-            <a:miter lim="800000"/>
-            <a:headEnd/>
-            <a:tailEnd/>
-          </a:ln>
-        </p:spPr>
-      </p:pic>
-    </p:spTree>
-  </p:cSld>
-  <p:clrMapOvr>
-    <a:masterClrMapping/>
-  </p:clrMapOvr>
-</p:sld>
-</file>
-
-<file path=ppt/slides/slide33.xml><?xml version="1.0" encoding="utf-8"?>
-<p:sld xmlns:a="http://schemas.openxmlformats.org/drawingml/2006/main" xmlns:r="http://schemas.openxmlformats.org/officeDocument/2006/relationships" xmlns:p="http://schemas.openxmlformats.org/presentationml/2006/main">
-  <p:cSld>
-    <p:spTree>
-      <p:nvGrpSpPr>
-        <p:cNvPr id="1" name=""/>
-        <p:cNvGrpSpPr/>
-        <p:nvPr/>
-      </p:nvGrpSpPr>
-      <p:grpSpPr>
-        <a:xfrm>
-          <a:off x="0" y="0"/>
-          <a:ext cx="0" cy="0"/>
-          <a:chOff x="0" y="0"/>
-          <a:chExt cx="0" cy="0"/>
-        </a:xfrm>
-      </p:grpSpPr>
-      <p:sp>
-        <p:nvSpPr>
-          <p:cNvPr id="2" name="Title 1"/>
-          <p:cNvSpPr>
-            <a:spLocks noGrp="1"/>
-          </p:cNvSpPr>
-          <p:nvPr>
-            <p:ph type="title"/>
-          </p:nvPr>
-        </p:nvSpPr>
-        <p:spPr/>
-        <p:txBody>
-          <a:bodyPr/>
-          <a:lstStyle/>
-          <a:p>
-            <a:pPr algn="l"/>
-            <a:r>
-              <a:rPr lang="en-US" dirty="0" smtClean="0"/>
-              <a:t>2. Open State Service Firewall Port</a:t>
-            </a:r>
-            <a:endParaRPr lang="en-US" dirty="0"/>
-          </a:p>
-        </p:txBody>
-      </p:sp>
-      <p:sp>
-        <p:nvSpPr>
-          <p:cNvPr id="3" name="Content Placeholder 2"/>
-          <p:cNvSpPr>
-            <a:spLocks noGrp="1"/>
-          </p:cNvSpPr>
-          <p:nvPr>
-            <p:ph idx="1"/>
-          </p:nvPr>
-        </p:nvSpPr>
-        <p:spPr/>
-        <p:txBody>
-          <a:bodyPr/>
-          <a:lstStyle/>
-          <a:p>
-            <a:r>
-              <a:rPr lang="en-US" sz="2200" dirty="0" smtClean="0">
-                <a:latin typeface="+mj-lt"/>
-              </a:rPr>
-              <a:t>Port: </a:t>
-            </a:r>
-            <a:r>
-              <a:rPr lang="en-US" sz="2200" b="1" dirty="0" smtClean="0">
-                <a:latin typeface="+mj-lt"/>
-              </a:rPr>
-              <a:t>42424</a:t>
-            </a:r>
-            <a:endParaRPr lang="en-US" sz="2200" b="1" dirty="0">
-              <a:latin typeface="+mj-lt"/>
-            </a:endParaRPr>
-          </a:p>
-        </p:txBody>
-      </p:sp>
-      <p:pic>
-        <p:nvPicPr>
-          <p:cNvPr id="3074" name="Picture 2"/>
-          <p:cNvPicPr>
-            <a:picLocks noChangeAspect="1" noChangeArrowheads="1"/>
-          </p:cNvPicPr>
-          <p:nvPr/>
-        </p:nvPicPr>
-        <p:blipFill>
-          <a:blip r:embed="rId2" cstate="print"/>
-          <a:srcRect/>
-          <a:stretch>
-            <a:fillRect/>
-          </a:stretch>
-        </p:blipFill>
-        <p:spPr bwMode="auto">
-          <a:xfrm>
-            <a:off x="914400" y="2743200"/>
-            <a:ext cx="7287260" cy="3200400"/>
-          </a:xfrm>
-          <a:prstGeom prst="rect">
-            <a:avLst/>
-          </a:prstGeom>
-          <a:noFill/>
-          <a:ln w="9525">
-            <a:noFill/>
-            <a:miter lim="800000"/>
-            <a:headEnd/>
-            <a:tailEnd/>
-          </a:ln>
-        </p:spPr>
-      </p:pic>
-    </p:spTree>
-  </p:cSld>
-  <p:clrMapOvr>
-    <a:masterClrMapping/>
-  </p:clrMapOvr>
-</p:sld>
-</file>
-
-<file path=ppt/slides/slide34.xml><?xml version="1.0" encoding="utf-8"?>
-<p:sld xmlns:a="http://schemas.openxmlformats.org/drawingml/2006/main" xmlns:r="http://schemas.openxmlformats.org/officeDocument/2006/relationships" xmlns:p="http://schemas.openxmlformats.org/presentationml/2006/main">
-  <p:cSld>
-    <p:spTree>
-      <p:nvGrpSpPr>
-        <p:cNvPr id="1" name=""/>
-        <p:cNvGrpSpPr/>
-        <p:nvPr/>
-      </p:nvGrpSpPr>
-      <p:grpSpPr>
-        <a:xfrm>
-          <a:off x="0" y="0"/>
-          <a:ext cx="0" cy="0"/>
-          <a:chOff x="0" y="0"/>
-          <a:chExt cx="0" cy="0"/>
-        </a:xfrm>
-      </p:grpSpPr>
-      <p:sp>
-        <p:nvSpPr>
-          <p:cNvPr id="2" name="Title 1"/>
-          <p:cNvSpPr>
-            <a:spLocks noGrp="1"/>
-          </p:cNvSpPr>
-          <p:nvPr>
-            <p:ph type="title"/>
-          </p:nvPr>
-        </p:nvSpPr>
-        <p:spPr/>
-        <p:txBody>
-          <a:bodyPr/>
-          <a:lstStyle/>
-          <a:p>
-            <a:pPr algn="l"/>
-            <a:r>
-              <a:rPr lang="en-US" dirty="0" smtClean="0"/>
-              <a:t>3. Start Session State Service</a:t>
-            </a:r>
-            <a:endParaRPr lang="en-US" dirty="0"/>
-          </a:p>
-        </p:txBody>
-      </p:sp>
-      <p:sp>
-        <p:nvSpPr>
-          <p:cNvPr id="3" name="Content Placeholder 2"/>
-          <p:cNvSpPr>
-            <a:spLocks noGrp="1"/>
-          </p:cNvSpPr>
-          <p:nvPr>
-            <p:ph idx="1"/>
-          </p:nvPr>
-        </p:nvSpPr>
-        <p:spPr/>
-        <p:txBody>
-          <a:bodyPr/>
-          <a:lstStyle/>
-          <a:p>
-            <a:r>
-              <a:rPr lang="en-US" sz="2400" dirty="0" smtClean="0">
-                <a:latin typeface="Consolas" pitchFamily="49" charset="0"/>
-              </a:rPr>
-              <a:t>net start </a:t>
-            </a:r>
-            <a:r>
-              <a:rPr lang="en-US" sz="2400" dirty="0" err="1" smtClean="0">
-                <a:latin typeface="Consolas" pitchFamily="49" charset="0"/>
-              </a:rPr>
-              <a:t>aspnet_state</a:t>
-            </a:r>
-            <a:endParaRPr lang="en-US" sz="2400" dirty="0">
-              <a:latin typeface="Consolas" pitchFamily="49" charset="0"/>
-            </a:endParaRPr>
-          </a:p>
-        </p:txBody>
-      </p:sp>
-      <p:pic>
-        <p:nvPicPr>
-          <p:cNvPr id="1027" name="Picture 3"/>
-          <p:cNvPicPr>
-            <a:picLocks noChangeAspect="1" noChangeArrowheads="1"/>
-          </p:cNvPicPr>
-          <p:nvPr/>
-        </p:nvPicPr>
-        <p:blipFill>
-          <a:blip r:embed="rId2" cstate="print"/>
-          <a:srcRect/>
-          <a:stretch>
-            <a:fillRect/>
-          </a:stretch>
-        </p:blipFill>
-        <p:spPr bwMode="auto">
-          <a:xfrm>
-            <a:off x="439738" y="2593975"/>
-            <a:ext cx="8264525" cy="2968625"/>
-          </a:xfrm>
-          <a:prstGeom prst="rect">
-            <a:avLst/>
-          </a:prstGeom>
-          <a:noFill/>
-          <a:ln w="9525">
-            <a:noFill/>
-            <a:miter lim="800000"/>
-            <a:headEnd/>
-            <a:tailEnd/>
-          </a:ln>
-        </p:spPr>
-      </p:pic>
-    </p:spTree>
-  </p:cSld>
-  <p:clrMapOvr>
-    <a:masterClrMapping/>
-  </p:clrMapOvr>
-</p:sld>
-</file>
-
-<file path=ppt/slides/slide35.xml><?xml version="1.0" encoding="utf-8"?>
-<p:sld xmlns:a="http://schemas.openxmlformats.org/drawingml/2006/main" xmlns:r="http://schemas.openxmlformats.org/officeDocument/2006/relationships" xmlns:p="http://schemas.openxmlformats.org/presentationml/2006/main">
-  <p:cSld>
-    <p:spTree>
-      <p:nvGrpSpPr>
-        <p:cNvPr id="1" name=""/>
-        <p:cNvGrpSpPr/>
-        <p:nvPr/>
-      </p:nvGrpSpPr>
-      <p:grpSpPr>
-        <a:xfrm>
-          <a:off x="0" y="0"/>
-          <a:ext cx="0" cy="0"/>
-          <a:chOff x="0" y="0"/>
-          <a:chExt cx="0" cy="0"/>
-        </a:xfrm>
-      </p:grpSpPr>
-      <p:sp>
-        <p:nvSpPr>
-          <p:cNvPr id="2" name="Title 1"/>
-          <p:cNvSpPr>
-            <a:spLocks noGrp="1"/>
-          </p:cNvSpPr>
-          <p:nvPr>
-            <p:ph type="title"/>
-          </p:nvPr>
-        </p:nvSpPr>
-        <p:spPr/>
-        <p:txBody>
-          <a:bodyPr/>
-          <a:lstStyle/>
-          <a:p>
-            <a:pPr algn="l"/>
-            <a:r>
-              <a:rPr lang="en-US" sz="4200" dirty="0" smtClean="0"/>
-              <a:t>4. Enable </a:t>
-            </a:r>
-            <a:r>
-              <a:rPr lang="en-US" sz="4200" dirty="0" err="1" smtClean="0"/>
-              <a:t>StateServer</a:t>
-            </a:r>
-            <a:r>
-              <a:rPr lang="en-US" sz="4200" dirty="0" smtClean="0"/>
-              <a:t> Session Mode</a:t>
-            </a:r>
-            <a:endParaRPr lang="en-US" sz="4200" dirty="0"/>
-          </a:p>
-        </p:txBody>
-      </p:sp>
-      <p:sp>
-        <p:nvSpPr>
-          <p:cNvPr id="4" name="Rectangle 3"/>
-          <p:cNvSpPr/>
-          <p:nvPr/>
-        </p:nvSpPr>
-        <p:spPr>
-          <a:xfrm>
-            <a:off x="533400" y="2438400"/>
-            <a:ext cx="7924800" cy="2554545"/>
-          </a:xfrm>
-          <a:prstGeom prst="rect">
-            <a:avLst/>
-          </a:prstGeom>
-        </p:spPr>
-        <p:style>
-          <a:lnRef idx="1">
-            <a:schemeClr val="dk1"/>
-          </a:lnRef>
-          <a:fillRef idx="2">
-            <a:schemeClr val="dk1"/>
-          </a:fillRef>
-          <a:effectRef idx="1">
-            <a:schemeClr val="dk1"/>
-          </a:effectRef>
-          <a:fontRef idx="minor">
-            <a:schemeClr val="dk1"/>
-          </a:fontRef>
-        </p:style>
-        <p:txBody>
-          <a:bodyPr wrap="square">
-            <a:spAutoFit/>
-          </a:bodyPr>
-          <a:lstStyle/>
-          <a:p>
-            <a:pPr>
-              <a:buNone/>
-            </a:pPr>
-            <a:r>
-              <a:rPr lang="en-US" sz="2000" dirty="0" smtClean="0">
-                <a:latin typeface="Consolas" pitchFamily="49" charset="0"/>
-              </a:rPr>
-              <a:t> &lt;system.web&gt;</a:t>
-            </a:r>
-          </a:p>
-          <a:p>
-            <a:pPr>
-              <a:buNone/>
-            </a:pPr>
-            <a:r>
-              <a:rPr lang="en-US" sz="2000" dirty="0" smtClean="0">
-                <a:latin typeface="Consolas" pitchFamily="49" charset="0"/>
-              </a:rPr>
-              <a:t>    &lt;</a:t>
-            </a:r>
-            <a:r>
-              <a:rPr lang="en-US" sz="2000" dirty="0" err="1" smtClean="0">
-                <a:latin typeface="Consolas" pitchFamily="49" charset="0"/>
-              </a:rPr>
-              <a:t>httpCookies</a:t>
-            </a:r>
-            <a:r>
-              <a:rPr lang="en-US" sz="2000" dirty="0" smtClean="0">
-                <a:latin typeface="Consolas" pitchFamily="49" charset="0"/>
-              </a:rPr>
-              <a:t> </a:t>
-            </a:r>
-            <a:r>
-              <a:rPr lang="en-US" sz="2000" dirty="0" err="1" smtClean="0">
-                <a:latin typeface="Consolas" pitchFamily="49" charset="0"/>
-              </a:rPr>
-              <a:t>requireSSL</a:t>
-            </a:r>
-            <a:r>
-              <a:rPr lang="en-US" sz="2000" dirty="0" smtClean="0">
-                <a:latin typeface="Consolas" pitchFamily="49" charset="0"/>
-              </a:rPr>
-              <a:t>="true" /&gt;</a:t>
-            </a:r>
-          </a:p>
-          <a:p>
-            <a:pPr>
-              <a:buNone/>
-            </a:pPr>
-            <a:r>
-              <a:rPr lang="en-US" sz="2000" dirty="0" smtClean="0">
-                <a:latin typeface="Consolas" pitchFamily="49" charset="0"/>
-              </a:rPr>
-              <a:t>    &lt;</a:t>
-            </a:r>
-            <a:r>
-              <a:rPr lang="en-US" sz="2000" dirty="0" err="1" smtClean="0">
-                <a:latin typeface="Consolas" pitchFamily="49" charset="0"/>
-              </a:rPr>
-              <a:t>machineKey</a:t>
-            </a:r>
-            <a:r>
-              <a:rPr lang="en-US" sz="2000" dirty="0" smtClean="0">
-                <a:latin typeface="Consolas" pitchFamily="49" charset="0"/>
-              </a:rPr>
-              <a:t> validation="SHA1" /&gt;</a:t>
-            </a:r>
-          </a:p>
-          <a:p>
-            <a:pPr>
-              <a:buNone/>
-            </a:pPr>
-            <a:r>
-              <a:rPr lang="en-US" sz="2000" dirty="0" smtClean="0">
-                <a:latin typeface="Consolas" pitchFamily="49" charset="0"/>
-              </a:rPr>
-              <a:t>    &lt;</a:t>
-            </a:r>
-            <a:r>
-              <a:rPr lang="en-US" sz="2000" dirty="0" err="1" smtClean="0">
-                <a:latin typeface="Consolas" pitchFamily="49" charset="0"/>
-              </a:rPr>
-              <a:t>sessionState</a:t>
-            </a:r>
-            <a:r>
-              <a:rPr lang="en-US" sz="2000" dirty="0" smtClean="0">
-                <a:latin typeface="Consolas" pitchFamily="49" charset="0"/>
-              </a:rPr>
-              <a:t> timeout="25" </a:t>
-            </a:r>
-            <a:r>
-              <a:rPr lang="en-US" sz="2000" dirty="0" err="1" smtClean="0">
-                <a:latin typeface="Consolas" pitchFamily="49" charset="0"/>
-              </a:rPr>
-              <a:t>cookieless</a:t>
-            </a:r>
-            <a:r>
-              <a:rPr lang="en-US" sz="2000" dirty="0" smtClean="0">
-                <a:latin typeface="Consolas" pitchFamily="49" charset="0"/>
-              </a:rPr>
-              <a:t>="false" </a:t>
-            </a:r>
-            <a:r>
-              <a:rPr lang="en-US" sz="2000" dirty="0" err="1" smtClean="0">
-                <a:latin typeface="Consolas" pitchFamily="49" charset="0"/>
-              </a:rPr>
-              <a:t>regenerateExpiredSessionId</a:t>
-            </a:r>
-            <a:r>
-              <a:rPr lang="en-US" sz="2000" dirty="0" smtClean="0">
-                <a:latin typeface="Consolas" pitchFamily="49" charset="0"/>
-              </a:rPr>
-              <a:t>="true" mode="</a:t>
-            </a:r>
-            <a:r>
-              <a:rPr lang="en-US" sz="2000" b="1" dirty="0" err="1" smtClean="0">
-                <a:solidFill>
-                  <a:srgbClr val="C00000"/>
-                </a:solidFill>
-                <a:latin typeface="Consolas" pitchFamily="49" charset="0"/>
-              </a:rPr>
-              <a:t>StateServer</a:t>
-            </a:r>
-            <a:r>
-              <a:rPr lang="en-US" sz="2000" dirty="0" smtClean="0">
-                <a:latin typeface="Consolas" pitchFamily="49" charset="0"/>
-              </a:rPr>
-              <a:t>" </a:t>
-            </a:r>
-            <a:r>
-              <a:rPr lang="en-US" sz="2000" dirty="0" err="1" smtClean="0">
-                <a:latin typeface="Consolas" pitchFamily="49" charset="0"/>
-              </a:rPr>
-              <a:t>stateConnectionString</a:t>
-            </a:r>
-            <a:r>
-              <a:rPr lang="en-US" sz="2000" dirty="0" smtClean="0">
-                <a:latin typeface="Consolas" pitchFamily="49" charset="0"/>
-              </a:rPr>
-              <a:t>="</a:t>
-            </a:r>
-            <a:r>
-              <a:rPr lang="en-US" sz="2000" dirty="0" err="1" smtClean="0">
-                <a:latin typeface="Consolas" pitchFamily="49" charset="0"/>
-              </a:rPr>
-              <a:t>tcpip</a:t>
-            </a:r>
-            <a:r>
-              <a:rPr lang="en-US" sz="2000" dirty="0" smtClean="0">
-                <a:latin typeface="Consolas" pitchFamily="49" charset="0"/>
-              </a:rPr>
-              <a:t>=192.168.101.120:42424" </a:t>
-            </a:r>
-            <a:r>
-              <a:rPr lang="en-US" sz="2000" dirty="0" err="1" smtClean="0">
-                <a:latin typeface="Consolas" pitchFamily="49" charset="0"/>
-              </a:rPr>
-              <a:t>stateNetworkTimeout</a:t>
-            </a:r>
-            <a:r>
-              <a:rPr lang="en-US" sz="2000" dirty="0" smtClean="0">
-                <a:latin typeface="Consolas" pitchFamily="49" charset="0"/>
-              </a:rPr>
-              <a:t>="60" </a:t>
-            </a:r>
-            <a:r>
-              <a:rPr lang="en-US" sz="2000" dirty="0" err="1" smtClean="0">
-                <a:latin typeface="Consolas" pitchFamily="49" charset="0"/>
-              </a:rPr>
-              <a:t>useHostingIdentity</a:t>
-            </a:r>
-            <a:r>
-              <a:rPr lang="en-US" sz="2000" dirty="0" smtClean="0">
-                <a:latin typeface="Consolas" pitchFamily="49" charset="0"/>
-              </a:rPr>
-              <a:t>="false" /&gt;</a:t>
-            </a:r>
-          </a:p>
-          <a:p>
-            <a:pPr>
-              <a:buNone/>
-            </a:pPr>
-            <a:r>
-              <a:rPr lang="en-US" sz="2000" dirty="0" smtClean="0">
-                <a:latin typeface="Consolas" pitchFamily="49" charset="0"/>
-              </a:rPr>
-              <a:t>...</a:t>
-            </a:r>
-          </a:p>
-        </p:txBody>
-      </p:sp>
-    </p:spTree>
-  </p:cSld>
-  <p:clrMapOvr>
-    <a:masterClrMapping/>
-  </p:clrMapOvr>
-</p:sld>
-</file>
-
-<file path=ppt/slides/slide36.xml><?xml version="1.0" encoding="utf-8"?>
-<p:sld xmlns:a="http://schemas.openxmlformats.org/drawingml/2006/main" xmlns:r="http://schemas.openxmlformats.org/officeDocument/2006/relationships" xmlns:p="http://schemas.openxmlformats.org/presentationml/2006/main">
-  <p:cSld>
-    <p:spTree>
-      <p:nvGrpSpPr>
-        <p:cNvPr id="1" name=""/>
-        <p:cNvGrpSpPr/>
-        <p:nvPr/>
-      </p:nvGrpSpPr>
-      <p:grpSpPr>
-        <a:xfrm>
-          <a:off x="0" y="0"/>
-          <a:ext cx="0" cy="0"/>
-          <a:chOff x="0" y="0"/>
-          <a:chExt cx="0" cy="0"/>
-        </a:xfrm>
-      </p:grpSpPr>
-      <p:pic>
-        <p:nvPicPr>
-          <p:cNvPr id="4" name="Picture 2" descr="https://lh3.ggpht.com/1IfZLL2QDSjZ0wS7sUhaMlsAOS8BBzdR3wZ1WawgRn7KZAM8nEVZYMOUM-lqQb0ikIzp=w300"/>
-          <p:cNvPicPr>
-            <a:picLocks noChangeAspect="1" noChangeArrowheads="1"/>
-          </p:cNvPicPr>
-          <p:nvPr/>
-        </p:nvPicPr>
-        <p:blipFill>
-          <a:blip r:embed="rId2" cstate="print"/>
-          <a:srcRect/>
-          <a:stretch>
-            <a:fillRect/>
-          </a:stretch>
-        </p:blipFill>
-        <p:spPr bwMode="auto">
-          <a:xfrm>
-            <a:off x="3276600" y="1905000"/>
-            <a:ext cx="2857500" cy="2857500"/>
-          </a:xfrm>
-          <a:prstGeom prst="rect">
-            <a:avLst/>
-          </a:prstGeom>
-          <a:noFill/>
-        </p:spPr>
-      </p:pic>
-    </p:spTree>
-  </p:cSld>
-  <p:clrMapOvr>
-    <a:masterClrMapping/>
-  </p:clrMapOvr>
-</p:sld>
-</file>
-
-<file path=ppt/slides/slide37.xml><?xml version="1.0" encoding="utf-8"?>
-<p:sld xmlns:a="http://schemas.openxmlformats.org/drawingml/2006/main" xmlns:r="http://schemas.openxmlformats.org/officeDocument/2006/relationships" xmlns:p="http://schemas.openxmlformats.org/presentationml/2006/main">
-  <p:cSld>
-    <p:spTree>
-      <p:nvGrpSpPr>
-        <p:cNvPr id="1" name=""/>
-        <p:cNvGrpSpPr/>
-        <p:nvPr/>
-      </p:nvGrpSpPr>
-      <p:grpSpPr>
-        <a:xfrm>
-          <a:off x="0" y="0"/>
-          <a:ext cx="0" cy="0"/>
-          <a:chOff x="0" y="0"/>
-          <a:chExt cx="0" cy="0"/>
-        </a:xfrm>
-      </p:grpSpPr>
-      <p:sp>
-        <p:nvSpPr>
-          <p:cNvPr id="2" name="Title 1"/>
-          <p:cNvSpPr>
-            <a:spLocks noGrp="1"/>
-          </p:cNvSpPr>
-          <p:nvPr>
-            <p:ph type="title"/>
-          </p:nvPr>
-        </p:nvSpPr>
-        <p:spPr/>
-        <p:txBody>
-          <a:bodyPr/>
-          <a:lstStyle/>
-          <a:p>
-            <a:r>
-              <a:rPr lang="en-US" dirty="0" smtClean="0"/>
-              <a:t>Distributed Cache [3]</a:t>
-            </a:r>
-            <a:endParaRPr lang="en-US" dirty="0"/>
-          </a:p>
-        </p:txBody>
-      </p:sp>
-      <p:sp>
-        <p:nvSpPr>
-          <p:cNvPr id="3" name="Content Placeholder 2"/>
-          <p:cNvSpPr>
-            <a:spLocks noGrp="1"/>
-          </p:cNvSpPr>
-          <p:nvPr>
-            <p:ph idx="1"/>
-          </p:nvPr>
-        </p:nvSpPr>
-        <p:spPr/>
-        <p:txBody>
-          <a:bodyPr/>
-          <a:lstStyle/>
-          <a:p>
-            <a:r>
-              <a:rPr lang="en-US" sz="2400" dirty="0" smtClean="0">
-                <a:hlinkClick r:id="rId2"/>
-              </a:rPr>
-              <a:t>https://github.com/memcached/memcached/wiki</a:t>
-            </a:r>
-            <a:endParaRPr lang="en-US" sz="2400" dirty="0" smtClean="0"/>
-          </a:p>
-          <a:p>
-            <a:r>
-              <a:rPr lang="en-US" sz="2400" dirty="0" smtClean="0">
-                <a:hlinkClick r:id="rId3"/>
-              </a:rPr>
-              <a:t>https://redis.io/docs/getting-started/</a:t>
-            </a:r>
-            <a:endParaRPr lang="en-US" sz="2400" dirty="0" smtClean="0"/>
-          </a:p>
-          <a:p>
-            <a:r>
-              <a:rPr lang="en-US" sz="2400" dirty="0" smtClean="0">
-                <a:hlinkClick r:id="rId4"/>
-              </a:rPr>
-              <a:t>https://codeburst.io/redis-what-and-why-d52b6829813</a:t>
-            </a:r>
-            <a:endParaRPr lang="en-US" sz="2400" dirty="0" smtClean="0"/>
-          </a:p>
-          <a:p>
-            <a:endParaRPr lang="en-US" sz="2400" dirty="0"/>
-          </a:p>
-        </p:txBody>
-      </p:sp>
-      <p:pic>
-        <p:nvPicPr>
-          <p:cNvPr id="8" name="Picture 6"/>
-          <p:cNvPicPr>
-            <a:picLocks noChangeAspect="1" noChangeArrowheads="1"/>
-          </p:cNvPicPr>
-          <p:nvPr/>
-        </p:nvPicPr>
-        <p:blipFill>
-          <a:blip r:embed="rId5" cstate="print"/>
-          <a:srcRect/>
-          <a:stretch>
-            <a:fillRect/>
-          </a:stretch>
-        </p:blipFill>
-        <p:spPr bwMode="auto">
-          <a:xfrm>
-            <a:off x="2667000" y="3162300"/>
-            <a:ext cx="3954780" cy="3314700"/>
-          </a:xfrm>
-          <a:prstGeom prst="rect">
-            <a:avLst/>
-          </a:prstGeom>
-          <a:noFill/>
-          <a:ln w="9525">
-            <a:noFill/>
-            <a:miter lim="800000"/>
-            <a:headEnd/>
-            <a:tailEnd/>
-          </a:ln>
-        </p:spPr>
-      </p:pic>
-    </p:spTree>
-  </p:cSld>
-  <p:clrMapOvr>
-    <a:masterClrMapping/>
-  </p:clrMapOvr>
-</p:sld>
-</file>
-
-<file path=ppt/slides/slide38.xml><?xml version="1.0" encoding="utf-8"?>
-<p:sld xmlns:a="http://schemas.openxmlformats.org/drawingml/2006/main" xmlns:r="http://schemas.openxmlformats.org/officeDocument/2006/relationships" xmlns:p="http://schemas.openxmlformats.org/presentationml/2006/main">
-  <p:cSld>
-    <p:spTree>
-      <p:nvGrpSpPr>
-        <p:cNvPr id="1" name=""/>
-        <p:cNvGrpSpPr/>
-        <p:nvPr/>
-      </p:nvGrpSpPr>
-      <p:grpSpPr>
-        <a:xfrm>
-          <a:off x="0" y="0"/>
-          <a:ext cx="0" cy="0"/>
-          <a:chOff x="0" y="0"/>
-          <a:chExt cx="0" cy="0"/>
-        </a:xfrm>
-      </p:grpSpPr>
-      <p:pic>
-        <p:nvPicPr>
-          <p:cNvPr id="4" name="Picture 2" descr="https://lh3.ggpht.com/1IfZLL2QDSjZ0wS7sUhaMlsAOS8BBzdR3wZ1WawgRn7KZAM8nEVZYMOUM-lqQb0ikIzp=w300"/>
-          <p:cNvPicPr>
-            <a:picLocks noChangeAspect="1" noChangeArrowheads="1"/>
-          </p:cNvPicPr>
-          <p:nvPr/>
-        </p:nvPicPr>
-        <p:blipFill>
-          <a:blip r:embed="rId2" cstate="print"/>
-          <a:srcRect/>
-          <a:stretch>
-            <a:fillRect/>
-          </a:stretch>
-        </p:blipFill>
-        <p:spPr bwMode="auto">
-          <a:xfrm>
-            <a:off x="3276600" y="1905000"/>
-            <a:ext cx="2857500" cy="2857500"/>
-          </a:xfrm>
-          <a:prstGeom prst="rect">
-            <a:avLst/>
-          </a:prstGeom>
-          <a:noFill/>
-        </p:spPr>
-      </p:pic>
-    </p:spTree>
-  </p:cSld>
-  <p:clrMapOvr>
-    <a:masterClrMapping/>
-  </p:clrMapOvr>
-</p:sld>
-</file>
-
-<file path=ppt/slides/slide39.xml><?xml version="1.0" encoding="utf-8"?>
-<p:sld xmlns:a="http://schemas.openxmlformats.org/drawingml/2006/main" xmlns:r="http://schemas.openxmlformats.org/officeDocument/2006/relationships" xmlns:p="http://schemas.openxmlformats.org/presentationml/2006/main">
-  <p:cSld>
-    <p:spTree>
-      <p:nvGrpSpPr>
-        <p:cNvPr id="1" name=""/>
-        <p:cNvGrpSpPr/>
-        <p:nvPr/>
-      </p:nvGrpSpPr>
-      <p:grpSpPr>
-        <a:xfrm>
-          <a:off x="0" y="0"/>
-          <a:ext cx="0" cy="0"/>
-          <a:chOff x="0" y="0"/>
-          <a:chExt cx="0" cy="0"/>
-        </a:xfrm>
-      </p:grpSpPr>
-      <p:sp>
-        <p:nvSpPr>
-          <p:cNvPr id="2" name="Title 1"/>
-          <p:cNvSpPr>
-            <a:spLocks noGrp="1"/>
-          </p:cNvSpPr>
-          <p:nvPr>
-            <p:ph type="title"/>
-          </p:nvPr>
-        </p:nvSpPr>
-        <p:spPr/>
-        <p:txBody>
-          <a:bodyPr/>
-          <a:lstStyle/>
-          <a:p>
-            <a:r>
-              <a:rPr lang="en-US" dirty="0" smtClean="0"/>
-              <a:t>Scaling Out File Server</a:t>
-            </a:r>
-            <a:endParaRPr lang="en-US" dirty="0"/>
-          </a:p>
-        </p:txBody>
-      </p:sp>
-      <p:sp>
-        <p:nvSpPr>
-          <p:cNvPr id="3" name="Content Placeholder 2"/>
-          <p:cNvSpPr>
-            <a:spLocks noGrp="1"/>
-          </p:cNvSpPr>
-          <p:nvPr>
-            <p:ph idx="1"/>
-          </p:nvPr>
-        </p:nvSpPr>
-        <p:spPr/>
-        <p:txBody>
-          <a:bodyPr/>
-          <a:lstStyle/>
-          <a:p>
-            <a:r>
-              <a:rPr lang="en-US" sz="2200" dirty="0" smtClean="0">
-                <a:hlinkClick r:id="rId2"/>
-              </a:rPr>
-              <a:t>https://www.altaro.com/hyper-v/scale-out-file-server-hyper-v/</a:t>
-            </a:r>
-            <a:endParaRPr lang="en-US" sz="2200" dirty="0" smtClean="0"/>
-          </a:p>
-        </p:txBody>
-      </p:sp>
-      <p:pic>
-        <p:nvPicPr>
-          <p:cNvPr id="4" name="Picture 5"/>
-          <p:cNvPicPr>
-            <a:picLocks noChangeAspect="1" noChangeArrowheads="1"/>
-          </p:cNvPicPr>
-          <p:nvPr/>
-        </p:nvPicPr>
-        <p:blipFill>
-          <a:blip r:embed="rId3" cstate="print"/>
-          <a:srcRect/>
-          <a:stretch>
-            <a:fillRect/>
-          </a:stretch>
-        </p:blipFill>
-        <p:spPr bwMode="auto">
-          <a:xfrm>
-            <a:off x="2743200" y="2362200"/>
-            <a:ext cx="3825240" cy="3634740"/>
-          </a:xfrm>
-          <a:prstGeom prst="rect">
-            <a:avLst/>
-          </a:prstGeom>
-          <a:noFill/>
-          <a:ln w="9525">
-            <a:noFill/>
-            <a:miter lim="800000"/>
-            <a:headEnd/>
-            <a:tailEnd/>
-          </a:ln>
-        </p:spPr>
-      </p:pic>
-    </p:spTree>
-  </p:cSld>
-  <p:clrMapOvr>
-    <a:masterClrMapping/>
-  </p:clrMapOvr>
-</p:sld>
-</file>
-
-<file path=ppt/slides/slide4.xml><?xml version="1.0" encoding="utf-8"?>
-<p:sld xmlns:a="http://schemas.openxmlformats.org/drawingml/2006/main" xmlns:r="http://schemas.openxmlformats.org/officeDocument/2006/relationships" xmlns:p="http://schemas.openxmlformats.org/presentationml/2006/main">
-  <p:cSld>
-    <p:spTree>
-      <p:nvGrpSpPr>
-        <p:cNvPr id="1" name=""/>
-        <p:cNvGrpSpPr/>
-        <p:nvPr/>
-      </p:nvGrpSpPr>
-      <p:grpSpPr>
-        <a:xfrm>
-          <a:off x="0" y="0"/>
-          <a:ext cx="0" cy="0"/>
-          <a:chOff x="0" y="0"/>
-          <a:chExt cx="0" cy="0"/>
-        </a:xfrm>
-      </p:grpSpPr>
-      <p:sp>
-        <p:nvSpPr>
-          <p:cNvPr id="2" name="Title 1"/>
-          <p:cNvSpPr>
-            <a:spLocks noGrp="1"/>
-          </p:cNvSpPr>
-          <p:nvPr>
-            <p:ph type="title"/>
-          </p:nvPr>
-        </p:nvSpPr>
-        <p:spPr/>
-        <p:txBody>
-          <a:bodyPr/>
-          <a:lstStyle/>
-          <a:p>
-            <a:r>
-              <a:rPr lang="en-US" dirty="0" smtClean="0"/>
-              <a:t>References</a:t>
-            </a:r>
-            <a:endParaRPr lang="en-US" dirty="0"/>
-          </a:p>
-        </p:txBody>
-      </p:sp>
-      <p:sp>
-        <p:nvSpPr>
-          <p:cNvPr id="3" name="Content Placeholder 2"/>
-          <p:cNvSpPr>
-            <a:spLocks noGrp="1"/>
-          </p:cNvSpPr>
-          <p:nvPr>
-            <p:ph idx="1"/>
-          </p:nvPr>
-        </p:nvSpPr>
-        <p:spPr>
-          <a:xfrm>
-            <a:off x="457200" y="1600200"/>
-            <a:ext cx="5867400" cy="4724400"/>
-          </a:xfrm>
-        </p:spPr>
-        <p:txBody>
-          <a:bodyPr/>
-          <a:lstStyle/>
-          <a:p>
-            <a:pPr>
-              <a:buFont typeface="+mj-lt"/>
-              <a:buAutoNum type="arabicPeriod"/>
-            </a:pPr>
-            <a:r>
-              <a:rPr lang="en-US" sz="2400" dirty="0" smtClean="0"/>
-              <a:t>Bill Wilder (2012). Cloud Architecture Patterns: Using Microsoft Azure. O'Reilly Media.</a:t>
-            </a:r>
-          </a:p>
-          <a:p>
-            <a:pPr>
-              <a:buFont typeface="+mj-lt"/>
-              <a:buAutoNum type="arabicPeriod"/>
-            </a:pPr>
-            <a:r>
-              <a:rPr lang="en-US" sz="2400" dirty="0" smtClean="0"/>
-              <a:t>Frederick Chong and </a:t>
-            </a:r>
-            <a:r>
-              <a:rPr lang="en-US" sz="2400" dirty="0" err="1" smtClean="0"/>
-              <a:t>Gianpaolo</a:t>
-            </a:r>
-            <a:r>
-              <a:rPr lang="en-US" sz="2400" dirty="0" smtClean="0"/>
-              <a:t> </a:t>
-            </a:r>
-            <a:r>
-              <a:rPr lang="en-US" sz="2400" dirty="0" err="1" smtClean="0"/>
-              <a:t>Carraro</a:t>
-            </a:r>
-            <a:r>
-              <a:rPr lang="en-US" sz="2400" dirty="0" smtClean="0"/>
-              <a:t> (2006). Architecture Strategies For Catching The Long Tail.</a:t>
-            </a:r>
-          </a:p>
-          <a:p>
-            <a:pPr>
-              <a:buFont typeface="+mj-lt"/>
-              <a:buAutoNum type="arabicPeriod"/>
-            </a:pPr>
-            <a:r>
-              <a:rPr lang="en-US" sz="2400" dirty="0" smtClean="0"/>
-              <a:t>Ahmed </a:t>
-            </a:r>
-            <a:r>
-              <a:rPr lang="en-US" sz="2400" dirty="0" err="1" smtClean="0"/>
-              <a:t>Soliman</a:t>
-            </a:r>
-            <a:r>
-              <a:rPr lang="en-US" sz="2400" dirty="0" smtClean="0"/>
-              <a:t> (2013). Getting Started with </a:t>
-            </a:r>
-            <a:r>
-              <a:rPr lang="en-US" sz="2400" dirty="0" err="1" smtClean="0"/>
-              <a:t>Memcached</a:t>
-            </a:r>
-            <a:r>
-              <a:rPr lang="en-US" sz="2400" dirty="0" smtClean="0"/>
-              <a:t>. </a:t>
-            </a:r>
-            <a:r>
-              <a:rPr lang="en-US" sz="2400" dirty="0" err="1" smtClean="0"/>
-              <a:t>Packt</a:t>
-            </a:r>
-            <a:r>
-              <a:rPr lang="en-US" sz="2400" dirty="0" smtClean="0"/>
-              <a:t> Publishing.</a:t>
-            </a:r>
-          </a:p>
-        </p:txBody>
-      </p:sp>
-      <p:pic>
-        <p:nvPicPr>
-          <p:cNvPr id="4" name="Picture 4" descr="http://2.bp.blogspot.com/-FqRM_5NQE6Q/TaSdzyWfvtI/AAAAAAAAAFg/C_2LDJWJOx4/s1600/books-pile.jpg"/>
-          <p:cNvPicPr>
-            <a:picLocks noChangeAspect="1" noChangeArrowheads="1"/>
-          </p:cNvPicPr>
-          <p:nvPr/>
-        </p:nvPicPr>
-        <p:blipFill>
-          <a:blip r:embed="rId2" cstate="print"/>
-          <a:srcRect/>
-          <a:stretch>
-            <a:fillRect/>
-          </a:stretch>
-        </p:blipFill>
-        <p:spPr bwMode="auto">
-          <a:xfrm>
-            <a:off x="6248400" y="1676400"/>
-            <a:ext cx="2724150" cy="4133850"/>
-          </a:xfrm>
-          <a:prstGeom prst="rect">
-            <a:avLst/>
-          </a:prstGeom>
-          <a:noFill/>
-        </p:spPr>
-      </p:pic>
-    </p:spTree>
-  </p:cSld>
-  <p:clrMapOvr>
-    <a:masterClrMapping/>
-  </p:clrMapOvr>
-  <p:timing>
-    <p:tnLst>
-      <p:par>
-        <p:cTn id="1" dur="indefinite" restart="never" nodeType="tmRoot"/>
-      </p:par>
-    </p:tnLst>
-  </p:timing>
-</p:sld>
-</file>
-
-<file path=ppt/slides/slide40.xml><?xml version="1.0" encoding="utf-8"?>
-<p:sld xmlns:a="http://schemas.openxmlformats.org/drawingml/2006/main" xmlns:r="http://schemas.openxmlformats.org/officeDocument/2006/relationships" xmlns:p="http://schemas.openxmlformats.org/presentationml/2006/main">
-  <p:cSld>
-    <p:spTree>
-      <p:nvGrpSpPr>
-        <p:cNvPr id="1" name=""/>
-        <p:cNvGrpSpPr/>
-        <p:nvPr/>
-      </p:nvGrpSpPr>
-      <p:grpSpPr>
-        <a:xfrm>
-          <a:off x="0" y="0"/>
-          <a:ext cx="0" cy="0"/>
-          <a:chOff x="0" y="0"/>
-          <a:chExt cx="0" cy="0"/>
-        </a:xfrm>
-      </p:grpSpPr>
-      <p:pic>
-        <p:nvPicPr>
-          <p:cNvPr id="4" name="Picture 2" descr="https://lh3.ggpht.com/1IfZLL2QDSjZ0wS7sUhaMlsAOS8BBzdR3wZ1WawgRn7KZAM8nEVZYMOUM-lqQb0ikIzp=w300"/>
-          <p:cNvPicPr>
-            <a:picLocks noChangeAspect="1" noChangeArrowheads="1"/>
-          </p:cNvPicPr>
-          <p:nvPr/>
-        </p:nvPicPr>
-        <p:blipFill>
-          <a:blip r:embed="rId2" cstate="print"/>
-          <a:srcRect/>
-          <a:stretch>
-            <a:fillRect/>
-          </a:stretch>
-        </p:blipFill>
-        <p:spPr bwMode="auto">
-          <a:xfrm>
-            <a:off x="3276600" y="1905000"/>
-            <a:ext cx="2857500" cy="2857500"/>
-          </a:xfrm>
-          <a:prstGeom prst="rect">
-            <a:avLst/>
-          </a:prstGeom>
-          <a:noFill/>
-        </p:spPr>
-      </p:pic>
-    </p:spTree>
-  </p:cSld>
-  <p:clrMapOvr>
-    <a:masterClrMapping/>
-  </p:clrMapOvr>
-</p:sld>
-</file>
-
-<file path=ppt/slides/slide41.xml><?xml version="1.0" encoding="utf-8"?>
-<p:sld xmlns:a="http://schemas.openxmlformats.org/drawingml/2006/main" xmlns:r="http://schemas.openxmlformats.org/officeDocument/2006/relationships" xmlns:p="http://schemas.openxmlformats.org/presentationml/2006/main">
-  <p:cSld>
-    <p:spTree>
-      <p:nvGrpSpPr>
-        <p:cNvPr id="1" name=""/>
-        <p:cNvGrpSpPr/>
-        <p:nvPr/>
-      </p:nvGrpSpPr>
-      <p:grpSpPr>
-        <a:xfrm>
-          <a:off x="0" y="0"/>
-          <a:ext cx="0" cy="0"/>
-          <a:chOff x="0" y="0"/>
-          <a:chExt cx="0" cy="0"/>
-        </a:xfrm>
-      </p:grpSpPr>
       <p:pic>
         <p:nvPicPr>
           <p:cNvPr id="4" name="Picture 2" descr="https://img.haikudeck.com/mg/C42A8FE8-C585-4360-984E-C8FC75522987.jpg"/>
@@ -8763,7 +7481,7 @@
 </p:sld>
 </file>
 
-<file path=ppt/slides/slide42.xml><?xml version="1.0" encoding="utf-8"?>
+<file path=ppt/slides/slide31.xml><?xml version="1.0" encoding="utf-8"?>
 <p:sld xmlns:a="http://schemas.openxmlformats.org/drawingml/2006/main" xmlns:r="http://schemas.openxmlformats.org/officeDocument/2006/relationships" xmlns:p="http://schemas.openxmlformats.org/presentationml/2006/main">
   <p:cSld>
     <p:spTree>
@@ -8871,7 +7589,7 @@
 </p:sld>
 </file>
 
-<file path=ppt/slides/slide43.xml><?xml version="1.0" encoding="utf-8"?>
+<file path=ppt/slides/slide32.xml><?xml version="1.0" encoding="utf-8"?>
 <p:sld xmlns:a="http://schemas.openxmlformats.org/drawingml/2006/main" xmlns:r="http://schemas.openxmlformats.org/officeDocument/2006/relationships" xmlns:p="http://schemas.openxmlformats.org/presentationml/2006/main">
   <p:cSld>
     <p:spTree>
@@ -9057,7 +7775,7 @@
 </p:sld>
 </file>
 
-<file path=ppt/slides/slide44.xml><?xml version="1.0" encoding="utf-8"?>
+<file path=ppt/slides/slide33.xml><?xml version="1.0" encoding="utf-8"?>
 <p:sld xmlns:a="http://schemas.openxmlformats.org/drawingml/2006/main" xmlns:r="http://schemas.openxmlformats.org/officeDocument/2006/relationships" xmlns:p="http://schemas.openxmlformats.org/presentationml/2006/main">
   <p:cSld>
     <p:spTree>
@@ -9223,7 +7941,7 @@
 </p:sld>
 </file>
 
-<file path=ppt/slides/slide45.xml><?xml version="1.0" encoding="utf-8"?>
+<file path=ppt/slides/slide34.xml><?xml version="1.0" encoding="utf-8"?>
 <p:sld xmlns:a="http://schemas.openxmlformats.org/drawingml/2006/main" xmlns:r="http://schemas.openxmlformats.org/officeDocument/2006/relationships" xmlns:p="http://schemas.openxmlformats.org/presentationml/2006/main">
   <p:cSld>
     <p:spTree>
@@ -9398,7 +8116,7 @@
 </p:sld>
 </file>
 
-<file path=ppt/slides/slide46.xml><?xml version="1.0" encoding="utf-8"?>
+<file path=ppt/slides/slide35.xml><?xml version="1.0" encoding="utf-8"?>
 <p:sld xmlns:a="http://schemas.openxmlformats.org/drawingml/2006/main" xmlns:r="http://schemas.openxmlformats.org/officeDocument/2006/relationships" xmlns:p="http://schemas.openxmlformats.org/presentationml/2006/main">
   <p:cSld>
     <p:spTree>
@@ -9710,7 +8428,7 @@
 </p:sld>
 </file>
 
-<file path=ppt/slides/slide47.xml><?xml version="1.0" encoding="utf-8"?>
+<file path=ppt/slides/slide36.xml><?xml version="1.0" encoding="utf-8"?>
 <p:sld xmlns:a="http://schemas.openxmlformats.org/drawingml/2006/main" xmlns:r="http://schemas.openxmlformats.org/officeDocument/2006/relationships" xmlns:p="http://schemas.openxmlformats.org/presentationml/2006/main">
   <p:cSld>
     <p:spTree>
@@ -9916,7 +8634,7 @@
 </p:sld>
 </file>
 
-<file path=ppt/slides/slide48.xml><?xml version="1.0" encoding="utf-8"?>
+<file path=ppt/slides/slide37.xml><?xml version="1.0" encoding="utf-8"?>
 <p:sld xmlns:a="http://schemas.openxmlformats.org/drawingml/2006/main" xmlns:r="http://schemas.openxmlformats.org/officeDocument/2006/relationships" xmlns:p="http://schemas.openxmlformats.org/presentationml/2006/main">
   <p:cSld>
     <p:spTree>
@@ -10046,7 +8764,7 @@
 </p:sld>
 </file>
 
-<file path=ppt/slides/slide49.xml><?xml version="1.0" encoding="utf-8"?>
+<file path=ppt/slides/slide38.xml><?xml version="1.0" encoding="utf-8"?>
 <p:sld xmlns:a="http://schemas.openxmlformats.org/drawingml/2006/main" xmlns:r="http://schemas.openxmlformats.org/officeDocument/2006/relationships" xmlns:p="http://schemas.openxmlformats.org/presentationml/2006/main">
   <p:cSld>
     <p:spTree>
@@ -10163,178 +8881,7 @@
 </p:sld>
 </file>
 
-<file path=ppt/slides/slide5.xml><?xml version="1.0" encoding="utf-8"?>
-<p:sld xmlns:a="http://schemas.openxmlformats.org/drawingml/2006/main" xmlns:r="http://schemas.openxmlformats.org/officeDocument/2006/relationships" xmlns:p="http://schemas.openxmlformats.org/presentationml/2006/main">
-  <p:cSld>
-    <p:spTree>
-      <p:nvGrpSpPr>
-        <p:cNvPr id="1" name=""/>
-        <p:cNvGrpSpPr/>
-        <p:nvPr/>
-      </p:nvGrpSpPr>
-      <p:grpSpPr>
-        <a:xfrm>
-          <a:off x="0" y="0"/>
-          <a:ext cx="0" cy="0"/>
-          <a:chOff x="0" y="0"/>
-          <a:chExt cx="0" cy="0"/>
-        </a:xfrm>
-      </p:grpSpPr>
-      <p:sp>
-        <p:nvSpPr>
-          <p:cNvPr id="2" name="Title 1"/>
-          <p:cNvSpPr>
-            <a:spLocks noGrp="1"/>
-          </p:cNvSpPr>
-          <p:nvPr>
-            <p:ph type="title"/>
-          </p:nvPr>
-        </p:nvSpPr>
-        <p:spPr/>
-        <p:txBody>
-          <a:bodyPr/>
-          <a:lstStyle/>
-          <a:p>
-            <a:r>
-              <a:rPr lang="en-US" dirty="0" smtClean="0"/>
-              <a:t>Scalability [1]</a:t>
-            </a:r>
-            <a:endParaRPr lang="en-US" dirty="0"/>
-          </a:p>
-        </p:txBody>
-      </p:sp>
-      <p:pic>
-        <p:nvPicPr>
-          <p:cNvPr id="98306" name="Picture 2" descr="http://www.the4thmarketeer.com/wp-content/uploads/2011/09/scalabilty.jpg"/>
-          <p:cNvPicPr>
-            <a:picLocks noChangeAspect="1" noChangeArrowheads="1"/>
-          </p:cNvPicPr>
-          <p:nvPr/>
-        </p:nvPicPr>
-        <p:blipFill>
-          <a:blip r:embed="rId2" cstate="print"/>
-          <a:srcRect/>
-          <a:stretch>
-            <a:fillRect/>
-          </a:stretch>
-        </p:blipFill>
-        <p:spPr bwMode="auto">
-          <a:xfrm>
-            <a:off x="76200" y="2286000"/>
-            <a:ext cx="2488790" cy="2057400"/>
-          </a:xfrm>
-          <a:prstGeom prst="rect">
-            <a:avLst/>
-          </a:prstGeom>
-          <a:noFill/>
-        </p:spPr>
-      </p:pic>
-      <p:sp>
-        <p:nvSpPr>
-          <p:cNvPr id="3" name="Content Placeholder 2"/>
-          <p:cNvSpPr>
-            <a:spLocks noGrp="1"/>
-          </p:cNvSpPr>
-          <p:nvPr>
-            <p:ph idx="1"/>
-          </p:nvPr>
-        </p:nvSpPr>
-        <p:spPr>
-          <a:xfrm>
-            <a:off x="2514600" y="1600200"/>
-            <a:ext cx="6400800" cy="4525963"/>
-          </a:xfrm>
-        </p:spPr>
-        <p:txBody>
-          <a:bodyPr>
-            <a:noAutofit/>
-          </a:bodyPr>
-          <a:lstStyle/>
-          <a:p>
-            <a:r>
-              <a:rPr lang="en-US" sz="2800" i="1" dirty="0" smtClean="0">
-                <a:solidFill>
-                  <a:srgbClr val="C00000"/>
-                </a:solidFill>
-              </a:rPr>
-              <a:t>Scaling</a:t>
-            </a:r>
-            <a:r>
-              <a:rPr lang="en-US" sz="2800" dirty="0" smtClean="0"/>
-              <a:t> is about </a:t>
-            </a:r>
-            <a:r>
-              <a:rPr lang="en-US" sz="2800" u="sng" dirty="0" smtClean="0"/>
-              <a:t>allocating resources</a:t>
-            </a:r>
-            <a:r>
-              <a:rPr lang="en-US" sz="2800" dirty="0" smtClean="0"/>
-              <a:t> for an application and managing those resources efficiently to minimize contention.</a:t>
-            </a:r>
-          </a:p>
-          <a:p>
-            <a:r>
-              <a:rPr lang="en-US" sz="2800" dirty="0" smtClean="0"/>
-              <a:t>The </a:t>
-            </a:r>
-            <a:r>
-              <a:rPr lang="en-US" sz="2800" i="1" dirty="0" smtClean="0">
-                <a:solidFill>
-                  <a:srgbClr val="C00000"/>
-                </a:solidFill>
-              </a:rPr>
-              <a:t>scalability</a:t>
-            </a:r>
-            <a:r>
-              <a:rPr lang="en-US" sz="2800" dirty="0" smtClean="0"/>
-              <a:t> of an application is a measure of </a:t>
-            </a:r>
-            <a:r>
-              <a:rPr lang="en-US" sz="2800" u="sng" dirty="0" smtClean="0"/>
-              <a:t>the number of users</a:t>
-            </a:r>
-            <a:r>
-              <a:rPr lang="en-US" sz="2800" dirty="0" smtClean="0"/>
-              <a:t> it can effectively support at the same time.</a:t>
-            </a:r>
-          </a:p>
-          <a:p>
-            <a:r>
-              <a:rPr lang="en-US" sz="2800" dirty="0" smtClean="0"/>
-              <a:t>The point at which an application </a:t>
-            </a:r>
-            <a:r>
-              <a:rPr lang="en-US" sz="2800" i="1" dirty="0" smtClean="0">
-                <a:solidFill>
-                  <a:srgbClr val="C00000"/>
-                </a:solidFill>
-              </a:rPr>
-              <a:t>cannot handle </a:t>
-            </a:r>
-            <a:r>
-              <a:rPr lang="en-US" sz="2800" dirty="0" smtClean="0"/>
-              <a:t>additional users effectively is the </a:t>
-            </a:r>
-            <a:r>
-              <a:rPr lang="en-US" sz="2800" u="sng" dirty="0" smtClean="0"/>
-              <a:t>limit</a:t>
-            </a:r>
-            <a:r>
-              <a:rPr lang="en-US" sz="2800" dirty="0" smtClean="0"/>
-              <a:t> of its scalability.</a:t>
-            </a:r>
-          </a:p>
-        </p:txBody>
-      </p:sp>
-    </p:spTree>
-  </p:cSld>
-  <p:clrMapOvr>
-    <a:masterClrMapping/>
-  </p:clrMapOvr>
-</p:sld>
-</file>
-
-<file path=ppt/slides/slide50.xml><?xml version="1.0" encoding="utf-8"?>
+<file path=ppt/slides/slide39.xml><?xml version="1.0" encoding="utf-8"?>
 <p:sld xmlns:a="http://schemas.openxmlformats.org/drawingml/2006/main" xmlns:r="http://schemas.openxmlformats.org/officeDocument/2006/relationships" xmlns:p="http://schemas.openxmlformats.org/presentationml/2006/main">
   <p:cSld>
     <p:spTree>
@@ -10450,7 +8997,7 @@
 </p:sld>
 </file>
 
-<file path=ppt/slides/slide51.xml><?xml version="1.0" encoding="utf-8"?>
+<file path=ppt/slides/slide4.xml><?xml version="1.0" encoding="utf-8"?>
 <p:sld xmlns:a="http://schemas.openxmlformats.org/drawingml/2006/main" xmlns:r="http://schemas.openxmlformats.org/officeDocument/2006/relationships" xmlns:p="http://schemas.openxmlformats.org/presentationml/2006/main">
   <p:cSld>
     <p:spTree>
@@ -10479,6 +9026,178 @@
         </p:nvSpPr>
         <p:spPr/>
         <p:txBody>
+          <a:bodyPr/>
+          <a:lstStyle/>
+          <a:p>
+            <a:r>
+              <a:rPr lang="en-US" dirty="0" smtClean="0"/>
+              <a:t>References</a:t>
+            </a:r>
+            <a:endParaRPr lang="en-US" dirty="0"/>
+          </a:p>
+        </p:txBody>
+      </p:sp>
+      <p:sp>
+        <p:nvSpPr>
+          <p:cNvPr id="3" name="Content Placeholder 2"/>
+          <p:cNvSpPr>
+            <a:spLocks noGrp="1"/>
+          </p:cNvSpPr>
+          <p:nvPr>
+            <p:ph idx="1"/>
+          </p:nvPr>
+        </p:nvSpPr>
+        <p:spPr>
+          <a:xfrm>
+            <a:off x="457200" y="1600200"/>
+            <a:ext cx="5867400" cy="4724400"/>
+          </a:xfrm>
+        </p:spPr>
+        <p:txBody>
+          <a:bodyPr/>
+          <a:lstStyle/>
+          <a:p>
+            <a:pPr>
+              <a:buFont typeface="+mj-lt"/>
+              <a:buAutoNum type="arabicPeriod"/>
+            </a:pPr>
+            <a:r>
+              <a:rPr lang="en-US" sz="2400" dirty="0" smtClean="0"/>
+              <a:t>Bill Wilder (2012). Cloud Architecture Patterns: Using Microsoft Azure. O'Reilly Media.</a:t>
+            </a:r>
+          </a:p>
+          <a:p>
+            <a:pPr>
+              <a:buFont typeface="+mj-lt"/>
+              <a:buAutoNum type="arabicPeriod"/>
+            </a:pPr>
+            <a:r>
+              <a:rPr lang="en-US" sz="2400" dirty="0" smtClean="0"/>
+              <a:t>Frederick Chong and </a:t>
+            </a:r>
+            <a:r>
+              <a:rPr lang="en-US" sz="2400" dirty="0" err="1" smtClean="0"/>
+              <a:t>Gianpaolo</a:t>
+            </a:r>
+            <a:r>
+              <a:rPr lang="en-US" sz="2400" dirty="0" smtClean="0"/>
+              <a:t> </a:t>
+            </a:r>
+            <a:r>
+              <a:rPr lang="en-US" sz="2400" dirty="0" err="1" smtClean="0"/>
+              <a:t>Carraro</a:t>
+            </a:r>
+            <a:r>
+              <a:rPr lang="en-US" sz="2400" dirty="0" smtClean="0"/>
+              <a:t> (2006). Architecture Strategies For Catching The Long Tail.</a:t>
+            </a:r>
+          </a:p>
+          <a:p>
+            <a:pPr>
+              <a:buFont typeface="+mj-lt"/>
+              <a:buAutoNum type="arabicPeriod"/>
+            </a:pPr>
+            <a:r>
+              <a:rPr lang="en-US" sz="2400" dirty="0" smtClean="0"/>
+              <a:t>Ahmed </a:t>
+            </a:r>
+            <a:r>
+              <a:rPr lang="en-US" sz="2400" dirty="0" err="1" smtClean="0"/>
+              <a:t>Soliman</a:t>
+            </a:r>
+            <a:r>
+              <a:rPr lang="en-US" sz="2400" dirty="0" smtClean="0"/>
+              <a:t> (2013). Getting Started with </a:t>
+            </a:r>
+            <a:r>
+              <a:rPr lang="en-US" sz="2400" dirty="0" err="1" smtClean="0"/>
+              <a:t>Memcached</a:t>
+            </a:r>
+            <a:r>
+              <a:rPr lang="en-US" sz="2400" dirty="0" smtClean="0"/>
+              <a:t>. </a:t>
+            </a:r>
+            <a:r>
+              <a:rPr lang="en-US" sz="2400" dirty="0" err="1" smtClean="0"/>
+              <a:t>Packt</a:t>
+            </a:r>
+            <a:r>
+              <a:rPr lang="en-US" sz="2400" dirty="0" smtClean="0"/>
+              <a:t> Publishing.</a:t>
+            </a:r>
+          </a:p>
+        </p:txBody>
+      </p:sp>
+      <p:pic>
+        <p:nvPicPr>
+          <p:cNvPr id="4" name="Picture 4" descr="http://2.bp.blogspot.com/-FqRM_5NQE6Q/TaSdzyWfvtI/AAAAAAAAAFg/C_2LDJWJOx4/s1600/books-pile.jpg"/>
+          <p:cNvPicPr>
+            <a:picLocks noChangeAspect="1" noChangeArrowheads="1"/>
+          </p:cNvPicPr>
+          <p:nvPr/>
+        </p:nvPicPr>
+        <p:blipFill>
+          <a:blip r:embed="rId2" cstate="print"/>
+          <a:srcRect/>
+          <a:stretch>
+            <a:fillRect/>
+          </a:stretch>
+        </p:blipFill>
+        <p:spPr bwMode="auto">
+          <a:xfrm>
+            <a:off x="6248400" y="1676400"/>
+            <a:ext cx="2724150" cy="4133850"/>
+          </a:xfrm>
+          <a:prstGeom prst="rect">
+            <a:avLst/>
+          </a:prstGeom>
+          <a:noFill/>
+        </p:spPr>
+      </p:pic>
+    </p:spTree>
+  </p:cSld>
+  <p:clrMapOvr>
+    <a:masterClrMapping/>
+  </p:clrMapOvr>
+  <p:timing>
+    <p:tnLst>
+      <p:par>
+        <p:cTn id="1" dur="indefinite" restart="never" nodeType="tmRoot"/>
+      </p:par>
+    </p:tnLst>
+  </p:timing>
+</p:sld>
+</file>
+
+<file path=ppt/slides/slide40.xml><?xml version="1.0" encoding="utf-8"?>
+<p:sld xmlns:a="http://schemas.openxmlformats.org/drawingml/2006/main" xmlns:r="http://schemas.openxmlformats.org/officeDocument/2006/relationships" xmlns:p="http://schemas.openxmlformats.org/presentationml/2006/main">
+  <p:cSld>
+    <p:spTree>
+      <p:nvGrpSpPr>
+        <p:cNvPr id="1" name=""/>
+        <p:cNvGrpSpPr/>
+        <p:nvPr/>
+      </p:nvGrpSpPr>
+      <p:grpSpPr>
+        <a:xfrm>
+          <a:off x="0" y="0"/>
+          <a:ext cx="0" cy="0"/>
+          <a:chOff x="0" y="0"/>
+          <a:chExt cx="0" cy="0"/>
+        </a:xfrm>
+      </p:grpSpPr>
+      <p:sp>
+        <p:nvSpPr>
+          <p:cNvPr id="2" name="Title 1"/>
+          <p:cNvSpPr>
+            <a:spLocks noGrp="1"/>
+          </p:cNvSpPr>
+          <p:nvPr>
+            <p:ph type="title"/>
+          </p:nvPr>
+        </p:nvSpPr>
+        <p:spPr/>
+        <p:txBody>
           <a:bodyPr>
             <a:normAutofit/>
           </a:bodyPr>
@@ -10624,7 +9343,7 @@
 </p:sld>
 </file>
 
-<file path=ppt/slides/slide52.xml><?xml version="1.0" encoding="utf-8"?>
+<file path=ppt/slides/slide41.xml><?xml version="1.0" encoding="utf-8"?>
 <p:sld xmlns:a="http://schemas.openxmlformats.org/drawingml/2006/main" xmlns:r="http://schemas.openxmlformats.org/officeDocument/2006/relationships" xmlns:p="http://schemas.openxmlformats.org/presentationml/2006/main">
   <p:cSld>
     <p:spTree>
@@ -10701,6 +9420,177 @@
       </p:par>
     </p:tnLst>
   </p:timing>
+</p:sld>
+</file>
+
+<file path=ppt/slides/slide5.xml><?xml version="1.0" encoding="utf-8"?>
+<p:sld xmlns:a="http://schemas.openxmlformats.org/drawingml/2006/main" xmlns:r="http://schemas.openxmlformats.org/officeDocument/2006/relationships" xmlns:p="http://schemas.openxmlformats.org/presentationml/2006/main">
+  <p:cSld>
+    <p:spTree>
+      <p:nvGrpSpPr>
+        <p:cNvPr id="1" name=""/>
+        <p:cNvGrpSpPr/>
+        <p:nvPr/>
+      </p:nvGrpSpPr>
+      <p:grpSpPr>
+        <a:xfrm>
+          <a:off x="0" y="0"/>
+          <a:ext cx="0" cy="0"/>
+          <a:chOff x="0" y="0"/>
+          <a:chExt cx="0" cy="0"/>
+        </a:xfrm>
+      </p:grpSpPr>
+      <p:sp>
+        <p:nvSpPr>
+          <p:cNvPr id="2" name="Title 1"/>
+          <p:cNvSpPr>
+            <a:spLocks noGrp="1"/>
+          </p:cNvSpPr>
+          <p:nvPr>
+            <p:ph type="title"/>
+          </p:nvPr>
+        </p:nvSpPr>
+        <p:spPr/>
+        <p:txBody>
+          <a:bodyPr/>
+          <a:lstStyle/>
+          <a:p>
+            <a:r>
+              <a:rPr lang="en-US" dirty="0" smtClean="0"/>
+              <a:t>Scalability [1]</a:t>
+            </a:r>
+            <a:endParaRPr lang="en-US" dirty="0"/>
+          </a:p>
+        </p:txBody>
+      </p:sp>
+      <p:pic>
+        <p:nvPicPr>
+          <p:cNvPr id="98306" name="Picture 2" descr="http://www.the4thmarketeer.com/wp-content/uploads/2011/09/scalabilty.jpg"/>
+          <p:cNvPicPr>
+            <a:picLocks noChangeAspect="1" noChangeArrowheads="1"/>
+          </p:cNvPicPr>
+          <p:nvPr/>
+        </p:nvPicPr>
+        <p:blipFill>
+          <a:blip r:embed="rId2" cstate="print"/>
+          <a:srcRect/>
+          <a:stretch>
+            <a:fillRect/>
+          </a:stretch>
+        </p:blipFill>
+        <p:spPr bwMode="auto">
+          <a:xfrm>
+            <a:off x="76200" y="2286000"/>
+            <a:ext cx="2488790" cy="2057400"/>
+          </a:xfrm>
+          <a:prstGeom prst="rect">
+            <a:avLst/>
+          </a:prstGeom>
+          <a:noFill/>
+        </p:spPr>
+      </p:pic>
+      <p:sp>
+        <p:nvSpPr>
+          <p:cNvPr id="3" name="Content Placeholder 2"/>
+          <p:cNvSpPr>
+            <a:spLocks noGrp="1"/>
+          </p:cNvSpPr>
+          <p:nvPr>
+            <p:ph idx="1"/>
+          </p:nvPr>
+        </p:nvSpPr>
+        <p:spPr>
+          <a:xfrm>
+            <a:off x="2514600" y="1600200"/>
+            <a:ext cx="6400800" cy="4525963"/>
+          </a:xfrm>
+        </p:spPr>
+        <p:txBody>
+          <a:bodyPr>
+            <a:noAutofit/>
+          </a:bodyPr>
+          <a:lstStyle/>
+          <a:p>
+            <a:r>
+              <a:rPr lang="en-US" sz="2800" i="1" dirty="0" smtClean="0">
+                <a:solidFill>
+                  <a:srgbClr val="C00000"/>
+                </a:solidFill>
+              </a:rPr>
+              <a:t>Scaling</a:t>
+            </a:r>
+            <a:r>
+              <a:rPr lang="en-US" sz="2800" dirty="0" smtClean="0"/>
+              <a:t> is about </a:t>
+            </a:r>
+            <a:r>
+              <a:rPr lang="en-US" sz="2800" u="sng" dirty="0" smtClean="0"/>
+              <a:t>allocating resources</a:t>
+            </a:r>
+            <a:r>
+              <a:rPr lang="en-US" sz="2800" dirty="0" smtClean="0"/>
+              <a:t> for an application and managing those resources efficiently to minimize contention.</a:t>
+            </a:r>
+          </a:p>
+          <a:p>
+            <a:r>
+              <a:rPr lang="en-US" sz="2800" dirty="0" smtClean="0"/>
+              <a:t>The </a:t>
+            </a:r>
+            <a:r>
+              <a:rPr lang="en-US" sz="2800" i="1" dirty="0" smtClean="0">
+                <a:solidFill>
+                  <a:srgbClr val="C00000"/>
+                </a:solidFill>
+              </a:rPr>
+              <a:t>scalability</a:t>
+            </a:r>
+            <a:r>
+              <a:rPr lang="en-US" sz="2800" dirty="0" smtClean="0"/>
+              <a:t> of an application is a measure of </a:t>
+            </a:r>
+            <a:r>
+              <a:rPr lang="en-US" sz="2800" u="sng" dirty="0" smtClean="0"/>
+              <a:t>the number of users</a:t>
+            </a:r>
+            <a:r>
+              <a:rPr lang="en-US" sz="2800" dirty="0" smtClean="0"/>
+              <a:t> it can effectively support at the same time.</a:t>
+            </a:r>
+          </a:p>
+          <a:p>
+            <a:r>
+              <a:rPr lang="en-US" sz="2800" dirty="0" smtClean="0"/>
+              <a:t>The point at which an application </a:t>
+            </a:r>
+            <a:r>
+              <a:rPr lang="en-US" sz="2800" i="1" dirty="0" smtClean="0">
+                <a:solidFill>
+                  <a:srgbClr val="C00000"/>
+                </a:solidFill>
+              </a:rPr>
+              <a:t>cannot handle </a:t>
+            </a:r>
+            <a:r>
+              <a:rPr lang="en-US" sz="2800" dirty="0" smtClean="0"/>
+              <a:t>additional users effectively is the </a:t>
+            </a:r>
+            <a:r>
+              <a:rPr lang="en-US" sz="2800" u="sng" dirty="0" smtClean="0"/>
+              <a:t>limit</a:t>
+            </a:r>
+            <a:r>
+              <a:rPr lang="en-US" sz="2800" dirty="0" smtClean="0"/>
+              <a:t> of its scalability.</a:t>
+            </a:r>
+          </a:p>
+        </p:txBody>
+      </p:sp>
+    </p:spTree>
+  </p:cSld>
+  <p:clrMapOvr>
+    <a:masterClrMapping/>
+  </p:clrMapOvr>
 </p:sld>
 </file>
 
